--- a/docs/career/Simple_Temp_Tool_Overview_v2.pptx
+++ b/docs/career/Simple_Temp_Tool_Overview_v2.pptx
@@ -18433,7 +18433,7 @@
                 </a:solidFill>
                 <a:latin typeface="游ゴシック"/>
               </a:rPr>
-              <a:t>本ツールの材料費（推定）</a:t>
+              <a:t>本ツール 品目別コスト</a:t>
             </a:r>
           </a:p>
         </p:txBody>
@@ -18448,7 +18448,7 @@
         </p:nvGraphicFramePr>
         <p:xfrm>
           <a:off x="320040" y="1371600"/>
-          <a:ext cx="5303520" cy="2688336"/>
+          <a:ext cx="5303520" cy="2560320"/>
         </p:xfrm>
         <a:graphic>
           <a:graphicData uri="http://schemas.openxmlformats.org/drawingml/2006/table">
@@ -18461,7 +18461,7 @@
                 <a:gridCol w="1371600"/>
                 <a:gridCol w="1280160"/>
               </a:tblGrid>
-              <a:tr h="384048">
+              <a:tr h="365760">
                 <a:tc>
                   <a:txBody>
                     <a:bodyPr/>
@@ -18532,21 +18532,21 @@
                   </a:tcPr>
                 </a:tc>
               </a:tr>
-              <a:tr h="384048">
-                <a:tc>
-                  <a:txBody>
-                    <a:bodyPr/>
-                    <a:lstStyle/>
-                    <a:p>
-                      <a:pPr algn="l"/>
-                      <a:r>
-                        <a:rPr sz="1200" b="0">
-                          <a:solidFill>
-                            <a:srgbClr val="1A1A2E"/>
-                          </a:solidFill>
-                          <a:latin typeface="游ゴシック"/>
-                        </a:rPr>
-                        <a:t>M5Stack Core2</a:t>
+              <a:tr h="365760">
+                <a:tc>
+                  <a:txBody>
+                    <a:bodyPr/>
+                    <a:lstStyle/>
+                    <a:p>
+                      <a:pPr algn="l"/>
+                      <a:r>
+                        <a:rPr sz="1200" b="0">
+                          <a:solidFill>
+                            <a:srgbClr val="1A1A2E"/>
+                          </a:solidFill>
+                          <a:latin typeface="游ゴシック"/>
+                        </a:rPr>
+                        <a:t>M5Stack Basic V2.7</a:t>
                       </a:r>
                     </a:p>
                   </a:txBody>
@@ -18569,7 +18569,7 @@
                           </a:solidFill>
                           <a:latin typeface="游ゴシック"/>
                         </a:rPr>
-                        <a:t>スイッチサイエンス</a:t>
+                        <a:t>Amazon</a:t>
                       </a:r>
                     </a:p>
                   </a:txBody>
@@ -18592,7 +18592,7 @@
                           </a:solidFill>
                           <a:latin typeface="游ゴシック"/>
                         </a:rPr>
-                        <a:t>¥6,600</a:t>
+                        <a:t>¥7,990</a:t>
                       </a:r>
                     </a:p>
                   </a:txBody>
@@ -18603,7 +18603,7 @@
                   </a:tcPr>
                 </a:tc>
               </a:tr>
-              <a:tr h="384048">
+              <a:tr h="365760">
                 <a:tc>
                   <a:txBody>
                     <a:bodyPr/>
@@ -18674,7 +18674,7 @@
                   </a:tcPr>
                 </a:tc>
               </a:tr>
-              <a:tr h="384048">
+              <a:tr h="365760">
                 <a:tc>
                   <a:txBody>
                     <a:bodyPr/>
@@ -18745,7 +18745,7 @@
                   </a:tcPr>
                 </a:tc>
               </a:tr>
-              <a:tr h="384048">
+              <a:tr h="365760">
                 <a:tc>
                   <a:txBody>
                     <a:bodyPr/>
@@ -18816,7 +18816,7 @@
                   </a:tcPr>
                 </a:tc>
               </a:tr>
-              <a:tr h="384048">
+              <a:tr h="365760">
                 <a:tc>
                   <a:txBody>
                     <a:bodyPr/>
@@ -18887,7 +18887,7 @@
                   </a:tcPr>
                 </a:tc>
               </a:tr>
-              <a:tr h="384048">
+              <a:tr h="365760">
                 <a:tc>
                   <a:txBody>
                     <a:bodyPr/>
@@ -18947,7 +18947,7 @@
                           </a:solidFill>
                           <a:latin typeface="游ゴシック"/>
                         </a:rPr>
-                        <a:t>¥9,080</a:t>
+                        <a:t>¥9,570</a:t>
                       </a:r>
                     </a:p>
                   </a:txBody>
@@ -18992,7 +18992,7 @@
                 </a:solidFill>
                 <a:latin typeface="游ゴシック"/>
               </a:rPr>
-              <a:t>市販温度データロガーとの比較（推定）</a:t>
+              <a:t>市販温度ロガーとの価格比較</a:t>
             </a:r>
           </a:p>
         </p:txBody>
@@ -19007,7 +19007,7 @@
         </p:nvGraphicFramePr>
         <p:xfrm>
           <a:off x="5943600" y="1371600"/>
-          <a:ext cx="5925312" cy="2304288"/>
+          <a:ext cx="5925312" cy="1463040"/>
         </p:xfrm>
         <a:graphic>
           <a:graphicData uri="http://schemas.openxmlformats.org/drawingml/2006/table">
@@ -19020,7 +19020,7 @@
                 <a:gridCol w="1993392"/>
                 <a:gridCol w="1371600"/>
               </a:tblGrid>
-              <a:tr h="384048">
+              <a:tr h="365760">
                 <a:tc>
                   <a:txBody>
                     <a:bodyPr/>
@@ -19034,7 +19034,7 @@
                           </a:solidFill>
                           <a:latin typeface="Segoe UI"/>
                         </a:rPr>
-                        <a:t>製品カテゴリ</a:t>
+                        <a:t>カテゴリ</a:t>
                       </a:r>
                     </a:p>
                   </a:txBody>
@@ -19057,7 +19057,7 @@
                           </a:solidFill>
                           <a:latin typeface="Segoe UI"/>
                         </a:rPr>
-                        <a:t>代表製品例</a:t>
+                        <a:t>代表製品</a:t>
                       </a:r>
                     </a:p>
                   </a:txBody>
@@ -19091,7 +19091,7 @@
                   </a:tcPr>
                 </a:tc>
               </a:tr>
-              <a:tr h="384048">
+              <a:tr h="365760">
                 <a:tc>
                   <a:txBody>
                     <a:bodyPr/>
@@ -19151,7 +19151,7 @@
                           </a:solidFill>
                           <a:latin typeface="游ゴシック"/>
                         </a:rPr>
-                        <a:t>約 ¥9,000</a:t>
+                        <a:t>¥9,570</a:t>
                       </a:r>
                     </a:p>
                   </a:txBody>
@@ -19162,21 +19162,21 @@
                   </a:tcPr>
                 </a:tc>
               </a:tr>
-              <a:tr h="384048">
-                <a:tc>
-                  <a:txBody>
-                    <a:bodyPr/>
-                    <a:lstStyle/>
-                    <a:p>
-                      <a:pPr algn="l"/>
-                      <a:r>
-                        <a:rPr sz="1200" b="0">
-                          <a:solidFill>
-                            <a:srgbClr val="1A1A2E"/>
-                          </a:solidFill>
-                          <a:latin typeface="游ゴシック"/>
-                        </a:rPr>
-                        <a:t>汎用 USB ロガー</a:t>
+              <a:tr h="365760">
+                <a:tc>
+                  <a:txBody>
+                    <a:bodyPr/>
+                    <a:lstStyle/>
+                    <a:p>
+                      <a:pPr algn="l"/>
+                      <a:r>
+                        <a:rPr sz="1200" b="0">
+                          <a:solidFill>
+                            <a:srgbClr val="1A1A2E"/>
+                          </a:solidFill>
+                          <a:latin typeface="游ゴシック"/>
+                        </a:rPr>
+                        <a:t>標準製品</a:t>
                       </a:r>
                     </a:p>
                   </a:txBody>
@@ -19199,7 +19199,7 @@
                           </a:solidFill>
                           <a:latin typeface="游ゴシック"/>
                         </a:rPr>
-                        <a:t>各社標準品</a:t>
+                        <a:t>USB データロガー</a:t>
                       </a:r>
                     </a:p>
                   </a:txBody>
@@ -19233,21 +19233,21 @@
                   </a:tcPr>
                 </a:tc>
               </a:tr>
-              <a:tr h="384048">
-                <a:tc>
-                  <a:txBody>
-                    <a:bodyPr/>
-                    <a:lstStyle/>
-                    <a:p>
-                      <a:pPr algn="l"/>
-                      <a:r>
-                        <a:rPr sz="1200" b="0">
-                          <a:solidFill>
-                            <a:srgbClr val="1A1A2E"/>
-                          </a:solidFill>
-                          <a:latin typeface="游ゴシック"/>
-                        </a:rPr>
-                        <a:t>熱電対ハンディロガー</a:t>
+              <a:tr h="365760">
+                <a:tc>
+                  <a:txBody>
+                    <a:bodyPr/>
+                    <a:lstStyle/>
+                    <a:p>
+                      <a:pPr algn="l"/>
+                      <a:r>
+                        <a:rPr sz="1200" b="0">
+                          <a:solidFill>
+                            <a:srgbClr val="1A1A2E"/>
+                          </a:solidFill>
+                          <a:latin typeface="游ゴシック"/>
+                        </a:rPr>
+                        <a:t>プロフェッショナル</a:t>
                       </a:r>
                     </a:p>
                   </a:txBody>
@@ -19270,149 +19270,7 @@
                           </a:solidFill>
                           <a:latin typeface="游ゴシック"/>
                         </a:rPr>
-                        <a:t>HIOKI LR8520 系</a:t>
-                      </a:r>
-                    </a:p>
-                  </a:txBody>
-                  <a:tcPr>
-                    <a:solidFill>
-                      <a:srgbClr val="FFFFFF"/>
-                    </a:solidFill>
-                  </a:tcPr>
-                </a:tc>
-                <a:tc>
-                  <a:txBody>
-                    <a:bodyPr/>
-                    <a:lstStyle/>
-                    <a:p>
-                      <a:pPr algn="l"/>
-                      <a:r>
-                        <a:rPr sz="1200" b="0">
-                          <a:solidFill>
-                            <a:srgbClr val="1A1A2E"/>
-                          </a:solidFill>
-                          <a:latin typeface="游ゴシック"/>
-                        </a:rPr>
-                        <a:t>¥50,000〜¥120,000</a:t>
-                      </a:r>
-                    </a:p>
-                  </a:txBody>
-                  <a:tcPr>
-                    <a:solidFill>
-                      <a:srgbClr val="FFFFFF"/>
-                    </a:solidFill>
-                  </a:tcPr>
-                </a:tc>
-              </a:tr>
-              <a:tr h="384048">
-                <a:tc>
-                  <a:txBody>
-                    <a:bodyPr/>
-                    <a:lstStyle/>
-                    <a:p>
-                      <a:pPr algn="l"/>
-                      <a:r>
-                        <a:rPr sz="1200" b="0">
-                          <a:solidFill>
-                            <a:srgbClr val="1A1A2E"/>
-                          </a:solidFill>
-                          <a:latin typeface="游ゴシック"/>
-                        </a:rPr>
-                        <a:t>熱電対 SD ロガー</a:t>
-                      </a:r>
-                    </a:p>
-                  </a:txBody>
-                  <a:tcPr>
-                    <a:solidFill>
-                      <a:srgbClr val="F4F4F4"/>
-                    </a:solidFill>
-                  </a:tcPr>
-                </a:tc>
-                <a:tc>
-                  <a:txBody>
-                    <a:bodyPr/>
-                    <a:lstStyle/>
-                    <a:p>
-                      <a:pPr algn="l"/>
-                      <a:r>
-                        <a:rPr sz="1200" b="0">
-                          <a:solidFill>
-                            <a:srgbClr val="1A1A2E"/>
-                          </a:solidFill>
-                          <a:latin typeface="游ゴシック"/>
-                        </a:rPr>
-                        <a:t>グラフテック GL240 等</a:t>
-                      </a:r>
-                    </a:p>
-                  </a:txBody>
-                  <a:tcPr>
-                    <a:solidFill>
-                      <a:srgbClr val="F4F4F4"/>
-                    </a:solidFill>
-                  </a:tcPr>
-                </a:tc>
-                <a:tc>
-                  <a:txBody>
-                    <a:bodyPr/>
-                    <a:lstStyle/>
-                    <a:p>
-                      <a:pPr algn="l"/>
-                      <a:r>
-                        <a:rPr sz="1200" b="0">
-                          <a:solidFill>
-                            <a:srgbClr val="1A1A2E"/>
-                          </a:solidFill>
-                          <a:latin typeface="游ゴシック"/>
-                        </a:rPr>
-                        <a:t>¥80,000〜¥150,000</a:t>
-                      </a:r>
-                    </a:p>
-                  </a:txBody>
-                  <a:tcPr>
-                    <a:solidFill>
-                      <a:srgbClr val="F4F4F4"/>
-                    </a:solidFill>
-                  </a:tcPr>
-                </a:tc>
-              </a:tr>
-              <a:tr h="384048">
-                <a:tc>
-                  <a:txBody>
-                    <a:bodyPr/>
-                    <a:lstStyle/>
-                    <a:p>
-                      <a:pPr algn="l"/>
-                      <a:r>
-                        <a:rPr sz="1200" b="0">
-                          <a:solidFill>
-                            <a:srgbClr val="1A1A2E"/>
-                          </a:solidFill>
-                          <a:latin typeface="游ゴシック"/>
-                        </a:rPr>
                         <a:t>産業用データロガー</a:t>
-                      </a:r>
-                    </a:p>
-                  </a:txBody>
-                  <a:tcPr>
-                    <a:solidFill>
-                      <a:srgbClr val="FFFFFF"/>
-                    </a:solidFill>
-                  </a:tcPr>
-                </a:tc>
-                <a:tc>
-                  <a:txBody>
-                    <a:bodyPr/>
-                    <a:lstStyle/>
-                    <a:p>
-                      <a:pPr algn="l"/>
-                      <a:r>
-                        <a:rPr sz="1200" b="0">
-                          <a:solidFill>
-                            <a:srgbClr val="1A1A2E"/>
-                          </a:solidFill>
-                          <a:latin typeface="游ゴシック"/>
-                        </a:rPr>
-                        <a:t>各社産業グレード</a:t>
                       </a:r>
                     </a:p>
                   </a:txBody>
@@ -19458,8 +19316,8 @@
         </p:nvSpPr>
         <p:spPr>
           <a:xfrm>
-            <a:off x="320040" y="3840480"/>
-            <a:ext cx="11521440" cy="1188720"/>
+            <a:off x="320040" y="2743200"/>
+            <a:ext cx="11521440" cy="1280160"/>
           </a:xfrm>
           <a:prstGeom prst="rect">
             <a:avLst/>
@@ -19501,8 +19359,8 @@
         </p:nvSpPr>
         <p:spPr>
           <a:xfrm>
-            <a:off x="457200" y="3931920"/>
-            <a:ext cx="11247120" cy="502920"/>
+            <a:off x="457200" y="2834640"/>
+            <a:ext cx="11247120" cy="548640"/>
           </a:xfrm>
           <a:prstGeom prst="rect">
             <a:avLst/>
@@ -19517,13 +19375,13 @@
           <a:p>
             <a:pPr algn="ctr"/>
             <a:r>
-              <a:rPr sz="2000" b="1" i="0">
+              <a:rPr sz="2200" b="1" i="0">
                 <a:solidFill>
                   <a:srgbClr val="FFFFFF"/>
                 </a:solidFill>
                 <a:latin typeface="游ゴシック"/>
               </a:rPr>
-              <a:t>市販品の最安モデル（¥30,000〜）と比べて → 約 ¥21,000 以上のコスト削減</a:t>
+              <a:t>標準製品の 1/3.1 の価格で同等機能を実現</a:t>
             </a:r>
           </a:p>
         </p:txBody>
@@ -19536,8 +19394,8 @@
         </p:nvSpPr>
         <p:spPr>
           <a:xfrm>
-            <a:off x="457200" y="4480560"/>
-            <a:ext cx="11247120" cy="411480"/>
+            <a:off x="457200" y="3474720"/>
+            <a:ext cx="11247120" cy="457200"/>
           </a:xfrm>
           <a:prstGeom prst="rect">
             <a:avLst/>
@@ -19552,27 +19410,62 @@
           <a:p>
             <a:pPr algn="ctr"/>
             <a:r>
-              <a:rPr sz="1400" b="0" i="0">
+              <a:rPr sz="1500" b="0" i="0">
                 <a:solidFill>
                   <a:srgbClr val="FF6D00"/>
                 </a:solidFill>
                 <a:latin typeface="游ゴシック"/>
               </a:rPr>
-              <a:t>市販品の 1/4 〜 1/28 のコストで、同等の計測・記録・アラーム機能を自作実現</a:t>
-            </a:r>
-          </a:p>
-        </p:txBody>
-      </p:sp>
-      <p:sp>
-        <p:nvSpPr>
-          <p:cNvPr id="15" name="Rectangle 14"/>
+              <a:t>本ツール ¥9,570 vs 標準ロガー ¥30,000〜 → 最大 ¥20,000 以上削減</a:t>
+            </a:r>
+          </a:p>
+        </p:txBody>
+      </p:sp>
+      <p:sp>
+        <p:nvSpPr>
+          <p:cNvPr id="15" name="TextBox 14"/>
+          <p:cNvSpPr txBox="1"/>
+          <p:nvPr/>
+        </p:nvSpPr>
+        <p:spPr>
+          <a:xfrm>
+            <a:off x="457200" y="3977639"/>
+            <a:ext cx="11247120" cy="320040"/>
+          </a:xfrm>
+          <a:prstGeom prst="rect">
+            <a:avLst/>
+          </a:prstGeom>
+          <a:noFill/>
+        </p:spPr>
+        <p:txBody>
+          <a:bodyPr wrap="square">
+            <a:spAutoFit/>
+          </a:bodyPr>
+          <a:lstStyle/>
+          <a:p>
+            <a:pPr algn="ctr"/>
+            <a:r>
+              <a:rPr sz="1200" b="0" i="0">
+                <a:solidFill>
+                  <a:srgbClr val="FFFFFF"/>
+                </a:solidFill>
+                <a:latin typeface="游ゴシック"/>
+              </a:rPr>
+              <a:t>（SD 自動記録 ・ LCD リアルタイム表示 ・ 上下限アラーム機能 完全実装）</a:t>
+            </a:r>
+          </a:p>
+        </p:txBody>
+      </p:sp>
+      <p:sp>
+        <p:nvSpPr>
+          <p:cNvPr id="16" name="Rectangle 15"/>
           <p:cNvSpPr/>
           <p:nvPr/>
         </p:nvSpPr>
         <p:spPr>
           <a:xfrm>
-            <a:off x="320040" y="5166360"/>
-            <a:ext cx="11521440" cy="640080"/>
+            <a:off x="320040" y="4160520"/>
+            <a:ext cx="11521440" cy="914400"/>
           </a:xfrm>
           <a:prstGeom prst="rect">
             <a:avLst/>
@@ -19608,14 +19501,14 @@
       </p:sp>
       <p:sp>
         <p:nvSpPr>
-          <p:cNvPr id="16" name="TextBox 15"/>
+          <p:cNvPr id="17" name="TextBox 16"/>
           <p:cNvSpPr txBox="1"/>
           <p:nvPr/>
         </p:nvSpPr>
         <p:spPr>
           <a:xfrm>
-            <a:off x="502920" y="5230368"/>
-            <a:ext cx="11155680" cy="530352"/>
+            <a:off x="502920" y="4224528"/>
+            <a:ext cx="11155680" cy="749808"/>
           </a:xfrm>
           <a:prstGeom prst="rect">
             <a:avLst/>
@@ -19636,7 +19529,19 @@
                 </a:solidFill>
                 <a:latin typeface="游ゴシック"/>
               </a:rPr>
-              <a:t>実装済み機能:  ✓ SD 自動記録  ✓ LCD リアルタイム表示  ✓ 上下限アラーム（ビープ音）  ✓ スタンドアロン動作  ✓ EEPROM 設定保存  ✓ 統計解析（平均・σ・Max/Min）</a:t>
+              <a:t>✓ SD 自動記録  ✓ LCD リアルタイム表示  ✓ 上下限アラーム（ビープ音）</a:t>
+            </a:r>
+          </a:p>
+          <a:p>
+            <a:pPr algn="ctr"/>
+            <a:r>
+              <a:rPr sz="1200" b="0" i="0">
+                <a:solidFill>
+                  <a:srgbClr val="1A1A2E"/>
+                </a:solidFill>
+                <a:latin typeface="游ゴシック"/>
+              </a:rPr>
+              <a:t>✓ スタンドアロン動作  ✓ EEPROM 設定保存  ✓ 統計解析（平均・σ・Max/Min）</a:t>
             </a:r>
           </a:p>
         </p:txBody>
@@ -20202,7 +20107,7 @@
                 </a:solidFill>
                 <a:latin typeface="Segoe UI"/>
               </a:rPr>
-              <a:t>M5Stack Core2</a:t>
+              <a:t>M5Stack Basic V2.7</a:t>
             </a:r>
           </a:p>
         </p:txBody>
@@ -21697,7 +21602,7 @@
         </p:nvGraphicFramePr>
         <p:xfrm>
           <a:off x="320040" y="1417320"/>
-          <a:ext cx="11521439" cy="2633472"/>
+          <a:ext cx="11521439" cy="2468880"/>
         </p:xfrm>
         <a:graphic>
           <a:graphicData uri="http://schemas.openxmlformats.org/drawingml/2006/table">
@@ -21711,7 +21616,7 @@
                 <a:gridCol w="3657600"/>
                 <a:gridCol w="3749039"/>
               </a:tblGrid>
-              <a:tr h="438912">
+              <a:tr h="411480">
                 <a:tc>
                   <a:txBody>
                     <a:bodyPr/>
@@ -21805,7 +21710,7 @@
                   </a:tcPr>
                 </a:tc>
               </a:tr>
-              <a:tr h="438912">
+              <a:tr h="411480">
                 <a:tc>
                   <a:txBody>
                     <a:bodyPr/>
@@ -21899,7 +21804,7 @@
                   </a:tcPr>
                 </a:tc>
               </a:tr>
-              <a:tr h="438912">
+              <a:tr h="411480">
                 <a:tc>
                   <a:txBody>
                     <a:bodyPr/>
@@ -21993,7 +21898,7 @@
                   </a:tcPr>
                 </a:tc>
               </a:tr>
-              <a:tr h="438912">
+              <a:tr h="411480">
                 <a:tc>
                   <a:txBody>
                     <a:bodyPr/>
@@ -22087,7 +21992,7 @@
                   </a:tcPr>
                 </a:tc>
               </a:tr>
-              <a:tr h="438912">
+              <a:tr h="411480">
                 <a:tc>
                   <a:txBody>
                     <a:bodyPr/>
@@ -22181,7 +22086,7 @@
                   </a:tcPr>
                 </a:tc>
               </a:tr>
-              <a:tr h="438912">
+              <a:tr h="411480">
                 <a:tc>
                   <a:txBody>
                     <a:bodyPr/>
@@ -22287,8 +22192,8 @@
         </p:nvSpPr>
         <p:spPr>
           <a:xfrm>
-            <a:off x="320040" y="3886200"/>
-            <a:ext cx="11521440" cy="1005840"/>
+            <a:off x="320040" y="3657600"/>
+            <a:ext cx="11521440" cy="960120"/>
           </a:xfrm>
           <a:prstGeom prst="rect">
             <a:avLst/>
@@ -22332,7 +22237,7 @@
         </p:nvSpPr>
         <p:spPr>
           <a:xfrm>
-            <a:off x="502920" y="3950208"/>
+            <a:off x="502920" y="3703320"/>
             <a:ext cx="11155680" cy="365760"/>
           </a:xfrm>
           <a:prstGeom prst="rect">
@@ -22367,7 +22272,7 @@
         </p:nvSpPr>
         <p:spPr>
           <a:xfrm>
-            <a:off x="502920" y="4343400"/>
+            <a:off x="502920" y="4096512"/>
             <a:ext cx="11155680" cy="411480"/>
           </a:xfrm>
           <a:prstGeom prst="rect">
@@ -22402,8 +22307,8 @@
         </p:nvSpPr>
         <p:spPr>
           <a:xfrm>
-            <a:off x="320040" y="5029200"/>
-            <a:ext cx="11521440" cy="731520"/>
+            <a:off x="320040" y="4709160"/>
+            <a:ext cx="11521440" cy="640080"/>
           </a:xfrm>
           <a:prstGeom prst="rect">
             <a:avLst/>
@@ -22445,7 +22350,7 @@
         </p:nvSpPr>
         <p:spPr>
           <a:xfrm>
-            <a:off x="502920" y="5102352"/>
+            <a:off x="502920" y="4773168"/>
             <a:ext cx="11155680" cy="502920"/>
           </a:xfrm>
           <a:prstGeom prst="rect">
@@ -22461,7 +22366,7 @@
           <a:p>
             <a:pPr algn="l"/>
             <a:r>
-              <a:rPr sz="1300" b="0" i="0">
+              <a:rPr sz="1200" b="0" i="0">
                 <a:solidFill>
                   <a:srgbClr val="1A1A2E"/>
                 </a:solidFill>

--- a/docs/career/Simple_Temp_Tool_Overview_v2.pptx
+++ b/docs/career/Simple_Temp_Tool_Overview_v2.pptx
@@ -5,31 +5,31 @@
     <p:sldMasterId id="2147483648" r:id="rId1"/>
   </p:sldMasterIdLst>
   <p:sldIdLst>
-    <p:sldId id="256" r:id="rId7"/>
-    <p:sldId id="257" r:id="rId8"/>
-    <p:sldId id="258" r:id="rId9"/>
-    <p:sldId id="259" r:id="rId10"/>
-    <p:sldId id="260" r:id="rId11"/>
-    <p:sldId id="261" r:id="rId12"/>
-    <p:sldId id="262" r:id="rId13"/>
-    <p:sldId id="263" r:id="rId14"/>
-    <p:sldId id="264" r:id="rId15"/>
-    <p:sldId id="265" r:id="rId16"/>
-    <p:sldId id="266" r:id="rId17"/>
-    <p:sldId id="267" r:id="rId18"/>
-    <p:sldId id="268" r:id="rId19"/>
-    <p:sldId id="269" r:id="rId20"/>
-    <p:sldId id="270" r:id="rId21"/>
-    <p:sldId id="271" r:id="rId22"/>
-    <p:sldId id="272" r:id="rId23"/>
-    <p:sldId id="273" r:id="rId24"/>
-    <p:sldId id="274" r:id="rId25"/>
-    <p:sldId id="275" r:id="rId26"/>
-    <p:sldId id="276" r:id="rId27"/>
-    <p:sldId id="277" r:id="rId28"/>
-    <p:sldId id="278" r:id="rId29"/>
+    <p:sldId id="256" r:id="rId2"/>
+    <p:sldId id="257" r:id="rId3"/>
+    <p:sldId id="258" r:id="rId4"/>
+    <p:sldId id="259" r:id="rId5"/>
+    <p:sldId id="260" r:id="rId6"/>
+    <p:sldId id="261" r:id="rId7"/>
+    <p:sldId id="262" r:id="rId8"/>
+    <p:sldId id="263" r:id="rId9"/>
+    <p:sldId id="264" r:id="rId10"/>
+    <p:sldId id="265" r:id="rId11"/>
+    <p:sldId id="266" r:id="rId12"/>
+    <p:sldId id="267" r:id="rId13"/>
+    <p:sldId id="268" r:id="rId14"/>
+    <p:sldId id="269" r:id="rId15"/>
+    <p:sldId id="270" r:id="rId16"/>
+    <p:sldId id="271" r:id="rId17"/>
+    <p:sldId id="272" r:id="rId18"/>
+    <p:sldId id="273" r:id="rId19"/>
+    <p:sldId id="274" r:id="rId20"/>
+    <p:sldId id="275" r:id="rId21"/>
+    <p:sldId id="276" r:id="rId22"/>
+    <p:sldId id="277" r:id="rId23"/>
+    <p:sldId id="278" r:id="rId24"/>
   </p:sldIdLst>
-  <p:sldSz cx="12188952" cy="6858000" type="screen4x3"/>
+  <p:sldSz cx="12188825" cy="6858000"/>
   <p:notesSz cx="6858000" cy="9144000"/>
   <p:defaultTextStyle>
     <a:defPPr>
@@ -126,6 +126,22 @@
       </a:defRPr>
     </a:lvl9pPr>
   </p:defaultTextStyle>
+  <p:extLst>
+    <p:ext uri="{EFAFB233-063F-42B5-8137-9DF3F51BA10A}">
+      <p15:sldGuideLst xmlns:p15="http://schemas.microsoft.com/office/powerpoint/2012/main">
+        <p15:guide id="1" orient="horz" pos="2160">
+          <p15:clr>
+            <a:srgbClr val="A4A3A4"/>
+          </p15:clr>
+        </p15:guide>
+        <p15:guide id="2" pos="2880">
+          <p15:clr>
+            <a:srgbClr val="A4A3A4"/>
+          </p15:clr>
+        </p15:guide>
+      </p15:sldGuideLst>
+    </p:ext>
+  </p:extLst>
 </p:presentation>
 </file>
 
@@ -167,10 +183,9 @@
           <a:lstStyle/>
           <a:p>
             <a:r>
-              <a:rPr lang="en-US" smtClean="0"/>
+              <a:rPr lang="en-US"/>
               <a:t>Click to edit Master title style</a:t>
             </a:r>
-            <a:endParaRPr lang="en-US"/>
           </a:p>
         </p:txBody>
       </p:sp>
@@ -286,10 +301,9 @@
           </a:lstStyle>
           <a:p>
             <a:r>
-              <a:rPr lang="en-US" smtClean="0"/>
+              <a:rPr lang="en-US"/>
               <a:t>Click to edit Master subtitle style</a:t>
             </a:r>
-            <a:endParaRPr lang="en-US"/>
           </a:p>
         </p:txBody>
       </p:sp>
@@ -310,7 +324,7 @@
           <a:p>
             <a:fld id="{5BCAD085-E8A6-8845-BD4E-CB4CCA059FC4}" type="datetimeFigureOut">
               <a:rPr lang="en-US" smtClean="0"/>
-              <a:t>1/27/13</a:t>
+              <a:t>3/2/2026</a:t>
             </a:fld>
             <a:endParaRPr lang="en-US"/>
           </a:p>
@@ -404,10 +418,9 @@
           <a:lstStyle/>
           <a:p>
             <a:r>
-              <a:rPr lang="en-US" smtClean="0"/>
+              <a:rPr lang="en-US"/>
               <a:t>Click to edit Master title style</a:t>
             </a:r>
-            <a:endParaRPr lang="en-US"/>
           </a:p>
         </p:txBody>
       </p:sp>
@@ -428,38 +441,37 @@
           <a:p>
             <a:pPr lvl="0"/>
             <a:r>
-              <a:rPr lang="en-US" smtClean="0"/>
+              <a:rPr lang="en-US"/>
               <a:t>Click to edit Master text styles</a:t>
             </a:r>
           </a:p>
           <a:p>
             <a:pPr lvl="1"/>
             <a:r>
-              <a:rPr lang="en-US" smtClean="0"/>
+              <a:rPr lang="en-US"/>
               <a:t>Second level</a:t>
             </a:r>
           </a:p>
           <a:p>
             <a:pPr lvl="2"/>
             <a:r>
-              <a:rPr lang="en-US" smtClean="0"/>
+              <a:rPr lang="en-US"/>
               <a:t>Third level</a:t>
             </a:r>
           </a:p>
           <a:p>
             <a:pPr lvl="3"/>
             <a:r>
-              <a:rPr lang="en-US" smtClean="0"/>
+              <a:rPr lang="en-US"/>
               <a:t>Fourth level</a:t>
             </a:r>
           </a:p>
           <a:p>
             <a:pPr lvl="4"/>
             <a:r>
-              <a:rPr lang="en-US" smtClean="0"/>
+              <a:rPr lang="en-US"/>
               <a:t>Fifth level</a:t>
             </a:r>
-            <a:endParaRPr lang="en-US"/>
           </a:p>
         </p:txBody>
       </p:sp>
@@ -480,7 +492,7 @@
           <a:p>
             <a:fld id="{5BCAD085-E8A6-8845-BD4E-CB4CCA059FC4}" type="datetimeFigureOut">
               <a:rPr lang="en-US" smtClean="0"/>
-              <a:t>1/27/13</a:t>
+              <a:t>3/2/2026</a:t>
             </a:fld>
             <a:endParaRPr lang="en-US"/>
           </a:p>
@@ -579,10 +591,9 @@
           <a:lstStyle/>
           <a:p>
             <a:r>
-              <a:rPr lang="en-US" smtClean="0"/>
+              <a:rPr lang="en-US"/>
               <a:t>Click to edit Master title style</a:t>
             </a:r>
-            <a:endParaRPr lang="en-US"/>
           </a:p>
         </p:txBody>
       </p:sp>
@@ -608,38 +619,37 @@
           <a:p>
             <a:pPr lvl="0"/>
             <a:r>
-              <a:rPr lang="en-US" smtClean="0"/>
+              <a:rPr lang="en-US"/>
               <a:t>Click to edit Master text styles</a:t>
             </a:r>
           </a:p>
           <a:p>
             <a:pPr lvl="1"/>
             <a:r>
-              <a:rPr lang="en-US" smtClean="0"/>
+              <a:rPr lang="en-US"/>
               <a:t>Second level</a:t>
             </a:r>
           </a:p>
           <a:p>
             <a:pPr lvl="2"/>
             <a:r>
-              <a:rPr lang="en-US" smtClean="0"/>
+              <a:rPr lang="en-US"/>
               <a:t>Third level</a:t>
             </a:r>
           </a:p>
           <a:p>
             <a:pPr lvl="3"/>
             <a:r>
-              <a:rPr lang="en-US" smtClean="0"/>
+              <a:rPr lang="en-US"/>
               <a:t>Fourth level</a:t>
             </a:r>
           </a:p>
           <a:p>
             <a:pPr lvl="4"/>
             <a:r>
-              <a:rPr lang="en-US" smtClean="0"/>
+              <a:rPr lang="en-US"/>
               <a:t>Fifth level</a:t>
             </a:r>
-            <a:endParaRPr lang="en-US"/>
           </a:p>
         </p:txBody>
       </p:sp>
@@ -660,7 +670,7 @@
           <a:p>
             <a:fld id="{5BCAD085-E8A6-8845-BD4E-CB4CCA059FC4}" type="datetimeFigureOut">
               <a:rPr lang="en-US" smtClean="0"/>
-              <a:t>1/27/13</a:t>
+              <a:t>3/2/2026</a:t>
             </a:fld>
             <a:endParaRPr lang="en-US"/>
           </a:p>
@@ -754,10 +764,9 @@
           <a:lstStyle/>
           <a:p>
             <a:r>
-              <a:rPr lang="en-US" smtClean="0"/>
+              <a:rPr lang="en-US"/>
               <a:t>Click to edit Master title style</a:t>
             </a:r>
-            <a:endParaRPr lang="en-US"/>
           </a:p>
         </p:txBody>
       </p:sp>
@@ -778,38 +787,37 @@
           <a:p>
             <a:pPr lvl="0"/>
             <a:r>
-              <a:rPr lang="en-US" smtClean="0"/>
+              <a:rPr lang="en-US"/>
               <a:t>Click to edit Master text styles</a:t>
             </a:r>
           </a:p>
           <a:p>
             <a:pPr lvl="1"/>
             <a:r>
-              <a:rPr lang="en-US" smtClean="0"/>
+              <a:rPr lang="en-US"/>
               <a:t>Second level</a:t>
             </a:r>
           </a:p>
           <a:p>
             <a:pPr lvl="2"/>
             <a:r>
-              <a:rPr lang="en-US" smtClean="0"/>
+              <a:rPr lang="en-US"/>
               <a:t>Third level</a:t>
             </a:r>
           </a:p>
           <a:p>
             <a:pPr lvl="3"/>
             <a:r>
-              <a:rPr lang="en-US" smtClean="0"/>
+              <a:rPr lang="en-US"/>
               <a:t>Fourth level</a:t>
             </a:r>
           </a:p>
           <a:p>
             <a:pPr lvl="4"/>
             <a:r>
-              <a:rPr lang="en-US" smtClean="0"/>
+              <a:rPr lang="en-US"/>
               <a:t>Fifth level</a:t>
             </a:r>
-            <a:endParaRPr lang="en-US"/>
           </a:p>
         </p:txBody>
       </p:sp>
@@ -830,7 +838,7 @@
           <a:p>
             <a:fld id="{5BCAD085-E8A6-8845-BD4E-CB4CCA059FC4}" type="datetimeFigureOut">
               <a:rPr lang="en-US" smtClean="0"/>
-              <a:t>1/27/13</a:t>
+              <a:t>3/2/2026</a:t>
             </a:fld>
             <a:endParaRPr lang="en-US"/>
           </a:p>
@@ -933,10 +941,9 @@
           </a:lstStyle>
           <a:p>
             <a:r>
-              <a:rPr lang="en-US" smtClean="0"/>
+              <a:rPr lang="en-US"/>
               <a:t>Click to edit Master title style</a:t>
             </a:r>
-            <a:endParaRPr lang="en-US"/>
           </a:p>
         </p:txBody>
       </p:sp>
@@ -1053,7 +1060,7 @@
           <a:p>
             <a:pPr lvl="0"/>
             <a:r>
-              <a:rPr lang="en-US" smtClean="0"/>
+              <a:rPr lang="en-US"/>
               <a:t>Click to edit Master text styles</a:t>
             </a:r>
           </a:p>
@@ -1076,7 +1083,7 @@
           <a:p>
             <a:fld id="{5BCAD085-E8A6-8845-BD4E-CB4CCA059FC4}" type="datetimeFigureOut">
               <a:rPr lang="en-US" smtClean="0"/>
-              <a:t>1/27/13</a:t>
+              <a:t>3/2/2026</a:t>
             </a:fld>
             <a:endParaRPr lang="en-US"/>
           </a:p>
@@ -1170,10 +1177,9 @@
           <a:lstStyle/>
           <a:p>
             <a:r>
-              <a:rPr lang="en-US" smtClean="0"/>
+              <a:rPr lang="en-US"/>
               <a:t>Click to edit Master title style</a:t>
             </a:r>
-            <a:endParaRPr lang="en-US"/>
           </a:p>
         </p:txBody>
       </p:sp>
@@ -1227,38 +1233,37 @@
           <a:p>
             <a:pPr lvl="0"/>
             <a:r>
-              <a:rPr lang="en-US" smtClean="0"/>
+              <a:rPr lang="en-US"/>
               <a:t>Click to edit Master text styles</a:t>
             </a:r>
           </a:p>
           <a:p>
             <a:pPr lvl="1"/>
             <a:r>
-              <a:rPr lang="en-US" smtClean="0"/>
+              <a:rPr lang="en-US"/>
               <a:t>Second level</a:t>
             </a:r>
           </a:p>
           <a:p>
             <a:pPr lvl="2"/>
             <a:r>
-              <a:rPr lang="en-US" smtClean="0"/>
+              <a:rPr lang="en-US"/>
               <a:t>Third level</a:t>
             </a:r>
           </a:p>
           <a:p>
             <a:pPr lvl="3"/>
             <a:r>
-              <a:rPr lang="en-US" smtClean="0"/>
+              <a:rPr lang="en-US"/>
               <a:t>Fourth level</a:t>
             </a:r>
           </a:p>
           <a:p>
             <a:pPr lvl="4"/>
             <a:r>
-              <a:rPr lang="en-US" smtClean="0"/>
+              <a:rPr lang="en-US"/>
               <a:t>Fifth level</a:t>
             </a:r>
-            <a:endParaRPr lang="en-US"/>
           </a:p>
         </p:txBody>
       </p:sp>
@@ -1312,38 +1317,37 @@
           <a:p>
             <a:pPr lvl="0"/>
             <a:r>
-              <a:rPr lang="en-US" smtClean="0"/>
+              <a:rPr lang="en-US"/>
               <a:t>Click to edit Master text styles</a:t>
             </a:r>
           </a:p>
           <a:p>
             <a:pPr lvl="1"/>
             <a:r>
-              <a:rPr lang="en-US" smtClean="0"/>
+              <a:rPr lang="en-US"/>
               <a:t>Second level</a:t>
             </a:r>
           </a:p>
           <a:p>
             <a:pPr lvl="2"/>
             <a:r>
-              <a:rPr lang="en-US" smtClean="0"/>
+              <a:rPr lang="en-US"/>
               <a:t>Third level</a:t>
             </a:r>
           </a:p>
           <a:p>
             <a:pPr lvl="3"/>
             <a:r>
-              <a:rPr lang="en-US" smtClean="0"/>
+              <a:rPr lang="en-US"/>
               <a:t>Fourth level</a:t>
             </a:r>
           </a:p>
           <a:p>
             <a:pPr lvl="4"/>
             <a:r>
-              <a:rPr lang="en-US" smtClean="0"/>
+              <a:rPr lang="en-US"/>
               <a:t>Fifth level</a:t>
             </a:r>
-            <a:endParaRPr lang="en-US"/>
           </a:p>
         </p:txBody>
       </p:sp>
@@ -1364,7 +1368,7 @@
           <a:p>
             <a:fld id="{5BCAD085-E8A6-8845-BD4E-CB4CCA059FC4}" type="datetimeFigureOut">
               <a:rPr lang="en-US" smtClean="0"/>
-              <a:t>1/27/13</a:t>
+              <a:t>3/2/2026</a:t>
             </a:fld>
             <a:endParaRPr lang="en-US"/>
           </a:p>
@@ -1462,10 +1466,9 @@
           </a:lstStyle>
           <a:p>
             <a:r>
-              <a:rPr lang="en-US" smtClean="0"/>
+              <a:rPr lang="en-US"/>
               <a:t>Click to edit Master title style</a:t>
             </a:r>
-            <a:endParaRPr lang="en-US"/>
           </a:p>
         </p:txBody>
       </p:sp>
@@ -1528,7 +1531,7 @@
           <a:p>
             <a:pPr lvl="0"/>
             <a:r>
-              <a:rPr lang="en-US" smtClean="0"/>
+              <a:rPr lang="en-US"/>
               <a:t>Click to edit Master text styles</a:t>
             </a:r>
           </a:p>
@@ -1584,38 +1587,37 @@
           <a:p>
             <a:pPr lvl="0"/>
             <a:r>
-              <a:rPr lang="en-US" smtClean="0"/>
+              <a:rPr lang="en-US"/>
               <a:t>Click to edit Master text styles</a:t>
             </a:r>
           </a:p>
           <a:p>
             <a:pPr lvl="1"/>
             <a:r>
-              <a:rPr lang="en-US" smtClean="0"/>
+              <a:rPr lang="en-US"/>
               <a:t>Second level</a:t>
             </a:r>
           </a:p>
           <a:p>
             <a:pPr lvl="2"/>
             <a:r>
-              <a:rPr lang="en-US" smtClean="0"/>
+              <a:rPr lang="en-US"/>
               <a:t>Third level</a:t>
             </a:r>
           </a:p>
           <a:p>
             <a:pPr lvl="3"/>
             <a:r>
-              <a:rPr lang="en-US" smtClean="0"/>
+              <a:rPr lang="en-US"/>
               <a:t>Fourth level</a:t>
             </a:r>
           </a:p>
           <a:p>
             <a:pPr lvl="4"/>
             <a:r>
-              <a:rPr lang="en-US" smtClean="0"/>
+              <a:rPr lang="en-US"/>
               <a:t>Fifth level</a:t>
             </a:r>
-            <a:endParaRPr lang="en-US"/>
           </a:p>
         </p:txBody>
       </p:sp>
@@ -1678,7 +1680,7 @@
           <a:p>
             <a:pPr lvl="0"/>
             <a:r>
-              <a:rPr lang="en-US" smtClean="0"/>
+              <a:rPr lang="en-US"/>
               <a:t>Click to edit Master text styles</a:t>
             </a:r>
           </a:p>
@@ -1734,38 +1736,37 @@
           <a:p>
             <a:pPr lvl="0"/>
             <a:r>
-              <a:rPr lang="en-US" smtClean="0"/>
+              <a:rPr lang="en-US"/>
               <a:t>Click to edit Master text styles</a:t>
             </a:r>
           </a:p>
           <a:p>
             <a:pPr lvl="1"/>
             <a:r>
-              <a:rPr lang="en-US" smtClean="0"/>
+              <a:rPr lang="en-US"/>
               <a:t>Second level</a:t>
             </a:r>
           </a:p>
           <a:p>
             <a:pPr lvl="2"/>
             <a:r>
-              <a:rPr lang="en-US" smtClean="0"/>
+              <a:rPr lang="en-US"/>
               <a:t>Third level</a:t>
             </a:r>
           </a:p>
           <a:p>
             <a:pPr lvl="3"/>
             <a:r>
-              <a:rPr lang="en-US" smtClean="0"/>
+              <a:rPr lang="en-US"/>
               <a:t>Fourth level</a:t>
             </a:r>
           </a:p>
           <a:p>
             <a:pPr lvl="4"/>
             <a:r>
-              <a:rPr lang="en-US" smtClean="0"/>
+              <a:rPr lang="en-US"/>
               <a:t>Fifth level</a:t>
             </a:r>
-            <a:endParaRPr lang="en-US"/>
           </a:p>
         </p:txBody>
       </p:sp>
@@ -1786,7 +1787,7 @@
           <a:p>
             <a:fld id="{5BCAD085-E8A6-8845-BD4E-CB4CCA059FC4}" type="datetimeFigureOut">
               <a:rPr lang="en-US" smtClean="0"/>
-              <a:t>1/27/13</a:t>
+              <a:t>3/2/2026</a:t>
             </a:fld>
             <a:endParaRPr lang="en-US"/>
           </a:p>
@@ -1880,10 +1881,9 @@
           <a:lstStyle/>
           <a:p>
             <a:r>
-              <a:rPr lang="en-US" smtClean="0"/>
+              <a:rPr lang="en-US"/>
               <a:t>Click to edit Master title style</a:t>
             </a:r>
-            <a:endParaRPr lang="en-US"/>
           </a:p>
         </p:txBody>
       </p:sp>
@@ -1904,7 +1904,7 @@
           <a:p>
             <a:fld id="{5BCAD085-E8A6-8845-BD4E-CB4CCA059FC4}" type="datetimeFigureOut">
               <a:rPr lang="en-US" smtClean="0"/>
-              <a:t>1/27/13</a:t>
+              <a:t>3/2/2026</a:t>
             </a:fld>
             <a:endParaRPr lang="en-US"/>
           </a:p>
@@ -1999,7 +1999,7 @@
           <a:p>
             <a:fld id="{5BCAD085-E8A6-8845-BD4E-CB4CCA059FC4}" type="datetimeFigureOut">
               <a:rPr lang="en-US" smtClean="0"/>
-              <a:t>1/27/13</a:t>
+              <a:t>3/2/2026</a:t>
             </a:fld>
             <a:endParaRPr lang="en-US"/>
           </a:p>
@@ -2102,10 +2102,9 @@
           </a:lstStyle>
           <a:p>
             <a:r>
-              <a:rPr lang="en-US" smtClean="0"/>
+              <a:rPr lang="en-US"/>
               <a:t>Click to edit Master title style</a:t>
             </a:r>
-            <a:endParaRPr lang="en-US"/>
           </a:p>
         </p:txBody>
       </p:sp>
@@ -2159,38 +2158,37 @@
           <a:p>
             <a:pPr lvl="0"/>
             <a:r>
-              <a:rPr lang="en-US" smtClean="0"/>
+              <a:rPr lang="en-US"/>
               <a:t>Click to edit Master text styles</a:t>
             </a:r>
           </a:p>
           <a:p>
             <a:pPr lvl="1"/>
             <a:r>
-              <a:rPr lang="en-US" smtClean="0"/>
+              <a:rPr lang="en-US"/>
               <a:t>Second level</a:t>
             </a:r>
           </a:p>
           <a:p>
             <a:pPr lvl="2"/>
             <a:r>
-              <a:rPr lang="en-US" smtClean="0"/>
+              <a:rPr lang="en-US"/>
               <a:t>Third level</a:t>
             </a:r>
           </a:p>
           <a:p>
             <a:pPr lvl="3"/>
             <a:r>
-              <a:rPr lang="en-US" smtClean="0"/>
+              <a:rPr lang="en-US"/>
               <a:t>Fourth level</a:t>
             </a:r>
           </a:p>
           <a:p>
             <a:pPr lvl="4"/>
             <a:r>
-              <a:rPr lang="en-US" smtClean="0"/>
+              <a:rPr lang="en-US"/>
               <a:t>Fifth level</a:t>
             </a:r>
-            <a:endParaRPr lang="en-US"/>
           </a:p>
         </p:txBody>
       </p:sp>
@@ -2253,7 +2251,7 @@
           <a:p>
             <a:pPr lvl="0"/>
             <a:r>
-              <a:rPr lang="en-US" smtClean="0"/>
+              <a:rPr lang="en-US"/>
               <a:t>Click to edit Master text styles</a:t>
             </a:r>
           </a:p>
@@ -2276,7 +2274,7 @@
           <a:p>
             <a:fld id="{5BCAD085-E8A6-8845-BD4E-CB4CCA059FC4}" type="datetimeFigureOut">
               <a:rPr lang="en-US" smtClean="0"/>
-              <a:t>1/27/13</a:t>
+              <a:t>3/2/2026</a:t>
             </a:fld>
             <a:endParaRPr lang="en-US"/>
           </a:p>
@@ -2379,10 +2377,9 @@
           </a:lstStyle>
           <a:p>
             <a:r>
-              <a:rPr lang="en-US" smtClean="0"/>
+              <a:rPr lang="en-US"/>
               <a:t>Click to edit Master title style</a:t>
             </a:r>
-            <a:endParaRPr lang="en-US"/>
           </a:p>
         </p:txBody>
       </p:sp>
@@ -2506,7 +2503,7 @@
           <a:p>
             <a:pPr lvl="0"/>
             <a:r>
-              <a:rPr lang="en-US" smtClean="0"/>
+              <a:rPr lang="en-US"/>
               <a:t>Click to edit Master text styles</a:t>
             </a:r>
           </a:p>
@@ -2529,7 +2526,7 @@
           <a:p>
             <a:fld id="{5BCAD085-E8A6-8845-BD4E-CB4CCA059FC4}" type="datetimeFigureOut">
               <a:rPr lang="en-US" smtClean="0"/>
-              <a:t>1/27/13</a:t>
+              <a:t>3/2/2026</a:t>
             </a:fld>
             <a:endParaRPr lang="en-US"/>
           </a:p>
@@ -2638,10 +2635,9 @@
           <a:lstStyle/>
           <a:p>
             <a:r>
-              <a:rPr lang="en-US" smtClean="0"/>
+              <a:rPr lang="en-US"/>
               <a:t>Click to edit Master title style</a:t>
             </a:r>
-            <a:endParaRPr lang="en-US"/>
           </a:p>
         </p:txBody>
       </p:sp>
@@ -2672,38 +2668,37 @@
           <a:p>
             <a:pPr lvl="0"/>
             <a:r>
-              <a:rPr lang="en-US" smtClean="0"/>
+              <a:rPr lang="en-US"/>
               <a:t>Click to edit Master text styles</a:t>
             </a:r>
           </a:p>
           <a:p>
             <a:pPr lvl="1"/>
             <a:r>
-              <a:rPr lang="en-US" smtClean="0"/>
+              <a:rPr lang="en-US"/>
               <a:t>Second level</a:t>
             </a:r>
           </a:p>
           <a:p>
             <a:pPr lvl="2"/>
             <a:r>
-              <a:rPr lang="en-US" smtClean="0"/>
+              <a:rPr lang="en-US"/>
               <a:t>Third level</a:t>
             </a:r>
           </a:p>
           <a:p>
             <a:pPr lvl="3"/>
             <a:r>
-              <a:rPr lang="en-US" smtClean="0"/>
+              <a:rPr lang="en-US"/>
               <a:t>Fourth level</a:t>
             </a:r>
           </a:p>
           <a:p>
             <a:pPr lvl="4"/>
             <a:r>
-              <a:rPr lang="en-US" smtClean="0"/>
+              <a:rPr lang="en-US"/>
               <a:t>Fifth level</a:t>
             </a:r>
-            <a:endParaRPr lang="en-US"/>
           </a:p>
         </p:txBody>
       </p:sp>
@@ -2742,7 +2737,7 @@
           <a:p>
             <a:fld id="{5BCAD085-E8A6-8845-BD4E-CB4CCA059FC4}" type="datetimeFigureOut">
               <a:rPr lang="en-US" smtClean="0"/>
-              <a:t>1/27/13</a:t>
+              <a:t>3/2/2026</a:t>
             </a:fld>
             <a:endParaRPr lang="en-US"/>
           </a:p>
@@ -3101,7 +3096,7 @@
 </file>
 
 <file path=ppt/slides/slide1.xml><?xml version="1.0" encoding="utf-8"?>
-<p:sld xmlns:a="http://schemas.openxmlformats.org/drawingml/2006/main" xmlns:p="http://schemas.openxmlformats.org/presentationml/2006/main" xmlns:r="http://schemas.openxmlformats.org/officeDocument/2006/relationships">
+<p:sld xmlns:a="http://schemas.openxmlformats.org/drawingml/2006/main" xmlns:r="http://schemas.openxmlformats.org/officeDocument/2006/relationships" xmlns:p="http://schemas.openxmlformats.org/presentationml/2006/main">
   <p:cSld>
     <p:bg>
       <p:bgPr>
@@ -3117,7 +3112,14 @@
         <p:cNvGrpSpPr/>
         <p:nvPr/>
       </p:nvGrpSpPr>
-      <p:grpSpPr/>
+      <p:grpSpPr>
+        <a:xfrm>
+          <a:off x="0" y="0"/>
+          <a:ext cx="0" cy="0"/>
+          <a:chOff x="0" y="0"/>
+          <a:chExt cx="0" cy="0"/>
+        </a:xfrm>
+      </p:grpSpPr>
       <p:sp>
         <p:nvSpPr>
           <p:cNvPr id="2" name="TextBox 1"/>
@@ -3183,7 +3185,7 @@
                 </a:solidFill>
                 <a:latin typeface="游ゴシック"/>
               </a:rPr>
-              <a:t>M5Stack Core2 × MAX31855  熱電対温度計測システム</a:t>
+              <a:t>M5Stack Basic V2.7 × MAX31855  熱電対温度計測システム</a:t>
             </a:r>
           </a:p>
         </p:txBody>
@@ -3228,6 +3230,7 @@
           <a:lstStyle/>
           <a:p>
             <a:pPr algn="ctr"/>
+            <a:endParaRPr/>
           </a:p>
         </p:txBody>
       </p:sp>
@@ -3345,7 +3348,7 @@
 </file>
 
 <file path=ppt/slides/slide10.xml><?xml version="1.0" encoding="utf-8"?>
-<p:sld xmlns:a="http://schemas.openxmlformats.org/drawingml/2006/main" xmlns:p="http://schemas.openxmlformats.org/presentationml/2006/main" xmlns:r="http://schemas.openxmlformats.org/officeDocument/2006/relationships">
+<p:sld xmlns:a="http://schemas.openxmlformats.org/drawingml/2006/main" xmlns:r="http://schemas.openxmlformats.org/officeDocument/2006/relationships" xmlns:p="http://schemas.openxmlformats.org/presentationml/2006/main">
   <p:cSld>
     <p:spTree>
       <p:nvGrpSpPr>
@@ -3353,7 +3356,14 @@
         <p:cNvGrpSpPr/>
         <p:nvPr/>
       </p:nvGrpSpPr>
-      <p:grpSpPr/>
+      <p:grpSpPr>
+        <a:xfrm>
+          <a:off x="0" y="0"/>
+          <a:ext cx="0" cy="0"/>
+          <a:chOff x="0" y="0"/>
+          <a:chExt cx="0" cy="0"/>
+        </a:xfrm>
+      </p:grpSpPr>
       <p:sp>
         <p:nvSpPr>
           <p:cNvPr id="2" name="Rectangle 1"/>
@@ -3394,6 +3404,7 @@
           <a:lstStyle/>
           <a:p>
             <a:pPr algn="ctr"/>
+            <a:endParaRPr/>
           </a:p>
         </p:txBody>
       </p:sp>
@@ -3507,6 +3518,7 @@
           <a:lstStyle/>
           <a:p>
             <a:pPr algn="ctr"/>
+            <a:endParaRPr/>
           </a:p>
         </p:txBody>
       </p:sp>
@@ -3634,10 +3646,34 @@
                 <a:tableStyleId>{5C22544A-7EE6-4342-B048-85BDC9FD1C3A}</a:tableStyleId>
               </a:tblPr>
               <a:tblGrid>
-                <a:gridCol w="1828800"/>
-                <a:gridCol w="3108960"/>
-                <a:gridCol w="3108960"/>
-                <a:gridCol w="3474720"/>
+                <a:gridCol w="1828800">
+                  <a:extLst>
+                    <a:ext uri="{9D8B030D-6E8A-4147-A177-3AD203B41FA5}">
+                      <a16:colId xmlns:a16="http://schemas.microsoft.com/office/drawing/2014/main" val="20000"/>
+                    </a:ext>
+                  </a:extLst>
+                </a:gridCol>
+                <a:gridCol w="3108960">
+                  <a:extLst>
+                    <a:ext uri="{9D8B030D-6E8A-4147-A177-3AD203B41FA5}">
+                      <a16:colId xmlns:a16="http://schemas.microsoft.com/office/drawing/2014/main" val="20001"/>
+                    </a:ext>
+                  </a:extLst>
+                </a:gridCol>
+                <a:gridCol w="3108960">
+                  <a:extLst>
+                    <a:ext uri="{9D8B030D-6E8A-4147-A177-3AD203B41FA5}">
+                      <a16:colId xmlns:a16="http://schemas.microsoft.com/office/drawing/2014/main" val="20002"/>
+                    </a:ext>
+                  </a:extLst>
+                </a:gridCol>
+                <a:gridCol w="3474720">
+                  <a:extLst>
+                    <a:ext uri="{9D8B030D-6E8A-4147-A177-3AD203B41FA5}">
+                      <a16:colId xmlns:a16="http://schemas.microsoft.com/office/drawing/2014/main" val="20003"/>
+                    </a:ext>
+                  </a:extLst>
+                </a:gridCol>
               </a:tblGrid>
               <a:tr h="420624">
                 <a:tc>
@@ -3732,6 +3768,11 @@
                     </a:solidFill>
                   </a:tcPr>
                 </a:tc>
+                <a:extLst>
+                  <a:ext uri="{0D108BD9-81ED-4DB2-BD59-A6C34878D82A}">
+                    <a16:rowId xmlns:a16="http://schemas.microsoft.com/office/drawing/2014/main" val="10000"/>
+                  </a:ext>
+                </a:extLst>
               </a:tr>
               <a:tr h="420624">
                 <a:tc>
@@ -3826,6 +3867,11 @@
                     </a:solidFill>
                   </a:tcPr>
                 </a:tc>
+                <a:extLst>
+                  <a:ext uri="{0D108BD9-81ED-4DB2-BD59-A6C34878D82A}">
+                    <a16:rowId xmlns:a16="http://schemas.microsoft.com/office/drawing/2014/main" val="10001"/>
+                  </a:ext>
+                </a:extLst>
               </a:tr>
               <a:tr h="420624">
                 <a:tc>
@@ -3920,6 +3966,11 @@
                     </a:solidFill>
                   </a:tcPr>
                 </a:tc>
+                <a:extLst>
+                  <a:ext uri="{0D108BD9-81ED-4DB2-BD59-A6C34878D82A}">
+                    <a16:rowId xmlns:a16="http://schemas.microsoft.com/office/drawing/2014/main" val="10002"/>
+                  </a:ext>
+                </a:extLst>
               </a:tr>
               <a:tr h="420624">
                 <a:tc>
@@ -4014,6 +4065,11 @@
                     </a:solidFill>
                   </a:tcPr>
                 </a:tc>
+                <a:extLst>
+                  <a:ext uri="{0D108BD9-81ED-4DB2-BD59-A6C34878D82A}">
+                    <a16:rowId xmlns:a16="http://schemas.microsoft.com/office/drawing/2014/main" val="10003"/>
+                  </a:ext>
+                </a:extLst>
               </a:tr>
               <a:tr h="420624">
                 <a:tc>
@@ -4108,6 +4164,11 @@
                     </a:solidFill>
                   </a:tcPr>
                 </a:tc>
+                <a:extLst>
+                  <a:ext uri="{0D108BD9-81ED-4DB2-BD59-A6C34878D82A}">
+                    <a16:rowId xmlns:a16="http://schemas.microsoft.com/office/drawing/2014/main" val="10004"/>
+                  </a:ext>
+                </a:extLst>
               </a:tr>
               <a:tr h="420624">
                 <a:tc>
@@ -4202,6 +4263,11 @@
                     </a:solidFill>
                   </a:tcPr>
                 </a:tc>
+                <a:extLst>
+                  <a:ext uri="{0D108BD9-81ED-4DB2-BD59-A6C34878D82A}">
+                    <a16:rowId xmlns:a16="http://schemas.microsoft.com/office/drawing/2014/main" val="10005"/>
+                  </a:ext>
+                </a:extLst>
               </a:tr>
             </a:tbl>
           </a:graphicData>
@@ -4251,7 +4317,7 @@
 </file>
 
 <file path=ppt/slides/slide11.xml><?xml version="1.0" encoding="utf-8"?>
-<p:sld xmlns:a="http://schemas.openxmlformats.org/drawingml/2006/main" xmlns:p="http://schemas.openxmlformats.org/presentationml/2006/main" xmlns:r="http://schemas.openxmlformats.org/officeDocument/2006/relationships">
+<p:sld xmlns:a="http://schemas.openxmlformats.org/drawingml/2006/main" xmlns:r="http://schemas.openxmlformats.org/officeDocument/2006/relationships" xmlns:p="http://schemas.openxmlformats.org/presentationml/2006/main">
   <p:cSld>
     <p:spTree>
       <p:nvGrpSpPr>
@@ -4259,7 +4325,14 @@
         <p:cNvGrpSpPr/>
         <p:nvPr/>
       </p:nvGrpSpPr>
-      <p:grpSpPr/>
+      <p:grpSpPr>
+        <a:xfrm>
+          <a:off x="0" y="0"/>
+          <a:ext cx="0" cy="0"/>
+          <a:chOff x="0" y="0"/>
+          <a:chExt cx="0" cy="0"/>
+        </a:xfrm>
+      </p:grpSpPr>
       <p:sp>
         <p:nvSpPr>
           <p:cNvPr id="2" name="Rectangle 1"/>
@@ -4300,6 +4373,7 @@
           <a:lstStyle/>
           <a:p>
             <a:pPr algn="ctr"/>
+            <a:endParaRPr/>
           </a:p>
         </p:txBody>
       </p:sp>
@@ -4413,6 +4487,7 @@
           <a:lstStyle/>
           <a:p>
             <a:pPr algn="ctr"/>
+            <a:endParaRPr/>
           </a:p>
         </p:txBody>
       </p:sp>
@@ -4528,6 +4603,7 @@
           <a:lstStyle/>
           <a:p>
             <a:pPr algn="ctr"/>
+            <a:endParaRPr/>
           </a:p>
         </p:txBody>
       </p:sp>
@@ -4564,6 +4640,14 @@
             </a:r>
           </a:p>
           <a:p>
+            <a:endParaRPr sz="1300">
+              <a:solidFill>
+                <a:srgbClr val="FFFFFF"/>
+              </a:solidFill>
+              <a:latin typeface="Consolas"/>
+            </a:endParaRPr>
+          </a:p>
+          <a:p>
             <a:r>
               <a:rPr sz="1300">
                 <a:solidFill>
@@ -4571,7 +4655,7 @@
                 </a:solidFill>
                 <a:latin typeface="Consolas"/>
               </a:rPr>
-              <a:t/>
+              <a:t>Temp:</a:t>
             </a:r>
           </a:p>
           <a:p>
@@ -4582,8 +4666,16 @@
                 </a:solidFill>
                 <a:latin typeface="Consolas"/>
               </a:rPr>
-              <a:t>Temp:</a:t>
-            </a:r>
+              <a:t>  25.3  C</a:t>
+            </a:r>
+          </a:p>
+          <a:p>
+            <a:endParaRPr sz="1300">
+              <a:solidFill>
+                <a:srgbClr val="FFFFFF"/>
+              </a:solidFill>
+              <a:latin typeface="Consolas"/>
+            </a:endParaRPr>
           </a:p>
           <a:p>
             <a:r>
@@ -4593,41 +4685,16 @@
                 </a:solidFill>
                 <a:latin typeface="Consolas"/>
               </a:rPr>
-              <a:t>  25.3  C</a:t>
-            </a:r>
-          </a:p>
-          <a:p>
-            <a:r>
-              <a:rPr sz="1300">
-                <a:solidFill>
-                  <a:srgbClr val="FFFFFF"/>
-                </a:solidFill>
-                <a:latin typeface="Consolas"/>
-              </a:rPr>
-              <a:t/>
-            </a:r>
-          </a:p>
-          <a:p>
-            <a:r>
-              <a:rPr sz="1300">
-                <a:solidFill>
-                  <a:srgbClr val="FFFFFF"/>
-                </a:solidFill>
-                <a:latin typeface="Consolas"/>
-              </a:rPr>
               <a:t>SD Ready</a:t>
             </a:r>
           </a:p>
           <a:p>
-            <a:r>
-              <a:rPr sz="1300">
-                <a:solidFill>
-                  <a:srgbClr val="FFFFFF"/>
-                </a:solidFill>
-                <a:latin typeface="Consolas"/>
-              </a:rPr>
-              <a:t/>
-            </a:r>
+            <a:endParaRPr sz="1300">
+              <a:solidFill>
+                <a:srgbClr val="FFFFFF"/>
+              </a:solidFill>
+              <a:latin typeface="Consolas"/>
+            </a:endParaRPr>
           </a:p>
           <a:p>
             <a:r>
@@ -4687,7 +4754,7 @@
         </p:nvGraphicFramePr>
         <p:xfrm>
           <a:off x="6217920" y="1600200"/>
-          <a:ext cx="5577840" cy="3008376"/>
+          <a:ext cx="5577840" cy="3035808"/>
         </p:xfrm>
         <a:graphic>
           <a:graphicData uri="http://schemas.openxmlformats.org/drawingml/2006/table">
@@ -4696,8 +4763,20 @@
                 <a:tableStyleId>{5C22544A-7EE6-4342-B048-85BDC9FD1C3A}</a:tableStyleId>
               </a:tblPr>
               <a:tblGrid>
-                <a:gridCol w="2011680"/>
-                <a:gridCol w="3566160"/>
+                <a:gridCol w="2011680">
+                  <a:extLst>
+                    <a:ext uri="{9D8B030D-6E8A-4147-A177-3AD203B41FA5}">
+                      <a16:colId xmlns:a16="http://schemas.microsoft.com/office/drawing/2014/main" val="20000"/>
+                    </a:ext>
+                  </a:extLst>
+                </a:gridCol>
+                <a:gridCol w="3566160">
+                  <a:extLst>
+                    <a:ext uri="{9D8B030D-6E8A-4147-A177-3AD203B41FA5}">
+                      <a16:colId xmlns:a16="http://schemas.microsoft.com/office/drawing/2014/main" val="20001"/>
+                    </a:ext>
+                  </a:extLst>
+                </a:gridCol>
               </a:tblGrid>
               <a:tr h="429768">
                 <a:tc>
@@ -4746,6 +4825,11 @@
                     </a:solidFill>
                   </a:tcPr>
                 </a:tc>
+                <a:extLst>
+                  <a:ext uri="{0D108BD9-81ED-4DB2-BD59-A6C34878D82A}">
+                    <a16:rowId xmlns:a16="http://schemas.microsoft.com/office/drawing/2014/main" val="10000"/>
+                  </a:ext>
+                </a:extLst>
               </a:tr>
               <a:tr h="429768">
                 <a:tc>
@@ -4794,6 +4878,11 @@
                     </a:solidFill>
                   </a:tcPr>
                 </a:tc>
+                <a:extLst>
+                  <a:ext uri="{0D108BD9-81ED-4DB2-BD59-A6C34878D82A}">
+                    <a16:rowId xmlns:a16="http://schemas.microsoft.com/office/drawing/2014/main" val="10001"/>
+                  </a:ext>
+                </a:extLst>
               </a:tr>
               <a:tr h="429768">
                 <a:tc>
@@ -4842,6 +4931,11 @@
                     </a:solidFill>
                   </a:tcPr>
                 </a:tc>
+                <a:extLst>
+                  <a:ext uri="{0D108BD9-81ED-4DB2-BD59-A6C34878D82A}">
+                    <a16:rowId xmlns:a16="http://schemas.microsoft.com/office/drawing/2014/main" val="10002"/>
+                  </a:ext>
+                </a:extLst>
               </a:tr>
               <a:tr h="429768">
                 <a:tc>
@@ -4890,6 +4984,11 @@
                     </a:solidFill>
                   </a:tcPr>
                 </a:tc>
+                <a:extLst>
+                  <a:ext uri="{0D108BD9-81ED-4DB2-BD59-A6C34878D82A}">
+                    <a16:rowId xmlns:a16="http://schemas.microsoft.com/office/drawing/2014/main" val="10003"/>
+                  </a:ext>
+                </a:extLst>
               </a:tr>
               <a:tr h="429768">
                 <a:tc>
@@ -4938,6 +5037,11 @@
                     </a:solidFill>
                   </a:tcPr>
                 </a:tc>
+                <a:extLst>
+                  <a:ext uri="{0D108BD9-81ED-4DB2-BD59-A6C34878D82A}">
+                    <a16:rowId xmlns:a16="http://schemas.microsoft.com/office/drawing/2014/main" val="10004"/>
+                  </a:ext>
+                </a:extLst>
               </a:tr>
               <a:tr h="429768">
                 <a:tc>
@@ -4986,6 +5090,11 @@
                     </a:solidFill>
                   </a:tcPr>
                 </a:tc>
+                <a:extLst>
+                  <a:ext uri="{0D108BD9-81ED-4DB2-BD59-A6C34878D82A}">
+                    <a16:rowId xmlns:a16="http://schemas.microsoft.com/office/drawing/2014/main" val="10005"/>
+                  </a:ext>
+                </a:extLst>
               </a:tr>
               <a:tr h="429768">
                 <a:tc>
@@ -5034,6 +5143,11 @@
                     </a:solidFill>
                   </a:tcPr>
                 </a:tc>
+                <a:extLst>
+                  <a:ext uri="{0D108BD9-81ED-4DB2-BD59-A6C34878D82A}">
+                    <a16:rowId xmlns:a16="http://schemas.microsoft.com/office/drawing/2014/main" val="10006"/>
+                  </a:ext>
+                </a:extLst>
               </a:tr>
             </a:tbl>
           </a:graphicData>
@@ -5048,7 +5162,7 @@
 </file>
 
 <file path=ppt/slides/slide12.xml><?xml version="1.0" encoding="utf-8"?>
-<p:sld xmlns:a="http://schemas.openxmlformats.org/drawingml/2006/main" xmlns:p="http://schemas.openxmlformats.org/presentationml/2006/main" xmlns:r="http://schemas.openxmlformats.org/officeDocument/2006/relationships">
+<p:sld xmlns:a="http://schemas.openxmlformats.org/drawingml/2006/main" xmlns:r="http://schemas.openxmlformats.org/officeDocument/2006/relationships" xmlns:p="http://schemas.openxmlformats.org/presentationml/2006/main">
   <p:cSld>
     <p:spTree>
       <p:nvGrpSpPr>
@@ -5056,7 +5170,14 @@
         <p:cNvGrpSpPr/>
         <p:nvPr/>
       </p:nvGrpSpPr>
-      <p:grpSpPr/>
+      <p:grpSpPr>
+        <a:xfrm>
+          <a:off x="0" y="0"/>
+          <a:ext cx="0" cy="0"/>
+          <a:chOff x="0" y="0"/>
+          <a:chExt cx="0" cy="0"/>
+        </a:xfrm>
+      </p:grpSpPr>
       <p:sp>
         <p:nvSpPr>
           <p:cNvPr id="2" name="Rectangle 1"/>
@@ -5097,6 +5218,7 @@
           <a:lstStyle/>
           <a:p>
             <a:pPr algn="ctr"/>
+            <a:endParaRPr/>
           </a:p>
         </p:txBody>
       </p:sp>
@@ -5210,6 +5332,7 @@
           <a:lstStyle/>
           <a:p>
             <a:pPr algn="ctr"/>
+            <a:endParaRPr/>
           </a:p>
         </p:txBody>
       </p:sp>
@@ -5325,6 +5448,7 @@
           <a:lstStyle/>
           <a:p>
             <a:pPr algn="ctr"/>
+            <a:endParaRPr/>
           </a:p>
         </p:txBody>
       </p:sp>
@@ -5361,6 +5485,14 @@
             </a:r>
           </a:p>
           <a:p>
+            <a:endParaRPr sz="1300">
+              <a:solidFill>
+                <a:srgbClr val="FFFFFF"/>
+              </a:solidFill>
+              <a:latin typeface="Consolas"/>
+            </a:endParaRPr>
+          </a:p>
+          <a:p>
             <a:r>
               <a:rPr sz="1300">
                 <a:solidFill>
@@ -5368,7 +5500,7 @@
                 </a:solidFill>
                 <a:latin typeface="Consolas"/>
               </a:rPr>
-              <a:t/>
+              <a:t>Temp:</a:t>
             </a:r>
           </a:p>
           <a:p>
@@ -5379,8 +5511,16 @@
                 </a:solidFill>
                 <a:latin typeface="Consolas"/>
               </a:rPr>
-              <a:t>Temp:</a:t>
-            </a:r>
+              <a:t>  540.2  C</a:t>
+            </a:r>
+          </a:p>
+          <a:p>
+            <a:endParaRPr sz="1300">
+              <a:solidFill>
+                <a:srgbClr val="FFFFFF"/>
+              </a:solidFill>
+              <a:latin typeface="Consolas"/>
+            </a:endParaRPr>
           </a:p>
           <a:p>
             <a:r>
@@ -5390,7 +5530,7 @@
                 </a:solidFill>
                 <a:latin typeface="Consolas"/>
               </a:rPr>
-              <a:t>  540.2  C</a:t>
+              <a:t>Samples:   142</a:t>
             </a:r>
           </a:p>
           <a:p>
@@ -5401,41 +5541,16 @@
                 </a:solidFill>
                 <a:latin typeface="Consolas"/>
               </a:rPr>
-              <a:t/>
-            </a:r>
-          </a:p>
-          <a:p>
-            <a:r>
-              <a:rPr sz="1300">
-                <a:solidFill>
-                  <a:srgbClr val="FFFFFF"/>
-                </a:solidFill>
-                <a:latin typeface="Consolas"/>
-              </a:rPr>
-              <a:t>Samples:   142</a:t>
-            </a:r>
-          </a:p>
-          <a:p>
-            <a:r>
-              <a:rPr sz="1300">
-                <a:solidFill>
-                  <a:srgbClr val="FFFFFF"/>
-                </a:solidFill>
-                <a:latin typeface="Consolas"/>
-              </a:rPr>
               <a:t>SD: /DATA_0000.csv</a:t>
             </a:r>
           </a:p>
           <a:p>
-            <a:r>
-              <a:rPr sz="1300">
-                <a:solidFill>
-                  <a:srgbClr val="FFFFFF"/>
-                </a:solidFill>
-                <a:latin typeface="Consolas"/>
-              </a:rPr>
-              <a:t/>
-            </a:r>
+            <a:endParaRPr sz="1300">
+              <a:solidFill>
+                <a:srgbClr val="FFFFFF"/>
+              </a:solidFill>
+              <a:latin typeface="Consolas"/>
+            </a:endParaRPr>
           </a:p>
           <a:p>
             <a:r>
@@ -5495,7 +5610,7 @@
         </p:nvGraphicFramePr>
         <p:xfrm>
           <a:off x="6217920" y="1600200"/>
-          <a:ext cx="5577840" cy="3008376"/>
+          <a:ext cx="5577840" cy="3090672"/>
         </p:xfrm>
         <a:graphic>
           <a:graphicData uri="http://schemas.openxmlformats.org/drawingml/2006/table">
@@ -5504,8 +5619,20 @@
                 <a:tableStyleId>{5C22544A-7EE6-4342-B048-85BDC9FD1C3A}</a:tableStyleId>
               </a:tblPr>
               <a:tblGrid>
-                <a:gridCol w="2286000"/>
-                <a:gridCol w="3291840"/>
+                <a:gridCol w="2286000">
+                  <a:extLst>
+                    <a:ext uri="{9D8B030D-6E8A-4147-A177-3AD203B41FA5}">
+                      <a16:colId xmlns:a16="http://schemas.microsoft.com/office/drawing/2014/main" val="20000"/>
+                    </a:ext>
+                  </a:extLst>
+                </a:gridCol>
+                <a:gridCol w="3291840">
+                  <a:extLst>
+                    <a:ext uri="{9D8B030D-6E8A-4147-A177-3AD203B41FA5}">
+                      <a16:colId xmlns:a16="http://schemas.microsoft.com/office/drawing/2014/main" val="20001"/>
+                    </a:ext>
+                  </a:extLst>
+                </a:gridCol>
               </a:tblGrid>
               <a:tr h="429768">
                 <a:tc>
@@ -5554,6 +5681,11 @@
                     </a:solidFill>
                   </a:tcPr>
                 </a:tc>
+                <a:extLst>
+                  <a:ext uri="{0D108BD9-81ED-4DB2-BD59-A6C34878D82A}">
+                    <a16:rowId xmlns:a16="http://schemas.microsoft.com/office/drawing/2014/main" val="10000"/>
+                  </a:ext>
+                </a:extLst>
               </a:tr>
               <a:tr h="429768">
                 <a:tc>
@@ -5602,6 +5734,11 @@
                     </a:solidFill>
                   </a:tcPr>
                 </a:tc>
+                <a:extLst>
+                  <a:ext uri="{0D108BD9-81ED-4DB2-BD59-A6C34878D82A}">
+                    <a16:rowId xmlns:a16="http://schemas.microsoft.com/office/drawing/2014/main" val="10001"/>
+                  </a:ext>
+                </a:extLst>
               </a:tr>
               <a:tr h="429768">
                 <a:tc>
@@ -5650,6 +5787,11 @@
                     </a:solidFill>
                   </a:tcPr>
                 </a:tc>
+                <a:extLst>
+                  <a:ext uri="{0D108BD9-81ED-4DB2-BD59-A6C34878D82A}">
+                    <a16:rowId xmlns:a16="http://schemas.microsoft.com/office/drawing/2014/main" val="10002"/>
+                  </a:ext>
+                </a:extLst>
               </a:tr>
               <a:tr h="429768">
                 <a:tc>
@@ -5698,6 +5840,11 @@
                     </a:solidFill>
                   </a:tcPr>
                 </a:tc>
+                <a:extLst>
+                  <a:ext uri="{0D108BD9-81ED-4DB2-BD59-A6C34878D82A}">
+                    <a16:rowId xmlns:a16="http://schemas.microsoft.com/office/drawing/2014/main" val="10003"/>
+                  </a:ext>
+                </a:extLst>
               </a:tr>
               <a:tr h="429768">
                 <a:tc>
@@ -5746,6 +5893,11 @@
                     </a:solidFill>
                   </a:tcPr>
                 </a:tc>
+                <a:extLst>
+                  <a:ext uri="{0D108BD9-81ED-4DB2-BD59-A6C34878D82A}">
+                    <a16:rowId xmlns:a16="http://schemas.microsoft.com/office/drawing/2014/main" val="10004"/>
+                  </a:ext>
+                </a:extLst>
               </a:tr>
               <a:tr h="429768">
                 <a:tc>
@@ -5794,6 +5946,11 @@
                     </a:solidFill>
                   </a:tcPr>
                 </a:tc>
+                <a:extLst>
+                  <a:ext uri="{0D108BD9-81ED-4DB2-BD59-A6C34878D82A}">
+                    <a16:rowId xmlns:a16="http://schemas.microsoft.com/office/drawing/2014/main" val="10005"/>
+                  </a:ext>
+                </a:extLst>
               </a:tr>
               <a:tr h="429768">
                 <a:tc>
@@ -5842,6 +5999,11 @@
                     </a:solidFill>
                   </a:tcPr>
                 </a:tc>
+                <a:extLst>
+                  <a:ext uri="{0D108BD9-81ED-4DB2-BD59-A6C34878D82A}">
+                    <a16:rowId xmlns:a16="http://schemas.microsoft.com/office/drawing/2014/main" val="10006"/>
+                  </a:ext>
+                </a:extLst>
               </a:tr>
             </a:tbl>
           </a:graphicData>
@@ -5856,7 +6018,7 @@
 </file>
 
 <file path=ppt/slides/slide13.xml><?xml version="1.0" encoding="utf-8"?>
-<p:sld xmlns:a="http://schemas.openxmlformats.org/drawingml/2006/main" xmlns:p="http://schemas.openxmlformats.org/presentationml/2006/main" xmlns:r="http://schemas.openxmlformats.org/officeDocument/2006/relationships">
+<p:sld xmlns:a="http://schemas.openxmlformats.org/drawingml/2006/main" xmlns:r="http://schemas.openxmlformats.org/officeDocument/2006/relationships" xmlns:p="http://schemas.openxmlformats.org/presentationml/2006/main">
   <p:cSld>
     <p:spTree>
       <p:nvGrpSpPr>
@@ -5864,7 +6026,14 @@
         <p:cNvGrpSpPr/>
         <p:nvPr/>
       </p:nvGrpSpPr>
-      <p:grpSpPr/>
+      <p:grpSpPr>
+        <a:xfrm>
+          <a:off x="0" y="0"/>
+          <a:ext cx="0" cy="0"/>
+          <a:chOff x="0" y="0"/>
+          <a:chExt cx="0" cy="0"/>
+        </a:xfrm>
+      </p:grpSpPr>
       <p:sp>
         <p:nvSpPr>
           <p:cNvPr id="2" name="Rectangle 1"/>
@@ -5905,6 +6074,7 @@
           <a:lstStyle/>
           <a:p>
             <a:pPr algn="ctr"/>
+            <a:endParaRPr/>
           </a:p>
         </p:txBody>
       </p:sp>
@@ -6018,6 +6188,7 @@
           <a:lstStyle/>
           <a:p>
             <a:pPr algn="ctr"/>
+            <a:endParaRPr/>
           </a:p>
         </p:txBody>
       </p:sp>
@@ -6133,6 +6304,7 @@
           <a:lstStyle/>
           <a:p>
             <a:pPr algn="ctr"/>
+            <a:endParaRPr/>
           </a:p>
         </p:txBody>
       </p:sp>
@@ -6169,6 +6341,14 @@
             </a:r>
           </a:p>
           <a:p>
+            <a:endParaRPr sz="1300">
+              <a:solidFill>
+                <a:srgbClr val="FFFFFF"/>
+              </a:solidFill>
+              <a:latin typeface="Consolas"/>
+            </a:endParaRPr>
+          </a:p>
+          <a:p>
             <a:r>
               <a:rPr sz="1300">
                 <a:solidFill>
@@ -6176,7 +6356,7 @@
                 </a:solidFill>
                 <a:latin typeface="Consolas"/>
               </a:rPr>
-              <a:t/>
+              <a:t>Temp:</a:t>
             </a:r>
           </a:p>
           <a:p>
@@ -6187,8 +6367,16 @@
                 </a:solidFill>
                 <a:latin typeface="Consolas"/>
               </a:rPr>
-              <a:t>Temp:</a:t>
-            </a:r>
+              <a:t>  540.2  C</a:t>
+            </a:r>
+          </a:p>
+          <a:p>
+            <a:endParaRPr sz="1300">
+              <a:solidFill>
+                <a:srgbClr val="FFFFFF"/>
+              </a:solidFill>
+              <a:latin typeface="Consolas"/>
+            </a:endParaRPr>
           </a:p>
           <a:p>
             <a:r>
@@ -6198,7 +6386,7 @@
                 </a:solidFill>
                 <a:latin typeface="Consolas"/>
               </a:rPr>
-              <a:t>  540.2  C</a:t>
+              <a:t>Avg:</a:t>
             </a:r>
           </a:p>
           <a:p>
@@ -6209,41 +6397,16 @@
                 </a:solidFill>
                 <a:latin typeface="Consolas"/>
               </a:rPr>
-              <a:t/>
-            </a:r>
-          </a:p>
-          <a:p>
-            <a:r>
-              <a:rPr sz="1300">
-                <a:solidFill>
-                  <a:srgbClr val="FFFFFF"/>
-                </a:solidFill>
-                <a:latin typeface="Consolas"/>
-              </a:rPr>
-              <a:t>Avg:</a:t>
-            </a:r>
-          </a:p>
-          <a:p>
-            <a:r>
-              <a:rPr sz="1300">
-                <a:solidFill>
-                  <a:srgbClr val="FFFFFF"/>
-                </a:solidFill>
-                <a:latin typeface="Consolas"/>
-              </a:rPr>
               <a:t>  539.8  C</a:t>
             </a:r>
           </a:p>
           <a:p>
-            <a:r>
-              <a:rPr sz="1300">
-                <a:solidFill>
-                  <a:srgbClr val="FFFFFF"/>
-                </a:solidFill>
-                <a:latin typeface="Consolas"/>
-              </a:rPr>
-              <a:t/>
-            </a:r>
+            <a:endParaRPr sz="1300">
+              <a:solidFill>
+                <a:srgbClr val="FFFFFF"/>
+              </a:solidFill>
+              <a:latin typeface="Consolas"/>
+            </a:endParaRPr>
           </a:p>
           <a:p>
             <a:r>
@@ -6335,6 +6498,7 @@
           <a:lstStyle/>
           <a:p>
             <a:pPr algn="ctr"/>
+            <a:endParaRPr/>
           </a:p>
         </p:txBody>
       </p:sp>
@@ -6371,6 +6535,14 @@
             </a:r>
           </a:p>
           <a:p>
+            <a:endParaRPr sz="1300">
+              <a:solidFill>
+                <a:srgbClr val="FFFFFF"/>
+              </a:solidFill>
+              <a:latin typeface="Consolas"/>
+            </a:endParaRPr>
+          </a:p>
+          <a:p>
             <a:r>
               <a:rPr sz="1300">
                 <a:solidFill>
@@ -6378,7 +6550,7 @@
                 </a:solidFill>
                 <a:latin typeface="Consolas"/>
               </a:rPr>
-              <a:t/>
+              <a:t>StdDev:</a:t>
             </a:r>
           </a:p>
           <a:p>
@@ -6389,7 +6561,7 @@
                 </a:solidFill>
                 <a:latin typeface="Consolas"/>
               </a:rPr>
-              <a:t>StdDev:</a:t>
+              <a:t>   0.8  C</a:t>
             </a:r>
           </a:p>
           <a:p>
@@ -6400,7 +6572,7 @@
                 </a:solidFill>
                 <a:latin typeface="Consolas"/>
               </a:rPr>
-              <a:t>   0.8  C</a:t>
+              <a:t>Range:   10.0  C</a:t>
             </a:r>
           </a:p>
           <a:p>
@@ -6411,7 +6583,7 @@
                 </a:solidFill>
                 <a:latin typeface="Consolas"/>
               </a:rPr>
-              <a:t>Range:   10.0  C</a:t>
+              <a:t>Max:    550.0  C</a:t>
             </a:r>
           </a:p>
           <a:p>
@@ -6422,30 +6594,16 @@
                 </a:solidFill>
                 <a:latin typeface="Consolas"/>
               </a:rPr>
-              <a:t>Max:    550.0  C</a:t>
-            </a:r>
-          </a:p>
-          <a:p>
-            <a:r>
-              <a:rPr sz="1300">
-                <a:solidFill>
-                  <a:srgbClr val="FFFFFF"/>
-                </a:solidFill>
-                <a:latin typeface="Consolas"/>
-              </a:rPr>
               <a:t>Min:    530.0  C</a:t>
             </a:r>
           </a:p>
           <a:p>
-            <a:r>
-              <a:rPr sz="1300">
-                <a:solidFill>
-                  <a:srgbClr val="FFFFFF"/>
-                </a:solidFill>
-                <a:latin typeface="Consolas"/>
-              </a:rPr>
-              <a:t/>
-            </a:r>
+            <a:endParaRPr sz="1300">
+              <a:solidFill>
+                <a:srgbClr val="FFFFFF"/>
+              </a:solidFill>
+              <a:latin typeface="Consolas"/>
+            </a:endParaRPr>
           </a:p>
           <a:p>
             <a:r>
@@ -6504,7 +6662,7 @@
 </file>
 
 <file path=ppt/slides/slide14.xml><?xml version="1.0" encoding="utf-8"?>
-<p:sld xmlns:a="http://schemas.openxmlformats.org/drawingml/2006/main" xmlns:p="http://schemas.openxmlformats.org/presentationml/2006/main" xmlns:r="http://schemas.openxmlformats.org/officeDocument/2006/relationships">
+<p:sld xmlns:a="http://schemas.openxmlformats.org/drawingml/2006/main" xmlns:r="http://schemas.openxmlformats.org/officeDocument/2006/relationships" xmlns:p="http://schemas.openxmlformats.org/presentationml/2006/main">
   <p:cSld>
     <p:spTree>
       <p:nvGrpSpPr>
@@ -6512,7 +6670,14 @@
         <p:cNvGrpSpPr/>
         <p:nvPr/>
       </p:nvGrpSpPr>
-      <p:grpSpPr/>
+      <p:grpSpPr>
+        <a:xfrm>
+          <a:off x="0" y="0"/>
+          <a:ext cx="0" cy="0"/>
+          <a:chOff x="0" y="0"/>
+          <a:chExt cx="0" cy="0"/>
+        </a:xfrm>
+      </p:grpSpPr>
       <p:sp>
         <p:nvSpPr>
           <p:cNvPr id="2" name="Rectangle 1"/>
@@ -6553,6 +6718,7 @@
           <a:lstStyle/>
           <a:p>
             <a:pPr algn="ctr"/>
+            <a:endParaRPr/>
           </a:p>
         </p:txBody>
       </p:sp>
@@ -6666,6 +6832,7 @@
           <a:lstStyle/>
           <a:p>
             <a:pPr algn="ctr"/>
+            <a:endParaRPr/>
           </a:p>
         </p:txBody>
       </p:sp>
@@ -6781,6 +6948,7 @@
           <a:lstStyle/>
           <a:p>
             <a:pPr algn="ctr"/>
+            <a:endParaRPr/>
           </a:p>
         </p:txBody>
       </p:sp>
@@ -6817,6 +6985,14 @@
             </a:r>
           </a:p>
           <a:p>
+            <a:endParaRPr sz="1300">
+              <a:solidFill>
+                <a:srgbClr val="FFFFFF"/>
+              </a:solidFill>
+              <a:latin typeface="Consolas"/>
+            </a:endParaRPr>
+          </a:p>
+          <a:p>
             <a:r>
               <a:rPr sz="1300">
                 <a:solidFill>
@@ -6824,7 +7000,7 @@
                 </a:solidFill>
                 <a:latin typeface="Consolas"/>
               </a:rPr>
-              <a:t/>
+              <a:t>Current:</a:t>
             </a:r>
           </a:p>
           <a:p>
@@ -6835,30 +7011,16 @@
                 </a:solidFill>
                 <a:latin typeface="Consolas"/>
               </a:rPr>
-              <a:t>Current:</a:t>
-            </a:r>
-          </a:p>
-          <a:p>
-            <a:r>
-              <a:rPr sz="1300">
-                <a:solidFill>
-                  <a:srgbClr val="FFFFFF"/>
-                </a:solidFill>
-                <a:latin typeface="Consolas"/>
-              </a:rPr>
               <a:t>  600.0  C</a:t>
             </a:r>
           </a:p>
           <a:p>
-            <a:r>
-              <a:rPr sz="1300">
-                <a:solidFill>
-                  <a:srgbClr val="FFFFFF"/>
-                </a:solidFill>
-                <a:latin typeface="Consolas"/>
-              </a:rPr>
-              <a:t/>
-            </a:r>
+            <a:endParaRPr sz="1300">
+              <a:solidFill>
+                <a:srgbClr val="FFFFFF"/>
+              </a:solidFill>
+              <a:latin typeface="Consolas"/>
+            </a:endParaRPr>
           </a:p>
           <a:p>
             <a:r>
@@ -6961,6 +7123,7 @@
           <a:lstStyle/>
           <a:p>
             <a:pPr algn="ctr"/>
+            <a:endParaRPr/>
           </a:p>
         </p:txBody>
       </p:sp>
@@ -6997,6 +7160,14 @@
             </a:r>
           </a:p>
           <a:p>
+            <a:endParaRPr sz="1300">
+              <a:solidFill>
+                <a:srgbClr val="FFFFFF"/>
+              </a:solidFill>
+              <a:latin typeface="Consolas"/>
+            </a:endParaRPr>
+          </a:p>
+          <a:p>
             <a:r>
               <a:rPr sz="1300">
                 <a:solidFill>
@@ -7004,7 +7175,7 @@
                 </a:solidFill>
                 <a:latin typeface="Consolas"/>
               </a:rPr>
-              <a:t/>
+              <a:t>Current:</a:t>
             </a:r>
           </a:p>
           <a:p>
@@ -7015,30 +7186,16 @@
                 </a:solidFill>
                 <a:latin typeface="Consolas"/>
               </a:rPr>
-              <a:t>Current:</a:t>
-            </a:r>
-          </a:p>
-          <a:p>
-            <a:r>
-              <a:rPr sz="1300">
-                <a:solidFill>
-                  <a:srgbClr val="FFFFFF"/>
-                </a:solidFill>
-                <a:latin typeface="Consolas"/>
-              </a:rPr>
               <a:t>  400.0  C</a:t>
             </a:r>
           </a:p>
           <a:p>
-            <a:r>
-              <a:rPr sz="1300">
-                <a:solidFill>
-                  <a:srgbClr val="FFFFFF"/>
-                </a:solidFill>
-                <a:latin typeface="Consolas"/>
-              </a:rPr>
-              <a:t/>
-            </a:r>
+            <a:endParaRPr sz="1300">
+              <a:solidFill>
+                <a:srgbClr val="FFFFFF"/>
+              </a:solidFill>
+              <a:latin typeface="Consolas"/>
+            </a:endParaRPr>
           </a:p>
           <a:p>
             <a:r>
@@ -7108,7 +7265,7 @@
 </file>
 
 <file path=ppt/slides/slide15.xml><?xml version="1.0" encoding="utf-8"?>
-<p:sld xmlns:a="http://schemas.openxmlformats.org/drawingml/2006/main" xmlns:p="http://schemas.openxmlformats.org/presentationml/2006/main" xmlns:r="http://schemas.openxmlformats.org/officeDocument/2006/relationships">
+<p:sld xmlns:a="http://schemas.openxmlformats.org/drawingml/2006/main" xmlns:r="http://schemas.openxmlformats.org/officeDocument/2006/relationships" xmlns:p="http://schemas.openxmlformats.org/presentationml/2006/main">
   <p:cSld>
     <p:spTree>
       <p:nvGrpSpPr>
@@ -7116,7 +7273,14 @@
         <p:cNvGrpSpPr/>
         <p:nvPr/>
       </p:nvGrpSpPr>
-      <p:grpSpPr/>
+      <p:grpSpPr>
+        <a:xfrm>
+          <a:off x="0" y="0"/>
+          <a:ext cx="0" cy="0"/>
+          <a:chOff x="0" y="0"/>
+          <a:chExt cx="0" cy="0"/>
+        </a:xfrm>
+      </p:grpSpPr>
       <p:sp>
         <p:nvSpPr>
           <p:cNvPr id="2" name="Rectangle 1"/>
@@ -7157,6 +7321,7 @@
           <a:lstStyle/>
           <a:p>
             <a:pPr algn="ctr"/>
+            <a:endParaRPr/>
           </a:p>
         </p:txBody>
       </p:sp>
@@ -7270,6 +7435,7 @@
           <a:lstStyle/>
           <a:p>
             <a:pPr algn="ctr"/>
+            <a:endParaRPr/>
           </a:p>
         </p:txBody>
       </p:sp>
@@ -7397,10 +7563,34 @@
                 <a:tableStyleId>{5C22544A-7EE6-4342-B048-85BDC9FD1C3A}</a:tableStyleId>
               </a:tblPr>
               <a:tblGrid>
-                <a:gridCol w="731520"/>
-                <a:gridCol w="2103120"/>
-                <a:gridCol w="1828800"/>
-                <a:gridCol w="6858000"/>
+                <a:gridCol w="731520">
+                  <a:extLst>
+                    <a:ext uri="{9D8B030D-6E8A-4147-A177-3AD203B41FA5}">
+                      <a16:colId xmlns:a16="http://schemas.microsoft.com/office/drawing/2014/main" val="20000"/>
+                    </a:ext>
+                  </a:extLst>
+                </a:gridCol>
+                <a:gridCol w="2103120">
+                  <a:extLst>
+                    <a:ext uri="{9D8B030D-6E8A-4147-A177-3AD203B41FA5}">
+                      <a16:colId xmlns:a16="http://schemas.microsoft.com/office/drawing/2014/main" val="20001"/>
+                    </a:ext>
+                  </a:extLst>
+                </a:gridCol>
+                <a:gridCol w="1828800">
+                  <a:extLst>
+                    <a:ext uri="{9D8B030D-6E8A-4147-A177-3AD203B41FA5}">
+                      <a16:colId xmlns:a16="http://schemas.microsoft.com/office/drawing/2014/main" val="20002"/>
+                    </a:ext>
+                  </a:extLst>
+                </a:gridCol>
+                <a:gridCol w="6858000">
+                  <a:extLst>
+                    <a:ext uri="{9D8B030D-6E8A-4147-A177-3AD203B41FA5}">
+                      <a16:colId xmlns:a16="http://schemas.microsoft.com/office/drawing/2014/main" val="20003"/>
+                    </a:ext>
+                  </a:extLst>
+                </a:gridCol>
               </a:tblGrid>
               <a:tr h="402336">
                 <a:tc>
@@ -7495,6 +7685,11 @@
                     </a:solidFill>
                   </a:tcPr>
                 </a:tc>
+                <a:extLst>
+                  <a:ext uri="{0D108BD9-81ED-4DB2-BD59-A6C34878D82A}">
+                    <a16:rowId xmlns:a16="http://schemas.microsoft.com/office/drawing/2014/main" val="10000"/>
+                  </a:ext>
+                </a:extLst>
               </a:tr>
               <a:tr h="402336">
                 <a:tc>
@@ -7589,6 +7784,11 @@
                     </a:solidFill>
                   </a:tcPr>
                 </a:tc>
+                <a:extLst>
+                  <a:ext uri="{0D108BD9-81ED-4DB2-BD59-A6C34878D82A}">
+                    <a16:rowId xmlns:a16="http://schemas.microsoft.com/office/drawing/2014/main" val="10001"/>
+                  </a:ext>
+                </a:extLst>
               </a:tr>
               <a:tr h="402336">
                 <a:tc>
@@ -7683,6 +7883,11 @@
                     </a:solidFill>
                   </a:tcPr>
                 </a:tc>
+                <a:extLst>
+                  <a:ext uri="{0D108BD9-81ED-4DB2-BD59-A6C34878D82A}">
+                    <a16:rowId xmlns:a16="http://schemas.microsoft.com/office/drawing/2014/main" val="10002"/>
+                  </a:ext>
+                </a:extLst>
               </a:tr>
               <a:tr h="402336">
                 <a:tc>
@@ -7777,6 +7982,11 @@
                     </a:solidFill>
                   </a:tcPr>
                 </a:tc>
+                <a:extLst>
+                  <a:ext uri="{0D108BD9-81ED-4DB2-BD59-A6C34878D82A}">
+                    <a16:rowId xmlns:a16="http://schemas.microsoft.com/office/drawing/2014/main" val="10003"/>
+                  </a:ext>
+                </a:extLst>
               </a:tr>
               <a:tr h="402336">
                 <a:tc>
@@ -7871,6 +8081,11 @@
                     </a:solidFill>
                   </a:tcPr>
                 </a:tc>
+                <a:extLst>
+                  <a:ext uri="{0D108BD9-81ED-4DB2-BD59-A6C34878D82A}">
+                    <a16:rowId xmlns:a16="http://schemas.microsoft.com/office/drawing/2014/main" val="10004"/>
+                  </a:ext>
+                </a:extLst>
               </a:tr>
               <a:tr h="402336">
                 <a:tc>
@@ -7965,6 +8180,11 @@
                     </a:solidFill>
                   </a:tcPr>
                 </a:tc>
+                <a:extLst>
+                  <a:ext uri="{0D108BD9-81ED-4DB2-BD59-A6C34878D82A}">
+                    <a16:rowId xmlns:a16="http://schemas.microsoft.com/office/drawing/2014/main" val="10005"/>
+                  </a:ext>
+                </a:extLst>
               </a:tr>
               <a:tr h="402336">
                 <a:tc>
@@ -8059,6 +8279,11 @@
                     </a:solidFill>
                   </a:tcPr>
                 </a:tc>
+                <a:extLst>
+                  <a:ext uri="{0D108BD9-81ED-4DB2-BD59-A6C34878D82A}">
+                    <a16:rowId xmlns:a16="http://schemas.microsoft.com/office/drawing/2014/main" val="10006"/>
+                  </a:ext>
+                </a:extLst>
               </a:tr>
               <a:tr h="402336">
                 <a:tc>
@@ -8153,6 +8378,11 @@
                     </a:solidFill>
                   </a:tcPr>
                 </a:tc>
+                <a:extLst>
+                  <a:ext uri="{0D108BD9-81ED-4DB2-BD59-A6C34878D82A}">
+                    <a16:rowId xmlns:a16="http://schemas.microsoft.com/office/drawing/2014/main" val="10007"/>
+                  </a:ext>
+                </a:extLst>
               </a:tr>
               <a:tr h="402336">
                 <a:tc>
@@ -8247,6 +8477,11 @@
                     </a:solidFill>
                   </a:tcPr>
                 </a:tc>
+                <a:extLst>
+                  <a:ext uri="{0D108BD9-81ED-4DB2-BD59-A6C34878D82A}">
+                    <a16:rowId xmlns:a16="http://schemas.microsoft.com/office/drawing/2014/main" val="10008"/>
+                  </a:ext>
+                </a:extLst>
               </a:tr>
               <a:tr h="402336">
                 <a:tc>
@@ -8341,6 +8576,11 @@
                     </a:solidFill>
                   </a:tcPr>
                 </a:tc>
+                <a:extLst>
+                  <a:ext uri="{0D108BD9-81ED-4DB2-BD59-A6C34878D82A}">
+                    <a16:rowId xmlns:a16="http://schemas.microsoft.com/office/drawing/2014/main" val="10009"/>
+                  </a:ext>
+                </a:extLst>
               </a:tr>
               <a:tr h="402336">
                 <a:tc>
@@ -8435,6 +8675,11 @@
                     </a:solidFill>
                   </a:tcPr>
                 </a:tc>
+                <a:extLst>
+                  <a:ext uri="{0D108BD9-81ED-4DB2-BD59-A6C34878D82A}">
+                    <a16:rowId xmlns:a16="http://schemas.microsoft.com/office/drawing/2014/main" val="10010"/>
+                  </a:ext>
+                </a:extLst>
               </a:tr>
             </a:tbl>
           </a:graphicData>
@@ -8484,7 +8729,7 @@
 </file>
 
 <file path=ppt/slides/slide16.xml><?xml version="1.0" encoding="utf-8"?>
-<p:sld xmlns:a="http://schemas.openxmlformats.org/drawingml/2006/main" xmlns:p="http://schemas.openxmlformats.org/presentationml/2006/main" xmlns:r="http://schemas.openxmlformats.org/officeDocument/2006/relationships">
+<p:sld xmlns:a="http://schemas.openxmlformats.org/drawingml/2006/main" xmlns:r="http://schemas.openxmlformats.org/officeDocument/2006/relationships" xmlns:p="http://schemas.openxmlformats.org/presentationml/2006/main">
   <p:cSld>
     <p:spTree>
       <p:nvGrpSpPr>
@@ -8492,7 +8737,14 @@
         <p:cNvGrpSpPr/>
         <p:nvPr/>
       </p:nvGrpSpPr>
-      <p:grpSpPr/>
+      <p:grpSpPr>
+        <a:xfrm>
+          <a:off x="0" y="0"/>
+          <a:ext cx="0" cy="0"/>
+          <a:chOff x="0" y="0"/>
+          <a:chExt cx="0" cy="0"/>
+        </a:xfrm>
+      </p:grpSpPr>
       <p:sp>
         <p:nvSpPr>
           <p:cNvPr id="2" name="Rectangle 1"/>
@@ -8533,6 +8785,7 @@
           <a:lstStyle/>
           <a:p>
             <a:pPr algn="ctr"/>
+            <a:endParaRPr/>
           </a:p>
         </p:txBody>
       </p:sp>
@@ -8646,6 +8899,7 @@
           <a:lstStyle/>
           <a:p>
             <a:pPr algn="ctr"/>
+            <a:endParaRPr/>
           </a:p>
         </p:txBody>
       </p:sp>
@@ -8738,9 +8992,27 @@
                 <a:tableStyleId>{5C22544A-7EE6-4342-B048-85BDC9FD1C3A}</a:tableStyleId>
               </a:tblPr>
               <a:tblGrid>
-                <a:gridCol w="731520"/>
-                <a:gridCol w="4114800"/>
-                <a:gridCol w="6675120"/>
+                <a:gridCol w="731520">
+                  <a:extLst>
+                    <a:ext uri="{9D8B030D-6E8A-4147-A177-3AD203B41FA5}">
+                      <a16:colId xmlns:a16="http://schemas.microsoft.com/office/drawing/2014/main" val="20000"/>
+                    </a:ext>
+                  </a:extLst>
+                </a:gridCol>
+                <a:gridCol w="4114800">
+                  <a:extLst>
+                    <a:ext uri="{9D8B030D-6E8A-4147-A177-3AD203B41FA5}">
+                      <a16:colId xmlns:a16="http://schemas.microsoft.com/office/drawing/2014/main" val="20001"/>
+                    </a:ext>
+                  </a:extLst>
+                </a:gridCol>
+                <a:gridCol w="6675120">
+                  <a:extLst>
+                    <a:ext uri="{9D8B030D-6E8A-4147-A177-3AD203B41FA5}">
+                      <a16:colId xmlns:a16="http://schemas.microsoft.com/office/drawing/2014/main" val="20002"/>
+                    </a:ext>
+                  </a:extLst>
+                </a:gridCol>
               </a:tblGrid>
               <a:tr h="457200">
                 <a:tc>
@@ -8812,6 +9084,11 @@
                     </a:solidFill>
                   </a:tcPr>
                 </a:tc>
+                <a:extLst>
+                  <a:ext uri="{0D108BD9-81ED-4DB2-BD59-A6C34878D82A}">
+                    <a16:rowId xmlns:a16="http://schemas.microsoft.com/office/drawing/2014/main" val="10000"/>
+                  </a:ext>
+                </a:extLst>
               </a:tr>
               <a:tr h="457200">
                 <a:tc>
@@ -8883,6 +9160,11 @@
                     </a:solidFill>
                   </a:tcPr>
                 </a:tc>
+                <a:extLst>
+                  <a:ext uri="{0D108BD9-81ED-4DB2-BD59-A6C34878D82A}">
+                    <a16:rowId xmlns:a16="http://schemas.microsoft.com/office/drawing/2014/main" val="10001"/>
+                  </a:ext>
+                </a:extLst>
               </a:tr>
               <a:tr h="457200">
                 <a:tc>
@@ -8954,6 +9236,11 @@
                     </a:solidFill>
                   </a:tcPr>
                 </a:tc>
+                <a:extLst>
+                  <a:ext uri="{0D108BD9-81ED-4DB2-BD59-A6C34878D82A}">
+                    <a16:rowId xmlns:a16="http://schemas.microsoft.com/office/drawing/2014/main" val="10002"/>
+                  </a:ext>
+                </a:extLst>
               </a:tr>
               <a:tr h="457200">
                 <a:tc>
@@ -9025,6 +9312,11 @@
                     </a:solidFill>
                   </a:tcPr>
                 </a:tc>
+                <a:extLst>
+                  <a:ext uri="{0D108BD9-81ED-4DB2-BD59-A6C34878D82A}">
+                    <a16:rowId xmlns:a16="http://schemas.microsoft.com/office/drawing/2014/main" val="10003"/>
+                  </a:ext>
+                </a:extLst>
               </a:tr>
               <a:tr h="457200">
                 <a:tc>
@@ -9096,6 +9388,11 @@
                     </a:solidFill>
                   </a:tcPr>
                 </a:tc>
+                <a:extLst>
+                  <a:ext uri="{0D108BD9-81ED-4DB2-BD59-A6C34878D82A}">
+                    <a16:rowId xmlns:a16="http://schemas.microsoft.com/office/drawing/2014/main" val="10004"/>
+                  </a:ext>
+                </a:extLst>
               </a:tr>
               <a:tr h="457200">
                 <a:tc>
@@ -9167,6 +9464,11 @@
                     </a:solidFill>
                   </a:tcPr>
                 </a:tc>
+                <a:extLst>
+                  <a:ext uri="{0D108BD9-81ED-4DB2-BD59-A6C34878D82A}">
+                    <a16:rowId xmlns:a16="http://schemas.microsoft.com/office/drawing/2014/main" val="10005"/>
+                  </a:ext>
+                </a:extLst>
               </a:tr>
             </a:tbl>
           </a:graphicData>
@@ -9212,6 +9514,7 @@
           <a:lstStyle/>
           <a:p>
             <a:pPr algn="ctr"/>
+            <a:endParaRPr/>
           </a:p>
         </p:txBody>
       </p:sp>
@@ -9283,7 +9586,7 @@
 </file>
 
 <file path=ppt/slides/slide17.xml><?xml version="1.0" encoding="utf-8"?>
-<p:sld xmlns:a="http://schemas.openxmlformats.org/drawingml/2006/main" xmlns:p="http://schemas.openxmlformats.org/presentationml/2006/main" xmlns:r="http://schemas.openxmlformats.org/officeDocument/2006/relationships">
+<p:sld xmlns:a="http://schemas.openxmlformats.org/drawingml/2006/main" xmlns:r="http://schemas.openxmlformats.org/officeDocument/2006/relationships" xmlns:p="http://schemas.openxmlformats.org/presentationml/2006/main">
   <p:cSld>
     <p:spTree>
       <p:nvGrpSpPr>
@@ -9291,7 +9594,14 @@
         <p:cNvGrpSpPr/>
         <p:nvPr/>
       </p:nvGrpSpPr>
-      <p:grpSpPr/>
+      <p:grpSpPr>
+        <a:xfrm>
+          <a:off x="0" y="0"/>
+          <a:ext cx="0" cy="0"/>
+          <a:chOff x="0" y="0"/>
+          <a:chExt cx="0" cy="0"/>
+        </a:xfrm>
+      </p:grpSpPr>
       <p:sp>
         <p:nvSpPr>
           <p:cNvPr id="2" name="Rectangle 1"/>
@@ -9332,6 +9642,7 @@
           <a:lstStyle/>
           <a:p>
             <a:pPr algn="ctr"/>
+            <a:endParaRPr/>
           </a:p>
         </p:txBody>
       </p:sp>
@@ -9445,6 +9756,7 @@
           <a:lstStyle/>
           <a:p>
             <a:pPr algn="ctr"/>
+            <a:endParaRPr/>
           </a:p>
         </p:txBody>
       </p:sp>
@@ -9595,6 +9907,7 @@
           <a:lstStyle/>
           <a:p>
             <a:pPr algn="ctr"/>
+            <a:endParaRPr/>
           </a:p>
         </p:txBody>
       </p:sp>
@@ -9638,6 +9951,7 @@
           <a:lstStyle/>
           <a:p>
             <a:pPr algn="ctr"/>
+            <a:endParaRPr/>
           </a:p>
         </p:txBody>
       </p:sp>
@@ -9883,6 +10197,7 @@
           <a:lstStyle/>
           <a:p>
             <a:pPr algn="ctr"/>
+            <a:endParaRPr/>
           </a:p>
         </p:txBody>
       </p:sp>
@@ -9926,6 +10241,7 @@
           <a:lstStyle/>
           <a:p>
             <a:pPr algn="ctr"/>
+            <a:endParaRPr/>
           </a:p>
         </p:txBody>
       </p:sp>
@@ -10147,6 +10463,7 @@
           <a:lstStyle/>
           <a:p>
             <a:pPr algn="ctr"/>
+            <a:endParaRPr/>
           </a:p>
         </p:txBody>
       </p:sp>
@@ -10190,6 +10507,7 @@
           <a:lstStyle/>
           <a:p>
             <a:pPr algn="ctr"/>
+            <a:endParaRPr/>
           </a:p>
         </p:txBody>
       </p:sp>
@@ -10413,7 +10731,7 @@
 </file>
 
 <file path=ppt/slides/slide18.xml><?xml version="1.0" encoding="utf-8"?>
-<p:sld xmlns:a="http://schemas.openxmlformats.org/drawingml/2006/main" xmlns:p="http://schemas.openxmlformats.org/presentationml/2006/main" xmlns:r="http://schemas.openxmlformats.org/officeDocument/2006/relationships">
+<p:sld xmlns:a="http://schemas.openxmlformats.org/drawingml/2006/main" xmlns:r="http://schemas.openxmlformats.org/officeDocument/2006/relationships" xmlns:p="http://schemas.openxmlformats.org/presentationml/2006/main">
   <p:cSld>
     <p:spTree>
       <p:nvGrpSpPr>
@@ -10421,7 +10739,14 @@
         <p:cNvGrpSpPr/>
         <p:nvPr/>
       </p:nvGrpSpPr>
-      <p:grpSpPr/>
+      <p:grpSpPr>
+        <a:xfrm>
+          <a:off x="0" y="0"/>
+          <a:ext cx="0" cy="0"/>
+          <a:chOff x="0" y="0"/>
+          <a:chExt cx="0" cy="0"/>
+        </a:xfrm>
+      </p:grpSpPr>
       <p:sp>
         <p:nvSpPr>
           <p:cNvPr id="2" name="Rectangle 1"/>
@@ -10462,6 +10787,7 @@
           <a:lstStyle/>
           <a:p>
             <a:pPr algn="ctr"/>
+            <a:endParaRPr/>
           </a:p>
         </p:txBody>
       </p:sp>
@@ -10575,6 +10901,7 @@
           <a:lstStyle/>
           <a:p>
             <a:pPr algn="ctr"/>
+            <a:endParaRPr/>
           </a:p>
         </p:txBody>
       </p:sp>
@@ -10702,8 +11029,20 @@
                 <a:tableStyleId>{5C22544A-7EE6-4342-B048-85BDC9FD1C3A}</a:tableStyleId>
               </a:tblPr>
               <a:tblGrid>
-                <a:gridCol w="2011680"/>
-                <a:gridCol w="3383280"/>
+                <a:gridCol w="2011680">
+                  <a:extLst>
+                    <a:ext uri="{9D8B030D-6E8A-4147-A177-3AD203B41FA5}">
+                      <a16:colId xmlns:a16="http://schemas.microsoft.com/office/drawing/2014/main" val="20000"/>
+                    </a:ext>
+                  </a:extLst>
+                </a:gridCol>
+                <a:gridCol w="3383280">
+                  <a:extLst>
+                    <a:ext uri="{9D8B030D-6E8A-4147-A177-3AD203B41FA5}">
+                      <a16:colId xmlns:a16="http://schemas.microsoft.com/office/drawing/2014/main" val="20001"/>
+                    </a:ext>
+                  </a:extLst>
+                </a:gridCol>
               </a:tblGrid>
               <a:tr h="429768">
                 <a:tc>
@@ -10752,6 +11091,11 @@
                     </a:solidFill>
                   </a:tcPr>
                 </a:tc>
+                <a:extLst>
+                  <a:ext uri="{0D108BD9-81ED-4DB2-BD59-A6C34878D82A}">
+                    <a16:rowId xmlns:a16="http://schemas.microsoft.com/office/drawing/2014/main" val="10000"/>
+                  </a:ext>
+                </a:extLst>
               </a:tr>
               <a:tr h="429768">
                 <a:tc>
@@ -10800,6 +11144,11 @@
                     </a:solidFill>
                   </a:tcPr>
                 </a:tc>
+                <a:extLst>
+                  <a:ext uri="{0D108BD9-81ED-4DB2-BD59-A6C34878D82A}">
+                    <a16:rowId xmlns:a16="http://schemas.microsoft.com/office/drawing/2014/main" val="10001"/>
+                  </a:ext>
+                </a:extLst>
               </a:tr>
               <a:tr h="429768">
                 <a:tc>
@@ -10848,6 +11197,11 @@
                     </a:solidFill>
                   </a:tcPr>
                 </a:tc>
+                <a:extLst>
+                  <a:ext uri="{0D108BD9-81ED-4DB2-BD59-A6C34878D82A}">
+                    <a16:rowId xmlns:a16="http://schemas.microsoft.com/office/drawing/2014/main" val="10002"/>
+                  </a:ext>
+                </a:extLst>
               </a:tr>
               <a:tr h="429768">
                 <a:tc>
@@ -10896,6 +11250,11 @@
                     </a:solidFill>
                   </a:tcPr>
                 </a:tc>
+                <a:extLst>
+                  <a:ext uri="{0D108BD9-81ED-4DB2-BD59-A6C34878D82A}">
+                    <a16:rowId xmlns:a16="http://schemas.microsoft.com/office/drawing/2014/main" val="10003"/>
+                  </a:ext>
+                </a:extLst>
               </a:tr>
               <a:tr h="429768">
                 <a:tc>
@@ -10944,6 +11303,11 @@
                     </a:solidFill>
                   </a:tcPr>
                 </a:tc>
+                <a:extLst>
+                  <a:ext uri="{0D108BD9-81ED-4DB2-BD59-A6C34878D82A}">
+                    <a16:rowId xmlns:a16="http://schemas.microsoft.com/office/drawing/2014/main" val="10004"/>
+                  </a:ext>
+                </a:extLst>
               </a:tr>
               <a:tr h="429768">
                 <a:tc>
@@ -10992,6 +11356,11 @@
                     </a:solidFill>
                   </a:tcPr>
                 </a:tc>
+                <a:extLst>
+                  <a:ext uri="{0D108BD9-81ED-4DB2-BD59-A6C34878D82A}">
+                    <a16:rowId xmlns:a16="http://schemas.microsoft.com/office/drawing/2014/main" val="10005"/>
+                  </a:ext>
+                </a:extLst>
               </a:tr>
             </a:tbl>
           </a:graphicData>
@@ -11072,6 +11441,7 @@
           <a:lstStyle/>
           <a:p>
             <a:pPr algn="ctr"/>
+            <a:endParaRPr/>
           </a:p>
         </p:txBody>
       </p:sp>
@@ -11132,7 +11502,7 @@
         </p:nvGraphicFramePr>
         <p:xfrm>
           <a:off x="5989320" y="2697480"/>
-          <a:ext cx="5577840" cy="1719072"/>
+          <a:ext cx="5577840" cy="1773936"/>
         </p:xfrm>
         <a:graphic>
           <a:graphicData uri="http://schemas.openxmlformats.org/drawingml/2006/table">
@@ -11141,8 +11511,20 @@
                 <a:tableStyleId>{5C22544A-7EE6-4342-B048-85BDC9FD1C3A}</a:tableStyleId>
               </a:tblPr>
               <a:tblGrid>
-                <a:gridCol w="2286000"/>
-                <a:gridCol w="3291840"/>
+                <a:gridCol w="2286000">
+                  <a:extLst>
+                    <a:ext uri="{9D8B030D-6E8A-4147-A177-3AD203B41FA5}">
+                      <a16:colId xmlns:a16="http://schemas.microsoft.com/office/drawing/2014/main" val="20000"/>
+                    </a:ext>
+                  </a:extLst>
+                </a:gridCol>
+                <a:gridCol w="3291840">
+                  <a:extLst>
+                    <a:ext uri="{9D8B030D-6E8A-4147-A177-3AD203B41FA5}">
+                      <a16:colId xmlns:a16="http://schemas.microsoft.com/office/drawing/2014/main" val="20001"/>
+                    </a:ext>
+                  </a:extLst>
+                </a:gridCol>
               </a:tblGrid>
               <a:tr h="429768">
                 <a:tc>
@@ -11191,6 +11573,11 @@
                     </a:solidFill>
                   </a:tcPr>
                 </a:tc>
+                <a:extLst>
+                  <a:ext uri="{0D108BD9-81ED-4DB2-BD59-A6C34878D82A}">
+                    <a16:rowId xmlns:a16="http://schemas.microsoft.com/office/drawing/2014/main" val="10000"/>
+                  </a:ext>
+                </a:extLst>
               </a:tr>
               <a:tr h="429768">
                 <a:tc>
@@ -11239,6 +11626,11 @@
                     </a:solidFill>
                   </a:tcPr>
                 </a:tc>
+                <a:extLst>
+                  <a:ext uri="{0D108BD9-81ED-4DB2-BD59-A6C34878D82A}">
+                    <a16:rowId xmlns:a16="http://schemas.microsoft.com/office/drawing/2014/main" val="10001"/>
+                  </a:ext>
+                </a:extLst>
               </a:tr>
               <a:tr h="429768">
                 <a:tc>
@@ -11287,6 +11679,11 @@
                     </a:solidFill>
                   </a:tcPr>
                 </a:tc>
+                <a:extLst>
+                  <a:ext uri="{0D108BD9-81ED-4DB2-BD59-A6C34878D82A}">
+                    <a16:rowId xmlns:a16="http://schemas.microsoft.com/office/drawing/2014/main" val="10002"/>
+                  </a:ext>
+                </a:extLst>
               </a:tr>
               <a:tr h="429768">
                 <a:tc>
@@ -11335,6 +11732,11 @@
                     </a:solidFill>
                   </a:tcPr>
                 </a:tc>
+                <a:extLst>
+                  <a:ext uri="{0D108BD9-81ED-4DB2-BD59-A6C34878D82A}">
+                    <a16:rowId xmlns:a16="http://schemas.microsoft.com/office/drawing/2014/main" val="10003"/>
+                  </a:ext>
+                </a:extLst>
               </a:tr>
             </a:tbl>
           </a:graphicData>
@@ -11384,7 +11786,7 @@
 </file>
 
 <file path=ppt/slides/slide19.xml><?xml version="1.0" encoding="utf-8"?>
-<p:sld xmlns:a="http://schemas.openxmlformats.org/drawingml/2006/main" xmlns:p="http://schemas.openxmlformats.org/presentationml/2006/main" xmlns:r="http://schemas.openxmlformats.org/officeDocument/2006/relationships">
+<p:sld xmlns:a="http://schemas.openxmlformats.org/drawingml/2006/main" xmlns:r="http://schemas.openxmlformats.org/officeDocument/2006/relationships" xmlns:p="http://schemas.openxmlformats.org/presentationml/2006/main">
   <p:cSld>
     <p:spTree>
       <p:nvGrpSpPr>
@@ -11392,7 +11794,14 @@
         <p:cNvGrpSpPr/>
         <p:nvPr/>
       </p:nvGrpSpPr>
-      <p:grpSpPr/>
+      <p:grpSpPr>
+        <a:xfrm>
+          <a:off x="0" y="0"/>
+          <a:ext cx="0" cy="0"/>
+          <a:chOff x="0" y="0"/>
+          <a:chExt cx="0" cy="0"/>
+        </a:xfrm>
+      </p:grpSpPr>
       <p:sp>
         <p:nvSpPr>
           <p:cNvPr id="2" name="Rectangle 1"/>
@@ -11433,6 +11842,7 @@
           <a:lstStyle/>
           <a:p>
             <a:pPr algn="ctr"/>
+            <a:endParaRPr/>
           </a:p>
         </p:txBody>
       </p:sp>
@@ -11546,6 +11956,7 @@
           <a:lstStyle/>
           <a:p>
             <a:pPr algn="ctr"/>
+            <a:endParaRPr/>
           </a:p>
         </p:txBody>
       </p:sp>
@@ -11694,6 +12105,7 @@
           <a:lstStyle/>
           <a:p>
             <a:pPr algn="ctr"/>
+            <a:endParaRPr/>
           </a:p>
         </p:txBody>
       </p:sp>
@@ -11774,6 +12186,7 @@
           <a:lstStyle/>
           <a:p>
             <a:pPr algn="ctr"/>
+            <a:endParaRPr/>
           </a:p>
         </p:txBody>
       </p:sp>
@@ -11949,6 +12362,7 @@
           <a:lstStyle/>
           <a:p>
             <a:pPr algn="ctr"/>
+            <a:endParaRPr/>
           </a:p>
         </p:txBody>
       </p:sp>
@@ -12098,6 +12512,7 @@
           <a:lstStyle/>
           <a:p>
             <a:pPr algn="ctr"/>
+            <a:endParaRPr/>
           </a:p>
         </p:txBody>
       </p:sp>
@@ -12204,7 +12619,7 @@
 </file>
 
 <file path=ppt/slides/slide2.xml><?xml version="1.0" encoding="utf-8"?>
-<p:sld xmlns:a="http://schemas.openxmlformats.org/drawingml/2006/main" xmlns:p="http://schemas.openxmlformats.org/presentationml/2006/main" xmlns:r="http://schemas.openxmlformats.org/officeDocument/2006/relationships">
+<p:sld xmlns:a="http://schemas.openxmlformats.org/drawingml/2006/main" xmlns:r="http://schemas.openxmlformats.org/officeDocument/2006/relationships" xmlns:p="http://schemas.openxmlformats.org/presentationml/2006/main">
   <p:cSld>
     <p:spTree>
       <p:nvGrpSpPr>
@@ -12212,7 +12627,14 @@
         <p:cNvGrpSpPr/>
         <p:nvPr/>
       </p:nvGrpSpPr>
-      <p:grpSpPr/>
+      <p:grpSpPr>
+        <a:xfrm>
+          <a:off x="0" y="0"/>
+          <a:ext cx="0" cy="0"/>
+          <a:chOff x="0" y="0"/>
+          <a:chExt cx="0" cy="0"/>
+        </a:xfrm>
+      </p:grpSpPr>
       <p:sp>
         <p:nvSpPr>
           <p:cNvPr id="2" name="Rectangle 1"/>
@@ -12253,6 +12675,7 @@
           <a:lstStyle/>
           <a:p>
             <a:pPr algn="ctr"/>
+            <a:endParaRPr/>
           </a:p>
         </p:txBody>
       </p:sp>
@@ -12366,6 +12789,7 @@
           <a:lstStyle/>
           <a:p>
             <a:pPr algn="ctr"/>
+            <a:endParaRPr/>
           </a:p>
         </p:txBody>
       </p:sp>
@@ -12479,6 +12903,7 @@
           <a:lstStyle/>
           <a:p>
             <a:pPr algn="ctr"/>
+            <a:endParaRPr/>
           </a:p>
         </p:txBody>
       </p:sp>
@@ -12627,6 +13052,7 @@
           <a:lstStyle/>
           <a:p>
             <a:pPr algn="ctr"/>
+            <a:endParaRPr/>
           </a:p>
         </p:txBody>
       </p:sp>
@@ -12775,6 +13201,7 @@
           <a:lstStyle/>
           <a:p>
             <a:pPr algn="ctr"/>
+            <a:endParaRPr/>
           </a:p>
         </p:txBody>
       </p:sp>
@@ -12923,6 +13350,7 @@
           <a:lstStyle/>
           <a:p>
             <a:pPr algn="ctr"/>
+            <a:endParaRPr/>
           </a:p>
         </p:txBody>
       </p:sp>
@@ -13071,6 +13499,7 @@
           <a:lstStyle/>
           <a:p>
             <a:pPr algn="ctr"/>
+            <a:endParaRPr/>
           </a:p>
         </p:txBody>
       </p:sp>
@@ -13219,6 +13648,7 @@
           <a:lstStyle/>
           <a:p>
             <a:pPr algn="ctr"/>
+            <a:endParaRPr/>
           </a:p>
         </p:txBody>
       </p:sp>
@@ -13367,6 +13797,7 @@
           <a:lstStyle/>
           <a:p>
             <a:pPr algn="ctr"/>
+            <a:endParaRPr/>
           </a:p>
         </p:txBody>
       </p:sp>
@@ -13515,6 +13946,7 @@
           <a:lstStyle/>
           <a:p>
             <a:pPr algn="ctr"/>
+            <a:endParaRPr/>
           </a:p>
         </p:txBody>
       </p:sp>
@@ -13632,7 +14064,7 @@
 </file>
 
 <file path=ppt/slides/slide20.xml><?xml version="1.0" encoding="utf-8"?>
-<p:sld xmlns:a="http://schemas.openxmlformats.org/drawingml/2006/main" xmlns:p="http://schemas.openxmlformats.org/presentationml/2006/main" xmlns:r="http://schemas.openxmlformats.org/officeDocument/2006/relationships">
+<p:sld xmlns:a="http://schemas.openxmlformats.org/drawingml/2006/main" xmlns:r="http://schemas.openxmlformats.org/officeDocument/2006/relationships" xmlns:p="http://schemas.openxmlformats.org/presentationml/2006/main">
   <p:cSld>
     <p:spTree>
       <p:nvGrpSpPr>
@@ -13640,7 +14072,14 @@
         <p:cNvGrpSpPr/>
         <p:nvPr/>
       </p:nvGrpSpPr>
-      <p:grpSpPr/>
+      <p:grpSpPr>
+        <a:xfrm>
+          <a:off x="0" y="0"/>
+          <a:ext cx="0" cy="0"/>
+          <a:chOff x="0" y="0"/>
+          <a:chExt cx="0" cy="0"/>
+        </a:xfrm>
+      </p:grpSpPr>
       <p:sp>
         <p:nvSpPr>
           <p:cNvPr id="2" name="Rectangle 1"/>
@@ -13681,6 +14120,7 @@
           <a:lstStyle/>
           <a:p>
             <a:pPr algn="ctr"/>
+            <a:endParaRPr/>
           </a:p>
         </p:txBody>
       </p:sp>
@@ -13794,6 +14234,7 @@
           <a:lstStyle/>
           <a:p>
             <a:pPr algn="ctr"/>
+            <a:endParaRPr/>
           </a:p>
         </p:txBody>
       </p:sp>
@@ -13907,6 +14348,7 @@
           <a:lstStyle/>
           <a:p>
             <a:pPr algn="ctr"/>
+            <a:endParaRPr/>
           </a:p>
         </p:txBody>
       </p:sp>
@@ -13964,11 +14406,41 @@
                 <a:tableStyleId>{5C22544A-7EE6-4342-B048-85BDC9FD1C3A}</a:tableStyleId>
               </a:tblPr>
               <a:tblGrid>
-                <a:gridCol w="1371600"/>
-                <a:gridCol w="3200400"/>
-                <a:gridCol w="3200400"/>
-                <a:gridCol w="1554480"/>
-                <a:gridCol w="2194560"/>
+                <a:gridCol w="1371600">
+                  <a:extLst>
+                    <a:ext uri="{9D8B030D-6E8A-4147-A177-3AD203B41FA5}">
+                      <a16:colId xmlns:a16="http://schemas.microsoft.com/office/drawing/2014/main" val="20000"/>
+                    </a:ext>
+                  </a:extLst>
+                </a:gridCol>
+                <a:gridCol w="3200400">
+                  <a:extLst>
+                    <a:ext uri="{9D8B030D-6E8A-4147-A177-3AD203B41FA5}">
+                      <a16:colId xmlns:a16="http://schemas.microsoft.com/office/drawing/2014/main" val="20001"/>
+                    </a:ext>
+                  </a:extLst>
+                </a:gridCol>
+                <a:gridCol w="3200400">
+                  <a:extLst>
+                    <a:ext uri="{9D8B030D-6E8A-4147-A177-3AD203B41FA5}">
+                      <a16:colId xmlns:a16="http://schemas.microsoft.com/office/drawing/2014/main" val="20002"/>
+                    </a:ext>
+                  </a:extLst>
+                </a:gridCol>
+                <a:gridCol w="1554480">
+                  <a:extLst>
+                    <a:ext uri="{9D8B030D-6E8A-4147-A177-3AD203B41FA5}">
+                      <a16:colId xmlns:a16="http://schemas.microsoft.com/office/drawing/2014/main" val="20003"/>
+                    </a:ext>
+                  </a:extLst>
+                </a:gridCol>
+                <a:gridCol w="2194560">
+                  <a:extLst>
+                    <a:ext uri="{9D8B030D-6E8A-4147-A177-3AD203B41FA5}">
+                      <a16:colId xmlns:a16="http://schemas.microsoft.com/office/drawing/2014/main" val="20004"/>
+                    </a:ext>
+                  </a:extLst>
+                </a:gridCol>
               </a:tblGrid>
               <a:tr h="457200">
                 <a:tc>
@@ -14086,6 +14558,11 @@
                     </a:solidFill>
                   </a:tcPr>
                 </a:tc>
+                <a:extLst>
+                  <a:ext uri="{0D108BD9-81ED-4DB2-BD59-A6C34878D82A}">
+                    <a16:rowId xmlns:a16="http://schemas.microsoft.com/office/drawing/2014/main" val="10000"/>
+                  </a:ext>
+                </a:extLst>
               </a:tr>
               <a:tr h="457200">
                 <a:tc>
@@ -14203,6 +14680,11 @@
                     </a:solidFill>
                   </a:tcPr>
                 </a:tc>
+                <a:extLst>
+                  <a:ext uri="{0D108BD9-81ED-4DB2-BD59-A6C34878D82A}">
+                    <a16:rowId xmlns:a16="http://schemas.microsoft.com/office/drawing/2014/main" val="10001"/>
+                  </a:ext>
+                </a:extLst>
               </a:tr>
               <a:tr h="457200">
                 <a:tc>
@@ -14320,6 +14802,11 @@
                     </a:solidFill>
                   </a:tcPr>
                 </a:tc>
+                <a:extLst>
+                  <a:ext uri="{0D108BD9-81ED-4DB2-BD59-A6C34878D82A}">
+                    <a16:rowId xmlns:a16="http://schemas.microsoft.com/office/drawing/2014/main" val="10002"/>
+                  </a:ext>
+                </a:extLst>
               </a:tr>
               <a:tr h="457200">
                 <a:tc>
@@ -14437,6 +14924,11 @@
                     </a:solidFill>
                   </a:tcPr>
                 </a:tc>
+                <a:extLst>
+                  <a:ext uri="{0D108BD9-81ED-4DB2-BD59-A6C34878D82A}">
+                    <a16:rowId xmlns:a16="http://schemas.microsoft.com/office/drawing/2014/main" val="10003"/>
+                  </a:ext>
+                </a:extLst>
               </a:tr>
             </a:tbl>
           </a:graphicData>
@@ -14482,6 +14974,7 @@
           <a:lstStyle/>
           <a:p>
             <a:pPr algn="ctr"/>
+            <a:endParaRPr/>
           </a:p>
         </p:txBody>
       </p:sp>
@@ -14633,6 +15126,7 @@
           <a:lstStyle/>
           <a:p>
             <a:pPr algn="ctr"/>
+            <a:endParaRPr/>
           </a:p>
         </p:txBody>
       </p:sp>
@@ -14751,7 +15245,7 @@
 </file>
 
 <file path=ppt/slides/slide21.xml><?xml version="1.0" encoding="utf-8"?>
-<p:sld xmlns:a="http://schemas.openxmlformats.org/drawingml/2006/main" xmlns:p="http://schemas.openxmlformats.org/presentationml/2006/main" xmlns:r="http://schemas.openxmlformats.org/officeDocument/2006/relationships">
+<p:sld xmlns:a="http://schemas.openxmlformats.org/drawingml/2006/main" xmlns:r="http://schemas.openxmlformats.org/officeDocument/2006/relationships" xmlns:p="http://schemas.openxmlformats.org/presentationml/2006/main">
   <p:cSld>
     <p:spTree>
       <p:nvGrpSpPr>
@@ -14759,7 +15253,14 @@
         <p:cNvGrpSpPr/>
         <p:nvPr/>
       </p:nvGrpSpPr>
-      <p:grpSpPr/>
+      <p:grpSpPr>
+        <a:xfrm>
+          <a:off x="0" y="0"/>
+          <a:ext cx="0" cy="0"/>
+          <a:chOff x="0" y="0"/>
+          <a:chExt cx="0" cy="0"/>
+        </a:xfrm>
+      </p:grpSpPr>
       <p:sp>
         <p:nvSpPr>
           <p:cNvPr id="2" name="Rectangle 1"/>
@@ -14800,6 +15301,7 @@
           <a:lstStyle/>
           <a:p>
             <a:pPr algn="ctr"/>
+            <a:endParaRPr/>
           </a:p>
         </p:txBody>
       </p:sp>
@@ -14913,6 +15415,7 @@
           <a:lstStyle/>
           <a:p>
             <a:pPr algn="ctr"/>
+            <a:endParaRPr/>
           </a:p>
         </p:txBody>
       </p:sp>
@@ -15005,10 +15508,34 @@
                 <a:tableStyleId>{5C22544A-7EE6-4342-B048-85BDC9FD1C3A}</a:tableStyleId>
               </a:tblPr>
               <a:tblGrid>
-                <a:gridCol w="457200"/>
-                <a:gridCol w="3200400"/>
-                <a:gridCol w="3200400"/>
-                <a:gridCol w="4663440"/>
+                <a:gridCol w="457200">
+                  <a:extLst>
+                    <a:ext uri="{9D8B030D-6E8A-4147-A177-3AD203B41FA5}">
+                      <a16:colId xmlns:a16="http://schemas.microsoft.com/office/drawing/2014/main" val="20000"/>
+                    </a:ext>
+                  </a:extLst>
+                </a:gridCol>
+                <a:gridCol w="3200400">
+                  <a:extLst>
+                    <a:ext uri="{9D8B030D-6E8A-4147-A177-3AD203B41FA5}">
+                      <a16:colId xmlns:a16="http://schemas.microsoft.com/office/drawing/2014/main" val="20001"/>
+                    </a:ext>
+                  </a:extLst>
+                </a:gridCol>
+                <a:gridCol w="3200400">
+                  <a:extLst>
+                    <a:ext uri="{9D8B030D-6E8A-4147-A177-3AD203B41FA5}">
+                      <a16:colId xmlns:a16="http://schemas.microsoft.com/office/drawing/2014/main" val="20002"/>
+                    </a:ext>
+                  </a:extLst>
+                </a:gridCol>
+                <a:gridCol w="4663440">
+                  <a:extLst>
+                    <a:ext uri="{9D8B030D-6E8A-4147-A177-3AD203B41FA5}">
+                      <a16:colId xmlns:a16="http://schemas.microsoft.com/office/drawing/2014/main" val="20003"/>
+                    </a:ext>
+                  </a:extLst>
+                </a:gridCol>
               </a:tblGrid>
               <a:tr h="457200">
                 <a:tc>
@@ -15103,6 +15630,11 @@
                     </a:solidFill>
                   </a:tcPr>
                 </a:tc>
+                <a:extLst>
+                  <a:ext uri="{0D108BD9-81ED-4DB2-BD59-A6C34878D82A}">
+                    <a16:rowId xmlns:a16="http://schemas.microsoft.com/office/drawing/2014/main" val="10000"/>
+                  </a:ext>
+                </a:extLst>
               </a:tr>
               <a:tr h="457200">
                 <a:tc>
@@ -15197,6 +15729,11 @@
                     </a:solidFill>
                   </a:tcPr>
                 </a:tc>
+                <a:extLst>
+                  <a:ext uri="{0D108BD9-81ED-4DB2-BD59-A6C34878D82A}">
+                    <a16:rowId xmlns:a16="http://schemas.microsoft.com/office/drawing/2014/main" val="10001"/>
+                  </a:ext>
+                </a:extLst>
               </a:tr>
               <a:tr h="457200">
                 <a:tc>
@@ -15291,6 +15828,11 @@
                     </a:solidFill>
                   </a:tcPr>
                 </a:tc>
+                <a:extLst>
+                  <a:ext uri="{0D108BD9-81ED-4DB2-BD59-A6C34878D82A}">
+                    <a16:rowId xmlns:a16="http://schemas.microsoft.com/office/drawing/2014/main" val="10002"/>
+                  </a:ext>
+                </a:extLst>
               </a:tr>
               <a:tr h="457200">
                 <a:tc>
@@ -15385,6 +15927,11 @@
                     </a:solidFill>
                   </a:tcPr>
                 </a:tc>
+                <a:extLst>
+                  <a:ext uri="{0D108BD9-81ED-4DB2-BD59-A6C34878D82A}">
+                    <a16:rowId xmlns:a16="http://schemas.microsoft.com/office/drawing/2014/main" val="10003"/>
+                  </a:ext>
+                </a:extLst>
               </a:tr>
               <a:tr h="457200">
                 <a:tc>
@@ -15479,6 +16026,11 @@
                     </a:solidFill>
                   </a:tcPr>
                 </a:tc>
+                <a:extLst>
+                  <a:ext uri="{0D108BD9-81ED-4DB2-BD59-A6C34878D82A}">
+                    <a16:rowId xmlns:a16="http://schemas.microsoft.com/office/drawing/2014/main" val="10004"/>
+                  </a:ext>
+                </a:extLst>
               </a:tr>
               <a:tr h="457200">
                 <a:tc>
@@ -15573,6 +16125,11 @@
                     </a:solidFill>
                   </a:tcPr>
                 </a:tc>
+                <a:extLst>
+                  <a:ext uri="{0D108BD9-81ED-4DB2-BD59-A6C34878D82A}">
+                    <a16:rowId xmlns:a16="http://schemas.microsoft.com/office/drawing/2014/main" val="10005"/>
+                  </a:ext>
+                </a:extLst>
               </a:tr>
             </a:tbl>
           </a:graphicData>
@@ -15618,6 +16175,7 @@
           <a:lstStyle/>
           <a:p>
             <a:pPr algn="ctr"/>
+            <a:endParaRPr/>
           </a:p>
         </p:txBody>
       </p:sp>
@@ -15665,7 +16223,7 @@
 </file>
 
 <file path=ppt/slides/slide22.xml><?xml version="1.0" encoding="utf-8"?>
-<p:sld xmlns:a="http://schemas.openxmlformats.org/drawingml/2006/main" xmlns:p="http://schemas.openxmlformats.org/presentationml/2006/main" xmlns:r="http://schemas.openxmlformats.org/officeDocument/2006/relationships">
+<p:sld xmlns:a="http://schemas.openxmlformats.org/drawingml/2006/main" xmlns:r="http://schemas.openxmlformats.org/officeDocument/2006/relationships" xmlns:p="http://schemas.openxmlformats.org/presentationml/2006/main">
   <p:cSld>
     <p:spTree>
       <p:nvGrpSpPr>
@@ -15673,7 +16231,14 @@
         <p:cNvGrpSpPr/>
         <p:nvPr/>
       </p:nvGrpSpPr>
-      <p:grpSpPr/>
+      <p:grpSpPr>
+        <a:xfrm>
+          <a:off x="0" y="0"/>
+          <a:ext cx="0" cy="0"/>
+          <a:chOff x="0" y="0"/>
+          <a:chExt cx="0" cy="0"/>
+        </a:xfrm>
+      </p:grpSpPr>
       <p:sp>
         <p:nvSpPr>
           <p:cNvPr id="2" name="Rectangle 1"/>
@@ -15714,6 +16279,7 @@
           <a:lstStyle/>
           <a:p>
             <a:pPr algn="ctr"/>
+            <a:endParaRPr/>
           </a:p>
         </p:txBody>
       </p:sp>
@@ -15827,6 +16393,7 @@
           <a:lstStyle/>
           <a:p>
             <a:pPr algn="ctr"/>
+            <a:endParaRPr/>
           </a:p>
         </p:txBody>
       </p:sp>
@@ -15945,7 +16512,7 @@
         </p:nvGraphicFramePr>
         <p:xfrm>
           <a:off x="320040" y="1645920"/>
-          <a:ext cx="8229600" cy="3364992"/>
+          <a:ext cx="8229600" cy="3401568"/>
         </p:xfrm>
         <a:graphic>
           <a:graphicData uri="http://schemas.openxmlformats.org/drawingml/2006/table">
@@ -15954,10 +16521,34 @@
                 <a:tableStyleId>{5C22544A-7EE6-4342-B048-85BDC9FD1C3A}</a:tableStyleId>
               </a:tblPr>
               <a:tblGrid>
-                <a:gridCol w="1645920"/>
-                <a:gridCol w="4114800"/>
-                <a:gridCol w="685800"/>
-                <a:gridCol w="1783080"/>
+                <a:gridCol w="1645920">
+                  <a:extLst>
+                    <a:ext uri="{9D8B030D-6E8A-4147-A177-3AD203B41FA5}">
+                      <a16:colId xmlns:a16="http://schemas.microsoft.com/office/drawing/2014/main" val="20000"/>
+                    </a:ext>
+                  </a:extLst>
+                </a:gridCol>
+                <a:gridCol w="4114800">
+                  <a:extLst>
+                    <a:ext uri="{9D8B030D-6E8A-4147-A177-3AD203B41FA5}">
+                      <a16:colId xmlns:a16="http://schemas.microsoft.com/office/drawing/2014/main" val="20001"/>
+                    </a:ext>
+                  </a:extLst>
+                </a:gridCol>
+                <a:gridCol w="685800">
+                  <a:extLst>
+                    <a:ext uri="{9D8B030D-6E8A-4147-A177-3AD203B41FA5}">
+                      <a16:colId xmlns:a16="http://schemas.microsoft.com/office/drawing/2014/main" val="20002"/>
+                    </a:ext>
+                  </a:extLst>
+                </a:gridCol>
+                <a:gridCol w="1783080">
+                  <a:extLst>
+                    <a:ext uri="{9D8B030D-6E8A-4147-A177-3AD203B41FA5}">
+                      <a16:colId xmlns:a16="http://schemas.microsoft.com/office/drawing/2014/main" val="20003"/>
+                    </a:ext>
+                  </a:extLst>
+                </a:gridCol>
               </a:tblGrid>
               <a:tr h="420624">
                 <a:tc>
@@ -16052,6 +16643,11 @@
                     </a:solidFill>
                   </a:tcPr>
                 </a:tc>
+                <a:extLst>
+                  <a:ext uri="{0D108BD9-81ED-4DB2-BD59-A6C34878D82A}">
+                    <a16:rowId xmlns:a16="http://schemas.microsoft.com/office/drawing/2014/main" val="10000"/>
+                  </a:ext>
+                </a:extLst>
               </a:tr>
               <a:tr h="420624">
                 <a:tc>
@@ -16146,6 +16742,11 @@
                     </a:solidFill>
                   </a:tcPr>
                 </a:tc>
+                <a:extLst>
+                  <a:ext uri="{0D108BD9-81ED-4DB2-BD59-A6C34878D82A}">
+                    <a16:rowId xmlns:a16="http://schemas.microsoft.com/office/drawing/2014/main" val="10001"/>
+                  </a:ext>
+                </a:extLst>
               </a:tr>
               <a:tr h="420624">
                 <a:tc>
@@ -16240,6 +16841,11 @@
                     </a:solidFill>
                   </a:tcPr>
                 </a:tc>
+                <a:extLst>
+                  <a:ext uri="{0D108BD9-81ED-4DB2-BD59-A6C34878D82A}">
+                    <a16:rowId xmlns:a16="http://schemas.microsoft.com/office/drawing/2014/main" val="10002"/>
+                  </a:ext>
+                </a:extLst>
               </a:tr>
               <a:tr h="420624">
                 <a:tc>
@@ -16334,6 +16940,11 @@
                     </a:solidFill>
                   </a:tcPr>
                 </a:tc>
+                <a:extLst>
+                  <a:ext uri="{0D108BD9-81ED-4DB2-BD59-A6C34878D82A}">
+                    <a16:rowId xmlns:a16="http://schemas.microsoft.com/office/drawing/2014/main" val="10003"/>
+                  </a:ext>
+                </a:extLst>
               </a:tr>
               <a:tr h="420624">
                 <a:tc>
@@ -16428,6 +17039,11 @@
                     </a:solidFill>
                   </a:tcPr>
                 </a:tc>
+                <a:extLst>
+                  <a:ext uri="{0D108BD9-81ED-4DB2-BD59-A6C34878D82A}">
+                    <a16:rowId xmlns:a16="http://schemas.microsoft.com/office/drawing/2014/main" val="10004"/>
+                  </a:ext>
+                </a:extLst>
               </a:tr>
               <a:tr h="420624">
                 <a:tc>
@@ -16522,6 +17138,11 @@
                     </a:solidFill>
                   </a:tcPr>
                 </a:tc>
+                <a:extLst>
+                  <a:ext uri="{0D108BD9-81ED-4DB2-BD59-A6C34878D82A}">
+                    <a16:rowId xmlns:a16="http://schemas.microsoft.com/office/drawing/2014/main" val="10005"/>
+                  </a:ext>
+                </a:extLst>
               </a:tr>
               <a:tr h="420624">
                 <a:tc>
@@ -16616,6 +17237,11 @@
                     </a:solidFill>
                   </a:tcPr>
                 </a:tc>
+                <a:extLst>
+                  <a:ext uri="{0D108BD9-81ED-4DB2-BD59-A6C34878D82A}">
+                    <a16:rowId xmlns:a16="http://schemas.microsoft.com/office/drawing/2014/main" val="10006"/>
+                  </a:ext>
+                </a:extLst>
               </a:tr>
               <a:tr h="420624">
                 <a:tc>
@@ -16710,6 +17336,11 @@
                     </a:solidFill>
                   </a:tcPr>
                 </a:tc>
+                <a:extLst>
+                  <a:ext uri="{0D108BD9-81ED-4DB2-BD59-A6C34878D82A}">
+                    <a16:rowId xmlns:a16="http://schemas.microsoft.com/office/drawing/2014/main" val="10007"/>
+                  </a:ext>
+                </a:extLst>
               </a:tr>
             </a:tbl>
           </a:graphicData>
@@ -16755,6 +17386,7 @@
           <a:lstStyle/>
           <a:p>
             <a:pPr algn="ctr"/>
+            <a:endParaRPr/>
           </a:p>
         </p:txBody>
       </p:sp>
@@ -16837,7 +17469,7 @@
 </file>
 
 <file path=ppt/slides/slide23.xml><?xml version="1.0" encoding="utf-8"?>
-<p:sld xmlns:a="http://schemas.openxmlformats.org/drawingml/2006/main" xmlns:p="http://schemas.openxmlformats.org/presentationml/2006/main" xmlns:r="http://schemas.openxmlformats.org/officeDocument/2006/relationships">
+<p:sld xmlns:a="http://schemas.openxmlformats.org/drawingml/2006/main" xmlns:r="http://schemas.openxmlformats.org/officeDocument/2006/relationships" xmlns:p="http://schemas.openxmlformats.org/presentationml/2006/main">
   <p:cSld>
     <p:spTree>
       <p:nvGrpSpPr>
@@ -16845,7 +17477,14 @@
         <p:cNvGrpSpPr/>
         <p:nvPr/>
       </p:nvGrpSpPr>
-      <p:grpSpPr/>
+      <p:grpSpPr>
+        <a:xfrm>
+          <a:off x="0" y="0"/>
+          <a:ext cx="0" cy="0"/>
+          <a:chOff x="0" y="0"/>
+          <a:chExt cx="0" cy="0"/>
+        </a:xfrm>
+      </p:grpSpPr>
       <p:sp>
         <p:nvSpPr>
           <p:cNvPr id="2" name="Rectangle 1"/>
@@ -16886,6 +17525,7 @@
           <a:lstStyle/>
           <a:p>
             <a:pPr algn="ctr"/>
+            <a:endParaRPr/>
           </a:p>
         </p:txBody>
       </p:sp>
@@ -16999,6 +17639,7 @@
           <a:lstStyle/>
           <a:p>
             <a:pPr algn="ctr"/>
+            <a:endParaRPr/>
           </a:p>
         </p:txBody>
       </p:sp>
@@ -17112,6 +17753,7 @@
           <a:lstStyle/>
           <a:p>
             <a:pPr algn="ctr"/>
+            <a:endParaRPr/>
           </a:p>
         </p:txBody>
       </p:sp>
@@ -17275,6 +17917,7 @@
           <a:lstStyle/>
           <a:p>
             <a:pPr algn="ctr"/>
+            <a:endParaRPr/>
           </a:p>
         </p:txBody>
       </p:sp>
@@ -17426,6 +18069,7 @@
           <a:lstStyle/>
           <a:p>
             <a:pPr algn="ctr"/>
+            <a:endParaRPr/>
           </a:p>
         </p:txBody>
       </p:sp>
@@ -17544,7 +18188,7 @@
 </file>
 
 <file path=ppt/slides/slide3.xml><?xml version="1.0" encoding="utf-8"?>
-<p:sld xmlns:a="http://schemas.openxmlformats.org/drawingml/2006/main" xmlns:p="http://schemas.openxmlformats.org/presentationml/2006/main" xmlns:r="http://schemas.openxmlformats.org/officeDocument/2006/relationships">
+<p:sld xmlns:a="http://schemas.openxmlformats.org/drawingml/2006/main" xmlns:r="http://schemas.openxmlformats.org/officeDocument/2006/relationships" xmlns:p="http://schemas.openxmlformats.org/presentationml/2006/main">
   <p:cSld>
     <p:spTree>
       <p:nvGrpSpPr>
@@ -17552,7 +18196,14 @@
         <p:cNvGrpSpPr/>
         <p:nvPr/>
       </p:nvGrpSpPr>
-      <p:grpSpPr/>
+      <p:grpSpPr>
+        <a:xfrm>
+          <a:off x="0" y="0"/>
+          <a:ext cx="0" cy="0"/>
+          <a:chOff x="0" y="0"/>
+          <a:chExt cx="0" cy="0"/>
+        </a:xfrm>
+      </p:grpSpPr>
       <p:sp>
         <p:nvSpPr>
           <p:cNvPr id="2" name="Rectangle 1"/>
@@ -17593,6 +18244,7 @@
           <a:lstStyle/>
           <a:p>
             <a:pPr algn="ctr"/>
+            <a:endParaRPr/>
           </a:p>
         </p:txBody>
       </p:sp>
@@ -17706,6 +18358,7 @@
           <a:lstStyle/>
           <a:p>
             <a:pPr algn="ctr"/>
+            <a:endParaRPr/>
           </a:p>
         </p:txBody>
       </p:sp>
@@ -17819,6 +18472,7 @@
           <a:lstStyle/>
           <a:p>
             <a:pPr algn="ctr"/>
+            <a:endParaRPr/>
           </a:p>
         </p:txBody>
       </p:sp>
@@ -17923,6 +18577,7 @@
           <a:lstStyle/>
           <a:p>
             <a:pPr algn="ctr"/>
+            <a:endParaRPr/>
           </a:p>
         </p:txBody>
       </p:sp>
@@ -18062,6 +18717,7 @@
           <a:lstStyle/>
           <a:p>
             <a:pPr algn="ctr"/>
+            <a:endParaRPr/>
           </a:p>
         </p:txBody>
       </p:sp>
@@ -18168,7 +18824,7 @@
 </file>
 
 <file path=ppt/slides/slide4.xml><?xml version="1.0" encoding="utf-8"?>
-<p:sld xmlns:a="http://schemas.openxmlformats.org/drawingml/2006/main" xmlns:p="http://schemas.openxmlformats.org/presentationml/2006/main" xmlns:r="http://schemas.openxmlformats.org/officeDocument/2006/relationships">
+<p:sld xmlns:a="http://schemas.openxmlformats.org/drawingml/2006/main" xmlns:r="http://schemas.openxmlformats.org/officeDocument/2006/relationships" xmlns:p="http://schemas.openxmlformats.org/presentationml/2006/main">
   <p:cSld>
     <p:spTree>
       <p:nvGrpSpPr>
@@ -18176,7 +18832,14 @@
         <p:cNvGrpSpPr/>
         <p:nvPr/>
       </p:nvGrpSpPr>
-      <p:grpSpPr/>
+      <p:grpSpPr>
+        <a:xfrm>
+          <a:off x="0" y="0"/>
+          <a:ext cx="0" cy="0"/>
+          <a:chOff x="0" y="0"/>
+          <a:chExt cx="0" cy="0"/>
+        </a:xfrm>
+      </p:grpSpPr>
       <p:sp>
         <p:nvSpPr>
           <p:cNvPr id="2" name="Rectangle 1"/>
@@ -18217,6 +18880,7 @@
           <a:lstStyle/>
           <a:p>
             <a:pPr algn="ctr"/>
+            <a:endParaRPr/>
           </a:p>
         </p:txBody>
       </p:sp>
@@ -18330,6 +18994,7 @@
           <a:lstStyle/>
           <a:p>
             <a:pPr algn="ctr"/>
+            <a:endParaRPr/>
           </a:p>
         </p:txBody>
       </p:sp>
@@ -18457,9 +19122,27 @@
                 <a:tableStyleId>{5C22544A-7EE6-4342-B048-85BDC9FD1C3A}</a:tableStyleId>
               </a:tblPr>
               <a:tblGrid>
-                <a:gridCol w="2651760"/>
-                <a:gridCol w="1371600"/>
-                <a:gridCol w="1280160"/>
+                <a:gridCol w="2651760">
+                  <a:extLst>
+                    <a:ext uri="{9D8B030D-6E8A-4147-A177-3AD203B41FA5}">
+                      <a16:colId xmlns:a16="http://schemas.microsoft.com/office/drawing/2014/main" val="20000"/>
+                    </a:ext>
+                  </a:extLst>
+                </a:gridCol>
+                <a:gridCol w="1371600">
+                  <a:extLst>
+                    <a:ext uri="{9D8B030D-6E8A-4147-A177-3AD203B41FA5}">
+                      <a16:colId xmlns:a16="http://schemas.microsoft.com/office/drawing/2014/main" val="20001"/>
+                    </a:ext>
+                  </a:extLst>
+                </a:gridCol>
+                <a:gridCol w="1280160">
+                  <a:extLst>
+                    <a:ext uri="{9D8B030D-6E8A-4147-A177-3AD203B41FA5}">
+                      <a16:colId xmlns:a16="http://schemas.microsoft.com/office/drawing/2014/main" val="20002"/>
+                    </a:ext>
+                  </a:extLst>
+                </a:gridCol>
               </a:tblGrid>
               <a:tr h="365760">
                 <a:tc>
@@ -18531,6 +19214,11 @@
                     </a:solidFill>
                   </a:tcPr>
                 </a:tc>
+                <a:extLst>
+                  <a:ext uri="{0D108BD9-81ED-4DB2-BD59-A6C34878D82A}">
+                    <a16:rowId xmlns:a16="http://schemas.microsoft.com/office/drawing/2014/main" val="10000"/>
+                  </a:ext>
+                </a:extLst>
               </a:tr>
               <a:tr h="365760">
                 <a:tc>
@@ -18602,6 +19290,11 @@
                     </a:solidFill>
                   </a:tcPr>
                 </a:tc>
+                <a:extLst>
+                  <a:ext uri="{0D108BD9-81ED-4DB2-BD59-A6C34878D82A}">
+                    <a16:rowId xmlns:a16="http://schemas.microsoft.com/office/drawing/2014/main" val="10001"/>
+                  </a:ext>
+                </a:extLst>
               </a:tr>
               <a:tr h="365760">
                 <a:tc>
@@ -18673,6 +19366,11 @@
                     </a:solidFill>
                   </a:tcPr>
                 </a:tc>
+                <a:extLst>
+                  <a:ext uri="{0D108BD9-81ED-4DB2-BD59-A6C34878D82A}">
+                    <a16:rowId xmlns:a16="http://schemas.microsoft.com/office/drawing/2014/main" val="10002"/>
+                  </a:ext>
+                </a:extLst>
               </a:tr>
               <a:tr h="365760">
                 <a:tc>
@@ -18744,6 +19442,11 @@
                     </a:solidFill>
                   </a:tcPr>
                 </a:tc>
+                <a:extLst>
+                  <a:ext uri="{0D108BD9-81ED-4DB2-BD59-A6C34878D82A}">
+                    <a16:rowId xmlns:a16="http://schemas.microsoft.com/office/drawing/2014/main" val="10003"/>
+                  </a:ext>
+                </a:extLst>
               </a:tr>
               <a:tr h="365760">
                 <a:tc>
@@ -18815,6 +19518,11 @@
                     </a:solidFill>
                   </a:tcPr>
                 </a:tc>
+                <a:extLst>
+                  <a:ext uri="{0D108BD9-81ED-4DB2-BD59-A6C34878D82A}">
+                    <a16:rowId xmlns:a16="http://schemas.microsoft.com/office/drawing/2014/main" val="10004"/>
+                  </a:ext>
+                </a:extLst>
               </a:tr>
               <a:tr h="365760">
                 <a:tc>
@@ -18886,6 +19594,11 @@
                     </a:solidFill>
                   </a:tcPr>
                 </a:tc>
+                <a:extLst>
+                  <a:ext uri="{0D108BD9-81ED-4DB2-BD59-A6C34878D82A}">
+                    <a16:rowId xmlns:a16="http://schemas.microsoft.com/office/drawing/2014/main" val="10005"/>
+                  </a:ext>
+                </a:extLst>
               </a:tr>
               <a:tr h="365760">
                 <a:tc>
@@ -18957,6 +19670,11 @@
                     </a:solidFill>
                   </a:tcPr>
                 </a:tc>
+                <a:extLst>
+                  <a:ext uri="{0D108BD9-81ED-4DB2-BD59-A6C34878D82A}">
+                    <a16:rowId xmlns:a16="http://schemas.microsoft.com/office/drawing/2014/main" val="10006"/>
+                  </a:ext>
+                </a:extLst>
               </a:tr>
             </a:tbl>
           </a:graphicData>
@@ -19007,7 +19725,7 @@
         </p:nvGraphicFramePr>
         <p:xfrm>
           <a:off x="5943600" y="1371600"/>
-          <a:ext cx="5925312" cy="1463040"/>
+          <a:ext cx="5925312" cy="1645920"/>
         </p:xfrm>
         <a:graphic>
           <a:graphicData uri="http://schemas.openxmlformats.org/drawingml/2006/table">
@@ -19016,9 +19734,27 @@
                 <a:tableStyleId>{5C22544A-7EE6-4342-B048-85BDC9FD1C3A}</a:tableStyleId>
               </a:tblPr>
               <a:tblGrid>
-                <a:gridCol w="2560320"/>
-                <a:gridCol w="1993392"/>
-                <a:gridCol w="1371600"/>
+                <a:gridCol w="2560320">
+                  <a:extLst>
+                    <a:ext uri="{9D8B030D-6E8A-4147-A177-3AD203B41FA5}">
+                      <a16:colId xmlns:a16="http://schemas.microsoft.com/office/drawing/2014/main" val="20000"/>
+                    </a:ext>
+                  </a:extLst>
+                </a:gridCol>
+                <a:gridCol w="1993392">
+                  <a:extLst>
+                    <a:ext uri="{9D8B030D-6E8A-4147-A177-3AD203B41FA5}">
+                      <a16:colId xmlns:a16="http://schemas.microsoft.com/office/drawing/2014/main" val="20001"/>
+                    </a:ext>
+                  </a:extLst>
+                </a:gridCol>
+                <a:gridCol w="1371600">
+                  <a:extLst>
+                    <a:ext uri="{9D8B030D-6E8A-4147-A177-3AD203B41FA5}">
+                      <a16:colId xmlns:a16="http://schemas.microsoft.com/office/drawing/2014/main" val="20002"/>
+                    </a:ext>
+                  </a:extLst>
+                </a:gridCol>
               </a:tblGrid>
               <a:tr h="365760">
                 <a:tc>
@@ -19090,6 +19826,11 @@
                     </a:solidFill>
                   </a:tcPr>
                 </a:tc>
+                <a:extLst>
+                  <a:ext uri="{0D108BD9-81ED-4DB2-BD59-A6C34878D82A}">
+                    <a16:rowId xmlns:a16="http://schemas.microsoft.com/office/drawing/2014/main" val="10000"/>
+                  </a:ext>
+                </a:extLst>
               </a:tr>
               <a:tr h="365760">
                 <a:tc>
@@ -19161,6 +19902,11 @@
                     </a:solidFill>
                   </a:tcPr>
                 </a:tc>
+                <a:extLst>
+                  <a:ext uri="{0D108BD9-81ED-4DB2-BD59-A6C34878D82A}">
+                    <a16:rowId xmlns:a16="http://schemas.microsoft.com/office/drawing/2014/main" val="10001"/>
+                  </a:ext>
+                </a:extLst>
               </a:tr>
               <a:tr h="365760">
                 <a:tc>
@@ -19232,6 +19978,11 @@
                     </a:solidFill>
                   </a:tcPr>
                 </a:tc>
+                <a:extLst>
+                  <a:ext uri="{0D108BD9-81ED-4DB2-BD59-A6C34878D82A}">
+                    <a16:rowId xmlns:a16="http://schemas.microsoft.com/office/drawing/2014/main" val="10002"/>
+                  </a:ext>
+                </a:extLst>
               </a:tr>
               <a:tr h="365760">
                 <a:tc>
@@ -19303,6 +20054,11 @@
                     </a:solidFill>
                   </a:tcPr>
                 </a:tc>
+                <a:extLst>
+                  <a:ext uri="{0D108BD9-81ED-4DB2-BD59-A6C34878D82A}">
+                    <a16:rowId xmlns:a16="http://schemas.microsoft.com/office/drawing/2014/main" val="10003"/>
+                  </a:ext>
+                </a:extLst>
               </a:tr>
             </a:tbl>
           </a:graphicData>
@@ -19316,7 +20072,7 @@
         </p:nvSpPr>
         <p:spPr>
           <a:xfrm>
-            <a:off x="320040" y="2743200"/>
+            <a:off x="320040" y="3977639"/>
             <a:ext cx="11521440" cy="1280160"/>
           </a:xfrm>
           <a:prstGeom prst="rect">
@@ -19348,6 +20104,7 @@
           <a:lstStyle/>
           <a:p>
             <a:pPr algn="ctr"/>
+            <a:endParaRPr/>
           </a:p>
         </p:txBody>
       </p:sp>
@@ -19359,7 +20116,7 @@
         </p:nvSpPr>
         <p:spPr>
           <a:xfrm>
-            <a:off x="457200" y="2834640"/>
+            <a:off x="457200" y="4069080"/>
             <a:ext cx="11247120" cy="548640"/>
           </a:xfrm>
           <a:prstGeom prst="rect">
@@ -19394,7 +20151,7 @@
         </p:nvSpPr>
         <p:spPr>
           <a:xfrm>
-            <a:off x="457200" y="3474720"/>
+            <a:off x="457200" y="4709160"/>
             <a:ext cx="11247120" cy="457200"/>
           </a:xfrm>
           <a:prstGeom prst="rect">
@@ -19429,7 +20186,7 @@
         </p:nvSpPr>
         <p:spPr>
           <a:xfrm>
-            <a:off x="457200" y="3977639"/>
+            <a:off x="457200" y="5212080"/>
             <a:ext cx="11247120" cy="320040"/>
           </a:xfrm>
           <a:prstGeom prst="rect">
@@ -19464,7 +20221,7 @@
         </p:nvSpPr>
         <p:spPr>
           <a:xfrm>
-            <a:off x="320040" y="4160520"/>
+            <a:off x="320040" y="5349240"/>
             <a:ext cx="11521440" cy="914400"/>
           </a:xfrm>
           <a:prstGeom prst="rect">
@@ -19496,6 +20253,7 @@
           <a:lstStyle/>
           <a:p>
             <a:pPr algn="ctr"/>
+            <a:endParaRPr/>
           </a:p>
         </p:txBody>
       </p:sp>
@@ -19507,7 +20265,7 @@
         </p:nvSpPr>
         <p:spPr>
           <a:xfrm>
-            <a:off x="502920" y="4224528"/>
+            <a:off x="502920" y="5413248"/>
             <a:ext cx="11155680" cy="749808"/>
           </a:xfrm>
           <a:prstGeom prst="rect">
@@ -19555,7 +20313,7 @@
 </file>
 
 <file path=ppt/slides/slide5.xml><?xml version="1.0" encoding="utf-8"?>
-<p:sld xmlns:a="http://schemas.openxmlformats.org/drawingml/2006/main" xmlns:p="http://schemas.openxmlformats.org/presentationml/2006/main" xmlns:r="http://schemas.openxmlformats.org/officeDocument/2006/relationships">
+<p:sld xmlns:a="http://schemas.openxmlformats.org/drawingml/2006/main" xmlns:r="http://schemas.openxmlformats.org/officeDocument/2006/relationships" xmlns:p="http://schemas.openxmlformats.org/presentationml/2006/main">
   <p:cSld>
     <p:spTree>
       <p:nvGrpSpPr>
@@ -19563,7 +20321,14 @@
         <p:cNvGrpSpPr/>
         <p:nvPr/>
       </p:nvGrpSpPr>
-      <p:grpSpPr/>
+      <p:grpSpPr>
+        <a:xfrm>
+          <a:off x="0" y="0"/>
+          <a:ext cx="0" cy="0"/>
+          <a:chOff x="0" y="0"/>
+          <a:chExt cx="0" cy="0"/>
+        </a:xfrm>
+      </p:grpSpPr>
       <p:sp>
         <p:nvSpPr>
           <p:cNvPr id="2" name="Rectangle 1"/>
@@ -19604,6 +20369,7 @@
           <a:lstStyle/>
           <a:p>
             <a:pPr algn="ctr"/>
+            <a:endParaRPr/>
           </a:p>
         </p:txBody>
       </p:sp>
@@ -19717,6 +20483,7 @@
           <a:lstStyle/>
           <a:p>
             <a:pPr algn="ctr"/>
+            <a:endParaRPr/>
           </a:p>
         </p:txBody>
       </p:sp>
@@ -19830,6 +20597,7 @@
           <a:lstStyle/>
           <a:p>
             <a:pPr algn="ctr"/>
+            <a:endParaRPr/>
           </a:p>
         </p:txBody>
       </p:sp>
@@ -19951,15 +20719,12 @@
           </a:p>
           <a:p>
             <a:pPr algn="ctr"/>
-            <a:r>
-              <a:rPr sz="1300" b="0" i="0">
-                <a:solidFill>
-                  <a:srgbClr val="1A1A2E"/>
-                </a:solidFill>
-                <a:latin typeface="游ゴシック"/>
-              </a:rPr>
-              <a:t/>
-            </a:r>
+            <a:endParaRPr sz="1300" b="0" i="0">
+              <a:solidFill>
+                <a:srgbClr val="1A1A2E"/>
+              </a:solidFill>
+              <a:latin typeface="游ゴシック"/>
+            </a:endParaRPr>
           </a:p>
           <a:p>
             <a:pPr algn="ctr"/>
@@ -20074,6 +20839,7 @@
           <a:lstStyle/>
           <a:p>
             <a:pPr algn="ctr"/>
+            <a:endParaRPr/>
           </a:p>
         </p:txBody>
       </p:sp>
@@ -20282,6 +21048,7 @@
           <a:lstStyle/>
           <a:p>
             <a:pPr algn="ctr"/>
+            <a:endParaRPr/>
           </a:p>
         </p:txBody>
       </p:sp>
@@ -20367,6 +21134,15 @@
           </a:p>
           <a:p>
             <a:pPr algn="ctr"/>
+            <a:endParaRPr sz="1300" b="0" i="0">
+              <a:solidFill>
+                <a:srgbClr val="1A1A2E"/>
+              </a:solidFill>
+              <a:latin typeface="游ゴシック"/>
+            </a:endParaRPr>
+          </a:p>
+          <a:p>
+            <a:pPr algn="ctr"/>
             <a:r>
               <a:rPr sz="1300" b="0" i="0">
                 <a:solidFill>
@@ -20374,7 +21150,7 @@
                 </a:solidFill>
                 <a:latin typeface="游ゴシック"/>
               </a:rPr>
-              <a:t/>
+              <a:t>LCD</a:t>
             </a:r>
           </a:p>
           <a:p>
@@ -20386,32 +21162,17 @@
                 </a:solidFill>
                 <a:latin typeface="游ゴシック"/>
               </a:rPr>
-              <a:t>LCD</a:t>
+              <a:t>→ リアルタイム表示</a:t>
             </a:r>
           </a:p>
           <a:p>
             <a:pPr algn="ctr"/>
-            <a:r>
-              <a:rPr sz="1300" b="0" i="0">
-                <a:solidFill>
-                  <a:srgbClr val="1A1A2E"/>
-                </a:solidFill>
-                <a:latin typeface="游ゴシック"/>
-              </a:rPr>
-              <a:t>→ リアルタイム表示</a:t>
-            </a:r>
-          </a:p>
-          <a:p>
-            <a:pPr algn="ctr"/>
-            <a:r>
-              <a:rPr sz="1300" b="0" i="0">
-                <a:solidFill>
-                  <a:srgbClr val="1A1A2E"/>
-                </a:solidFill>
-                <a:latin typeface="游ゴシック"/>
-              </a:rPr>
-              <a:t/>
-            </a:r>
+            <a:endParaRPr sz="1300" b="0" i="0">
+              <a:solidFill>
+                <a:srgbClr val="1A1A2E"/>
+              </a:solidFill>
+              <a:latin typeface="游ゴシック"/>
+            </a:endParaRPr>
           </a:p>
           <a:p>
             <a:pPr algn="ctr"/>
@@ -20448,7 +21209,7 @@
 </file>
 
 <file path=ppt/slides/slide6.xml><?xml version="1.0" encoding="utf-8"?>
-<p:sld xmlns:a="http://schemas.openxmlformats.org/drawingml/2006/main" xmlns:p="http://schemas.openxmlformats.org/presentationml/2006/main" xmlns:r="http://schemas.openxmlformats.org/officeDocument/2006/relationships">
+<p:sld xmlns:a="http://schemas.openxmlformats.org/drawingml/2006/main" xmlns:r="http://schemas.openxmlformats.org/officeDocument/2006/relationships" xmlns:p="http://schemas.openxmlformats.org/presentationml/2006/main">
   <p:cSld>
     <p:spTree>
       <p:nvGrpSpPr>
@@ -20456,7 +21217,14 @@
         <p:cNvGrpSpPr/>
         <p:nvPr/>
       </p:nvGrpSpPr>
-      <p:grpSpPr/>
+      <p:grpSpPr>
+        <a:xfrm>
+          <a:off x="0" y="0"/>
+          <a:ext cx="0" cy="0"/>
+          <a:chOff x="0" y="0"/>
+          <a:chExt cx="0" cy="0"/>
+        </a:xfrm>
+      </p:grpSpPr>
       <p:sp>
         <p:nvSpPr>
           <p:cNvPr id="2" name="Rectangle 1"/>
@@ -20497,6 +21265,7 @@
           <a:lstStyle/>
           <a:p>
             <a:pPr algn="ctr"/>
+            <a:endParaRPr/>
           </a:p>
         </p:txBody>
       </p:sp>
@@ -20610,6 +21379,7 @@
           <a:lstStyle/>
           <a:p>
             <a:pPr algn="ctr"/>
+            <a:endParaRPr/>
           </a:p>
         </p:txBody>
       </p:sp>
@@ -20702,9 +21472,27 @@
                 <a:tableStyleId>{5C22544A-7EE6-4342-B048-85BDC9FD1C3A}</a:tableStyleId>
               </a:tblPr>
               <a:tblGrid>
-                <a:gridCol w="2286000"/>
-                <a:gridCol w="4114800"/>
-                <a:gridCol w="5120640"/>
+                <a:gridCol w="2286000">
+                  <a:extLst>
+                    <a:ext uri="{9D8B030D-6E8A-4147-A177-3AD203B41FA5}">
+                      <a16:colId xmlns:a16="http://schemas.microsoft.com/office/drawing/2014/main" val="20000"/>
+                    </a:ext>
+                  </a:extLst>
+                </a:gridCol>
+                <a:gridCol w="4114800">
+                  <a:extLst>
+                    <a:ext uri="{9D8B030D-6E8A-4147-A177-3AD203B41FA5}">
+                      <a16:colId xmlns:a16="http://schemas.microsoft.com/office/drawing/2014/main" val="20001"/>
+                    </a:ext>
+                  </a:extLst>
+                </a:gridCol>
+                <a:gridCol w="5120640">
+                  <a:extLst>
+                    <a:ext uri="{9D8B030D-6E8A-4147-A177-3AD203B41FA5}">
+                      <a16:colId xmlns:a16="http://schemas.microsoft.com/office/drawing/2014/main" val="20002"/>
+                    </a:ext>
+                  </a:extLst>
+                </a:gridCol>
               </a:tblGrid>
               <a:tr h="457200">
                 <a:tc>
@@ -20776,6 +21564,11 @@
                     </a:solidFill>
                   </a:tcPr>
                 </a:tc>
+                <a:extLst>
+                  <a:ext uri="{0D108BD9-81ED-4DB2-BD59-A6C34878D82A}">
+                    <a16:rowId xmlns:a16="http://schemas.microsoft.com/office/drawing/2014/main" val="10000"/>
+                  </a:ext>
+                </a:extLst>
               </a:tr>
               <a:tr h="457200">
                 <a:tc>
@@ -20847,6 +21640,11 @@
                     </a:solidFill>
                   </a:tcPr>
                 </a:tc>
+                <a:extLst>
+                  <a:ext uri="{0D108BD9-81ED-4DB2-BD59-A6C34878D82A}">
+                    <a16:rowId xmlns:a16="http://schemas.microsoft.com/office/drawing/2014/main" val="10001"/>
+                  </a:ext>
+                </a:extLst>
               </a:tr>
               <a:tr h="457200">
                 <a:tc>
@@ -20918,6 +21716,11 @@
                     </a:solidFill>
                   </a:tcPr>
                 </a:tc>
+                <a:extLst>
+                  <a:ext uri="{0D108BD9-81ED-4DB2-BD59-A6C34878D82A}">
+                    <a16:rowId xmlns:a16="http://schemas.microsoft.com/office/drawing/2014/main" val="10002"/>
+                  </a:ext>
+                </a:extLst>
               </a:tr>
               <a:tr h="457200">
                 <a:tc>
@@ -20989,6 +21792,11 @@
                     </a:solidFill>
                   </a:tcPr>
                 </a:tc>
+                <a:extLst>
+                  <a:ext uri="{0D108BD9-81ED-4DB2-BD59-A6C34878D82A}">
+                    <a16:rowId xmlns:a16="http://schemas.microsoft.com/office/drawing/2014/main" val="10003"/>
+                  </a:ext>
+                </a:extLst>
               </a:tr>
               <a:tr h="457200">
                 <a:tc>
@@ -21060,6 +21868,11 @@
                     </a:solidFill>
                   </a:tcPr>
                 </a:tc>
+                <a:extLst>
+                  <a:ext uri="{0D108BD9-81ED-4DB2-BD59-A6C34878D82A}">
+                    <a16:rowId xmlns:a16="http://schemas.microsoft.com/office/drawing/2014/main" val="10004"/>
+                  </a:ext>
+                </a:extLst>
               </a:tr>
               <a:tr h="457200">
                 <a:tc>
@@ -21131,6 +21944,11 @@
                     </a:solidFill>
                   </a:tcPr>
                 </a:tc>
+                <a:extLst>
+                  <a:ext uri="{0D108BD9-81ED-4DB2-BD59-A6C34878D82A}">
+                    <a16:rowId xmlns:a16="http://schemas.microsoft.com/office/drawing/2014/main" val="10005"/>
+                  </a:ext>
+                </a:extLst>
               </a:tr>
               <a:tr h="457200">
                 <a:tc>
@@ -21202,6 +22020,11 @@
                     </a:solidFill>
                   </a:tcPr>
                 </a:tc>
+                <a:extLst>
+                  <a:ext uri="{0D108BD9-81ED-4DB2-BD59-A6C34878D82A}">
+                    <a16:rowId xmlns:a16="http://schemas.microsoft.com/office/drawing/2014/main" val="10006"/>
+                  </a:ext>
+                </a:extLst>
               </a:tr>
               <a:tr h="457200">
                 <a:tc>
@@ -21273,6 +22096,11 @@
                     </a:solidFill>
                   </a:tcPr>
                 </a:tc>
+                <a:extLst>
+                  <a:ext uri="{0D108BD9-81ED-4DB2-BD59-A6C34878D82A}">
+                    <a16:rowId xmlns:a16="http://schemas.microsoft.com/office/drawing/2014/main" val="10007"/>
+                  </a:ext>
+                </a:extLst>
               </a:tr>
             </a:tbl>
           </a:graphicData>
@@ -21322,7 +22150,7 @@
 </file>
 
 <file path=ppt/slides/slide7.xml><?xml version="1.0" encoding="utf-8"?>
-<p:sld xmlns:a="http://schemas.openxmlformats.org/drawingml/2006/main" xmlns:p="http://schemas.openxmlformats.org/presentationml/2006/main" xmlns:r="http://schemas.openxmlformats.org/officeDocument/2006/relationships">
+<p:sld xmlns:a="http://schemas.openxmlformats.org/drawingml/2006/main" xmlns:r="http://schemas.openxmlformats.org/officeDocument/2006/relationships" xmlns:p="http://schemas.openxmlformats.org/presentationml/2006/main">
   <p:cSld>
     <p:spTree>
       <p:nvGrpSpPr>
@@ -21330,7 +22158,14 @@
         <p:cNvGrpSpPr/>
         <p:nvPr/>
       </p:nvGrpSpPr>
-      <p:grpSpPr/>
+      <p:grpSpPr>
+        <a:xfrm>
+          <a:off x="0" y="0"/>
+          <a:ext cx="0" cy="0"/>
+          <a:chOff x="0" y="0"/>
+          <a:chExt cx="0" cy="0"/>
+        </a:xfrm>
+      </p:grpSpPr>
       <p:sp>
         <p:nvSpPr>
           <p:cNvPr id="2" name="Rectangle 1"/>
@@ -21371,6 +22206,7 @@
           <a:lstStyle/>
           <a:p>
             <a:pPr algn="ctr"/>
+            <a:endParaRPr/>
           </a:p>
         </p:txBody>
       </p:sp>
@@ -21484,6 +22320,7 @@
           <a:lstStyle/>
           <a:p>
             <a:pPr algn="ctr"/>
+            <a:endParaRPr/>
           </a:p>
         </p:txBody>
       </p:sp>
@@ -21611,10 +22448,34 @@
                 <a:tableStyleId>{5C22544A-7EE6-4342-B048-85BDC9FD1C3A}</a:tableStyleId>
               </a:tblPr>
               <a:tblGrid>
-                <a:gridCol w="1828800"/>
-                <a:gridCol w="2286000"/>
-                <a:gridCol w="3657600"/>
-                <a:gridCol w="3749039"/>
+                <a:gridCol w="1828800">
+                  <a:extLst>
+                    <a:ext uri="{9D8B030D-6E8A-4147-A177-3AD203B41FA5}">
+                      <a16:colId xmlns:a16="http://schemas.microsoft.com/office/drawing/2014/main" val="20000"/>
+                    </a:ext>
+                  </a:extLst>
+                </a:gridCol>
+                <a:gridCol w="2286000">
+                  <a:extLst>
+                    <a:ext uri="{9D8B030D-6E8A-4147-A177-3AD203B41FA5}">
+                      <a16:colId xmlns:a16="http://schemas.microsoft.com/office/drawing/2014/main" val="20001"/>
+                    </a:ext>
+                  </a:extLst>
+                </a:gridCol>
+                <a:gridCol w="3657600">
+                  <a:extLst>
+                    <a:ext uri="{9D8B030D-6E8A-4147-A177-3AD203B41FA5}">
+                      <a16:colId xmlns:a16="http://schemas.microsoft.com/office/drawing/2014/main" val="20002"/>
+                    </a:ext>
+                  </a:extLst>
+                </a:gridCol>
+                <a:gridCol w="3749039">
+                  <a:extLst>
+                    <a:ext uri="{9D8B030D-6E8A-4147-A177-3AD203B41FA5}">
+                      <a16:colId xmlns:a16="http://schemas.microsoft.com/office/drawing/2014/main" val="20003"/>
+                    </a:ext>
+                  </a:extLst>
+                </a:gridCol>
               </a:tblGrid>
               <a:tr h="411480">
                 <a:tc>
@@ -21709,6 +22570,11 @@
                     </a:solidFill>
                   </a:tcPr>
                 </a:tc>
+                <a:extLst>
+                  <a:ext uri="{0D108BD9-81ED-4DB2-BD59-A6C34878D82A}">
+                    <a16:rowId xmlns:a16="http://schemas.microsoft.com/office/drawing/2014/main" val="10000"/>
+                  </a:ext>
+                </a:extLst>
               </a:tr>
               <a:tr h="411480">
                 <a:tc>
@@ -21803,6 +22669,11 @@
                     </a:solidFill>
                   </a:tcPr>
                 </a:tc>
+                <a:extLst>
+                  <a:ext uri="{0D108BD9-81ED-4DB2-BD59-A6C34878D82A}">
+                    <a16:rowId xmlns:a16="http://schemas.microsoft.com/office/drawing/2014/main" val="10001"/>
+                  </a:ext>
+                </a:extLst>
               </a:tr>
               <a:tr h="411480">
                 <a:tc>
@@ -21897,6 +22768,11 @@
                     </a:solidFill>
                   </a:tcPr>
                 </a:tc>
+                <a:extLst>
+                  <a:ext uri="{0D108BD9-81ED-4DB2-BD59-A6C34878D82A}">
+                    <a16:rowId xmlns:a16="http://schemas.microsoft.com/office/drawing/2014/main" val="10002"/>
+                  </a:ext>
+                </a:extLst>
               </a:tr>
               <a:tr h="411480">
                 <a:tc>
@@ -21991,6 +22867,11 @@
                     </a:solidFill>
                   </a:tcPr>
                 </a:tc>
+                <a:extLst>
+                  <a:ext uri="{0D108BD9-81ED-4DB2-BD59-A6C34878D82A}">
+                    <a16:rowId xmlns:a16="http://schemas.microsoft.com/office/drawing/2014/main" val="10003"/>
+                  </a:ext>
+                </a:extLst>
               </a:tr>
               <a:tr h="411480">
                 <a:tc>
@@ -22085,6 +22966,11 @@
                     </a:solidFill>
                   </a:tcPr>
                 </a:tc>
+                <a:extLst>
+                  <a:ext uri="{0D108BD9-81ED-4DB2-BD59-A6C34878D82A}">
+                    <a16:rowId xmlns:a16="http://schemas.microsoft.com/office/drawing/2014/main" val="10004"/>
+                  </a:ext>
+                </a:extLst>
               </a:tr>
               <a:tr h="411480">
                 <a:tc>
@@ -22179,6 +23065,11 @@
                     </a:solidFill>
                   </a:tcPr>
                 </a:tc>
+                <a:extLst>
+                  <a:ext uri="{0D108BD9-81ED-4DB2-BD59-A6C34878D82A}">
+                    <a16:rowId xmlns:a16="http://schemas.microsoft.com/office/drawing/2014/main" val="10005"/>
+                  </a:ext>
+                </a:extLst>
               </a:tr>
             </a:tbl>
           </a:graphicData>
@@ -22192,7 +23083,7 @@
         </p:nvSpPr>
         <p:spPr>
           <a:xfrm>
-            <a:off x="320040" y="3657600"/>
+            <a:off x="320040" y="3931920"/>
             <a:ext cx="11521440" cy="960120"/>
           </a:xfrm>
           <a:prstGeom prst="rect">
@@ -22226,6 +23117,7 @@
           <a:lstStyle/>
           <a:p>
             <a:pPr algn="ctr"/>
+            <a:endParaRPr/>
           </a:p>
         </p:txBody>
       </p:sp>
@@ -22237,7 +23129,7 @@
         </p:nvSpPr>
         <p:spPr>
           <a:xfrm>
-            <a:off x="502920" y="3703320"/>
+            <a:off x="502920" y="3977639"/>
             <a:ext cx="11155680" cy="365760"/>
           </a:xfrm>
           <a:prstGeom prst="rect">
@@ -22272,7 +23164,7 @@
         </p:nvSpPr>
         <p:spPr>
           <a:xfrm>
-            <a:off x="502920" y="4096512"/>
+            <a:off x="502920" y="4370832"/>
             <a:ext cx="11155680" cy="411480"/>
           </a:xfrm>
           <a:prstGeom prst="rect">
@@ -22307,7 +23199,7 @@
         </p:nvSpPr>
         <p:spPr>
           <a:xfrm>
-            <a:off x="320040" y="4709160"/>
+            <a:off x="320040" y="4983480"/>
             <a:ext cx="11521440" cy="640080"/>
           </a:xfrm>
           <a:prstGeom prst="rect">
@@ -22339,6 +23231,7 @@
           <a:lstStyle/>
           <a:p>
             <a:pPr algn="ctr"/>
+            <a:endParaRPr/>
           </a:p>
         </p:txBody>
       </p:sp>
@@ -22350,7 +23243,7 @@
         </p:nvSpPr>
         <p:spPr>
           <a:xfrm>
-            <a:off x="502920" y="4773168"/>
+            <a:off x="502920" y="5047488"/>
             <a:ext cx="11155680" cy="502920"/>
           </a:xfrm>
           <a:prstGeom prst="rect">
@@ -22386,7 +23279,7 @@
 </file>
 
 <file path=ppt/slides/slide8.xml><?xml version="1.0" encoding="utf-8"?>
-<p:sld xmlns:a="http://schemas.openxmlformats.org/drawingml/2006/main" xmlns:p="http://schemas.openxmlformats.org/presentationml/2006/main" xmlns:r="http://schemas.openxmlformats.org/officeDocument/2006/relationships">
+<p:sld xmlns:a="http://schemas.openxmlformats.org/drawingml/2006/main" xmlns:r="http://schemas.openxmlformats.org/officeDocument/2006/relationships" xmlns:p="http://schemas.openxmlformats.org/presentationml/2006/main">
   <p:cSld>
     <p:spTree>
       <p:nvGrpSpPr>
@@ -22394,7 +23287,14 @@
         <p:cNvGrpSpPr/>
         <p:nvPr/>
       </p:nvGrpSpPr>
-      <p:grpSpPr/>
+      <p:grpSpPr>
+        <a:xfrm>
+          <a:off x="0" y="0"/>
+          <a:ext cx="0" cy="0"/>
+          <a:chOff x="0" y="0"/>
+          <a:chExt cx="0" cy="0"/>
+        </a:xfrm>
+      </p:grpSpPr>
       <p:sp>
         <p:nvSpPr>
           <p:cNvPr id="2" name="Rectangle 1"/>
@@ -22435,6 +23335,7 @@
           <a:lstStyle/>
           <a:p>
             <a:pPr algn="ctr"/>
+            <a:endParaRPr/>
           </a:p>
         </p:txBody>
       </p:sp>
@@ -22548,6 +23449,7 @@
           <a:lstStyle/>
           <a:p>
             <a:pPr algn="ctr"/>
+            <a:endParaRPr/>
           </a:p>
         </p:txBody>
       </p:sp>
@@ -22640,9 +23542,27 @@
                 <a:tableStyleId>{5C22544A-7EE6-4342-B048-85BDC9FD1C3A}</a:tableStyleId>
               </a:tblPr>
               <a:tblGrid>
-                <a:gridCol w="2560320"/>
-                <a:gridCol w="2743200"/>
-                <a:gridCol w="6217920"/>
+                <a:gridCol w="2560320">
+                  <a:extLst>
+                    <a:ext uri="{9D8B030D-6E8A-4147-A177-3AD203B41FA5}">
+                      <a16:colId xmlns:a16="http://schemas.microsoft.com/office/drawing/2014/main" val="20000"/>
+                    </a:ext>
+                  </a:extLst>
+                </a:gridCol>
+                <a:gridCol w="2743200">
+                  <a:extLst>
+                    <a:ext uri="{9D8B030D-6E8A-4147-A177-3AD203B41FA5}">
+                      <a16:colId xmlns:a16="http://schemas.microsoft.com/office/drawing/2014/main" val="20001"/>
+                    </a:ext>
+                  </a:extLst>
+                </a:gridCol>
+                <a:gridCol w="6217920">
+                  <a:extLst>
+                    <a:ext uri="{9D8B030D-6E8A-4147-A177-3AD203B41FA5}">
+                      <a16:colId xmlns:a16="http://schemas.microsoft.com/office/drawing/2014/main" val="20002"/>
+                    </a:ext>
+                  </a:extLst>
+                </a:gridCol>
               </a:tblGrid>
               <a:tr h="438912">
                 <a:tc>
@@ -22714,6 +23634,11 @@
                     </a:solidFill>
                   </a:tcPr>
                 </a:tc>
+                <a:extLst>
+                  <a:ext uri="{0D108BD9-81ED-4DB2-BD59-A6C34878D82A}">
+                    <a16:rowId xmlns:a16="http://schemas.microsoft.com/office/drawing/2014/main" val="10000"/>
+                  </a:ext>
+                </a:extLst>
               </a:tr>
               <a:tr h="438912">
                 <a:tc>
@@ -22785,6 +23710,11 @@
                     </a:solidFill>
                   </a:tcPr>
                 </a:tc>
+                <a:extLst>
+                  <a:ext uri="{0D108BD9-81ED-4DB2-BD59-A6C34878D82A}">
+                    <a16:rowId xmlns:a16="http://schemas.microsoft.com/office/drawing/2014/main" val="10001"/>
+                  </a:ext>
+                </a:extLst>
               </a:tr>
               <a:tr h="438912">
                 <a:tc>
@@ -22856,6 +23786,11 @@
                     </a:solidFill>
                   </a:tcPr>
                 </a:tc>
+                <a:extLst>
+                  <a:ext uri="{0D108BD9-81ED-4DB2-BD59-A6C34878D82A}">
+                    <a16:rowId xmlns:a16="http://schemas.microsoft.com/office/drawing/2014/main" val="10002"/>
+                  </a:ext>
+                </a:extLst>
               </a:tr>
               <a:tr h="438912">
                 <a:tc>
@@ -22927,6 +23862,11 @@
                     </a:solidFill>
                   </a:tcPr>
                 </a:tc>
+                <a:extLst>
+                  <a:ext uri="{0D108BD9-81ED-4DB2-BD59-A6C34878D82A}">
+                    <a16:rowId xmlns:a16="http://schemas.microsoft.com/office/drawing/2014/main" val="10003"/>
+                  </a:ext>
+                </a:extLst>
               </a:tr>
               <a:tr h="438912">
                 <a:tc>
@@ -22998,6 +23938,11 @@
                     </a:solidFill>
                   </a:tcPr>
                 </a:tc>
+                <a:extLst>
+                  <a:ext uri="{0D108BD9-81ED-4DB2-BD59-A6C34878D82A}">
+                    <a16:rowId xmlns:a16="http://schemas.microsoft.com/office/drawing/2014/main" val="10004"/>
+                  </a:ext>
+                </a:extLst>
               </a:tr>
               <a:tr h="438912">
                 <a:tc>
@@ -23069,6 +24014,11 @@
                     </a:solidFill>
                   </a:tcPr>
                 </a:tc>
+                <a:extLst>
+                  <a:ext uri="{0D108BD9-81ED-4DB2-BD59-A6C34878D82A}">
+                    <a16:rowId xmlns:a16="http://schemas.microsoft.com/office/drawing/2014/main" val="10005"/>
+                  </a:ext>
+                </a:extLst>
               </a:tr>
               <a:tr h="438912">
                 <a:tc>
@@ -23140,6 +24090,11 @@
                     </a:solidFill>
                   </a:tcPr>
                 </a:tc>
+                <a:extLst>
+                  <a:ext uri="{0D108BD9-81ED-4DB2-BD59-A6C34878D82A}">
+                    <a16:rowId xmlns:a16="http://schemas.microsoft.com/office/drawing/2014/main" val="10006"/>
+                  </a:ext>
+                </a:extLst>
               </a:tr>
               <a:tr h="438912">
                 <a:tc>
@@ -23211,6 +24166,11 @@
                     </a:solidFill>
                   </a:tcPr>
                 </a:tc>
+                <a:extLst>
+                  <a:ext uri="{0D108BD9-81ED-4DB2-BD59-A6C34878D82A}">
+                    <a16:rowId xmlns:a16="http://schemas.microsoft.com/office/drawing/2014/main" val="10007"/>
+                  </a:ext>
+                </a:extLst>
               </a:tr>
             </a:tbl>
           </a:graphicData>
@@ -23256,6 +24216,7 @@
           <a:lstStyle/>
           <a:p>
             <a:pPr algn="ctr"/>
+            <a:endParaRPr/>
           </a:p>
         </p:txBody>
       </p:sp>
@@ -23315,7 +24276,7 @@
 </file>
 
 <file path=ppt/slides/slide9.xml><?xml version="1.0" encoding="utf-8"?>
-<p:sld xmlns:a="http://schemas.openxmlformats.org/drawingml/2006/main" xmlns:p="http://schemas.openxmlformats.org/presentationml/2006/main" xmlns:r="http://schemas.openxmlformats.org/officeDocument/2006/relationships">
+<p:sld xmlns:a="http://schemas.openxmlformats.org/drawingml/2006/main" xmlns:r="http://schemas.openxmlformats.org/officeDocument/2006/relationships" xmlns:p="http://schemas.openxmlformats.org/presentationml/2006/main">
   <p:cSld>
     <p:spTree>
       <p:nvGrpSpPr>
@@ -23323,7 +24284,14 @@
         <p:cNvGrpSpPr/>
         <p:nvPr/>
       </p:nvGrpSpPr>
-      <p:grpSpPr/>
+      <p:grpSpPr>
+        <a:xfrm>
+          <a:off x="0" y="0"/>
+          <a:ext cx="0" cy="0"/>
+          <a:chOff x="0" y="0"/>
+          <a:chExt cx="0" cy="0"/>
+        </a:xfrm>
+      </p:grpSpPr>
       <p:sp>
         <p:nvSpPr>
           <p:cNvPr id="2" name="Rectangle 1"/>
@@ -23364,6 +24332,7 @@
           <a:lstStyle/>
           <a:p>
             <a:pPr algn="ctr"/>
+            <a:endParaRPr/>
           </a:p>
         </p:txBody>
       </p:sp>
@@ -23477,6 +24446,7 @@
           <a:lstStyle/>
           <a:p>
             <a:pPr algn="ctr"/>
+            <a:endParaRPr/>
           </a:p>
         </p:txBody>
       </p:sp>
@@ -23590,6 +24560,7 @@
           <a:lstStyle/>
           <a:p>
             <a:pPr algn="ctr"/>
+            <a:endParaRPr/>
           </a:p>
         </p:txBody>
       </p:sp>
@@ -23774,6 +24745,7 @@
           <a:lstStyle/>
           <a:p>
             <a:pPr algn="ctr"/>
+            <a:endParaRPr/>
           </a:p>
         </p:txBody>
       </p:sp>
@@ -23957,6 +24929,7 @@
           <a:lstStyle/>
           <a:p>
             <a:pPr algn="ctr"/>
+            <a:endParaRPr/>
           </a:p>
         </p:txBody>
       </p:sp>
@@ -24140,6 +25113,7 @@
           <a:lstStyle/>
           <a:p>
             <a:pPr algn="ctr"/>
+            <a:endParaRPr/>
           </a:p>
         </p:txBody>
       </p:sp>
@@ -24268,10 +25242,34 @@
                 <a:tableStyleId>{5C22544A-7EE6-4342-B048-85BDC9FD1C3A}</a:tableStyleId>
               </a:tblPr>
               <a:tblGrid>
-                <a:gridCol w="1828800"/>
-                <a:gridCol w="1828800"/>
-                <a:gridCol w="3657600"/>
-                <a:gridCol w="4206240"/>
+                <a:gridCol w="1828800">
+                  <a:extLst>
+                    <a:ext uri="{9D8B030D-6E8A-4147-A177-3AD203B41FA5}">
+                      <a16:colId xmlns:a16="http://schemas.microsoft.com/office/drawing/2014/main" val="20000"/>
+                    </a:ext>
+                  </a:extLst>
+                </a:gridCol>
+                <a:gridCol w="1828800">
+                  <a:extLst>
+                    <a:ext uri="{9D8B030D-6E8A-4147-A177-3AD203B41FA5}">
+                      <a16:colId xmlns:a16="http://schemas.microsoft.com/office/drawing/2014/main" val="20001"/>
+                    </a:ext>
+                  </a:extLst>
+                </a:gridCol>
+                <a:gridCol w="3657600">
+                  <a:extLst>
+                    <a:ext uri="{9D8B030D-6E8A-4147-A177-3AD203B41FA5}">
+                      <a16:colId xmlns:a16="http://schemas.microsoft.com/office/drawing/2014/main" val="20002"/>
+                    </a:ext>
+                  </a:extLst>
+                </a:gridCol>
+                <a:gridCol w="4206240">
+                  <a:extLst>
+                    <a:ext uri="{9D8B030D-6E8A-4147-A177-3AD203B41FA5}">
+                      <a16:colId xmlns:a16="http://schemas.microsoft.com/office/drawing/2014/main" val="20003"/>
+                    </a:ext>
+                  </a:extLst>
+                </a:gridCol>
               </a:tblGrid>
               <a:tr h="402336">
                 <a:tc>
@@ -24366,6 +25364,11 @@
                     </a:solidFill>
                   </a:tcPr>
                 </a:tc>
+                <a:extLst>
+                  <a:ext uri="{0D108BD9-81ED-4DB2-BD59-A6C34878D82A}">
+                    <a16:rowId xmlns:a16="http://schemas.microsoft.com/office/drawing/2014/main" val="10000"/>
+                  </a:ext>
+                </a:extLst>
               </a:tr>
               <a:tr h="402336">
                 <a:tc>
@@ -24460,6 +25463,11 @@
                     </a:solidFill>
                   </a:tcPr>
                 </a:tc>
+                <a:extLst>
+                  <a:ext uri="{0D108BD9-81ED-4DB2-BD59-A6C34878D82A}">
+                    <a16:rowId xmlns:a16="http://schemas.microsoft.com/office/drawing/2014/main" val="10001"/>
+                  </a:ext>
+                </a:extLst>
               </a:tr>
               <a:tr h="402336">
                 <a:tc>
@@ -24554,6 +25562,11 @@
                     </a:solidFill>
                   </a:tcPr>
                 </a:tc>
+                <a:extLst>
+                  <a:ext uri="{0D108BD9-81ED-4DB2-BD59-A6C34878D82A}">
+                    <a16:rowId xmlns:a16="http://schemas.microsoft.com/office/drawing/2014/main" val="10002"/>
+                  </a:ext>
+                </a:extLst>
               </a:tr>
               <a:tr h="402336">
                 <a:tc>
@@ -24648,6 +25661,11 @@
                     </a:solidFill>
                   </a:tcPr>
                 </a:tc>
+                <a:extLst>
+                  <a:ext uri="{0D108BD9-81ED-4DB2-BD59-A6C34878D82A}">
+                    <a16:rowId xmlns:a16="http://schemas.microsoft.com/office/drawing/2014/main" val="10003"/>
+                  </a:ext>
+                </a:extLst>
               </a:tr>
               <a:tr h="402336">
                 <a:tc>
@@ -24742,6 +25760,11 @@
                     </a:solidFill>
                   </a:tcPr>
                 </a:tc>
+                <a:extLst>
+                  <a:ext uri="{0D108BD9-81ED-4DB2-BD59-A6C34878D82A}">
+                    <a16:rowId xmlns:a16="http://schemas.microsoft.com/office/drawing/2014/main" val="10004"/>
+                  </a:ext>
+                </a:extLst>
               </a:tr>
               <a:tr h="402336">
                 <a:tc>
@@ -24836,6 +25859,11 @@
                     </a:solidFill>
                   </a:tcPr>
                 </a:tc>
+                <a:extLst>
+                  <a:ext uri="{0D108BD9-81ED-4DB2-BD59-A6C34878D82A}">
+                    <a16:rowId xmlns:a16="http://schemas.microsoft.com/office/drawing/2014/main" val="10005"/>
+                  </a:ext>
+                </a:extLst>
               </a:tr>
             </a:tbl>
           </a:graphicData>

--- a/docs/career/Simple_Temp_Tool_Overview_v2.pptx
+++ b/docs/career/Simple_Temp_Tool_Overview_v2.pptx
@@ -5,31 +5,31 @@
     <p:sldMasterId id="2147483648" r:id="rId1"/>
   </p:sldMasterIdLst>
   <p:sldIdLst>
-    <p:sldId id="256" r:id="rId2"/>
-    <p:sldId id="257" r:id="rId3"/>
-    <p:sldId id="258" r:id="rId4"/>
-    <p:sldId id="259" r:id="rId5"/>
-    <p:sldId id="260" r:id="rId6"/>
-    <p:sldId id="261" r:id="rId7"/>
-    <p:sldId id="262" r:id="rId8"/>
-    <p:sldId id="263" r:id="rId9"/>
-    <p:sldId id="264" r:id="rId10"/>
-    <p:sldId id="265" r:id="rId11"/>
-    <p:sldId id="266" r:id="rId12"/>
-    <p:sldId id="267" r:id="rId13"/>
-    <p:sldId id="268" r:id="rId14"/>
-    <p:sldId id="269" r:id="rId15"/>
-    <p:sldId id="270" r:id="rId16"/>
-    <p:sldId id="271" r:id="rId17"/>
-    <p:sldId id="272" r:id="rId18"/>
-    <p:sldId id="273" r:id="rId19"/>
-    <p:sldId id="274" r:id="rId20"/>
-    <p:sldId id="275" r:id="rId21"/>
-    <p:sldId id="276" r:id="rId22"/>
-    <p:sldId id="277" r:id="rId23"/>
-    <p:sldId id="278" r:id="rId24"/>
+    <p:sldId id="256" r:id="rId7"/>
+    <p:sldId id="257" r:id="rId8"/>
+    <p:sldId id="258" r:id="rId9"/>
+    <p:sldId id="259" r:id="rId10"/>
+    <p:sldId id="260" r:id="rId11"/>
+    <p:sldId id="261" r:id="rId12"/>
+    <p:sldId id="262" r:id="rId13"/>
+    <p:sldId id="263" r:id="rId14"/>
+    <p:sldId id="264" r:id="rId15"/>
+    <p:sldId id="265" r:id="rId16"/>
+    <p:sldId id="266" r:id="rId17"/>
+    <p:sldId id="267" r:id="rId18"/>
+    <p:sldId id="268" r:id="rId19"/>
+    <p:sldId id="269" r:id="rId20"/>
+    <p:sldId id="270" r:id="rId21"/>
+    <p:sldId id="271" r:id="rId22"/>
+    <p:sldId id="272" r:id="rId23"/>
+    <p:sldId id="273" r:id="rId24"/>
+    <p:sldId id="274" r:id="rId25"/>
+    <p:sldId id="275" r:id="rId26"/>
+    <p:sldId id="276" r:id="rId27"/>
+    <p:sldId id="277" r:id="rId28"/>
+    <p:sldId id="278" r:id="rId29"/>
   </p:sldIdLst>
-  <p:sldSz cx="12188825" cy="6858000"/>
+  <p:sldSz cx="12188952" cy="6858000" type="screen4x3"/>
   <p:notesSz cx="6858000" cy="9144000"/>
   <p:defaultTextStyle>
     <a:defPPr>
@@ -126,22 +126,6 @@
       </a:defRPr>
     </a:lvl9pPr>
   </p:defaultTextStyle>
-  <p:extLst>
-    <p:ext uri="{EFAFB233-063F-42B5-8137-9DF3F51BA10A}">
-      <p15:sldGuideLst xmlns:p15="http://schemas.microsoft.com/office/powerpoint/2012/main">
-        <p15:guide id="1" orient="horz" pos="2160">
-          <p15:clr>
-            <a:srgbClr val="A4A3A4"/>
-          </p15:clr>
-        </p15:guide>
-        <p15:guide id="2" pos="2880">
-          <p15:clr>
-            <a:srgbClr val="A4A3A4"/>
-          </p15:clr>
-        </p15:guide>
-      </p15:sldGuideLst>
-    </p:ext>
-  </p:extLst>
 </p:presentation>
 </file>
 
@@ -183,9 +167,10 @@
           <a:lstStyle/>
           <a:p>
             <a:r>
-              <a:rPr lang="en-US"/>
+              <a:rPr lang="en-US" smtClean="0"/>
               <a:t>Click to edit Master title style</a:t>
             </a:r>
+            <a:endParaRPr lang="en-US"/>
           </a:p>
         </p:txBody>
       </p:sp>
@@ -301,9 +286,10 @@
           </a:lstStyle>
           <a:p>
             <a:r>
-              <a:rPr lang="en-US"/>
+              <a:rPr lang="en-US" smtClean="0"/>
               <a:t>Click to edit Master subtitle style</a:t>
             </a:r>
+            <a:endParaRPr lang="en-US"/>
           </a:p>
         </p:txBody>
       </p:sp>
@@ -324,7 +310,7 @@
           <a:p>
             <a:fld id="{5BCAD085-E8A6-8845-BD4E-CB4CCA059FC4}" type="datetimeFigureOut">
               <a:rPr lang="en-US" smtClean="0"/>
-              <a:t>3/2/2026</a:t>
+              <a:t>1/27/13</a:t>
             </a:fld>
             <a:endParaRPr lang="en-US"/>
           </a:p>
@@ -418,9 +404,10 @@
           <a:lstStyle/>
           <a:p>
             <a:r>
-              <a:rPr lang="en-US"/>
+              <a:rPr lang="en-US" smtClean="0"/>
               <a:t>Click to edit Master title style</a:t>
             </a:r>
+            <a:endParaRPr lang="en-US"/>
           </a:p>
         </p:txBody>
       </p:sp>
@@ -441,37 +428,38 @@
           <a:p>
             <a:pPr lvl="0"/>
             <a:r>
-              <a:rPr lang="en-US"/>
+              <a:rPr lang="en-US" smtClean="0"/>
               <a:t>Click to edit Master text styles</a:t>
             </a:r>
           </a:p>
           <a:p>
             <a:pPr lvl="1"/>
             <a:r>
-              <a:rPr lang="en-US"/>
+              <a:rPr lang="en-US" smtClean="0"/>
               <a:t>Second level</a:t>
             </a:r>
           </a:p>
           <a:p>
             <a:pPr lvl="2"/>
             <a:r>
-              <a:rPr lang="en-US"/>
+              <a:rPr lang="en-US" smtClean="0"/>
               <a:t>Third level</a:t>
             </a:r>
           </a:p>
           <a:p>
             <a:pPr lvl="3"/>
             <a:r>
-              <a:rPr lang="en-US"/>
+              <a:rPr lang="en-US" smtClean="0"/>
               <a:t>Fourth level</a:t>
             </a:r>
           </a:p>
           <a:p>
             <a:pPr lvl="4"/>
             <a:r>
-              <a:rPr lang="en-US"/>
+              <a:rPr lang="en-US" smtClean="0"/>
               <a:t>Fifth level</a:t>
             </a:r>
+            <a:endParaRPr lang="en-US"/>
           </a:p>
         </p:txBody>
       </p:sp>
@@ -492,7 +480,7 @@
           <a:p>
             <a:fld id="{5BCAD085-E8A6-8845-BD4E-CB4CCA059FC4}" type="datetimeFigureOut">
               <a:rPr lang="en-US" smtClean="0"/>
-              <a:t>3/2/2026</a:t>
+              <a:t>1/27/13</a:t>
             </a:fld>
             <a:endParaRPr lang="en-US"/>
           </a:p>
@@ -591,9 +579,10 @@
           <a:lstStyle/>
           <a:p>
             <a:r>
-              <a:rPr lang="en-US"/>
+              <a:rPr lang="en-US" smtClean="0"/>
               <a:t>Click to edit Master title style</a:t>
             </a:r>
+            <a:endParaRPr lang="en-US"/>
           </a:p>
         </p:txBody>
       </p:sp>
@@ -619,37 +608,38 @@
           <a:p>
             <a:pPr lvl="0"/>
             <a:r>
-              <a:rPr lang="en-US"/>
+              <a:rPr lang="en-US" smtClean="0"/>
               <a:t>Click to edit Master text styles</a:t>
             </a:r>
           </a:p>
           <a:p>
             <a:pPr lvl="1"/>
             <a:r>
-              <a:rPr lang="en-US"/>
+              <a:rPr lang="en-US" smtClean="0"/>
               <a:t>Second level</a:t>
             </a:r>
           </a:p>
           <a:p>
             <a:pPr lvl="2"/>
             <a:r>
-              <a:rPr lang="en-US"/>
+              <a:rPr lang="en-US" smtClean="0"/>
               <a:t>Third level</a:t>
             </a:r>
           </a:p>
           <a:p>
             <a:pPr lvl="3"/>
             <a:r>
-              <a:rPr lang="en-US"/>
+              <a:rPr lang="en-US" smtClean="0"/>
               <a:t>Fourth level</a:t>
             </a:r>
           </a:p>
           <a:p>
             <a:pPr lvl="4"/>
             <a:r>
-              <a:rPr lang="en-US"/>
+              <a:rPr lang="en-US" smtClean="0"/>
               <a:t>Fifth level</a:t>
             </a:r>
+            <a:endParaRPr lang="en-US"/>
           </a:p>
         </p:txBody>
       </p:sp>
@@ -670,7 +660,7 @@
           <a:p>
             <a:fld id="{5BCAD085-E8A6-8845-BD4E-CB4CCA059FC4}" type="datetimeFigureOut">
               <a:rPr lang="en-US" smtClean="0"/>
-              <a:t>3/2/2026</a:t>
+              <a:t>1/27/13</a:t>
             </a:fld>
             <a:endParaRPr lang="en-US"/>
           </a:p>
@@ -764,9 +754,10 @@
           <a:lstStyle/>
           <a:p>
             <a:r>
-              <a:rPr lang="en-US"/>
+              <a:rPr lang="en-US" smtClean="0"/>
               <a:t>Click to edit Master title style</a:t>
             </a:r>
+            <a:endParaRPr lang="en-US"/>
           </a:p>
         </p:txBody>
       </p:sp>
@@ -787,37 +778,38 @@
           <a:p>
             <a:pPr lvl="0"/>
             <a:r>
-              <a:rPr lang="en-US"/>
+              <a:rPr lang="en-US" smtClean="0"/>
               <a:t>Click to edit Master text styles</a:t>
             </a:r>
           </a:p>
           <a:p>
             <a:pPr lvl="1"/>
             <a:r>
-              <a:rPr lang="en-US"/>
+              <a:rPr lang="en-US" smtClean="0"/>
               <a:t>Second level</a:t>
             </a:r>
           </a:p>
           <a:p>
             <a:pPr lvl="2"/>
             <a:r>
-              <a:rPr lang="en-US"/>
+              <a:rPr lang="en-US" smtClean="0"/>
               <a:t>Third level</a:t>
             </a:r>
           </a:p>
           <a:p>
             <a:pPr lvl="3"/>
             <a:r>
-              <a:rPr lang="en-US"/>
+              <a:rPr lang="en-US" smtClean="0"/>
               <a:t>Fourth level</a:t>
             </a:r>
           </a:p>
           <a:p>
             <a:pPr lvl="4"/>
             <a:r>
-              <a:rPr lang="en-US"/>
+              <a:rPr lang="en-US" smtClean="0"/>
               <a:t>Fifth level</a:t>
             </a:r>
+            <a:endParaRPr lang="en-US"/>
           </a:p>
         </p:txBody>
       </p:sp>
@@ -838,7 +830,7 @@
           <a:p>
             <a:fld id="{5BCAD085-E8A6-8845-BD4E-CB4CCA059FC4}" type="datetimeFigureOut">
               <a:rPr lang="en-US" smtClean="0"/>
-              <a:t>3/2/2026</a:t>
+              <a:t>1/27/13</a:t>
             </a:fld>
             <a:endParaRPr lang="en-US"/>
           </a:p>
@@ -941,9 +933,10 @@
           </a:lstStyle>
           <a:p>
             <a:r>
-              <a:rPr lang="en-US"/>
+              <a:rPr lang="en-US" smtClean="0"/>
               <a:t>Click to edit Master title style</a:t>
             </a:r>
+            <a:endParaRPr lang="en-US"/>
           </a:p>
         </p:txBody>
       </p:sp>
@@ -1060,7 +1053,7 @@
           <a:p>
             <a:pPr lvl="0"/>
             <a:r>
-              <a:rPr lang="en-US"/>
+              <a:rPr lang="en-US" smtClean="0"/>
               <a:t>Click to edit Master text styles</a:t>
             </a:r>
           </a:p>
@@ -1083,7 +1076,7 @@
           <a:p>
             <a:fld id="{5BCAD085-E8A6-8845-BD4E-CB4CCA059FC4}" type="datetimeFigureOut">
               <a:rPr lang="en-US" smtClean="0"/>
-              <a:t>3/2/2026</a:t>
+              <a:t>1/27/13</a:t>
             </a:fld>
             <a:endParaRPr lang="en-US"/>
           </a:p>
@@ -1177,9 +1170,10 @@
           <a:lstStyle/>
           <a:p>
             <a:r>
-              <a:rPr lang="en-US"/>
+              <a:rPr lang="en-US" smtClean="0"/>
               <a:t>Click to edit Master title style</a:t>
             </a:r>
+            <a:endParaRPr lang="en-US"/>
           </a:p>
         </p:txBody>
       </p:sp>
@@ -1233,37 +1227,38 @@
           <a:p>
             <a:pPr lvl="0"/>
             <a:r>
-              <a:rPr lang="en-US"/>
+              <a:rPr lang="en-US" smtClean="0"/>
               <a:t>Click to edit Master text styles</a:t>
             </a:r>
           </a:p>
           <a:p>
             <a:pPr lvl="1"/>
             <a:r>
-              <a:rPr lang="en-US"/>
+              <a:rPr lang="en-US" smtClean="0"/>
               <a:t>Second level</a:t>
             </a:r>
           </a:p>
           <a:p>
             <a:pPr lvl="2"/>
             <a:r>
-              <a:rPr lang="en-US"/>
+              <a:rPr lang="en-US" smtClean="0"/>
               <a:t>Third level</a:t>
             </a:r>
           </a:p>
           <a:p>
             <a:pPr lvl="3"/>
             <a:r>
-              <a:rPr lang="en-US"/>
+              <a:rPr lang="en-US" smtClean="0"/>
               <a:t>Fourth level</a:t>
             </a:r>
           </a:p>
           <a:p>
             <a:pPr lvl="4"/>
             <a:r>
-              <a:rPr lang="en-US"/>
+              <a:rPr lang="en-US" smtClean="0"/>
               <a:t>Fifth level</a:t>
             </a:r>
+            <a:endParaRPr lang="en-US"/>
           </a:p>
         </p:txBody>
       </p:sp>
@@ -1317,37 +1312,38 @@
           <a:p>
             <a:pPr lvl="0"/>
             <a:r>
-              <a:rPr lang="en-US"/>
+              <a:rPr lang="en-US" smtClean="0"/>
               <a:t>Click to edit Master text styles</a:t>
             </a:r>
           </a:p>
           <a:p>
             <a:pPr lvl="1"/>
             <a:r>
-              <a:rPr lang="en-US"/>
+              <a:rPr lang="en-US" smtClean="0"/>
               <a:t>Second level</a:t>
             </a:r>
           </a:p>
           <a:p>
             <a:pPr lvl="2"/>
             <a:r>
-              <a:rPr lang="en-US"/>
+              <a:rPr lang="en-US" smtClean="0"/>
               <a:t>Third level</a:t>
             </a:r>
           </a:p>
           <a:p>
             <a:pPr lvl="3"/>
             <a:r>
-              <a:rPr lang="en-US"/>
+              <a:rPr lang="en-US" smtClean="0"/>
               <a:t>Fourth level</a:t>
             </a:r>
           </a:p>
           <a:p>
             <a:pPr lvl="4"/>
             <a:r>
-              <a:rPr lang="en-US"/>
+              <a:rPr lang="en-US" smtClean="0"/>
               <a:t>Fifth level</a:t>
             </a:r>
+            <a:endParaRPr lang="en-US"/>
           </a:p>
         </p:txBody>
       </p:sp>
@@ -1368,7 +1364,7 @@
           <a:p>
             <a:fld id="{5BCAD085-E8A6-8845-BD4E-CB4CCA059FC4}" type="datetimeFigureOut">
               <a:rPr lang="en-US" smtClean="0"/>
-              <a:t>3/2/2026</a:t>
+              <a:t>1/27/13</a:t>
             </a:fld>
             <a:endParaRPr lang="en-US"/>
           </a:p>
@@ -1466,9 +1462,10 @@
           </a:lstStyle>
           <a:p>
             <a:r>
-              <a:rPr lang="en-US"/>
+              <a:rPr lang="en-US" smtClean="0"/>
               <a:t>Click to edit Master title style</a:t>
             </a:r>
+            <a:endParaRPr lang="en-US"/>
           </a:p>
         </p:txBody>
       </p:sp>
@@ -1531,7 +1528,7 @@
           <a:p>
             <a:pPr lvl="0"/>
             <a:r>
-              <a:rPr lang="en-US"/>
+              <a:rPr lang="en-US" smtClean="0"/>
               <a:t>Click to edit Master text styles</a:t>
             </a:r>
           </a:p>
@@ -1587,37 +1584,38 @@
           <a:p>
             <a:pPr lvl="0"/>
             <a:r>
-              <a:rPr lang="en-US"/>
+              <a:rPr lang="en-US" smtClean="0"/>
               <a:t>Click to edit Master text styles</a:t>
             </a:r>
           </a:p>
           <a:p>
             <a:pPr lvl="1"/>
             <a:r>
-              <a:rPr lang="en-US"/>
+              <a:rPr lang="en-US" smtClean="0"/>
               <a:t>Second level</a:t>
             </a:r>
           </a:p>
           <a:p>
             <a:pPr lvl="2"/>
             <a:r>
-              <a:rPr lang="en-US"/>
+              <a:rPr lang="en-US" smtClean="0"/>
               <a:t>Third level</a:t>
             </a:r>
           </a:p>
           <a:p>
             <a:pPr lvl="3"/>
             <a:r>
-              <a:rPr lang="en-US"/>
+              <a:rPr lang="en-US" smtClean="0"/>
               <a:t>Fourth level</a:t>
             </a:r>
           </a:p>
           <a:p>
             <a:pPr lvl="4"/>
             <a:r>
-              <a:rPr lang="en-US"/>
+              <a:rPr lang="en-US" smtClean="0"/>
               <a:t>Fifth level</a:t>
             </a:r>
+            <a:endParaRPr lang="en-US"/>
           </a:p>
         </p:txBody>
       </p:sp>
@@ -1680,7 +1678,7 @@
           <a:p>
             <a:pPr lvl="0"/>
             <a:r>
-              <a:rPr lang="en-US"/>
+              <a:rPr lang="en-US" smtClean="0"/>
               <a:t>Click to edit Master text styles</a:t>
             </a:r>
           </a:p>
@@ -1736,37 +1734,38 @@
           <a:p>
             <a:pPr lvl="0"/>
             <a:r>
-              <a:rPr lang="en-US"/>
+              <a:rPr lang="en-US" smtClean="0"/>
               <a:t>Click to edit Master text styles</a:t>
             </a:r>
           </a:p>
           <a:p>
             <a:pPr lvl="1"/>
             <a:r>
-              <a:rPr lang="en-US"/>
+              <a:rPr lang="en-US" smtClean="0"/>
               <a:t>Second level</a:t>
             </a:r>
           </a:p>
           <a:p>
             <a:pPr lvl="2"/>
             <a:r>
-              <a:rPr lang="en-US"/>
+              <a:rPr lang="en-US" smtClean="0"/>
               <a:t>Third level</a:t>
             </a:r>
           </a:p>
           <a:p>
             <a:pPr lvl="3"/>
             <a:r>
-              <a:rPr lang="en-US"/>
+              <a:rPr lang="en-US" smtClean="0"/>
               <a:t>Fourth level</a:t>
             </a:r>
           </a:p>
           <a:p>
             <a:pPr lvl="4"/>
             <a:r>
-              <a:rPr lang="en-US"/>
+              <a:rPr lang="en-US" smtClean="0"/>
               <a:t>Fifth level</a:t>
             </a:r>
+            <a:endParaRPr lang="en-US"/>
           </a:p>
         </p:txBody>
       </p:sp>
@@ -1787,7 +1786,7 @@
           <a:p>
             <a:fld id="{5BCAD085-E8A6-8845-BD4E-CB4CCA059FC4}" type="datetimeFigureOut">
               <a:rPr lang="en-US" smtClean="0"/>
-              <a:t>3/2/2026</a:t>
+              <a:t>1/27/13</a:t>
             </a:fld>
             <a:endParaRPr lang="en-US"/>
           </a:p>
@@ -1881,9 +1880,10 @@
           <a:lstStyle/>
           <a:p>
             <a:r>
-              <a:rPr lang="en-US"/>
+              <a:rPr lang="en-US" smtClean="0"/>
               <a:t>Click to edit Master title style</a:t>
             </a:r>
+            <a:endParaRPr lang="en-US"/>
           </a:p>
         </p:txBody>
       </p:sp>
@@ -1904,7 +1904,7 @@
           <a:p>
             <a:fld id="{5BCAD085-E8A6-8845-BD4E-CB4CCA059FC4}" type="datetimeFigureOut">
               <a:rPr lang="en-US" smtClean="0"/>
-              <a:t>3/2/2026</a:t>
+              <a:t>1/27/13</a:t>
             </a:fld>
             <a:endParaRPr lang="en-US"/>
           </a:p>
@@ -1999,7 +1999,7 @@
           <a:p>
             <a:fld id="{5BCAD085-E8A6-8845-BD4E-CB4CCA059FC4}" type="datetimeFigureOut">
               <a:rPr lang="en-US" smtClean="0"/>
-              <a:t>3/2/2026</a:t>
+              <a:t>1/27/13</a:t>
             </a:fld>
             <a:endParaRPr lang="en-US"/>
           </a:p>
@@ -2102,9 +2102,10 @@
           </a:lstStyle>
           <a:p>
             <a:r>
-              <a:rPr lang="en-US"/>
+              <a:rPr lang="en-US" smtClean="0"/>
               <a:t>Click to edit Master title style</a:t>
             </a:r>
+            <a:endParaRPr lang="en-US"/>
           </a:p>
         </p:txBody>
       </p:sp>
@@ -2158,37 +2159,38 @@
           <a:p>
             <a:pPr lvl="0"/>
             <a:r>
-              <a:rPr lang="en-US"/>
+              <a:rPr lang="en-US" smtClean="0"/>
               <a:t>Click to edit Master text styles</a:t>
             </a:r>
           </a:p>
           <a:p>
             <a:pPr lvl="1"/>
             <a:r>
-              <a:rPr lang="en-US"/>
+              <a:rPr lang="en-US" smtClean="0"/>
               <a:t>Second level</a:t>
             </a:r>
           </a:p>
           <a:p>
             <a:pPr lvl="2"/>
             <a:r>
-              <a:rPr lang="en-US"/>
+              <a:rPr lang="en-US" smtClean="0"/>
               <a:t>Third level</a:t>
             </a:r>
           </a:p>
           <a:p>
             <a:pPr lvl="3"/>
             <a:r>
-              <a:rPr lang="en-US"/>
+              <a:rPr lang="en-US" smtClean="0"/>
               <a:t>Fourth level</a:t>
             </a:r>
           </a:p>
           <a:p>
             <a:pPr lvl="4"/>
             <a:r>
-              <a:rPr lang="en-US"/>
+              <a:rPr lang="en-US" smtClean="0"/>
               <a:t>Fifth level</a:t>
             </a:r>
+            <a:endParaRPr lang="en-US"/>
           </a:p>
         </p:txBody>
       </p:sp>
@@ -2251,7 +2253,7 @@
           <a:p>
             <a:pPr lvl="0"/>
             <a:r>
-              <a:rPr lang="en-US"/>
+              <a:rPr lang="en-US" smtClean="0"/>
               <a:t>Click to edit Master text styles</a:t>
             </a:r>
           </a:p>
@@ -2274,7 +2276,7 @@
           <a:p>
             <a:fld id="{5BCAD085-E8A6-8845-BD4E-CB4CCA059FC4}" type="datetimeFigureOut">
               <a:rPr lang="en-US" smtClean="0"/>
-              <a:t>3/2/2026</a:t>
+              <a:t>1/27/13</a:t>
             </a:fld>
             <a:endParaRPr lang="en-US"/>
           </a:p>
@@ -2377,9 +2379,10 @@
           </a:lstStyle>
           <a:p>
             <a:r>
-              <a:rPr lang="en-US"/>
+              <a:rPr lang="en-US" smtClean="0"/>
               <a:t>Click to edit Master title style</a:t>
             </a:r>
+            <a:endParaRPr lang="en-US"/>
           </a:p>
         </p:txBody>
       </p:sp>
@@ -2503,7 +2506,7 @@
           <a:p>
             <a:pPr lvl="0"/>
             <a:r>
-              <a:rPr lang="en-US"/>
+              <a:rPr lang="en-US" smtClean="0"/>
               <a:t>Click to edit Master text styles</a:t>
             </a:r>
           </a:p>
@@ -2526,7 +2529,7 @@
           <a:p>
             <a:fld id="{5BCAD085-E8A6-8845-BD4E-CB4CCA059FC4}" type="datetimeFigureOut">
               <a:rPr lang="en-US" smtClean="0"/>
-              <a:t>3/2/2026</a:t>
+              <a:t>1/27/13</a:t>
             </a:fld>
             <a:endParaRPr lang="en-US"/>
           </a:p>
@@ -2635,9 +2638,10 @@
           <a:lstStyle/>
           <a:p>
             <a:r>
-              <a:rPr lang="en-US"/>
+              <a:rPr lang="en-US" smtClean="0"/>
               <a:t>Click to edit Master title style</a:t>
             </a:r>
+            <a:endParaRPr lang="en-US"/>
           </a:p>
         </p:txBody>
       </p:sp>
@@ -2668,37 +2672,38 @@
           <a:p>
             <a:pPr lvl="0"/>
             <a:r>
-              <a:rPr lang="en-US"/>
+              <a:rPr lang="en-US" smtClean="0"/>
               <a:t>Click to edit Master text styles</a:t>
             </a:r>
           </a:p>
           <a:p>
             <a:pPr lvl="1"/>
             <a:r>
-              <a:rPr lang="en-US"/>
+              <a:rPr lang="en-US" smtClean="0"/>
               <a:t>Second level</a:t>
             </a:r>
           </a:p>
           <a:p>
             <a:pPr lvl="2"/>
             <a:r>
-              <a:rPr lang="en-US"/>
+              <a:rPr lang="en-US" smtClean="0"/>
               <a:t>Third level</a:t>
             </a:r>
           </a:p>
           <a:p>
             <a:pPr lvl="3"/>
             <a:r>
-              <a:rPr lang="en-US"/>
+              <a:rPr lang="en-US" smtClean="0"/>
               <a:t>Fourth level</a:t>
             </a:r>
           </a:p>
           <a:p>
             <a:pPr lvl="4"/>
             <a:r>
-              <a:rPr lang="en-US"/>
+              <a:rPr lang="en-US" smtClean="0"/>
               <a:t>Fifth level</a:t>
             </a:r>
+            <a:endParaRPr lang="en-US"/>
           </a:p>
         </p:txBody>
       </p:sp>
@@ -2737,7 +2742,7 @@
           <a:p>
             <a:fld id="{5BCAD085-E8A6-8845-BD4E-CB4CCA059FC4}" type="datetimeFigureOut">
               <a:rPr lang="en-US" smtClean="0"/>
-              <a:t>3/2/2026</a:t>
+              <a:t>1/27/13</a:t>
             </a:fld>
             <a:endParaRPr lang="en-US"/>
           </a:p>
@@ -3096,7 +3101,7 @@
 </file>
 
 <file path=ppt/slides/slide1.xml><?xml version="1.0" encoding="utf-8"?>
-<p:sld xmlns:a="http://schemas.openxmlformats.org/drawingml/2006/main" xmlns:r="http://schemas.openxmlformats.org/officeDocument/2006/relationships" xmlns:p="http://schemas.openxmlformats.org/presentationml/2006/main">
+<p:sld xmlns:a="http://schemas.openxmlformats.org/drawingml/2006/main" xmlns:p="http://schemas.openxmlformats.org/presentationml/2006/main" xmlns:r="http://schemas.openxmlformats.org/officeDocument/2006/relationships">
   <p:cSld>
     <p:bg>
       <p:bgPr>
@@ -3112,14 +3117,7 @@
         <p:cNvGrpSpPr/>
         <p:nvPr/>
       </p:nvGrpSpPr>
-      <p:grpSpPr>
-        <a:xfrm>
-          <a:off x="0" y="0"/>
-          <a:ext cx="0" cy="0"/>
-          <a:chOff x="0" y="0"/>
-          <a:chExt cx="0" cy="0"/>
-        </a:xfrm>
-      </p:grpSpPr>
+      <p:grpSpPr/>
       <p:sp>
         <p:nvSpPr>
           <p:cNvPr id="2" name="TextBox 1"/>
@@ -3230,7 +3228,6 @@
           <a:lstStyle/>
           <a:p>
             <a:pPr algn="ctr"/>
-            <a:endParaRPr/>
           </a:p>
         </p:txBody>
       </p:sp>
@@ -3348,7 +3345,7 @@
 </file>
 
 <file path=ppt/slides/slide10.xml><?xml version="1.0" encoding="utf-8"?>
-<p:sld xmlns:a="http://schemas.openxmlformats.org/drawingml/2006/main" xmlns:r="http://schemas.openxmlformats.org/officeDocument/2006/relationships" xmlns:p="http://schemas.openxmlformats.org/presentationml/2006/main">
+<p:sld xmlns:a="http://schemas.openxmlformats.org/drawingml/2006/main" xmlns:p="http://schemas.openxmlformats.org/presentationml/2006/main" xmlns:r="http://schemas.openxmlformats.org/officeDocument/2006/relationships">
   <p:cSld>
     <p:spTree>
       <p:nvGrpSpPr>
@@ -3356,14 +3353,7 @@
         <p:cNvGrpSpPr/>
         <p:nvPr/>
       </p:nvGrpSpPr>
-      <p:grpSpPr>
-        <a:xfrm>
-          <a:off x="0" y="0"/>
-          <a:ext cx="0" cy="0"/>
-          <a:chOff x="0" y="0"/>
-          <a:chExt cx="0" cy="0"/>
-        </a:xfrm>
-      </p:grpSpPr>
+      <p:grpSpPr/>
       <p:sp>
         <p:nvSpPr>
           <p:cNvPr id="2" name="Rectangle 1"/>
@@ -3404,7 +3394,6 @@
           <a:lstStyle/>
           <a:p>
             <a:pPr algn="ctr"/>
-            <a:endParaRPr/>
           </a:p>
         </p:txBody>
       </p:sp>
@@ -3518,7 +3507,6 @@
           <a:lstStyle/>
           <a:p>
             <a:pPr algn="ctr"/>
-            <a:endParaRPr/>
           </a:p>
         </p:txBody>
       </p:sp>
@@ -3600,8 +3588,8 @@
         </p:nvSpPr>
         <p:spPr>
           <a:xfrm>
-            <a:off x="320040" y="1051560"/>
-            <a:ext cx="11521440" cy="457200"/>
+            <a:off x="320040" y="1005840"/>
+            <a:ext cx="11548872" cy="411480"/>
           </a:xfrm>
           <a:prstGeom prst="rect">
             <a:avLst/>
@@ -3636,7 +3624,7 @@
           <p:nvPr/>
         </p:nvGraphicFramePr>
         <p:xfrm>
-          <a:off x="320040" y="1600200"/>
+          <a:off x="320040" y="1508760"/>
           <a:ext cx="11521440" cy="2523744"/>
         </p:xfrm>
         <a:graphic>
@@ -3646,34 +3634,10 @@
                 <a:tableStyleId>{5C22544A-7EE6-4342-B048-85BDC9FD1C3A}</a:tableStyleId>
               </a:tblPr>
               <a:tblGrid>
-                <a:gridCol w="1828800">
-                  <a:extLst>
-                    <a:ext uri="{9D8B030D-6E8A-4147-A177-3AD203B41FA5}">
-                      <a16:colId xmlns:a16="http://schemas.microsoft.com/office/drawing/2014/main" val="20000"/>
-                    </a:ext>
-                  </a:extLst>
-                </a:gridCol>
-                <a:gridCol w="3108960">
-                  <a:extLst>
-                    <a:ext uri="{9D8B030D-6E8A-4147-A177-3AD203B41FA5}">
-                      <a16:colId xmlns:a16="http://schemas.microsoft.com/office/drawing/2014/main" val="20001"/>
-                    </a:ext>
-                  </a:extLst>
-                </a:gridCol>
-                <a:gridCol w="3108960">
-                  <a:extLst>
-                    <a:ext uri="{9D8B030D-6E8A-4147-A177-3AD203B41FA5}">
-                      <a16:colId xmlns:a16="http://schemas.microsoft.com/office/drawing/2014/main" val="20002"/>
-                    </a:ext>
-                  </a:extLst>
-                </a:gridCol>
-                <a:gridCol w="3474720">
-                  <a:extLst>
-                    <a:ext uri="{9D8B030D-6E8A-4147-A177-3AD203B41FA5}">
-                      <a16:colId xmlns:a16="http://schemas.microsoft.com/office/drawing/2014/main" val="20003"/>
-                    </a:ext>
-                  </a:extLst>
-                </a:gridCol>
+                <a:gridCol w="1828800"/>
+                <a:gridCol w="3108960"/>
+                <a:gridCol w="3108960"/>
+                <a:gridCol w="3474720"/>
               </a:tblGrid>
               <a:tr h="420624">
                 <a:tc>
@@ -3768,11 +3732,6 @@
                     </a:solidFill>
                   </a:tcPr>
                 </a:tc>
-                <a:extLst>
-                  <a:ext uri="{0D108BD9-81ED-4DB2-BD59-A6C34878D82A}">
-                    <a16:rowId xmlns:a16="http://schemas.microsoft.com/office/drawing/2014/main" val="10000"/>
-                  </a:ext>
-                </a:extLst>
               </a:tr>
               <a:tr h="420624">
                 <a:tc>
@@ -3867,11 +3826,6 @@
                     </a:solidFill>
                   </a:tcPr>
                 </a:tc>
-                <a:extLst>
-                  <a:ext uri="{0D108BD9-81ED-4DB2-BD59-A6C34878D82A}">
-                    <a16:rowId xmlns:a16="http://schemas.microsoft.com/office/drawing/2014/main" val="10001"/>
-                  </a:ext>
-                </a:extLst>
               </a:tr>
               <a:tr h="420624">
                 <a:tc>
@@ -3966,11 +3920,6 @@
                     </a:solidFill>
                   </a:tcPr>
                 </a:tc>
-                <a:extLst>
-                  <a:ext uri="{0D108BD9-81ED-4DB2-BD59-A6C34878D82A}">
-                    <a16:rowId xmlns:a16="http://schemas.microsoft.com/office/drawing/2014/main" val="10002"/>
-                  </a:ext>
-                </a:extLst>
               </a:tr>
               <a:tr h="420624">
                 <a:tc>
@@ -4065,11 +4014,6 @@
                     </a:solidFill>
                   </a:tcPr>
                 </a:tc>
-                <a:extLst>
-                  <a:ext uri="{0D108BD9-81ED-4DB2-BD59-A6C34878D82A}">
-                    <a16:rowId xmlns:a16="http://schemas.microsoft.com/office/drawing/2014/main" val="10003"/>
-                  </a:ext>
-                </a:extLst>
               </a:tr>
               <a:tr h="420624">
                 <a:tc>
@@ -4164,11 +4108,6 @@
                     </a:solidFill>
                   </a:tcPr>
                 </a:tc>
-                <a:extLst>
-                  <a:ext uri="{0D108BD9-81ED-4DB2-BD59-A6C34878D82A}">
-                    <a16:rowId xmlns:a16="http://schemas.microsoft.com/office/drawing/2014/main" val="10004"/>
-                  </a:ext>
-                </a:extLst>
               </a:tr>
               <a:tr h="420624">
                 <a:tc>
@@ -4263,11 +4202,6 @@
                     </a:solidFill>
                   </a:tcPr>
                 </a:tc>
-                <a:extLst>
-                  <a:ext uri="{0D108BD9-81ED-4DB2-BD59-A6C34878D82A}">
-                    <a16:rowId xmlns:a16="http://schemas.microsoft.com/office/drawing/2014/main" val="10005"/>
-                  </a:ext>
-                </a:extLst>
               </a:tr>
             </a:tbl>
           </a:graphicData>
@@ -4275,14 +4209,57 @@
       </p:graphicFrame>
       <p:sp>
         <p:nvSpPr>
-          <p:cNvPr id="10" name="TextBox 9"/>
+          <p:cNvPr id="10" name="Rectangle 9"/>
+          <p:cNvSpPr/>
+          <p:nvPr/>
+        </p:nvSpPr>
+        <p:spPr>
+          <a:xfrm>
+            <a:off x="320040" y="4169664"/>
+            <a:ext cx="11548872" cy="502920"/>
+          </a:xfrm>
+          <a:prstGeom prst="rect">
+            <a:avLst/>
+          </a:prstGeom>
+          <a:solidFill>
+            <a:srgbClr val="F4F4F4"/>
+          </a:solidFill>
+          <a:ln>
+            <a:noFill/>
+          </a:ln>
+        </p:spPr>
+        <p:style>
+          <a:lnRef idx="1">
+            <a:schemeClr val="accent1"/>
+          </a:lnRef>
+          <a:fillRef idx="3">
+            <a:schemeClr val="accent1"/>
+          </a:fillRef>
+          <a:effectRef idx="2">
+            <a:schemeClr val="accent1"/>
+          </a:effectRef>
+          <a:fontRef idx="minor">
+            <a:schemeClr val="lt1"/>
+          </a:fontRef>
+        </p:style>
+        <p:txBody>
+          <a:bodyPr rtlCol="0" anchor="ctr"/>
+          <a:lstStyle/>
+          <a:p>
+            <a:pPr algn="ctr"/>
+          </a:p>
+        </p:txBody>
+      </p:sp>
+      <p:sp>
+        <p:nvSpPr>
+          <p:cNvPr id="11" name="TextBox 10"/>
           <p:cNvSpPr txBox="1"/>
           <p:nvPr/>
         </p:nvSpPr>
         <p:spPr>
           <a:xfrm>
-            <a:off x="320040" y="4663440"/>
-            <a:ext cx="11521440" cy="365760"/>
+            <a:off x="502920" y="4233672"/>
+            <a:ext cx="11155680" cy="384048"/>
           </a:xfrm>
           <a:prstGeom prst="rect">
             <a:avLst/>
@@ -4297,9 +4274,9 @@
           <a:p>
             <a:pPr algn="l"/>
             <a:r>
-              <a:rPr sz="1200" b="0" i="1">
-                <a:solidFill>
-                  <a:srgbClr val="999999"/>
+              <a:rPr sz="1200" b="0" i="0">
+                <a:solidFill>
+                  <a:srgbClr val="1A1A2E"/>
                 </a:solidFill>
                 <a:latin typeface="游ゴシック"/>
               </a:rPr>
@@ -4317,7 +4294,7 @@
 </file>
 
 <file path=ppt/slides/slide11.xml><?xml version="1.0" encoding="utf-8"?>
-<p:sld xmlns:a="http://schemas.openxmlformats.org/drawingml/2006/main" xmlns:r="http://schemas.openxmlformats.org/officeDocument/2006/relationships" xmlns:p="http://schemas.openxmlformats.org/presentationml/2006/main">
+<p:sld xmlns:a="http://schemas.openxmlformats.org/drawingml/2006/main" xmlns:p="http://schemas.openxmlformats.org/presentationml/2006/main" xmlns:r="http://schemas.openxmlformats.org/officeDocument/2006/relationships">
   <p:cSld>
     <p:spTree>
       <p:nvGrpSpPr>
@@ -4325,14 +4302,7 @@
         <p:cNvGrpSpPr/>
         <p:nvPr/>
       </p:nvGrpSpPr>
-      <p:grpSpPr>
-        <a:xfrm>
-          <a:off x="0" y="0"/>
-          <a:ext cx="0" cy="0"/>
-          <a:chOff x="0" y="0"/>
-          <a:chExt cx="0" cy="0"/>
-        </a:xfrm>
-      </p:grpSpPr>
+      <p:grpSpPr/>
       <p:sp>
         <p:nvSpPr>
           <p:cNvPr id="2" name="Rectangle 1"/>
@@ -4373,7 +4343,6 @@
           <a:lstStyle/>
           <a:p>
             <a:pPr algn="ctr"/>
-            <a:endParaRPr/>
           </a:p>
         </p:txBody>
       </p:sp>
@@ -4487,7 +4456,6 @@
           <a:lstStyle/>
           <a:p>
             <a:pPr algn="ctr"/>
-            <a:endParaRPr/>
           </a:p>
         </p:txBody>
       </p:sp>
@@ -4603,7 +4571,6 @@
           <a:lstStyle/>
           <a:p>
             <a:pPr algn="ctr"/>
-            <a:endParaRPr/>
           </a:p>
         </p:txBody>
       </p:sp>
@@ -4640,14 +4607,6 @@
             </a:r>
           </a:p>
           <a:p>
-            <a:endParaRPr sz="1300">
-              <a:solidFill>
-                <a:srgbClr val="FFFFFF"/>
-              </a:solidFill>
-              <a:latin typeface="Consolas"/>
-            </a:endParaRPr>
-          </a:p>
-          <a:p>
             <a:r>
               <a:rPr sz="1300">
                 <a:solidFill>
@@ -4655,6 +4614,17 @@
                 </a:solidFill>
                 <a:latin typeface="Consolas"/>
               </a:rPr>
+              <a:t/>
+            </a:r>
+          </a:p>
+          <a:p>
+            <a:r>
+              <a:rPr sz="1300">
+                <a:solidFill>
+                  <a:srgbClr val="FFFFFF"/>
+                </a:solidFill>
+                <a:latin typeface="Consolas"/>
+              </a:rPr>
               <a:t>Temp:</a:t>
             </a:r>
           </a:p>
@@ -4670,14 +4640,6 @@
             </a:r>
           </a:p>
           <a:p>
-            <a:endParaRPr sz="1300">
-              <a:solidFill>
-                <a:srgbClr val="FFFFFF"/>
-              </a:solidFill>
-              <a:latin typeface="Consolas"/>
-            </a:endParaRPr>
-          </a:p>
-          <a:p>
             <a:r>
               <a:rPr sz="1300">
                 <a:solidFill>
@@ -4685,16 +4647,30 @@
                 </a:solidFill>
                 <a:latin typeface="Consolas"/>
               </a:rPr>
+              <a:t/>
+            </a:r>
+          </a:p>
+          <a:p>
+            <a:r>
+              <a:rPr sz="1300">
+                <a:solidFill>
+                  <a:srgbClr val="FFFFFF"/>
+                </a:solidFill>
+                <a:latin typeface="Consolas"/>
+              </a:rPr>
               <a:t>SD Ready</a:t>
             </a:r>
           </a:p>
           <a:p>
-            <a:endParaRPr sz="1300">
-              <a:solidFill>
-                <a:srgbClr val="FFFFFF"/>
-              </a:solidFill>
-              <a:latin typeface="Consolas"/>
-            </a:endParaRPr>
+            <a:r>
+              <a:rPr sz="1300">
+                <a:solidFill>
+                  <a:srgbClr val="FFFFFF"/>
+                </a:solidFill>
+                <a:latin typeface="Consolas"/>
+              </a:rPr>
+              <a:t/>
+            </a:r>
           </a:p>
           <a:p>
             <a:r>
@@ -4754,7 +4730,7 @@
         </p:nvGraphicFramePr>
         <p:xfrm>
           <a:off x="6217920" y="1600200"/>
-          <a:ext cx="5577840" cy="3035808"/>
+          <a:ext cx="5577840" cy="3008376"/>
         </p:xfrm>
         <a:graphic>
           <a:graphicData uri="http://schemas.openxmlformats.org/drawingml/2006/table">
@@ -4763,20 +4739,8 @@
                 <a:tableStyleId>{5C22544A-7EE6-4342-B048-85BDC9FD1C3A}</a:tableStyleId>
               </a:tblPr>
               <a:tblGrid>
-                <a:gridCol w="2011680">
-                  <a:extLst>
-                    <a:ext uri="{9D8B030D-6E8A-4147-A177-3AD203B41FA5}">
-                      <a16:colId xmlns:a16="http://schemas.microsoft.com/office/drawing/2014/main" val="20000"/>
-                    </a:ext>
-                  </a:extLst>
-                </a:gridCol>
-                <a:gridCol w="3566160">
-                  <a:extLst>
-                    <a:ext uri="{9D8B030D-6E8A-4147-A177-3AD203B41FA5}">
-                      <a16:colId xmlns:a16="http://schemas.microsoft.com/office/drawing/2014/main" val="20001"/>
-                    </a:ext>
-                  </a:extLst>
-                </a:gridCol>
+                <a:gridCol w="2011680"/>
+                <a:gridCol w="3566160"/>
               </a:tblGrid>
               <a:tr h="429768">
                 <a:tc>
@@ -4825,11 +4789,6 @@
                     </a:solidFill>
                   </a:tcPr>
                 </a:tc>
-                <a:extLst>
-                  <a:ext uri="{0D108BD9-81ED-4DB2-BD59-A6C34878D82A}">
-                    <a16:rowId xmlns:a16="http://schemas.microsoft.com/office/drawing/2014/main" val="10000"/>
-                  </a:ext>
-                </a:extLst>
               </a:tr>
               <a:tr h="429768">
                 <a:tc>
@@ -4878,11 +4837,6 @@
                     </a:solidFill>
                   </a:tcPr>
                 </a:tc>
-                <a:extLst>
-                  <a:ext uri="{0D108BD9-81ED-4DB2-BD59-A6C34878D82A}">
-                    <a16:rowId xmlns:a16="http://schemas.microsoft.com/office/drawing/2014/main" val="10001"/>
-                  </a:ext>
-                </a:extLst>
               </a:tr>
               <a:tr h="429768">
                 <a:tc>
@@ -4931,11 +4885,6 @@
                     </a:solidFill>
                   </a:tcPr>
                 </a:tc>
-                <a:extLst>
-                  <a:ext uri="{0D108BD9-81ED-4DB2-BD59-A6C34878D82A}">
-                    <a16:rowId xmlns:a16="http://schemas.microsoft.com/office/drawing/2014/main" val="10002"/>
-                  </a:ext>
-                </a:extLst>
               </a:tr>
               <a:tr h="429768">
                 <a:tc>
@@ -4984,11 +4933,6 @@
                     </a:solidFill>
                   </a:tcPr>
                 </a:tc>
-                <a:extLst>
-                  <a:ext uri="{0D108BD9-81ED-4DB2-BD59-A6C34878D82A}">
-                    <a16:rowId xmlns:a16="http://schemas.microsoft.com/office/drawing/2014/main" val="10003"/>
-                  </a:ext>
-                </a:extLst>
               </a:tr>
               <a:tr h="429768">
                 <a:tc>
@@ -5037,11 +4981,6 @@
                     </a:solidFill>
                   </a:tcPr>
                 </a:tc>
-                <a:extLst>
-                  <a:ext uri="{0D108BD9-81ED-4DB2-BD59-A6C34878D82A}">
-                    <a16:rowId xmlns:a16="http://schemas.microsoft.com/office/drawing/2014/main" val="10004"/>
-                  </a:ext>
-                </a:extLst>
               </a:tr>
               <a:tr h="429768">
                 <a:tc>
@@ -5090,11 +5029,6 @@
                     </a:solidFill>
                   </a:tcPr>
                 </a:tc>
-                <a:extLst>
-                  <a:ext uri="{0D108BD9-81ED-4DB2-BD59-A6C34878D82A}">
-                    <a16:rowId xmlns:a16="http://schemas.microsoft.com/office/drawing/2014/main" val="10005"/>
-                  </a:ext>
-                </a:extLst>
               </a:tr>
               <a:tr h="429768">
                 <a:tc>
@@ -5143,11 +5077,6 @@
                     </a:solidFill>
                   </a:tcPr>
                 </a:tc>
-                <a:extLst>
-                  <a:ext uri="{0D108BD9-81ED-4DB2-BD59-A6C34878D82A}">
-                    <a16:rowId xmlns:a16="http://schemas.microsoft.com/office/drawing/2014/main" val="10006"/>
-                  </a:ext>
-                </a:extLst>
               </a:tr>
             </a:tbl>
           </a:graphicData>
@@ -5162,7 +5091,7 @@
 </file>
 
 <file path=ppt/slides/slide12.xml><?xml version="1.0" encoding="utf-8"?>
-<p:sld xmlns:a="http://schemas.openxmlformats.org/drawingml/2006/main" xmlns:r="http://schemas.openxmlformats.org/officeDocument/2006/relationships" xmlns:p="http://schemas.openxmlformats.org/presentationml/2006/main">
+<p:sld xmlns:a="http://schemas.openxmlformats.org/drawingml/2006/main" xmlns:p="http://schemas.openxmlformats.org/presentationml/2006/main" xmlns:r="http://schemas.openxmlformats.org/officeDocument/2006/relationships">
   <p:cSld>
     <p:spTree>
       <p:nvGrpSpPr>
@@ -5170,14 +5099,7 @@
         <p:cNvGrpSpPr/>
         <p:nvPr/>
       </p:nvGrpSpPr>
-      <p:grpSpPr>
-        <a:xfrm>
-          <a:off x="0" y="0"/>
-          <a:ext cx="0" cy="0"/>
-          <a:chOff x="0" y="0"/>
-          <a:chExt cx="0" cy="0"/>
-        </a:xfrm>
-      </p:grpSpPr>
+      <p:grpSpPr/>
       <p:sp>
         <p:nvSpPr>
           <p:cNvPr id="2" name="Rectangle 1"/>
@@ -5218,7 +5140,6 @@
           <a:lstStyle/>
           <a:p>
             <a:pPr algn="ctr"/>
-            <a:endParaRPr/>
           </a:p>
         </p:txBody>
       </p:sp>
@@ -5332,7 +5253,6 @@
           <a:lstStyle/>
           <a:p>
             <a:pPr algn="ctr"/>
-            <a:endParaRPr/>
           </a:p>
         </p:txBody>
       </p:sp>
@@ -5448,7 +5368,6 @@
           <a:lstStyle/>
           <a:p>
             <a:pPr algn="ctr"/>
-            <a:endParaRPr/>
           </a:p>
         </p:txBody>
       </p:sp>
@@ -5485,14 +5404,6 @@
             </a:r>
           </a:p>
           <a:p>
-            <a:endParaRPr sz="1300">
-              <a:solidFill>
-                <a:srgbClr val="FFFFFF"/>
-              </a:solidFill>
-              <a:latin typeface="Consolas"/>
-            </a:endParaRPr>
-          </a:p>
-          <a:p>
             <a:r>
               <a:rPr sz="1300">
                 <a:solidFill>
@@ -5500,6 +5411,17 @@
                 </a:solidFill>
                 <a:latin typeface="Consolas"/>
               </a:rPr>
+              <a:t/>
+            </a:r>
+          </a:p>
+          <a:p>
+            <a:r>
+              <a:rPr sz="1300">
+                <a:solidFill>
+                  <a:srgbClr val="FFFFFF"/>
+                </a:solidFill>
+                <a:latin typeface="Consolas"/>
+              </a:rPr>
               <a:t>Temp:</a:t>
             </a:r>
           </a:p>
@@ -5515,14 +5437,6 @@
             </a:r>
           </a:p>
           <a:p>
-            <a:endParaRPr sz="1300">
-              <a:solidFill>
-                <a:srgbClr val="FFFFFF"/>
-              </a:solidFill>
-              <a:latin typeface="Consolas"/>
-            </a:endParaRPr>
-          </a:p>
-          <a:p>
             <a:r>
               <a:rPr sz="1300">
                 <a:solidFill>
@@ -5530,6 +5444,17 @@
                 </a:solidFill>
                 <a:latin typeface="Consolas"/>
               </a:rPr>
+              <a:t/>
+            </a:r>
+          </a:p>
+          <a:p>
+            <a:r>
+              <a:rPr sz="1300">
+                <a:solidFill>
+                  <a:srgbClr val="FFFFFF"/>
+                </a:solidFill>
+                <a:latin typeface="Consolas"/>
+              </a:rPr>
               <a:t>Samples:   142</a:t>
             </a:r>
           </a:p>
@@ -5545,12 +5470,15 @@
             </a:r>
           </a:p>
           <a:p>
-            <a:endParaRPr sz="1300">
-              <a:solidFill>
-                <a:srgbClr val="FFFFFF"/>
-              </a:solidFill>
-              <a:latin typeface="Consolas"/>
-            </a:endParaRPr>
+            <a:r>
+              <a:rPr sz="1300">
+                <a:solidFill>
+                  <a:srgbClr val="FFFFFF"/>
+                </a:solidFill>
+                <a:latin typeface="Consolas"/>
+              </a:rPr>
+              <a:t/>
+            </a:r>
           </a:p>
           <a:p>
             <a:r>
@@ -5610,7 +5538,7 @@
         </p:nvGraphicFramePr>
         <p:xfrm>
           <a:off x="6217920" y="1600200"/>
-          <a:ext cx="5577840" cy="3090672"/>
+          <a:ext cx="5577840" cy="3008376"/>
         </p:xfrm>
         <a:graphic>
           <a:graphicData uri="http://schemas.openxmlformats.org/drawingml/2006/table">
@@ -5619,20 +5547,8 @@
                 <a:tableStyleId>{5C22544A-7EE6-4342-B048-85BDC9FD1C3A}</a:tableStyleId>
               </a:tblPr>
               <a:tblGrid>
-                <a:gridCol w="2286000">
-                  <a:extLst>
-                    <a:ext uri="{9D8B030D-6E8A-4147-A177-3AD203B41FA5}">
-                      <a16:colId xmlns:a16="http://schemas.microsoft.com/office/drawing/2014/main" val="20000"/>
-                    </a:ext>
-                  </a:extLst>
-                </a:gridCol>
-                <a:gridCol w="3291840">
-                  <a:extLst>
-                    <a:ext uri="{9D8B030D-6E8A-4147-A177-3AD203B41FA5}">
-                      <a16:colId xmlns:a16="http://schemas.microsoft.com/office/drawing/2014/main" val="20001"/>
-                    </a:ext>
-                  </a:extLst>
-                </a:gridCol>
+                <a:gridCol w="2286000"/>
+                <a:gridCol w="3291840"/>
               </a:tblGrid>
               <a:tr h="429768">
                 <a:tc>
@@ -5681,11 +5597,6 @@
                     </a:solidFill>
                   </a:tcPr>
                 </a:tc>
-                <a:extLst>
-                  <a:ext uri="{0D108BD9-81ED-4DB2-BD59-A6C34878D82A}">
-                    <a16:rowId xmlns:a16="http://schemas.microsoft.com/office/drawing/2014/main" val="10000"/>
-                  </a:ext>
-                </a:extLst>
               </a:tr>
               <a:tr h="429768">
                 <a:tc>
@@ -5734,11 +5645,6 @@
                     </a:solidFill>
                   </a:tcPr>
                 </a:tc>
-                <a:extLst>
-                  <a:ext uri="{0D108BD9-81ED-4DB2-BD59-A6C34878D82A}">
-                    <a16:rowId xmlns:a16="http://schemas.microsoft.com/office/drawing/2014/main" val="10001"/>
-                  </a:ext>
-                </a:extLst>
               </a:tr>
               <a:tr h="429768">
                 <a:tc>
@@ -5787,11 +5693,6 @@
                     </a:solidFill>
                   </a:tcPr>
                 </a:tc>
-                <a:extLst>
-                  <a:ext uri="{0D108BD9-81ED-4DB2-BD59-A6C34878D82A}">
-                    <a16:rowId xmlns:a16="http://schemas.microsoft.com/office/drawing/2014/main" val="10002"/>
-                  </a:ext>
-                </a:extLst>
               </a:tr>
               <a:tr h="429768">
                 <a:tc>
@@ -5840,11 +5741,6 @@
                     </a:solidFill>
                   </a:tcPr>
                 </a:tc>
-                <a:extLst>
-                  <a:ext uri="{0D108BD9-81ED-4DB2-BD59-A6C34878D82A}">
-                    <a16:rowId xmlns:a16="http://schemas.microsoft.com/office/drawing/2014/main" val="10003"/>
-                  </a:ext>
-                </a:extLst>
               </a:tr>
               <a:tr h="429768">
                 <a:tc>
@@ -5893,11 +5789,6 @@
                     </a:solidFill>
                   </a:tcPr>
                 </a:tc>
-                <a:extLst>
-                  <a:ext uri="{0D108BD9-81ED-4DB2-BD59-A6C34878D82A}">
-                    <a16:rowId xmlns:a16="http://schemas.microsoft.com/office/drawing/2014/main" val="10004"/>
-                  </a:ext>
-                </a:extLst>
               </a:tr>
               <a:tr h="429768">
                 <a:tc>
@@ -5946,11 +5837,6 @@
                     </a:solidFill>
                   </a:tcPr>
                 </a:tc>
-                <a:extLst>
-                  <a:ext uri="{0D108BD9-81ED-4DB2-BD59-A6C34878D82A}">
-                    <a16:rowId xmlns:a16="http://schemas.microsoft.com/office/drawing/2014/main" val="10005"/>
-                  </a:ext>
-                </a:extLst>
               </a:tr>
               <a:tr h="429768">
                 <a:tc>
@@ -5999,11 +5885,6 @@
                     </a:solidFill>
                   </a:tcPr>
                 </a:tc>
-                <a:extLst>
-                  <a:ext uri="{0D108BD9-81ED-4DB2-BD59-A6C34878D82A}">
-                    <a16:rowId xmlns:a16="http://schemas.microsoft.com/office/drawing/2014/main" val="10006"/>
-                  </a:ext>
-                </a:extLst>
               </a:tr>
             </a:tbl>
           </a:graphicData>
@@ -6018,7 +5899,7 @@
 </file>
 
 <file path=ppt/slides/slide13.xml><?xml version="1.0" encoding="utf-8"?>
-<p:sld xmlns:a="http://schemas.openxmlformats.org/drawingml/2006/main" xmlns:r="http://schemas.openxmlformats.org/officeDocument/2006/relationships" xmlns:p="http://schemas.openxmlformats.org/presentationml/2006/main">
+<p:sld xmlns:a="http://schemas.openxmlformats.org/drawingml/2006/main" xmlns:p="http://schemas.openxmlformats.org/presentationml/2006/main" xmlns:r="http://schemas.openxmlformats.org/officeDocument/2006/relationships">
   <p:cSld>
     <p:spTree>
       <p:nvGrpSpPr>
@@ -6026,14 +5907,7 @@
         <p:cNvGrpSpPr/>
         <p:nvPr/>
       </p:nvGrpSpPr>
-      <p:grpSpPr>
-        <a:xfrm>
-          <a:off x="0" y="0"/>
-          <a:ext cx="0" cy="0"/>
-          <a:chOff x="0" y="0"/>
-          <a:chExt cx="0" cy="0"/>
-        </a:xfrm>
-      </p:grpSpPr>
+      <p:grpSpPr/>
       <p:sp>
         <p:nvSpPr>
           <p:cNvPr id="2" name="Rectangle 1"/>
@@ -6074,7 +5948,6 @@
           <a:lstStyle/>
           <a:p>
             <a:pPr algn="ctr"/>
-            <a:endParaRPr/>
           </a:p>
         </p:txBody>
       </p:sp>
@@ -6188,7 +6061,6 @@
           <a:lstStyle/>
           <a:p>
             <a:pPr algn="ctr"/>
-            <a:endParaRPr/>
           </a:p>
         </p:txBody>
       </p:sp>
@@ -6304,7 +6176,6 @@
           <a:lstStyle/>
           <a:p>
             <a:pPr algn="ctr"/>
-            <a:endParaRPr/>
           </a:p>
         </p:txBody>
       </p:sp>
@@ -6341,14 +6212,6 @@
             </a:r>
           </a:p>
           <a:p>
-            <a:endParaRPr sz="1300">
-              <a:solidFill>
-                <a:srgbClr val="FFFFFF"/>
-              </a:solidFill>
-              <a:latin typeface="Consolas"/>
-            </a:endParaRPr>
-          </a:p>
-          <a:p>
             <a:r>
               <a:rPr sz="1300">
                 <a:solidFill>
@@ -6356,6 +6219,17 @@
                 </a:solidFill>
                 <a:latin typeface="Consolas"/>
               </a:rPr>
+              <a:t/>
+            </a:r>
+          </a:p>
+          <a:p>
+            <a:r>
+              <a:rPr sz="1300">
+                <a:solidFill>
+                  <a:srgbClr val="FFFFFF"/>
+                </a:solidFill>
+                <a:latin typeface="Consolas"/>
+              </a:rPr>
               <a:t>Temp:</a:t>
             </a:r>
           </a:p>
@@ -6371,14 +6245,6 @@
             </a:r>
           </a:p>
           <a:p>
-            <a:endParaRPr sz="1300">
-              <a:solidFill>
-                <a:srgbClr val="FFFFFF"/>
-              </a:solidFill>
-              <a:latin typeface="Consolas"/>
-            </a:endParaRPr>
-          </a:p>
-          <a:p>
             <a:r>
               <a:rPr sz="1300">
                 <a:solidFill>
@@ -6386,6 +6252,17 @@
                 </a:solidFill>
                 <a:latin typeface="Consolas"/>
               </a:rPr>
+              <a:t/>
+            </a:r>
+          </a:p>
+          <a:p>
+            <a:r>
+              <a:rPr sz="1300">
+                <a:solidFill>
+                  <a:srgbClr val="FFFFFF"/>
+                </a:solidFill>
+                <a:latin typeface="Consolas"/>
+              </a:rPr>
               <a:t>Avg:</a:t>
             </a:r>
           </a:p>
@@ -6401,12 +6278,15 @@
             </a:r>
           </a:p>
           <a:p>
-            <a:endParaRPr sz="1300">
-              <a:solidFill>
-                <a:srgbClr val="FFFFFF"/>
-              </a:solidFill>
-              <a:latin typeface="Consolas"/>
-            </a:endParaRPr>
+            <a:r>
+              <a:rPr sz="1300">
+                <a:solidFill>
+                  <a:srgbClr val="FFFFFF"/>
+                </a:solidFill>
+                <a:latin typeface="Consolas"/>
+              </a:rPr>
+              <a:t/>
+            </a:r>
           </a:p>
           <a:p>
             <a:r>
@@ -6498,7 +6378,6 @@
           <a:lstStyle/>
           <a:p>
             <a:pPr algn="ctr"/>
-            <a:endParaRPr/>
           </a:p>
         </p:txBody>
       </p:sp>
@@ -6535,14 +6414,6 @@
             </a:r>
           </a:p>
           <a:p>
-            <a:endParaRPr sz="1300">
-              <a:solidFill>
-                <a:srgbClr val="FFFFFF"/>
-              </a:solidFill>
-              <a:latin typeface="Consolas"/>
-            </a:endParaRPr>
-          </a:p>
-          <a:p>
             <a:r>
               <a:rPr sz="1300">
                 <a:solidFill>
@@ -6550,6 +6421,17 @@
                 </a:solidFill>
                 <a:latin typeface="Consolas"/>
               </a:rPr>
+              <a:t/>
+            </a:r>
+          </a:p>
+          <a:p>
+            <a:r>
+              <a:rPr sz="1300">
+                <a:solidFill>
+                  <a:srgbClr val="FFFFFF"/>
+                </a:solidFill>
+                <a:latin typeface="Consolas"/>
+              </a:rPr>
               <a:t>StdDev:</a:t>
             </a:r>
           </a:p>
@@ -6598,12 +6480,15 @@
             </a:r>
           </a:p>
           <a:p>
-            <a:endParaRPr sz="1300">
-              <a:solidFill>
-                <a:srgbClr val="FFFFFF"/>
-              </a:solidFill>
-              <a:latin typeface="Consolas"/>
-            </a:endParaRPr>
+            <a:r>
+              <a:rPr sz="1300">
+                <a:solidFill>
+                  <a:srgbClr val="FFFFFF"/>
+                </a:solidFill>
+                <a:latin typeface="Consolas"/>
+              </a:rPr>
+              <a:t/>
+            </a:r>
           </a:p>
           <a:p>
             <a:r>
@@ -6626,8 +6511,8 @@
         </p:nvSpPr>
         <p:spPr>
           <a:xfrm>
-            <a:off x="320040" y="5715000"/>
-            <a:ext cx="11521440" cy="457200"/>
+            <a:off x="320040" y="5760720"/>
+            <a:ext cx="11548872" cy="457200"/>
           </a:xfrm>
           <a:prstGeom prst="rect">
             <a:avLst/>
@@ -6644,7 +6529,7 @@
             <a:r>
               <a:rPr sz="1200" b="0" i="0">
                 <a:solidFill>
-                  <a:srgbClr val="999999"/>
+                  <a:srgbClr val="1A1A2E"/>
                 </a:solidFill>
                 <a:latin typeface="游ゴシック"/>
               </a:rPr>
@@ -6662,7 +6547,7 @@
 </file>
 
 <file path=ppt/slides/slide14.xml><?xml version="1.0" encoding="utf-8"?>
-<p:sld xmlns:a="http://schemas.openxmlformats.org/drawingml/2006/main" xmlns:r="http://schemas.openxmlformats.org/officeDocument/2006/relationships" xmlns:p="http://schemas.openxmlformats.org/presentationml/2006/main">
+<p:sld xmlns:a="http://schemas.openxmlformats.org/drawingml/2006/main" xmlns:p="http://schemas.openxmlformats.org/presentationml/2006/main" xmlns:r="http://schemas.openxmlformats.org/officeDocument/2006/relationships">
   <p:cSld>
     <p:spTree>
       <p:nvGrpSpPr>
@@ -6670,14 +6555,7 @@
         <p:cNvGrpSpPr/>
         <p:nvPr/>
       </p:nvGrpSpPr>
-      <p:grpSpPr>
-        <a:xfrm>
-          <a:off x="0" y="0"/>
-          <a:ext cx="0" cy="0"/>
-          <a:chOff x="0" y="0"/>
-          <a:chExt cx="0" cy="0"/>
-        </a:xfrm>
-      </p:grpSpPr>
+      <p:grpSpPr/>
       <p:sp>
         <p:nvSpPr>
           <p:cNvPr id="2" name="Rectangle 1"/>
@@ -6718,7 +6596,6 @@
           <a:lstStyle/>
           <a:p>
             <a:pPr algn="ctr"/>
-            <a:endParaRPr/>
           </a:p>
         </p:txBody>
       </p:sp>
@@ -6832,7 +6709,6 @@
           <a:lstStyle/>
           <a:p>
             <a:pPr algn="ctr"/>
-            <a:endParaRPr/>
           </a:p>
         </p:txBody>
       </p:sp>
@@ -6948,7 +6824,6 @@
           <a:lstStyle/>
           <a:p>
             <a:pPr algn="ctr"/>
-            <a:endParaRPr/>
           </a:p>
         </p:txBody>
       </p:sp>
@@ -6985,14 +6860,6 @@
             </a:r>
           </a:p>
           <a:p>
-            <a:endParaRPr sz="1300">
-              <a:solidFill>
-                <a:srgbClr val="FFFFFF"/>
-              </a:solidFill>
-              <a:latin typeface="Consolas"/>
-            </a:endParaRPr>
-          </a:p>
-          <a:p>
             <a:r>
               <a:rPr sz="1300">
                 <a:solidFill>
@@ -7000,6 +6867,17 @@
                 </a:solidFill>
                 <a:latin typeface="Consolas"/>
               </a:rPr>
+              <a:t/>
+            </a:r>
+          </a:p>
+          <a:p>
+            <a:r>
+              <a:rPr sz="1300">
+                <a:solidFill>
+                  <a:srgbClr val="FFFFFF"/>
+                </a:solidFill>
+                <a:latin typeface="Consolas"/>
+              </a:rPr>
               <a:t>Current:</a:t>
             </a:r>
           </a:p>
@@ -7015,12 +6893,15 @@
             </a:r>
           </a:p>
           <a:p>
-            <a:endParaRPr sz="1300">
-              <a:solidFill>
-                <a:srgbClr val="FFFFFF"/>
-              </a:solidFill>
-              <a:latin typeface="Consolas"/>
-            </a:endParaRPr>
+            <a:r>
+              <a:rPr sz="1300">
+                <a:solidFill>
+                  <a:srgbClr val="FFFFFF"/>
+                </a:solidFill>
+                <a:latin typeface="Consolas"/>
+              </a:rPr>
+              <a:t/>
+            </a:r>
           </a:p>
           <a:p>
             <a:r>
@@ -7123,7 +7004,6 @@
           <a:lstStyle/>
           <a:p>
             <a:pPr algn="ctr"/>
-            <a:endParaRPr/>
           </a:p>
         </p:txBody>
       </p:sp>
@@ -7160,14 +7040,6 @@
             </a:r>
           </a:p>
           <a:p>
-            <a:endParaRPr sz="1300">
-              <a:solidFill>
-                <a:srgbClr val="FFFFFF"/>
-              </a:solidFill>
-              <a:latin typeface="Consolas"/>
-            </a:endParaRPr>
-          </a:p>
-          <a:p>
             <a:r>
               <a:rPr sz="1300">
                 <a:solidFill>
@@ -7175,6 +7047,17 @@
                 </a:solidFill>
                 <a:latin typeface="Consolas"/>
               </a:rPr>
+              <a:t/>
+            </a:r>
+          </a:p>
+          <a:p>
+            <a:r>
+              <a:rPr sz="1300">
+                <a:solidFill>
+                  <a:srgbClr val="FFFFFF"/>
+                </a:solidFill>
+                <a:latin typeface="Consolas"/>
+              </a:rPr>
               <a:t>Current:</a:t>
             </a:r>
           </a:p>
@@ -7190,12 +7073,15 @@
             </a:r>
           </a:p>
           <a:p>
-            <a:endParaRPr sz="1300">
-              <a:solidFill>
-                <a:srgbClr val="FFFFFF"/>
-              </a:solidFill>
-              <a:latin typeface="Consolas"/>
-            </a:endParaRPr>
+            <a:r>
+              <a:rPr sz="1300">
+                <a:solidFill>
+                  <a:srgbClr val="FFFFFF"/>
+                </a:solidFill>
+                <a:latin typeface="Consolas"/>
+              </a:rPr>
+              <a:t/>
+            </a:r>
           </a:p>
           <a:p>
             <a:r>
@@ -7230,7 +7116,7 @@
         <p:spPr>
           <a:xfrm>
             <a:off x="320040" y="5760720"/>
-            <a:ext cx="11521440" cy="457200"/>
+            <a:ext cx="11548872" cy="457200"/>
           </a:xfrm>
           <a:prstGeom prst="rect">
             <a:avLst/>
@@ -7265,7 +7151,7 @@
 </file>
 
 <file path=ppt/slides/slide15.xml><?xml version="1.0" encoding="utf-8"?>
-<p:sld xmlns:a="http://schemas.openxmlformats.org/drawingml/2006/main" xmlns:r="http://schemas.openxmlformats.org/officeDocument/2006/relationships" xmlns:p="http://schemas.openxmlformats.org/presentationml/2006/main">
+<p:sld xmlns:a="http://schemas.openxmlformats.org/drawingml/2006/main" xmlns:p="http://schemas.openxmlformats.org/presentationml/2006/main" xmlns:r="http://schemas.openxmlformats.org/officeDocument/2006/relationships">
   <p:cSld>
     <p:spTree>
       <p:nvGrpSpPr>
@@ -7273,14 +7159,7 @@
         <p:cNvGrpSpPr/>
         <p:nvPr/>
       </p:nvGrpSpPr>
-      <p:grpSpPr>
-        <a:xfrm>
-          <a:off x="0" y="0"/>
-          <a:ext cx="0" cy="0"/>
-          <a:chOff x="0" y="0"/>
-          <a:chExt cx="0" cy="0"/>
-        </a:xfrm>
-      </p:grpSpPr>
+      <p:grpSpPr/>
       <p:sp>
         <p:nvSpPr>
           <p:cNvPr id="2" name="Rectangle 1"/>
@@ -7321,7 +7200,6 @@
           <a:lstStyle/>
           <a:p>
             <a:pPr algn="ctr"/>
-            <a:endParaRPr/>
           </a:p>
         </p:txBody>
       </p:sp>
@@ -7435,7 +7313,6 @@
           <a:lstStyle/>
           <a:p>
             <a:pPr algn="ctr"/>
-            <a:endParaRPr/>
           </a:p>
         </p:txBody>
       </p:sp>
@@ -7517,8 +7394,8 @@
         </p:nvSpPr>
         <p:spPr>
           <a:xfrm>
-            <a:off x="320040" y="1051560"/>
-            <a:ext cx="11521440" cy="365760"/>
+            <a:off x="320040" y="1005840"/>
+            <a:ext cx="11548872" cy="411480"/>
           </a:xfrm>
           <a:prstGeom prst="rect">
             <a:avLst/>
@@ -7553,7 +7430,7 @@
           <p:nvPr/>
         </p:nvGraphicFramePr>
         <p:xfrm>
-          <a:off x="320040" y="1554480"/>
+          <a:off x="320040" y="1508760"/>
           <a:ext cx="11521440" cy="4425696"/>
         </p:xfrm>
         <a:graphic>
@@ -7563,34 +7440,10 @@
                 <a:tableStyleId>{5C22544A-7EE6-4342-B048-85BDC9FD1C3A}</a:tableStyleId>
               </a:tblPr>
               <a:tblGrid>
-                <a:gridCol w="731520">
-                  <a:extLst>
-                    <a:ext uri="{9D8B030D-6E8A-4147-A177-3AD203B41FA5}">
-                      <a16:colId xmlns:a16="http://schemas.microsoft.com/office/drawing/2014/main" val="20000"/>
-                    </a:ext>
-                  </a:extLst>
-                </a:gridCol>
-                <a:gridCol w="2103120">
-                  <a:extLst>
-                    <a:ext uri="{9D8B030D-6E8A-4147-A177-3AD203B41FA5}">
-                      <a16:colId xmlns:a16="http://schemas.microsoft.com/office/drawing/2014/main" val="20001"/>
-                    </a:ext>
-                  </a:extLst>
-                </a:gridCol>
-                <a:gridCol w="1828800">
-                  <a:extLst>
-                    <a:ext uri="{9D8B030D-6E8A-4147-A177-3AD203B41FA5}">
-                      <a16:colId xmlns:a16="http://schemas.microsoft.com/office/drawing/2014/main" val="20002"/>
-                    </a:ext>
-                  </a:extLst>
-                </a:gridCol>
-                <a:gridCol w="6858000">
-                  <a:extLst>
-                    <a:ext uri="{9D8B030D-6E8A-4147-A177-3AD203B41FA5}">
-                      <a16:colId xmlns:a16="http://schemas.microsoft.com/office/drawing/2014/main" val="20003"/>
-                    </a:ext>
-                  </a:extLst>
-                </a:gridCol>
+                <a:gridCol w="731520"/>
+                <a:gridCol w="2103120"/>
+                <a:gridCol w="1828800"/>
+                <a:gridCol w="6858000"/>
               </a:tblGrid>
               <a:tr h="402336">
                 <a:tc>
@@ -7685,11 +7538,6 @@
                     </a:solidFill>
                   </a:tcPr>
                 </a:tc>
-                <a:extLst>
-                  <a:ext uri="{0D108BD9-81ED-4DB2-BD59-A6C34878D82A}">
-                    <a16:rowId xmlns:a16="http://schemas.microsoft.com/office/drawing/2014/main" val="10000"/>
-                  </a:ext>
-                </a:extLst>
               </a:tr>
               <a:tr h="402336">
                 <a:tc>
@@ -7784,11 +7632,6 @@
                     </a:solidFill>
                   </a:tcPr>
                 </a:tc>
-                <a:extLst>
-                  <a:ext uri="{0D108BD9-81ED-4DB2-BD59-A6C34878D82A}">
-                    <a16:rowId xmlns:a16="http://schemas.microsoft.com/office/drawing/2014/main" val="10001"/>
-                  </a:ext>
-                </a:extLst>
               </a:tr>
               <a:tr h="402336">
                 <a:tc>
@@ -7883,11 +7726,6 @@
                     </a:solidFill>
                   </a:tcPr>
                 </a:tc>
-                <a:extLst>
-                  <a:ext uri="{0D108BD9-81ED-4DB2-BD59-A6C34878D82A}">
-                    <a16:rowId xmlns:a16="http://schemas.microsoft.com/office/drawing/2014/main" val="10002"/>
-                  </a:ext>
-                </a:extLst>
               </a:tr>
               <a:tr h="402336">
                 <a:tc>
@@ -7982,11 +7820,6 @@
                     </a:solidFill>
                   </a:tcPr>
                 </a:tc>
-                <a:extLst>
-                  <a:ext uri="{0D108BD9-81ED-4DB2-BD59-A6C34878D82A}">
-                    <a16:rowId xmlns:a16="http://schemas.microsoft.com/office/drawing/2014/main" val="10003"/>
-                  </a:ext>
-                </a:extLst>
               </a:tr>
               <a:tr h="402336">
                 <a:tc>
@@ -8081,11 +7914,6 @@
                     </a:solidFill>
                   </a:tcPr>
                 </a:tc>
-                <a:extLst>
-                  <a:ext uri="{0D108BD9-81ED-4DB2-BD59-A6C34878D82A}">
-                    <a16:rowId xmlns:a16="http://schemas.microsoft.com/office/drawing/2014/main" val="10004"/>
-                  </a:ext>
-                </a:extLst>
               </a:tr>
               <a:tr h="402336">
                 <a:tc>
@@ -8180,11 +8008,6 @@
                     </a:solidFill>
                   </a:tcPr>
                 </a:tc>
-                <a:extLst>
-                  <a:ext uri="{0D108BD9-81ED-4DB2-BD59-A6C34878D82A}">
-                    <a16:rowId xmlns:a16="http://schemas.microsoft.com/office/drawing/2014/main" val="10005"/>
-                  </a:ext>
-                </a:extLst>
               </a:tr>
               <a:tr h="402336">
                 <a:tc>
@@ -8279,11 +8102,6 @@
                     </a:solidFill>
                   </a:tcPr>
                 </a:tc>
-                <a:extLst>
-                  <a:ext uri="{0D108BD9-81ED-4DB2-BD59-A6C34878D82A}">
-                    <a16:rowId xmlns:a16="http://schemas.microsoft.com/office/drawing/2014/main" val="10006"/>
-                  </a:ext>
-                </a:extLst>
               </a:tr>
               <a:tr h="402336">
                 <a:tc>
@@ -8378,11 +8196,6 @@
                     </a:solidFill>
                   </a:tcPr>
                 </a:tc>
-                <a:extLst>
-                  <a:ext uri="{0D108BD9-81ED-4DB2-BD59-A6C34878D82A}">
-                    <a16:rowId xmlns:a16="http://schemas.microsoft.com/office/drawing/2014/main" val="10007"/>
-                  </a:ext>
-                </a:extLst>
               </a:tr>
               <a:tr h="402336">
                 <a:tc>
@@ -8477,11 +8290,6 @@
                     </a:solidFill>
                   </a:tcPr>
                 </a:tc>
-                <a:extLst>
-                  <a:ext uri="{0D108BD9-81ED-4DB2-BD59-A6C34878D82A}">
-                    <a16:rowId xmlns:a16="http://schemas.microsoft.com/office/drawing/2014/main" val="10008"/>
-                  </a:ext>
-                </a:extLst>
               </a:tr>
               <a:tr h="402336">
                 <a:tc>
@@ -8543,7 +8351,7 @@
                           </a:solidFill>
                           <a:latin typeface="游ゴシック"/>
                         </a:rPr>
-                        <a:t>"true"/"false"</a:t>
+                        <a:t>true/false</a:t>
                       </a:r>
                     </a:p>
                   </a:txBody>
@@ -8576,11 +8384,6 @@
                     </a:solidFill>
                   </a:tcPr>
                 </a:tc>
-                <a:extLst>
-                  <a:ext uri="{0D108BD9-81ED-4DB2-BD59-A6C34878D82A}">
-                    <a16:rowId xmlns:a16="http://schemas.microsoft.com/office/drawing/2014/main" val="10009"/>
-                  </a:ext>
-                </a:extLst>
               </a:tr>
               <a:tr h="402336">
                 <a:tc>
@@ -8642,7 +8445,7 @@
                           </a:solidFill>
                           <a:latin typeface="游ゴシック"/>
                         </a:rPr>
-                        <a:t>"true"/"false"</a:t>
+                        <a:t>true/false</a:t>
                       </a:r>
                     </a:p>
                   </a:txBody>
@@ -8675,11 +8478,6 @@
                     </a:solidFill>
                   </a:tcPr>
                 </a:tc>
-                <a:extLst>
-                  <a:ext uri="{0D108BD9-81ED-4DB2-BD59-A6C34878D82A}">
-                    <a16:rowId xmlns:a16="http://schemas.microsoft.com/office/drawing/2014/main" val="10010"/>
-                  </a:ext>
-                </a:extLst>
               </a:tr>
             </a:tbl>
           </a:graphicData>
@@ -8687,14 +8485,57 @@
       </p:graphicFrame>
       <p:sp>
         <p:nvSpPr>
-          <p:cNvPr id="10" name="TextBox 9"/>
+          <p:cNvPr id="10" name="Rectangle 9"/>
+          <p:cNvSpPr/>
+          <p:nvPr/>
+        </p:nvSpPr>
+        <p:spPr>
+          <a:xfrm>
+            <a:off x="320040" y="6071616"/>
+            <a:ext cx="11548872" cy="502920"/>
+          </a:xfrm>
+          <a:prstGeom prst="rect">
+            <a:avLst/>
+          </a:prstGeom>
+          <a:solidFill>
+            <a:srgbClr val="F4F4F4"/>
+          </a:solidFill>
+          <a:ln>
+            <a:noFill/>
+          </a:ln>
+        </p:spPr>
+        <p:style>
+          <a:lnRef idx="1">
+            <a:schemeClr val="accent1"/>
+          </a:lnRef>
+          <a:fillRef idx="3">
+            <a:schemeClr val="accent1"/>
+          </a:fillRef>
+          <a:effectRef idx="2">
+            <a:schemeClr val="accent1"/>
+          </a:effectRef>
+          <a:fontRef idx="minor">
+            <a:schemeClr val="lt1"/>
+          </a:fontRef>
+        </p:style>
+        <p:txBody>
+          <a:bodyPr rtlCol="0" anchor="ctr"/>
+          <a:lstStyle/>
+          <a:p>
+            <a:pPr algn="ctr"/>
+          </a:p>
+        </p:txBody>
+      </p:sp>
+      <p:sp>
+        <p:nvSpPr>
+          <p:cNvPr id="11" name="TextBox 10"/>
           <p:cNvSpPr txBox="1"/>
           <p:nvPr/>
         </p:nvSpPr>
         <p:spPr>
           <a:xfrm>
-            <a:off x="320040" y="5806440"/>
-            <a:ext cx="10972800" cy="365760"/>
+            <a:off x="502920" y="6135624"/>
+            <a:ext cx="11155680" cy="384048"/>
           </a:xfrm>
           <a:prstGeom prst="rect">
             <a:avLst/>
@@ -8709,11 +8550,11 @@
           <a:p>
             <a:pPr algn="l"/>
             <a:r>
-              <a:rPr sz="1100" b="0" i="0">
-                <a:solidFill>
-                  <a:srgbClr val="999999"/>
-                </a:solidFill>
-                <a:latin typeface="Consolas"/>
+              <a:rPr sz="1200" b="0" i="0">
+                <a:solidFill>
+                  <a:srgbClr val="1A1A2E"/>
+                </a:solidFill>
+                <a:latin typeface="游ゴシック"/>
               </a:rPr>
               <a:t>例: 60,540.2,RUN,120,539.8,0.8,550.0,530.0,false,false</a:t>
             </a:r>
@@ -8729,7 +8570,7 @@
 </file>
 
 <file path=ppt/slides/slide16.xml><?xml version="1.0" encoding="utf-8"?>
-<p:sld xmlns:a="http://schemas.openxmlformats.org/drawingml/2006/main" xmlns:r="http://schemas.openxmlformats.org/officeDocument/2006/relationships" xmlns:p="http://schemas.openxmlformats.org/presentationml/2006/main">
+<p:sld xmlns:a="http://schemas.openxmlformats.org/drawingml/2006/main" xmlns:p="http://schemas.openxmlformats.org/presentationml/2006/main" xmlns:r="http://schemas.openxmlformats.org/officeDocument/2006/relationships">
   <p:cSld>
     <p:spTree>
       <p:nvGrpSpPr>
@@ -8737,14 +8578,7 @@
         <p:cNvGrpSpPr/>
         <p:nvPr/>
       </p:nvGrpSpPr>
-      <p:grpSpPr>
-        <a:xfrm>
-          <a:off x="0" y="0"/>
-          <a:ext cx="0" cy="0"/>
-          <a:chOff x="0" y="0"/>
-          <a:chExt cx="0" cy="0"/>
-        </a:xfrm>
-      </p:grpSpPr>
+      <p:grpSpPr/>
       <p:sp>
         <p:nvSpPr>
           <p:cNvPr id="2" name="Rectangle 1"/>
@@ -8785,7 +8619,6 @@
           <a:lstStyle/>
           <a:p>
             <a:pPr algn="ctr"/>
-            <a:endParaRPr/>
           </a:p>
         </p:txBody>
       </p:sp>
@@ -8899,7 +8732,6 @@
           <a:lstStyle/>
           <a:p>
             <a:pPr algn="ctr"/>
-            <a:endParaRPr/>
           </a:p>
         </p:txBody>
       </p:sp>
@@ -8992,27 +8824,9 @@
                 <a:tableStyleId>{5C22544A-7EE6-4342-B048-85BDC9FD1C3A}</a:tableStyleId>
               </a:tblPr>
               <a:tblGrid>
-                <a:gridCol w="731520">
-                  <a:extLst>
-                    <a:ext uri="{9D8B030D-6E8A-4147-A177-3AD203B41FA5}">
-                      <a16:colId xmlns:a16="http://schemas.microsoft.com/office/drawing/2014/main" val="20000"/>
-                    </a:ext>
-                  </a:extLst>
-                </a:gridCol>
-                <a:gridCol w="4114800">
-                  <a:extLst>
-                    <a:ext uri="{9D8B030D-6E8A-4147-A177-3AD203B41FA5}">
-                      <a16:colId xmlns:a16="http://schemas.microsoft.com/office/drawing/2014/main" val="20001"/>
-                    </a:ext>
-                  </a:extLst>
-                </a:gridCol>
-                <a:gridCol w="6675120">
-                  <a:extLst>
-                    <a:ext uri="{9D8B030D-6E8A-4147-A177-3AD203B41FA5}">
-                      <a16:colId xmlns:a16="http://schemas.microsoft.com/office/drawing/2014/main" val="20002"/>
-                    </a:ext>
-                  </a:extLst>
-                </a:gridCol>
+                <a:gridCol w="731520"/>
+                <a:gridCol w="4114800"/>
+                <a:gridCol w="6675120"/>
               </a:tblGrid>
               <a:tr h="457200">
                 <a:tc>
@@ -9084,11 +8898,6 @@
                     </a:solidFill>
                   </a:tcPr>
                 </a:tc>
-                <a:extLst>
-                  <a:ext uri="{0D108BD9-81ED-4DB2-BD59-A6C34878D82A}">
-                    <a16:rowId xmlns:a16="http://schemas.microsoft.com/office/drawing/2014/main" val="10000"/>
-                  </a:ext>
-                </a:extLst>
               </a:tr>
               <a:tr h="457200">
                 <a:tc>
@@ -9160,11 +8969,6 @@
                     </a:solidFill>
                   </a:tcPr>
                 </a:tc>
-                <a:extLst>
-                  <a:ext uri="{0D108BD9-81ED-4DB2-BD59-A6C34878D82A}">
-                    <a16:rowId xmlns:a16="http://schemas.microsoft.com/office/drawing/2014/main" val="10001"/>
-                  </a:ext>
-                </a:extLst>
               </a:tr>
               <a:tr h="457200">
                 <a:tc>
@@ -9236,11 +9040,6 @@
                     </a:solidFill>
                   </a:tcPr>
                 </a:tc>
-                <a:extLst>
-                  <a:ext uri="{0D108BD9-81ED-4DB2-BD59-A6C34878D82A}">
-                    <a16:rowId xmlns:a16="http://schemas.microsoft.com/office/drawing/2014/main" val="10002"/>
-                  </a:ext>
-                </a:extLst>
               </a:tr>
               <a:tr h="457200">
                 <a:tc>
@@ -9312,11 +9111,6 @@
                     </a:solidFill>
                   </a:tcPr>
                 </a:tc>
-                <a:extLst>
-                  <a:ext uri="{0D108BD9-81ED-4DB2-BD59-A6C34878D82A}">
-                    <a16:rowId xmlns:a16="http://schemas.microsoft.com/office/drawing/2014/main" val="10003"/>
-                  </a:ext>
-                </a:extLst>
               </a:tr>
               <a:tr h="457200">
                 <a:tc>
@@ -9388,11 +9182,6 @@
                     </a:solidFill>
                   </a:tcPr>
                 </a:tc>
-                <a:extLst>
-                  <a:ext uri="{0D108BD9-81ED-4DB2-BD59-A6C34878D82A}">
-                    <a16:rowId xmlns:a16="http://schemas.microsoft.com/office/drawing/2014/main" val="10004"/>
-                  </a:ext>
-                </a:extLst>
               </a:tr>
               <a:tr h="457200">
                 <a:tc>
@@ -9431,7 +9220,7 @@
                           </a:solidFill>
                           <a:latin typeface="游ゴシック"/>
                         </a:rPr>
-                        <a:t>HI_ALARM = "true" の行を条件付き書式</a:t>
+                        <a:t>HI_ALARM = true の行を条件付き書式</a:t>
                       </a:r>
                     </a:p>
                   </a:txBody>
@@ -9464,11 +9253,6 @@
                     </a:solidFill>
                   </a:tcPr>
                 </a:tc>
-                <a:extLst>
-                  <a:ext uri="{0D108BD9-81ED-4DB2-BD59-A6C34878D82A}">
-                    <a16:rowId xmlns:a16="http://schemas.microsoft.com/office/drawing/2014/main" val="10005"/>
-                  </a:ext>
-                </a:extLst>
               </a:tr>
             </a:tbl>
           </a:graphicData>
@@ -9482,8 +9266,8 @@
         </p:nvSpPr>
         <p:spPr>
           <a:xfrm>
-            <a:off x="320040" y="4389120"/>
-            <a:ext cx="11521440" cy="1463040"/>
+            <a:off x="320040" y="3931920"/>
+            <a:ext cx="11548872" cy="502920"/>
           </a:xfrm>
           <a:prstGeom prst="rect">
             <a:avLst/>
@@ -9514,7 +9298,6 @@
           <a:lstStyle/>
           <a:p>
             <a:pPr algn="ctr"/>
-            <a:endParaRPr/>
           </a:p>
         </p:txBody>
       </p:sp>
@@ -9526,8 +9309,8 @@
         </p:nvSpPr>
         <p:spPr>
           <a:xfrm>
-            <a:off x="502920" y="4480560"/>
-            <a:ext cx="11155680" cy="1280160"/>
+            <a:off x="502920" y="3995928"/>
+            <a:ext cx="11155680" cy="384048"/>
           </a:xfrm>
           <a:prstGeom prst="rect">
             <a:avLst/>
@@ -9542,37 +9325,13 @@
           <a:p>
             <a:pPr algn="l"/>
             <a:r>
-              <a:rPr sz="1300" b="0" i="0">
+              <a:rPr sz="1200" b="0" i="0">
                 <a:solidFill>
                   <a:srgbClr val="1A1A2E"/>
                 </a:solidFill>
                 <a:latin typeface="游ゴシック"/>
               </a:rPr>
-              <a:t>・StdDev と Range を見ることで温度ばらつきの傾向が分かる</a:t>
-            </a:r>
-          </a:p>
-          <a:p>
-            <a:pPr algn="l"/>
-            <a:r>
-              <a:rPr sz="1300" b="0" i="0">
-                <a:solidFill>
-                  <a:srgbClr val="1A1A2E"/>
-                </a:solidFill>
-                <a:latin typeface="游ゴシック"/>
-              </a:rPr>
-              <a:t>・ファイルは毎計測ごとに連番で新規作成されるため上書きによるデータ消失なし</a:t>
-            </a:r>
-          </a:p>
-          <a:p>
-            <a:pPr algn="l"/>
-            <a:r>
-              <a:rPr sz="1300" b="0" i="0">
-                <a:solidFill>
-                  <a:srgbClr val="1A1A2E"/>
-                </a:solidFill>
-                <a:latin typeface="游ゴシック"/>
-              </a:rPr>
-              <a:t>・NaN 値（センサ異常時）は Excel フィルタで除外可能</a:t>
+              <a:t>StdDev と Range を見ることで温度ばらつきの傾向が分かる。ファイルは毎計測ごとに連番で新規作成されるため上書きによるデータ消失なし。</a:t>
             </a:r>
           </a:p>
         </p:txBody>
@@ -9586,7 +9345,7 @@
 </file>
 
 <file path=ppt/slides/slide17.xml><?xml version="1.0" encoding="utf-8"?>
-<p:sld xmlns:a="http://schemas.openxmlformats.org/drawingml/2006/main" xmlns:r="http://schemas.openxmlformats.org/officeDocument/2006/relationships" xmlns:p="http://schemas.openxmlformats.org/presentationml/2006/main">
+<p:sld xmlns:a="http://schemas.openxmlformats.org/drawingml/2006/main" xmlns:p="http://schemas.openxmlformats.org/presentationml/2006/main" xmlns:r="http://schemas.openxmlformats.org/officeDocument/2006/relationships">
   <p:cSld>
     <p:spTree>
       <p:nvGrpSpPr>
@@ -9594,14 +9353,7 @@
         <p:cNvGrpSpPr/>
         <p:nvPr/>
       </p:nvGrpSpPr>
-      <p:grpSpPr>
-        <a:xfrm>
-          <a:off x="0" y="0"/>
-          <a:ext cx="0" cy="0"/>
-          <a:chOff x="0" y="0"/>
-          <a:chExt cx="0" cy="0"/>
-        </a:xfrm>
-      </p:grpSpPr>
+      <p:grpSpPr/>
       <p:sp>
         <p:nvSpPr>
           <p:cNvPr id="2" name="Rectangle 1"/>
@@ -9642,7 +9394,6 @@
           <a:lstStyle/>
           <a:p>
             <a:pPr algn="ctr"/>
-            <a:endParaRPr/>
           </a:p>
         </p:txBody>
       </p:sp>
@@ -9756,7 +9507,6 @@
           <a:lstStyle/>
           <a:p>
             <a:pPr algn="ctr"/>
-            <a:endParaRPr/>
           </a:p>
         </p:txBody>
       </p:sp>
@@ -9838,8 +9588,8 @@
         </p:nvSpPr>
         <p:spPr>
           <a:xfrm>
-            <a:off x="320040" y="1051560"/>
-            <a:ext cx="11521440" cy="411480"/>
+            <a:off x="320040" y="1005840"/>
+            <a:ext cx="11548872" cy="411480"/>
           </a:xfrm>
           <a:prstGeom prst="rect">
             <a:avLst/>
@@ -9907,7 +9657,6 @@
           <a:lstStyle/>
           <a:p>
             <a:pPr algn="ctr"/>
-            <a:endParaRPr/>
           </a:p>
         </p:txBody>
       </p:sp>
@@ -9951,7 +9700,6 @@
           <a:lstStyle/>
           <a:p>
             <a:pPr algn="ctr"/>
-            <a:endParaRPr/>
           </a:p>
         </p:txBody>
       </p:sp>
@@ -10197,7 +9945,6 @@
           <a:lstStyle/>
           <a:p>
             <a:pPr algn="ctr"/>
-            <a:endParaRPr/>
           </a:p>
         </p:txBody>
       </p:sp>
@@ -10241,7 +9988,6 @@
           <a:lstStyle/>
           <a:p>
             <a:pPr algn="ctr"/>
-            <a:endParaRPr/>
           </a:p>
         </p:txBody>
       </p:sp>
@@ -10463,7 +10209,6 @@
           <a:lstStyle/>
           <a:p>
             <a:pPr algn="ctr"/>
-            <a:endParaRPr/>
           </a:p>
         </p:txBody>
       </p:sp>
@@ -10507,7 +10252,6 @@
           <a:lstStyle/>
           <a:p>
             <a:pPr algn="ctr"/>
-            <a:endParaRPr/>
           </a:p>
         </p:txBody>
       </p:sp>
@@ -10696,7 +10440,7 @@
         <p:spPr>
           <a:xfrm>
             <a:off x="320040" y="5852160"/>
-            <a:ext cx="11521440" cy="365760"/>
+            <a:ext cx="11548872" cy="365760"/>
           </a:xfrm>
           <a:prstGeom prst="rect">
             <a:avLst/>
@@ -10731,7 +10475,7 @@
 </file>
 
 <file path=ppt/slides/slide18.xml><?xml version="1.0" encoding="utf-8"?>
-<p:sld xmlns:a="http://schemas.openxmlformats.org/drawingml/2006/main" xmlns:r="http://schemas.openxmlformats.org/officeDocument/2006/relationships" xmlns:p="http://schemas.openxmlformats.org/presentationml/2006/main">
+<p:sld xmlns:a="http://schemas.openxmlformats.org/drawingml/2006/main" xmlns:p="http://schemas.openxmlformats.org/presentationml/2006/main" xmlns:r="http://schemas.openxmlformats.org/officeDocument/2006/relationships">
   <p:cSld>
     <p:spTree>
       <p:nvGrpSpPr>
@@ -10739,14 +10483,7 @@
         <p:cNvGrpSpPr/>
         <p:nvPr/>
       </p:nvGrpSpPr>
-      <p:grpSpPr>
-        <a:xfrm>
-          <a:off x="0" y="0"/>
-          <a:ext cx="0" cy="0"/>
-          <a:chOff x="0" y="0"/>
-          <a:chExt cx="0" cy="0"/>
-        </a:xfrm>
-      </p:grpSpPr>
+      <p:grpSpPr/>
       <p:sp>
         <p:nvSpPr>
           <p:cNvPr id="2" name="Rectangle 1"/>
@@ -10787,7 +10524,6 @@
           <a:lstStyle/>
           <a:p>
             <a:pPr algn="ctr"/>
-            <a:endParaRPr/>
           </a:p>
         </p:txBody>
       </p:sp>
@@ -10901,7 +10637,6 @@
           <a:lstStyle/>
           <a:p>
             <a:pPr algn="ctr"/>
-            <a:endParaRPr/>
           </a:p>
         </p:txBody>
       </p:sp>
@@ -11029,20 +10764,8 @@
                 <a:tableStyleId>{5C22544A-7EE6-4342-B048-85BDC9FD1C3A}</a:tableStyleId>
               </a:tblPr>
               <a:tblGrid>
-                <a:gridCol w="2011680">
-                  <a:extLst>
-                    <a:ext uri="{9D8B030D-6E8A-4147-A177-3AD203B41FA5}">
-                      <a16:colId xmlns:a16="http://schemas.microsoft.com/office/drawing/2014/main" val="20000"/>
-                    </a:ext>
-                  </a:extLst>
-                </a:gridCol>
-                <a:gridCol w="3383280">
-                  <a:extLst>
-                    <a:ext uri="{9D8B030D-6E8A-4147-A177-3AD203B41FA5}">
-                      <a16:colId xmlns:a16="http://schemas.microsoft.com/office/drawing/2014/main" val="20001"/>
-                    </a:ext>
-                  </a:extLst>
-                </a:gridCol>
+                <a:gridCol w="2011680"/>
+                <a:gridCol w="3383280"/>
               </a:tblGrid>
               <a:tr h="429768">
                 <a:tc>
@@ -11091,11 +10814,6 @@
                     </a:solidFill>
                   </a:tcPr>
                 </a:tc>
-                <a:extLst>
-                  <a:ext uri="{0D108BD9-81ED-4DB2-BD59-A6C34878D82A}">
-                    <a16:rowId xmlns:a16="http://schemas.microsoft.com/office/drawing/2014/main" val="10000"/>
-                  </a:ext>
-                </a:extLst>
               </a:tr>
               <a:tr h="429768">
                 <a:tc>
@@ -11144,11 +10862,6 @@
                     </a:solidFill>
                   </a:tcPr>
                 </a:tc>
-                <a:extLst>
-                  <a:ext uri="{0D108BD9-81ED-4DB2-BD59-A6C34878D82A}">
-                    <a16:rowId xmlns:a16="http://schemas.microsoft.com/office/drawing/2014/main" val="10001"/>
-                  </a:ext>
-                </a:extLst>
               </a:tr>
               <a:tr h="429768">
                 <a:tc>
@@ -11197,11 +10910,6 @@
                     </a:solidFill>
                   </a:tcPr>
                 </a:tc>
-                <a:extLst>
-                  <a:ext uri="{0D108BD9-81ED-4DB2-BD59-A6C34878D82A}">
-                    <a16:rowId xmlns:a16="http://schemas.microsoft.com/office/drawing/2014/main" val="10002"/>
-                  </a:ext>
-                </a:extLst>
               </a:tr>
               <a:tr h="429768">
                 <a:tc>
@@ -11250,11 +10958,6 @@
                     </a:solidFill>
                   </a:tcPr>
                 </a:tc>
-                <a:extLst>
-                  <a:ext uri="{0D108BD9-81ED-4DB2-BD59-A6C34878D82A}">
-                    <a16:rowId xmlns:a16="http://schemas.microsoft.com/office/drawing/2014/main" val="10003"/>
-                  </a:ext>
-                </a:extLst>
               </a:tr>
               <a:tr h="429768">
                 <a:tc>
@@ -11303,11 +11006,6 @@
                     </a:solidFill>
                   </a:tcPr>
                 </a:tc>
-                <a:extLst>
-                  <a:ext uri="{0D108BD9-81ED-4DB2-BD59-A6C34878D82A}">
-                    <a16:rowId xmlns:a16="http://schemas.microsoft.com/office/drawing/2014/main" val="10004"/>
-                  </a:ext>
-                </a:extLst>
               </a:tr>
               <a:tr h="429768">
                 <a:tc>
@@ -11346,7 +11044,7 @@
                           </a:solidFill>
                           <a:latin typeface="游ゴシック"/>
                         </a:rPr>
-                        <a:t>最大 3 回リトライ (readThermocouple())</a:t>
+                        <a:t>最大 3 回リトライ</a:t>
                       </a:r>
                     </a:p>
                   </a:txBody>
@@ -11356,11 +11054,6 @@
                     </a:solidFill>
                   </a:tcPr>
                 </a:tc>
-                <a:extLst>
-                  <a:ext uri="{0D108BD9-81ED-4DB2-BD59-A6C34878D82A}">
-                    <a16:rowId xmlns:a16="http://schemas.microsoft.com/office/drawing/2014/main" val="10005"/>
-                  </a:ext>
-                </a:extLst>
               </a:tr>
             </a:tbl>
           </a:graphicData>
@@ -11410,7 +11103,7 @@
         <p:spPr>
           <a:xfrm>
             <a:off x="5989320" y="1508760"/>
-            <a:ext cx="5577840" cy="1097280"/>
+            <a:ext cx="5577840" cy="822959"/>
           </a:xfrm>
           <a:prstGeom prst="rect">
             <a:avLst/>
@@ -11441,7 +11134,6 @@
           <a:lstStyle/>
           <a:p>
             <a:pPr algn="ctr"/>
-            <a:endParaRPr/>
           </a:p>
         </p:txBody>
       </p:sp>
@@ -11454,7 +11146,7 @@
         <p:spPr>
           <a:xfrm>
             <a:off x="6126480" y="1600200"/>
-            <a:ext cx="5303520" cy="914400"/>
+            <a:ext cx="5303520" cy="640079"/>
           </a:xfrm>
           <a:prstGeom prst="rect">
             <a:avLst/>
@@ -11501,8 +11193,8 @@
           <p:nvPr/>
         </p:nvGraphicFramePr>
         <p:xfrm>
-          <a:off x="5989320" y="2697480"/>
-          <a:ext cx="5577840" cy="1773936"/>
+          <a:off x="5989320" y="2468879"/>
+          <a:ext cx="5577840" cy="1719072"/>
         </p:xfrm>
         <a:graphic>
           <a:graphicData uri="http://schemas.openxmlformats.org/drawingml/2006/table">
@@ -11511,20 +11203,8 @@
                 <a:tableStyleId>{5C22544A-7EE6-4342-B048-85BDC9FD1C3A}</a:tableStyleId>
               </a:tblPr>
               <a:tblGrid>
-                <a:gridCol w="2286000">
-                  <a:extLst>
-                    <a:ext uri="{9D8B030D-6E8A-4147-A177-3AD203B41FA5}">
-                      <a16:colId xmlns:a16="http://schemas.microsoft.com/office/drawing/2014/main" val="20000"/>
-                    </a:ext>
-                  </a:extLst>
-                </a:gridCol>
-                <a:gridCol w="3291840">
-                  <a:extLst>
-                    <a:ext uri="{9D8B030D-6E8A-4147-A177-3AD203B41FA5}">
-                      <a16:colId xmlns:a16="http://schemas.microsoft.com/office/drawing/2014/main" val="20001"/>
-                    </a:ext>
-                  </a:extLst>
-                </a:gridCol>
+                <a:gridCol w="2286000"/>
+                <a:gridCol w="3291840"/>
               </a:tblGrid>
               <a:tr h="429768">
                 <a:tc>
@@ -11573,11 +11253,6 @@
                     </a:solidFill>
                   </a:tcPr>
                 </a:tc>
-                <a:extLst>
-                  <a:ext uri="{0D108BD9-81ED-4DB2-BD59-A6C34878D82A}">
-                    <a16:rowId xmlns:a16="http://schemas.microsoft.com/office/drawing/2014/main" val="10000"/>
-                  </a:ext>
-                </a:extLst>
               </a:tr>
               <a:tr h="429768">
                 <a:tc>
@@ -11626,11 +11301,6 @@
                     </a:solidFill>
                   </a:tcPr>
                 </a:tc>
-                <a:extLst>
-                  <a:ext uri="{0D108BD9-81ED-4DB2-BD59-A6C34878D82A}">
-                    <a16:rowId xmlns:a16="http://schemas.microsoft.com/office/drawing/2014/main" val="10001"/>
-                  </a:ext>
-                </a:extLst>
               </a:tr>
               <a:tr h="429768">
                 <a:tc>
@@ -11669,7 +11339,7 @@
                           </a:solidFill>
                           <a:latin typeface="游ゴシック"/>
                         </a:rPr>
-                        <a:t>raw 値をそのまま初期値に設定 (NaN 収束待ち回避)</a:t>
+                        <a:t>raw 値をそのまま初期値に設定</a:t>
                       </a:r>
                     </a:p>
                   </a:txBody>
@@ -11679,11 +11349,6 @@
                     </a:solidFill>
                   </a:tcPr>
                 </a:tc>
-                <a:extLst>
-                  <a:ext uri="{0D108BD9-81ED-4DB2-BD59-A6C34878D82A}">
-                    <a16:rowId xmlns:a16="http://schemas.microsoft.com/office/drawing/2014/main" val="10002"/>
-                  </a:ext>
-                </a:extLst>
               </a:tr>
               <a:tr h="429768">
                 <a:tc>
@@ -11722,7 +11387,7 @@
                           </a:solidFill>
                           <a:latin typeface="游ゴシック"/>
                         </a:rPr>
-                        <a:t>新データ到着時のみ（同値での重複適用なし）</a:t>
+                        <a:t>新データ到着時のみ</a:t>
                       </a:r>
                     </a:p>
                   </a:txBody>
@@ -11732,11 +11397,6 @@
                     </a:solidFill>
                   </a:tcPr>
                 </a:tc>
-                <a:extLst>
-                  <a:ext uri="{0D108BD9-81ED-4DB2-BD59-A6C34878D82A}">
-                    <a16:rowId xmlns:a16="http://schemas.microsoft.com/office/drawing/2014/main" val="10003"/>
-                  </a:ext>
-                </a:extLst>
               </a:tr>
             </a:tbl>
           </a:graphicData>
@@ -11751,7 +11411,7 @@
         <p:spPr>
           <a:xfrm>
             <a:off x="320040" y="5760720"/>
-            <a:ext cx="11521440" cy="365760"/>
+            <a:ext cx="11548872" cy="365760"/>
           </a:xfrm>
           <a:prstGeom prst="rect">
             <a:avLst/>
@@ -11786,7 +11446,7 @@
 </file>
 
 <file path=ppt/slides/slide19.xml><?xml version="1.0" encoding="utf-8"?>
-<p:sld xmlns:a="http://schemas.openxmlformats.org/drawingml/2006/main" xmlns:r="http://schemas.openxmlformats.org/officeDocument/2006/relationships" xmlns:p="http://schemas.openxmlformats.org/presentationml/2006/main">
+<p:sld xmlns:a="http://schemas.openxmlformats.org/drawingml/2006/main" xmlns:p="http://schemas.openxmlformats.org/presentationml/2006/main" xmlns:r="http://schemas.openxmlformats.org/officeDocument/2006/relationships">
   <p:cSld>
     <p:spTree>
       <p:nvGrpSpPr>
@@ -11794,14 +11454,7 @@
         <p:cNvGrpSpPr/>
         <p:nvPr/>
       </p:nvGrpSpPr>
-      <p:grpSpPr>
-        <a:xfrm>
-          <a:off x="0" y="0"/>
-          <a:ext cx="0" cy="0"/>
-          <a:chOff x="0" y="0"/>
-          <a:chExt cx="0" cy="0"/>
-        </a:xfrm>
-      </p:grpSpPr>
+      <p:grpSpPr/>
       <p:sp>
         <p:nvSpPr>
           <p:cNvPr id="2" name="Rectangle 1"/>
@@ -11842,7 +11495,6 @@
           <a:lstStyle/>
           <a:p>
             <a:pPr algn="ctr"/>
-            <a:endParaRPr/>
           </a:p>
         </p:txBody>
       </p:sp>
@@ -11956,7 +11608,6 @@
           <a:lstStyle/>
           <a:p>
             <a:pPr algn="ctr"/>
-            <a:endParaRPr/>
           </a:p>
         </p:txBody>
       </p:sp>
@@ -12039,7 +11690,7 @@
         <p:spPr>
           <a:xfrm>
             <a:off x="320040" y="1051560"/>
-            <a:ext cx="6949440" cy="365760"/>
+            <a:ext cx="5394960" cy="411480"/>
           </a:xfrm>
           <a:prstGeom prst="rect">
             <a:avLst/>
@@ -12067,58 +11718,14 @@
       </p:sp>
       <p:sp>
         <p:nvSpPr>
-          <p:cNvPr id="9" name="Rectangle 8"/>
-          <p:cNvSpPr/>
-          <p:nvPr/>
-        </p:nvSpPr>
-        <p:spPr>
-          <a:xfrm>
-            <a:off x="320040" y="1463040"/>
-            <a:ext cx="6949440" cy="1645920"/>
-          </a:xfrm>
-          <a:prstGeom prst="rect">
-            <a:avLst/>
-          </a:prstGeom>
-          <a:solidFill>
-            <a:srgbClr val="F4F4F4"/>
-          </a:solidFill>
-          <a:ln>
-            <a:noFill/>
-          </a:ln>
-        </p:spPr>
-        <p:style>
-          <a:lnRef idx="1">
-            <a:schemeClr val="accent1"/>
-          </a:lnRef>
-          <a:fillRef idx="3">
-            <a:schemeClr val="accent1"/>
-          </a:fillRef>
-          <a:effectRef idx="2">
-            <a:schemeClr val="accent1"/>
-          </a:effectRef>
-          <a:fontRef idx="minor">
-            <a:schemeClr val="lt1"/>
-          </a:fontRef>
-        </p:style>
-        <p:txBody>
-          <a:bodyPr rtlCol="0" anchor="ctr"/>
-          <a:lstStyle/>
-          <a:p>
-            <a:pPr algn="ctr"/>
-            <a:endParaRPr/>
-          </a:p>
-        </p:txBody>
-      </p:sp>
-      <p:sp>
-        <p:nvSpPr>
-          <p:cNvPr id="10" name="TextBox 9"/>
+          <p:cNvPr id="9" name="TextBox 8"/>
           <p:cNvSpPr txBox="1"/>
           <p:nvPr/>
         </p:nvSpPr>
         <p:spPr>
           <a:xfrm>
-            <a:off x="457200" y="1554480"/>
-            <a:ext cx="6675120" cy="1463040"/>
+            <a:off x="320040" y="1508760"/>
+            <a:ext cx="5394960" cy="438912"/>
           </a:xfrm>
           <a:prstGeom prst="rect">
             <a:avLst/>
@@ -12146,14 +11753,14 @@
       </p:sp>
       <p:sp>
         <p:nvSpPr>
-          <p:cNvPr id="11" name="Rectangle 10"/>
+          <p:cNvPr id="10" name="Rectangle 9"/>
           <p:cNvSpPr/>
           <p:nvPr/>
         </p:nvSpPr>
         <p:spPr>
           <a:xfrm>
-            <a:off x="320040" y="3200400"/>
-            <a:ext cx="6949440" cy="2011680"/>
+            <a:off x="320040" y="2039112"/>
+            <a:ext cx="5394960" cy="2194559"/>
           </a:xfrm>
           <a:prstGeom prst="rect">
             <a:avLst/>
@@ -12186,20 +11793,19 @@
           <a:lstStyle/>
           <a:p>
             <a:pPr algn="ctr"/>
-            <a:endParaRPr/>
-          </a:p>
-        </p:txBody>
-      </p:sp>
-      <p:sp>
-        <p:nvSpPr>
-          <p:cNvPr id="12" name="TextBox 11"/>
+          </a:p>
+        </p:txBody>
+      </p:sp>
+      <p:sp>
+        <p:nvSpPr>
+          <p:cNvPr id="11" name="TextBox 10"/>
           <p:cNvSpPr txBox="1"/>
           <p:nvPr/>
         </p:nvSpPr>
         <p:spPr>
           <a:xfrm>
-            <a:off x="457200" y="3273552"/>
-            <a:ext cx="6675120" cy="347472"/>
+            <a:off x="457200" y="2112264"/>
+            <a:ext cx="5120640" cy="347472"/>
           </a:xfrm>
           <a:prstGeom prst="rect">
             <a:avLst/>
@@ -12227,14 +11833,14 @@
       </p:sp>
       <p:sp>
         <p:nvSpPr>
-          <p:cNvPr id="13" name="TextBox 12"/>
+          <p:cNvPr id="12" name="TextBox 11"/>
           <p:cNvSpPr txBox="1"/>
           <p:nvPr/>
         </p:nvSpPr>
         <p:spPr>
           <a:xfrm>
-            <a:off x="457200" y="3657600"/>
-            <a:ext cx="6583680" cy="1463040"/>
+            <a:off x="457200" y="2496312"/>
+            <a:ext cx="5120640" cy="1737359"/>
           </a:xfrm>
           <a:prstGeom prst="rect">
             <a:avLst/>
@@ -12322,14 +11928,49 @@
       </p:sp>
       <p:sp>
         <p:nvSpPr>
+          <p:cNvPr id="13" name="TextBox 12"/>
+          <p:cNvSpPr txBox="1"/>
+          <p:nvPr/>
+        </p:nvSpPr>
+        <p:spPr>
+          <a:xfrm>
+            <a:off x="5989320" y="1051560"/>
+            <a:ext cx="5577840" cy="411480"/>
+          </a:xfrm>
+          <a:prstGeom prst="rect">
+            <a:avLst/>
+          </a:prstGeom>
+          <a:noFill/>
+        </p:spPr>
+        <p:txBody>
+          <a:bodyPr wrap="square">
+            <a:spAutoFit/>
+          </a:bodyPr>
+          <a:lstStyle/>
+          <a:p>
+            <a:pPr algn="l"/>
+            <a:r>
+              <a:rPr sz="1600" b="1" i="0">
+                <a:solidFill>
+                  <a:srgbClr val="0D477F"/>
+                </a:solidFill>
+                <a:latin typeface="游ゴシック"/>
+              </a:rPr>
+              <a:t>採用理由・実装ポイント</a:t>
+            </a:r>
+          </a:p>
+        </p:txBody>
+      </p:sp>
+      <p:sp>
+        <p:nvSpPr>
           <p:cNvPr id="14" name="Rectangle 13"/>
           <p:cNvSpPr/>
           <p:nvPr/>
         </p:nvSpPr>
         <p:spPr>
           <a:xfrm>
-            <a:off x="7589520" y="1051560"/>
-            <a:ext cx="4297680" cy="2743200"/>
+            <a:off x="5989320" y="1508760"/>
+            <a:ext cx="5577840" cy="1755648"/>
           </a:xfrm>
           <a:prstGeom prst="rect">
             <a:avLst/>
@@ -12362,7 +12003,6 @@
           <a:lstStyle/>
           <a:p>
             <a:pPr algn="ctr"/>
-            <a:endParaRPr/>
           </a:p>
         </p:txBody>
       </p:sp>
@@ -12374,8 +12014,8 @@
         </p:nvSpPr>
         <p:spPr>
           <a:xfrm>
-            <a:off x="7726679" y="1143000"/>
-            <a:ext cx="4023360" cy="365760"/>
+            <a:off x="6126480" y="1581912"/>
+            <a:ext cx="5303520" cy="347472"/>
           </a:xfrm>
           <a:prstGeom prst="rect">
             <a:avLst/>
@@ -12390,7 +12030,7 @@
           <a:p>
             <a:pPr algn="l"/>
             <a:r>
-              <a:rPr sz="1500" b="1" i="0">
+              <a:rPr sz="1400" b="1" i="0">
                 <a:solidFill>
                   <a:srgbClr val="27AE60"/>
                 </a:solidFill>
@@ -12409,8 +12049,8 @@
         </p:nvSpPr>
         <p:spPr>
           <a:xfrm>
-            <a:off x="7726679" y="1600200"/>
-            <a:ext cx="4023360" cy="2011680"/>
+            <a:off x="6126480" y="1965960"/>
+            <a:ext cx="5303520" cy="1298448"/>
           </a:xfrm>
           <a:prstGeom prst="rect">
             <a:avLst/>
@@ -12425,7 +12065,7 @@
           <a:p>
             <a:pPr algn="l"/>
             <a:r>
-              <a:rPr sz="1300" b="0" i="0">
+              <a:rPr sz="1200" b="0" i="0">
                 <a:solidFill>
                   <a:srgbClr val="1A1A2E"/>
                 </a:solidFill>
@@ -12437,7 +12077,7 @@
           <a:p>
             <a:pPr algn="l"/>
             <a:r>
-              <a:rPr sz="1300" b="0" i="0">
+              <a:rPr sz="1200" b="0" i="0">
                 <a:solidFill>
                   <a:srgbClr val="1A1A2E"/>
                 </a:solidFill>
@@ -12449,7 +12089,7 @@
           <a:p>
             <a:pPr algn="l"/>
             <a:r>
-              <a:rPr sz="1300" b="0" i="0">
+              <a:rPr sz="1200" b="0" i="0">
                 <a:solidFill>
                   <a:srgbClr val="1A1A2E"/>
                 </a:solidFill>
@@ -12461,7 +12101,7 @@
           <a:p>
             <a:pPr algn="l"/>
             <a:r>
-              <a:rPr sz="1300" b="0" i="0">
+              <a:rPr sz="1200" b="0" i="0">
                 <a:solidFill>
                   <a:srgbClr val="1A1A2E"/>
                 </a:solidFill>
@@ -12480,17 +12120,19 @@
         </p:nvSpPr>
         <p:spPr>
           <a:xfrm>
-            <a:off x="7589520" y="3886200"/>
-            <a:ext cx="4297680" cy="1645920"/>
+            <a:off x="5989320" y="3401568"/>
+            <a:ext cx="5577840" cy="1060704"/>
           </a:xfrm>
           <a:prstGeom prst="rect">
             <a:avLst/>
           </a:prstGeom>
           <a:solidFill>
-            <a:srgbClr val="F4F4F4"/>
+            <a:srgbClr val="FFFFFF"/>
           </a:solidFill>
-          <a:ln>
-            <a:noFill/>
+          <a:ln w="19050">
+            <a:solidFill>
+              <a:srgbClr val="0D477F"/>
+            </a:solidFill>
           </a:ln>
         </p:spPr>
         <p:style>
@@ -12512,7 +12154,6 @@
           <a:lstStyle/>
           <a:p>
             <a:pPr algn="ctr"/>
-            <a:endParaRPr/>
           </a:p>
         </p:txBody>
       </p:sp>
@@ -12524,8 +12165,8 @@
         </p:nvSpPr>
         <p:spPr>
           <a:xfrm>
-            <a:off x="7726679" y="3959352"/>
-            <a:ext cx="4023360" cy="347472"/>
+            <a:off x="6126480" y="3474720"/>
+            <a:ext cx="5303520" cy="347472"/>
           </a:xfrm>
           <a:prstGeom prst="rect">
             <a:avLst/>
@@ -12540,7 +12181,7 @@
           <a:p>
             <a:pPr algn="l"/>
             <a:r>
-              <a:rPr sz="1300" b="1" i="0">
+              <a:rPr sz="1400" b="1" i="0">
                 <a:solidFill>
                   <a:srgbClr val="0D477F"/>
                 </a:solidFill>
@@ -12559,8 +12200,8 @@
         </p:nvSpPr>
         <p:spPr>
           <a:xfrm>
-            <a:off x="7726679" y="4315968"/>
-            <a:ext cx="4023360" cy="1097280"/>
+            <a:off x="6126480" y="3858768"/>
+            <a:ext cx="5303520" cy="603504"/>
           </a:xfrm>
           <a:prstGeom prst="rect">
             <a:avLst/>
@@ -12593,19 +12234,7 @@
                 </a:solidFill>
                 <a:latin typeface="游ゴシック"/>
               </a:rPr>
-              <a:t>・最終値は handleButtonA() で RUN→RESULT</a:t>
-            </a:r>
-          </a:p>
-          <a:p>
-            <a:pPr algn="l"/>
-            <a:r>
-              <a:rPr sz="1200" b="0" i="0">
-                <a:solidFill>
-                  <a:srgbClr val="1A1A2E"/>
-                </a:solidFill>
-                <a:latin typeface="游ゴシック"/>
-              </a:rPr>
-              <a:t>  遷移時にも再計算</a:t>
+              <a:t>・最終値は handleButtonA() で RUN→RESULT 遷移時にも再計算</a:t>
             </a:r>
           </a:p>
         </p:txBody>
@@ -12619,7 +12248,7 @@
 </file>
 
 <file path=ppt/slides/slide2.xml><?xml version="1.0" encoding="utf-8"?>
-<p:sld xmlns:a="http://schemas.openxmlformats.org/drawingml/2006/main" xmlns:r="http://schemas.openxmlformats.org/officeDocument/2006/relationships" xmlns:p="http://schemas.openxmlformats.org/presentationml/2006/main">
+<p:sld xmlns:a="http://schemas.openxmlformats.org/drawingml/2006/main" xmlns:p="http://schemas.openxmlformats.org/presentationml/2006/main" xmlns:r="http://schemas.openxmlformats.org/officeDocument/2006/relationships">
   <p:cSld>
     <p:spTree>
       <p:nvGrpSpPr>
@@ -12627,14 +12256,7 @@
         <p:cNvGrpSpPr/>
         <p:nvPr/>
       </p:nvGrpSpPr>
-      <p:grpSpPr>
-        <a:xfrm>
-          <a:off x="0" y="0"/>
-          <a:ext cx="0" cy="0"/>
-          <a:chOff x="0" y="0"/>
-          <a:chExt cx="0" cy="0"/>
-        </a:xfrm>
-      </p:grpSpPr>
+      <p:grpSpPr/>
       <p:sp>
         <p:nvSpPr>
           <p:cNvPr id="2" name="Rectangle 1"/>
@@ -12675,7 +12297,6 @@
           <a:lstStyle/>
           <a:p>
             <a:pPr algn="ctr"/>
-            <a:endParaRPr/>
           </a:p>
         </p:txBody>
       </p:sp>
@@ -12789,7 +12410,6 @@
           <a:lstStyle/>
           <a:p>
             <a:pPr algn="ctr"/>
-            <a:endParaRPr/>
           </a:p>
         </p:txBody>
       </p:sp>
@@ -12903,7 +12523,6 @@
           <a:lstStyle/>
           <a:p>
             <a:pPr algn="ctr"/>
-            <a:endParaRPr/>
           </a:p>
         </p:txBody>
       </p:sp>
@@ -13052,7 +12671,6 @@
           <a:lstStyle/>
           <a:p>
             <a:pPr algn="ctr"/>
-            <a:endParaRPr/>
           </a:p>
         </p:txBody>
       </p:sp>
@@ -13201,7 +12819,6 @@
           <a:lstStyle/>
           <a:p>
             <a:pPr algn="ctr"/>
-            <a:endParaRPr/>
           </a:p>
         </p:txBody>
       </p:sp>
@@ -13350,7 +12967,6 @@
           <a:lstStyle/>
           <a:p>
             <a:pPr algn="ctr"/>
-            <a:endParaRPr/>
           </a:p>
         </p:txBody>
       </p:sp>
@@ -13499,7 +13115,6 @@
           <a:lstStyle/>
           <a:p>
             <a:pPr algn="ctr"/>
-            <a:endParaRPr/>
           </a:p>
         </p:txBody>
       </p:sp>
@@ -13648,7 +13263,6 @@
           <a:lstStyle/>
           <a:p>
             <a:pPr algn="ctr"/>
-            <a:endParaRPr/>
           </a:p>
         </p:txBody>
       </p:sp>
@@ -13797,7 +13411,6 @@
           <a:lstStyle/>
           <a:p>
             <a:pPr algn="ctr"/>
-            <a:endParaRPr/>
           </a:p>
         </p:txBody>
       </p:sp>
@@ -13946,7 +13559,6 @@
           <a:lstStyle/>
           <a:p>
             <a:pPr algn="ctr"/>
-            <a:endParaRPr/>
           </a:p>
         </p:txBody>
       </p:sp>
@@ -14064,7 +13676,7 @@
 </file>
 
 <file path=ppt/slides/slide20.xml><?xml version="1.0" encoding="utf-8"?>
-<p:sld xmlns:a="http://schemas.openxmlformats.org/drawingml/2006/main" xmlns:r="http://schemas.openxmlformats.org/officeDocument/2006/relationships" xmlns:p="http://schemas.openxmlformats.org/presentationml/2006/main">
+<p:sld xmlns:a="http://schemas.openxmlformats.org/drawingml/2006/main" xmlns:p="http://schemas.openxmlformats.org/presentationml/2006/main" xmlns:r="http://schemas.openxmlformats.org/officeDocument/2006/relationships">
   <p:cSld>
     <p:spTree>
       <p:nvGrpSpPr>
@@ -14072,14 +13684,7 @@
         <p:cNvGrpSpPr/>
         <p:nvPr/>
       </p:nvGrpSpPr>
-      <p:grpSpPr>
-        <a:xfrm>
-          <a:off x="0" y="0"/>
-          <a:ext cx="0" cy="0"/>
-          <a:chOff x="0" y="0"/>
-          <a:chExt cx="0" cy="0"/>
-        </a:xfrm>
-      </p:grpSpPr>
+      <p:grpSpPr/>
       <p:sp>
         <p:nvSpPr>
           <p:cNvPr id="2" name="Rectangle 1"/>
@@ -14120,7 +13725,6 @@
           <a:lstStyle/>
           <a:p>
             <a:pPr algn="ctr"/>
-            <a:endParaRPr/>
           </a:p>
         </p:txBody>
       </p:sp>
@@ -14234,7 +13838,6 @@
           <a:lstStyle/>
           <a:p>
             <a:pPr algn="ctr"/>
-            <a:endParaRPr/>
           </a:p>
         </p:txBody>
       </p:sp>
@@ -14317,7 +13920,7 @@
         <p:spPr>
           <a:xfrm>
             <a:off x="320040" y="1051560"/>
-            <a:ext cx="11521440" cy="502920"/>
+            <a:ext cx="11548872" cy="502920"/>
           </a:xfrm>
           <a:prstGeom prst="rect">
             <a:avLst/>
@@ -14348,7 +13951,6 @@
           <a:lstStyle/>
           <a:p>
             <a:pPr algn="ctr"/>
-            <a:endParaRPr/>
           </a:p>
         </p:txBody>
       </p:sp>
@@ -14382,7 +13984,7 @@
                 </a:solidFill>
                 <a:latin typeface="游ゴシック"/>
               </a:rPr>
-              <a:t>デフォルト: HI = 600.0°C ／ LO = 400.0°C ／ ヒステリシス = 5.0°C  ※ EEPROM 保存・電源 OFF 後も保持</a:t>
+              <a:t>デフォルト: HI = 600.0°C ／ LO = 400.0°C ／ ヒステリシス = 5.0°C　※ EEPROM 保存・電源 OFF 後も保持</a:t>
             </a:r>
           </a:p>
         </p:txBody>
@@ -14406,41 +14008,11 @@
                 <a:tableStyleId>{5C22544A-7EE6-4342-B048-85BDC9FD1C3A}</a:tableStyleId>
               </a:tblPr>
               <a:tblGrid>
-                <a:gridCol w="1371600">
-                  <a:extLst>
-                    <a:ext uri="{9D8B030D-6E8A-4147-A177-3AD203B41FA5}">
-                      <a16:colId xmlns:a16="http://schemas.microsoft.com/office/drawing/2014/main" val="20000"/>
-                    </a:ext>
-                  </a:extLst>
-                </a:gridCol>
-                <a:gridCol w="3200400">
-                  <a:extLst>
-                    <a:ext uri="{9D8B030D-6E8A-4147-A177-3AD203B41FA5}">
-                      <a16:colId xmlns:a16="http://schemas.microsoft.com/office/drawing/2014/main" val="20001"/>
-                    </a:ext>
-                  </a:extLst>
-                </a:gridCol>
-                <a:gridCol w="3200400">
-                  <a:extLst>
-                    <a:ext uri="{9D8B030D-6E8A-4147-A177-3AD203B41FA5}">
-                      <a16:colId xmlns:a16="http://schemas.microsoft.com/office/drawing/2014/main" val="20002"/>
-                    </a:ext>
-                  </a:extLst>
-                </a:gridCol>
-                <a:gridCol w="1554480">
-                  <a:extLst>
-                    <a:ext uri="{9D8B030D-6E8A-4147-A177-3AD203B41FA5}">
-                      <a16:colId xmlns:a16="http://schemas.microsoft.com/office/drawing/2014/main" val="20003"/>
-                    </a:ext>
-                  </a:extLst>
-                </a:gridCol>
-                <a:gridCol w="2194560">
-                  <a:extLst>
-                    <a:ext uri="{9D8B030D-6E8A-4147-A177-3AD203B41FA5}">
-                      <a16:colId xmlns:a16="http://schemas.microsoft.com/office/drawing/2014/main" val="20004"/>
-                    </a:ext>
-                  </a:extLst>
-                </a:gridCol>
+                <a:gridCol w="1371600"/>
+                <a:gridCol w="3200400"/>
+                <a:gridCol w="3200400"/>
+                <a:gridCol w="1554480"/>
+                <a:gridCol w="2194560"/>
               </a:tblGrid>
               <a:tr h="457200">
                 <a:tc>
@@ -14558,11 +14130,6 @@
                     </a:solidFill>
                   </a:tcPr>
                 </a:tc>
-                <a:extLst>
-                  <a:ext uri="{0D108BD9-81ED-4DB2-BD59-A6C34878D82A}">
-                    <a16:rowId xmlns:a16="http://schemas.microsoft.com/office/drawing/2014/main" val="10000"/>
-                  </a:ext>
-                </a:extLst>
               </a:tr>
               <a:tr h="457200">
                 <a:tc>
@@ -14680,11 +14247,6 @@
                     </a:solidFill>
                   </a:tcPr>
                 </a:tc>
-                <a:extLst>
-                  <a:ext uri="{0D108BD9-81ED-4DB2-BD59-A6C34878D82A}">
-                    <a16:rowId xmlns:a16="http://schemas.microsoft.com/office/drawing/2014/main" val="10001"/>
-                  </a:ext>
-                </a:extLst>
               </a:tr>
               <a:tr h="457200">
                 <a:tc>
@@ -14802,11 +14364,6 @@
                     </a:solidFill>
                   </a:tcPr>
                 </a:tc>
-                <a:extLst>
-                  <a:ext uri="{0D108BD9-81ED-4DB2-BD59-A6C34878D82A}">
-                    <a16:rowId xmlns:a16="http://schemas.microsoft.com/office/drawing/2014/main" val="10002"/>
-                  </a:ext>
-                </a:extLst>
               </a:tr>
               <a:tr h="457200">
                 <a:tc>
@@ -14924,11 +14481,6 @@
                     </a:solidFill>
                   </a:tcPr>
                 </a:tc>
-                <a:extLst>
-                  <a:ext uri="{0D108BD9-81ED-4DB2-BD59-A6C34878D82A}">
-                    <a16:rowId xmlns:a16="http://schemas.microsoft.com/office/drawing/2014/main" val="10003"/>
-                  </a:ext>
-                </a:extLst>
               </a:tr>
             </a:tbl>
           </a:graphicData>
@@ -14974,7 +14526,6 @@
           <a:lstStyle/>
           <a:p>
             <a:pPr algn="ctr"/>
-            <a:endParaRPr/>
           </a:p>
         </p:txBody>
       </p:sp>
@@ -15126,7 +14677,6 @@
           <a:lstStyle/>
           <a:p>
             <a:pPr algn="ctr"/>
-            <a:endParaRPr/>
           </a:p>
         </p:txBody>
       </p:sp>
@@ -15219,19 +14769,7 @@
                 </a:solidFill>
                 <a:latin typeface="游ゴシック"/>
               </a:rPr>
-              <a:t>・updateAlarmFlags() は独立関数</a:t>
-            </a:r>
-          </a:p>
-          <a:p>
-            <a:pPr algn="l"/>
-            <a:r>
-              <a:rPr sz="1200" b="0" i="0">
-                <a:solidFill>
-                  <a:srgbClr val="1A1A2E"/>
-                </a:solidFill>
-                <a:latin typeface="游ゴシック"/>
-              </a:rPr>
-              <a:t>  → ユニットテスト可能</a:t>
+              <a:t>・updateAlarmFlags() は独立関数 → ユニットテスト可能</a:t>
             </a:r>
           </a:p>
         </p:txBody>
@@ -15245,7 +14783,7 @@
 </file>
 
 <file path=ppt/slides/slide21.xml><?xml version="1.0" encoding="utf-8"?>
-<p:sld xmlns:a="http://schemas.openxmlformats.org/drawingml/2006/main" xmlns:r="http://schemas.openxmlformats.org/officeDocument/2006/relationships" xmlns:p="http://schemas.openxmlformats.org/presentationml/2006/main">
+<p:sld xmlns:a="http://schemas.openxmlformats.org/drawingml/2006/main" xmlns:p="http://schemas.openxmlformats.org/presentationml/2006/main" xmlns:r="http://schemas.openxmlformats.org/officeDocument/2006/relationships">
   <p:cSld>
     <p:spTree>
       <p:nvGrpSpPr>
@@ -15253,14 +14791,7 @@
         <p:cNvGrpSpPr/>
         <p:nvPr/>
       </p:nvGrpSpPr>
-      <p:grpSpPr>
-        <a:xfrm>
-          <a:off x="0" y="0"/>
-          <a:ext cx="0" cy="0"/>
-          <a:chOff x="0" y="0"/>
-          <a:chExt cx="0" cy="0"/>
-        </a:xfrm>
-      </p:grpSpPr>
+      <p:grpSpPr/>
       <p:sp>
         <p:nvSpPr>
           <p:cNvPr id="2" name="Rectangle 1"/>
@@ -15301,7 +14832,6 @@
           <a:lstStyle/>
           <a:p>
             <a:pPr algn="ctr"/>
-            <a:endParaRPr/>
           </a:p>
         </p:txBody>
       </p:sp>
@@ -15415,7 +14945,6 @@
           <a:lstStyle/>
           <a:p>
             <a:pPr algn="ctr"/>
-            <a:endParaRPr/>
           </a:p>
         </p:txBody>
       </p:sp>
@@ -15508,34 +15037,10 @@
                 <a:tableStyleId>{5C22544A-7EE6-4342-B048-85BDC9FD1C3A}</a:tableStyleId>
               </a:tblPr>
               <a:tblGrid>
-                <a:gridCol w="457200">
-                  <a:extLst>
-                    <a:ext uri="{9D8B030D-6E8A-4147-A177-3AD203B41FA5}">
-                      <a16:colId xmlns:a16="http://schemas.microsoft.com/office/drawing/2014/main" val="20000"/>
-                    </a:ext>
-                  </a:extLst>
-                </a:gridCol>
-                <a:gridCol w="3200400">
-                  <a:extLst>
-                    <a:ext uri="{9D8B030D-6E8A-4147-A177-3AD203B41FA5}">
-                      <a16:colId xmlns:a16="http://schemas.microsoft.com/office/drawing/2014/main" val="20001"/>
-                    </a:ext>
-                  </a:extLst>
-                </a:gridCol>
-                <a:gridCol w="3200400">
-                  <a:extLst>
-                    <a:ext uri="{9D8B030D-6E8A-4147-A177-3AD203B41FA5}">
-                      <a16:colId xmlns:a16="http://schemas.microsoft.com/office/drawing/2014/main" val="20002"/>
-                    </a:ext>
-                  </a:extLst>
-                </a:gridCol>
-                <a:gridCol w="4663440">
-                  <a:extLst>
-                    <a:ext uri="{9D8B030D-6E8A-4147-A177-3AD203B41FA5}">
-                      <a16:colId xmlns:a16="http://schemas.microsoft.com/office/drawing/2014/main" val="20003"/>
-                    </a:ext>
-                  </a:extLst>
-                </a:gridCol>
+                <a:gridCol w="457200"/>
+                <a:gridCol w="3200400"/>
+                <a:gridCol w="3200400"/>
+                <a:gridCol w="4663440"/>
               </a:tblGrid>
               <a:tr h="457200">
                 <a:tc>
@@ -15630,11 +15135,6 @@
                     </a:solidFill>
                   </a:tcPr>
                 </a:tc>
-                <a:extLst>
-                  <a:ext uri="{0D108BD9-81ED-4DB2-BD59-A6C34878D82A}">
-                    <a16:rowId xmlns:a16="http://schemas.microsoft.com/office/drawing/2014/main" val="10000"/>
-                  </a:ext>
-                </a:extLst>
               </a:tr>
               <a:tr h="457200">
                 <a:tc>
@@ -15729,11 +15229,6 @@
                     </a:solidFill>
                   </a:tcPr>
                 </a:tc>
-                <a:extLst>
-                  <a:ext uri="{0D108BD9-81ED-4DB2-BD59-A6C34878D82A}">
-                    <a16:rowId xmlns:a16="http://schemas.microsoft.com/office/drawing/2014/main" val="10001"/>
-                  </a:ext>
-                </a:extLst>
               </a:tr>
               <a:tr h="457200">
                 <a:tc>
@@ -15828,11 +15323,6 @@
                     </a:solidFill>
                   </a:tcPr>
                 </a:tc>
-                <a:extLst>
-                  <a:ext uri="{0D108BD9-81ED-4DB2-BD59-A6C34878D82A}">
-                    <a16:rowId xmlns:a16="http://schemas.microsoft.com/office/drawing/2014/main" val="10002"/>
-                  </a:ext>
-                </a:extLst>
               </a:tr>
               <a:tr h="457200">
                 <a:tc>
@@ -15927,11 +15417,6 @@
                     </a:solidFill>
                   </a:tcPr>
                 </a:tc>
-                <a:extLst>
-                  <a:ext uri="{0D108BD9-81ED-4DB2-BD59-A6C34878D82A}">
-                    <a16:rowId xmlns:a16="http://schemas.microsoft.com/office/drawing/2014/main" val="10003"/>
-                  </a:ext>
-                </a:extLst>
               </a:tr>
               <a:tr h="457200">
                 <a:tc>
@@ -16026,11 +15511,6 @@
                     </a:solidFill>
                   </a:tcPr>
                 </a:tc>
-                <a:extLst>
-                  <a:ext uri="{0D108BD9-81ED-4DB2-BD59-A6C34878D82A}">
-                    <a16:rowId xmlns:a16="http://schemas.microsoft.com/office/drawing/2014/main" val="10004"/>
-                  </a:ext>
-                </a:extLst>
               </a:tr>
               <a:tr h="457200">
                 <a:tc>
@@ -16125,11 +15605,6 @@
                     </a:solidFill>
                   </a:tcPr>
                 </a:tc>
-                <a:extLst>
-                  <a:ext uri="{0D108BD9-81ED-4DB2-BD59-A6C34878D82A}">
-                    <a16:rowId xmlns:a16="http://schemas.microsoft.com/office/drawing/2014/main" val="10005"/>
-                  </a:ext>
-                </a:extLst>
               </a:tr>
             </a:tbl>
           </a:graphicData>
@@ -16143,8 +15618,8 @@
         </p:nvSpPr>
         <p:spPr>
           <a:xfrm>
-            <a:off x="320040" y="5349240"/>
-            <a:ext cx="11521440" cy="640080"/>
+            <a:off x="320040" y="3931920"/>
+            <a:ext cx="11548872" cy="640080"/>
           </a:xfrm>
           <a:prstGeom prst="rect">
             <a:avLst/>
@@ -16175,7 +15650,6 @@
           <a:lstStyle/>
           <a:p>
             <a:pPr algn="ctr"/>
-            <a:endParaRPr/>
           </a:p>
         </p:txBody>
       </p:sp>
@@ -16187,7 +15661,7 @@
         </p:nvSpPr>
         <p:spPr>
           <a:xfrm>
-            <a:off x="502920" y="5422392"/>
+            <a:off x="502920" y="3995928"/>
             <a:ext cx="11155680" cy="530352"/>
           </a:xfrm>
           <a:prstGeom prst="rect">
@@ -16223,7 +15697,7 @@
 </file>
 
 <file path=ppt/slides/slide22.xml><?xml version="1.0" encoding="utf-8"?>
-<p:sld xmlns:a="http://schemas.openxmlformats.org/drawingml/2006/main" xmlns:r="http://schemas.openxmlformats.org/officeDocument/2006/relationships" xmlns:p="http://schemas.openxmlformats.org/presentationml/2006/main">
+<p:sld xmlns:a="http://schemas.openxmlformats.org/drawingml/2006/main" xmlns:p="http://schemas.openxmlformats.org/presentationml/2006/main" xmlns:r="http://schemas.openxmlformats.org/officeDocument/2006/relationships">
   <p:cSld>
     <p:spTree>
       <p:nvGrpSpPr>
@@ -16231,14 +15705,7 @@
         <p:cNvGrpSpPr/>
         <p:nvPr/>
       </p:nvGrpSpPr>
-      <p:grpSpPr>
-        <a:xfrm>
-          <a:off x="0" y="0"/>
-          <a:ext cx="0" cy="0"/>
-          <a:chOff x="0" y="0"/>
-          <a:chExt cx="0" cy="0"/>
-        </a:xfrm>
-      </p:grpSpPr>
+      <p:grpSpPr/>
       <p:sp>
         <p:nvSpPr>
           <p:cNvPr id="2" name="Rectangle 1"/>
@@ -16279,7 +15746,6 @@
           <a:lstStyle/>
           <a:p>
             <a:pPr algn="ctr"/>
-            <a:endParaRPr/>
           </a:p>
         </p:txBody>
       </p:sp>
@@ -16393,7 +15859,6 @@
           <a:lstStyle/>
           <a:p>
             <a:pPr algn="ctr"/>
-            <a:endParaRPr/>
           </a:p>
         </p:txBody>
       </p:sp>
@@ -16475,8 +15940,8 @@
         </p:nvSpPr>
         <p:spPr>
           <a:xfrm>
-            <a:off x="320040" y="1051560"/>
-            <a:ext cx="11521440" cy="411480"/>
+            <a:off x="320040" y="1005840"/>
+            <a:ext cx="11548872" cy="411480"/>
           </a:xfrm>
           <a:prstGeom prst="rect">
             <a:avLst/>
@@ -16512,7 +15977,7 @@
         </p:nvGraphicFramePr>
         <p:xfrm>
           <a:off x="320040" y="1645920"/>
-          <a:ext cx="8229600" cy="3401568"/>
+          <a:ext cx="8229600" cy="3364992"/>
         </p:xfrm>
         <a:graphic>
           <a:graphicData uri="http://schemas.openxmlformats.org/drawingml/2006/table">
@@ -16521,34 +15986,10 @@
                 <a:tableStyleId>{5C22544A-7EE6-4342-B048-85BDC9FD1C3A}</a:tableStyleId>
               </a:tblPr>
               <a:tblGrid>
-                <a:gridCol w="1645920">
-                  <a:extLst>
-                    <a:ext uri="{9D8B030D-6E8A-4147-A177-3AD203B41FA5}">
-                      <a16:colId xmlns:a16="http://schemas.microsoft.com/office/drawing/2014/main" val="20000"/>
-                    </a:ext>
-                  </a:extLst>
-                </a:gridCol>
-                <a:gridCol w="4114800">
-                  <a:extLst>
-                    <a:ext uri="{9D8B030D-6E8A-4147-A177-3AD203B41FA5}">
-                      <a16:colId xmlns:a16="http://schemas.microsoft.com/office/drawing/2014/main" val="20001"/>
-                    </a:ext>
-                  </a:extLst>
-                </a:gridCol>
-                <a:gridCol w="685800">
-                  <a:extLst>
-                    <a:ext uri="{9D8B030D-6E8A-4147-A177-3AD203B41FA5}">
-                      <a16:colId xmlns:a16="http://schemas.microsoft.com/office/drawing/2014/main" val="20002"/>
-                    </a:ext>
-                  </a:extLst>
-                </a:gridCol>
-                <a:gridCol w="1783080">
-                  <a:extLst>
-                    <a:ext uri="{9D8B030D-6E8A-4147-A177-3AD203B41FA5}">
-                      <a16:colId xmlns:a16="http://schemas.microsoft.com/office/drawing/2014/main" val="20003"/>
-                    </a:ext>
-                  </a:extLst>
-                </a:gridCol>
+                <a:gridCol w="1645920"/>
+                <a:gridCol w="4114800"/>
+                <a:gridCol w="685800"/>
+                <a:gridCol w="1783080"/>
               </a:tblGrid>
               <a:tr h="420624">
                 <a:tc>
@@ -16643,11 +16084,6 @@
                     </a:solidFill>
                   </a:tcPr>
                 </a:tc>
-                <a:extLst>
-                  <a:ext uri="{0D108BD9-81ED-4DB2-BD59-A6C34878D82A}">
-                    <a16:rowId xmlns:a16="http://schemas.microsoft.com/office/drawing/2014/main" val="10000"/>
-                  </a:ext>
-                </a:extLst>
               </a:tr>
               <a:tr h="420624">
                 <a:tc>
@@ -16742,11 +16178,6 @@
                     </a:solidFill>
                   </a:tcPr>
                 </a:tc>
-                <a:extLst>
-                  <a:ext uri="{0D108BD9-81ED-4DB2-BD59-A6C34878D82A}">
-                    <a16:rowId xmlns:a16="http://schemas.microsoft.com/office/drawing/2014/main" val="10001"/>
-                  </a:ext>
-                </a:extLst>
               </a:tr>
               <a:tr h="420624">
                 <a:tc>
@@ -16841,11 +16272,6 @@
                     </a:solidFill>
                   </a:tcPr>
                 </a:tc>
-                <a:extLst>
-                  <a:ext uri="{0D108BD9-81ED-4DB2-BD59-A6C34878D82A}">
-                    <a16:rowId xmlns:a16="http://schemas.microsoft.com/office/drawing/2014/main" val="10002"/>
-                  </a:ext>
-                </a:extLst>
               </a:tr>
               <a:tr h="420624">
                 <a:tc>
@@ -16940,11 +16366,6 @@
                     </a:solidFill>
                   </a:tcPr>
                 </a:tc>
-                <a:extLst>
-                  <a:ext uri="{0D108BD9-81ED-4DB2-BD59-A6C34878D82A}">
-                    <a16:rowId xmlns:a16="http://schemas.microsoft.com/office/drawing/2014/main" val="10003"/>
-                  </a:ext>
-                </a:extLst>
               </a:tr>
               <a:tr h="420624">
                 <a:tc>
@@ -17039,11 +16460,6 @@
                     </a:solidFill>
                   </a:tcPr>
                 </a:tc>
-                <a:extLst>
-                  <a:ext uri="{0D108BD9-81ED-4DB2-BD59-A6C34878D82A}">
-                    <a16:rowId xmlns:a16="http://schemas.microsoft.com/office/drawing/2014/main" val="10004"/>
-                  </a:ext>
-                </a:extLst>
               </a:tr>
               <a:tr h="420624">
                 <a:tc>
@@ -17138,11 +16554,6 @@
                     </a:solidFill>
                   </a:tcPr>
                 </a:tc>
-                <a:extLst>
-                  <a:ext uri="{0D108BD9-81ED-4DB2-BD59-A6C34878D82A}">
-                    <a16:rowId xmlns:a16="http://schemas.microsoft.com/office/drawing/2014/main" val="10005"/>
-                  </a:ext>
-                </a:extLst>
               </a:tr>
               <a:tr h="420624">
                 <a:tc>
@@ -17181,7 +16592,7 @@
                           </a:solidFill>
                           <a:latin typeface="游ゴシック"/>
                         </a:rPr>
-                        <a:t>NaN データ行の "NaN" 文字列出力</a:t>
+                        <a:t>NaN データ行の NaN 文字列出力</a:t>
                       </a:r>
                     </a:p>
                   </a:txBody>
@@ -17237,11 +16648,6 @@
                     </a:solidFill>
                   </a:tcPr>
                 </a:tc>
-                <a:extLst>
-                  <a:ext uri="{0D108BD9-81ED-4DB2-BD59-A6C34878D82A}">
-                    <a16:rowId xmlns:a16="http://schemas.microsoft.com/office/drawing/2014/main" val="10006"/>
-                  </a:ext>
-                </a:extLst>
               </a:tr>
               <a:tr h="420624">
                 <a:tc>
@@ -17336,11 +16742,6 @@
                     </a:solidFill>
                   </a:tcPr>
                 </a:tc>
-                <a:extLst>
-                  <a:ext uri="{0D108BD9-81ED-4DB2-BD59-A6C34878D82A}">
-                    <a16:rowId xmlns:a16="http://schemas.microsoft.com/office/drawing/2014/main" val="10007"/>
-                  </a:ext>
-                </a:extLst>
               </a:tr>
             </a:tbl>
           </a:graphicData>
@@ -17386,7 +16787,6 @@
           <a:lstStyle/>
           <a:p>
             <a:pPr algn="ctr"/>
-            <a:endParaRPr/>
           </a:p>
         </p:txBody>
       </p:sp>
@@ -17469,7 +16869,7 @@
 </file>
 
 <file path=ppt/slides/slide23.xml><?xml version="1.0" encoding="utf-8"?>
-<p:sld xmlns:a="http://schemas.openxmlformats.org/drawingml/2006/main" xmlns:r="http://schemas.openxmlformats.org/officeDocument/2006/relationships" xmlns:p="http://schemas.openxmlformats.org/presentationml/2006/main">
+<p:sld xmlns:a="http://schemas.openxmlformats.org/drawingml/2006/main" xmlns:p="http://schemas.openxmlformats.org/presentationml/2006/main" xmlns:r="http://schemas.openxmlformats.org/officeDocument/2006/relationships">
   <p:cSld>
     <p:spTree>
       <p:nvGrpSpPr>
@@ -17477,14 +16877,7 @@
         <p:cNvGrpSpPr/>
         <p:nvPr/>
       </p:nvGrpSpPr>
-      <p:grpSpPr>
-        <a:xfrm>
-          <a:off x="0" y="0"/>
-          <a:ext cx="0" cy="0"/>
-          <a:chOff x="0" y="0"/>
-          <a:chExt cx="0" cy="0"/>
-        </a:xfrm>
-      </p:grpSpPr>
+      <p:grpSpPr/>
       <p:sp>
         <p:nvSpPr>
           <p:cNvPr id="2" name="Rectangle 1"/>
@@ -17525,7 +16918,6 @@
           <a:lstStyle/>
           <a:p>
             <a:pPr algn="ctr"/>
-            <a:endParaRPr/>
           </a:p>
         </p:txBody>
       </p:sp>
@@ -17639,7 +17031,6 @@
           <a:lstStyle/>
           <a:p>
             <a:pPr algn="ctr"/>
-            <a:endParaRPr/>
           </a:p>
         </p:txBody>
       </p:sp>
@@ -17722,7 +17113,7 @@
         <p:spPr>
           <a:xfrm>
             <a:off x="320040" y="1051560"/>
-            <a:ext cx="11521440" cy="2194560"/>
+            <a:ext cx="11548872" cy="2194560"/>
           </a:xfrm>
           <a:prstGeom prst="rect">
             <a:avLst/>
@@ -17753,7 +17144,6 @@
           <a:lstStyle/>
           <a:p>
             <a:pPr algn="ctr"/>
-            <a:endParaRPr/>
           </a:p>
         </p:txBody>
       </p:sp>
@@ -17917,7 +17307,6 @@
           <a:lstStyle/>
           <a:p>
             <a:pPr algn="ctr"/>
-            <a:endParaRPr/>
           </a:p>
         </p:txBody>
       </p:sp>
@@ -18069,7 +17458,6 @@
           <a:lstStyle/>
           <a:p>
             <a:pPr algn="ctr"/>
-            <a:endParaRPr/>
           </a:p>
         </p:txBody>
       </p:sp>
@@ -18188,7 +17576,7 @@
 </file>
 
 <file path=ppt/slides/slide3.xml><?xml version="1.0" encoding="utf-8"?>
-<p:sld xmlns:a="http://schemas.openxmlformats.org/drawingml/2006/main" xmlns:r="http://schemas.openxmlformats.org/officeDocument/2006/relationships" xmlns:p="http://schemas.openxmlformats.org/presentationml/2006/main">
+<p:sld xmlns:a="http://schemas.openxmlformats.org/drawingml/2006/main" xmlns:p="http://schemas.openxmlformats.org/presentationml/2006/main" xmlns:r="http://schemas.openxmlformats.org/officeDocument/2006/relationships">
   <p:cSld>
     <p:spTree>
       <p:nvGrpSpPr>
@@ -18196,14 +17584,7 @@
         <p:cNvGrpSpPr/>
         <p:nvPr/>
       </p:nvGrpSpPr>
-      <p:grpSpPr>
-        <a:xfrm>
-          <a:off x="0" y="0"/>
-          <a:ext cx="0" cy="0"/>
-          <a:chOff x="0" y="0"/>
-          <a:chExt cx="0" cy="0"/>
-        </a:xfrm>
-      </p:grpSpPr>
+      <p:grpSpPr/>
       <p:sp>
         <p:nvSpPr>
           <p:cNvPr id="2" name="Rectangle 1"/>
@@ -18244,7 +17625,6 @@
           <a:lstStyle/>
           <a:p>
             <a:pPr algn="ctr"/>
-            <a:endParaRPr/>
           </a:p>
         </p:txBody>
       </p:sp>
@@ -18358,7 +17738,6 @@
           <a:lstStyle/>
           <a:p>
             <a:pPr algn="ctr"/>
-            <a:endParaRPr/>
           </a:p>
         </p:txBody>
       </p:sp>
@@ -18441,7 +17820,7 @@
         <p:spPr>
           <a:xfrm>
             <a:off x="320040" y="1005840"/>
-            <a:ext cx="11521440" cy="1463040"/>
+            <a:ext cx="11548872" cy="1463040"/>
           </a:xfrm>
           <a:prstGeom prst="rect">
             <a:avLst/>
@@ -18472,7 +17851,6 @@
           <a:lstStyle/>
           <a:p>
             <a:pPr algn="ctr"/>
-            <a:endParaRPr/>
           </a:p>
         </p:txBody>
       </p:sp>
@@ -18518,7 +17896,7 @@
                 </a:solidFill>
                 <a:latin typeface="游ゴシック"/>
               </a:rPr>
-              <a:t>・既製品は機能過多・高価。M5Stack + MAX31855 で必要最小限のツールを自作</a:t>
+              <a:t>・既製品は機能過多・高価。M5Stack Basic V2.7 + MAX31855 で必要最小限のツールを自作</a:t>
             </a:r>
           </a:p>
           <a:p>
@@ -18577,7 +17955,6 @@
           <a:lstStyle/>
           <a:p>
             <a:pPr algn="ctr"/>
-            <a:endParaRPr/>
           </a:p>
         </p:txBody>
       </p:sp>
@@ -18717,7 +18094,6 @@
           <a:lstStyle/>
           <a:p>
             <a:pPr algn="ctr"/>
-            <a:endParaRPr/>
           </a:p>
         </p:txBody>
       </p:sp>
@@ -18824,7 +18200,7 @@
 </file>
 
 <file path=ppt/slides/slide4.xml><?xml version="1.0" encoding="utf-8"?>
-<p:sld xmlns:a="http://schemas.openxmlformats.org/drawingml/2006/main" xmlns:r="http://schemas.openxmlformats.org/officeDocument/2006/relationships" xmlns:p="http://schemas.openxmlformats.org/presentationml/2006/main">
+<p:sld xmlns:a="http://schemas.openxmlformats.org/drawingml/2006/main" xmlns:p="http://schemas.openxmlformats.org/presentationml/2006/main" xmlns:r="http://schemas.openxmlformats.org/officeDocument/2006/relationships">
   <p:cSld>
     <p:spTree>
       <p:nvGrpSpPr>
@@ -18832,14 +18208,7 @@
         <p:cNvGrpSpPr/>
         <p:nvPr/>
       </p:nvGrpSpPr>
-      <p:grpSpPr>
-        <a:xfrm>
-          <a:off x="0" y="0"/>
-          <a:ext cx="0" cy="0"/>
-          <a:chOff x="0" y="0"/>
-          <a:chExt cx="0" cy="0"/>
-        </a:xfrm>
-      </p:grpSpPr>
+      <p:grpSpPr/>
       <p:sp>
         <p:nvSpPr>
           <p:cNvPr id="2" name="Rectangle 1"/>
@@ -18880,7 +18249,6 @@
           <a:lstStyle/>
           <a:p>
             <a:pPr algn="ctr"/>
-            <a:endParaRPr/>
           </a:p>
         </p:txBody>
       </p:sp>
@@ -18994,7 +18362,6 @@
           <a:lstStyle/>
           <a:p>
             <a:pPr algn="ctr"/>
-            <a:endParaRPr/>
           </a:p>
         </p:txBody>
       </p:sp>
@@ -19077,7 +18444,7 @@
         <p:spPr>
           <a:xfrm>
             <a:off x="320040" y="1005840"/>
-            <a:ext cx="5303520" cy="320040"/>
+            <a:ext cx="5303520" cy="365760"/>
           </a:xfrm>
           <a:prstGeom prst="rect">
             <a:avLst/>
@@ -19113,7 +18480,7 @@
         </p:nvGraphicFramePr>
         <p:xfrm>
           <a:off x="320040" y="1371600"/>
-          <a:ext cx="5303520" cy="2560320"/>
+          <a:ext cx="5303520" cy="2926080"/>
         </p:xfrm>
         <a:graphic>
           <a:graphicData uri="http://schemas.openxmlformats.org/drawingml/2006/table">
@@ -19122,27 +18489,9 @@
                 <a:tableStyleId>{5C22544A-7EE6-4342-B048-85BDC9FD1C3A}</a:tableStyleId>
               </a:tblPr>
               <a:tblGrid>
-                <a:gridCol w="2651760">
-                  <a:extLst>
-                    <a:ext uri="{9D8B030D-6E8A-4147-A177-3AD203B41FA5}">
-                      <a16:colId xmlns:a16="http://schemas.microsoft.com/office/drawing/2014/main" val="20000"/>
-                    </a:ext>
-                  </a:extLst>
-                </a:gridCol>
-                <a:gridCol w="1371600">
-                  <a:extLst>
-                    <a:ext uri="{9D8B030D-6E8A-4147-A177-3AD203B41FA5}">
-                      <a16:colId xmlns:a16="http://schemas.microsoft.com/office/drawing/2014/main" val="20001"/>
-                    </a:ext>
-                  </a:extLst>
-                </a:gridCol>
-                <a:gridCol w="1280160">
-                  <a:extLst>
-                    <a:ext uri="{9D8B030D-6E8A-4147-A177-3AD203B41FA5}">
-                      <a16:colId xmlns:a16="http://schemas.microsoft.com/office/drawing/2014/main" val="20002"/>
-                    </a:ext>
-                  </a:extLst>
-                </a:gridCol>
+                <a:gridCol w="2468880"/>
+                <a:gridCol w="1554480"/>
+                <a:gridCol w="1280160"/>
               </a:tblGrid>
               <a:tr h="365760">
                 <a:tc>
@@ -19181,7 +18530,7 @@
                           </a:solidFill>
                           <a:latin typeface="Segoe UI"/>
                         </a:rPr>
-                        <a:t>購入先目安</a:t>
+                        <a:t>購入先</a:t>
                       </a:r>
                     </a:p>
                   </a:txBody>
@@ -19214,11 +18563,6 @@
                     </a:solidFill>
                   </a:tcPr>
                 </a:tc>
-                <a:extLst>
-                  <a:ext uri="{0D108BD9-81ED-4DB2-BD59-A6C34878D82A}">
-                    <a16:rowId xmlns:a16="http://schemas.microsoft.com/office/drawing/2014/main" val="10000"/>
-                  </a:ext>
-                </a:extLst>
               </a:tr>
               <a:tr h="365760">
                 <a:tc>
@@ -19290,11 +18634,6 @@
                     </a:solidFill>
                   </a:tcPr>
                 </a:tc>
-                <a:extLst>
-                  <a:ext uri="{0D108BD9-81ED-4DB2-BD59-A6C34878D82A}">
-                    <a16:rowId xmlns:a16="http://schemas.microsoft.com/office/drawing/2014/main" val="10001"/>
-                  </a:ext>
-                </a:extLst>
               </a:tr>
               <a:tr h="365760">
                 <a:tc>
@@ -19310,7 +18649,7 @@
                           </a:solidFill>
                           <a:latin typeface="游ゴシック"/>
                         </a:rPr>
-                        <a:t>MAX31855 ブレークアウト</a:t>
+                        <a:t>M5Stack Proto Module</a:t>
                       </a:r>
                     </a:p>
                   </a:txBody>
@@ -19333,7 +18672,7 @@
                           </a:solidFill>
                           <a:latin typeface="游ゴシック"/>
                         </a:rPr>
-                        <a:t>秋月電子</a:t>
+                        <a:t>Amazon</a:t>
                       </a:r>
                     </a:p>
                   </a:txBody>
@@ -19356,7 +18695,7 @@
                           </a:solidFill>
                           <a:latin typeface="游ゴシック"/>
                         </a:rPr>
-                        <a:t>¥980</a:t>
+                        <a:t>¥1,198</a:t>
                       </a:r>
                     </a:p>
                   </a:txBody>
@@ -19366,11 +18705,6 @@
                     </a:solidFill>
                   </a:tcPr>
                 </a:tc>
-                <a:extLst>
-                  <a:ext uri="{0D108BD9-81ED-4DB2-BD59-A6C34878D82A}">
-                    <a16:rowId xmlns:a16="http://schemas.microsoft.com/office/drawing/2014/main" val="10002"/>
-                  </a:ext>
-                </a:extLst>
               </a:tr>
               <a:tr h="365760">
                 <a:tc>
@@ -19386,7 +18720,7 @@
                           </a:solidFill>
                           <a:latin typeface="游ゴシック"/>
                         </a:rPr>
-                        <a:t>K型熱電対 (1m)</a:t>
+                        <a:t>MAX31855 モジュール</a:t>
                       </a:r>
                     </a:p>
                   </a:txBody>
@@ -19409,7 +18743,7 @@
                           </a:solidFill>
                           <a:latin typeface="游ゴシック"/>
                         </a:rPr>
-                        <a:t>Amazon 等</a:t>
+                        <a:t>Amazon</a:t>
                       </a:r>
                     </a:p>
                   </a:txBody>
@@ -19432,7 +18766,7 @@
                           </a:solidFill>
                           <a:latin typeface="游ゴシック"/>
                         </a:rPr>
-                        <a:t>¥700</a:t>
+                        <a:t>¥904</a:t>
                       </a:r>
                     </a:p>
                   </a:txBody>
@@ -19442,11 +18776,6 @@
                     </a:solidFill>
                   </a:tcPr>
                 </a:tc>
-                <a:extLst>
-                  <a:ext uri="{0D108BD9-81ED-4DB2-BD59-A6C34878D82A}">
-                    <a16:rowId xmlns:a16="http://schemas.microsoft.com/office/drawing/2014/main" val="10003"/>
-                  </a:ext>
-                </a:extLst>
               </a:tr>
               <a:tr h="365760">
                 <a:tc>
@@ -19462,7 +18791,7 @@
                           </a:solidFill>
                           <a:latin typeface="游ゴシック"/>
                         </a:rPr>
-                        <a:t>MicroSD (16GB)</a:t>
+                        <a:t>K型熱電対 600℃対応</a:t>
                       </a:r>
                     </a:p>
                   </a:txBody>
@@ -19485,7 +18814,7 @@
                           </a:solidFill>
                           <a:latin typeface="游ゴシック"/>
                         </a:rPr>
-                        <a:t>量販店</a:t>
+                        <a:t>MISUMI</a:t>
                       </a:r>
                     </a:p>
                   </a:txBody>
@@ -19508,7 +18837,7 @@
                           </a:solidFill>
                           <a:latin typeface="游ゴシック"/>
                         </a:rPr>
-                        <a:t>¥600</a:t>
+                        <a:t>¥5,290</a:t>
                       </a:r>
                     </a:p>
                   </a:txBody>
@@ -19518,11 +18847,6 @@
                     </a:solidFill>
                   </a:tcPr>
                 </a:tc>
-                <a:extLst>
-                  <a:ext uri="{0D108BD9-81ED-4DB2-BD59-A6C34878D82A}">
-                    <a16:rowId xmlns:a16="http://schemas.microsoft.com/office/drawing/2014/main" val="10004"/>
-                  </a:ext>
-                </a:extLst>
               </a:tr>
               <a:tr h="365760">
                 <a:tc>
@@ -19538,7 +18862,7 @@
                           </a:solidFill>
                           <a:latin typeface="游ゴシック"/>
                         </a:rPr>
-                        <a:t>ジャンパワイヤ</a:t>
+                        <a:t>ジャンパワイヤ（オス-メス）</a:t>
                       </a:r>
                     </a:p>
                   </a:txBody>
@@ -19561,7 +18885,7 @@
                           </a:solidFill>
                           <a:latin typeface="游ゴシック"/>
                         </a:rPr>
-                        <a:t>秋月電子</a:t>
+                        <a:t>Amazon</a:t>
                       </a:r>
                     </a:p>
                   </a:txBody>
@@ -19584,7 +18908,7 @@
                           </a:solidFill>
                           <a:latin typeface="游ゴシック"/>
                         </a:rPr>
-                        <a:t>¥200</a:t>
+                        <a:t>¥700</a:t>
                       </a:r>
                     </a:p>
                   </a:txBody>
@@ -19594,11 +18918,6 @@
                     </a:solidFill>
                   </a:tcPr>
                 </a:tc>
-                <a:extLst>
-                  <a:ext uri="{0D108BD9-81ED-4DB2-BD59-A6C34878D82A}">
-                    <a16:rowId xmlns:a16="http://schemas.microsoft.com/office/drawing/2014/main" val="10005"/>
-                  </a:ext>
-                </a:extLst>
               </a:tr>
               <a:tr h="365760">
                 <a:tc>
@@ -19608,6 +18927,77 @@
                     <a:p>
                       <a:pPr algn="l"/>
                       <a:r>
+                        <a:rPr sz="1200" b="0">
+                          <a:solidFill>
+                            <a:srgbClr val="1A1A2E"/>
+                          </a:solidFill>
+                          <a:latin typeface="游ゴシック"/>
+                        </a:rPr>
+                        <a:t>MicroSD カード</a:t>
+                      </a:r>
+                    </a:p>
+                  </a:txBody>
+                  <a:tcPr>
+                    <a:solidFill>
+                      <a:srgbClr val="F4F4F4"/>
+                    </a:solidFill>
+                  </a:tcPr>
+                </a:tc>
+                <a:tc>
+                  <a:txBody>
+                    <a:bodyPr/>
+                    <a:lstStyle/>
+                    <a:p>
+                      <a:pPr algn="l"/>
+                      <a:r>
+                        <a:rPr sz="1200" b="0">
+                          <a:solidFill>
+                            <a:srgbClr val="1A1A2E"/>
+                          </a:solidFill>
+                          <a:latin typeface="游ゴシック"/>
+                        </a:rPr>
+                        <a:t>Amazon</a:t>
+                      </a:r>
+                    </a:p>
+                  </a:txBody>
+                  <a:tcPr>
+                    <a:solidFill>
+                      <a:srgbClr val="F4F4F4"/>
+                    </a:solidFill>
+                  </a:tcPr>
+                </a:tc>
+                <a:tc>
+                  <a:txBody>
+                    <a:bodyPr/>
+                    <a:lstStyle/>
+                    <a:p>
+                      <a:pPr algn="l"/>
+                      <a:r>
+                        <a:rPr sz="1200" b="0">
+                          <a:solidFill>
+                            <a:srgbClr val="1A1A2E"/>
+                          </a:solidFill>
+                          <a:latin typeface="游ゴシック"/>
+                        </a:rPr>
+                        <a:t>〜¥1,000</a:t>
+                      </a:r>
+                    </a:p>
+                  </a:txBody>
+                  <a:tcPr>
+                    <a:solidFill>
+                      <a:srgbClr val="F4F4F4"/>
+                    </a:solidFill>
+                  </a:tcPr>
+                </a:tc>
+              </a:tr>
+              <a:tr h="365760">
+                <a:tc>
+                  <a:txBody>
+                    <a:bodyPr/>
+                    <a:lstStyle/>
+                    <a:p>
+                      <a:pPr algn="l"/>
+                      <a:r>
                         <a:rPr sz="1200" b="1">
                           <a:solidFill>
                             <a:srgbClr val="FFFFFF"/>
@@ -19660,7 +19050,7 @@
                           </a:solidFill>
                           <a:latin typeface="游ゴシック"/>
                         </a:rPr>
-                        <a:t>¥9,570</a:t>
+                        <a:t>約¥17,082</a:t>
                       </a:r>
                     </a:p>
                   </a:txBody>
@@ -19670,11 +19060,6 @@
                     </a:solidFill>
                   </a:tcPr>
                 </a:tc>
-                <a:extLst>
-                  <a:ext uri="{0D108BD9-81ED-4DB2-BD59-A6C34878D82A}">
-                    <a16:rowId xmlns:a16="http://schemas.microsoft.com/office/drawing/2014/main" val="10006"/>
-                  </a:ext>
-                </a:extLst>
               </a:tr>
             </a:tbl>
           </a:graphicData>
@@ -19689,7 +19074,7 @@
         <p:spPr>
           <a:xfrm>
             <a:off x="5943600" y="1005840"/>
-            <a:ext cx="5925312" cy="320040"/>
+            <a:ext cx="5925312" cy="365760"/>
           </a:xfrm>
           <a:prstGeom prst="rect">
             <a:avLst/>
@@ -19725,7 +19110,7 @@
         </p:nvGraphicFramePr>
         <p:xfrm>
           <a:off x="5943600" y="1371600"/>
-          <a:ext cx="5925312" cy="1645920"/>
+          <a:ext cx="5925312" cy="1463040"/>
         </p:xfrm>
         <a:graphic>
           <a:graphicData uri="http://schemas.openxmlformats.org/drawingml/2006/table">
@@ -19734,27 +19119,9 @@
                 <a:tableStyleId>{5C22544A-7EE6-4342-B048-85BDC9FD1C3A}</a:tableStyleId>
               </a:tblPr>
               <a:tblGrid>
-                <a:gridCol w="2560320">
-                  <a:extLst>
-                    <a:ext uri="{9D8B030D-6E8A-4147-A177-3AD203B41FA5}">
-                      <a16:colId xmlns:a16="http://schemas.microsoft.com/office/drawing/2014/main" val="20000"/>
-                    </a:ext>
-                  </a:extLst>
-                </a:gridCol>
-                <a:gridCol w="1993392">
-                  <a:extLst>
-                    <a:ext uri="{9D8B030D-6E8A-4147-A177-3AD203B41FA5}">
-                      <a16:colId xmlns:a16="http://schemas.microsoft.com/office/drawing/2014/main" val="20001"/>
-                    </a:ext>
-                  </a:extLst>
-                </a:gridCol>
-                <a:gridCol w="1371600">
-                  <a:extLst>
-                    <a:ext uri="{9D8B030D-6E8A-4147-A177-3AD203B41FA5}">
-                      <a16:colId xmlns:a16="http://schemas.microsoft.com/office/drawing/2014/main" val="20002"/>
-                    </a:ext>
-                  </a:extLst>
-                </a:gridCol>
+                <a:gridCol w="2560320"/>
+                <a:gridCol w="1993392"/>
+                <a:gridCol w="1371600"/>
               </a:tblGrid>
               <a:tr h="365760">
                 <a:tc>
@@ -19826,11 +19193,6 @@
                     </a:solidFill>
                   </a:tcPr>
                 </a:tc>
-                <a:extLst>
-                  <a:ext uri="{0D108BD9-81ED-4DB2-BD59-A6C34878D82A}">
-                    <a16:rowId xmlns:a16="http://schemas.microsoft.com/office/drawing/2014/main" val="10000"/>
-                  </a:ext>
-                </a:extLst>
               </a:tr>
               <a:tr h="365760">
                 <a:tc>
@@ -19869,7 +19231,7 @@
                           </a:solidFill>
                           <a:latin typeface="游ゴシック"/>
                         </a:rPr>
-                        <a:t>M5Stack + MAX31855</a:t>
+                        <a:t>M5Stack Basic V2.7 + MAX31855</a:t>
                       </a:r>
                     </a:p>
                   </a:txBody>
@@ -19892,7 +19254,7 @@
                           </a:solidFill>
                           <a:latin typeface="游ゴシック"/>
                         </a:rPr>
-                        <a:t>¥9,570</a:t>
+                        <a:t>約¥17,082</a:t>
                       </a:r>
                     </a:p>
                   </a:txBody>
@@ -19902,11 +19264,6 @@
                     </a:solidFill>
                   </a:tcPr>
                 </a:tc>
-                <a:extLst>
-                  <a:ext uri="{0D108BD9-81ED-4DB2-BD59-A6C34878D82A}">
-                    <a16:rowId xmlns:a16="http://schemas.microsoft.com/office/drawing/2014/main" val="10001"/>
-                  </a:ext>
-                </a:extLst>
               </a:tr>
               <a:tr h="365760">
                 <a:tc>
@@ -19978,11 +19335,6 @@
                     </a:solidFill>
                   </a:tcPr>
                 </a:tc>
-                <a:extLst>
-                  <a:ext uri="{0D108BD9-81ED-4DB2-BD59-A6C34878D82A}">
-                    <a16:rowId xmlns:a16="http://schemas.microsoft.com/office/drawing/2014/main" val="10002"/>
-                  </a:ext>
-                </a:extLst>
               </a:tr>
               <a:tr h="365760">
                 <a:tc>
@@ -20044,7 +19396,7 @@
                           </a:solidFill>
                           <a:latin typeface="游ゴシック"/>
                         </a:rPr>
-                        <a:t>¥100,000〜¥250,000+</a:t>
+                        <a:t>¥100,000〜¥300,000+</a:t>
                       </a:r>
                     </a:p>
                   </a:txBody>
@@ -20054,11 +19406,6 @@
                     </a:solidFill>
                   </a:tcPr>
                 </a:tc>
-                <a:extLst>
-                  <a:ext uri="{0D108BD9-81ED-4DB2-BD59-A6C34878D82A}">
-                    <a16:rowId xmlns:a16="http://schemas.microsoft.com/office/drawing/2014/main" val="10003"/>
-                  </a:ext>
-                </a:extLst>
               </a:tr>
             </a:tbl>
           </a:graphicData>
@@ -20073,7 +19420,7 @@
         <p:spPr>
           <a:xfrm>
             <a:off x="320040" y="3977639"/>
-            <a:ext cx="11521440" cy="1280160"/>
+            <a:ext cx="11548872" cy="1280160"/>
           </a:xfrm>
           <a:prstGeom prst="rect">
             <a:avLst/>
@@ -20104,7 +19451,6 @@
           <a:lstStyle/>
           <a:p>
             <a:pPr algn="ctr"/>
-            <a:endParaRPr/>
           </a:p>
         </p:txBody>
       </p:sp>
@@ -20138,7 +19484,7 @@
                 </a:solidFill>
                 <a:latin typeface="游ゴシック"/>
               </a:rPr>
-              <a:t>標準製品の 1/3.1 の価格で同等機能を実現</a:t>
+              <a:t>標準製品の約 1/1.8 の価格で同等機能を実現</a:t>
             </a:r>
           </a:p>
         </p:txBody>
@@ -20173,56 +19519,21 @@
                 </a:solidFill>
                 <a:latin typeface="游ゴシック"/>
               </a:rPr>
-              <a:t>本ツール ¥9,570 vs 標準ロガー ¥30,000〜 → 最大 ¥20,000 以上削減</a:t>
-            </a:r>
-          </a:p>
-        </p:txBody>
-      </p:sp>
-      <p:sp>
-        <p:nvSpPr>
-          <p:cNvPr id="15" name="TextBox 14"/>
-          <p:cNvSpPr txBox="1"/>
-          <p:nvPr/>
-        </p:nvSpPr>
-        <p:spPr>
-          <a:xfrm>
-            <a:off x="457200" y="5212080"/>
-            <a:ext cx="11247120" cy="320040"/>
-          </a:xfrm>
-          <a:prstGeom prst="rect">
-            <a:avLst/>
-          </a:prstGeom>
-          <a:noFill/>
-        </p:spPr>
-        <p:txBody>
-          <a:bodyPr wrap="square">
-            <a:spAutoFit/>
-          </a:bodyPr>
-          <a:lstStyle/>
-          <a:p>
-            <a:pPr algn="ctr"/>
-            <a:r>
-              <a:rPr sz="1200" b="0" i="0">
-                <a:solidFill>
-                  <a:srgbClr val="FFFFFF"/>
-                </a:solidFill>
-                <a:latin typeface="游ゴシック"/>
-              </a:rPr>
-              <a:t>（SD 自動記録 ・ LCD リアルタイム表示 ・ 上下限アラーム機能 完全実装）</a:t>
-            </a:r>
-          </a:p>
-        </p:txBody>
-      </p:sp>
-      <p:sp>
-        <p:nvSpPr>
-          <p:cNvPr id="16" name="Rectangle 15"/>
+              <a:t>本ツール 約¥17,082 vs 標準ロガー ¥30,000〜 → 最大 ¥13,000 以上削減</a:t>
+            </a:r>
+          </a:p>
+        </p:txBody>
+      </p:sp>
+      <p:sp>
+        <p:nvSpPr>
+          <p:cNvPr id="15" name="Rectangle 14"/>
           <p:cNvSpPr/>
           <p:nvPr/>
         </p:nvSpPr>
         <p:spPr>
           <a:xfrm>
             <a:off x="320040" y="5349240"/>
-            <a:ext cx="11521440" cy="914400"/>
+            <a:ext cx="11548872" cy="914400"/>
           </a:xfrm>
           <a:prstGeom prst="rect">
             <a:avLst/>
@@ -20253,13 +19564,12 @@
           <a:lstStyle/>
           <a:p>
             <a:pPr algn="ctr"/>
-            <a:endParaRPr/>
-          </a:p>
-        </p:txBody>
-      </p:sp>
-      <p:sp>
-        <p:nvSpPr>
-          <p:cNvPr id="17" name="TextBox 16"/>
+          </a:p>
+        </p:txBody>
+      </p:sp>
+      <p:sp>
+        <p:nvSpPr>
+          <p:cNvPr id="16" name="TextBox 15"/>
           <p:cNvSpPr txBox="1"/>
           <p:nvPr/>
         </p:nvSpPr>
@@ -20313,7 +19623,7 @@
 </file>
 
 <file path=ppt/slides/slide5.xml><?xml version="1.0" encoding="utf-8"?>
-<p:sld xmlns:a="http://schemas.openxmlformats.org/drawingml/2006/main" xmlns:r="http://schemas.openxmlformats.org/officeDocument/2006/relationships" xmlns:p="http://schemas.openxmlformats.org/presentationml/2006/main">
+<p:sld xmlns:a="http://schemas.openxmlformats.org/drawingml/2006/main" xmlns:p="http://schemas.openxmlformats.org/presentationml/2006/main" xmlns:r="http://schemas.openxmlformats.org/officeDocument/2006/relationships">
   <p:cSld>
     <p:spTree>
       <p:nvGrpSpPr>
@@ -20321,14 +19631,7 @@
         <p:cNvGrpSpPr/>
         <p:nvPr/>
       </p:nvGrpSpPr>
-      <p:grpSpPr>
-        <a:xfrm>
-          <a:off x="0" y="0"/>
-          <a:ext cx="0" cy="0"/>
-          <a:chOff x="0" y="0"/>
-          <a:chExt cx="0" cy="0"/>
-        </a:xfrm>
-      </p:grpSpPr>
+      <p:grpSpPr/>
       <p:sp>
         <p:nvSpPr>
           <p:cNvPr id="2" name="Rectangle 1"/>
@@ -20369,7 +19672,6 @@
           <a:lstStyle/>
           <a:p>
             <a:pPr algn="ctr"/>
-            <a:endParaRPr/>
           </a:p>
         </p:txBody>
       </p:sp>
@@ -20483,7 +19785,6 @@
           <a:lstStyle/>
           <a:p>
             <a:pPr algn="ctr"/>
-            <a:endParaRPr/>
           </a:p>
         </p:txBody>
       </p:sp>
@@ -20597,7 +19898,6 @@
           <a:lstStyle/>
           <a:p>
             <a:pPr algn="ctr"/>
-            <a:endParaRPr/>
           </a:p>
         </p:txBody>
       </p:sp>
@@ -20719,12 +20019,15 @@
           </a:p>
           <a:p>
             <a:pPr algn="ctr"/>
-            <a:endParaRPr sz="1300" b="0" i="0">
-              <a:solidFill>
-                <a:srgbClr val="1A1A2E"/>
-              </a:solidFill>
-              <a:latin typeface="游ゴシック"/>
-            </a:endParaRPr>
+            <a:r>
+              <a:rPr sz="1300" b="0" i="0">
+                <a:solidFill>
+                  <a:srgbClr val="1A1A2E"/>
+                </a:solidFill>
+                <a:latin typeface="游ゴシック"/>
+              </a:rPr>
+              <a:t/>
+            </a:r>
           </a:p>
           <a:p>
             <a:pPr algn="ctr"/>
@@ -20839,7 +20142,6 @@
           <a:lstStyle/>
           <a:p>
             <a:pPr algn="ctr"/>
-            <a:endParaRPr/>
           </a:p>
         </p:txBody>
       </p:sp>
@@ -21048,7 +20350,6 @@
           <a:lstStyle/>
           <a:p>
             <a:pPr algn="ctr"/>
-            <a:endParaRPr/>
           </a:p>
         </p:txBody>
       </p:sp>
@@ -21134,12 +20435,15 @@
           </a:p>
           <a:p>
             <a:pPr algn="ctr"/>
-            <a:endParaRPr sz="1300" b="0" i="0">
-              <a:solidFill>
-                <a:srgbClr val="1A1A2E"/>
-              </a:solidFill>
-              <a:latin typeface="游ゴシック"/>
-            </a:endParaRPr>
+            <a:r>
+              <a:rPr sz="1300" b="0" i="0">
+                <a:solidFill>
+                  <a:srgbClr val="1A1A2E"/>
+                </a:solidFill>
+                <a:latin typeface="游ゴシック"/>
+              </a:rPr>
+              <a:t/>
+            </a:r>
           </a:p>
           <a:p>
             <a:pPr algn="ctr"/>
@@ -21167,12 +20471,15 @@
           </a:p>
           <a:p>
             <a:pPr algn="ctr"/>
-            <a:endParaRPr sz="1300" b="0" i="0">
-              <a:solidFill>
-                <a:srgbClr val="1A1A2E"/>
-              </a:solidFill>
-              <a:latin typeface="游ゴシック"/>
-            </a:endParaRPr>
+            <a:r>
+              <a:rPr sz="1300" b="0" i="0">
+                <a:solidFill>
+                  <a:srgbClr val="1A1A2E"/>
+                </a:solidFill>
+                <a:latin typeface="游ゴシック"/>
+              </a:rPr>
+              <a:t/>
+            </a:r>
           </a:p>
           <a:p>
             <a:pPr algn="ctr"/>
@@ -21209,7 +20516,7 @@
 </file>
 
 <file path=ppt/slides/slide6.xml><?xml version="1.0" encoding="utf-8"?>
-<p:sld xmlns:a="http://schemas.openxmlformats.org/drawingml/2006/main" xmlns:r="http://schemas.openxmlformats.org/officeDocument/2006/relationships" xmlns:p="http://schemas.openxmlformats.org/presentationml/2006/main">
+<p:sld xmlns:a="http://schemas.openxmlformats.org/drawingml/2006/main" xmlns:p="http://schemas.openxmlformats.org/presentationml/2006/main" xmlns:r="http://schemas.openxmlformats.org/officeDocument/2006/relationships">
   <p:cSld>
     <p:spTree>
       <p:nvGrpSpPr>
@@ -21217,14 +20524,7 @@
         <p:cNvGrpSpPr/>
         <p:nvPr/>
       </p:nvGrpSpPr>
-      <p:grpSpPr>
-        <a:xfrm>
-          <a:off x="0" y="0"/>
-          <a:ext cx="0" cy="0"/>
-          <a:chOff x="0" y="0"/>
-          <a:chExt cx="0" cy="0"/>
-        </a:xfrm>
-      </p:grpSpPr>
+      <p:grpSpPr/>
       <p:sp>
         <p:nvSpPr>
           <p:cNvPr id="2" name="Rectangle 1"/>
@@ -21265,7 +20565,6 @@
           <a:lstStyle/>
           <a:p>
             <a:pPr algn="ctr"/>
-            <a:endParaRPr/>
           </a:p>
         </p:txBody>
       </p:sp>
@@ -21379,7 +20678,6 @@
           <a:lstStyle/>
           <a:p>
             <a:pPr algn="ctr"/>
-            <a:endParaRPr/>
           </a:p>
         </p:txBody>
       </p:sp>
@@ -21472,27 +20770,9 @@
                 <a:tableStyleId>{5C22544A-7EE6-4342-B048-85BDC9FD1C3A}</a:tableStyleId>
               </a:tblPr>
               <a:tblGrid>
-                <a:gridCol w="2286000">
-                  <a:extLst>
-                    <a:ext uri="{9D8B030D-6E8A-4147-A177-3AD203B41FA5}">
-                      <a16:colId xmlns:a16="http://schemas.microsoft.com/office/drawing/2014/main" val="20000"/>
-                    </a:ext>
-                  </a:extLst>
-                </a:gridCol>
-                <a:gridCol w="4114800">
-                  <a:extLst>
-                    <a:ext uri="{9D8B030D-6E8A-4147-A177-3AD203B41FA5}">
-                      <a16:colId xmlns:a16="http://schemas.microsoft.com/office/drawing/2014/main" val="20001"/>
-                    </a:ext>
-                  </a:extLst>
-                </a:gridCol>
-                <a:gridCol w="5120640">
-                  <a:extLst>
-                    <a:ext uri="{9D8B030D-6E8A-4147-A177-3AD203B41FA5}">
-                      <a16:colId xmlns:a16="http://schemas.microsoft.com/office/drawing/2014/main" val="20002"/>
-                    </a:ext>
-                  </a:extLst>
-                </a:gridCol>
+                <a:gridCol w="2286000"/>
+                <a:gridCol w="4114800"/>
+                <a:gridCol w="5120640"/>
               </a:tblGrid>
               <a:tr h="457200">
                 <a:tc>
@@ -21564,11 +20844,6 @@
                     </a:solidFill>
                   </a:tcPr>
                 </a:tc>
-                <a:extLst>
-                  <a:ext uri="{0D108BD9-81ED-4DB2-BD59-A6C34878D82A}">
-                    <a16:rowId xmlns:a16="http://schemas.microsoft.com/office/drawing/2014/main" val="10000"/>
-                  </a:ext>
-                </a:extLst>
               </a:tr>
               <a:tr h="457200">
                 <a:tc>
@@ -21607,7 +20882,7 @@
                           </a:solidFill>
                           <a:latin typeface="游ゴシック"/>
                         </a:rPr>
-                        <a:t>M5Stack Core2 (ESP32)</a:t>
+                        <a:t>M5Stack Basic V2.7 (ESP32)</a:t>
                       </a:r>
                     </a:p>
                   </a:txBody>
@@ -21640,11 +20915,6 @@
                     </a:solidFill>
                   </a:tcPr>
                 </a:tc>
-                <a:extLst>
-                  <a:ext uri="{0D108BD9-81ED-4DB2-BD59-A6C34878D82A}">
-                    <a16:rowId xmlns:a16="http://schemas.microsoft.com/office/drawing/2014/main" val="10001"/>
-                  </a:ext>
-                </a:extLst>
               </a:tr>
               <a:tr h="457200">
                 <a:tc>
@@ -21716,11 +20986,6 @@
                     </a:solidFill>
                   </a:tcPr>
                 </a:tc>
-                <a:extLst>
-                  <a:ext uri="{0D108BD9-81ED-4DB2-BD59-A6C34878D82A}">
-                    <a16:rowId xmlns:a16="http://schemas.microsoft.com/office/drawing/2014/main" val="10002"/>
-                  </a:ext>
-                </a:extLst>
               </a:tr>
               <a:tr h="457200">
                 <a:tc>
@@ -21792,11 +21057,6 @@
                     </a:solidFill>
                   </a:tcPr>
                 </a:tc>
-                <a:extLst>
-                  <a:ext uri="{0D108BD9-81ED-4DB2-BD59-A6C34878D82A}">
-                    <a16:rowId xmlns:a16="http://schemas.microsoft.com/office/drawing/2014/main" val="10003"/>
-                  </a:ext>
-                </a:extLst>
               </a:tr>
               <a:tr h="457200">
                 <a:tc>
@@ -21868,11 +21128,6 @@
                     </a:solidFill>
                   </a:tcPr>
                 </a:tc>
-                <a:extLst>
-                  <a:ext uri="{0D108BD9-81ED-4DB2-BD59-A6C34878D82A}">
-                    <a16:rowId xmlns:a16="http://schemas.microsoft.com/office/drawing/2014/main" val="10004"/>
-                  </a:ext>
-                </a:extLst>
               </a:tr>
               <a:tr h="457200">
                 <a:tc>
@@ -21944,11 +21199,6 @@
                     </a:solidFill>
                   </a:tcPr>
                 </a:tc>
-                <a:extLst>
-                  <a:ext uri="{0D108BD9-81ED-4DB2-BD59-A6C34878D82A}">
-                    <a16:rowId xmlns:a16="http://schemas.microsoft.com/office/drawing/2014/main" val="10005"/>
-                  </a:ext>
-                </a:extLst>
               </a:tr>
               <a:tr h="457200">
                 <a:tc>
@@ -22020,11 +21270,6 @@
                     </a:solidFill>
                   </a:tcPr>
                 </a:tc>
-                <a:extLst>
-                  <a:ext uri="{0D108BD9-81ED-4DB2-BD59-A6C34878D82A}">
-                    <a16:rowId xmlns:a16="http://schemas.microsoft.com/office/drawing/2014/main" val="10006"/>
-                  </a:ext>
-                </a:extLst>
               </a:tr>
               <a:tr h="457200">
                 <a:tc>
@@ -22096,11 +21341,6 @@
                     </a:solidFill>
                   </a:tcPr>
                 </a:tc>
-                <a:extLst>
-                  <a:ext uri="{0D108BD9-81ED-4DB2-BD59-A6C34878D82A}">
-                    <a16:rowId xmlns:a16="http://schemas.microsoft.com/office/drawing/2014/main" val="10007"/>
-                  </a:ext>
-                </a:extLst>
               </a:tr>
             </a:tbl>
           </a:graphicData>
@@ -22108,14 +21348,57 @@
       </p:graphicFrame>
       <p:sp>
         <p:nvSpPr>
-          <p:cNvPr id="9" name="TextBox 8"/>
+          <p:cNvPr id="9" name="Rectangle 8"/>
+          <p:cNvSpPr/>
+          <p:nvPr/>
+        </p:nvSpPr>
+        <p:spPr>
+          <a:xfrm>
+            <a:off x="320040" y="4846320"/>
+            <a:ext cx="11548872" cy="502920"/>
+          </a:xfrm>
+          <a:prstGeom prst="rect">
+            <a:avLst/>
+          </a:prstGeom>
+          <a:solidFill>
+            <a:srgbClr val="F4F4F4"/>
+          </a:solidFill>
+          <a:ln>
+            <a:noFill/>
+          </a:ln>
+        </p:spPr>
+        <p:style>
+          <a:lnRef idx="1">
+            <a:schemeClr val="accent1"/>
+          </a:lnRef>
+          <a:fillRef idx="3">
+            <a:schemeClr val="accent1"/>
+          </a:fillRef>
+          <a:effectRef idx="2">
+            <a:schemeClr val="accent1"/>
+          </a:effectRef>
+          <a:fontRef idx="minor">
+            <a:schemeClr val="lt1"/>
+          </a:fontRef>
+        </p:style>
+        <p:txBody>
+          <a:bodyPr rtlCol="0" anchor="ctr"/>
+          <a:lstStyle/>
+          <a:p>
+            <a:pPr algn="ctr"/>
+          </a:p>
+        </p:txBody>
+      </p:sp>
+      <p:sp>
+        <p:nvSpPr>
+          <p:cNvPr id="10" name="TextBox 9"/>
           <p:cNvSpPr txBox="1"/>
           <p:nvPr/>
         </p:nvSpPr>
         <p:spPr>
           <a:xfrm>
-            <a:off x="320040" y="5166360"/>
-            <a:ext cx="11521440" cy="365760"/>
+            <a:off x="502920" y="4910328"/>
+            <a:ext cx="11155680" cy="384048"/>
           </a:xfrm>
           <a:prstGeom prst="rect">
             <a:avLst/>
@@ -22130,13 +21413,13 @@
           <a:p>
             <a:pPr algn="l"/>
             <a:r>
-              <a:rPr sz="1200" b="0" i="1">
-                <a:solidFill>
-                  <a:srgbClr val="999999"/>
+              <a:rPr sz="1200" b="0" i="0">
+                <a:solidFill>
+                  <a:srgbClr val="1A1A2E"/>
                 </a:solidFill>
                 <a:latin typeface="游ゴシック"/>
               </a:rPr>
-              <a:t>※ MicroSD ジャケットは M5Stack 本体内蔵。MAX31855 は別途 SPI 接続ブレークアウト基板を使用。</a:t>
+              <a:t>※ MicroSD スロットは M5Stack 本体内蔵。MAX31855 は別途 SPI 接続ブレークアウト基板を使用。</a:t>
             </a:r>
           </a:p>
         </p:txBody>
@@ -22150,7 +21433,7 @@
 </file>
 
 <file path=ppt/slides/slide7.xml><?xml version="1.0" encoding="utf-8"?>
-<p:sld xmlns:a="http://schemas.openxmlformats.org/drawingml/2006/main" xmlns:r="http://schemas.openxmlformats.org/officeDocument/2006/relationships" xmlns:p="http://schemas.openxmlformats.org/presentationml/2006/main">
+<p:sld xmlns:a="http://schemas.openxmlformats.org/drawingml/2006/main" xmlns:p="http://schemas.openxmlformats.org/presentationml/2006/main" xmlns:r="http://schemas.openxmlformats.org/officeDocument/2006/relationships">
   <p:cSld>
     <p:spTree>
       <p:nvGrpSpPr>
@@ -22158,14 +21441,7 @@
         <p:cNvGrpSpPr/>
         <p:nvPr/>
       </p:nvGrpSpPr>
-      <p:grpSpPr>
-        <a:xfrm>
-          <a:off x="0" y="0"/>
-          <a:ext cx="0" cy="0"/>
-          <a:chOff x="0" y="0"/>
-          <a:chExt cx="0" cy="0"/>
-        </a:xfrm>
-      </p:grpSpPr>
+      <p:grpSpPr/>
       <p:sp>
         <p:nvSpPr>
           <p:cNvPr id="2" name="Rectangle 1"/>
@@ -22206,7 +21482,6 @@
           <a:lstStyle/>
           <a:p>
             <a:pPr algn="ctr"/>
-            <a:endParaRPr/>
           </a:p>
         </p:txBody>
       </p:sp>
@@ -22320,7 +21595,6 @@
           <a:lstStyle/>
           <a:p>
             <a:pPr algn="ctr"/>
-            <a:endParaRPr/>
           </a:p>
         </p:txBody>
       </p:sp>
@@ -22402,8 +21676,8 @@
         </p:nvSpPr>
         <p:spPr>
           <a:xfrm>
-            <a:off x="320040" y="1051560"/>
-            <a:ext cx="11521440" cy="320040"/>
+            <a:off x="320040" y="1005840"/>
+            <a:ext cx="11548872" cy="411480"/>
           </a:xfrm>
           <a:prstGeom prst="rect">
             <a:avLst/>
@@ -22418,9 +21692,9 @@
           <a:p>
             <a:pPr algn="l"/>
             <a:r>
-              <a:rPr sz="1600" b="1" i="0">
-                <a:solidFill>
-                  <a:srgbClr val="0D477F"/>
+              <a:rPr sz="1400" b="0" i="0">
+                <a:solidFill>
+                  <a:srgbClr val="1A1A2E"/>
                 </a:solidFill>
                 <a:latin typeface="游ゴシック"/>
               </a:rPr>
@@ -22438,7 +21712,7 @@
           <p:nvPr/>
         </p:nvGraphicFramePr>
         <p:xfrm>
-          <a:off x="320040" y="1417320"/>
+          <a:off x="320040" y="1508760"/>
           <a:ext cx="11521439" cy="2468880"/>
         </p:xfrm>
         <a:graphic>
@@ -22448,34 +21722,10 @@
                 <a:tableStyleId>{5C22544A-7EE6-4342-B048-85BDC9FD1C3A}</a:tableStyleId>
               </a:tblPr>
               <a:tblGrid>
-                <a:gridCol w="1828800">
-                  <a:extLst>
-                    <a:ext uri="{9D8B030D-6E8A-4147-A177-3AD203B41FA5}">
-                      <a16:colId xmlns:a16="http://schemas.microsoft.com/office/drawing/2014/main" val="20000"/>
-                    </a:ext>
-                  </a:extLst>
-                </a:gridCol>
-                <a:gridCol w="2286000">
-                  <a:extLst>
-                    <a:ext uri="{9D8B030D-6E8A-4147-A177-3AD203B41FA5}">
-                      <a16:colId xmlns:a16="http://schemas.microsoft.com/office/drawing/2014/main" val="20001"/>
-                    </a:ext>
-                  </a:extLst>
-                </a:gridCol>
-                <a:gridCol w="3657600">
-                  <a:extLst>
-                    <a:ext uri="{9D8B030D-6E8A-4147-A177-3AD203B41FA5}">
-                      <a16:colId xmlns:a16="http://schemas.microsoft.com/office/drawing/2014/main" val="20002"/>
-                    </a:ext>
-                  </a:extLst>
-                </a:gridCol>
-                <a:gridCol w="3749039">
-                  <a:extLst>
-                    <a:ext uri="{9D8B030D-6E8A-4147-A177-3AD203B41FA5}">
-                      <a16:colId xmlns:a16="http://schemas.microsoft.com/office/drawing/2014/main" val="20003"/>
-                    </a:ext>
-                  </a:extLst>
-                </a:gridCol>
+                <a:gridCol w="1828800"/>
+                <a:gridCol w="2286000"/>
+                <a:gridCol w="3657600"/>
+                <a:gridCol w="3749039"/>
               </a:tblGrid>
               <a:tr h="411480">
                 <a:tc>
@@ -22570,11 +21820,6 @@
                     </a:solidFill>
                   </a:tcPr>
                 </a:tc>
-                <a:extLst>
-                  <a:ext uri="{0D108BD9-81ED-4DB2-BD59-A6C34878D82A}">
-                    <a16:rowId xmlns:a16="http://schemas.microsoft.com/office/drawing/2014/main" val="10000"/>
-                  </a:ext>
-                </a:extLst>
               </a:tr>
               <a:tr h="411480">
                 <a:tc>
@@ -22669,11 +21914,6 @@
                     </a:solidFill>
                   </a:tcPr>
                 </a:tc>
-                <a:extLst>
-                  <a:ext uri="{0D108BD9-81ED-4DB2-BD59-A6C34878D82A}">
-                    <a16:rowId xmlns:a16="http://schemas.microsoft.com/office/drawing/2014/main" val="10001"/>
-                  </a:ext>
-                </a:extLst>
               </a:tr>
               <a:tr h="411480">
                 <a:tc>
@@ -22768,11 +22008,6 @@
                     </a:solidFill>
                   </a:tcPr>
                 </a:tc>
-                <a:extLst>
-                  <a:ext uri="{0D108BD9-81ED-4DB2-BD59-A6C34878D82A}">
-                    <a16:rowId xmlns:a16="http://schemas.microsoft.com/office/drawing/2014/main" val="10002"/>
-                  </a:ext>
-                </a:extLst>
               </a:tr>
               <a:tr h="411480">
                 <a:tc>
@@ -22867,11 +22102,6 @@
                     </a:solidFill>
                   </a:tcPr>
                 </a:tc>
-                <a:extLst>
-                  <a:ext uri="{0D108BD9-81ED-4DB2-BD59-A6C34878D82A}">
-                    <a16:rowId xmlns:a16="http://schemas.microsoft.com/office/drawing/2014/main" val="10003"/>
-                  </a:ext>
-                </a:extLst>
               </a:tr>
               <a:tr h="411480">
                 <a:tc>
@@ -22966,11 +22196,6 @@
                     </a:solidFill>
                   </a:tcPr>
                 </a:tc>
-                <a:extLst>
-                  <a:ext uri="{0D108BD9-81ED-4DB2-BD59-A6C34878D82A}">
-                    <a16:rowId xmlns:a16="http://schemas.microsoft.com/office/drawing/2014/main" val="10004"/>
-                  </a:ext>
-                </a:extLst>
               </a:tr>
               <a:tr h="411480">
                 <a:tc>
@@ -23065,11 +22290,6 @@
                     </a:solidFill>
                   </a:tcPr>
                 </a:tc>
-                <a:extLst>
-                  <a:ext uri="{0D108BD9-81ED-4DB2-BD59-A6C34878D82A}">
-                    <a16:rowId xmlns:a16="http://schemas.microsoft.com/office/drawing/2014/main" val="10005"/>
-                  </a:ext>
-                </a:extLst>
               </a:tr>
             </a:tbl>
           </a:graphicData>
@@ -23083,8 +22303,8 @@
         </p:nvSpPr>
         <p:spPr>
           <a:xfrm>
-            <a:off x="320040" y="3931920"/>
-            <a:ext cx="11521440" cy="960120"/>
+            <a:off x="320040" y="4114800"/>
+            <a:ext cx="11548872" cy="1005840"/>
           </a:xfrm>
           <a:prstGeom prst="rect">
             <a:avLst/>
@@ -23117,7 +22337,6 @@
           <a:lstStyle/>
           <a:p>
             <a:pPr algn="ctr"/>
-            <a:endParaRPr/>
           </a:p>
         </p:txBody>
       </p:sp>
@@ -23129,7 +22348,7 @@
         </p:nvSpPr>
         <p:spPr>
           <a:xfrm>
-            <a:off x="502920" y="3977639"/>
+            <a:off x="502920" y="4160520"/>
             <a:ext cx="11155680" cy="365760"/>
           </a:xfrm>
           <a:prstGeom prst="rect">
@@ -23164,8 +22383,8 @@
         </p:nvSpPr>
         <p:spPr>
           <a:xfrm>
-            <a:off x="502920" y="4370832"/>
-            <a:ext cx="11155680" cy="411480"/>
+            <a:off x="502920" y="4553712"/>
+            <a:ext cx="11155680" cy="384048"/>
           </a:xfrm>
           <a:prstGeom prst="rect">
             <a:avLst/>
@@ -23186,7 +22405,7 @@
                 </a:solidFill>
                 <a:latin typeface="Consolas"/>
               </a:rPr>
-              <a:t>SD.begin(TFCARD_CS_PIN, SPI, 40000000);  // ← GPIO5 デフォルトでは MAX31855 と衝突！</a:t>
+              <a:t>SD.begin(TFCARD_CS_PIN, SPI, 40000000);  // GPIO5 デフォルトでは MAX31855 と衝突！</a:t>
             </a:r>
           </a:p>
         </p:txBody>
@@ -23199,8 +22418,8 @@
         </p:nvSpPr>
         <p:spPr>
           <a:xfrm>
-            <a:off x="320040" y="4983480"/>
-            <a:ext cx="11521440" cy="640080"/>
+            <a:off x="320040" y="5212080"/>
+            <a:ext cx="11548872" cy="502920"/>
           </a:xfrm>
           <a:prstGeom prst="rect">
             <a:avLst/>
@@ -23231,7 +22450,6 @@
           <a:lstStyle/>
           <a:p>
             <a:pPr algn="ctr"/>
-            <a:endParaRPr/>
           </a:p>
         </p:txBody>
       </p:sp>
@@ -23243,8 +22461,8 @@
         </p:nvSpPr>
         <p:spPr>
           <a:xfrm>
-            <a:off x="502920" y="5047488"/>
-            <a:ext cx="11155680" cy="502920"/>
+            <a:off x="502920" y="5276088"/>
+            <a:ext cx="11155680" cy="384048"/>
           </a:xfrm>
           <a:prstGeom prst="rect">
             <a:avLst/>
@@ -23279,7 +22497,7 @@
 </file>
 
 <file path=ppt/slides/slide8.xml><?xml version="1.0" encoding="utf-8"?>
-<p:sld xmlns:a="http://schemas.openxmlformats.org/drawingml/2006/main" xmlns:r="http://schemas.openxmlformats.org/officeDocument/2006/relationships" xmlns:p="http://schemas.openxmlformats.org/presentationml/2006/main">
+<p:sld xmlns:a="http://schemas.openxmlformats.org/drawingml/2006/main" xmlns:p="http://schemas.openxmlformats.org/presentationml/2006/main" xmlns:r="http://schemas.openxmlformats.org/officeDocument/2006/relationships">
   <p:cSld>
     <p:spTree>
       <p:nvGrpSpPr>
@@ -23287,14 +22505,7 @@
         <p:cNvGrpSpPr/>
         <p:nvPr/>
       </p:nvGrpSpPr>
-      <p:grpSpPr>
-        <a:xfrm>
-          <a:off x="0" y="0"/>
-          <a:ext cx="0" cy="0"/>
-          <a:chOff x="0" y="0"/>
-          <a:chExt cx="0" cy="0"/>
-        </a:xfrm>
-      </p:grpSpPr>
+      <p:grpSpPr/>
       <p:sp>
         <p:nvSpPr>
           <p:cNvPr id="2" name="Rectangle 1"/>
@@ -23335,7 +22546,6 @@
           <a:lstStyle/>
           <a:p>
             <a:pPr algn="ctr"/>
-            <a:endParaRPr/>
           </a:p>
         </p:txBody>
       </p:sp>
@@ -23449,7 +22659,6 @@
           <a:lstStyle/>
           <a:p>
             <a:pPr algn="ctr"/>
-            <a:endParaRPr/>
           </a:p>
         </p:txBody>
       </p:sp>
@@ -23542,27 +22751,9 @@
                 <a:tableStyleId>{5C22544A-7EE6-4342-B048-85BDC9FD1C3A}</a:tableStyleId>
               </a:tblPr>
               <a:tblGrid>
-                <a:gridCol w="2560320">
-                  <a:extLst>
-                    <a:ext uri="{9D8B030D-6E8A-4147-A177-3AD203B41FA5}">
-                      <a16:colId xmlns:a16="http://schemas.microsoft.com/office/drawing/2014/main" val="20000"/>
-                    </a:ext>
-                  </a:extLst>
-                </a:gridCol>
-                <a:gridCol w="2743200">
-                  <a:extLst>
-                    <a:ext uri="{9D8B030D-6E8A-4147-A177-3AD203B41FA5}">
-                      <a16:colId xmlns:a16="http://schemas.microsoft.com/office/drawing/2014/main" val="20001"/>
-                    </a:ext>
-                  </a:extLst>
-                </a:gridCol>
-                <a:gridCol w="6217920">
-                  <a:extLst>
-                    <a:ext uri="{9D8B030D-6E8A-4147-A177-3AD203B41FA5}">
-                      <a16:colId xmlns:a16="http://schemas.microsoft.com/office/drawing/2014/main" val="20002"/>
-                    </a:ext>
-                  </a:extLst>
-                </a:gridCol>
+                <a:gridCol w="2560320"/>
+                <a:gridCol w="2743200"/>
+                <a:gridCol w="6217920"/>
               </a:tblGrid>
               <a:tr h="438912">
                 <a:tc>
@@ -23634,11 +22825,6 @@
                     </a:solidFill>
                   </a:tcPr>
                 </a:tc>
-                <a:extLst>
-                  <a:ext uri="{0D108BD9-81ED-4DB2-BD59-A6C34878D82A}">
-                    <a16:rowId xmlns:a16="http://schemas.microsoft.com/office/drawing/2014/main" val="10000"/>
-                  </a:ext>
-                </a:extLst>
               </a:tr>
               <a:tr h="438912">
                 <a:tc>
@@ -23710,11 +22896,6 @@
                     </a:solidFill>
                   </a:tcPr>
                 </a:tc>
-                <a:extLst>
-                  <a:ext uri="{0D108BD9-81ED-4DB2-BD59-A6C34878D82A}">
-                    <a16:rowId xmlns:a16="http://schemas.microsoft.com/office/drawing/2014/main" val="10001"/>
-                  </a:ext>
-                </a:extLst>
               </a:tr>
               <a:tr h="438912">
                 <a:tc>
@@ -23786,11 +22967,6 @@
                     </a:solidFill>
                   </a:tcPr>
                 </a:tc>
-                <a:extLst>
-                  <a:ext uri="{0D108BD9-81ED-4DB2-BD59-A6C34878D82A}">
-                    <a16:rowId xmlns:a16="http://schemas.microsoft.com/office/drawing/2014/main" val="10002"/>
-                  </a:ext>
-                </a:extLst>
               </a:tr>
               <a:tr h="438912">
                 <a:tc>
@@ -23862,11 +23038,6 @@
                     </a:solidFill>
                   </a:tcPr>
                 </a:tc>
-                <a:extLst>
-                  <a:ext uri="{0D108BD9-81ED-4DB2-BD59-A6C34878D82A}">
-                    <a16:rowId xmlns:a16="http://schemas.microsoft.com/office/drawing/2014/main" val="10003"/>
-                  </a:ext>
-                </a:extLst>
               </a:tr>
               <a:tr h="438912">
                 <a:tc>
@@ -23938,11 +23109,6 @@
                     </a:solidFill>
                   </a:tcPr>
                 </a:tc>
-                <a:extLst>
-                  <a:ext uri="{0D108BD9-81ED-4DB2-BD59-A6C34878D82A}">
-                    <a16:rowId xmlns:a16="http://schemas.microsoft.com/office/drawing/2014/main" val="10004"/>
-                  </a:ext>
-                </a:extLst>
               </a:tr>
               <a:tr h="438912">
                 <a:tc>
@@ -24014,11 +23180,6 @@
                     </a:solidFill>
                   </a:tcPr>
                 </a:tc>
-                <a:extLst>
-                  <a:ext uri="{0D108BD9-81ED-4DB2-BD59-A6C34878D82A}">
-                    <a16:rowId xmlns:a16="http://schemas.microsoft.com/office/drawing/2014/main" val="10005"/>
-                  </a:ext>
-                </a:extLst>
               </a:tr>
               <a:tr h="438912">
                 <a:tc>
@@ -24090,11 +23251,6 @@
                     </a:solidFill>
                   </a:tcPr>
                 </a:tc>
-                <a:extLst>
-                  <a:ext uri="{0D108BD9-81ED-4DB2-BD59-A6C34878D82A}">
-                    <a16:rowId xmlns:a16="http://schemas.microsoft.com/office/drawing/2014/main" val="10006"/>
-                  </a:ext>
-                </a:extLst>
               </a:tr>
               <a:tr h="438912">
                 <a:tc>
@@ -24166,11 +23322,6 @@
                     </a:solidFill>
                   </a:tcPr>
                 </a:tc>
-                <a:extLst>
-                  <a:ext uri="{0D108BD9-81ED-4DB2-BD59-A6C34878D82A}">
-                    <a16:rowId xmlns:a16="http://schemas.microsoft.com/office/drawing/2014/main" val="10007"/>
-                  </a:ext>
-                </a:extLst>
               </a:tr>
             </a:tbl>
           </a:graphicData>
@@ -24184,8 +23335,8 @@
         </p:nvSpPr>
         <p:spPr>
           <a:xfrm>
-            <a:off x="320040" y="4983480"/>
-            <a:ext cx="11521440" cy="914400"/>
+            <a:off x="320040" y="4700016"/>
+            <a:ext cx="11548872" cy="502920"/>
           </a:xfrm>
           <a:prstGeom prst="rect">
             <a:avLst/>
@@ -24216,7 +23367,6 @@
           <a:lstStyle/>
           <a:p>
             <a:pPr algn="ctr"/>
-            <a:endParaRPr/>
           </a:p>
         </p:txBody>
       </p:sp>
@@ -24228,8 +23378,8 @@
         </p:nvSpPr>
         <p:spPr>
           <a:xfrm>
-            <a:off x="502920" y="5047488"/>
-            <a:ext cx="11155680" cy="804672"/>
+            <a:off x="502920" y="4764024"/>
+            <a:ext cx="11155680" cy="384048"/>
           </a:xfrm>
           <a:prstGeom prst="rect">
             <a:avLst/>
@@ -24244,25 +23394,13 @@
           <a:p>
             <a:pPr algn="l"/>
             <a:r>
-              <a:rPr sz="1300" b="0" i="0">
+              <a:rPr sz="1200" b="0" i="0">
                 <a:solidFill>
                   <a:srgbClr val="1A1A2E"/>
                 </a:solidFill>
                 <a:latin typeface="游ゴシック"/>
               </a:rPr>
-              <a:t>・「単一 loop()」ではなく millis() による周期分割で処理の干渉を防止</a:t>
-            </a:r>
-          </a:p>
-          <a:p>
-            <a:pPr algn="l"/>
-            <a:r>
-              <a:rPr sz="1300" b="0" i="0">
-                <a:solidFill>
-                  <a:srgbClr val="1A1A2E"/>
-                </a:solidFill>
-                <a:latin typeface="游ゴシック"/>
-              </a:rPr>
-              <a:t>・グローバル構造体 GlobalData (G) で各タスク間のデータを共有（PLC の D/M デバイス設計に着想）</a:t>
+              <a:t>「単一 loop()」ではなく millis() による周期分割で処理の干渉を防止。グローバル構造体 GlobalData (G) でタスク間データを共有（PLC の D/M デバイス設計に着想）</a:t>
             </a:r>
           </a:p>
         </p:txBody>
@@ -24276,7 +23414,7 @@
 </file>
 
 <file path=ppt/slides/slide9.xml><?xml version="1.0" encoding="utf-8"?>
-<p:sld xmlns:a="http://schemas.openxmlformats.org/drawingml/2006/main" xmlns:r="http://schemas.openxmlformats.org/officeDocument/2006/relationships" xmlns:p="http://schemas.openxmlformats.org/presentationml/2006/main">
+<p:sld xmlns:a="http://schemas.openxmlformats.org/drawingml/2006/main" xmlns:p="http://schemas.openxmlformats.org/presentationml/2006/main" xmlns:r="http://schemas.openxmlformats.org/officeDocument/2006/relationships">
   <p:cSld>
     <p:spTree>
       <p:nvGrpSpPr>
@@ -24284,14 +23422,7 @@
         <p:cNvGrpSpPr/>
         <p:nvPr/>
       </p:nvGrpSpPr>
-      <p:grpSpPr>
-        <a:xfrm>
-          <a:off x="0" y="0"/>
-          <a:ext cx="0" cy="0"/>
-          <a:chOff x="0" y="0"/>
-          <a:chExt cx="0" cy="0"/>
-        </a:xfrm>
-      </p:grpSpPr>
+      <p:grpSpPr/>
       <p:sp>
         <p:nvSpPr>
           <p:cNvPr id="2" name="Rectangle 1"/>
@@ -24332,7 +23463,6 @@
           <a:lstStyle/>
           <a:p>
             <a:pPr algn="ctr"/>
-            <a:endParaRPr/>
           </a:p>
         </p:txBody>
       </p:sp>
@@ -24446,7 +23576,6 @@
           <a:lstStyle/>
           <a:p>
             <a:pPr algn="ctr"/>
-            <a:endParaRPr/>
           </a:p>
         </p:txBody>
       </p:sp>
@@ -24560,7 +23689,6 @@
           <a:lstStyle/>
           <a:p>
             <a:pPr algn="ctr"/>
-            <a:endParaRPr/>
           </a:p>
         </p:txBody>
       </p:sp>
@@ -24745,7 +23873,6 @@
           <a:lstStyle/>
           <a:p>
             <a:pPr algn="ctr"/>
-            <a:endParaRPr/>
           </a:p>
         </p:txBody>
       </p:sp>
@@ -24929,7 +24056,6 @@
           <a:lstStyle/>
           <a:p>
             <a:pPr algn="ctr"/>
-            <a:endParaRPr/>
           </a:p>
         </p:txBody>
       </p:sp>
@@ -25113,7 +24239,6 @@
           <a:lstStyle/>
           <a:p>
             <a:pPr algn="ctr"/>
-            <a:endParaRPr/>
           </a:p>
         </p:txBody>
       </p:sp>
@@ -25242,34 +24367,10 @@
                 <a:tableStyleId>{5C22544A-7EE6-4342-B048-85BDC9FD1C3A}</a:tableStyleId>
               </a:tblPr>
               <a:tblGrid>
-                <a:gridCol w="1828800">
-                  <a:extLst>
-                    <a:ext uri="{9D8B030D-6E8A-4147-A177-3AD203B41FA5}">
-                      <a16:colId xmlns:a16="http://schemas.microsoft.com/office/drawing/2014/main" val="20000"/>
-                    </a:ext>
-                  </a:extLst>
-                </a:gridCol>
-                <a:gridCol w="1828800">
-                  <a:extLst>
-                    <a:ext uri="{9D8B030D-6E8A-4147-A177-3AD203B41FA5}">
-                      <a16:colId xmlns:a16="http://schemas.microsoft.com/office/drawing/2014/main" val="20001"/>
-                    </a:ext>
-                  </a:extLst>
-                </a:gridCol>
-                <a:gridCol w="3657600">
-                  <a:extLst>
-                    <a:ext uri="{9D8B030D-6E8A-4147-A177-3AD203B41FA5}">
-                      <a16:colId xmlns:a16="http://schemas.microsoft.com/office/drawing/2014/main" val="20002"/>
-                    </a:ext>
-                  </a:extLst>
-                </a:gridCol>
-                <a:gridCol w="4206240">
-                  <a:extLst>
-                    <a:ext uri="{9D8B030D-6E8A-4147-A177-3AD203B41FA5}">
-                      <a16:colId xmlns:a16="http://schemas.microsoft.com/office/drawing/2014/main" val="20003"/>
-                    </a:ext>
-                  </a:extLst>
-                </a:gridCol>
+                <a:gridCol w="1828800"/>
+                <a:gridCol w="1828800"/>
+                <a:gridCol w="3657600"/>
+                <a:gridCol w="4206240"/>
               </a:tblGrid>
               <a:tr h="402336">
                 <a:tc>
@@ -25364,11 +24465,6 @@
                     </a:solidFill>
                   </a:tcPr>
                 </a:tc>
-                <a:extLst>
-                  <a:ext uri="{0D108BD9-81ED-4DB2-BD59-A6C34878D82A}">
-                    <a16:rowId xmlns:a16="http://schemas.microsoft.com/office/drawing/2014/main" val="10000"/>
-                  </a:ext>
-                </a:extLst>
               </a:tr>
               <a:tr h="402336">
                 <a:tc>
@@ -25463,11 +24559,6 @@
                     </a:solidFill>
                   </a:tcPr>
                 </a:tc>
-                <a:extLst>
-                  <a:ext uri="{0D108BD9-81ED-4DB2-BD59-A6C34878D82A}">
-                    <a16:rowId xmlns:a16="http://schemas.microsoft.com/office/drawing/2014/main" val="10001"/>
-                  </a:ext>
-                </a:extLst>
               </a:tr>
               <a:tr h="402336">
                 <a:tc>
@@ -25562,11 +24653,6 @@
                     </a:solidFill>
                   </a:tcPr>
                 </a:tc>
-                <a:extLst>
-                  <a:ext uri="{0D108BD9-81ED-4DB2-BD59-A6C34878D82A}">
-                    <a16:rowId xmlns:a16="http://schemas.microsoft.com/office/drawing/2014/main" val="10002"/>
-                  </a:ext>
-                </a:extLst>
               </a:tr>
               <a:tr h="402336">
                 <a:tc>
@@ -25661,11 +24747,6 @@
                     </a:solidFill>
                   </a:tcPr>
                 </a:tc>
-                <a:extLst>
-                  <a:ext uri="{0D108BD9-81ED-4DB2-BD59-A6C34878D82A}">
-                    <a16:rowId xmlns:a16="http://schemas.microsoft.com/office/drawing/2014/main" val="10003"/>
-                  </a:ext>
-                </a:extLst>
               </a:tr>
               <a:tr h="402336">
                 <a:tc>
@@ -25760,11 +24841,6 @@
                     </a:solidFill>
                   </a:tcPr>
                 </a:tc>
-                <a:extLst>
-                  <a:ext uri="{0D108BD9-81ED-4DB2-BD59-A6C34878D82A}">
-                    <a16:rowId xmlns:a16="http://schemas.microsoft.com/office/drawing/2014/main" val="10004"/>
-                  </a:ext>
-                </a:extLst>
               </a:tr>
               <a:tr h="402336">
                 <a:tc>
@@ -25859,11 +24935,6 @@
                     </a:solidFill>
                   </a:tcPr>
                 </a:tc>
-                <a:extLst>
-                  <a:ext uri="{0D108BD9-81ED-4DB2-BD59-A6C34878D82A}">
-                    <a16:rowId xmlns:a16="http://schemas.microsoft.com/office/drawing/2014/main" val="10005"/>
-                  </a:ext>
-                </a:extLst>
               </a:tr>
             </a:tbl>
           </a:graphicData>

--- a/docs/career/Simple_Temp_Tool_Overview_v2.pptx
+++ b/docs/career/Simple_Temp_Tool_Overview_v2.pptx
@@ -5,31 +5,31 @@
     <p:sldMasterId id="2147483648" r:id="rId1"/>
   </p:sldMasterIdLst>
   <p:sldIdLst>
-    <p:sldId id="256" r:id="rId7"/>
-    <p:sldId id="257" r:id="rId8"/>
-    <p:sldId id="258" r:id="rId9"/>
-    <p:sldId id="259" r:id="rId10"/>
-    <p:sldId id="260" r:id="rId11"/>
-    <p:sldId id="261" r:id="rId12"/>
-    <p:sldId id="262" r:id="rId13"/>
-    <p:sldId id="263" r:id="rId14"/>
-    <p:sldId id="264" r:id="rId15"/>
-    <p:sldId id="265" r:id="rId16"/>
-    <p:sldId id="266" r:id="rId17"/>
-    <p:sldId id="267" r:id="rId18"/>
-    <p:sldId id="268" r:id="rId19"/>
-    <p:sldId id="269" r:id="rId20"/>
-    <p:sldId id="270" r:id="rId21"/>
-    <p:sldId id="271" r:id="rId22"/>
-    <p:sldId id="272" r:id="rId23"/>
-    <p:sldId id="273" r:id="rId24"/>
-    <p:sldId id="274" r:id="rId25"/>
-    <p:sldId id="275" r:id="rId26"/>
-    <p:sldId id="276" r:id="rId27"/>
-    <p:sldId id="277" r:id="rId28"/>
-    <p:sldId id="278" r:id="rId29"/>
+    <p:sldId id="256" r:id="rId2"/>
+    <p:sldId id="257" r:id="rId3"/>
+    <p:sldId id="258" r:id="rId4"/>
+    <p:sldId id="259" r:id="rId5"/>
+    <p:sldId id="260" r:id="rId6"/>
+    <p:sldId id="261" r:id="rId7"/>
+    <p:sldId id="262" r:id="rId8"/>
+    <p:sldId id="263" r:id="rId9"/>
+    <p:sldId id="264" r:id="rId10"/>
+    <p:sldId id="265" r:id="rId11"/>
+    <p:sldId id="266" r:id="rId12"/>
+    <p:sldId id="267" r:id="rId13"/>
+    <p:sldId id="268" r:id="rId14"/>
+    <p:sldId id="269" r:id="rId15"/>
+    <p:sldId id="270" r:id="rId16"/>
+    <p:sldId id="271" r:id="rId17"/>
+    <p:sldId id="272" r:id="rId18"/>
+    <p:sldId id="273" r:id="rId19"/>
+    <p:sldId id="274" r:id="rId20"/>
+    <p:sldId id="275" r:id="rId21"/>
+    <p:sldId id="276" r:id="rId22"/>
+    <p:sldId id="277" r:id="rId23"/>
+    <p:sldId id="278" r:id="rId24"/>
   </p:sldIdLst>
-  <p:sldSz cx="12188952" cy="6858000" type="screen4x3"/>
+  <p:sldSz cx="12188825" cy="6858000"/>
   <p:notesSz cx="6858000" cy="9144000"/>
   <p:defaultTextStyle>
     <a:defPPr>
@@ -126,6 +126,22 @@
       </a:defRPr>
     </a:lvl9pPr>
   </p:defaultTextStyle>
+  <p:extLst>
+    <p:ext uri="{EFAFB233-063F-42B5-8137-9DF3F51BA10A}">
+      <p15:sldGuideLst xmlns:p15="http://schemas.microsoft.com/office/powerpoint/2012/main">
+        <p15:guide id="1" orient="horz" pos="2160">
+          <p15:clr>
+            <a:srgbClr val="A4A3A4"/>
+          </p15:clr>
+        </p15:guide>
+        <p15:guide id="2" pos="2880">
+          <p15:clr>
+            <a:srgbClr val="A4A3A4"/>
+          </p15:clr>
+        </p15:guide>
+      </p15:sldGuideLst>
+    </p:ext>
+  </p:extLst>
 </p:presentation>
 </file>
 
@@ -167,10 +183,9 @@
           <a:lstStyle/>
           <a:p>
             <a:r>
-              <a:rPr lang="en-US" smtClean="0"/>
+              <a:rPr lang="en-US"/>
               <a:t>Click to edit Master title style</a:t>
             </a:r>
-            <a:endParaRPr lang="en-US"/>
           </a:p>
         </p:txBody>
       </p:sp>
@@ -286,10 +301,9 @@
           </a:lstStyle>
           <a:p>
             <a:r>
-              <a:rPr lang="en-US" smtClean="0"/>
+              <a:rPr lang="en-US"/>
               <a:t>Click to edit Master subtitle style</a:t>
             </a:r>
-            <a:endParaRPr lang="en-US"/>
           </a:p>
         </p:txBody>
       </p:sp>
@@ -310,7 +324,7 @@
           <a:p>
             <a:fld id="{5BCAD085-E8A6-8845-BD4E-CB4CCA059FC4}" type="datetimeFigureOut">
               <a:rPr lang="en-US" smtClean="0"/>
-              <a:t>1/27/13</a:t>
+              <a:t>3/3/2026</a:t>
             </a:fld>
             <a:endParaRPr lang="en-US"/>
           </a:p>
@@ -404,10 +418,9 @@
           <a:lstStyle/>
           <a:p>
             <a:r>
-              <a:rPr lang="en-US" smtClean="0"/>
+              <a:rPr lang="en-US"/>
               <a:t>Click to edit Master title style</a:t>
             </a:r>
-            <a:endParaRPr lang="en-US"/>
           </a:p>
         </p:txBody>
       </p:sp>
@@ -428,38 +441,37 @@
           <a:p>
             <a:pPr lvl="0"/>
             <a:r>
-              <a:rPr lang="en-US" smtClean="0"/>
+              <a:rPr lang="en-US"/>
               <a:t>Click to edit Master text styles</a:t>
             </a:r>
           </a:p>
           <a:p>
             <a:pPr lvl="1"/>
             <a:r>
-              <a:rPr lang="en-US" smtClean="0"/>
+              <a:rPr lang="en-US"/>
               <a:t>Second level</a:t>
             </a:r>
           </a:p>
           <a:p>
             <a:pPr lvl="2"/>
             <a:r>
-              <a:rPr lang="en-US" smtClean="0"/>
+              <a:rPr lang="en-US"/>
               <a:t>Third level</a:t>
             </a:r>
           </a:p>
           <a:p>
             <a:pPr lvl="3"/>
             <a:r>
-              <a:rPr lang="en-US" smtClean="0"/>
+              <a:rPr lang="en-US"/>
               <a:t>Fourth level</a:t>
             </a:r>
           </a:p>
           <a:p>
             <a:pPr lvl="4"/>
             <a:r>
-              <a:rPr lang="en-US" smtClean="0"/>
+              <a:rPr lang="en-US"/>
               <a:t>Fifth level</a:t>
             </a:r>
-            <a:endParaRPr lang="en-US"/>
           </a:p>
         </p:txBody>
       </p:sp>
@@ -480,7 +492,7 @@
           <a:p>
             <a:fld id="{5BCAD085-E8A6-8845-BD4E-CB4CCA059FC4}" type="datetimeFigureOut">
               <a:rPr lang="en-US" smtClean="0"/>
-              <a:t>1/27/13</a:t>
+              <a:t>3/3/2026</a:t>
             </a:fld>
             <a:endParaRPr lang="en-US"/>
           </a:p>
@@ -579,10 +591,9 @@
           <a:lstStyle/>
           <a:p>
             <a:r>
-              <a:rPr lang="en-US" smtClean="0"/>
+              <a:rPr lang="en-US"/>
               <a:t>Click to edit Master title style</a:t>
             </a:r>
-            <a:endParaRPr lang="en-US"/>
           </a:p>
         </p:txBody>
       </p:sp>
@@ -608,38 +619,37 @@
           <a:p>
             <a:pPr lvl="0"/>
             <a:r>
-              <a:rPr lang="en-US" smtClean="0"/>
+              <a:rPr lang="en-US"/>
               <a:t>Click to edit Master text styles</a:t>
             </a:r>
           </a:p>
           <a:p>
             <a:pPr lvl="1"/>
             <a:r>
-              <a:rPr lang="en-US" smtClean="0"/>
+              <a:rPr lang="en-US"/>
               <a:t>Second level</a:t>
             </a:r>
           </a:p>
           <a:p>
             <a:pPr lvl="2"/>
             <a:r>
-              <a:rPr lang="en-US" smtClean="0"/>
+              <a:rPr lang="en-US"/>
               <a:t>Third level</a:t>
             </a:r>
           </a:p>
           <a:p>
             <a:pPr lvl="3"/>
             <a:r>
-              <a:rPr lang="en-US" smtClean="0"/>
+              <a:rPr lang="en-US"/>
               <a:t>Fourth level</a:t>
             </a:r>
           </a:p>
           <a:p>
             <a:pPr lvl="4"/>
             <a:r>
-              <a:rPr lang="en-US" smtClean="0"/>
+              <a:rPr lang="en-US"/>
               <a:t>Fifth level</a:t>
             </a:r>
-            <a:endParaRPr lang="en-US"/>
           </a:p>
         </p:txBody>
       </p:sp>
@@ -660,7 +670,7 @@
           <a:p>
             <a:fld id="{5BCAD085-E8A6-8845-BD4E-CB4CCA059FC4}" type="datetimeFigureOut">
               <a:rPr lang="en-US" smtClean="0"/>
-              <a:t>1/27/13</a:t>
+              <a:t>3/3/2026</a:t>
             </a:fld>
             <a:endParaRPr lang="en-US"/>
           </a:p>
@@ -754,10 +764,9 @@
           <a:lstStyle/>
           <a:p>
             <a:r>
-              <a:rPr lang="en-US" smtClean="0"/>
+              <a:rPr lang="en-US"/>
               <a:t>Click to edit Master title style</a:t>
             </a:r>
-            <a:endParaRPr lang="en-US"/>
           </a:p>
         </p:txBody>
       </p:sp>
@@ -778,38 +787,37 @@
           <a:p>
             <a:pPr lvl="0"/>
             <a:r>
-              <a:rPr lang="en-US" smtClean="0"/>
+              <a:rPr lang="en-US"/>
               <a:t>Click to edit Master text styles</a:t>
             </a:r>
           </a:p>
           <a:p>
             <a:pPr lvl="1"/>
             <a:r>
-              <a:rPr lang="en-US" smtClean="0"/>
+              <a:rPr lang="en-US"/>
               <a:t>Second level</a:t>
             </a:r>
           </a:p>
           <a:p>
             <a:pPr lvl="2"/>
             <a:r>
-              <a:rPr lang="en-US" smtClean="0"/>
+              <a:rPr lang="en-US"/>
               <a:t>Third level</a:t>
             </a:r>
           </a:p>
           <a:p>
             <a:pPr lvl="3"/>
             <a:r>
-              <a:rPr lang="en-US" smtClean="0"/>
+              <a:rPr lang="en-US"/>
               <a:t>Fourth level</a:t>
             </a:r>
           </a:p>
           <a:p>
             <a:pPr lvl="4"/>
             <a:r>
-              <a:rPr lang="en-US" smtClean="0"/>
+              <a:rPr lang="en-US"/>
               <a:t>Fifth level</a:t>
             </a:r>
-            <a:endParaRPr lang="en-US"/>
           </a:p>
         </p:txBody>
       </p:sp>
@@ -830,7 +838,7 @@
           <a:p>
             <a:fld id="{5BCAD085-E8A6-8845-BD4E-CB4CCA059FC4}" type="datetimeFigureOut">
               <a:rPr lang="en-US" smtClean="0"/>
-              <a:t>1/27/13</a:t>
+              <a:t>3/3/2026</a:t>
             </a:fld>
             <a:endParaRPr lang="en-US"/>
           </a:p>
@@ -933,10 +941,9 @@
           </a:lstStyle>
           <a:p>
             <a:r>
-              <a:rPr lang="en-US" smtClean="0"/>
+              <a:rPr lang="en-US"/>
               <a:t>Click to edit Master title style</a:t>
             </a:r>
-            <a:endParaRPr lang="en-US"/>
           </a:p>
         </p:txBody>
       </p:sp>
@@ -1053,7 +1060,7 @@
           <a:p>
             <a:pPr lvl="0"/>
             <a:r>
-              <a:rPr lang="en-US" smtClean="0"/>
+              <a:rPr lang="en-US"/>
               <a:t>Click to edit Master text styles</a:t>
             </a:r>
           </a:p>
@@ -1076,7 +1083,7 @@
           <a:p>
             <a:fld id="{5BCAD085-E8A6-8845-BD4E-CB4CCA059FC4}" type="datetimeFigureOut">
               <a:rPr lang="en-US" smtClean="0"/>
-              <a:t>1/27/13</a:t>
+              <a:t>3/3/2026</a:t>
             </a:fld>
             <a:endParaRPr lang="en-US"/>
           </a:p>
@@ -1170,10 +1177,9 @@
           <a:lstStyle/>
           <a:p>
             <a:r>
-              <a:rPr lang="en-US" smtClean="0"/>
+              <a:rPr lang="en-US"/>
               <a:t>Click to edit Master title style</a:t>
             </a:r>
-            <a:endParaRPr lang="en-US"/>
           </a:p>
         </p:txBody>
       </p:sp>
@@ -1227,38 +1233,37 @@
           <a:p>
             <a:pPr lvl="0"/>
             <a:r>
-              <a:rPr lang="en-US" smtClean="0"/>
+              <a:rPr lang="en-US"/>
               <a:t>Click to edit Master text styles</a:t>
             </a:r>
           </a:p>
           <a:p>
             <a:pPr lvl="1"/>
             <a:r>
-              <a:rPr lang="en-US" smtClean="0"/>
+              <a:rPr lang="en-US"/>
               <a:t>Second level</a:t>
             </a:r>
           </a:p>
           <a:p>
             <a:pPr lvl="2"/>
             <a:r>
-              <a:rPr lang="en-US" smtClean="0"/>
+              <a:rPr lang="en-US"/>
               <a:t>Third level</a:t>
             </a:r>
           </a:p>
           <a:p>
             <a:pPr lvl="3"/>
             <a:r>
-              <a:rPr lang="en-US" smtClean="0"/>
+              <a:rPr lang="en-US"/>
               <a:t>Fourth level</a:t>
             </a:r>
           </a:p>
           <a:p>
             <a:pPr lvl="4"/>
             <a:r>
-              <a:rPr lang="en-US" smtClean="0"/>
+              <a:rPr lang="en-US"/>
               <a:t>Fifth level</a:t>
             </a:r>
-            <a:endParaRPr lang="en-US"/>
           </a:p>
         </p:txBody>
       </p:sp>
@@ -1312,38 +1317,37 @@
           <a:p>
             <a:pPr lvl="0"/>
             <a:r>
-              <a:rPr lang="en-US" smtClean="0"/>
+              <a:rPr lang="en-US"/>
               <a:t>Click to edit Master text styles</a:t>
             </a:r>
           </a:p>
           <a:p>
             <a:pPr lvl="1"/>
             <a:r>
-              <a:rPr lang="en-US" smtClean="0"/>
+              <a:rPr lang="en-US"/>
               <a:t>Second level</a:t>
             </a:r>
           </a:p>
           <a:p>
             <a:pPr lvl="2"/>
             <a:r>
-              <a:rPr lang="en-US" smtClean="0"/>
+              <a:rPr lang="en-US"/>
               <a:t>Third level</a:t>
             </a:r>
           </a:p>
           <a:p>
             <a:pPr lvl="3"/>
             <a:r>
-              <a:rPr lang="en-US" smtClean="0"/>
+              <a:rPr lang="en-US"/>
               <a:t>Fourth level</a:t>
             </a:r>
           </a:p>
           <a:p>
             <a:pPr lvl="4"/>
             <a:r>
-              <a:rPr lang="en-US" smtClean="0"/>
+              <a:rPr lang="en-US"/>
               <a:t>Fifth level</a:t>
             </a:r>
-            <a:endParaRPr lang="en-US"/>
           </a:p>
         </p:txBody>
       </p:sp>
@@ -1364,7 +1368,7 @@
           <a:p>
             <a:fld id="{5BCAD085-E8A6-8845-BD4E-CB4CCA059FC4}" type="datetimeFigureOut">
               <a:rPr lang="en-US" smtClean="0"/>
-              <a:t>1/27/13</a:t>
+              <a:t>3/3/2026</a:t>
             </a:fld>
             <a:endParaRPr lang="en-US"/>
           </a:p>
@@ -1462,10 +1466,9 @@
           </a:lstStyle>
           <a:p>
             <a:r>
-              <a:rPr lang="en-US" smtClean="0"/>
+              <a:rPr lang="en-US"/>
               <a:t>Click to edit Master title style</a:t>
             </a:r>
-            <a:endParaRPr lang="en-US"/>
           </a:p>
         </p:txBody>
       </p:sp>
@@ -1528,7 +1531,7 @@
           <a:p>
             <a:pPr lvl="0"/>
             <a:r>
-              <a:rPr lang="en-US" smtClean="0"/>
+              <a:rPr lang="en-US"/>
               <a:t>Click to edit Master text styles</a:t>
             </a:r>
           </a:p>
@@ -1584,38 +1587,37 @@
           <a:p>
             <a:pPr lvl="0"/>
             <a:r>
-              <a:rPr lang="en-US" smtClean="0"/>
+              <a:rPr lang="en-US"/>
               <a:t>Click to edit Master text styles</a:t>
             </a:r>
           </a:p>
           <a:p>
             <a:pPr lvl="1"/>
             <a:r>
-              <a:rPr lang="en-US" smtClean="0"/>
+              <a:rPr lang="en-US"/>
               <a:t>Second level</a:t>
             </a:r>
           </a:p>
           <a:p>
             <a:pPr lvl="2"/>
             <a:r>
-              <a:rPr lang="en-US" smtClean="0"/>
+              <a:rPr lang="en-US"/>
               <a:t>Third level</a:t>
             </a:r>
           </a:p>
           <a:p>
             <a:pPr lvl="3"/>
             <a:r>
-              <a:rPr lang="en-US" smtClean="0"/>
+              <a:rPr lang="en-US"/>
               <a:t>Fourth level</a:t>
             </a:r>
           </a:p>
           <a:p>
             <a:pPr lvl="4"/>
             <a:r>
-              <a:rPr lang="en-US" smtClean="0"/>
+              <a:rPr lang="en-US"/>
               <a:t>Fifth level</a:t>
             </a:r>
-            <a:endParaRPr lang="en-US"/>
           </a:p>
         </p:txBody>
       </p:sp>
@@ -1678,7 +1680,7 @@
           <a:p>
             <a:pPr lvl="0"/>
             <a:r>
-              <a:rPr lang="en-US" smtClean="0"/>
+              <a:rPr lang="en-US"/>
               <a:t>Click to edit Master text styles</a:t>
             </a:r>
           </a:p>
@@ -1734,38 +1736,37 @@
           <a:p>
             <a:pPr lvl="0"/>
             <a:r>
-              <a:rPr lang="en-US" smtClean="0"/>
+              <a:rPr lang="en-US"/>
               <a:t>Click to edit Master text styles</a:t>
             </a:r>
           </a:p>
           <a:p>
             <a:pPr lvl="1"/>
             <a:r>
-              <a:rPr lang="en-US" smtClean="0"/>
+              <a:rPr lang="en-US"/>
               <a:t>Second level</a:t>
             </a:r>
           </a:p>
           <a:p>
             <a:pPr lvl="2"/>
             <a:r>
-              <a:rPr lang="en-US" smtClean="0"/>
+              <a:rPr lang="en-US"/>
               <a:t>Third level</a:t>
             </a:r>
           </a:p>
           <a:p>
             <a:pPr lvl="3"/>
             <a:r>
-              <a:rPr lang="en-US" smtClean="0"/>
+              <a:rPr lang="en-US"/>
               <a:t>Fourth level</a:t>
             </a:r>
           </a:p>
           <a:p>
             <a:pPr lvl="4"/>
             <a:r>
-              <a:rPr lang="en-US" smtClean="0"/>
+              <a:rPr lang="en-US"/>
               <a:t>Fifth level</a:t>
             </a:r>
-            <a:endParaRPr lang="en-US"/>
           </a:p>
         </p:txBody>
       </p:sp>
@@ -1786,7 +1787,7 @@
           <a:p>
             <a:fld id="{5BCAD085-E8A6-8845-BD4E-CB4CCA059FC4}" type="datetimeFigureOut">
               <a:rPr lang="en-US" smtClean="0"/>
-              <a:t>1/27/13</a:t>
+              <a:t>3/3/2026</a:t>
             </a:fld>
             <a:endParaRPr lang="en-US"/>
           </a:p>
@@ -1880,10 +1881,9 @@
           <a:lstStyle/>
           <a:p>
             <a:r>
-              <a:rPr lang="en-US" smtClean="0"/>
+              <a:rPr lang="en-US"/>
               <a:t>Click to edit Master title style</a:t>
             </a:r>
-            <a:endParaRPr lang="en-US"/>
           </a:p>
         </p:txBody>
       </p:sp>
@@ -1904,7 +1904,7 @@
           <a:p>
             <a:fld id="{5BCAD085-E8A6-8845-BD4E-CB4CCA059FC4}" type="datetimeFigureOut">
               <a:rPr lang="en-US" smtClean="0"/>
-              <a:t>1/27/13</a:t>
+              <a:t>3/3/2026</a:t>
             </a:fld>
             <a:endParaRPr lang="en-US"/>
           </a:p>
@@ -1999,7 +1999,7 @@
           <a:p>
             <a:fld id="{5BCAD085-E8A6-8845-BD4E-CB4CCA059FC4}" type="datetimeFigureOut">
               <a:rPr lang="en-US" smtClean="0"/>
-              <a:t>1/27/13</a:t>
+              <a:t>3/3/2026</a:t>
             </a:fld>
             <a:endParaRPr lang="en-US"/>
           </a:p>
@@ -2102,10 +2102,9 @@
           </a:lstStyle>
           <a:p>
             <a:r>
-              <a:rPr lang="en-US" smtClean="0"/>
+              <a:rPr lang="en-US"/>
               <a:t>Click to edit Master title style</a:t>
             </a:r>
-            <a:endParaRPr lang="en-US"/>
           </a:p>
         </p:txBody>
       </p:sp>
@@ -2159,38 +2158,37 @@
           <a:p>
             <a:pPr lvl="0"/>
             <a:r>
-              <a:rPr lang="en-US" smtClean="0"/>
+              <a:rPr lang="en-US"/>
               <a:t>Click to edit Master text styles</a:t>
             </a:r>
           </a:p>
           <a:p>
             <a:pPr lvl="1"/>
             <a:r>
-              <a:rPr lang="en-US" smtClean="0"/>
+              <a:rPr lang="en-US"/>
               <a:t>Second level</a:t>
             </a:r>
           </a:p>
           <a:p>
             <a:pPr lvl="2"/>
             <a:r>
-              <a:rPr lang="en-US" smtClean="0"/>
+              <a:rPr lang="en-US"/>
               <a:t>Third level</a:t>
             </a:r>
           </a:p>
           <a:p>
             <a:pPr lvl="3"/>
             <a:r>
-              <a:rPr lang="en-US" smtClean="0"/>
+              <a:rPr lang="en-US"/>
               <a:t>Fourth level</a:t>
             </a:r>
           </a:p>
           <a:p>
             <a:pPr lvl="4"/>
             <a:r>
-              <a:rPr lang="en-US" smtClean="0"/>
+              <a:rPr lang="en-US"/>
               <a:t>Fifth level</a:t>
             </a:r>
-            <a:endParaRPr lang="en-US"/>
           </a:p>
         </p:txBody>
       </p:sp>
@@ -2253,7 +2251,7 @@
           <a:p>
             <a:pPr lvl="0"/>
             <a:r>
-              <a:rPr lang="en-US" smtClean="0"/>
+              <a:rPr lang="en-US"/>
               <a:t>Click to edit Master text styles</a:t>
             </a:r>
           </a:p>
@@ -2276,7 +2274,7 @@
           <a:p>
             <a:fld id="{5BCAD085-E8A6-8845-BD4E-CB4CCA059FC4}" type="datetimeFigureOut">
               <a:rPr lang="en-US" smtClean="0"/>
-              <a:t>1/27/13</a:t>
+              <a:t>3/3/2026</a:t>
             </a:fld>
             <a:endParaRPr lang="en-US"/>
           </a:p>
@@ -2379,10 +2377,9 @@
           </a:lstStyle>
           <a:p>
             <a:r>
-              <a:rPr lang="en-US" smtClean="0"/>
+              <a:rPr lang="en-US"/>
               <a:t>Click to edit Master title style</a:t>
             </a:r>
-            <a:endParaRPr lang="en-US"/>
           </a:p>
         </p:txBody>
       </p:sp>
@@ -2506,7 +2503,7 @@
           <a:p>
             <a:pPr lvl="0"/>
             <a:r>
-              <a:rPr lang="en-US" smtClean="0"/>
+              <a:rPr lang="en-US"/>
               <a:t>Click to edit Master text styles</a:t>
             </a:r>
           </a:p>
@@ -2529,7 +2526,7 @@
           <a:p>
             <a:fld id="{5BCAD085-E8A6-8845-BD4E-CB4CCA059FC4}" type="datetimeFigureOut">
               <a:rPr lang="en-US" smtClean="0"/>
-              <a:t>1/27/13</a:t>
+              <a:t>3/3/2026</a:t>
             </a:fld>
             <a:endParaRPr lang="en-US"/>
           </a:p>
@@ -2638,10 +2635,9 @@
           <a:lstStyle/>
           <a:p>
             <a:r>
-              <a:rPr lang="en-US" smtClean="0"/>
+              <a:rPr lang="en-US"/>
               <a:t>Click to edit Master title style</a:t>
             </a:r>
-            <a:endParaRPr lang="en-US"/>
           </a:p>
         </p:txBody>
       </p:sp>
@@ -2672,38 +2668,37 @@
           <a:p>
             <a:pPr lvl="0"/>
             <a:r>
-              <a:rPr lang="en-US" smtClean="0"/>
+              <a:rPr lang="en-US"/>
               <a:t>Click to edit Master text styles</a:t>
             </a:r>
           </a:p>
           <a:p>
             <a:pPr lvl="1"/>
             <a:r>
-              <a:rPr lang="en-US" smtClean="0"/>
+              <a:rPr lang="en-US"/>
               <a:t>Second level</a:t>
             </a:r>
           </a:p>
           <a:p>
             <a:pPr lvl="2"/>
             <a:r>
-              <a:rPr lang="en-US" smtClean="0"/>
+              <a:rPr lang="en-US"/>
               <a:t>Third level</a:t>
             </a:r>
           </a:p>
           <a:p>
             <a:pPr lvl="3"/>
             <a:r>
-              <a:rPr lang="en-US" smtClean="0"/>
+              <a:rPr lang="en-US"/>
               <a:t>Fourth level</a:t>
             </a:r>
           </a:p>
           <a:p>
             <a:pPr lvl="4"/>
             <a:r>
-              <a:rPr lang="en-US" smtClean="0"/>
+              <a:rPr lang="en-US"/>
               <a:t>Fifth level</a:t>
             </a:r>
-            <a:endParaRPr lang="en-US"/>
           </a:p>
         </p:txBody>
       </p:sp>
@@ -2742,7 +2737,7 @@
           <a:p>
             <a:fld id="{5BCAD085-E8A6-8845-BD4E-CB4CCA059FC4}" type="datetimeFigureOut">
               <a:rPr lang="en-US" smtClean="0"/>
-              <a:t>1/27/13</a:t>
+              <a:t>3/3/2026</a:t>
             </a:fld>
             <a:endParaRPr lang="en-US"/>
           </a:p>
@@ -3101,7 +3096,7 @@
 </file>
 
 <file path=ppt/slides/slide1.xml><?xml version="1.0" encoding="utf-8"?>
-<p:sld xmlns:a="http://schemas.openxmlformats.org/drawingml/2006/main" xmlns:p="http://schemas.openxmlformats.org/presentationml/2006/main" xmlns:r="http://schemas.openxmlformats.org/officeDocument/2006/relationships">
+<p:sld xmlns:a="http://schemas.openxmlformats.org/drawingml/2006/main" xmlns:r="http://schemas.openxmlformats.org/officeDocument/2006/relationships" xmlns:p="http://schemas.openxmlformats.org/presentationml/2006/main">
   <p:cSld>
     <p:bg>
       <p:bgPr>
@@ -3117,7 +3112,14 @@
         <p:cNvGrpSpPr/>
         <p:nvPr/>
       </p:nvGrpSpPr>
-      <p:grpSpPr/>
+      <p:grpSpPr>
+        <a:xfrm>
+          <a:off x="0" y="0"/>
+          <a:ext cx="0" cy="0"/>
+          <a:chOff x="0" y="0"/>
+          <a:chExt cx="0" cy="0"/>
+        </a:xfrm>
+      </p:grpSpPr>
       <p:sp>
         <p:nvSpPr>
           <p:cNvPr id="2" name="TextBox 1"/>
@@ -3228,6 +3230,7 @@
           <a:lstStyle/>
           <a:p>
             <a:pPr algn="ctr"/>
+            <a:endParaRPr/>
           </a:p>
         </p:txBody>
       </p:sp>
@@ -3345,7 +3348,7 @@
 </file>
 
 <file path=ppt/slides/slide10.xml><?xml version="1.0" encoding="utf-8"?>
-<p:sld xmlns:a="http://schemas.openxmlformats.org/drawingml/2006/main" xmlns:p="http://schemas.openxmlformats.org/presentationml/2006/main" xmlns:r="http://schemas.openxmlformats.org/officeDocument/2006/relationships">
+<p:sld xmlns:a="http://schemas.openxmlformats.org/drawingml/2006/main" xmlns:r="http://schemas.openxmlformats.org/officeDocument/2006/relationships" xmlns:p="http://schemas.openxmlformats.org/presentationml/2006/main">
   <p:cSld>
     <p:spTree>
       <p:nvGrpSpPr>
@@ -3353,7 +3356,14 @@
         <p:cNvGrpSpPr/>
         <p:nvPr/>
       </p:nvGrpSpPr>
-      <p:grpSpPr/>
+      <p:grpSpPr>
+        <a:xfrm>
+          <a:off x="0" y="0"/>
+          <a:ext cx="0" cy="0"/>
+          <a:chOff x="0" y="0"/>
+          <a:chExt cx="0" cy="0"/>
+        </a:xfrm>
+      </p:grpSpPr>
       <p:sp>
         <p:nvSpPr>
           <p:cNvPr id="2" name="Rectangle 1"/>
@@ -3394,6 +3404,7 @@
           <a:lstStyle/>
           <a:p>
             <a:pPr algn="ctr"/>
+            <a:endParaRPr/>
           </a:p>
         </p:txBody>
       </p:sp>
@@ -3507,6 +3518,7 @@
           <a:lstStyle/>
           <a:p>
             <a:pPr algn="ctr"/>
+            <a:endParaRPr/>
           </a:p>
         </p:txBody>
       </p:sp>
@@ -3634,10 +3646,34 @@
                 <a:tableStyleId>{5C22544A-7EE6-4342-B048-85BDC9FD1C3A}</a:tableStyleId>
               </a:tblPr>
               <a:tblGrid>
-                <a:gridCol w="1828800"/>
-                <a:gridCol w="3108960"/>
-                <a:gridCol w="3108960"/>
-                <a:gridCol w="3474720"/>
+                <a:gridCol w="1828800">
+                  <a:extLst>
+                    <a:ext uri="{9D8B030D-6E8A-4147-A177-3AD203B41FA5}">
+                      <a16:colId xmlns:a16="http://schemas.microsoft.com/office/drawing/2014/main" val="20000"/>
+                    </a:ext>
+                  </a:extLst>
+                </a:gridCol>
+                <a:gridCol w="3108960">
+                  <a:extLst>
+                    <a:ext uri="{9D8B030D-6E8A-4147-A177-3AD203B41FA5}">
+                      <a16:colId xmlns:a16="http://schemas.microsoft.com/office/drawing/2014/main" val="20001"/>
+                    </a:ext>
+                  </a:extLst>
+                </a:gridCol>
+                <a:gridCol w="3108960">
+                  <a:extLst>
+                    <a:ext uri="{9D8B030D-6E8A-4147-A177-3AD203B41FA5}">
+                      <a16:colId xmlns:a16="http://schemas.microsoft.com/office/drawing/2014/main" val="20002"/>
+                    </a:ext>
+                  </a:extLst>
+                </a:gridCol>
+                <a:gridCol w="3474720">
+                  <a:extLst>
+                    <a:ext uri="{9D8B030D-6E8A-4147-A177-3AD203B41FA5}">
+                      <a16:colId xmlns:a16="http://schemas.microsoft.com/office/drawing/2014/main" val="20003"/>
+                    </a:ext>
+                  </a:extLst>
+                </a:gridCol>
               </a:tblGrid>
               <a:tr h="420624">
                 <a:tc>
@@ -3732,6 +3768,11 @@
                     </a:solidFill>
                   </a:tcPr>
                 </a:tc>
+                <a:extLst>
+                  <a:ext uri="{0D108BD9-81ED-4DB2-BD59-A6C34878D82A}">
+                    <a16:rowId xmlns:a16="http://schemas.microsoft.com/office/drawing/2014/main" val="10000"/>
+                  </a:ext>
+                </a:extLst>
               </a:tr>
               <a:tr h="420624">
                 <a:tc>
@@ -3826,6 +3867,11 @@
                     </a:solidFill>
                   </a:tcPr>
                 </a:tc>
+                <a:extLst>
+                  <a:ext uri="{0D108BD9-81ED-4DB2-BD59-A6C34878D82A}">
+                    <a16:rowId xmlns:a16="http://schemas.microsoft.com/office/drawing/2014/main" val="10001"/>
+                  </a:ext>
+                </a:extLst>
               </a:tr>
               <a:tr h="420624">
                 <a:tc>
@@ -3920,6 +3966,11 @@
                     </a:solidFill>
                   </a:tcPr>
                 </a:tc>
+                <a:extLst>
+                  <a:ext uri="{0D108BD9-81ED-4DB2-BD59-A6C34878D82A}">
+                    <a16:rowId xmlns:a16="http://schemas.microsoft.com/office/drawing/2014/main" val="10002"/>
+                  </a:ext>
+                </a:extLst>
               </a:tr>
               <a:tr h="420624">
                 <a:tc>
@@ -4014,6 +4065,11 @@
                     </a:solidFill>
                   </a:tcPr>
                 </a:tc>
+                <a:extLst>
+                  <a:ext uri="{0D108BD9-81ED-4DB2-BD59-A6C34878D82A}">
+                    <a16:rowId xmlns:a16="http://schemas.microsoft.com/office/drawing/2014/main" val="10003"/>
+                  </a:ext>
+                </a:extLst>
               </a:tr>
               <a:tr h="420624">
                 <a:tc>
@@ -4108,6 +4164,11 @@
                     </a:solidFill>
                   </a:tcPr>
                 </a:tc>
+                <a:extLst>
+                  <a:ext uri="{0D108BD9-81ED-4DB2-BD59-A6C34878D82A}">
+                    <a16:rowId xmlns:a16="http://schemas.microsoft.com/office/drawing/2014/main" val="10004"/>
+                  </a:ext>
+                </a:extLst>
               </a:tr>
               <a:tr h="420624">
                 <a:tc>
@@ -4202,6 +4263,11 @@
                     </a:solidFill>
                   </a:tcPr>
                 </a:tc>
+                <a:extLst>
+                  <a:ext uri="{0D108BD9-81ED-4DB2-BD59-A6C34878D82A}">
+                    <a16:rowId xmlns:a16="http://schemas.microsoft.com/office/drawing/2014/main" val="10005"/>
+                  </a:ext>
+                </a:extLst>
               </a:tr>
             </a:tbl>
           </a:graphicData>
@@ -4247,6 +4313,7 @@
           <a:lstStyle/>
           <a:p>
             <a:pPr algn="ctr"/>
+            <a:endParaRPr/>
           </a:p>
         </p:txBody>
       </p:sp>
@@ -4294,7 +4361,7 @@
 </file>
 
 <file path=ppt/slides/slide11.xml><?xml version="1.0" encoding="utf-8"?>
-<p:sld xmlns:a="http://schemas.openxmlformats.org/drawingml/2006/main" xmlns:p="http://schemas.openxmlformats.org/presentationml/2006/main" xmlns:r="http://schemas.openxmlformats.org/officeDocument/2006/relationships">
+<p:sld xmlns:a="http://schemas.openxmlformats.org/drawingml/2006/main" xmlns:r="http://schemas.openxmlformats.org/officeDocument/2006/relationships" xmlns:p="http://schemas.openxmlformats.org/presentationml/2006/main">
   <p:cSld>
     <p:spTree>
       <p:nvGrpSpPr>
@@ -4302,7 +4369,14 @@
         <p:cNvGrpSpPr/>
         <p:nvPr/>
       </p:nvGrpSpPr>
-      <p:grpSpPr/>
+      <p:grpSpPr>
+        <a:xfrm>
+          <a:off x="0" y="0"/>
+          <a:ext cx="0" cy="0"/>
+          <a:chOff x="0" y="0"/>
+          <a:chExt cx="0" cy="0"/>
+        </a:xfrm>
+      </p:grpSpPr>
       <p:sp>
         <p:nvSpPr>
           <p:cNvPr id="2" name="Rectangle 1"/>
@@ -4343,6 +4417,7 @@
           <a:lstStyle/>
           <a:p>
             <a:pPr algn="ctr"/>
+            <a:endParaRPr/>
           </a:p>
         </p:txBody>
       </p:sp>
@@ -4456,6 +4531,7 @@
           <a:lstStyle/>
           <a:p>
             <a:pPr algn="ctr"/>
+            <a:endParaRPr/>
           </a:p>
         </p:txBody>
       </p:sp>
@@ -4571,6 +4647,7 @@
           <a:lstStyle/>
           <a:p>
             <a:pPr algn="ctr"/>
+            <a:endParaRPr/>
           </a:p>
         </p:txBody>
       </p:sp>
@@ -4607,6 +4684,14 @@
             </a:r>
           </a:p>
           <a:p>
+            <a:endParaRPr sz="1300">
+              <a:solidFill>
+                <a:srgbClr val="FFFFFF"/>
+              </a:solidFill>
+              <a:latin typeface="Consolas"/>
+            </a:endParaRPr>
+          </a:p>
+          <a:p>
             <a:r>
               <a:rPr sz="1300">
                 <a:solidFill>
@@ -4614,7 +4699,7 @@
                 </a:solidFill>
                 <a:latin typeface="Consolas"/>
               </a:rPr>
-              <a:t/>
+              <a:t>Temp:</a:t>
             </a:r>
           </a:p>
           <a:p>
@@ -4625,8 +4710,16 @@
                 </a:solidFill>
                 <a:latin typeface="Consolas"/>
               </a:rPr>
-              <a:t>Temp:</a:t>
-            </a:r>
+              <a:t>  25.3  C</a:t>
+            </a:r>
+          </a:p>
+          <a:p>
+            <a:endParaRPr sz="1300">
+              <a:solidFill>
+                <a:srgbClr val="FFFFFF"/>
+              </a:solidFill>
+              <a:latin typeface="Consolas"/>
+            </a:endParaRPr>
           </a:p>
           <a:p>
             <a:r>
@@ -4636,41 +4729,16 @@
                 </a:solidFill>
                 <a:latin typeface="Consolas"/>
               </a:rPr>
-              <a:t>  25.3  C</a:t>
-            </a:r>
-          </a:p>
-          <a:p>
-            <a:r>
-              <a:rPr sz="1300">
-                <a:solidFill>
-                  <a:srgbClr val="FFFFFF"/>
-                </a:solidFill>
-                <a:latin typeface="Consolas"/>
-              </a:rPr>
-              <a:t/>
-            </a:r>
-          </a:p>
-          <a:p>
-            <a:r>
-              <a:rPr sz="1300">
-                <a:solidFill>
-                  <a:srgbClr val="FFFFFF"/>
-                </a:solidFill>
-                <a:latin typeface="Consolas"/>
-              </a:rPr>
               <a:t>SD Ready</a:t>
             </a:r>
           </a:p>
           <a:p>
-            <a:r>
-              <a:rPr sz="1300">
-                <a:solidFill>
-                  <a:srgbClr val="FFFFFF"/>
-                </a:solidFill>
-                <a:latin typeface="Consolas"/>
-              </a:rPr>
-              <a:t/>
-            </a:r>
+            <a:endParaRPr sz="1300">
+              <a:solidFill>
+                <a:srgbClr val="FFFFFF"/>
+              </a:solidFill>
+              <a:latin typeface="Consolas"/>
+            </a:endParaRPr>
           </a:p>
           <a:p>
             <a:r>
@@ -4739,8 +4807,20 @@
                 <a:tableStyleId>{5C22544A-7EE6-4342-B048-85BDC9FD1C3A}</a:tableStyleId>
               </a:tblPr>
               <a:tblGrid>
-                <a:gridCol w="2011680"/>
-                <a:gridCol w="3566160"/>
+                <a:gridCol w="2011680">
+                  <a:extLst>
+                    <a:ext uri="{9D8B030D-6E8A-4147-A177-3AD203B41FA5}">
+                      <a16:colId xmlns:a16="http://schemas.microsoft.com/office/drawing/2014/main" val="20000"/>
+                    </a:ext>
+                  </a:extLst>
+                </a:gridCol>
+                <a:gridCol w="3566160">
+                  <a:extLst>
+                    <a:ext uri="{9D8B030D-6E8A-4147-A177-3AD203B41FA5}">
+                      <a16:colId xmlns:a16="http://schemas.microsoft.com/office/drawing/2014/main" val="20001"/>
+                    </a:ext>
+                  </a:extLst>
+                </a:gridCol>
               </a:tblGrid>
               <a:tr h="429768">
                 <a:tc>
@@ -4789,6 +4869,11 @@
                     </a:solidFill>
                   </a:tcPr>
                 </a:tc>
+                <a:extLst>
+                  <a:ext uri="{0D108BD9-81ED-4DB2-BD59-A6C34878D82A}">
+                    <a16:rowId xmlns:a16="http://schemas.microsoft.com/office/drawing/2014/main" val="10000"/>
+                  </a:ext>
+                </a:extLst>
               </a:tr>
               <a:tr h="429768">
                 <a:tc>
@@ -4837,6 +4922,11 @@
                     </a:solidFill>
                   </a:tcPr>
                 </a:tc>
+                <a:extLst>
+                  <a:ext uri="{0D108BD9-81ED-4DB2-BD59-A6C34878D82A}">
+                    <a16:rowId xmlns:a16="http://schemas.microsoft.com/office/drawing/2014/main" val="10001"/>
+                  </a:ext>
+                </a:extLst>
               </a:tr>
               <a:tr h="429768">
                 <a:tc>
@@ -4885,6 +4975,11 @@
                     </a:solidFill>
                   </a:tcPr>
                 </a:tc>
+                <a:extLst>
+                  <a:ext uri="{0D108BD9-81ED-4DB2-BD59-A6C34878D82A}">
+                    <a16:rowId xmlns:a16="http://schemas.microsoft.com/office/drawing/2014/main" val="10002"/>
+                  </a:ext>
+                </a:extLst>
               </a:tr>
               <a:tr h="429768">
                 <a:tc>
@@ -4933,6 +5028,11 @@
                     </a:solidFill>
                   </a:tcPr>
                 </a:tc>
+                <a:extLst>
+                  <a:ext uri="{0D108BD9-81ED-4DB2-BD59-A6C34878D82A}">
+                    <a16:rowId xmlns:a16="http://schemas.microsoft.com/office/drawing/2014/main" val="10003"/>
+                  </a:ext>
+                </a:extLst>
               </a:tr>
               <a:tr h="429768">
                 <a:tc>
@@ -4981,6 +5081,11 @@
                     </a:solidFill>
                   </a:tcPr>
                 </a:tc>
+                <a:extLst>
+                  <a:ext uri="{0D108BD9-81ED-4DB2-BD59-A6C34878D82A}">
+                    <a16:rowId xmlns:a16="http://schemas.microsoft.com/office/drawing/2014/main" val="10004"/>
+                  </a:ext>
+                </a:extLst>
               </a:tr>
               <a:tr h="429768">
                 <a:tc>
@@ -5029,6 +5134,11 @@
                     </a:solidFill>
                   </a:tcPr>
                 </a:tc>
+                <a:extLst>
+                  <a:ext uri="{0D108BD9-81ED-4DB2-BD59-A6C34878D82A}">
+                    <a16:rowId xmlns:a16="http://schemas.microsoft.com/office/drawing/2014/main" val="10005"/>
+                  </a:ext>
+                </a:extLst>
               </a:tr>
               <a:tr h="429768">
                 <a:tc>
@@ -5077,6 +5187,11 @@
                     </a:solidFill>
                   </a:tcPr>
                 </a:tc>
+                <a:extLst>
+                  <a:ext uri="{0D108BD9-81ED-4DB2-BD59-A6C34878D82A}">
+                    <a16:rowId xmlns:a16="http://schemas.microsoft.com/office/drawing/2014/main" val="10006"/>
+                  </a:ext>
+                </a:extLst>
               </a:tr>
             </a:tbl>
           </a:graphicData>
@@ -5091,7 +5206,7 @@
 </file>
 
 <file path=ppt/slides/slide12.xml><?xml version="1.0" encoding="utf-8"?>
-<p:sld xmlns:a="http://schemas.openxmlformats.org/drawingml/2006/main" xmlns:p="http://schemas.openxmlformats.org/presentationml/2006/main" xmlns:r="http://schemas.openxmlformats.org/officeDocument/2006/relationships">
+<p:sld xmlns:a="http://schemas.openxmlformats.org/drawingml/2006/main" xmlns:r="http://schemas.openxmlformats.org/officeDocument/2006/relationships" xmlns:p="http://schemas.openxmlformats.org/presentationml/2006/main">
   <p:cSld>
     <p:spTree>
       <p:nvGrpSpPr>
@@ -5099,7 +5214,14 @@
         <p:cNvGrpSpPr/>
         <p:nvPr/>
       </p:nvGrpSpPr>
-      <p:grpSpPr/>
+      <p:grpSpPr>
+        <a:xfrm>
+          <a:off x="0" y="0"/>
+          <a:ext cx="0" cy="0"/>
+          <a:chOff x="0" y="0"/>
+          <a:chExt cx="0" cy="0"/>
+        </a:xfrm>
+      </p:grpSpPr>
       <p:sp>
         <p:nvSpPr>
           <p:cNvPr id="2" name="Rectangle 1"/>
@@ -5140,6 +5262,7 @@
           <a:lstStyle/>
           <a:p>
             <a:pPr algn="ctr"/>
+            <a:endParaRPr/>
           </a:p>
         </p:txBody>
       </p:sp>
@@ -5253,6 +5376,7 @@
           <a:lstStyle/>
           <a:p>
             <a:pPr algn="ctr"/>
+            <a:endParaRPr/>
           </a:p>
         </p:txBody>
       </p:sp>
@@ -5368,6 +5492,7 @@
           <a:lstStyle/>
           <a:p>
             <a:pPr algn="ctr"/>
+            <a:endParaRPr/>
           </a:p>
         </p:txBody>
       </p:sp>
@@ -5404,6 +5529,14 @@
             </a:r>
           </a:p>
           <a:p>
+            <a:endParaRPr sz="1300">
+              <a:solidFill>
+                <a:srgbClr val="FFFFFF"/>
+              </a:solidFill>
+              <a:latin typeface="Consolas"/>
+            </a:endParaRPr>
+          </a:p>
+          <a:p>
             <a:r>
               <a:rPr sz="1300">
                 <a:solidFill>
@@ -5411,7 +5544,7 @@
                 </a:solidFill>
                 <a:latin typeface="Consolas"/>
               </a:rPr>
-              <a:t/>
+              <a:t>Temp:</a:t>
             </a:r>
           </a:p>
           <a:p>
@@ -5422,8 +5555,16 @@
                 </a:solidFill>
                 <a:latin typeface="Consolas"/>
               </a:rPr>
-              <a:t>Temp:</a:t>
-            </a:r>
+              <a:t>  540.2  C</a:t>
+            </a:r>
+          </a:p>
+          <a:p>
+            <a:endParaRPr sz="1300">
+              <a:solidFill>
+                <a:srgbClr val="FFFFFF"/>
+              </a:solidFill>
+              <a:latin typeface="Consolas"/>
+            </a:endParaRPr>
           </a:p>
           <a:p>
             <a:r>
@@ -5433,7 +5574,7 @@
                 </a:solidFill>
                 <a:latin typeface="Consolas"/>
               </a:rPr>
-              <a:t>  540.2  C</a:t>
+              <a:t>Samples:   142</a:t>
             </a:r>
           </a:p>
           <a:p>
@@ -5444,41 +5585,16 @@
                 </a:solidFill>
                 <a:latin typeface="Consolas"/>
               </a:rPr>
-              <a:t/>
-            </a:r>
-          </a:p>
-          <a:p>
-            <a:r>
-              <a:rPr sz="1300">
-                <a:solidFill>
-                  <a:srgbClr val="FFFFFF"/>
-                </a:solidFill>
-                <a:latin typeface="Consolas"/>
-              </a:rPr>
-              <a:t>Samples:   142</a:t>
-            </a:r>
-          </a:p>
-          <a:p>
-            <a:r>
-              <a:rPr sz="1300">
-                <a:solidFill>
-                  <a:srgbClr val="FFFFFF"/>
-                </a:solidFill>
-                <a:latin typeface="Consolas"/>
-              </a:rPr>
               <a:t>SD: /DATA_0000.csv</a:t>
             </a:r>
           </a:p>
           <a:p>
-            <a:r>
-              <a:rPr sz="1300">
-                <a:solidFill>
-                  <a:srgbClr val="FFFFFF"/>
-                </a:solidFill>
-                <a:latin typeface="Consolas"/>
-              </a:rPr>
-              <a:t/>
-            </a:r>
+            <a:endParaRPr sz="1300">
+              <a:solidFill>
+                <a:srgbClr val="FFFFFF"/>
+              </a:solidFill>
+              <a:latin typeface="Consolas"/>
+            </a:endParaRPr>
           </a:p>
           <a:p>
             <a:r>
@@ -5547,8 +5663,20 @@
                 <a:tableStyleId>{5C22544A-7EE6-4342-B048-85BDC9FD1C3A}</a:tableStyleId>
               </a:tblPr>
               <a:tblGrid>
-                <a:gridCol w="2286000"/>
-                <a:gridCol w="3291840"/>
+                <a:gridCol w="2286000">
+                  <a:extLst>
+                    <a:ext uri="{9D8B030D-6E8A-4147-A177-3AD203B41FA5}">
+                      <a16:colId xmlns:a16="http://schemas.microsoft.com/office/drawing/2014/main" val="20000"/>
+                    </a:ext>
+                  </a:extLst>
+                </a:gridCol>
+                <a:gridCol w="3291840">
+                  <a:extLst>
+                    <a:ext uri="{9D8B030D-6E8A-4147-A177-3AD203B41FA5}">
+                      <a16:colId xmlns:a16="http://schemas.microsoft.com/office/drawing/2014/main" val="20001"/>
+                    </a:ext>
+                  </a:extLst>
+                </a:gridCol>
               </a:tblGrid>
               <a:tr h="429768">
                 <a:tc>
@@ -5597,6 +5725,11 @@
                     </a:solidFill>
                   </a:tcPr>
                 </a:tc>
+                <a:extLst>
+                  <a:ext uri="{0D108BD9-81ED-4DB2-BD59-A6C34878D82A}">
+                    <a16:rowId xmlns:a16="http://schemas.microsoft.com/office/drawing/2014/main" val="10000"/>
+                  </a:ext>
+                </a:extLst>
               </a:tr>
               <a:tr h="429768">
                 <a:tc>
@@ -5645,6 +5778,11 @@
                     </a:solidFill>
                   </a:tcPr>
                 </a:tc>
+                <a:extLst>
+                  <a:ext uri="{0D108BD9-81ED-4DB2-BD59-A6C34878D82A}">
+                    <a16:rowId xmlns:a16="http://schemas.microsoft.com/office/drawing/2014/main" val="10001"/>
+                  </a:ext>
+                </a:extLst>
               </a:tr>
               <a:tr h="429768">
                 <a:tc>
@@ -5693,6 +5831,11 @@
                     </a:solidFill>
                   </a:tcPr>
                 </a:tc>
+                <a:extLst>
+                  <a:ext uri="{0D108BD9-81ED-4DB2-BD59-A6C34878D82A}">
+                    <a16:rowId xmlns:a16="http://schemas.microsoft.com/office/drawing/2014/main" val="10002"/>
+                  </a:ext>
+                </a:extLst>
               </a:tr>
               <a:tr h="429768">
                 <a:tc>
@@ -5741,6 +5884,11 @@
                     </a:solidFill>
                   </a:tcPr>
                 </a:tc>
+                <a:extLst>
+                  <a:ext uri="{0D108BD9-81ED-4DB2-BD59-A6C34878D82A}">
+                    <a16:rowId xmlns:a16="http://schemas.microsoft.com/office/drawing/2014/main" val="10003"/>
+                  </a:ext>
+                </a:extLst>
               </a:tr>
               <a:tr h="429768">
                 <a:tc>
@@ -5789,6 +5937,11 @@
                     </a:solidFill>
                   </a:tcPr>
                 </a:tc>
+                <a:extLst>
+                  <a:ext uri="{0D108BD9-81ED-4DB2-BD59-A6C34878D82A}">
+                    <a16:rowId xmlns:a16="http://schemas.microsoft.com/office/drawing/2014/main" val="10004"/>
+                  </a:ext>
+                </a:extLst>
               </a:tr>
               <a:tr h="429768">
                 <a:tc>
@@ -5837,6 +5990,11 @@
                     </a:solidFill>
                   </a:tcPr>
                 </a:tc>
+                <a:extLst>
+                  <a:ext uri="{0D108BD9-81ED-4DB2-BD59-A6C34878D82A}">
+                    <a16:rowId xmlns:a16="http://schemas.microsoft.com/office/drawing/2014/main" val="10005"/>
+                  </a:ext>
+                </a:extLst>
               </a:tr>
               <a:tr h="429768">
                 <a:tc>
@@ -5885,6 +6043,11 @@
                     </a:solidFill>
                   </a:tcPr>
                 </a:tc>
+                <a:extLst>
+                  <a:ext uri="{0D108BD9-81ED-4DB2-BD59-A6C34878D82A}">
+                    <a16:rowId xmlns:a16="http://schemas.microsoft.com/office/drawing/2014/main" val="10006"/>
+                  </a:ext>
+                </a:extLst>
               </a:tr>
             </a:tbl>
           </a:graphicData>
@@ -5899,7 +6062,7 @@
 </file>
 
 <file path=ppt/slides/slide13.xml><?xml version="1.0" encoding="utf-8"?>
-<p:sld xmlns:a="http://schemas.openxmlformats.org/drawingml/2006/main" xmlns:p="http://schemas.openxmlformats.org/presentationml/2006/main" xmlns:r="http://schemas.openxmlformats.org/officeDocument/2006/relationships">
+<p:sld xmlns:a="http://schemas.openxmlformats.org/drawingml/2006/main" xmlns:r="http://schemas.openxmlformats.org/officeDocument/2006/relationships" xmlns:p="http://schemas.openxmlformats.org/presentationml/2006/main">
   <p:cSld>
     <p:spTree>
       <p:nvGrpSpPr>
@@ -5907,7 +6070,14 @@
         <p:cNvGrpSpPr/>
         <p:nvPr/>
       </p:nvGrpSpPr>
-      <p:grpSpPr/>
+      <p:grpSpPr>
+        <a:xfrm>
+          <a:off x="0" y="0"/>
+          <a:ext cx="0" cy="0"/>
+          <a:chOff x="0" y="0"/>
+          <a:chExt cx="0" cy="0"/>
+        </a:xfrm>
+      </p:grpSpPr>
       <p:sp>
         <p:nvSpPr>
           <p:cNvPr id="2" name="Rectangle 1"/>
@@ -5948,6 +6118,7 @@
           <a:lstStyle/>
           <a:p>
             <a:pPr algn="ctr"/>
+            <a:endParaRPr/>
           </a:p>
         </p:txBody>
       </p:sp>
@@ -6061,6 +6232,7 @@
           <a:lstStyle/>
           <a:p>
             <a:pPr algn="ctr"/>
+            <a:endParaRPr/>
           </a:p>
         </p:txBody>
       </p:sp>
@@ -6176,6 +6348,7 @@
           <a:lstStyle/>
           <a:p>
             <a:pPr algn="ctr"/>
+            <a:endParaRPr/>
           </a:p>
         </p:txBody>
       </p:sp>
@@ -6212,6 +6385,14 @@
             </a:r>
           </a:p>
           <a:p>
+            <a:endParaRPr sz="1300">
+              <a:solidFill>
+                <a:srgbClr val="FFFFFF"/>
+              </a:solidFill>
+              <a:latin typeface="Consolas"/>
+            </a:endParaRPr>
+          </a:p>
+          <a:p>
             <a:r>
               <a:rPr sz="1300">
                 <a:solidFill>
@@ -6219,7 +6400,7 @@
                 </a:solidFill>
                 <a:latin typeface="Consolas"/>
               </a:rPr>
-              <a:t/>
+              <a:t>Temp:</a:t>
             </a:r>
           </a:p>
           <a:p>
@@ -6230,8 +6411,16 @@
                 </a:solidFill>
                 <a:latin typeface="Consolas"/>
               </a:rPr>
-              <a:t>Temp:</a:t>
-            </a:r>
+              <a:t>  540.2  C</a:t>
+            </a:r>
+          </a:p>
+          <a:p>
+            <a:endParaRPr sz="1300">
+              <a:solidFill>
+                <a:srgbClr val="FFFFFF"/>
+              </a:solidFill>
+              <a:latin typeface="Consolas"/>
+            </a:endParaRPr>
           </a:p>
           <a:p>
             <a:r>
@@ -6241,7 +6430,7 @@
                 </a:solidFill>
                 <a:latin typeface="Consolas"/>
               </a:rPr>
-              <a:t>  540.2  C</a:t>
+              <a:t>Avg:</a:t>
             </a:r>
           </a:p>
           <a:p>
@@ -6252,41 +6441,16 @@
                 </a:solidFill>
                 <a:latin typeface="Consolas"/>
               </a:rPr>
-              <a:t/>
-            </a:r>
-          </a:p>
-          <a:p>
-            <a:r>
-              <a:rPr sz="1300">
-                <a:solidFill>
-                  <a:srgbClr val="FFFFFF"/>
-                </a:solidFill>
-                <a:latin typeface="Consolas"/>
-              </a:rPr>
-              <a:t>Avg:</a:t>
-            </a:r>
-          </a:p>
-          <a:p>
-            <a:r>
-              <a:rPr sz="1300">
-                <a:solidFill>
-                  <a:srgbClr val="FFFFFF"/>
-                </a:solidFill>
-                <a:latin typeface="Consolas"/>
-              </a:rPr>
               <a:t>  539.8  C</a:t>
             </a:r>
           </a:p>
           <a:p>
-            <a:r>
-              <a:rPr sz="1300">
-                <a:solidFill>
-                  <a:srgbClr val="FFFFFF"/>
-                </a:solidFill>
-                <a:latin typeface="Consolas"/>
-              </a:rPr>
-              <a:t/>
-            </a:r>
+            <a:endParaRPr sz="1300">
+              <a:solidFill>
+                <a:srgbClr val="FFFFFF"/>
+              </a:solidFill>
+              <a:latin typeface="Consolas"/>
+            </a:endParaRPr>
           </a:p>
           <a:p>
             <a:r>
@@ -6378,6 +6542,7 @@
           <a:lstStyle/>
           <a:p>
             <a:pPr algn="ctr"/>
+            <a:endParaRPr/>
           </a:p>
         </p:txBody>
       </p:sp>
@@ -6414,6 +6579,14 @@
             </a:r>
           </a:p>
           <a:p>
+            <a:endParaRPr sz="1300">
+              <a:solidFill>
+                <a:srgbClr val="FFFFFF"/>
+              </a:solidFill>
+              <a:latin typeface="Consolas"/>
+            </a:endParaRPr>
+          </a:p>
+          <a:p>
             <a:r>
               <a:rPr sz="1300">
                 <a:solidFill>
@@ -6421,7 +6594,7 @@
                 </a:solidFill>
                 <a:latin typeface="Consolas"/>
               </a:rPr>
-              <a:t/>
+              <a:t>StdDev:</a:t>
             </a:r>
           </a:p>
           <a:p>
@@ -6432,7 +6605,7 @@
                 </a:solidFill>
                 <a:latin typeface="Consolas"/>
               </a:rPr>
-              <a:t>StdDev:</a:t>
+              <a:t>   0.8  C</a:t>
             </a:r>
           </a:p>
           <a:p>
@@ -6443,7 +6616,7 @@
                 </a:solidFill>
                 <a:latin typeface="Consolas"/>
               </a:rPr>
-              <a:t>   0.8  C</a:t>
+              <a:t>Range:   10.0  C</a:t>
             </a:r>
           </a:p>
           <a:p>
@@ -6454,7 +6627,7 @@
                 </a:solidFill>
                 <a:latin typeface="Consolas"/>
               </a:rPr>
-              <a:t>Range:   10.0  C</a:t>
+              <a:t>Max:    550.0  C</a:t>
             </a:r>
           </a:p>
           <a:p>
@@ -6465,30 +6638,16 @@
                 </a:solidFill>
                 <a:latin typeface="Consolas"/>
               </a:rPr>
-              <a:t>Max:    550.0  C</a:t>
-            </a:r>
-          </a:p>
-          <a:p>
-            <a:r>
-              <a:rPr sz="1300">
-                <a:solidFill>
-                  <a:srgbClr val="FFFFFF"/>
-                </a:solidFill>
-                <a:latin typeface="Consolas"/>
-              </a:rPr>
               <a:t>Min:    530.0  C</a:t>
             </a:r>
           </a:p>
           <a:p>
-            <a:r>
-              <a:rPr sz="1300">
-                <a:solidFill>
-                  <a:srgbClr val="FFFFFF"/>
-                </a:solidFill>
-                <a:latin typeface="Consolas"/>
-              </a:rPr>
-              <a:t/>
-            </a:r>
+            <a:endParaRPr sz="1300">
+              <a:solidFill>
+                <a:srgbClr val="FFFFFF"/>
+              </a:solidFill>
+              <a:latin typeface="Consolas"/>
+            </a:endParaRPr>
           </a:p>
           <a:p>
             <a:r>
@@ -6547,7 +6706,7 @@
 </file>
 
 <file path=ppt/slides/slide14.xml><?xml version="1.0" encoding="utf-8"?>
-<p:sld xmlns:a="http://schemas.openxmlformats.org/drawingml/2006/main" xmlns:p="http://schemas.openxmlformats.org/presentationml/2006/main" xmlns:r="http://schemas.openxmlformats.org/officeDocument/2006/relationships">
+<p:sld xmlns:a="http://schemas.openxmlformats.org/drawingml/2006/main" xmlns:r="http://schemas.openxmlformats.org/officeDocument/2006/relationships" xmlns:p="http://schemas.openxmlformats.org/presentationml/2006/main">
   <p:cSld>
     <p:spTree>
       <p:nvGrpSpPr>
@@ -6555,7 +6714,14 @@
         <p:cNvGrpSpPr/>
         <p:nvPr/>
       </p:nvGrpSpPr>
-      <p:grpSpPr/>
+      <p:grpSpPr>
+        <a:xfrm>
+          <a:off x="0" y="0"/>
+          <a:ext cx="0" cy="0"/>
+          <a:chOff x="0" y="0"/>
+          <a:chExt cx="0" cy="0"/>
+        </a:xfrm>
+      </p:grpSpPr>
       <p:sp>
         <p:nvSpPr>
           <p:cNvPr id="2" name="Rectangle 1"/>
@@ -6596,6 +6762,7 @@
           <a:lstStyle/>
           <a:p>
             <a:pPr algn="ctr"/>
+            <a:endParaRPr/>
           </a:p>
         </p:txBody>
       </p:sp>
@@ -6709,6 +6876,7 @@
           <a:lstStyle/>
           <a:p>
             <a:pPr algn="ctr"/>
+            <a:endParaRPr/>
           </a:p>
         </p:txBody>
       </p:sp>
@@ -6824,6 +6992,7 @@
           <a:lstStyle/>
           <a:p>
             <a:pPr algn="ctr"/>
+            <a:endParaRPr/>
           </a:p>
         </p:txBody>
       </p:sp>
@@ -6860,6 +7029,14 @@
             </a:r>
           </a:p>
           <a:p>
+            <a:endParaRPr sz="1300">
+              <a:solidFill>
+                <a:srgbClr val="FFFFFF"/>
+              </a:solidFill>
+              <a:latin typeface="Consolas"/>
+            </a:endParaRPr>
+          </a:p>
+          <a:p>
             <a:r>
               <a:rPr sz="1300">
                 <a:solidFill>
@@ -6867,7 +7044,7 @@
                 </a:solidFill>
                 <a:latin typeface="Consolas"/>
               </a:rPr>
-              <a:t/>
+              <a:t>Current:</a:t>
             </a:r>
           </a:p>
           <a:p>
@@ -6878,30 +7055,16 @@
                 </a:solidFill>
                 <a:latin typeface="Consolas"/>
               </a:rPr>
-              <a:t>Current:</a:t>
-            </a:r>
-          </a:p>
-          <a:p>
-            <a:r>
-              <a:rPr sz="1300">
-                <a:solidFill>
-                  <a:srgbClr val="FFFFFF"/>
-                </a:solidFill>
-                <a:latin typeface="Consolas"/>
-              </a:rPr>
               <a:t>  600.0  C</a:t>
             </a:r>
           </a:p>
           <a:p>
-            <a:r>
-              <a:rPr sz="1300">
-                <a:solidFill>
-                  <a:srgbClr val="FFFFFF"/>
-                </a:solidFill>
-                <a:latin typeface="Consolas"/>
-              </a:rPr>
-              <a:t/>
-            </a:r>
+            <a:endParaRPr sz="1300">
+              <a:solidFill>
+                <a:srgbClr val="FFFFFF"/>
+              </a:solidFill>
+              <a:latin typeface="Consolas"/>
+            </a:endParaRPr>
           </a:p>
           <a:p>
             <a:r>
@@ -7004,6 +7167,7 @@
           <a:lstStyle/>
           <a:p>
             <a:pPr algn="ctr"/>
+            <a:endParaRPr/>
           </a:p>
         </p:txBody>
       </p:sp>
@@ -7040,6 +7204,14 @@
             </a:r>
           </a:p>
           <a:p>
+            <a:endParaRPr sz="1300">
+              <a:solidFill>
+                <a:srgbClr val="FFFFFF"/>
+              </a:solidFill>
+              <a:latin typeface="Consolas"/>
+            </a:endParaRPr>
+          </a:p>
+          <a:p>
             <a:r>
               <a:rPr sz="1300">
                 <a:solidFill>
@@ -7047,7 +7219,7 @@
                 </a:solidFill>
                 <a:latin typeface="Consolas"/>
               </a:rPr>
-              <a:t/>
+              <a:t>Current:</a:t>
             </a:r>
           </a:p>
           <a:p>
@@ -7058,30 +7230,16 @@
                 </a:solidFill>
                 <a:latin typeface="Consolas"/>
               </a:rPr>
-              <a:t>Current:</a:t>
-            </a:r>
-          </a:p>
-          <a:p>
-            <a:r>
-              <a:rPr sz="1300">
-                <a:solidFill>
-                  <a:srgbClr val="FFFFFF"/>
-                </a:solidFill>
-                <a:latin typeface="Consolas"/>
-              </a:rPr>
               <a:t>  400.0  C</a:t>
             </a:r>
           </a:p>
           <a:p>
-            <a:r>
-              <a:rPr sz="1300">
-                <a:solidFill>
-                  <a:srgbClr val="FFFFFF"/>
-                </a:solidFill>
-                <a:latin typeface="Consolas"/>
-              </a:rPr>
-              <a:t/>
-            </a:r>
+            <a:endParaRPr sz="1300">
+              <a:solidFill>
+                <a:srgbClr val="FFFFFF"/>
+              </a:solidFill>
+              <a:latin typeface="Consolas"/>
+            </a:endParaRPr>
           </a:p>
           <a:p>
             <a:r>
@@ -7151,7 +7309,7 @@
 </file>
 
 <file path=ppt/slides/slide15.xml><?xml version="1.0" encoding="utf-8"?>
-<p:sld xmlns:a="http://schemas.openxmlformats.org/drawingml/2006/main" xmlns:p="http://schemas.openxmlformats.org/presentationml/2006/main" xmlns:r="http://schemas.openxmlformats.org/officeDocument/2006/relationships">
+<p:sld xmlns:a="http://schemas.openxmlformats.org/drawingml/2006/main" xmlns:r="http://schemas.openxmlformats.org/officeDocument/2006/relationships" xmlns:p="http://schemas.openxmlformats.org/presentationml/2006/main">
   <p:cSld>
     <p:spTree>
       <p:nvGrpSpPr>
@@ -7159,7 +7317,14 @@
         <p:cNvGrpSpPr/>
         <p:nvPr/>
       </p:nvGrpSpPr>
-      <p:grpSpPr/>
+      <p:grpSpPr>
+        <a:xfrm>
+          <a:off x="0" y="0"/>
+          <a:ext cx="0" cy="0"/>
+          <a:chOff x="0" y="0"/>
+          <a:chExt cx="0" cy="0"/>
+        </a:xfrm>
+      </p:grpSpPr>
       <p:sp>
         <p:nvSpPr>
           <p:cNvPr id="2" name="Rectangle 1"/>
@@ -7200,6 +7365,7 @@
           <a:lstStyle/>
           <a:p>
             <a:pPr algn="ctr"/>
+            <a:endParaRPr/>
           </a:p>
         </p:txBody>
       </p:sp>
@@ -7313,6 +7479,7 @@
           <a:lstStyle/>
           <a:p>
             <a:pPr algn="ctr"/>
+            <a:endParaRPr/>
           </a:p>
         </p:txBody>
       </p:sp>
@@ -7440,10 +7607,34 @@
                 <a:tableStyleId>{5C22544A-7EE6-4342-B048-85BDC9FD1C3A}</a:tableStyleId>
               </a:tblPr>
               <a:tblGrid>
-                <a:gridCol w="731520"/>
-                <a:gridCol w="2103120"/>
-                <a:gridCol w="1828800"/>
-                <a:gridCol w="6858000"/>
+                <a:gridCol w="731520">
+                  <a:extLst>
+                    <a:ext uri="{9D8B030D-6E8A-4147-A177-3AD203B41FA5}">
+                      <a16:colId xmlns:a16="http://schemas.microsoft.com/office/drawing/2014/main" val="20000"/>
+                    </a:ext>
+                  </a:extLst>
+                </a:gridCol>
+                <a:gridCol w="2103120">
+                  <a:extLst>
+                    <a:ext uri="{9D8B030D-6E8A-4147-A177-3AD203B41FA5}">
+                      <a16:colId xmlns:a16="http://schemas.microsoft.com/office/drawing/2014/main" val="20001"/>
+                    </a:ext>
+                  </a:extLst>
+                </a:gridCol>
+                <a:gridCol w="1828800">
+                  <a:extLst>
+                    <a:ext uri="{9D8B030D-6E8A-4147-A177-3AD203B41FA5}">
+                      <a16:colId xmlns:a16="http://schemas.microsoft.com/office/drawing/2014/main" val="20002"/>
+                    </a:ext>
+                  </a:extLst>
+                </a:gridCol>
+                <a:gridCol w="6858000">
+                  <a:extLst>
+                    <a:ext uri="{9D8B030D-6E8A-4147-A177-3AD203B41FA5}">
+                      <a16:colId xmlns:a16="http://schemas.microsoft.com/office/drawing/2014/main" val="20003"/>
+                    </a:ext>
+                  </a:extLst>
+                </a:gridCol>
               </a:tblGrid>
               <a:tr h="402336">
                 <a:tc>
@@ -7538,6 +7729,11 @@
                     </a:solidFill>
                   </a:tcPr>
                 </a:tc>
+                <a:extLst>
+                  <a:ext uri="{0D108BD9-81ED-4DB2-BD59-A6C34878D82A}">
+                    <a16:rowId xmlns:a16="http://schemas.microsoft.com/office/drawing/2014/main" val="10000"/>
+                  </a:ext>
+                </a:extLst>
               </a:tr>
               <a:tr h="402336">
                 <a:tc>
@@ -7632,6 +7828,11 @@
                     </a:solidFill>
                   </a:tcPr>
                 </a:tc>
+                <a:extLst>
+                  <a:ext uri="{0D108BD9-81ED-4DB2-BD59-A6C34878D82A}">
+                    <a16:rowId xmlns:a16="http://schemas.microsoft.com/office/drawing/2014/main" val="10001"/>
+                  </a:ext>
+                </a:extLst>
               </a:tr>
               <a:tr h="402336">
                 <a:tc>
@@ -7726,6 +7927,11 @@
                     </a:solidFill>
                   </a:tcPr>
                 </a:tc>
+                <a:extLst>
+                  <a:ext uri="{0D108BD9-81ED-4DB2-BD59-A6C34878D82A}">
+                    <a16:rowId xmlns:a16="http://schemas.microsoft.com/office/drawing/2014/main" val="10002"/>
+                  </a:ext>
+                </a:extLst>
               </a:tr>
               <a:tr h="402336">
                 <a:tc>
@@ -7820,6 +8026,11 @@
                     </a:solidFill>
                   </a:tcPr>
                 </a:tc>
+                <a:extLst>
+                  <a:ext uri="{0D108BD9-81ED-4DB2-BD59-A6C34878D82A}">
+                    <a16:rowId xmlns:a16="http://schemas.microsoft.com/office/drawing/2014/main" val="10003"/>
+                  </a:ext>
+                </a:extLst>
               </a:tr>
               <a:tr h="402336">
                 <a:tc>
@@ -7914,6 +8125,11 @@
                     </a:solidFill>
                   </a:tcPr>
                 </a:tc>
+                <a:extLst>
+                  <a:ext uri="{0D108BD9-81ED-4DB2-BD59-A6C34878D82A}">
+                    <a16:rowId xmlns:a16="http://schemas.microsoft.com/office/drawing/2014/main" val="10004"/>
+                  </a:ext>
+                </a:extLst>
               </a:tr>
               <a:tr h="402336">
                 <a:tc>
@@ -8008,6 +8224,11 @@
                     </a:solidFill>
                   </a:tcPr>
                 </a:tc>
+                <a:extLst>
+                  <a:ext uri="{0D108BD9-81ED-4DB2-BD59-A6C34878D82A}">
+                    <a16:rowId xmlns:a16="http://schemas.microsoft.com/office/drawing/2014/main" val="10005"/>
+                  </a:ext>
+                </a:extLst>
               </a:tr>
               <a:tr h="402336">
                 <a:tc>
@@ -8102,6 +8323,11 @@
                     </a:solidFill>
                   </a:tcPr>
                 </a:tc>
+                <a:extLst>
+                  <a:ext uri="{0D108BD9-81ED-4DB2-BD59-A6C34878D82A}">
+                    <a16:rowId xmlns:a16="http://schemas.microsoft.com/office/drawing/2014/main" val="10006"/>
+                  </a:ext>
+                </a:extLst>
               </a:tr>
               <a:tr h="402336">
                 <a:tc>
@@ -8196,6 +8422,11 @@
                     </a:solidFill>
                   </a:tcPr>
                 </a:tc>
+                <a:extLst>
+                  <a:ext uri="{0D108BD9-81ED-4DB2-BD59-A6C34878D82A}">
+                    <a16:rowId xmlns:a16="http://schemas.microsoft.com/office/drawing/2014/main" val="10007"/>
+                  </a:ext>
+                </a:extLst>
               </a:tr>
               <a:tr h="402336">
                 <a:tc>
@@ -8290,6 +8521,11 @@
                     </a:solidFill>
                   </a:tcPr>
                 </a:tc>
+                <a:extLst>
+                  <a:ext uri="{0D108BD9-81ED-4DB2-BD59-A6C34878D82A}">
+                    <a16:rowId xmlns:a16="http://schemas.microsoft.com/office/drawing/2014/main" val="10008"/>
+                  </a:ext>
+                </a:extLst>
               </a:tr>
               <a:tr h="402336">
                 <a:tc>
@@ -8384,6 +8620,11 @@
                     </a:solidFill>
                   </a:tcPr>
                 </a:tc>
+                <a:extLst>
+                  <a:ext uri="{0D108BD9-81ED-4DB2-BD59-A6C34878D82A}">
+                    <a16:rowId xmlns:a16="http://schemas.microsoft.com/office/drawing/2014/main" val="10009"/>
+                  </a:ext>
+                </a:extLst>
               </a:tr>
               <a:tr h="402336">
                 <a:tc>
@@ -8478,6 +8719,11 @@
                     </a:solidFill>
                   </a:tcPr>
                 </a:tc>
+                <a:extLst>
+                  <a:ext uri="{0D108BD9-81ED-4DB2-BD59-A6C34878D82A}">
+                    <a16:rowId xmlns:a16="http://schemas.microsoft.com/office/drawing/2014/main" val="10010"/>
+                  </a:ext>
+                </a:extLst>
               </a:tr>
             </a:tbl>
           </a:graphicData>
@@ -8523,6 +8769,7 @@
           <a:lstStyle/>
           <a:p>
             <a:pPr algn="ctr"/>
+            <a:endParaRPr/>
           </a:p>
         </p:txBody>
       </p:sp>
@@ -8570,7 +8817,7 @@
 </file>
 
 <file path=ppt/slides/slide16.xml><?xml version="1.0" encoding="utf-8"?>
-<p:sld xmlns:a="http://schemas.openxmlformats.org/drawingml/2006/main" xmlns:p="http://schemas.openxmlformats.org/presentationml/2006/main" xmlns:r="http://schemas.openxmlformats.org/officeDocument/2006/relationships">
+<p:sld xmlns:a="http://schemas.openxmlformats.org/drawingml/2006/main" xmlns:r="http://schemas.openxmlformats.org/officeDocument/2006/relationships" xmlns:p="http://schemas.openxmlformats.org/presentationml/2006/main">
   <p:cSld>
     <p:spTree>
       <p:nvGrpSpPr>
@@ -8578,7 +8825,14 @@
         <p:cNvGrpSpPr/>
         <p:nvPr/>
       </p:nvGrpSpPr>
-      <p:grpSpPr/>
+      <p:grpSpPr>
+        <a:xfrm>
+          <a:off x="0" y="0"/>
+          <a:ext cx="0" cy="0"/>
+          <a:chOff x="0" y="0"/>
+          <a:chExt cx="0" cy="0"/>
+        </a:xfrm>
+      </p:grpSpPr>
       <p:sp>
         <p:nvSpPr>
           <p:cNvPr id="2" name="Rectangle 1"/>
@@ -8619,6 +8873,7 @@
           <a:lstStyle/>
           <a:p>
             <a:pPr algn="ctr"/>
+            <a:endParaRPr/>
           </a:p>
         </p:txBody>
       </p:sp>
@@ -8732,6 +8987,7 @@
           <a:lstStyle/>
           <a:p>
             <a:pPr algn="ctr"/>
+            <a:endParaRPr/>
           </a:p>
         </p:txBody>
       </p:sp>
@@ -8824,9 +9080,27 @@
                 <a:tableStyleId>{5C22544A-7EE6-4342-B048-85BDC9FD1C3A}</a:tableStyleId>
               </a:tblPr>
               <a:tblGrid>
-                <a:gridCol w="731520"/>
-                <a:gridCol w="4114800"/>
-                <a:gridCol w="6675120"/>
+                <a:gridCol w="731520">
+                  <a:extLst>
+                    <a:ext uri="{9D8B030D-6E8A-4147-A177-3AD203B41FA5}">
+                      <a16:colId xmlns:a16="http://schemas.microsoft.com/office/drawing/2014/main" val="20000"/>
+                    </a:ext>
+                  </a:extLst>
+                </a:gridCol>
+                <a:gridCol w="4114800">
+                  <a:extLst>
+                    <a:ext uri="{9D8B030D-6E8A-4147-A177-3AD203B41FA5}">
+                      <a16:colId xmlns:a16="http://schemas.microsoft.com/office/drawing/2014/main" val="20001"/>
+                    </a:ext>
+                  </a:extLst>
+                </a:gridCol>
+                <a:gridCol w="6675120">
+                  <a:extLst>
+                    <a:ext uri="{9D8B030D-6E8A-4147-A177-3AD203B41FA5}">
+                      <a16:colId xmlns:a16="http://schemas.microsoft.com/office/drawing/2014/main" val="20002"/>
+                    </a:ext>
+                  </a:extLst>
+                </a:gridCol>
               </a:tblGrid>
               <a:tr h="457200">
                 <a:tc>
@@ -8898,6 +9172,11 @@
                     </a:solidFill>
                   </a:tcPr>
                 </a:tc>
+                <a:extLst>
+                  <a:ext uri="{0D108BD9-81ED-4DB2-BD59-A6C34878D82A}">
+                    <a16:rowId xmlns:a16="http://schemas.microsoft.com/office/drawing/2014/main" val="10000"/>
+                  </a:ext>
+                </a:extLst>
               </a:tr>
               <a:tr h="457200">
                 <a:tc>
@@ -8969,6 +9248,11 @@
                     </a:solidFill>
                   </a:tcPr>
                 </a:tc>
+                <a:extLst>
+                  <a:ext uri="{0D108BD9-81ED-4DB2-BD59-A6C34878D82A}">
+                    <a16:rowId xmlns:a16="http://schemas.microsoft.com/office/drawing/2014/main" val="10001"/>
+                  </a:ext>
+                </a:extLst>
               </a:tr>
               <a:tr h="457200">
                 <a:tc>
@@ -9040,6 +9324,11 @@
                     </a:solidFill>
                   </a:tcPr>
                 </a:tc>
+                <a:extLst>
+                  <a:ext uri="{0D108BD9-81ED-4DB2-BD59-A6C34878D82A}">
+                    <a16:rowId xmlns:a16="http://schemas.microsoft.com/office/drawing/2014/main" val="10002"/>
+                  </a:ext>
+                </a:extLst>
               </a:tr>
               <a:tr h="457200">
                 <a:tc>
@@ -9111,6 +9400,11 @@
                     </a:solidFill>
                   </a:tcPr>
                 </a:tc>
+                <a:extLst>
+                  <a:ext uri="{0D108BD9-81ED-4DB2-BD59-A6C34878D82A}">
+                    <a16:rowId xmlns:a16="http://schemas.microsoft.com/office/drawing/2014/main" val="10003"/>
+                  </a:ext>
+                </a:extLst>
               </a:tr>
               <a:tr h="457200">
                 <a:tc>
@@ -9182,6 +9476,11 @@
                     </a:solidFill>
                   </a:tcPr>
                 </a:tc>
+                <a:extLst>
+                  <a:ext uri="{0D108BD9-81ED-4DB2-BD59-A6C34878D82A}">
+                    <a16:rowId xmlns:a16="http://schemas.microsoft.com/office/drawing/2014/main" val="10004"/>
+                  </a:ext>
+                </a:extLst>
               </a:tr>
               <a:tr h="457200">
                 <a:tc>
@@ -9253,6 +9552,11 @@
                     </a:solidFill>
                   </a:tcPr>
                 </a:tc>
+                <a:extLst>
+                  <a:ext uri="{0D108BD9-81ED-4DB2-BD59-A6C34878D82A}">
+                    <a16:rowId xmlns:a16="http://schemas.microsoft.com/office/drawing/2014/main" val="10005"/>
+                  </a:ext>
+                </a:extLst>
               </a:tr>
             </a:tbl>
           </a:graphicData>
@@ -9298,6 +9602,7 @@
           <a:lstStyle/>
           <a:p>
             <a:pPr algn="ctr"/>
+            <a:endParaRPr/>
           </a:p>
         </p:txBody>
       </p:sp>
@@ -9345,7 +9650,7 @@
 </file>
 
 <file path=ppt/slides/slide17.xml><?xml version="1.0" encoding="utf-8"?>
-<p:sld xmlns:a="http://schemas.openxmlformats.org/drawingml/2006/main" xmlns:p="http://schemas.openxmlformats.org/presentationml/2006/main" xmlns:r="http://schemas.openxmlformats.org/officeDocument/2006/relationships">
+<p:sld xmlns:a="http://schemas.openxmlformats.org/drawingml/2006/main" xmlns:r="http://schemas.openxmlformats.org/officeDocument/2006/relationships" xmlns:p="http://schemas.openxmlformats.org/presentationml/2006/main">
   <p:cSld>
     <p:spTree>
       <p:nvGrpSpPr>
@@ -9353,7 +9658,14 @@
         <p:cNvGrpSpPr/>
         <p:nvPr/>
       </p:nvGrpSpPr>
-      <p:grpSpPr/>
+      <p:grpSpPr>
+        <a:xfrm>
+          <a:off x="0" y="0"/>
+          <a:ext cx="0" cy="0"/>
+          <a:chOff x="0" y="0"/>
+          <a:chExt cx="0" cy="0"/>
+        </a:xfrm>
+      </p:grpSpPr>
       <p:sp>
         <p:nvSpPr>
           <p:cNvPr id="2" name="Rectangle 1"/>
@@ -9394,6 +9706,7 @@
           <a:lstStyle/>
           <a:p>
             <a:pPr algn="ctr"/>
+            <a:endParaRPr/>
           </a:p>
         </p:txBody>
       </p:sp>
@@ -9507,6 +9820,7 @@
           <a:lstStyle/>
           <a:p>
             <a:pPr algn="ctr"/>
+            <a:endParaRPr/>
           </a:p>
         </p:txBody>
       </p:sp>
@@ -9657,6 +9971,7 @@
           <a:lstStyle/>
           <a:p>
             <a:pPr algn="ctr"/>
+            <a:endParaRPr/>
           </a:p>
         </p:txBody>
       </p:sp>
@@ -9700,6 +10015,7 @@
           <a:lstStyle/>
           <a:p>
             <a:pPr algn="ctr"/>
+            <a:endParaRPr/>
           </a:p>
         </p:txBody>
       </p:sp>
@@ -9945,6 +10261,7 @@
           <a:lstStyle/>
           <a:p>
             <a:pPr algn="ctr"/>
+            <a:endParaRPr/>
           </a:p>
         </p:txBody>
       </p:sp>
@@ -9988,6 +10305,7 @@
           <a:lstStyle/>
           <a:p>
             <a:pPr algn="ctr"/>
+            <a:endParaRPr/>
           </a:p>
         </p:txBody>
       </p:sp>
@@ -10209,6 +10527,7 @@
           <a:lstStyle/>
           <a:p>
             <a:pPr algn="ctr"/>
+            <a:endParaRPr/>
           </a:p>
         </p:txBody>
       </p:sp>
@@ -10252,6 +10571,7 @@
           <a:lstStyle/>
           <a:p>
             <a:pPr algn="ctr"/>
+            <a:endParaRPr/>
           </a:p>
         </p:txBody>
       </p:sp>
@@ -10475,7 +10795,7 @@
 </file>
 
 <file path=ppt/slides/slide18.xml><?xml version="1.0" encoding="utf-8"?>
-<p:sld xmlns:a="http://schemas.openxmlformats.org/drawingml/2006/main" xmlns:p="http://schemas.openxmlformats.org/presentationml/2006/main" xmlns:r="http://schemas.openxmlformats.org/officeDocument/2006/relationships">
+<p:sld xmlns:a="http://schemas.openxmlformats.org/drawingml/2006/main" xmlns:r="http://schemas.openxmlformats.org/officeDocument/2006/relationships" xmlns:p="http://schemas.openxmlformats.org/presentationml/2006/main">
   <p:cSld>
     <p:spTree>
       <p:nvGrpSpPr>
@@ -10483,7 +10803,14 @@
         <p:cNvGrpSpPr/>
         <p:nvPr/>
       </p:nvGrpSpPr>
-      <p:grpSpPr/>
+      <p:grpSpPr>
+        <a:xfrm>
+          <a:off x="0" y="0"/>
+          <a:ext cx="0" cy="0"/>
+          <a:chOff x="0" y="0"/>
+          <a:chExt cx="0" cy="0"/>
+        </a:xfrm>
+      </p:grpSpPr>
       <p:sp>
         <p:nvSpPr>
           <p:cNvPr id="2" name="Rectangle 1"/>
@@ -10524,6 +10851,7 @@
           <a:lstStyle/>
           <a:p>
             <a:pPr algn="ctr"/>
+            <a:endParaRPr/>
           </a:p>
         </p:txBody>
       </p:sp>
@@ -10637,6 +10965,7 @@
           <a:lstStyle/>
           <a:p>
             <a:pPr algn="ctr"/>
+            <a:endParaRPr/>
           </a:p>
         </p:txBody>
       </p:sp>
@@ -10764,8 +11093,20 @@
                 <a:tableStyleId>{5C22544A-7EE6-4342-B048-85BDC9FD1C3A}</a:tableStyleId>
               </a:tblPr>
               <a:tblGrid>
-                <a:gridCol w="2011680"/>
-                <a:gridCol w="3383280"/>
+                <a:gridCol w="2011680">
+                  <a:extLst>
+                    <a:ext uri="{9D8B030D-6E8A-4147-A177-3AD203B41FA5}">
+                      <a16:colId xmlns:a16="http://schemas.microsoft.com/office/drawing/2014/main" val="20000"/>
+                    </a:ext>
+                  </a:extLst>
+                </a:gridCol>
+                <a:gridCol w="3383280">
+                  <a:extLst>
+                    <a:ext uri="{9D8B030D-6E8A-4147-A177-3AD203B41FA5}">
+                      <a16:colId xmlns:a16="http://schemas.microsoft.com/office/drawing/2014/main" val="20001"/>
+                    </a:ext>
+                  </a:extLst>
+                </a:gridCol>
               </a:tblGrid>
               <a:tr h="429768">
                 <a:tc>
@@ -10814,6 +11155,11 @@
                     </a:solidFill>
                   </a:tcPr>
                 </a:tc>
+                <a:extLst>
+                  <a:ext uri="{0D108BD9-81ED-4DB2-BD59-A6C34878D82A}">
+                    <a16:rowId xmlns:a16="http://schemas.microsoft.com/office/drawing/2014/main" val="10000"/>
+                  </a:ext>
+                </a:extLst>
               </a:tr>
               <a:tr h="429768">
                 <a:tc>
@@ -10862,6 +11208,11 @@
                     </a:solidFill>
                   </a:tcPr>
                 </a:tc>
+                <a:extLst>
+                  <a:ext uri="{0D108BD9-81ED-4DB2-BD59-A6C34878D82A}">
+                    <a16:rowId xmlns:a16="http://schemas.microsoft.com/office/drawing/2014/main" val="10001"/>
+                  </a:ext>
+                </a:extLst>
               </a:tr>
               <a:tr h="429768">
                 <a:tc>
@@ -10910,6 +11261,11 @@
                     </a:solidFill>
                   </a:tcPr>
                 </a:tc>
+                <a:extLst>
+                  <a:ext uri="{0D108BD9-81ED-4DB2-BD59-A6C34878D82A}">
+                    <a16:rowId xmlns:a16="http://schemas.microsoft.com/office/drawing/2014/main" val="10002"/>
+                  </a:ext>
+                </a:extLst>
               </a:tr>
               <a:tr h="429768">
                 <a:tc>
@@ -10958,6 +11314,11 @@
                     </a:solidFill>
                   </a:tcPr>
                 </a:tc>
+                <a:extLst>
+                  <a:ext uri="{0D108BD9-81ED-4DB2-BD59-A6C34878D82A}">
+                    <a16:rowId xmlns:a16="http://schemas.microsoft.com/office/drawing/2014/main" val="10003"/>
+                  </a:ext>
+                </a:extLst>
               </a:tr>
               <a:tr h="429768">
                 <a:tc>
@@ -11006,6 +11367,11 @@
                     </a:solidFill>
                   </a:tcPr>
                 </a:tc>
+                <a:extLst>
+                  <a:ext uri="{0D108BD9-81ED-4DB2-BD59-A6C34878D82A}">
+                    <a16:rowId xmlns:a16="http://schemas.microsoft.com/office/drawing/2014/main" val="10004"/>
+                  </a:ext>
+                </a:extLst>
               </a:tr>
               <a:tr h="429768">
                 <a:tc>
@@ -11054,6 +11420,11 @@
                     </a:solidFill>
                   </a:tcPr>
                 </a:tc>
+                <a:extLst>
+                  <a:ext uri="{0D108BD9-81ED-4DB2-BD59-A6C34878D82A}">
+                    <a16:rowId xmlns:a16="http://schemas.microsoft.com/office/drawing/2014/main" val="10005"/>
+                  </a:ext>
+                </a:extLst>
               </a:tr>
             </a:tbl>
           </a:graphicData>
@@ -11134,6 +11505,7 @@
           <a:lstStyle/>
           <a:p>
             <a:pPr algn="ctr"/>
+            <a:endParaRPr/>
           </a:p>
         </p:txBody>
       </p:sp>
@@ -11203,8 +11575,20 @@
                 <a:tableStyleId>{5C22544A-7EE6-4342-B048-85BDC9FD1C3A}</a:tableStyleId>
               </a:tblPr>
               <a:tblGrid>
-                <a:gridCol w="2286000"/>
-                <a:gridCol w="3291840"/>
+                <a:gridCol w="2286000">
+                  <a:extLst>
+                    <a:ext uri="{9D8B030D-6E8A-4147-A177-3AD203B41FA5}">
+                      <a16:colId xmlns:a16="http://schemas.microsoft.com/office/drawing/2014/main" val="20000"/>
+                    </a:ext>
+                  </a:extLst>
+                </a:gridCol>
+                <a:gridCol w="3291840">
+                  <a:extLst>
+                    <a:ext uri="{9D8B030D-6E8A-4147-A177-3AD203B41FA5}">
+                      <a16:colId xmlns:a16="http://schemas.microsoft.com/office/drawing/2014/main" val="20001"/>
+                    </a:ext>
+                  </a:extLst>
+                </a:gridCol>
               </a:tblGrid>
               <a:tr h="429768">
                 <a:tc>
@@ -11253,6 +11637,11 @@
                     </a:solidFill>
                   </a:tcPr>
                 </a:tc>
+                <a:extLst>
+                  <a:ext uri="{0D108BD9-81ED-4DB2-BD59-A6C34878D82A}">
+                    <a16:rowId xmlns:a16="http://schemas.microsoft.com/office/drawing/2014/main" val="10000"/>
+                  </a:ext>
+                </a:extLst>
               </a:tr>
               <a:tr h="429768">
                 <a:tc>
@@ -11301,6 +11690,11 @@
                     </a:solidFill>
                   </a:tcPr>
                 </a:tc>
+                <a:extLst>
+                  <a:ext uri="{0D108BD9-81ED-4DB2-BD59-A6C34878D82A}">
+                    <a16:rowId xmlns:a16="http://schemas.microsoft.com/office/drawing/2014/main" val="10001"/>
+                  </a:ext>
+                </a:extLst>
               </a:tr>
               <a:tr h="429768">
                 <a:tc>
@@ -11349,6 +11743,11 @@
                     </a:solidFill>
                   </a:tcPr>
                 </a:tc>
+                <a:extLst>
+                  <a:ext uri="{0D108BD9-81ED-4DB2-BD59-A6C34878D82A}">
+                    <a16:rowId xmlns:a16="http://schemas.microsoft.com/office/drawing/2014/main" val="10002"/>
+                  </a:ext>
+                </a:extLst>
               </a:tr>
               <a:tr h="429768">
                 <a:tc>
@@ -11397,6 +11796,11 @@
                     </a:solidFill>
                   </a:tcPr>
                 </a:tc>
+                <a:extLst>
+                  <a:ext uri="{0D108BD9-81ED-4DB2-BD59-A6C34878D82A}">
+                    <a16:rowId xmlns:a16="http://schemas.microsoft.com/office/drawing/2014/main" val="10003"/>
+                  </a:ext>
+                </a:extLst>
               </a:tr>
             </a:tbl>
           </a:graphicData>
@@ -11446,7 +11850,7 @@
 </file>
 
 <file path=ppt/slides/slide19.xml><?xml version="1.0" encoding="utf-8"?>
-<p:sld xmlns:a="http://schemas.openxmlformats.org/drawingml/2006/main" xmlns:p="http://schemas.openxmlformats.org/presentationml/2006/main" xmlns:r="http://schemas.openxmlformats.org/officeDocument/2006/relationships">
+<p:sld xmlns:a="http://schemas.openxmlformats.org/drawingml/2006/main" xmlns:r="http://schemas.openxmlformats.org/officeDocument/2006/relationships" xmlns:p="http://schemas.openxmlformats.org/presentationml/2006/main">
   <p:cSld>
     <p:spTree>
       <p:nvGrpSpPr>
@@ -11454,7 +11858,14 @@
         <p:cNvGrpSpPr/>
         <p:nvPr/>
       </p:nvGrpSpPr>
-      <p:grpSpPr/>
+      <p:grpSpPr>
+        <a:xfrm>
+          <a:off x="0" y="0"/>
+          <a:ext cx="0" cy="0"/>
+          <a:chOff x="0" y="0"/>
+          <a:chExt cx="0" cy="0"/>
+        </a:xfrm>
+      </p:grpSpPr>
       <p:sp>
         <p:nvSpPr>
           <p:cNvPr id="2" name="Rectangle 1"/>
@@ -11495,6 +11906,7 @@
           <a:lstStyle/>
           <a:p>
             <a:pPr algn="ctr"/>
+            <a:endParaRPr/>
           </a:p>
         </p:txBody>
       </p:sp>
@@ -11608,6 +12020,7 @@
           <a:lstStyle/>
           <a:p>
             <a:pPr algn="ctr"/>
+            <a:endParaRPr/>
           </a:p>
         </p:txBody>
       </p:sp>
@@ -11793,6 +12206,7 @@
           <a:lstStyle/>
           <a:p>
             <a:pPr algn="ctr"/>
+            <a:endParaRPr/>
           </a:p>
         </p:txBody>
       </p:sp>
@@ -12003,6 +12417,7 @@
           <a:lstStyle/>
           <a:p>
             <a:pPr algn="ctr"/>
+            <a:endParaRPr/>
           </a:p>
         </p:txBody>
       </p:sp>
@@ -12154,6 +12569,7 @@
           <a:lstStyle/>
           <a:p>
             <a:pPr algn="ctr"/>
+            <a:endParaRPr/>
           </a:p>
         </p:txBody>
       </p:sp>
@@ -12248,7 +12664,7 @@
 </file>
 
 <file path=ppt/slides/slide2.xml><?xml version="1.0" encoding="utf-8"?>
-<p:sld xmlns:a="http://schemas.openxmlformats.org/drawingml/2006/main" xmlns:p="http://schemas.openxmlformats.org/presentationml/2006/main" xmlns:r="http://schemas.openxmlformats.org/officeDocument/2006/relationships">
+<p:sld xmlns:a="http://schemas.openxmlformats.org/drawingml/2006/main" xmlns:r="http://schemas.openxmlformats.org/officeDocument/2006/relationships" xmlns:p="http://schemas.openxmlformats.org/presentationml/2006/main">
   <p:cSld>
     <p:spTree>
       <p:nvGrpSpPr>
@@ -12256,7 +12672,14 @@
         <p:cNvGrpSpPr/>
         <p:nvPr/>
       </p:nvGrpSpPr>
-      <p:grpSpPr/>
+      <p:grpSpPr>
+        <a:xfrm>
+          <a:off x="0" y="0"/>
+          <a:ext cx="0" cy="0"/>
+          <a:chOff x="0" y="0"/>
+          <a:chExt cx="0" cy="0"/>
+        </a:xfrm>
+      </p:grpSpPr>
       <p:sp>
         <p:nvSpPr>
           <p:cNvPr id="2" name="Rectangle 1"/>
@@ -12297,6 +12720,7 @@
           <a:lstStyle/>
           <a:p>
             <a:pPr algn="ctr"/>
+            <a:endParaRPr/>
           </a:p>
         </p:txBody>
       </p:sp>
@@ -12410,6 +12834,7 @@
           <a:lstStyle/>
           <a:p>
             <a:pPr algn="ctr"/>
+            <a:endParaRPr/>
           </a:p>
         </p:txBody>
       </p:sp>
@@ -12523,6 +12948,7 @@
           <a:lstStyle/>
           <a:p>
             <a:pPr algn="ctr"/>
+            <a:endParaRPr/>
           </a:p>
         </p:txBody>
       </p:sp>
@@ -12671,6 +13097,7 @@
           <a:lstStyle/>
           <a:p>
             <a:pPr algn="ctr"/>
+            <a:endParaRPr/>
           </a:p>
         </p:txBody>
       </p:sp>
@@ -12819,6 +13246,7 @@
           <a:lstStyle/>
           <a:p>
             <a:pPr algn="ctr"/>
+            <a:endParaRPr/>
           </a:p>
         </p:txBody>
       </p:sp>
@@ -12967,6 +13395,7 @@
           <a:lstStyle/>
           <a:p>
             <a:pPr algn="ctr"/>
+            <a:endParaRPr/>
           </a:p>
         </p:txBody>
       </p:sp>
@@ -13115,6 +13544,7 @@
           <a:lstStyle/>
           <a:p>
             <a:pPr algn="ctr"/>
+            <a:endParaRPr/>
           </a:p>
         </p:txBody>
       </p:sp>
@@ -13263,6 +13693,7 @@
           <a:lstStyle/>
           <a:p>
             <a:pPr algn="ctr"/>
+            <a:endParaRPr/>
           </a:p>
         </p:txBody>
       </p:sp>
@@ -13411,6 +13842,7 @@
           <a:lstStyle/>
           <a:p>
             <a:pPr algn="ctr"/>
+            <a:endParaRPr/>
           </a:p>
         </p:txBody>
       </p:sp>
@@ -13559,6 +13991,7 @@
           <a:lstStyle/>
           <a:p>
             <a:pPr algn="ctr"/>
+            <a:endParaRPr/>
           </a:p>
         </p:txBody>
       </p:sp>
@@ -13676,7 +14109,7 @@
 </file>
 
 <file path=ppt/slides/slide20.xml><?xml version="1.0" encoding="utf-8"?>
-<p:sld xmlns:a="http://schemas.openxmlformats.org/drawingml/2006/main" xmlns:p="http://schemas.openxmlformats.org/presentationml/2006/main" xmlns:r="http://schemas.openxmlformats.org/officeDocument/2006/relationships">
+<p:sld xmlns:a="http://schemas.openxmlformats.org/drawingml/2006/main" xmlns:r="http://schemas.openxmlformats.org/officeDocument/2006/relationships" xmlns:p="http://schemas.openxmlformats.org/presentationml/2006/main">
   <p:cSld>
     <p:spTree>
       <p:nvGrpSpPr>
@@ -13684,7 +14117,14 @@
         <p:cNvGrpSpPr/>
         <p:nvPr/>
       </p:nvGrpSpPr>
-      <p:grpSpPr/>
+      <p:grpSpPr>
+        <a:xfrm>
+          <a:off x="0" y="0"/>
+          <a:ext cx="0" cy="0"/>
+          <a:chOff x="0" y="0"/>
+          <a:chExt cx="0" cy="0"/>
+        </a:xfrm>
+      </p:grpSpPr>
       <p:sp>
         <p:nvSpPr>
           <p:cNvPr id="2" name="Rectangle 1"/>
@@ -13725,6 +14165,7 @@
           <a:lstStyle/>
           <a:p>
             <a:pPr algn="ctr"/>
+            <a:endParaRPr/>
           </a:p>
         </p:txBody>
       </p:sp>
@@ -13838,6 +14279,7 @@
           <a:lstStyle/>
           <a:p>
             <a:pPr algn="ctr"/>
+            <a:endParaRPr/>
           </a:p>
         </p:txBody>
       </p:sp>
@@ -13951,6 +14393,7 @@
           <a:lstStyle/>
           <a:p>
             <a:pPr algn="ctr"/>
+            <a:endParaRPr/>
           </a:p>
         </p:txBody>
       </p:sp>
@@ -14008,11 +14451,41 @@
                 <a:tableStyleId>{5C22544A-7EE6-4342-B048-85BDC9FD1C3A}</a:tableStyleId>
               </a:tblPr>
               <a:tblGrid>
-                <a:gridCol w="1371600"/>
-                <a:gridCol w="3200400"/>
-                <a:gridCol w="3200400"/>
-                <a:gridCol w="1554480"/>
-                <a:gridCol w="2194560"/>
+                <a:gridCol w="1371600">
+                  <a:extLst>
+                    <a:ext uri="{9D8B030D-6E8A-4147-A177-3AD203B41FA5}">
+                      <a16:colId xmlns:a16="http://schemas.microsoft.com/office/drawing/2014/main" val="20000"/>
+                    </a:ext>
+                  </a:extLst>
+                </a:gridCol>
+                <a:gridCol w="3200400">
+                  <a:extLst>
+                    <a:ext uri="{9D8B030D-6E8A-4147-A177-3AD203B41FA5}">
+                      <a16:colId xmlns:a16="http://schemas.microsoft.com/office/drawing/2014/main" val="20001"/>
+                    </a:ext>
+                  </a:extLst>
+                </a:gridCol>
+                <a:gridCol w="3200400">
+                  <a:extLst>
+                    <a:ext uri="{9D8B030D-6E8A-4147-A177-3AD203B41FA5}">
+                      <a16:colId xmlns:a16="http://schemas.microsoft.com/office/drawing/2014/main" val="20002"/>
+                    </a:ext>
+                  </a:extLst>
+                </a:gridCol>
+                <a:gridCol w="1554480">
+                  <a:extLst>
+                    <a:ext uri="{9D8B030D-6E8A-4147-A177-3AD203B41FA5}">
+                      <a16:colId xmlns:a16="http://schemas.microsoft.com/office/drawing/2014/main" val="20003"/>
+                    </a:ext>
+                  </a:extLst>
+                </a:gridCol>
+                <a:gridCol w="2194560">
+                  <a:extLst>
+                    <a:ext uri="{9D8B030D-6E8A-4147-A177-3AD203B41FA5}">
+                      <a16:colId xmlns:a16="http://schemas.microsoft.com/office/drawing/2014/main" val="20004"/>
+                    </a:ext>
+                  </a:extLst>
+                </a:gridCol>
               </a:tblGrid>
               <a:tr h="457200">
                 <a:tc>
@@ -14130,6 +14603,11 @@
                     </a:solidFill>
                   </a:tcPr>
                 </a:tc>
+                <a:extLst>
+                  <a:ext uri="{0D108BD9-81ED-4DB2-BD59-A6C34878D82A}">
+                    <a16:rowId xmlns:a16="http://schemas.microsoft.com/office/drawing/2014/main" val="10000"/>
+                  </a:ext>
+                </a:extLst>
               </a:tr>
               <a:tr h="457200">
                 <a:tc>
@@ -14247,6 +14725,11 @@
                     </a:solidFill>
                   </a:tcPr>
                 </a:tc>
+                <a:extLst>
+                  <a:ext uri="{0D108BD9-81ED-4DB2-BD59-A6C34878D82A}">
+                    <a16:rowId xmlns:a16="http://schemas.microsoft.com/office/drawing/2014/main" val="10001"/>
+                  </a:ext>
+                </a:extLst>
               </a:tr>
               <a:tr h="457200">
                 <a:tc>
@@ -14364,6 +14847,11 @@
                     </a:solidFill>
                   </a:tcPr>
                 </a:tc>
+                <a:extLst>
+                  <a:ext uri="{0D108BD9-81ED-4DB2-BD59-A6C34878D82A}">
+                    <a16:rowId xmlns:a16="http://schemas.microsoft.com/office/drawing/2014/main" val="10002"/>
+                  </a:ext>
+                </a:extLst>
               </a:tr>
               <a:tr h="457200">
                 <a:tc>
@@ -14481,6 +14969,11 @@
                     </a:solidFill>
                   </a:tcPr>
                 </a:tc>
+                <a:extLst>
+                  <a:ext uri="{0D108BD9-81ED-4DB2-BD59-A6C34878D82A}">
+                    <a16:rowId xmlns:a16="http://schemas.microsoft.com/office/drawing/2014/main" val="10003"/>
+                  </a:ext>
+                </a:extLst>
               </a:tr>
             </a:tbl>
           </a:graphicData>
@@ -14526,6 +15019,7 @@
           <a:lstStyle/>
           <a:p>
             <a:pPr algn="ctr"/>
+            <a:endParaRPr/>
           </a:p>
         </p:txBody>
       </p:sp>
@@ -14677,6 +15171,7 @@
           <a:lstStyle/>
           <a:p>
             <a:pPr algn="ctr"/>
+            <a:endParaRPr/>
           </a:p>
         </p:txBody>
       </p:sp>
@@ -14783,7 +15278,7 @@
 </file>
 
 <file path=ppt/slides/slide21.xml><?xml version="1.0" encoding="utf-8"?>
-<p:sld xmlns:a="http://schemas.openxmlformats.org/drawingml/2006/main" xmlns:p="http://schemas.openxmlformats.org/presentationml/2006/main" xmlns:r="http://schemas.openxmlformats.org/officeDocument/2006/relationships">
+<p:sld xmlns:a="http://schemas.openxmlformats.org/drawingml/2006/main" xmlns:r="http://schemas.openxmlformats.org/officeDocument/2006/relationships" xmlns:p="http://schemas.openxmlformats.org/presentationml/2006/main">
   <p:cSld>
     <p:spTree>
       <p:nvGrpSpPr>
@@ -14791,7 +15286,14 @@
         <p:cNvGrpSpPr/>
         <p:nvPr/>
       </p:nvGrpSpPr>
-      <p:grpSpPr/>
+      <p:grpSpPr>
+        <a:xfrm>
+          <a:off x="0" y="0"/>
+          <a:ext cx="0" cy="0"/>
+          <a:chOff x="0" y="0"/>
+          <a:chExt cx="0" cy="0"/>
+        </a:xfrm>
+      </p:grpSpPr>
       <p:sp>
         <p:nvSpPr>
           <p:cNvPr id="2" name="Rectangle 1"/>
@@ -14832,6 +15334,7 @@
           <a:lstStyle/>
           <a:p>
             <a:pPr algn="ctr"/>
+            <a:endParaRPr/>
           </a:p>
         </p:txBody>
       </p:sp>
@@ -14945,6 +15448,7 @@
           <a:lstStyle/>
           <a:p>
             <a:pPr algn="ctr"/>
+            <a:endParaRPr/>
           </a:p>
         </p:txBody>
       </p:sp>
@@ -15037,10 +15541,34 @@
                 <a:tableStyleId>{5C22544A-7EE6-4342-B048-85BDC9FD1C3A}</a:tableStyleId>
               </a:tblPr>
               <a:tblGrid>
-                <a:gridCol w="457200"/>
-                <a:gridCol w="3200400"/>
-                <a:gridCol w="3200400"/>
-                <a:gridCol w="4663440"/>
+                <a:gridCol w="457200">
+                  <a:extLst>
+                    <a:ext uri="{9D8B030D-6E8A-4147-A177-3AD203B41FA5}">
+                      <a16:colId xmlns:a16="http://schemas.microsoft.com/office/drawing/2014/main" val="20000"/>
+                    </a:ext>
+                  </a:extLst>
+                </a:gridCol>
+                <a:gridCol w="3200400">
+                  <a:extLst>
+                    <a:ext uri="{9D8B030D-6E8A-4147-A177-3AD203B41FA5}">
+                      <a16:colId xmlns:a16="http://schemas.microsoft.com/office/drawing/2014/main" val="20001"/>
+                    </a:ext>
+                  </a:extLst>
+                </a:gridCol>
+                <a:gridCol w="3200400">
+                  <a:extLst>
+                    <a:ext uri="{9D8B030D-6E8A-4147-A177-3AD203B41FA5}">
+                      <a16:colId xmlns:a16="http://schemas.microsoft.com/office/drawing/2014/main" val="20002"/>
+                    </a:ext>
+                  </a:extLst>
+                </a:gridCol>
+                <a:gridCol w="4663440">
+                  <a:extLst>
+                    <a:ext uri="{9D8B030D-6E8A-4147-A177-3AD203B41FA5}">
+                      <a16:colId xmlns:a16="http://schemas.microsoft.com/office/drawing/2014/main" val="20003"/>
+                    </a:ext>
+                  </a:extLst>
+                </a:gridCol>
               </a:tblGrid>
               <a:tr h="457200">
                 <a:tc>
@@ -15135,6 +15663,11 @@
                     </a:solidFill>
                   </a:tcPr>
                 </a:tc>
+                <a:extLst>
+                  <a:ext uri="{0D108BD9-81ED-4DB2-BD59-A6C34878D82A}">
+                    <a16:rowId xmlns:a16="http://schemas.microsoft.com/office/drawing/2014/main" val="10000"/>
+                  </a:ext>
+                </a:extLst>
               </a:tr>
               <a:tr h="457200">
                 <a:tc>
@@ -15229,6 +15762,11 @@
                     </a:solidFill>
                   </a:tcPr>
                 </a:tc>
+                <a:extLst>
+                  <a:ext uri="{0D108BD9-81ED-4DB2-BD59-A6C34878D82A}">
+                    <a16:rowId xmlns:a16="http://schemas.microsoft.com/office/drawing/2014/main" val="10001"/>
+                  </a:ext>
+                </a:extLst>
               </a:tr>
               <a:tr h="457200">
                 <a:tc>
@@ -15323,6 +15861,11 @@
                     </a:solidFill>
                   </a:tcPr>
                 </a:tc>
+                <a:extLst>
+                  <a:ext uri="{0D108BD9-81ED-4DB2-BD59-A6C34878D82A}">
+                    <a16:rowId xmlns:a16="http://schemas.microsoft.com/office/drawing/2014/main" val="10002"/>
+                  </a:ext>
+                </a:extLst>
               </a:tr>
               <a:tr h="457200">
                 <a:tc>
@@ -15417,6 +15960,11 @@
                     </a:solidFill>
                   </a:tcPr>
                 </a:tc>
+                <a:extLst>
+                  <a:ext uri="{0D108BD9-81ED-4DB2-BD59-A6C34878D82A}">
+                    <a16:rowId xmlns:a16="http://schemas.microsoft.com/office/drawing/2014/main" val="10003"/>
+                  </a:ext>
+                </a:extLst>
               </a:tr>
               <a:tr h="457200">
                 <a:tc>
@@ -15511,6 +16059,11 @@
                     </a:solidFill>
                   </a:tcPr>
                 </a:tc>
+                <a:extLst>
+                  <a:ext uri="{0D108BD9-81ED-4DB2-BD59-A6C34878D82A}">
+                    <a16:rowId xmlns:a16="http://schemas.microsoft.com/office/drawing/2014/main" val="10004"/>
+                  </a:ext>
+                </a:extLst>
               </a:tr>
               <a:tr h="457200">
                 <a:tc>
@@ -15605,6 +16158,11 @@
                     </a:solidFill>
                   </a:tcPr>
                 </a:tc>
+                <a:extLst>
+                  <a:ext uri="{0D108BD9-81ED-4DB2-BD59-A6C34878D82A}">
+                    <a16:rowId xmlns:a16="http://schemas.microsoft.com/office/drawing/2014/main" val="10005"/>
+                  </a:ext>
+                </a:extLst>
               </a:tr>
             </a:tbl>
           </a:graphicData>
@@ -15650,6 +16208,7 @@
           <a:lstStyle/>
           <a:p>
             <a:pPr algn="ctr"/>
+            <a:endParaRPr/>
           </a:p>
         </p:txBody>
       </p:sp>
@@ -15697,7 +16256,7 @@
 </file>
 
 <file path=ppt/slides/slide22.xml><?xml version="1.0" encoding="utf-8"?>
-<p:sld xmlns:a="http://schemas.openxmlformats.org/drawingml/2006/main" xmlns:p="http://schemas.openxmlformats.org/presentationml/2006/main" xmlns:r="http://schemas.openxmlformats.org/officeDocument/2006/relationships">
+<p:sld xmlns:a="http://schemas.openxmlformats.org/drawingml/2006/main" xmlns:r="http://schemas.openxmlformats.org/officeDocument/2006/relationships" xmlns:p="http://schemas.openxmlformats.org/presentationml/2006/main">
   <p:cSld>
     <p:spTree>
       <p:nvGrpSpPr>
@@ -15705,7 +16264,14 @@
         <p:cNvGrpSpPr/>
         <p:nvPr/>
       </p:nvGrpSpPr>
-      <p:grpSpPr/>
+      <p:grpSpPr>
+        <a:xfrm>
+          <a:off x="0" y="0"/>
+          <a:ext cx="0" cy="0"/>
+          <a:chOff x="0" y="0"/>
+          <a:chExt cx="0" cy="0"/>
+        </a:xfrm>
+      </p:grpSpPr>
       <p:sp>
         <p:nvSpPr>
           <p:cNvPr id="2" name="Rectangle 1"/>
@@ -15746,6 +16312,7 @@
           <a:lstStyle/>
           <a:p>
             <a:pPr algn="ctr"/>
+            <a:endParaRPr/>
           </a:p>
         </p:txBody>
       </p:sp>
@@ -15859,6 +16426,7 @@
           <a:lstStyle/>
           <a:p>
             <a:pPr algn="ctr"/>
+            <a:endParaRPr/>
           </a:p>
         </p:txBody>
       </p:sp>
@@ -15986,10 +16554,34 @@
                 <a:tableStyleId>{5C22544A-7EE6-4342-B048-85BDC9FD1C3A}</a:tableStyleId>
               </a:tblPr>
               <a:tblGrid>
-                <a:gridCol w="1645920"/>
-                <a:gridCol w="4114800"/>
-                <a:gridCol w="685800"/>
-                <a:gridCol w="1783080"/>
+                <a:gridCol w="1645920">
+                  <a:extLst>
+                    <a:ext uri="{9D8B030D-6E8A-4147-A177-3AD203B41FA5}">
+                      <a16:colId xmlns:a16="http://schemas.microsoft.com/office/drawing/2014/main" val="20000"/>
+                    </a:ext>
+                  </a:extLst>
+                </a:gridCol>
+                <a:gridCol w="4114800">
+                  <a:extLst>
+                    <a:ext uri="{9D8B030D-6E8A-4147-A177-3AD203B41FA5}">
+                      <a16:colId xmlns:a16="http://schemas.microsoft.com/office/drawing/2014/main" val="20001"/>
+                    </a:ext>
+                  </a:extLst>
+                </a:gridCol>
+                <a:gridCol w="685800">
+                  <a:extLst>
+                    <a:ext uri="{9D8B030D-6E8A-4147-A177-3AD203B41FA5}">
+                      <a16:colId xmlns:a16="http://schemas.microsoft.com/office/drawing/2014/main" val="20002"/>
+                    </a:ext>
+                  </a:extLst>
+                </a:gridCol>
+                <a:gridCol w="1783080">
+                  <a:extLst>
+                    <a:ext uri="{9D8B030D-6E8A-4147-A177-3AD203B41FA5}">
+                      <a16:colId xmlns:a16="http://schemas.microsoft.com/office/drawing/2014/main" val="20003"/>
+                    </a:ext>
+                  </a:extLst>
+                </a:gridCol>
               </a:tblGrid>
               <a:tr h="420624">
                 <a:tc>
@@ -16084,6 +16676,11 @@
                     </a:solidFill>
                   </a:tcPr>
                 </a:tc>
+                <a:extLst>
+                  <a:ext uri="{0D108BD9-81ED-4DB2-BD59-A6C34878D82A}">
+                    <a16:rowId xmlns:a16="http://schemas.microsoft.com/office/drawing/2014/main" val="10000"/>
+                  </a:ext>
+                </a:extLst>
               </a:tr>
               <a:tr h="420624">
                 <a:tc>
@@ -16178,6 +16775,11 @@
                     </a:solidFill>
                   </a:tcPr>
                 </a:tc>
+                <a:extLst>
+                  <a:ext uri="{0D108BD9-81ED-4DB2-BD59-A6C34878D82A}">
+                    <a16:rowId xmlns:a16="http://schemas.microsoft.com/office/drawing/2014/main" val="10001"/>
+                  </a:ext>
+                </a:extLst>
               </a:tr>
               <a:tr h="420624">
                 <a:tc>
@@ -16272,6 +16874,11 @@
                     </a:solidFill>
                   </a:tcPr>
                 </a:tc>
+                <a:extLst>
+                  <a:ext uri="{0D108BD9-81ED-4DB2-BD59-A6C34878D82A}">
+                    <a16:rowId xmlns:a16="http://schemas.microsoft.com/office/drawing/2014/main" val="10002"/>
+                  </a:ext>
+                </a:extLst>
               </a:tr>
               <a:tr h="420624">
                 <a:tc>
@@ -16366,6 +16973,11 @@
                     </a:solidFill>
                   </a:tcPr>
                 </a:tc>
+                <a:extLst>
+                  <a:ext uri="{0D108BD9-81ED-4DB2-BD59-A6C34878D82A}">
+                    <a16:rowId xmlns:a16="http://schemas.microsoft.com/office/drawing/2014/main" val="10003"/>
+                  </a:ext>
+                </a:extLst>
               </a:tr>
               <a:tr h="420624">
                 <a:tc>
@@ -16460,6 +17072,11 @@
                     </a:solidFill>
                   </a:tcPr>
                 </a:tc>
+                <a:extLst>
+                  <a:ext uri="{0D108BD9-81ED-4DB2-BD59-A6C34878D82A}">
+                    <a16:rowId xmlns:a16="http://schemas.microsoft.com/office/drawing/2014/main" val="10004"/>
+                  </a:ext>
+                </a:extLst>
               </a:tr>
               <a:tr h="420624">
                 <a:tc>
@@ -16554,6 +17171,11 @@
                     </a:solidFill>
                   </a:tcPr>
                 </a:tc>
+                <a:extLst>
+                  <a:ext uri="{0D108BD9-81ED-4DB2-BD59-A6C34878D82A}">
+                    <a16:rowId xmlns:a16="http://schemas.microsoft.com/office/drawing/2014/main" val="10005"/>
+                  </a:ext>
+                </a:extLst>
               </a:tr>
               <a:tr h="420624">
                 <a:tc>
@@ -16648,6 +17270,11 @@
                     </a:solidFill>
                   </a:tcPr>
                 </a:tc>
+                <a:extLst>
+                  <a:ext uri="{0D108BD9-81ED-4DB2-BD59-A6C34878D82A}">
+                    <a16:rowId xmlns:a16="http://schemas.microsoft.com/office/drawing/2014/main" val="10006"/>
+                  </a:ext>
+                </a:extLst>
               </a:tr>
               <a:tr h="420624">
                 <a:tc>
@@ -16742,6 +17369,11 @@
                     </a:solidFill>
                   </a:tcPr>
                 </a:tc>
+                <a:extLst>
+                  <a:ext uri="{0D108BD9-81ED-4DB2-BD59-A6C34878D82A}">
+                    <a16:rowId xmlns:a16="http://schemas.microsoft.com/office/drawing/2014/main" val="10007"/>
+                  </a:ext>
+                </a:extLst>
               </a:tr>
             </a:tbl>
           </a:graphicData>
@@ -16787,6 +17419,7 @@
           <a:lstStyle/>
           <a:p>
             <a:pPr algn="ctr"/>
+            <a:endParaRPr/>
           </a:p>
         </p:txBody>
       </p:sp>
@@ -16869,7 +17502,7 @@
 </file>
 
 <file path=ppt/slides/slide23.xml><?xml version="1.0" encoding="utf-8"?>
-<p:sld xmlns:a="http://schemas.openxmlformats.org/drawingml/2006/main" xmlns:p="http://schemas.openxmlformats.org/presentationml/2006/main" xmlns:r="http://schemas.openxmlformats.org/officeDocument/2006/relationships">
+<p:sld xmlns:a="http://schemas.openxmlformats.org/drawingml/2006/main" xmlns:r="http://schemas.openxmlformats.org/officeDocument/2006/relationships" xmlns:p="http://schemas.openxmlformats.org/presentationml/2006/main">
   <p:cSld>
     <p:spTree>
       <p:nvGrpSpPr>
@@ -16877,7 +17510,14 @@
         <p:cNvGrpSpPr/>
         <p:nvPr/>
       </p:nvGrpSpPr>
-      <p:grpSpPr/>
+      <p:grpSpPr>
+        <a:xfrm>
+          <a:off x="0" y="0"/>
+          <a:ext cx="0" cy="0"/>
+          <a:chOff x="0" y="0"/>
+          <a:chExt cx="0" cy="0"/>
+        </a:xfrm>
+      </p:grpSpPr>
       <p:sp>
         <p:nvSpPr>
           <p:cNvPr id="2" name="Rectangle 1"/>
@@ -16918,6 +17558,7 @@
           <a:lstStyle/>
           <a:p>
             <a:pPr algn="ctr"/>
+            <a:endParaRPr/>
           </a:p>
         </p:txBody>
       </p:sp>
@@ -17031,6 +17672,7 @@
           <a:lstStyle/>
           <a:p>
             <a:pPr algn="ctr"/>
+            <a:endParaRPr/>
           </a:p>
         </p:txBody>
       </p:sp>
@@ -17144,6 +17786,7 @@
           <a:lstStyle/>
           <a:p>
             <a:pPr algn="ctr"/>
+            <a:endParaRPr/>
           </a:p>
         </p:txBody>
       </p:sp>
@@ -17307,6 +17950,7 @@
           <a:lstStyle/>
           <a:p>
             <a:pPr algn="ctr"/>
+            <a:endParaRPr/>
           </a:p>
         </p:txBody>
       </p:sp>
@@ -17458,6 +18102,7 @@
           <a:lstStyle/>
           <a:p>
             <a:pPr algn="ctr"/>
+            <a:endParaRPr/>
           </a:p>
         </p:txBody>
       </p:sp>
@@ -17576,7 +18221,7 @@
 </file>
 
 <file path=ppt/slides/slide3.xml><?xml version="1.0" encoding="utf-8"?>
-<p:sld xmlns:a="http://schemas.openxmlformats.org/drawingml/2006/main" xmlns:p="http://schemas.openxmlformats.org/presentationml/2006/main" xmlns:r="http://schemas.openxmlformats.org/officeDocument/2006/relationships">
+<p:sld xmlns:a="http://schemas.openxmlformats.org/drawingml/2006/main" xmlns:r="http://schemas.openxmlformats.org/officeDocument/2006/relationships" xmlns:p="http://schemas.openxmlformats.org/presentationml/2006/main">
   <p:cSld>
     <p:spTree>
       <p:nvGrpSpPr>
@@ -17584,7 +18229,14 @@
         <p:cNvGrpSpPr/>
         <p:nvPr/>
       </p:nvGrpSpPr>
-      <p:grpSpPr/>
+      <p:grpSpPr>
+        <a:xfrm>
+          <a:off x="0" y="0"/>
+          <a:ext cx="0" cy="0"/>
+          <a:chOff x="0" y="0"/>
+          <a:chExt cx="0" cy="0"/>
+        </a:xfrm>
+      </p:grpSpPr>
       <p:sp>
         <p:nvSpPr>
           <p:cNvPr id="2" name="Rectangle 1"/>
@@ -17625,6 +18277,7 @@
           <a:lstStyle/>
           <a:p>
             <a:pPr algn="ctr"/>
+            <a:endParaRPr/>
           </a:p>
         </p:txBody>
       </p:sp>
@@ -17738,6 +18391,7 @@
           <a:lstStyle/>
           <a:p>
             <a:pPr algn="ctr"/>
+            <a:endParaRPr/>
           </a:p>
         </p:txBody>
       </p:sp>
@@ -17851,6 +18505,7 @@
           <a:lstStyle/>
           <a:p>
             <a:pPr algn="ctr"/>
+            <a:endParaRPr/>
           </a:p>
         </p:txBody>
       </p:sp>
@@ -17955,6 +18610,7 @@
           <a:lstStyle/>
           <a:p>
             <a:pPr algn="ctr"/>
+            <a:endParaRPr/>
           </a:p>
         </p:txBody>
       </p:sp>
@@ -18094,6 +18750,7 @@
           <a:lstStyle/>
           <a:p>
             <a:pPr algn="ctr"/>
+            <a:endParaRPr/>
           </a:p>
         </p:txBody>
       </p:sp>
@@ -18200,7 +18857,7 @@
 </file>
 
 <file path=ppt/slides/slide4.xml><?xml version="1.0" encoding="utf-8"?>
-<p:sld xmlns:a="http://schemas.openxmlformats.org/drawingml/2006/main" xmlns:p="http://schemas.openxmlformats.org/presentationml/2006/main" xmlns:r="http://schemas.openxmlformats.org/officeDocument/2006/relationships">
+<p:sld xmlns:a="http://schemas.openxmlformats.org/drawingml/2006/main" xmlns:r="http://schemas.openxmlformats.org/officeDocument/2006/relationships" xmlns:p="http://schemas.openxmlformats.org/presentationml/2006/main">
   <p:cSld>
     <p:spTree>
       <p:nvGrpSpPr>
@@ -18208,7 +18865,14 @@
         <p:cNvGrpSpPr/>
         <p:nvPr/>
       </p:nvGrpSpPr>
-      <p:grpSpPr/>
+      <p:grpSpPr>
+        <a:xfrm>
+          <a:off x="0" y="0"/>
+          <a:ext cx="0" cy="0"/>
+          <a:chOff x="0" y="0"/>
+          <a:chExt cx="0" cy="0"/>
+        </a:xfrm>
+      </p:grpSpPr>
       <p:sp>
         <p:nvSpPr>
           <p:cNvPr id="2" name="Rectangle 1"/>
@@ -18249,6 +18913,7 @@
           <a:lstStyle/>
           <a:p>
             <a:pPr algn="ctr"/>
+            <a:endParaRPr/>
           </a:p>
         </p:txBody>
       </p:sp>
@@ -18362,6 +19027,7 @@
           <a:lstStyle/>
           <a:p>
             <a:pPr algn="ctr"/>
+            <a:endParaRPr/>
           </a:p>
         </p:txBody>
       </p:sp>
@@ -18489,9 +19155,27 @@
                 <a:tableStyleId>{5C22544A-7EE6-4342-B048-85BDC9FD1C3A}</a:tableStyleId>
               </a:tblPr>
               <a:tblGrid>
-                <a:gridCol w="2468880"/>
-                <a:gridCol w="1554480"/>
-                <a:gridCol w="1280160"/>
+                <a:gridCol w="2468880">
+                  <a:extLst>
+                    <a:ext uri="{9D8B030D-6E8A-4147-A177-3AD203B41FA5}">
+                      <a16:colId xmlns:a16="http://schemas.microsoft.com/office/drawing/2014/main" val="20000"/>
+                    </a:ext>
+                  </a:extLst>
+                </a:gridCol>
+                <a:gridCol w="1554480">
+                  <a:extLst>
+                    <a:ext uri="{9D8B030D-6E8A-4147-A177-3AD203B41FA5}">
+                      <a16:colId xmlns:a16="http://schemas.microsoft.com/office/drawing/2014/main" val="20001"/>
+                    </a:ext>
+                  </a:extLst>
+                </a:gridCol>
+                <a:gridCol w="1280160">
+                  <a:extLst>
+                    <a:ext uri="{9D8B030D-6E8A-4147-A177-3AD203B41FA5}">
+                      <a16:colId xmlns:a16="http://schemas.microsoft.com/office/drawing/2014/main" val="20002"/>
+                    </a:ext>
+                  </a:extLst>
+                </a:gridCol>
               </a:tblGrid>
               <a:tr h="365760">
                 <a:tc>
@@ -18563,6 +19247,11 @@
                     </a:solidFill>
                   </a:tcPr>
                 </a:tc>
+                <a:extLst>
+                  <a:ext uri="{0D108BD9-81ED-4DB2-BD59-A6C34878D82A}">
+                    <a16:rowId xmlns:a16="http://schemas.microsoft.com/office/drawing/2014/main" val="10000"/>
+                  </a:ext>
+                </a:extLst>
               </a:tr>
               <a:tr h="365760">
                 <a:tc>
@@ -18634,6 +19323,11 @@
                     </a:solidFill>
                   </a:tcPr>
                 </a:tc>
+                <a:extLst>
+                  <a:ext uri="{0D108BD9-81ED-4DB2-BD59-A6C34878D82A}">
+                    <a16:rowId xmlns:a16="http://schemas.microsoft.com/office/drawing/2014/main" val="10001"/>
+                  </a:ext>
+                </a:extLst>
               </a:tr>
               <a:tr h="365760">
                 <a:tc>
@@ -18705,6 +19399,11 @@
                     </a:solidFill>
                   </a:tcPr>
                 </a:tc>
+                <a:extLst>
+                  <a:ext uri="{0D108BD9-81ED-4DB2-BD59-A6C34878D82A}">
+                    <a16:rowId xmlns:a16="http://schemas.microsoft.com/office/drawing/2014/main" val="10002"/>
+                  </a:ext>
+                </a:extLst>
               </a:tr>
               <a:tr h="365760">
                 <a:tc>
@@ -18714,14 +19413,29 @@
                     <a:p>
                       <a:pPr algn="l"/>
                       <a:r>
-                        <a:rPr sz="1200" b="0">
-                          <a:solidFill>
-                            <a:srgbClr val="1A1A2E"/>
-                          </a:solidFill>
-                          <a:latin typeface="游ゴシック"/>
-                        </a:rPr>
-                        <a:t>MAX31855 モジュール</a:t>
-                      </a:r>
+                        <a:rPr sz="1200" b="0" dirty="0">
+                          <a:solidFill>
+                            <a:srgbClr val="1A1A2E"/>
+                          </a:solidFill>
+                          <a:latin typeface="游ゴシック"/>
+                        </a:rPr>
+                        <a:t>MAX31855 </a:t>
+                      </a:r>
+                      <a:r>
+                        <a:rPr sz="1200" b="0" dirty="0" err="1">
+                          <a:solidFill>
+                            <a:srgbClr val="1A1A2E"/>
+                          </a:solidFill>
+                          <a:latin typeface="游ゴシック"/>
+                        </a:rPr>
+                        <a:t>モジュール</a:t>
+                      </a:r>
+                      <a:endParaRPr sz="1200" b="0" dirty="0">
+                        <a:solidFill>
+                          <a:srgbClr val="1A1A2E"/>
+                        </a:solidFill>
+                        <a:latin typeface="游ゴシック"/>
+                      </a:endParaRPr>
                     </a:p>
                   </a:txBody>
                   <a:tcPr>
@@ -18737,7 +19451,7 @@
                     <a:p>
                       <a:pPr algn="l"/>
                       <a:r>
-                        <a:rPr sz="1200" b="0">
+                        <a:rPr sz="1200" b="0" dirty="0">
                           <a:solidFill>
                             <a:srgbClr val="1A1A2E"/>
                           </a:solidFill>
@@ -18776,6 +19490,11 @@
                     </a:solidFill>
                   </a:tcPr>
                 </a:tc>
+                <a:extLst>
+                  <a:ext uri="{0D108BD9-81ED-4DB2-BD59-A6C34878D82A}">
+                    <a16:rowId xmlns:a16="http://schemas.microsoft.com/office/drawing/2014/main" val="10003"/>
+                  </a:ext>
+                </a:extLst>
               </a:tr>
               <a:tr h="365760">
                 <a:tc>
@@ -18847,6 +19566,11 @@
                     </a:solidFill>
                   </a:tcPr>
                 </a:tc>
+                <a:extLst>
+                  <a:ext uri="{0D108BD9-81ED-4DB2-BD59-A6C34878D82A}">
+                    <a16:rowId xmlns:a16="http://schemas.microsoft.com/office/drawing/2014/main" val="10004"/>
+                  </a:ext>
+                </a:extLst>
               </a:tr>
               <a:tr h="365760">
                 <a:tc>
@@ -18918,6 +19642,11 @@
                     </a:solidFill>
                   </a:tcPr>
                 </a:tc>
+                <a:extLst>
+                  <a:ext uri="{0D108BD9-81ED-4DB2-BD59-A6C34878D82A}">
+                    <a16:rowId xmlns:a16="http://schemas.microsoft.com/office/drawing/2014/main" val="10005"/>
+                  </a:ext>
+                </a:extLst>
               </a:tr>
               <a:tr h="365760">
                 <a:tc>
@@ -18989,6 +19718,11 @@
                     </a:solidFill>
                   </a:tcPr>
                 </a:tc>
+                <a:extLst>
+                  <a:ext uri="{0D108BD9-81ED-4DB2-BD59-A6C34878D82A}">
+                    <a16:rowId xmlns:a16="http://schemas.microsoft.com/office/drawing/2014/main" val="10006"/>
+                  </a:ext>
+                </a:extLst>
               </a:tr>
               <a:tr h="365760">
                 <a:tc>
@@ -19044,7 +19778,7 @@
                     <a:p>
                       <a:pPr algn="l"/>
                       <a:r>
-                        <a:rPr sz="1200" b="1">
+                        <a:rPr sz="1200" b="1" dirty="0">
                           <a:solidFill>
                             <a:srgbClr val="FFFFFF"/>
                           </a:solidFill>
@@ -19060,6 +19794,11 @@
                     </a:solidFill>
                   </a:tcPr>
                 </a:tc>
+                <a:extLst>
+                  <a:ext uri="{0D108BD9-81ED-4DB2-BD59-A6C34878D82A}">
+                    <a16:rowId xmlns:a16="http://schemas.microsoft.com/office/drawing/2014/main" val="10007"/>
+                  </a:ext>
+                </a:extLst>
               </a:tr>
             </a:tbl>
           </a:graphicData>
@@ -19095,7 +19834,7 @@
                 </a:solidFill>
                 <a:latin typeface="游ゴシック"/>
               </a:rPr>
-              <a:t>市販温度ロガーとの価格比較</a:t>
+              <a:t>同等機能の産業用ロガーとの機能・価格比較</a:t>
             </a:r>
           </a:p>
         </p:txBody>
@@ -19110,7 +19849,7 @@
         </p:nvGraphicFramePr>
         <p:xfrm>
           <a:off x="5943600" y="1371600"/>
-          <a:ext cx="5925312" cy="1463040"/>
+          <a:ext cx="5943600" cy="2560320"/>
         </p:xfrm>
         <a:graphic>
           <a:graphicData uri="http://schemas.openxmlformats.org/drawingml/2006/table">
@@ -19119,9 +19858,27 @@
                 <a:tableStyleId>{5C22544A-7EE6-4342-B048-85BDC9FD1C3A}</a:tableStyleId>
               </a:tblPr>
               <a:tblGrid>
-                <a:gridCol w="2560320"/>
-                <a:gridCol w="1993392"/>
-                <a:gridCol w="1371600"/>
+                <a:gridCol w="3108960">
+                  <a:extLst>
+                    <a:ext uri="{9D8B030D-6E8A-4147-A177-3AD203B41FA5}">
+                      <a16:colId xmlns:a16="http://schemas.microsoft.com/office/drawing/2014/main" val="20000"/>
+                    </a:ext>
+                  </a:extLst>
+                </a:gridCol>
+                <a:gridCol w="1097280">
+                  <a:extLst>
+                    <a:ext uri="{9D8B030D-6E8A-4147-A177-3AD203B41FA5}">
+                      <a16:colId xmlns:a16="http://schemas.microsoft.com/office/drawing/2014/main" val="20001"/>
+                    </a:ext>
+                  </a:extLst>
+                </a:gridCol>
+                <a:gridCol w="1737360">
+                  <a:extLst>
+                    <a:ext uri="{9D8B030D-6E8A-4147-A177-3AD203B41FA5}">
+                      <a16:colId xmlns:a16="http://schemas.microsoft.com/office/drawing/2014/main" val="20002"/>
+                    </a:ext>
+                  </a:extLst>
+                </a:gridCol>
               </a:tblGrid>
               <a:tr h="365760">
                 <a:tc>
@@ -19137,7 +19894,7 @@
                           </a:solidFill>
                           <a:latin typeface="Segoe UI"/>
                         </a:rPr>
-                        <a:t>カテゴリ</a:t>
+                        <a:t>機能</a:t>
                       </a:r>
                     </a:p>
                   </a:txBody>
@@ -19160,7 +19917,7 @@
                           </a:solidFill>
                           <a:latin typeface="Segoe UI"/>
                         </a:rPr>
-                        <a:t>代表製品</a:t>
+                        <a:t>本ツール</a:t>
                       </a:r>
                     </a:p>
                   </a:txBody>
@@ -19183,7 +19940,7 @@
                           </a:solidFill>
                           <a:latin typeface="Segoe UI"/>
                         </a:rPr>
-                        <a:t>概算価格</a:t>
+                        <a:t>産業用ロガー</a:t>
                       </a:r>
                     </a:p>
                   </a:txBody>
@@ -19193,6 +19950,11 @@
                     </a:solidFill>
                   </a:tcPr>
                 </a:tc>
+                <a:extLst>
+                  <a:ext uri="{0D108BD9-81ED-4DB2-BD59-A6C34878D82A}">
+                    <a16:rowId xmlns:a16="http://schemas.microsoft.com/office/drawing/2014/main" val="10000"/>
+                  </a:ext>
+                </a:extLst>
               </a:tr>
               <a:tr h="365760">
                 <a:tc>
@@ -19202,68 +19964,73 @@
                     <a:p>
                       <a:pPr algn="l"/>
                       <a:r>
-                        <a:rPr sz="1200" b="1">
-                          <a:solidFill>
-                            <a:srgbClr val="FFFFFF"/>
-                          </a:solidFill>
-                          <a:latin typeface="游ゴシック"/>
-                        </a:rPr>
-                        <a:t>本ツール（自作）</a:t>
-                      </a:r>
-                    </a:p>
-                  </a:txBody>
-                  <a:tcPr>
-                    <a:solidFill>
-                      <a:srgbClr val="0D477F"/>
-                    </a:solidFill>
-                  </a:tcPr>
-                </a:tc>
-                <a:tc>
-                  <a:txBody>
-                    <a:bodyPr/>
-                    <a:lstStyle/>
-                    <a:p>
-                      <a:pPr algn="l"/>
-                      <a:r>
-                        <a:rPr sz="1200" b="1">
-                          <a:solidFill>
-                            <a:srgbClr val="FFFFFF"/>
-                          </a:solidFill>
-                          <a:latin typeface="游ゴシック"/>
-                        </a:rPr>
-                        <a:t>M5Stack Basic V2.7 + MAX31855</a:t>
-                      </a:r>
-                    </a:p>
-                  </a:txBody>
-                  <a:tcPr>
-                    <a:solidFill>
-                      <a:srgbClr val="0D477F"/>
-                    </a:solidFill>
-                  </a:tcPr>
-                </a:tc>
-                <a:tc>
-                  <a:txBody>
-                    <a:bodyPr/>
-                    <a:lstStyle/>
-                    <a:p>
-                      <a:pPr algn="l"/>
-                      <a:r>
-                        <a:rPr sz="1200" b="1">
-                          <a:solidFill>
-                            <a:srgbClr val="FFFFFF"/>
-                          </a:solidFill>
-                          <a:latin typeface="游ゴシック"/>
-                        </a:rPr>
-                        <a:t>約¥17,082</a:t>
-                      </a:r>
-                    </a:p>
-                  </a:txBody>
-                  <a:tcPr>
-                    <a:solidFill>
-                      <a:srgbClr val="0D477F"/>
-                    </a:solidFill>
-                  </a:tcPr>
-                </a:tc>
+                        <a:rPr sz="1200" b="0">
+                          <a:solidFill>
+                            <a:srgbClr val="1A1A2E"/>
+                          </a:solidFill>
+                          <a:latin typeface="游ゴシック"/>
+                        </a:rPr>
+                        <a:t>K型熱電対 計測</a:t>
+                      </a:r>
+                    </a:p>
+                  </a:txBody>
+                  <a:tcPr>
+                    <a:solidFill>
+                      <a:srgbClr val="FFFFFF"/>
+                    </a:solidFill>
+                  </a:tcPr>
+                </a:tc>
+                <a:tc>
+                  <a:txBody>
+                    <a:bodyPr/>
+                    <a:lstStyle/>
+                    <a:p>
+                      <a:pPr algn="l"/>
+                      <a:r>
+                        <a:rPr sz="1200" b="0">
+                          <a:solidFill>
+                            <a:srgbClr val="1A1A2E"/>
+                          </a:solidFill>
+                          <a:latin typeface="游ゴシック"/>
+                        </a:rPr>
+                        <a:t>✓</a:t>
+                      </a:r>
+                    </a:p>
+                  </a:txBody>
+                  <a:tcPr>
+                    <a:solidFill>
+                      <a:srgbClr val="FFFFFF"/>
+                    </a:solidFill>
+                  </a:tcPr>
+                </a:tc>
+                <a:tc>
+                  <a:txBody>
+                    <a:bodyPr/>
+                    <a:lstStyle/>
+                    <a:p>
+                      <a:pPr algn="l"/>
+                      <a:r>
+                        <a:rPr sz="1200" b="0">
+                          <a:solidFill>
+                            <a:srgbClr val="1A1A2E"/>
+                          </a:solidFill>
+                          <a:latin typeface="游ゴシック"/>
+                        </a:rPr>
+                        <a:t>✓</a:t>
+                      </a:r>
+                    </a:p>
+                  </a:txBody>
+                  <a:tcPr>
+                    <a:solidFill>
+                      <a:srgbClr val="FFFFFF"/>
+                    </a:solidFill>
+                  </a:tcPr>
+                </a:tc>
+                <a:extLst>
+                  <a:ext uri="{0D108BD9-81ED-4DB2-BD59-A6C34878D82A}">
+                    <a16:rowId xmlns:a16="http://schemas.microsoft.com/office/drawing/2014/main" val="10001"/>
+                  </a:ext>
+                </a:extLst>
               </a:tr>
               <a:tr h="365760">
                 <a:tc>
@@ -19279,7 +20046,7 @@
                           </a:solidFill>
                           <a:latin typeface="游ゴシック"/>
                         </a:rPr>
-                        <a:t>標準製品</a:t>
+                        <a:t>スタンドアロン動作 (PC 不要)</a:t>
                       </a:r>
                     </a:p>
                   </a:txBody>
@@ -19302,7 +20069,7 @@
                           </a:solidFill>
                           <a:latin typeface="游ゴシック"/>
                         </a:rPr>
-                        <a:t>USB データロガー</a:t>
+                        <a:t>✓</a:t>
                       </a:r>
                     </a:p>
                   </a:txBody>
@@ -19325,7 +20092,7 @@
                           </a:solidFill>
                           <a:latin typeface="游ゴシック"/>
                         </a:rPr>
-                        <a:t>¥30,000〜¥50,000</a:t>
+                        <a:t>✓</a:t>
                       </a:r>
                     </a:p>
                   </a:txBody>
@@ -19335,6 +20102,11 @@
                     </a:solidFill>
                   </a:tcPr>
                 </a:tc>
+                <a:extLst>
+                  <a:ext uri="{0D108BD9-81ED-4DB2-BD59-A6C34878D82A}">
+                    <a16:rowId xmlns:a16="http://schemas.microsoft.com/office/drawing/2014/main" val="10002"/>
+                  </a:ext>
+                </a:extLst>
               </a:tr>
               <a:tr h="365760">
                 <a:tc>
@@ -19350,7 +20122,7 @@
                           </a:solidFill>
                           <a:latin typeface="游ゴシック"/>
                         </a:rPr>
-                        <a:t>プロフェッショナル</a:t>
+                        <a:t>LCD リアルタイム表示</a:t>
                       </a:r>
                     </a:p>
                   </a:txBody>
@@ -19373,7 +20145,7 @@
                           </a:solidFill>
                           <a:latin typeface="游ゴシック"/>
                         </a:rPr>
-                        <a:t>産業用データロガー</a:t>
+                        <a:t>✓</a:t>
                       </a:r>
                     </a:p>
                   </a:txBody>
@@ -19396,7 +20168,7 @@
                           </a:solidFill>
                           <a:latin typeface="游ゴシック"/>
                         </a:rPr>
-                        <a:t>¥100,000〜¥300,000+</a:t>
+                        <a:t>✓</a:t>
                       </a:r>
                     </a:p>
                   </a:txBody>
@@ -19406,6 +20178,257 @@
                     </a:solidFill>
                   </a:tcPr>
                 </a:tc>
+                <a:extLst>
+                  <a:ext uri="{0D108BD9-81ED-4DB2-BD59-A6C34878D82A}">
+                    <a16:rowId xmlns:a16="http://schemas.microsoft.com/office/drawing/2014/main" val="10003"/>
+                  </a:ext>
+                </a:extLst>
+              </a:tr>
+              <a:tr h="365760">
+                <a:tc>
+                  <a:txBody>
+                    <a:bodyPr/>
+                    <a:lstStyle/>
+                    <a:p>
+                      <a:pPr algn="l"/>
+                      <a:r>
+                        <a:rPr sz="1200" b="0">
+                          <a:solidFill>
+                            <a:srgbClr val="1A1A2E"/>
+                          </a:solidFill>
+                          <a:latin typeface="游ゴシック"/>
+                        </a:rPr>
+                        <a:t>上下限アラーム</a:t>
+                      </a:r>
+                    </a:p>
+                  </a:txBody>
+                  <a:tcPr>
+                    <a:solidFill>
+                      <a:srgbClr val="F4F4F4"/>
+                    </a:solidFill>
+                  </a:tcPr>
+                </a:tc>
+                <a:tc>
+                  <a:txBody>
+                    <a:bodyPr/>
+                    <a:lstStyle/>
+                    <a:p>
+                      <a:pPr algn="l"/>
+                      <a:r>
+                        <a:rPr sz="1200" b="0">
+                          <a:solidFill>
+                            <a:srgbClr val="1A1A2E"/>
+                          </a:solidFill>
+                          <a:latin typeface="游ゴシック"/>
+                        </a:rPr>
+                        <a:t>✓</a:t>
+                      </a:r>
+                    </a:p>
+                  </a:txBody>
+                  <a:tcPr>
+                    <a:solidFill>
+                      <a:srgbClr val="F4F4F4"/>
+                    </a:solidFill>
+                  </a:tcPr>
+                </a:tc>
+                <a:tc>
+                  <a:txBody>
+                    <a:bodyPr/>
+                    <a:lstStyle/>
+                    <a:p>
+                      <a:pPr algn="l"/>
+                      <a:r>
+                        <a:rPr sz="1200" b="0">
+                          <a:solidFill>
+                            <a:srgbClr val="1A1A2E"/>
+                          </a:solidFill>
+                          <a:latin typeface="游ゴシック"/>
+                        </a:rPr>
+                        <a:t>✓</a:t>
+                      </a:r>
+                    </a:p>
+                  </a:txBody>
+                  <a:tcPr>
+                    <a:solidFill>
+                      <a:srgbClr val="F4F4F4"/>
+                    </a:solidFill>
+                  </a:tcPr>
+                </a:tc>
+                <a:extLst>
+                  <a:ext uri="{0D108BD9-81ED-4DB2-BD59-A6C34878D82A}">
+                    <a16:rowId xmlns:a16="http://schemas.microsoft.com/office/drawing/2014/main" val="10004"/>
+                  </a:ext>
+                </a:extLst>
+              </a:tr>
+              <a:tr h="365760">
+                <a:tc>
+                  <a:txBody>
+                    <a:bodyPr/>
+                    <a:lstStyle/>
+                    <a:p>
+                      <a:pPr algn="l"/>
+                      <a:r>
+                        <a:rPr sz="1200" b="0" dirty="0">
+                          <a:solidFill>
+                            <a:srgbClr val="1A1A2E"/>
+                          </a:solidFill>
+                          <a:latin typeface="游ゴシック"/>
+                        </a:rPr>
+                        <a:t>SD </a:t>
+                      </a:r>
+                      <a:r>
+                        <a:rPr sz="1200" b="0" dirty="0" err="1">
+                          <a:solidFill>
+                            <a:srgbClr val="1A1A2E"/>
+                          </a:solidFill>
+                          <a:latin typeface="游ゴシック"/>
+                        </a:rPr>
+                        <a:t>カード記録</a:t>
+                      </a:r>
+                      <a:r>
+                        <a:rPr sz="1200" b="0" dirty="0">
+                          <a:solidFill>
+                            <a:srgbClr val="1A1A2E"/>
+                          </a:solidFill>
+                          <a:latin typeface="游ゴシック"/>
+                        </a:rPr>
+                        <a:t> (CSV)</a:t>
+                      </a:r>
+                    </a:p>
+                  </a:txBody>
+                  <a:tcPr>
+                    <a:solidFill>
+                      <a:srgbClr val="FFFFFF"/>
+                    </a:solidFill>
+                  </a:tcPr>
+                </a:tc>
+                <a:tc>
+                  <a:txBody>
+                    <a:bodyPr/>
+                    <a:lstStyle/>
+                    <a:p>
+                      <a:pPr algn="l"/>
+                      <a:r>
+                        <a:rPr sz="1200" b="0">
+                          <a:solidFill>
+                            <a:srgbClr val="1A1A2E"/>
+                          </a:solidFill>
+                          <a:latin typeface="游ゴシック"/>
+                        </a:rPr>
+                        <a:t>✓</a:t>
+                      </a:r>
+                    </a:p>
+                  </a:txBody>
+                  <a:tcPr>
+                    <a:solidFill>
+                      <a:srgbClr val="FFFFFF"/>
+                    </a:solidFill>
+                  </a:tcPr>
+                </a:tc>
+                <a:tc>
+                  <a:txBody>
+                    <a:bodyPr/>
+                    <a:lstStyle/>
+                    <a:p>
+                      <a:pPr algn="l"/>
+                      <a:r>
+                        <a:rPr sz="1200" b="0">
+                          <a:solidFill>
+                            <a:srgbClr val="1A1A2E"/>
+                          </a:solidFill>
+                          <a:latin typeface="游ゴシック"/>
+                        </a:rPr>
+                        <a:t>✓</a:t>
+                      </a:r>
+                    </a:p>
+                  </a:txBody>
+                  <a:tcPr>
+                    <a:solidFill>
+                      <a:srgbClr val="FFFFFF"/>
+                    </a:solidFill>
+                  </a:tcPr>
+                </a:tc>
+                <a:extLst>
+                  <a:ext uri="{0D108BD9-81ED-4DB2-BD59-A6C34878D82A}">
+                    <a16:rowId xmlns:a16="http://schemas.microsoft.com/office/drawing/2014/main" val="10005"/>
+                  </a:ext>
+                </a:extLst>
+              </a:tr>
+              <a:tr h="365760">
+                <a:tc>
+                  <a:txBody>
+                    <a:bodyPr/>
+                    <a:lstStyle/>
+                    <a:p>
+                      <a:pPr algn="l"/>
+                      <a:r>
+                        <a:rPr sz="1200" b="1">
+                          <a:solidFill>
+                            <a:srgbClr val="FFFFFF"/>
+                          </a:solidFill>
+                          <a:latin typeface="游ゴシック"/>
+                        </a:rPr>
+                        <a:t>価格</a:t>
+                      </a:r>
+                    </a:p>
+                  </a:txBody>
+                  <a:tcPr>
+                    <a:solidFill>
+                      <a:srgbClr val="0D477F"/>
+                    </a:solidFill>
+                  </a:tcPr>
+                </a:tc>
+                <a:tc>
+                  <a:txBody>
+                    <a:bodyPr/>
+                    <a:lstStyle/>
+                    <a:p>
+                      <a:pPr algn="l"/>
+                      <a:r>
+                        <a:rPr sz="1200" b="1">
+                          <a:solidFill>
+                            <a:srgbClr val="FFFFFF"/>
+                          </a:solidFill>
+                          <a:latin typeface="游ゴシック"/>
+                        </a:rPr>
+                        <a:t>約¥17,082</a:t>
+                      </a:r>
+                    </a:p>
+                  </a:txBody>
+                  <a:tcPr>
+                    <a:solidFill>
+                      <a:srgbClr val="0D477F"/>
+                    </a:solidFill>
+                  </a:tcPr>
+                </a:tc>
+                <a:tc>
+                  <a:txBody>
+                    <a:bodyPr/>
+                    <a:lstStyle/>
+                    <a:p>
+                      <a:pPr algn="l"/>
+                      <a:r>
+                        <a:rPr sz="1200" b="1" dirty="0">
+                          <a:solidFill>
+                            <a:srgbClr val="FFFFFF"/>
+                          </a:solidFill>
+                          <a:latin typeface="游ゴシック"/>
+                        </a:rPr>
+                        <a:t>¥80,000〜¥200,000+</a:t>
+                      </a:r>
+                    </a:p>
+                  </a:txBody>
+                  <a:tcPr>
+                    <a:solidFill>
+                      <a:srgbClr val="0D477F"/>
+                    </a:solidFill>
+                  </a:tcPr>
+                </a:tc>
+                <a:extLst>
+                  <a:ext uri="{0D108BD9-81ED-4DB2-BD59-A6C34878D82A}">
+                    <a16:rowId xmlns:a16="http://schemas.microsoft.com/office/drawing/2014/main" val="10006"/>
+                  </a:ext>
+                </a:extLst>
               </a:tr>
             </a:tbl>
           </a:graphicData>
@@ -19419,7 +20442,7 @@
         </p:nvSpPr>
         <p:spPr>
           <a:xfrm>
-            <a:off x="320040" y="3977639"/>
+            <a:off x="320040" y="4389120"/>
             <a:ext cx="11548872" cy="1280160"/>
           </a:xfrm>
           <a:prstGeom prst="rect">
@@ -19451,6 +20474,7 @@
           <a:lstStyle/>
           <a:p>
             <a:pPr algn="ctr"/>
+            <a:endParaRPr/>
           </a:p>
         </p:txBody>
       </p:sp>
@@ -19462,7 +20486,7 @@
         </p:nvSpPr>
         <p:spPr>
           <a:xfrm>
-            <a:off x="457200" y="4069080"/>
+            <a:off x="457200" y="4480561"/>
             <a:ext cx="11247120" cy="548640"/>
           </a:xfrm>
           <a:prstGeom prst="rect">
@@ -19484,7 +20508,7 @@
                 </a:solidFill>
                 <a:latin typeface="游ゴシック"/>
               </a:rPr>
-              <a:t>標準製品の約 1/1.8 の価格で同等機能を実現</a:t>
+              <a:t>同等機能の産業用ロガーと比べて 約 1/5 〜 1/12 のコストで実現</a:t>
             </a:r>
           </a:p>
         </p:txBody>
@@ -19497,7 +20521,7 @@
         </p:nvSpPr>
         <p:spPr>
           <a:xfrm>
-            <a:off x="457200" y="4709160"/>
+            <a:off x="457200" y="5120641"/>
             <a:ext cx="11247120" cy="457200"/>
           </a:xfrm>
           <a:prstGeom prst="rect">
@@ -19513,14 +20537,74 @@
           <a:p>
             <a:pPr algn="ctr"/>
             <a:r>
-              <a:rPr sz="1500" b="0" i="0">
+              <a:rPr sz="1500" b="0" i="0" dirty="0" err="1">
                 <a:solidFill>
                   <a:srgbClr val="FF6D00"/>
                 </a:solidFill>
                 <a:latin typeface="游ゴシック"/>
               </a:rPr>
-              <a:t>本ツール 約¥17,082 vs 標準ロガー ¥30,000〜 → 最大 ¥13,000 以上削減</a:t>
-            </a:r>
+              <a:t>本ツール</a:t>
+            </a:r>
+            <a:r>
+              <a:rPr sz="1500" b="0" i="0" dirty="0">
+                <a:solidFill>
+                  <a:srgbClr val="FF6D00"/>
+                </a:solidFill>
+                <a:latin typeface="游ゴシック"/>
+              </a:rPr>
+              <a:t> 約¥17,082 vs </a:t>
+            </a:r>
+            <a:r>
+              <a:rPr sz="1500" b="0" i="0" dirty="0" err="1">
+                <a:solidFill>
+                  <a:srgbClr val="FF6D00"/>
+                </a:solidFill>
+                <a:latin typeface="游ゴシック"/>
+              </a:rPr>
+              <a:t>産業用ロガ</a:t>
+            </a:r>
+            <a:r>
+              <a:rPr sz="1500" b="0" i="0" dirty="0">
+                <a:solidFill>
+                  <a:srgbClr val="FF6D00"/>
+                </a:solidFill>
+                <a:latin typeface="游ゴシック"/>
+              </a:rPr>
+              <a:t>ー ¥80,000〜 → </a:t>
+            </a:r>
+            <a:r>
+              <a:rPr sz="1500" b="0" i="0" dirty="0" err="1">
+                <a:solidFill>
+                  <a:srgbClr val="FF6D00"/>
+                </a:solidFill>
+                <a:latin typeface="游ゴシック"/>
+              </a:rPr>
+              <a:t>最大</a:t>
+            </a:r>
+            <a:r>
+              <a:rPr sz="1500" b="0" i="0" dirty="0">
+                <a:solidFill>
+                  <a:srgbClr val="FF6D00"/>
+                </a:solidFill>
+                <a:latin typeface="游ゴシック"/>
+              </a:rPr>
+              <a:t> ¥60,000 </a:t>
+            </a:r>
+            <a:r>
+              <a:rPr sz="1500" b="0" i="0" dirty="0" err="1">
+                <a:solidFill>
+                  <a:srgbClr val="FF6D00"/>
+                </a:solidFill>
+                <a:latin typeface="游ゴシック"/>
+              </a:rPr>
+              <a:t>以上削減</a:t>
+            </a:r>
+            <a:endParaRPr sz="1500" b="0" i="0" dirty="0">
+              <a:solidFill>
+                <a:srgbClr val="FF6D00"/>
+              </a:solidFill>
+              <a:latin typeface="游ゴシック"/>
+            </a:endParaRPr>
           </a:p>
         </p:txBody>
       </p:sp>
@@ -19532,8 +20616,8 @@
         </p:nvSpPr>
         <p:spPr>
           <a:xfrm>
-            <a:off x="320040" y="5349240"/>
-            <a:ext cx="11548872" cy="914400"/>
+            <a:off x="320040" y="5669280"/>
+            <a:ext cx="11548872" cy="594359"/>
           </a:xfrm>
           <a:prstGeom prst="rect">
             <a:avLst/>
@@ -19564,6 +20648,7 @@
           <a:lstStyle/>
           <a:p>
             <a:pPr algn="ctr"/>
+            <a:endParaRPr/>
           </a:p>
         </p:txBody>
       </p:sp>
@@ -19575,7 +20660,7 @@
         </p:nvSpPr>
         <p:spPr>
           <a:xfrm>
-            <a:off x="502920" y="5413248"/>
+            <a:off x="502920" y="5760720"/>
             <a:ext cx="11155680" cy="749808"/>
           </a:xfrm>
           <a:prstGeom prst="rect">
@@ -19591,25 +20676,133 @@
           <a:p>
             <a:pPr algn="ctr"/>
             <a:r>
-              <a:rPr sz="1200" b="0" i="0">
+              <a:rPr sz="1200" b="0" i="0" dirty="0">
                 <a:solidFill>
                   <a:srgbClr val="1A1A2E"/>
                 </a:solidFill>
                 <a:latin typeface="游ゴシック"/>
               </a:rPr>
-              <a:t>✓ SD 自動記録  ✓ LCD リアルタイム表示  ✓ 上下限アラーム（ビープ音）</a:t>
+              <a:t>✓ SD </a:t>
+            </a:r>
+            <a:r>
+              <a:rPr sz="1200" b="0" i="0" dirty="0" err="1">
+                <a:solidFill>
+                  <a:srgbClr val="1A1A2E"/>
+                </a:solidFill>
+                <a:latin typeface="游ゴシック"/>
+              </a:rPr>
+              <a:t>自動記録</a:t>
+            </a:r>
+            <a:r>
+              <a:rPr sz="1200" b="0" i="0" dirty="0">
+                <a:solidFill>
+                  <a:srgbClr val="1A1A2E"/>
+                </a:solidFill>
+                <a:latin typeface="游ゴシック"/>
+              </a:rPr>
+              <a:t>  ✓ LCD </a:t>
+            </a:r>
+            <a:r>
+              <a:rPr sz="1200" b="0" i="0" dirty="0" err="1">
+                <a:solidFill>
+                  <a:srgbClr val="1A1A2E"/>
+                </a:solidFill>
+                <a:latin typeface="游ゴシック"/>
+              </a:rPr>
+              <a:t>リアルタイム表示</a:t>
+            </a:r>
+            <a:r>
+              <a:rPr sz="1200" b="0" i="0" dirty="0">
+                <a:solidFill>
+                  <a:srgbClr val="1A1A2E"/>
+                </a:solidFill>
+                <a:latin typeface="游ゴシック"/>
+              </a:rPr>
+              <a:t>  ✓ </a:t>
+            </a:r>
+            <a:r>
+              <a:rPr sz="1200" b="0" i="0" dirty="0" err="1">
+                <a:solidFill>
+                  <a:srgbClr val="1A1A2E"/>
+                </a:solidFill>
+                <a:latin typeface="游ゴシック"/>
+              </a:rPr>
+              <a:t>上下限アラーム（ビープ音</a:t>
+            </a:r>
+            <a:r>
+              <a:rPr sz="1200" b="0" i="0" dirty="0">
+                <a:solidFill>
+                  <a:srgbClr val="1A1A2E"/>
+                </a:solidFill>
+                <a:latin typeface="游ゴシック"/>
+              </a:rPr>
+              <a:t>）</a:t>
             </a:r>
           </a:p>
           <a:p>
             <a:pPr algn="ctr"/>
             <a:r>
-              <a:rPr sz="1200" b="0" i="0">
+              <a:rPr sz="1200" b="0" i="0" dirty="0">
                 <a:solidFill>
                   <a:srgbClr val="1A1A2E"/>
                 </a:solidFill>
                 <a:latin typeface="游ゴシック"/>
               </a:rPr>
-              <a:t>✓ スタンドアロン動作  ✓ EEPROM 設定保存  ✓ 統計解析（平均・σ・Max/Min）</a:t>
+              <a:t>✓ </a:t>
+            </a:r>
+            <a:r>
+              <a:rPr sz="1200" b="0" i="0" dirty="0" err="1">
+                <a:solidFill>
+                  <a:srgbClr val="1A1A2E"/>
+                </a:solidFill>
+                <a:latin typeface="游ゴシック"/>
+              </a:rPr>
+              <a:t>スタンドアロン動作</a:t>
+            </a:r>
+            <a:r>
+              <a:rPr sz="1200" b="0" i="0" dirty="0">
+                <a:solidFill>
+                  <a:srgbClr val="1A1A2E"/>
+                </a:solidFill>
+                <a:latin typeface="游ゴシック"/>
+              </a:rPr>
+              <a:t>  ✓ EEPROM </a:t>
+            </a:r>
+            <a:r>
+              <a:rPr sz="1200" b="0" i="0" dirty="0" err="1">
+                <a:solidFill>
+                  <a:srgbClr val="1A1A2E"/>
+                </a:solidFill>
+                <a:latin typeface="游ゴシック"/>
+              </a:rPr>
+              <a:t>設定保存</a:t>
+            </a:r>
+            <a:r>
+              <a:rPr sz="1200" b="0" i="0" dirty="0">
+                <a:solidFill>
+                  <a:srgbClr val="1A1A2E"/>
+                </a:solidFill>
+                <a:latin typeface="游ゴシック"/>
+              </a:rPr>
+              <a:t>  ✓ </a:t>
+            </a:r>
+            <a:r>
+              <a:rPr sz="1200" b="0" i="0" dirty="0" err="1">
+                <a:solidFill>
+                  <a:srgbClr val="1A1A2E"/>
+                </a:solidFill>
+                <a:latin typeface="游ゴシック"/>
+              </a:rPr>
+              <a:t>統計解析（平均・σ・Max</a:t>
+            </a:r>
+            <a:r>
+              <a:rPr sz="1200" b="0" i="0" dirty="0">
+                <a:solidFill>
+                  <a:srgbClr val="1A1A2E"/>
+                </a:solidFill>
+                <a:latin typeface="游ゴシック"/>
+              </a:rPr>
+              <a:t>/Min）</a:t>
             </a:r>
           </a:p>
         </p:txBody>
@@ -19623,7 +20816,7 @@
 </file>
 
 <file path=ppt/slides/slide5.xml><?xml version="1.0" encoding="utf-8"?>
-<p:sld xmlns:a="http://schemas.openxmlformats.org/drawingml/2006/main" xmlns:p="http://schemas.openxmlformats.org/presentationml/2006/main" xmlns:r="http://schemas.openxmlformats.org/officeDocument/2006/relationships">
+<p:sld xmlns:a="http://schemas.openxmlformats.org/drawingml/2006/main" xmlns:r="http://schemas.openxmlformats.org/officeDocument/2006/relationships" xmlns:p="http://schemas.openxmlformats.org/presentationml/2006/main">
   <p:cSld>
     <p:spTree>
       <p:nvGrpSpPr>
@@ -19631,7 +20824,14 @@
         <p:cNvGrpSpPr/>
         <p:nvPr/>
       </p:nvGrpSpPr>
-      <p:grpSpPr/>
+      <p:grpSpPr>
+        <a:xfrm>
+          <a:off x="0" y="0"/>
+          <a:ext cx="0" cy="0"/>
+          <a:chOff x="0" y="0"/>
+          <a:chExt cx="0" cy="0"/>
+        </a:xfrm>
+      </p:grpSpPr>
       <p:sp>
         <p:nvSpPr>
           <p:cNvPr id="2" name="Rectangle 1"/>
@@ -19672,6 +20872,7 @@
           <a:lstStyle/>
           <a:p>
             <a:pPr algn="ctr"/>
+            <a:endParaRPr/>
           </a:p>
         </p:txBody>
       </p:sp>
@@ -19785,6 +20986,7 @@
           <a:lstStyle/>
           <a:p>
             <a:pPr algn="ctr"/>
+            <a:endParaRPr/>
           </a:p>
         </p:txBody>
       </p:sp>
@@ -19898,6 +21100,7 @@
           <a:lstStyle/>
           <a:p>
             <a:pPr algn="ctr"/>
+            <a:endParaRPr/>
           </a:p>
         </p:txBody>
       </p:sp>
@@ -20019,15 +21222,12 @@
           </a:p>
           <a:p>
             <a:pPr algn="ctr"/>
-            <a:r>
-              <a:rPr sz="1300" b="0" i="0">
-                <a:solidFill>
-                  <a:srgbClr val="1A1A2E"/>
-                </a:solidFill>
-                <a:latin typeface="游ゴシック"/>
-              </a:rPr>
-              <a:t/>
-            </a:r>
+            <a:endParaRPr sz="1300" b="0" i="0">
+              <a:solidFill>
+                <a:srgbClr val="1A1A2E"/>
+              </a:solidFill>
+              <a:latin typeface="游ゴシック"/>
+            </a:endParaRPr>
           </a:p>
           <a:p>
             <a:pPr algn="ctr"/>
@@ -20142,6 +21342,7 @@
           <a:lstStyle/>
           <a:p>
             <a:pPr algn="ctr"/>
+            <a:endParaRPr/>
           </a:p>
         </p:txBody>
       </p:sp>
@@ -20350,6 +21551,7 @@
           <a:lstStyle/>
           <a:p>
             <a:pPr algn="ctr"/>
+            <a:endParaRPr/>
           </a:p>
         </p:txBody>
       </p:sp>
@@ -20435,6 +21637,15 @@
           </a:p>
           <a:p>
             <a:pPr algn="ctr"/>
+            <a:endParaRPr sz="1300" b="0" i="0">
+              <a:solidFill>
+                <a:srgbClr val="1A1A2E"/>
+              </a:solidFill>
+              <a:latin typeface="游ゴシック"/>
+            </a:endParaRPr>
+          </a:p>
+          <a:p>
+            <a:pPr algn="ctr"/>
             <a:r>
               <a:rPr sz="1300" b="0" i="0">
                 <a:solidFill>
@@ -20442,7 +21653,7 @@
                 </a:solidFill>
                 <a:latin typeface="游ゴシック"/>
               </a:rPr>
-              <a:t/>
+              <a:t>LCD</a:t>
             </a:r>
           </a:p>
           <a:p>
@@ -20454,32 +21665,17 @@
                 </a:solidFill>
                 <a:latin typeface="游ゴシック"/>
               </a:rPr>
-              <a:t>LCD</a:t>
+              <a:t>→ リアルタイム表示</a:t>
             </a:r>
           </a:p>
           <a:p>
             <a:pPr algn="ctr"/>
-            <a:r>
-              <a:rPr sz="1300" b="0" i="0">
-                <a:solidFill>
-                  <a:srgbClr val="1A1A2E"/>
-                </a:solidFill>
-                <a:latin typeface="游ゴシック"/>
-              </a:rPr>
-              <a:t>→ リアルタイム表示</a:t>
-            </a:r>
-          </a:p>
-          <a:p>
-            <a:pPr algn="ctr"/>
-            <a:r>
-              <a:rPr sz="1300" b="0" i="0">
-                <a:solidFill>
-                  <a:srgbClr val="1A1A2E"/>
-                </a:solidFill>
-                <a:latin typeface="游ゴシック"/>
-              </a:rPr>
-              <a:t/>
-            </a:r>
+            <a:endParaRPr sz="1300" b="0" i="0">
+              <a:solidFill>
+                <a:srgbClr val="1A1A2E"/>
+              </a:solidFill>
+              <a:latin typeface="游ゴシック"/>
+            </a:endParaRPr>
           </a:p>
           <a:p>
             <a:pPr algn="ctr"/>
@@ -20516,7 +21712,7 @@
 </file>
 
 <file path=ppt/slides/slide6.xml><?xml version="1.0" encoding="utf-8"?>
-<p:sld xmlns:a="http://schemas.openxmlformats.org/drawingml/2006/main" xmlns:p="http://schemas.openxmlformats.org/presentationml/2006/main" xmlns:r="http://schemas.openxmlformats.org/officeDocument/2006/relationships">
+<p:sld xmlns:a="http://schemas.openxmlformats.org/drawingml/2006/main" xmlns:r="http://schemas.openxmlformats.org/officeDocument/2006/relationships" xmlns:p="http://schemas.openxmlformats.org/presentationml/2006/main">
   <p:cSld>
     <p:spTree>
       <p:nvGrpSpPr>
@@ -20524,7 +21720,14 @@
         <p:cNvGrpSpPr/>
         <p:nvPr/>
       </p:nvGrpSpPr>
-      <p:grpSpPr/>
+      <p:grpSpPr>
+        <a:xfrm>
+          <a:off x="0" y="0"/>
+          <a:ext cx="0" cy="0"/>
+          <a:chOff x="0" y="0"/>
+          <a:chExt cx="0" cy="0"/>
+        </a:xfrm>
+      </p:grpSpPr>
       <p:sp>
         <p:nvSpPr>
           <p:cNvPr id="2" name="Rectangle 1"/>
@@ -20565,6 +21768,7 @@
           <a:lstStyle/>
           <a:p>
             <a:pPr algn="ctr"/>
+            <a:endParaRPr/>
           </a:p>
         </p:txBody>
       </p:sp>
@@ -20678,6 +21882,7 @@
           <a:lstStyle/>
           <a:p>
             <a:pPr algn="ctr"/>
+            <a:endParaRPr/>
           </a:p>
         </p:txBody>
       </p:sp>
@@ -20770,9 +21975,27 @@
                 <a:tableStyleId>{5C22544A-7EE6-4342-B048-85BDC9FD1C3A}</a:tableStyleId>
               </a:tblPr>
               <a:tblGrid>
-                <a:gridCol w="2286000"/>
-                <a:gridCol w="4114800"/>
-                <a:gridCol w="5120640"/>
+                <a:gridCol w="2286000">
+                  <a:extLst>
+                    <a:ext uri="{9D8B030D-6E8A-4147-A177-3AD203B41FA5}">
+                      <a16:colId xmlns:a16="http://schemas.microsoft.com/office/drawing/2014/main" val="20000"/>
+                    </a:ext>
+                  </a:extLst>
+                </a:gridCol>
+                <a:gridCol w="4114800">
+                  <a:extLst>
+                    <a:ext uri="{9D8B030D-6E8A-4147-A177-3AD203B41FA5}">
+                      <a16:colId xmlns:a16="http://schemas.microsoft.com/office/drawing/2014/main" val="20001"/>
+                    </a:ext>
+                  </a:extLst>
+                </a:gridCol>
+                <a:gridCol w="5120640">
+                  <a:extLst>
+                    <a:ext uri="{9D8B030D-6E8A-4147-A177-3AD203B41FA5}">
+                      <a16:colId xmlns:a16="http://schemas.microsoft.com/office/drawing/2014/main" val="20002"/>
+                    </a:ext>
+                  </a:extLst>
+                </a:gridCol>
               </a:tblGrid>
               <a:tr h="457200">
                 <a:tc>
@@ -20844,6 +22067,11 @@
                     </a:solidFill>
                   </a:tcPr>
                 </a:tc>
+                <a:extLst>
+                  <a:ext uri="{0D108BD9-81ED-4DB2-BD59-A6C34878D82A}">
+                    <a16:rowId xmlns:a16="http://schemas.microsoft.com/office/drawing/2014/main" val="10000"/>
+                  </a:ext>
+                </a:extLst>
               </a:tr>
               <a:tr h="457200">
                 <a:tc>
@@ -20915,6 +22143,11 @@
                     </a:solidFill>
                   </a:tcPr>
                 </a:tc>
+                <a:extLst>
+                  <a:ext uri="{0D108BD9-81ED-4DB2-BD59-A6C34878D82A}">
+                    <a16:rowId xmlns:a16="http://schemas.microsoft.com/office/drawing/2014/main" val="10001"/>
+                  </a:ext>
+                </a:extLst>
               </a:tr>
               <a:tr h="457200">
                 <a:tc>
@@ -20986,6 +22219,11 @@
                     </a:solidFill>
                   </a:tcPr>
                 </a:tc>
+                <a:extLst>
+                  <a:ext uri="{0D108BD9-81ED-4DB2-BD59-A6C34878D82A}">
+                    <a16:rowId xmlns:a16="http://schemas.microsoft.com/office/drawing/2014/main" val="10002"/>
+                  </a:ext>
+                </a:extLst>
               </a:tr>
               <a:tr h="457200">
                 <a:tc>
@@ -21057,6 +22295,11 @@
                     </a:solidFill>
                   </a:tcPr>
                 </a:tc>
+                <a:extLst>
+                  <a:ext uri="{0D108BD9-81ED-4DB2-BD59-A6C34878D82A}">
+                    <a16:rowId xmlns:a16="http://schemas.microsoft.com/office/drawing/2014/main" val="10003"/>
+                  </a:ext>
+                </a:extLst>
               </a:tr>
               <a:tr h="457200">
                 <a:tc>
@@ -21128,6 +22371,11 @@
                     </a:solidFill>
                   </a:tcPr>
                 </a:tc>
+                <a:extLst>
+                  <a:ext uri="{0D108BD9-81ED-4DB2-BD59-A6C34878D82A}">
+                    <a16:rowId xmlns:a16="http://schemas.microsoft.com/office/drawing/2014/main" val="10004"/>
+                  </a:ext>
+                </a:extLst>
               </a:tr>
               <a:tr h="457200">
                 <a:tc>
@@ -21199,6 +22447,11 @@
                     </a:solidFill>
                   </a:tcPr>
                 </a:tc>
+                <a:extLst>
+                  <a:ext uri="{0D108BD9-81ED-4DB2-BD59-A6C34878D82A}">
+                    <a16:rowId xmlns:a16="http://schemas.microsoft.com/office/drawing/2014/main" val="10005"/>
+                  </a:ext>
+                </a:extLst>
               </a:tr>
               <a:tr h="457200">
                 <a:tc>
@@ -21270,6 +22523,11 @@
                     </a:solidFill>
                   </a:tcPr>
                 </a:tc>
+                <a:extLst>
+                  <a:ext uri="{0D108BD9-81ED-4DB2-BD59-A6C34878D82A}">
+                    <a16:rowId xmlns:a16="http://schemas.microsoft.com/office/drawing/2014/main" val="10006"/>
+                  </a:ext>
+                </a:extLst>
               </a:tr>
               <a:tr h="457200">
                 <a:tc>
@@ -21341,6 +22599,11 @@
                     </a:solidFill>
                   </a:tcPr>
                 </a:tc>
+                <a:extLst>
+                  <a:ext uri="{0D108BD9-81ED-4DB2-BD59-A6C34878D82A}">
+                    <a16:rowId xmlns:a16="http://schemas.microsoft.com/office/drawing/2014/main" val="10007"/>
+                  </a:ext>
+                </a:extLst>
               </a:tr>
             </a:tbl>
           </a:graphicData>
@@ -21386,6 +22649,7 @@
           <a:lstStyle/>
           <a:p>
             <a:pPr algn="ctr"/>
+            <a:endParaRPr/>
           </a:p>
         </p:txBody>
       </p:sp>
@@ -21433,7 +22697,7 @@
 </file>
 
 <file path=ppt/slides/slide7.xml><?xml version="1.0" encoding="utf-8"?>
-<p:sld xmlns:a="http://schemas.openxmlformats.org/drawingml/2006/main" xmlns:p="http://schemas.openxmlformats.org/presentationml/2006/main" xmlns:r="http://schemas.openxmlformats.org/officeDocument/2006/relationships">
+<p:sld xmlns:a="http://schemas.openxmlformats.org/drawingml/2006/main" xmlns:r="http://schemas.openxmlformats.org/officeDocument/2006/relationships" xmlns:p="http://schemas.openxmlformats.org/presentationml/2006/main">
   <p:cSld>
     <p:spTree>
       <p:nvGrpSpPr>
@@ -21441,7 +22705,14 @@
         <p:cNvGrpSpPr/>
         <p:nvPr/>
       </p:nvGrpSpPr>
-      <p:grpSpPr/>
+      <p:grpSpPr>
+        <a:xfrm>
+          <a:off x="0" y="0"/>
+          <a:ext cx="0" cy="0"/>
+          <a:chOff x="0" y="0"/>
+          <a:chExt cx="0" cy="0"/>
+        </a:xfrm>
+      </p:grpSpPr>
       <p:sp>
         <p:nvSpPr>
           <p:cNvPr id="2" name="Rectangle 1"/>
@@ -21482,6 +22753,7 @@
           <a:lstStyle/>
           <a:p>
             <a:pPr algn="ctr"/>
+            <a:endParaRPr/>
           </a:p>
         </p:txBody>
       </p:sp>
@@ -21595,6 +22867,7 @@
           <a:lstStyle/>
           <a:p>
             <a:pPr algn="ctr"/>
+            <a:endParaRPr/>
           </a:p>
         </p:txBody>
       </p:sp>
@@ -21722,10 +22995,34 @@
                 <a:tableStyleId>{5C22544A-7EE6-4342-B048-85BDC9FD1C3A}</a:tableStyleId>
               </a:tblPr>
               <a:tblGrid>
-                <a:gridCol w="1828800"/>
-                <a:gridCol w="2286000"/>
-                <a:gridCol w="3657600"/>
-                <a:gridCol w="3749039"/>
+                <a:gridCol w="1828800">
+                  <a:extLst>
+                    <a:ext uri="{9D8B030D-6E8A-4147-A177-3AD203B41FA5}">
+                      <a16:colId xmlns:a16="http://schemas.microsoft.com/office/drawing/2014/main" val="20000"/>
+                    </a:ext>
+                  </a:extLst>
+                </a:gridCol>
+                <a:gridCol w="2286000">
+                  <a:extLst>
+                    <a:ext uri="{9D8B030D-6E8A-4147-A177-3AD203B41FA5}">
+                      <a16:colId xmlns:a16="http://schemas.microsoft.com/office/drawing/2014/main" val="20001"/>
+                    </a:ext>
+                  </a:extLst>
+                </a:gridCol>
+                <a:gridCol w="3657600">
+                  <a:extLst>
+                    <a:ext uri="{9D8B030D-6E8A-4147-A177-3AD203B41FA5}">
+                      <a16:colId xmlns:a16="http://schemas.microsoft.com/office/drawing/2014/main" val="20002"/>
+                    </a:ext>
+                  </a:extLst>
+                </a:gridCol>
+                <a:gridCol w="3749039">
+                  <a:extLst>
+                    <a:ext uri="{9D8B030D-6E8A-4147-A177-3AD203B41FA5}">
+                      <a16:colId xmlns:a16="http://schemas.microsoft.com/office/drawing/2014/main" val="20003"/>
+                    </a:ext>
+                  </a:extLst>
+                </a:gridCol>
               </a:tblGrid>
               <a:tr h="411480">
                 <a:tc>
@@ -21820,6 +23117,11 @@
                     </a:solidFill>
                   </a:tcPr>
                 </a:tc>
+                <a:extLst>
+                  <a:ext uri="{0D108BD9-81ED-4DB2-BD59-A6C34878D82A}">
+                    <a16:rowId xmlns:a16="http://schemas.microsoft.com/office/drawing/2014/main" val="10000"/>
+                  </a:ext>
+                </a:extLst>
               </a:tr>
               <a:tr h="411480">
                 <a:tc>
@@ -21914,6 +23216,11 @@
                     </a:solidFill>
                   </a:tcPr>
                 </a:tc>
+                <a:extLst>
+                  <a:ext uri="{0D108BD9-81ED-4DB2-BD59-A6C34878D82A}">
+                    <a16:rowId xmlns:a16="http://schemas.microsoft.com/office/drawing/2014/main" val="10001"/>
+                  </a:ext>
+                </a:extLst>
               </a:tr>
               <a:tr h="411480">
                 <a:tc>
@@ -22008,6 +23315,11 @@
                     </a:solidFill>
                   </a:tcPr>
                 </a:tc>
+                <a:extLst>
+                  <a:ext uri="{0D108BD9-81ED-4DB2-BD59-A6C34878D82A}">
+                    <a16:rowId xmlns:a16="http://schemas.microsoft.com/office/drawing/2014/main" val="10002"/>
+                  </a:ext>
+                </a:extLst>
               </a:tr>
               <a:tr h="411480">
                 <a:tc>
@@ -22102,6 +23414,11 @@
                     </a:solidFill>
                   </a:tcPr>
                 </a:tc>
+                <a:extLst>
+                  <a:ext uri="{0D108BD9-81ED-4DB2-BD59-A6C34878D82A}">
+                    <a16:rowId xmlns:a16="http://schemas.microsoft.com/office/drawing/2014/main" val="10003"/>
+                  </a:ext>
+                </a:extLst>
               </a:tr>
               <a:tr h="411480">
                 <a:tc>
@@ -22196,6 +23513,11 @@
                     </a:solidFill>
                   </a:tcPr>
                 </a:tc>
+                <a:extLst>
+                  <a:ext uri="{0D108BD9-81ED-4DB2-BD59-A6C34878D82A}">
+                    <a16:rowId xmlns:a16="http://schemas.microsoft.com/office/drawing/2014/main" val="10004"/>
+                  </a:ext>
+                </a:extLst>
               </a:tr>
               <a:tr h="411480">
                 <a:tc>
@@ -22290,6 +23612,11 @@
                     </a:solidFill>
                   </a:tcPr>
                 </a:tc>
+                <a:extLst>
+                  <a:ext uri="{0D108BD9-81ED-4DB2-BD59-A6C34878D82A}">
+                    <a16:rowId xmlns:a16="http://schemas.microsoft.com/office/drawing/2014/main" val="10005"/>
+                  </a:ext>
+                </a:extLst>
               </a:tr>
             </a:tbl>
           </a:graphicData>
@@ -22337,6 +23664,7 @@
           <a:lstStyle/>
           <a:p>
             <a:pPr algn="ctr"/>
+            <a:endParaRPr/>
           </a:p>
         </p:txBody>
       </p:sp>
@@ -22450,6 +23778,7 @@
           <a:lstStyle/>
           <a:p>
             <a:pPr algn="ctr"/>
+            <a:endParaRPr/>
           </a:p>
         </p:txBody>
       </p:sp>
@@ -22497,7 +23826,7 @@
 </file>
 
 <file path=ppt/slides/slide8.xml><?xml version="1.0" encoding="utf-8"?>
-<p:sld xmlns:a="http://schemas.openxmlformats.org/drawingml/2006/main" xmlns:p="http://schemas.openxmlformats.org/presentationml/2006/main" xmlns:r="http://schemas.openxmlformats.org/officeDocument/2006/relationships">
+<p:sld xmlns:a="http://schemas.openxmlformats.org/drawingml/2006/main" xmlns:r="http://schemas.openxmlformats.org/officeDocument/2006/relationships" xmlns:p="http://schemas.openxmlformats.org/presentationml/2006/main">
   <p:cSld>
     <p:spTree>
       <p:nvGrpSpPr>
@@ -22505,7 +23834,14 @@
         <p:cNvGrpSpPr/>
         <p:nvPr/>
       </p:nvGrpSpPr>
-      <p:grpSpPr/>
+      <p:grpSpPr>
+        <a:xfrm>
+          <a:off x="0" y="0"/>
+          <a:ext cx="0" cy="0"/>
+          <a:chOff x="0" y="0"/>
+          <a:chExt cx="0" cy="0"/>
+        </a:xfrm>
+      </p:grpSpPr>
       <p:sp>
         <p:nvSpPr>
           <p:cNvPr id="2" name="Rectangle 1"/>
@@ -22546,6 +23882,7 @@
           <a:lstStyle/>
           <a:p>
             <a:pPr algn="ctr"/>
+            <a:endParaRPr/>
           </a:p>
         </p:txBody>
       </p:sp>
@@ -22659,6 +23996,7 @@
           <a:lstStyle/>
           <a:p>
             <a:pPr algn="ctr"/>
+            <a:endParaRPr/>
           </a:p>
         </p:txBody>
       </p:sp>
@@ -22751,9 +24089,27 @@
                 <a:tableStyleId>{5C22544A-7EE6-4342-B048-85BDC9FD1C3A}</a:tableStyleId>
               </a:tblPr>
               <a:tblGrid>
-                <a:gridCol w="2560320"/>
-                <a:gridCol w="2743200"/>
-                <a:gridCol w="6217920"/>
+                <a:gridCol w="2560320">
+                  <a:extLst>
+                    <a:ext uri="{9D8B030D-6E8A-4147-A177-3AD203B41FA5}">
+                      <a16:colId xmlns:a16="http://schemas.microsoft.com/office/drawing/2014/main" val="20000"/>
+                    </a:ext>
+                  </a:extLst>
+                </a:gridCol>
+                <a:gridCol w="2743200">
+                  <a:extLst>
+                    <a:ext uri="{9D8B030D-6E8A-4147-A177-3AD203B41FA5}">
+                      <a16:colId xmlns:a16="http://schemas.microsoft.com/office/drawing/2014/main" val="20001"/>
+                    </a:ext>
+                  </a:extLst>
+                </a:gridCol>
+                <a:gridCol w="6217920">
+                  <a:extLst>
+                    <a:ext uri="{9D8B030D-6E8A-4147-A177-3AD203B41FA5}">
+                      <a16:colId xmlns:a16="http://schemas.microsoft.com/office/drawing/2014/main" val="20002"/>
+                    </a:ext>
+                  </a:extLst>
+                </a:gridCol>
               </a:tblGrid>
               <a:tr h="438912">
                 <a:tc>
@@ -22825,6 +24181,11 @@
                     </a:solidFill>
                   </a:tcPr>
                 </a:tc>
+                <a:extLst>
+                  <a:ext uri="{0D108BD9-81ED-4DB2-BD59-A6C34878D82A}">
+                    <a16:rowId xmlns:a16="http://schemas.microsoft.com/office/drawing/2014/main" val="10000"/>
+                  </a:ext>
+                </a:extLst>
               </a:tr>
               <a:tr h="438912">
                 <a:tc>
@@ -22896,6 +24257,11 @@
                     </a:solidFill>
                   </a:tcPr>
                 </a:tc>
+                <a:extLst>
+                  <a:ext uri="{0D108BD9-81ED-4DB2-BD59-A6C34878D82A}">
+                    <a16:rowId xmlns:a16="http://schemas.microsoft.com/office/drawing/2014/main" val="10001"/>
+                  </a:ext>
+                </a:extLst>
               </a:tr>
               <a:tr h="438912">
                 <a:tc>
@@ -22967,6 +24333,11 @@
                     </a:solidFill>
                   </a:tcPr>
                 </a:tc>
+                <a:extLst>
+                  <a:ext uri="{0D108BD9-81ED-4DB2-BD59-A6C34878D82A}">
+                    <a16:rowId xmlns:a16="http://schemas.microsoft.com/office/drawing/2014/main" val="10002"/>
+                  </a:ext>
+                </a:extLst>
               </a:tr>
               <a:tr h="438912">
                 <a:tc>
@@ -23038,6 +24409,11 @@
                     </a:solidFill>
                   </a:tcPr>
                 </a:tc>
+                <a:extLst>
+                  <a:ext uri="{0D108BD9-81ED-4DB2-BD59-A6C34878D82A}">
+                    <a16:rowId xmlns:a16="http://schemas.microsoft.com/office/drawing/2014/main" val="10003"/>
+                  </a:ext>
+                </a:extLst>
               </a:tr>
               <a:tr h="438912">
                 <a:tc>
@@ -23109,6 +24485,11 @@
                     </a:solidFill>
                   </a:tcPr>
                 </a:tc>
+                <a:extLst>
+                  <a:ext uri="{0D108BD9-81ED-4DB2-BD59-A6C34878D82A}">
+                    <a16:rowId xmlns:a16="http://schemas.microsoft.com/office/drawing/2014/main" val="10004"/>
+                  </a:ext>
+                </a:extLst>
               </a:tr>
               <a:tr h="438912">
                 <a:tc>
@@ -23180,6 +24561,11 @@
                     </a:solidFill>
                   </a:tcPr>
                 </a:tc>
+                <a:extLst>
+                  <a:ext uri="{0D108BD9-81ED-4DB2-BD59-A6C34878D82A}">
+                    <a16:rowId xmlns:a16="http://schemas.microsoft.com/office/drawing/2014/main" val="10005"/>
+                  </a:ext>
+                </a:extLst>
               </a:tr>
               <a:tr h="438912">
                 <a:tc>
@@ -23251,6 +24637,11 @@
                     </a:solidFill>
                   </a:tcPr>
                 </a:tc>
+                <a:extLst>
+                  <a:ext uri="{0D108BD9-81ED-4DB2-BD59-A6C34878D82A}">
+                    <a16:rowId xmlns:a16="http://schemas.microsoft.com/office/drawing/2014/main" val="10006"/>
+                  </a:ext>
+                </a:extLst>
               </a:tr>
               <a:tr h="438912">
                 <a:tc>
@@ -23322,6 +24713,11 @@
                     </a:solidFill>
                   </a:tcPr>
                 </a:tc>
+                <a:extLst>
+                  <a:ext uri="{0D108BD9-81ED-4DB2-BD59-A6C34878D82A}">
+                    <a16:rowId xmlns:a16="http://schemas.microsoft.com/office/drawing/2014/main" val="10007"/>
+                  </a:ext>
+                </a:extLst>
               </a:tr>
             </a:tbl>
           </a:graphicData>
@@ -23367,6 +24763,7 @@
           <a:lstStyle/>
           <a:p>
             <a:pPr algn="ctr"/>
+            <a:endParaRPr/>
           </a:p>
         </p:txBody>
       </p:sp>
@@ -23414,7 +24811,7 @@
 </file>
 
 <file path=ppt/slides/slide9.xml><?xml version="1.0" encoding="utf-8"?>
-<p:sld xmlns:a="http://schemas.openxmlformats.org/drawingml/2006/main" xmlns:p="http://schemas.openxmlformats.org/presentationml/2006/main" xmlns:r="http://schemas.openxmlformats.org/officeDocument/2006/relationships">
+<p:sld xmlns:a="http://schemas.openxmlformats.org/drawingml/2006/main" xmlns:r="http://schemas.openxmlformats.org/officeDocument/2006/relationships" xmlns:p="http://schemas.openxmlformats.org/presentationml/2006/main">
   <p:cSld>
     <p:spTree>
       <p:nvGrpSpPr>
@@ -23422,7 +24819,14 @@
         <p:cNvGrpSpPr/>
         <p:nvPr/>
       </p:nvGrpSpPr>
-      <p:grpSpPr/>
+      <p:grpSpPr>
+        <a:xfrm>
+          <a:off x="0" y="0"/>
+          <a:ext cx="0" cy="0"/>
+          <a:chOff x="0" y="0"/>
+          <a:chExt cx="0" cy="0"/>
+        </a:xfrm>
+      </p:grpSpPr>
       <p:sp>
         <p:nvSpPr>
           <p:cNvPr id="2" name="Rectangle 1"/>
@@ -23463,6 +24867,7 @@
           <a:lstStyle/>
           <a:p>
             <a:pPr algn="ctr"/>
+            <a:endParaRPr/>
           </a:p>
         </p:txBody>
       </p:sp>
@@ -23576,6 +24981,7 @@
           <a:lstStyle/>
           <a:p>
             <a:pPr algn="ctr"/>
+            <a:endParaRPr/>
           </a:p>
         </p:txBody>
       </p:sp>
@@ -23689,6 +25095,7 @@
           <a:lstStyle/>
           <a:p>
             <a:pPr algn="ctr"/>
+            <a:endParaRPr/>
           </a:p>
         </p:txBody>
       </p:sp>
@@ -23873,6 +25280,7 @@
           <a:lstStyle/>
           <a:p>
             <a:pPr algn="ctr"/>
+            <a:endParaRPr/>
           </a:p>
         </p:txBody>
       </p:sp>
@@ -24056,6 +25464,7 @@
           <a:lstStyle/>
           <a:p>
             <a:pPr algn="ctr"/>
+            <a:endParaRPr/>
           </a:p>
         </p:txBody>
       </p:sp>
@@ -24239,6 +25648,7 @@
           <a:lstStyle/>
           <a:p>
             <a:pPr algn="ctr"/>
+            <a:endParaRPr/>
           </a:p>
         </p:txBody>
       </p:sp>
@@ -24367,10 +25777,34 @@
                 <a:tableStyleId>{5C22544A-7EE6-4342-B048-85BDC9FD1C3A}</a:tableStyleId>
               </a:tblPr>
               <a:tblGrid>
-                <a:gridCol w="1828800"/>
-                <a:gridCol w="1828800"/>
-                <a:gridCol w="3657600"/>
-                <a:gridCol w="4206240"/>
+                <a:gridCol w="1828800">
+                  <a:extLst>
+                    <a:ext uri="{9D8B030D-6E8A-4147-A177-3AD203B41FA5}">
+                      <a16:colId xmlns:a16="http://schemas.microsoft.com/office/drawing/2014/main" val="20000"/>
+                    </a:ext>
+                  </a:extLst>
+                </a:gridCol>
+                <a:gridCol w="1828800">
+                  <a:extLst>
+                    <a:ext uri="{9D8B030D-6E8A-4147-A177-3AD203B41FA5}">
+                      <a16:colId xmlns:a16="http://schemas.microsoft.com/office/drawing/2014/main" val="20001"/>
+                    </a:ext>
+                  </a:extLst>
+                </a:gridCol>
+                <a:gridCol w="3657600">
+                  <a:extLst>
+                    <a:ext uri="{9D8B030D-6E8A-4147-A177-3AD203B41FA5}">
+                      <a16:colId xmlns:a16="http://schemas.microsoft.com/office/drawing/2014/main" val="20002"/>
+                    </a:ext>
+                  </a:extLst>
+                </a:gridCol>
+                <a:gridCol w="4206240">
+                  <a:extLst>
+                    <a:ext uri="{9D8B030D-6E8A-4147-A177-3AD203B41FA5}">
+                      <a16:colId xmlns:a16="http://schemas.microsoft.com/office/drawing/2014/main" val="20003"/>
+                    </a:ext>
+                  </a:extLst>
+                </a:gridCol>
               </a:tblGrid>
               <a:tr h="402336">
                 <a:tc>
@@ -24465,6 +25899,11 @@
                     </a:solidFill>
                   </a:tcPr>
                 </a:tc>
+                <a:extLst>
+                  <a:ext uri="{0D108BD9-81ED-4DB2-BD59-A6C34878D82A}">
+                    <a16:rowId xmlns:a16="http://schemas.microsoft.com/office/drawing/2014/main" val="10000"/>
+                  </a:ext>
+                </a:extLst>
               </a:tr>
               <a:tr h="402336">
                 <a:tc>
@@ -24559,6 +25998,11 @@
                     </a:solidFill>
                   </a:tcPr>
                 </a:tc>
+                <a:extLst>
+                  <a:ext uri="{0D108BD9-81ED-4DB2-BD59-A6C34878D82A}">
+                    <a16:rowId xmlns:a16="http://schemas.microsoft.com/office/drawing/2014/main" val="10001"/>
+                  </a:ext>
+                </a:extLst>
               </a:tr>
               <a:tr h="402336">
                 <a:tc>
@@ -24653,6 +26097,11 @@
                     </a:solidFill>
                   </a:tcPr>
                 </a:tc>
+                <a:extLst>
+                  <a:ext uri="{0D108BD9-81ED-4DB2-BD59-A6C34878D82A}">
+                    <a16:rowId xmlns:a16="http://schemas.microsoft.com/office/drawing/2014/main" val="10002"/>
+                  </a:ext>
+                </a:extLst>
               </a:tr>
               <a:tr h="402336">
                 <a:tc>
@@ -24747,6 +26196,11 @@
                     </a:solidFill>
                   </a:tcPr>
                 </a:tc>
+                <a:extLst>
+                  <a:ext uri="{0D108BD9-81ED-4DB2-BD59-A6C34878D82A}">
+                    <a16:rowId xmlns:a16="http://schemas.microsoft.com/office/drawing/2014/main" val="10003"/>
+                  </a:ext>
+                </a:extLst>
               </a:tr>
               <a:tr h="402336">
                 <a:tc>
@@ -24841,6 +26295,11 @@
                     </a:solidFill>
                   </a:tcPr>
                 </a:tc>
+                <a:extLst>
+                  <a:ext uri="{0D108BD9-81ED-4DB2-BD59-A6C34878D82A}">
+                    <a16:rowId xmlns:a16="http://schemas.microsoft.com/office/drawing/2014/main" val="10004"/>
+                  </a:ext>
+                </a:extLst>
               </a:tr>
               <a:tr h="402336">
                 <a:tc>
@@ -24935,6 +26394,11 @@
                     </a:solidFill>
                   </a:tcPr>
                 </a:tc>
+                <a:extLst>
+                  <a:ext uri="{0D108BD9-81ED-4DB2-BD59-A6C34878D82A}">
+                    <a16:rowId xmlns:a16="http://schemas.microsoft.com/office/drawing/2014/main" val="10005"/>
+                  </a:ext>
+                </a:extLst>
               </a:tr>
             </a:tbl>
           </a:graphicData>

--- a/docs/career/Simple_Temp_Tool_Overview_v2.pptx
+++ b/docs/career/Simple_Temp_Tool_Overview_v2.pptx
@@ -5,31 +5,31 @@
     <p:sldMasterId id="2147483648" r:id="rId1"/>
   </p:sldMasterIdLst>
   <p:sldIdLst>
-    <p:sldId id="256" r:id="rId2"/>
-    <p:sldId id="257" r:id="rId3"/>
-    <p:sldId id="258" r:id="rId4"/>
-    <p:sldId id="259" r:id="rId5"/>
-    <p:sldId id="260" r:id="rId6"/>
-    <p:sldId id="261" r:id="rId7"/>
-    <p:sldId id="262" r:id="rId8"/>
-    <p:sldId id="263" r:id="rId9"/>
-    <p:sldId id="264" r:id="rId10"/>
-    <p:sldId id="265" r:id="rId11"/>
-    <p:sldId id="266" r:id="rId12"/>
-    <p:sldId id="267" r:id="rId13"/>
-    <p:sldId id="268" r:id="rId14"/>
-    <p:sldId id="269" r:id="rId15"/>
-    <p:sldId id="270" r:id="rId16"/>
-    <p:sldId id="271" r:id="rId17"/>
-    <p:sldId id="272" r:id="rId18"/>
-    <p:sldId id="273" r:id="rId19"/>
-    <p:sldId id="274" r:id="rId20"/>
-    <p:sldId id="275" r:id="rId21"/>
-    <p:sldId id="276" r:id="rId22"/>
-    <p:sldId id="277" r:id="rId23"/>
-    <p:sldId id="278" r:id="rId24"/>
+    <p:sldId id="256" r:id="rId7"/>
+    <p:sldId id="257" r:id="rId8"/>
+    <p:sldId id="258" r:id="rId9"/>
+    <p:sldId id="259" r:id="rId10"/>
+    <p:sldId id="260" r:id="rId11"/>
+    <p:sldId id="261" r:id="rId12"/>
+    <p:sldId id="262" r:id="rId13"/>
+    <p:sldId id="263" r:id="rId14"/>
+    <p:sldId id="264" r:id="rId15"/>
+    <p:sldId id="265" r:id="rId16"/>
+    <p:sldId id="266" r:id="rId17"/>
+    <p:sldId id="267" r:id="rId18"/>
+    <p:sldId id="268" r:id="rId19"/>
+    <p:sldId id="269" r:id="rId20"/>
+    <p:sldId id="270" r:id="rId21"/>
+    <p:sldId id="271" r:id="rId22"/>
+    <p:sldId id="272" r:id="rId23"/>
+    <p:sldId id="273" r:id="rId24"/>
+    <p:sldId id="274" r:id="rId25"/>
+    <p:sldId id="275" r:id="rId26"/>
+    <p:sldId id="276" r:id="rId27"/>
+    <p:sldId id="277" r:id="rId28"/>
+    <p:sldId id="278" r:id="rId29"/>
   </p:sldIdLst>
-  <p:sldSz cx="12188825" cy="6858000"/>
+  <p:sldSz cx="12188952" cy="6858000" type="screen4x3"/>
   <p:notesSz cx="6858000" cy="9144000"/>
   <p:defaultTextStyle>
     <a:defPPr>
@@ -126,22 +126,6 @@
       </a:defRPr>
     </a:lvl9pPr>
   </p:defaultTextStyle>
-  <p:extLst>
-    <p:ext uri="{EFAFB233-063F-42B5-8137-9DF3F51BA10A}">
-      <p15:sldGuideLst xmlns:p15="http://schemas.microsoft.com/office/powerpoint/2012/main">
-        <p15:guide id="1" orient="horz" pos="2160">
-          <p15:clr>
-            <a:srgbClr val="A4A3A4"/>
-          </p15:clr>
-        </p15:guide>
-        <p15:guide id="2" pos="2880">
-          <p15:clr>
-            <a:srgbClr val="A4A3A4"/>
-          </p15:clr>
-        </p15:guide>
-      </p15:sldGuideLst>
-    </p:ext>
-  </p:extLst>
 </p:presentation>
 </file>
 
@@ -183,9 +167,10 @@
           <a:lstStyle/>
           <a:p>
             <a:r>
-              <a:rPr lang="en-US"/>
+              <a:rPr lang="en-US" smtClean="0"/>
               <a:t>Click to edit Master title style</a:t>
             </a:r>
+            <a:endParaRPr lang="en-US"/>
           </a:p>
         </p:txBody>
       </p:sp>
@@ -301,9 +286,10 @@
           </a:lstStyle>
           <a:p>
             <a:r>
-              <a:rPr lang="en-US"/>
+              <a:rPr lang="en-US" smtClean="0"/>
               <a:t>Click to edit Master subtitle style</a:t>
             </a:r>
+            <a:endParaRPr lang="en-US"/>
           </a:p>
         </p:txBody>
       </p:sp>
@@ -324,7 +310,7 @@
           <a:p>
             <a:fld id="{5BCAD085-E8A6-8845-BD4E-CB4CCA059FC4}" type="datetimeFigureOut">
               <a:rPr lang="en-US" smtClean="0"/>
-              <a:t>3/3/2026</a:t>
+              <a:t>1/27/13</a:t>
             </a:fld>
             <a:endParaRPr lang="en-US"/>
           </a:p>
@@ -418,9 +404,10 @@
           <a:lstStyle/>
           <a:p>
             <a:r>
-              <a:rPr lang="en-US"/>
+              <a:rPr lang="en-US" smtClean="0"/>
               <a:t>Click to edit Master title style</a:t>
             </a:r>
+            <a:endParaRPr lang="en-US"/>
           </a:p>
         </p:txBody>
       </p:sp>
@@ -441,37 +428,38 @@
           <a:p>
             <a:pPr lvl="0"/>
             <a:r>
-              <a:rPr lang="en-US"/>
+              <a:rPr lang="en-US" smtClean="0"/>
               <a:t>Click to edit Master text styles</a:t>
             </a:r>
           </a:p>
           <a:p>
             <a:pPr lvl="1"/>
             <a:r>
-              <a:rPr lang="en-US"/>
+              <a:rPr lang="en-US" smtClean="0"/>
               <a:t>Second level</a:t>
             </a:r>
           </a:p>
           <a:p>
             <a:pPr lvl="2"/>
             <a:r>
-              <a:rPr lang="en-US"/>
+              <a:rPr lang="en-US" smtClean="0"/>
               <a:t>Third level</a:t>
             </a:r>
           </a:p>
           <a:p>
             <a:pPr lvl="3"/>
             <a:r>
-              <a:rPr lang="en-US"/>
+              <a:rPr lang="en-US" smtClean="0"/>
               <a:t>Fourth level</a:t>
             </a:r>
           </a:p>
           <a:p>
             <a:pPr lvl="4"/>
             <a:r>
-              <a:rPr lang="en-US"/>
+              <a:rPr lang="en-US" smtClean="0"/>
               <a:t>Fifth level</a:t>
             </a:r>
+            <a:endParaRPr lang="en-US"/>
           </a:p>
         </p:txBody>
       </p:sp>
@@ -492,7 +480,7 @@
           <a:p>
             <a:fld id="{5BCAD085-E8A6-8845-BD4E-CB4CCA059FC4}" type="datetimeFigureOut">
               <a:rPr lang="en-US" smtClean="0"/>
-              <a:t>3/3/2026</a:t>
+              <a:t>1/27/13</a:t>
             </a:fld>
             <a:endParaRPr lang="en-US"/>
           </a:p>
@@ -591,9 +579,10 @@
           <a:lstStyle/>
           <a:p>
             <a:r>
-              <a:rPr lang="en-US"/>
+              <a:rPr lang="en-US" smtClean="0"/>
               <a:t>Click to edit Master title style</a:t>
             </a:r>
+            <a:endParaRPr lang="en-US"/>
           </a:p>
         </p:txBody>
       </p:sp>
@@ -619,37 +608,38 @@
           <a:p>
             <a:pPr lvl="0"/>
             <a:r>
-              <a:rPr lang="en-US"/>
+              <a:rPr lang="en-US" smtClean="0"/>
               <a:t>Click to edit Master text styles</a:t>
             </a:r>
           </a:p>
           <a:p>
             <a:pPr lvl="1"/>
             <a:r>
-              <a:rPr lang="en-US"/>
+              <a:rPr lang="en-US" smtClean="0"/>
               <a:t>Second level</a:t>
             </a:r>
           </a:p>
           <a:p>
             <a:pPr lvl="2"/>
             <a:r>
-              <a:rPr lang="en-US"/>
+              <a:rPr lang="en-US" smtClean="0"/>
               <a:t>Third level</a:t>
             </a:r>
           </a:p>
           <a:p>
             <a:pPr lvl="3"/>
             <a:r>
-              <a:rPr lang="en-US"/>
+              <a:rPr lang="en-US" smtClean="0"/>
               <a:t>Fourth level</a:t>
             </a:r>
           </a:p>
           <a:p>
             <a:pPr lvl="4"/>
             <a:r>
-              <a:rPr lang="en-US"/>
+              <a:rPr lang="en-US" smtClean="0"/>
               <a:t>Fifth level</a:t>
             </a:r>
+            <a:endParaRPr lang="en-US"/>
           </a:p>
         </p:txBody>
       </p:sp>
@@ -670,7 +660,7 @@
           <a:p>
             <a:fld id="{5BCAD085-E8A6-8845-BD4E-CB4CCA059FC4}" type="datetimeFigureOut">
               <a:rPr lang="en-US" smtClean="0"/>
-              <a:t>3/3/2026</a:t>
+              <a:t>1/27/13</a:t>
             </a:fld>
             <a:endParaRPr lang="en-US"/>
           </a:p>
@@ -764,9 +754,10 @@
           <a:lstStyle/>
           <a:p>
             <a:r>
-              <a:rPr lang="en-US"/>
+              <a:rPr lang="en-US" smtClean="0"/>
               <a:t>Click to edit Master title style</a:t>
             </a:r>
+            <a:endParaRPr lang="en-US"/>
           </a:p>
         </p:txBody>
       </p:sp>
@@ -787,37 +778,38 @@
           <a:p>
             <a:pPr lvl="0"/>
             <a:r>
-              <a:rPr lang="en-US"/>
+              <a:rPr lang="en-US" smtClean="0"/>
               <a:t>Click to edit Master text styles</a:t>
             </a:r>
           </a:p>
           <a:p>
             <a:pPr lvl="1"/>
             <a:r>
-              <a:rPr lang="en-US"/>
+              <a:rPr lang="en-US" smtClean="0"/>
               <a:t>Second level</a:t>
             </a:r>
           </a:p>
           <a:p>
             <a:pPr lvl="2"/>
             <a:r>
-              <a:rPr lang="en-US"/>
+              <a:rPr lang="en-US" smtClean="0"/>
               <a:t>Third level</a:t>
             </a:r>
           </a:p>
           <a:p>
             <a:pPr lvl="3"/>
             <a:r>
-              <a:rPr lang="en-US"/>
+              <a:rPr lang="en-US" smtClean="0"/>
               <a:t>Fourth level</a:t>
             </a:r>
           </a:p>
           <a:p>
             <a:pPr lvl="4"/>
             <a:r>
-              <a:rPr lang="en-US"/>
+              <a:rPr lang="en-US" smtClean="0"/>
               <a:t>Fifth level</a:t>
             </a:r>
+            <a:endParaRPr lang="en-US"/>
           </a:p>
         </p:txBody>
       </p:sp>
@@ -838,7 +830,7 @@
           <a:p>
             <a:fld id="{5BCAD085-E8A6-8845-BD4E-CB4CCA059FC4}" type="datetimeFigureOut">
               <a:rPr lang="en-US" smtClean="0"/>
-              <a:t>3/3/2026</a:t>
+              <a:t>1/27/13</a:t>
             </a:fld>
             <a:endParaRPr lang="en-US"/>
           </a:p>
@@ -941,9 +933,10 @@
           </a:lstStyle>
           <a:p>
             <a:r>
-              <a:rPr lang="en-US"/>
+              <a:rPr lang="en-US" smtClean="0"/>
               <a:t>Click to edit Master title style</a:t>
             </a:r>
+            <a:endParaRPr lang="en-US"/>
           </a:p>
         </p:txBody>
       </p:sp>
@@ -1060,7 +1053,7 @@
           <a:p>
             <a:pPr lvl="0"/>
             <a:r>
-              <a:rPr lang="en-US"/>
+              <a:rPr lang="en-US" smtClean="0"/>
               <a:t>Click to edit Master text styles</a:t>
             </a:r>
           </a:p>
@@ -1083,7 +1076,7 @@
           <a:p>
             <a:fld id="{5BCAD085-E8A6-8845-BD4E-CB4CCA059FC4}" type="datetimeFigureOut">
               <a:rPr lang="en-US" smtClean="0"/>
-              <a:t>3/3/2026</a:t>
+              <a:t>1/27/13</a:t>
             </a:fld>
             <a:endParaRPr lang="en-US"/>
           </a:p>
@@ -1177,9 +1170,10 @@
           <a:lstStyle/>
           <a:p>
             <a:r>
-              <a:rPr lang="en-US"/>
+              <a:rPr lang="en-US" smtClean="0"/>
               <a:t>Click to edit Master title style</a:t>
             </a:r>
+            <a:endParaRPr lang="en-US"/>
           </a:p>
         </p:txBody>
       </p:sp>
@@ -1233,37 +1227,38 @@
           <a:p>
             <a:pPr lvl="0"/>
             <a:r>
-              <a:rPr lang="en-US"/>
+              <a:rPr lang="en-US" smtClean="0"/>
               <a:t>Click to edit Master text styles</a:t>
             </a:r>
           </a:p>
           <a:p>
             <a:pPr lvl="1"/>
             <a:r>
-              <a:rPr lang="en-US"/>
+              <a:rPr lang="en-US" smtClean="0"/>
               <a:t>Second level</a:t>
             </a:r>
           </a:p>
           <a:p>
             <a:pPr lvl="2"/>
             <a:r>
-              <a:rPr lang="en-US"/>
+              <a:rPr lang="en-US" smtClean="0"/>
               <a:t>Third level</a:t>
             </a:r>
           </a:p>
           <a:p>
             <a:pPr lvl="3"/>
             <a:r>
-              <a:rPr lang="en-US"/>
+              <a:rPr lang="en-US" smtClean="0"/>
               <a:t>Fourth level</a:t>
             </a:r>
           </a:p>
           <a:p>
             <a:pPr lvl="4"/>
             <a:r>
-              <a:rPr lang="en-US"/>
+              <a:rPr lang="en-US" smtClean="0"/>
               <a:t>Fifth level</a:t>
             </a:r>
+            <a:endParaRPr lang="en-US"/>
           </a:p>
         </p:txBody>
       </p:sp>
@@ -1317,37 +1312,38 @@
           <a:p>
             <a:pPr lvl="0"/>
             <a:r>
-              <a:rPr lang="en-US"/>
+              <a:rPr lang="en-US" smtClean="0"/>
               <a:t>Click to edit Master text styles</a:t>
             </a:r>
           </a:p>
           <a:p>
             <a:pPr lvl="1"/>
             <a:r>
-              <a:rPr lang="en-US"/>
+              <a:rPr lang="en-US" smtClean="0"/>
               <a:t>Second level</a:t>
             </a:r>
           </a:p>
           <a:p>
             <a:pPr lvl="2"/>
             <a:r>
-              <a:rPr lang="en-US"/>
+              <a:rPr lang="en-US" smtClean="0"/>
               <a:t>Third level</a:t>
             </a:r>
           </a:p>
           <a:p>
             <a:pPr lvl="3"/>
             <a:r>
-              <a:rPr lang="en-US"/>
+              <a:rPr lang="en-US" smtClean="0"/>
               <a:t>Fourth level</a:t>
             </a:r>
           </a:p>
           <a:p>
             <a:pPr lvl="4"/>
             <a:r>
-              <a:rPr lang="en-US"/>
+              <a:rPr lang="en-US" smtClean="0"/>
               <a:t>Fifth level</a:t>
             </a:r>
+            <a:endParaRPr lang="en-US"/>
           </a:p>
         </p:txBody>
       </p:sp>
@@ -1368,7 +1364,7 @@
           <a:p>
             <a:fld id="{5BCAD085-E8A6-8845-BD4E-CB4CCA059FC4}" type="datetimeFigureOut">
               <a:rPr lang="en-US" smtClean="0"/>
-              <a:t>3/3/2026</a:t>
+              <a:t>1/27/13</a:t>
             </a:fld>
             <a:endParaRPr lang="en-US"/>
           </a:p>
@@ -1466,9 +1462,10 @@
           </a:lstStyle>
           <a:p>
             <a:r>
-              <a:rPr lang="en-US"/>
+              <a:rPr lang="en-US" smtClean="0"/>
               <a:t>Click to edit Master title style</a:t>
             </a:r>
+            <a:endParaRPr lang="en-US"/>
           </a:p>
         </p:txBody>
       </p:sp>
@@ -1531,7 +1528,7 @@
           <a:p>
             <a:pPr lvl="0"/>
             <a:r>
-              <a:rPr lang="en-US"/>
+              <a:rPr lang="en-US" smtClean="0"/>
               <a:t>Click to edit Master text styles</a:t>
             </a:r>
           </a:p>
@@ -1587,37 +1584,38 @@
           <a:p>
             <a:pPr lvl="0"/>
             <a:r>
-              <a:rPr lang="en-US"/>
+              <a:rPr lang="en-US" smtClean="0"/>
               <a:t>Click to edit Master text styles</a:t>
             </a:r>
           </a:p>
           <a:p>
             <a:pPr lvl="1"/>
             <a:r>
-              <a:rPr lang="en-US"/>
+              <a:rPr lang="en-US" smtClean="0"/>
               <a:t>Second level</a:t>
             </a:r>
           </a:p>
           <a:p>
             <a:pPr lvl="2"/>
             <a:r>
-              <a:rPr lang="en-US"/>
+              <a:rPr lang="en-US" smtClean="0"/>
               <a:t>Third level</a:t>
             </a:r>
           </a:p>
           <a:p>
             <a:pPr lvl="3"/>
             <a:r>
-              <a:rPr lang="en-US"/>
+              <a:rPr lang="en-US" smtClean="0"/>
               <a:t>Fourth level</a:t>
             </a:r>
           </a:p>
           <a:p>
             <a:pPr lvl="4"/>
             <a:r>
-              <a:rPr lang="en-US"/>
+              <a:rPr lang="en-US" smtClean="0"/>
               <a:t>Fifth level</a:t>
             </a:r>
+            <a:endParaRPr lang="en-US"/>
           </a:p>
         </p:txBody>
       </p:sp>
@@ -1680,7 +1678,7 @@
           <a:p>
             <a:pPr lvl="0"/>
             <a:r>
-              <a:rPr lang="en-US"/>
+              <a:rPr lang="en-US" smtClean="0"/>
               <a:t>Click to edit Master text styles</a:t>
             </a:r>
           </a:p>
@@ -1736,37 +1734,38 @@
           <a:p>
             <a:pPr lvl="0"/>
             <a:r>
-              <a:rPr lang="en-US"/>
+              <a:rPr lang="en-US" smtClean="0"/>
               <a:t>Click to edit Master text styles</a:t>
             </a:r>
           </a:p>
           <a:p>
             <a:pPr lvl="1"/>
             <a:r>
-              <a:rPr lang="en-US"/>
+              <a:rPr lang="en-US" smtClean="0"/>
               <a:t>Second level</a:t>
             </a:r>
           </a:p>
           <a:p>
             <a:pPr lvl="2"/>
             <a:r>
-              <a:rPr lang="en-US"/>
+              <a:rPr lang="en-US" smtClean="0"/>
               <a:t>Third level</a:t>
             </a:r>
           </a:p>
           <a:p>
             <a:pPr lvl="3"/>
             <a:r>
-              <a:rPr lang="en-US"/>
+              <a:rPr lang="en-US" smtClean="0"/>
               <a:t>Fourth level</a:t>
             </a:r>
           </a:p>
           <a:p>
             <a:pPr lvl="4"/>
             <a:r>
-              <a:rPr lang="en-US"/>
+              <a:rPr lang="en-US" smtClean="0"/>
               <a:t>Fifth level</a:t>
             </a:r>
+            <a:endParaRPr lang="en-US"/>
           </a:p>
         </p:txBody>
       </p:sp>
@@ -1787,7 +1786,7 @@
           <a:p>
             <a:fld id="{5BCAD085-E8A6-8845-BD4E-CB4CCA059FC4}" type="datetimeFigureOut">
               <a:rPr lang="en-US" smtClean="0"/>
-              <a:t>3/3/2026</a:t>
+              <a:t>1/27/13</a:t>
             </a:fld>
             <a:endParaRPr lang="en-US"/>
           </a:p>
@@ -1881,9 +1880,10 @@
           <a:lstStyle/>
           <a:p>
             <a:r>
-              <a:rPr lang="en-US"/>
+              <a:rPr lang="en-US" smtClean="0"/>
               <a:t>Click to edit Master title style</a:t>
             </a:r>
+            <a:endParaRPr lang="en-US"/>
           </a:p>
         </p:txBody>
       </p:sp>
@@ -1904,7 +1904,7 @@
           <a:p>
             <a:fld id="{5BCAD085-E8A6-8845-BD4E-CB4CCA059FC4}" type="datetimeFigureOut">
               <a:rPr lang="en-US" smtClean="0"/>
-              <a:t>3/3/2026</a:t>
+              <a:t>1/27/13</a:t>
             </a:fld>
             <a:endParaRPr lang="en-US"/>
           </a:p>
@@ -1999,7 +1999,7 @@
           <a:p>
             <a:fld id="{5BCAD085-E8A6-8845-BD4E-CB4CCA059FC4}" type="datetimeFigureOut">
               <a:rPr lang="en-US" smtClean="0"/>
-              <a:t>3/3/2026</a:t>
+              <a:t>1/27/13</a:t>
             </a:fld>
             <a:endParaRPr lang="en-US"/>
           </a:p>
@@ -2102,9 +2102,10 @@
           </a:lstStyle>
           <a:p>
             <a:r>
-              <a:rPr lang="en-US"/>
+              <a:rPr lang="en-US" smtClean="0"/>
               <a:t>Click to edit Master title style</a:t>
             </a:r>
+            <a:endParaRPr lang="en-US"/>
           </a:p>
         </p:txBody>
       </p:sp>
@@ -2158,37 +2159,38 @@
           <a:p>
             <a:pPr lvl="0"/>
             <a:r>
-              <a:rPr lang="en-US"/>
+              <a:rPr lang="en-US" smtClean="0"/>
               <a:t>Click to edit Master text styles</a:t>
             </a:r>
           </a:p>
           <a:p>
             <a:pPr lvl="1"/>
             <a:r>
-              <a:rPr lang="en-US"/>
+              <a:rPr lang="en-US" smtClean="0"/>
               <a:t>Second level</a:t>
             </a:r>
           </a:p>
           <a:p>
             <a:pPr lvl="2"/>
             <a:r>
-              <a:rPr lang="en-US"/>
+              <a:rPr lang="en-US" smtClean="0"/>
               <a:t>Third level</a:t>
             </a:r>
           </a:p>
           <a:p>
             <a:pPr lvl="3"/>
             <a:r>
-              <a:rPr lang="en-US"/>
+              <a:rPr lang="en-US" smtClean="0"/>
               <a:t>Fourth level</a:t>
             </a:r>
           </a:p>
           <a:p>
             <a:pPr lvl="4"/>
             <a:r>
-              <a:rPr lang="en-US"/>
+              <a:rPr lang="en-US" smtClean="0"/>
               <a:t>Fifth level</a:t>
             </a:r>
+            <a:endParaRPr lang="en-US"/>
           </a:p>
         </p:txBody>
       </p:sp>
@@ -2251,7 +2253,7 @@
           <a:p>
             <a:pPr lvl="0"/>
             <a:r>
-              <a:rPr lang="en-US"/>
+              <a:rPr lang="en-US" smtClean="0"/>
               <a:t>Click to edit Master text styles</a:t>
             </a:r>
           </a:p>
@@ -2274,7 +2276,7 @@
           <a:p>
             <a:fld id="{5BCAD085-E8A6-8845-BD4E-CB4CCA059FC4}" type="datetimeFigureOut">
               <a:rPr lang="en-US" smtClean="0"/>
-              <a:t>3/3/2026</a:t>
+              <a:t>1/27/13</a:t>
             </a:fld>
             <a:endParaRPr lang="en-US"/>
           </a:p>
@@ -2377,9 +2379,10 @@
           </a:lstStyle>
           <a:p>
             <a:r>
-              <a:rPr lang="en-US"/>
+              <a:rPr lang="en-US" smtClean="0"/>
               <a:t>Click to edit Master title style</a:t>
             </a:r>
+            <a:endParaRPr lang="en-US"/>
           </a:p>
         </p:txBody>
       </p:sp>
@@ -2503,7 +2506,7 @@
           <a:p>
             <a:pPr lvl="0"/>
             <a:r>
-              <a:rPr lang="en-US"/>
+              <a:rPr lang="en-US" smtClean="0"/>
               <a:t>Click to edit Master text styles</a:t>
             </a:r>
           </a:p>
@@ -2526,7 +2529,7 @@
           <a:p>
             <a:fld id="{5BCAD085-E8A6-8845-BD4E-CB4CCA059FC4}" type="datetimeFigureOut">
               <a:rPr lang="en-US" smtClean="0"/>
-              <a:t>3/3/2026</a:t>
+              <a:t>1/27/13</a:t>
             </a:fld>
             <a:endParaRPr lang="en-US"/>
           </a:p>
@@ -2635,9 +2638,10 @@
           <a:lstStyle/>
           <a:p>
             <a:r>
-              <a:rPr lang="en-US"/>
+              <a:rPr lang="en-US" smtClean="0"/>
               <a:t>Click to edit Master title style</a:t>
             </a:r>
+            <a:endParaRPr lang="en-US"/>
           </a:p>
         </p:txBody>
       </p:sp>
@@ -2668,37 +2672,38 @@
           <a:p>
             <a:pPr lvl="0"/>
             <a:r>
-              <a:rPr lang="en-US"/>
+              <a:rPr lang="en-US" smtClean="0"/>
               <a:t>Click to edit Master text styles</a:t>
             </a:r>
           </a:p>
           <a:p>
             <a:pPr lvl="1"/>
             <a:r>
-              <a:rPr lang="en-US"/>
+              <a:rPr lang="en-US" smtClean="0"/>
               <a:t>Second level</a:t>
             </a:r>
           </a:p>
           <a:p>
             <a:pPr lvl="2"/>
             <a:r>
-              <a:rPr lang="en-US"/>
+              <a:rPr lang="en-US" smtClean="0"/>
               <a:t>Third level</a:t>
             </a:r>
           </a:p>
           <a:p>
             <a:pPr lvl="3"/>
             <a:r>
-              <a:rPr lang="en-US"/>
+              <a:rPr lang="en-US" smtClean="0"/>
               <a:t>Fourth level</a:t>
             </a:r>
           </a:p>
           <a:p>
             <a:pPr lvl="4"/>
             <a:r>
-              <a:rPr lang="en-US"/>
+              <a:rPr lang="en-US" smtClean="0"/>
               <a:t>Fifth level</a:t>
             </a:r>
+            <a:endParaRPr lang="en-US"/>
           </a:p>
         </p:txBody>
       </p:sp>
@@ -2737,7 +2742,7 @@
           <a:p>
             <a:fld id="{5BCAD085-E8A6-8845-BD4E-CB4CCA059FC4}" type="datetimeFigureOut">
               <a:rPr lang="en-US" smtClean="0"/>
-              <a:t>3/3/2026</a:t>
+              <a:t>1/27/13</a:t>
             </a:fld>
             <a:endParaRPr lang="en-US"/>
           </a:p>
@@ -3096,7 +3101,7 @@
 </file>
 
 <file path=ppt/slides/slide1.xml><?xml version="1.0" encoding="utf-8"?>
-<p:sld xmlns:a="http://schemas.openxmlformats.org/drawingml/2006/main" xmlns:r="http://schemas.openxmlformats.org/officeDocument/2006/relationships" xmlns:p="http://schemas.openxmlformats.org/presentationml/2006/main">
+<p:sld xmlns:a="http://schemas.openxmlformats.org/drawingml/2006/main" xmlns:p="http://schemas.openxmlformats.org/presentationml/2006/main" xmlns:r="http://schemas.openxmlformats.org/officeDocument/2006/relationships">
   <p:cSld>
     <p:bg>
       <p:bgPr>
@@ -3112,14 +3117,7 @@
         <p:cNvGrpSpPr/>
         <p:nvPr/>
       </p:nvGrpSpPr>
-      <p:grpSpPr>
-        <a:xfrm>
-          <a:off x="0" y="0"/>
-          <a:ext cx="0" cy="0"/>
-          <a:chOff x="0" y="0"/>
-          <a:chExt cx="0" cy="0"/>
-        </a:xfrm>
-      </p:grpSpPr>
+      <p:grpSpPr/>
       <p:sp>
         <p:nvSpPr>
           <p:cNvPr id="2" name="TextBox 1"/>
@@ -3230,7 +3228,6 @@
           <a:lstStyle/>
           <a:p>
             <a:pPr algn="ctr"/>
-            <a:endParaRPr/>
           </a:p>
         </p:txBody>
       </p:sp>
@@ -3348,7 +3345,7 @@
 </file>
 
 <file path=ppt/slides/slide10.xml><?xml version="1.0" encoding="utf-8"?>
-<p:sld xmlns:a="http://schemas.openxmlformats.org/drawingml/2006/main" xmlns:r="http://schemas.openxmlformats.org/officeDocument/2006/relationships" xmlns:p="http://schemas.openxmlformats.org/presentationml/2006/main">
+<p:sld xmlns:a="http://schemas.openxmlformats.org/drawingml/2006/main" xmlns:p="http://schemas.openxmlformats.org/presentationml/2006/main" xmlns:r="http://schemas.openxmlformats.org/officeDocument/2006/relationships">
   <p:cSld>
     <p:spTree>
       <p:nvGrpSpPr>
@@ -3356,14 +3353,7 @@
         <p:cNvGrpSpPr/>
         <p:nvPr/>
       </p:nvGrpSpPr>
-      <p:grpSpPr>
-        <a:xfrm>
-          <a:off x="0" y="0"/>
-          <a:ext cx="0" cy="0"/>
-          <a:chOff x="0" y="0"/>
-          <a:chExt cx="0" cy="0"/>
-        </a:xfrm>
-      </p:grpSpPr>
+      <p:grpSpPr/>
       <p:sp>
         <p:nvSpPr>
           <p:cNvPr id="2" name="Rectangle 1"/>
@@ -3404,7 +3394,6 @@
           <a:lstStyle/>
           <a:p>
             <a:pPr algn="ctr"/>
-            <a:endParaRPr/>
           </a:p>
         </p:txBody>
       </p:sp>
@@ -3518,7 +3507,6 @@
           <a:lstStyle/>
           <a:p>
             <a:pPr algn="ctr"/>
-            <a:endParaRPr/>
           </a:p>
         </p:txBody>
       </p:sp>
@@ -3600,8 +3588,8 @@
         </p:nvSpPr>
         <p:spPr>
           <a:xfrm>
-            <a:off x="320040" y="1005840"/>
-            <a:ext cx="11548872" cy="411480"/>
+            <a:off x="320040" y="1051560"/>
+            <a:ext cx="11521440" cy="457200"/>
           </a:xfrm>
           <a:prstGeom prst="rect">
             <a:avLst/>
@@ -3636,7 +3624,7 @@
           <p:nvPr/>
         </p:nvGraphicFramePr>
         <p:xfrm>
-          <a:off x="320040" y="1508760"/>
+          <a:off x="320040" y="1600200"/>
           <a:ext cx="11521440" cy="2523744"/>
         </p:xfrm>
         <a:graphic>
@@ -3646,34 +3634,10 @@
                 <a:tableStyleId>{5C22544A-7EE6-4342-B048-85BDC9FD1C3A}</a:tableStyleId>
               </a:tblPr>
               <a:tblGrid>
-                <a:gridCol w="1828800">
-                  <a:extLst>
-                    <a:ext uri="{9D8B030D-6E8A-4147-A177-3AD203B41FA5}">
-                      <a16:colId xmlns:a16="http://schemas.microsoft.com/office/drawing/2014/main" val="20000"/>
-                    </a:ext>
-                  </a:extLst>
-                </a:gridCol>
-                <a:gridCol w="3108960">
-                  <a:extLst>
-                    <a:ext uri="{9D8B030D-6E8A-4147-A177-3AD203B41FA5}">
-                      <a16:colId xmlns:a16="http://schemas.microsoft.com/office/drawing/2014/main" val="20001"/>
-                    </a:ext>
-                  </a:extLst>
-                </a:gridCol>
-                <a:gridCol w="3108960">
-                  <a:extLst>
-                    <a:ext uri="{9D8B030D-6E8A-4147-A177-3AD203B41FA5}">
-                      <a16:colId xmlns:a16="http://schemas.microsoft.com/office/drawing/2014/main" val="20002"/>
-                    </a:ext>
-                  </a:extLst>
-                </a:gridCol>
-                <a:gridCol w="3474720">
-                  <a:extLst>
-                    <a:ext uri="{9D8B030D-6E8A-4147-A177-3AD203B41FA5}">
-                      <a16:colId xmlns:a16="http://schemas.microsoft.com/office/drawing/2014/main" val="20003"/>
-                    </a:ext>
-                  </a:extLst>
-                </a:gridCol>
+                <a:gridCol w="1828800"/>
+                <a:gridCol w="3108960"/>
+                <a:gridCol w="3108960"/>
+                <a:gridCol w="3474720"/>
               </a:tblGrid>
               <a:tr h="420624">
                 <a:tc>
@@ -3768,11 +3732,6 @@
                     </a:solidFill>
                   </a:tcPr>
                 </a:tc>
-                <a:extLst>
-                  <a:ext uri="{0D108BD9-81ED-4DB2-BD59-A6C34878D82A}">
-                    <a16:rowId xmlns:a16="http://schemas.microsoft.com/office/drawing/2014/main" val="10000"/>
-                  </a:ext>
-                </a:extLst>
               </a:tr>
               <a:tr h="420624">
                 <a:tc>
@@ -3867,11 +3826,6 @@
                     </a:solidFill>
                   </a:tcPr>
                 </a:tc>
-                <a:extLst>
-                  <a:ext uri="{0D108BD9-81ED-4DB2-BD59-A6C34878D82A}">
-                    <a16:rowId xmlns:a16="http://schemas.microsoft.com/office/drawing/2014/main" val="10001"/>
-                  </a:ext>
-                </a:extLst>
               </a:tr>
               <a:tr h="420624">
                 <a:tc>
@@ -3966,11 +3920,6 @@
                     </a:solidFill>
                   </a:tcPr>
                 </a:tc>
-                <a:extLst>
-                  <a:ext uri="{0D108BD9-81ED-4DB2-BD59-A6C34878D82A}">
-                    <a16:rowId xmlns:a16="http://schemas.microsoft.com/office/drawing/2014/main" val="10002"/>
-                  </a:ext>
-                </a:extLst>
               </a:tr>
               <a:tr h="420624">
                 <a:tc>
@@ -4065,11 +4014,6 @@
                     </a:solidFill>
                   </a:tcPr>
                 </a:tc>
-                <a:extLst>
-                  <a:ext uri="{0D108BD9-81ED-4DB2-BD59-A6C34878D82A}">
-                    <a16:rowId xmlns:a16="http://schemas.microsoft.com/office/drawing/2014/main" val="10003"/>
-                  </a:ext>
-                </a:extLst>
               </a:tr>
               <a:tr h="420624">
                 <a:tc>
@@ -4164,11 +4108,6 @@
                     </a:solidFill>
                   </a:tcPr>
                 </a:tc>
-                <a:extLst>
-                  <a:ext uri="{0D108BD9-81ED-4DB2-BD59-A6C34878D82A}">
-                    <a16:rowId xmlns:a16="http://schemas.microsoft.com/office/drawing/2014/main" val="10004"/>
-                  </a:ext>
-                </a:extLst>
               </a:tr>
               <a:tr h="420624">
                 <a:tc>
@@ -4263,11 +4202,6 @@
                     </a:solidFill>
                   </a:tcPr>
                 </a:tc>
-                <a:extLst>
-                  <a:ext uri="{0D108BD9-81ED-4DB2-BD59-A6C34878D82A}">
-                    <a16:rowId xmlns:a16="http://schemas.microsoft.com/office/drawing/2014/main" val="10005"/>
-                  </a:ext>
-                </a:extLst>
               </a:tr>
             </a:tbl>
           </a:graphicData>
@@ -4275,58 +4209,14 @@
       </p:graphicFrame>
       <p:sp>
         <p:nvSpPr>
-          <p:cNvPr id="10" name="Rectangle 9"/>
-          <p:cNvSpPr/>
-          <p:nvPr/>
-        </p:nvSpPr>
-        <p:spPr>
-          <a:xfrm>
-            <a:off x="320040" y="4169664"/>
-            <a:ext cx="11548872" cy="502920"/>
-          </a:xfrm>
-          <a:prstGeom prst="rect">
-            <a:avLst/>
-          </a:prstGeom>
-          <a:solidFill>
-            <a:srgbClr val="F4F4F4"/>
-          </a:solidFill>
-          <a:ln>
-            <a:noFill/>
-          </a:ln>
-        </p:spPr>
-        <p:style>
-          <a:lnRef idx="1">
-            <a:schemeClr val="accent1"/>
-          </a:lnRef>
-          <a:fillRef idx="3">
-            <a:schemeClr val="accent1"/>
-          </a:fillRef>
-          <a:effectRef idx="2">
-            <a:schemeClr val="accent1"/>
-          </a:effectRef>
-          <a:fontRef idx="minor">
-            <a:schemeClr val="lt1"/>
-          </a:fontRef>
-        </p:style>
-        <p:txBody>
-          <a:bodyPr rtlCol="0" anchor="ctr"/>
-          <a:lstStyle/>
-          <a:p>
-            <a:pPr algn="ctr"/>
-            <a:endParaRPr/>
-          </a:p>
-        </p:txBody>
-      </p:sp>
-      <p:sp>
-        <p:nvSpPr>
-          <p:cNvPr id="11" name="TextBox 10"/>
+          <p:cNvPr id="10" name="TextBox 9"/>
           <p:cNvSpPr txBox="1"/>
           <p:nvPr/>
         </p:nvSpPr>
         <p:spPr>
           <a:xfrm>
-            <a:off x="502920" y="4233672"/>
-            <a:ext cx="11155680" cy="384048"/>
+            <a:off x="320040" y="4663440"/>
+            <a:ext cx="11521440" cy="365760"/>
           </a:xfrm>
           <a:prstGeom prst="rect">
             <a:avLst/>
@@ -4341,9 +4231,9 @@
           <a:p>
             <a:pPr algn="l"/>
             <a:r>
-              <a:rPr sz="1200" b="0" i="0">
-                <a:solidFill>
-                  <a:srgbClr val="1A1A2E"/>
+              <a:rPr sz="1200" b="0" i="1">
+                <a:solidFill>
+                  <a:srgbClr val="999999"/>
                 </a:solidFill>
                 <a:latin typeface="游ゴシック"/>
               </a:rPr>
@@ -4361,7 +4251,7 @@
 </file>
 
 <file path=ppt/slides/slide11.xml><?xml version="1.0" encoding="utf-8"?>
-<p:sld xmlns:a="http://schemas.openxmlformats.org/drawingml/2006/main" xmlns:r="http://schemas.openxmlformats.org/officeDocument/2006/relationships" xmlns:p="http://schemas.openxmlformats.org/presentationml/2006/main">
+<p:sld xmlns:a="http://schemas.openxmlformats.org/drawingml/2006/main" xmlns:p="http://schemas.openxmlformats.org/presentationml/2006/main" xmlns:r="http://schemas.openxmlformats.org/officeDocument/2006/relationships">
   <p:cSld>
     <p:spTree>
       <p:nvGrpSpPr>
@@ -4369,14 +4259,7 @@
         <p:cNvGrpSpPr/>
         <p:nvPr/>
       </p:nvGrpSpPr>
-      <p:grpSpPr>
-        <a:xfrm>
-          <a:off x="0" y="0"/>
-          <a:ext cx="0" cy="0"/>
-          <a:chOff x="0" y="0"/>
-          <a:chExt cx="0" cy="0"/>
-        </a:xfrm>
-      </p:grpSpPr>
+      <p:grpSpPr/>
       <p:sp>
         <p:nvSpPr>
           <p:cNvPr id="2" name="Rectangle 1"/>
@@ -4417,7 +4300,6 @@
           <a:lstStyle/>
           <a:p>
             <a:pPr algn="ctr"/>
-            <a:endParaRPr/>
           </a:p>
         </p:txBody>
       </p:sp>
@@ -4531,7 +4413,6 @@
           <a:lstStyle/>
           <a:p>
             <a:pPr algn="ctr"/>
-            <a:endParaRPr/>
           </a:p>
         </p:txBody>
       </p:sp>
@@ -4647,7 +4528,6 @@
           <a:lstStyle/>
           <a:p>
             <a:pPr algn="ctr"/>
-            <a:endParaRPr/>
           </a:p>
         </p:txBody>
       </p:sp>
@@ -4684,14 +4564,6 @@
             </a:r>
           </a:p>
           <a:p>
-            <a:endParaRPr sz="1300">
-              <a:solidFill>
-                <a:srgbClr val="FFFFFF"/>
-              </a:solidFill>
-              <a:latin typeface="Consolas"/>
-            </a:endParaRPr>
-          </a:p>
-          <a:p>
             <a:r>
               <a:rPr sz="1300">
                 <a:solidFill>
@@ -4699,6 +4571,17 @@
                 </a:solidFill>
                 <a:latin typeface="Consolas"/>
               </a:rPr>
+              <a:t/>
+            </a:r>
+          </a:p>
+          <a:p>
+            <a:r>
+              <a:rPr sz="1300">
+                <a:solidFill>
+                  <a:srgbClr val="FFFFFF"/>
+                </a:solidFill>
+                <a:latin typeface="Consolas"/>
+              </a:rPr>
               <a:t>Temp:</a:t>
             </a:r>
           </a:p>
@@ -4714,14 +4597,6 @@
             </a:r>
           </a:p>
           <a:p>
-            <a:endParaRPr sz="1300">
-              <a:solidFill>
-                <a:srgbClr val="FFFFFF"/>
-              </a:solidFill>
-              <a:latin typeface="Consolas"/>
-            </a:endParaRPr>
-          </a:p>
-          <a:p>
             <a:r>
               <a:rPr sz="1300">
                 <a:solidFill>
@@ -4729,16 +4604,30 @@
                 </a:solidFill>
                 <a:latin typeface="Consolas"/>
               </a:rPr>
+              <a:t/>
+            </a:r>
+          </a:p>
+          <a:p>
+            <a:r>
+              <a:rPr sz="1300">
+                <a:solidFill>
+                  <a:srgbClr val="FFFFFF"/>
+                </a:solidFill>
+                <a:latin typeface="Consolas"/>
+              </a:rPr>
               <a:t>SD Ready</a:t>
             </a:r>
           </a:p>
           <a:p>
-            <a:endParaRPr sz="1300">
-              <a:solidFill>
-                <a:srgbClr val="FFFFFF"/>
-              </a:solidFill>
-              <a:latin typeface="Consolas"/>
-            </a:endParaRPr>
+            <a:r>
+              <a:rPr sz="1300">
+                <a:solidFill>
+                  <a:srgbClr val="FFFFFF"/>
+                </a:solidFill>
+                <a:latin typeface="Consolas"/>
+              </a:rPr>
+              <a:t/>
+            </a:r>
           </a:p>
           <a:p>
             <a:r>
@@ -4807,20 +4696,8 @@
                 <a:tableStyleId>{5C22544A-7EE6-4342-B048-85BDC9FD1C3A}</a:tableStyleId>
               </a:tblPr>
               <a:tblGrid>
-                <a:gridCol w="2011680">
-                  <a:extLst>
-                    <a:ext uri="{9D8B030D-6E8A-4147-A177-3AD203B41FA5}">
-                      <a16:colId xmlns:a16="http://schemas.microsoft.com/office/drawing/2014/main" val="20000"/>
-                    </a:ext>
-                  </a:extLst>
-                </a:gridCol>
-                <a:gridCol w="3566160">
-                  <a:extLst>
-                    <a:ext uri="{9D8B030D-6E8A-4147-A177-3AD203B41FA5}">
-                      <a16:colId xmlns:a16="http://schemas.microsoft.com/office/drawing/2014/main" val="20001"/>
-                    </a:ext>
-                  </a:extLst>
-                </a:gridCol>
+                <a:gridCol w="2011680"/>
+                <a:gridCol w="3566160"/>
               </a:tblGrid>
               <a:tr h="429768">
                 <a:tc>
@@ -4869,11 +4746,6 @@
                     </a:solidFill>
                   </a:tcPr>
                 </a:tc>
-                <a:extLst>
-                  <a:ext uri="{0D108BD9-81ED-4DB2-BD59-A6C34878D82A}">
-                    <a16:rowId xmlns:a16="http://schemas.microsoft.com/office/drawing/2014/main" val="10000"/>
-                  </a:ext>
-                </a:extLst>
               </a:tr>
               <a:tr h="429768">
                 <a:tc>
@@ -4922,11 +4794,6 @@
                     </a:solidFill>
                   </a:tcPr>
                 </a:tc>
-                <a:extLst>
-                  <a:ext uri="{0D108BD9-81ED-4DB2-BD59-A6C34878D82A}">
-                    <a16:rowId xmlns:a16="http://schemas.microsoft.com/office/drawing/2014/main" val="10001"/>
-                  </a:ext>
-                </a:extLst>
               </a:tr>
               <a:tr h="429768">
                 <a:tc>
@@ -4975,11 +4842,6 @@
                     </a:solidFill>
                   </a:tcPr>
                 </a:tc>
-                <a:extLst>
-                  <a:ext uri="{0D108BD9-81ED-4DB2-BD59-A6C34878D82A}">
-                    <a16:rowId xmlns:a16="http://schemas.microsoft.com/office/drawing/2014/main" val="10002"/>
-                  </a:ext>
-                </a:extLst>
               </a:tr>
               <a:tr h="429768">
                 <a:tc>
@@ -5028,11 +4890,6 @@
                     </a:solidFill>
                   </a:tcPr>
                 </a:tc>
-                <a:extLst>
-                  <a:ext uri="{0D108BD9-81ED-4DB2-BD59-A6C34878D82A}">
-                    <a16:rowId xmlns:a16="http://schemas.microsoft.com/office/drawing/2014/main" val="10003"/>
-                  </a:ext>
-                </a:extLst>
               </a:tr>
               <a:tr h="429768">
                 <a:tc>
@@ -5081,11 +4938,6 @@
                     </a:solidFill>
                   </a:tcPr>
                 </a:tc>
-                <a:extLst>
-                  <a:ext uri="{0D108BD9-81ED-4DB2-BD59-A6C34878D82A}">
-                    <a16:rowId xmlns:a16="http://schemas.microsoft.com/office/drawing/2014/main" val="10004"/>
-                  </a:ext>
-                </a:extLst>
               </a:tr>
               <a:tr h="429768">
                 <a:tc>
@@ -5134,11 +4986,6 @@
                     </a:solidFill>
                   </a:tcPr>
                 </a:tc>
-                <a:extLst>
-                  <a:ext uri="{0D108BD9-81ED-4DB2-BD59-A6C34878D82A}">
-                    <a16:rowId xmlns:a16="http://schemas.microsoft.com/office/drawing/2014/main" val="10005"/>
-                  </a:ext>
-                </a:extLst>
               </a:tr>
               <a:tr h="429768">
                 <a:tc>
@@ -5187,11 +5034,6 @@
                     </a:solidFill>
                   </a:tcPr>
                 </a:tc>
-                <a:extLst>
-                  <a:ext uri="{0D108BD9-81ED-4DB2-BD59-A6C34878D82A}">
-                    <a16:rowId xmlns:a16="http://schemas.microsoft.com/office/drawing/2014/main" val="10006"/>
-                  </a:ext>
-                </a:extLst>
               </a:tr>
             </a:tbl>
           </a:graphicData>
@@ -5206,7 +5048,7 @@
 </file>
 
 <file path=ppt/slides/slide12.xml><?xml version="1.0" encoding="utf-8"?>
-<p:sld xmlns:a="http://schemas.openxmlformats.org/drawingml/2006/main" xmlns:r="http://schemas.openxmlformats.org/officeDocument/2006/relationships" xmlns:p="http://schemas.openxmlformats.org/presentationml/2006/main">
+<p:sld xmlns:a="http://schemas.openxmlformats.org/drawingml/2006/main" xmlns:p="http://schemas.openxmlformats.org/presentationml/2006/main" xmlns:r="http://schemas.openxmlformats.org/officeDocument/2006/relationships">
   <p:cSld>
     <p:spTree>
       <p:nvGrpSpPr>
@@ -5214,14 +5056,7 @@
         <p:cNvGrpSpPr/>
         <p:nvPr/>
       </p:nvGrpSpPr>
-      <p:grpSpPr>
-        <a:xfrm>
-          <a:off x="0" y="0"/>
-          <a:ext cx="0" cy="0"/>
-          <a:chOff x="0" y="0"/>
-          <a:chExt cx="0" cy="0"/>
-        </a:xfrm>
-      </p:grpSpPr>
+      <p:grpSpPr/>
       <p:sp>
         <p:nvSpPr>
           <p:cNvPr id="2" name="Rectangle 1"/>
@@ -5262,7 +5097,6 @@
           <a:lstStyle/>
           <a:p>
             <a:pPr algn="ctr"/>
-            <a:endParaRPr/>
           </a:p>
         </p:txBody>
       </p:sp>
@@ -5376,7 +5210,6 @@
           <a:lstStyle/>
           <a:p>
             <a:pPr algn="ctr"/>
-            <a:endParaRPr/>
           </a:p>
         </p:txBody>
       </p:sp>
@@ -5492,7 +5325,6 @@
           <a:lstStyle/>
           <a:p>
             <a:pPr algn="ctr"/>
-            <a:endParaRPr/>
           </a:p>
         </p:txBody>
       </p:sp>
@@ -5529,14 +5361,6 @@
             </a:r>
           </a:p>
           <a:p>
-            <a:endParaRPr sz="1300">
-              <a:solidFill>
-                <a:srgbClr val="FFFFFF"/>
-              </a:solidFill>
-              <a:latin typeface="Consolas"/>
-            </a:endParaRPr>
-          </a:p>
-          <a:p>
             <a:r>
               <a:rPr sz="1300">
                 <a:solidFill>
@@ -5544,6 +5368,17 @@
                 </a:solidFill>
                 <a:latin typeface="Consolas"/>
               </a:rPr>
+              <a:t/>
+            </a:r>
+          </a:p>
+          <a:p>
+            <a:r>
+              <a:rPr sz="1300">
+                <a:solidFill>
+                  <a:srgbClr val="FFFFFF"/>
+                </a:solidFill>
+                <a:latin typeface="Consolas"/>
+              </a:rPr>
               <a:t>Temp:</a:t>
             </a:r>
           </a:p>
@@ -5559,14 +5394,6 @@
             </a:r>
           </a:p>
           <a:p>
-            <a:endParaRPr sz="1300">
-              <a:solidFill>
-                <a:srgbClr val="FFFFFF"/>
-              </a:solidFill>
-              <a:latin typeface="Consolas"/>
-            </a:endParaRPr>
-          </a:p>
-          <a:p>
             <a:r>
               <a:rPr sz="1300">
                 <a:solidFill>
@@ -5574,6 +5401,17 @@
                 </a:solidFill>
                 <a:latin typeface="Consolas"/>
               </a:rPr>
+              <a:t/>
+            </a:r>
+          </a:p>
+          <a:p>
+            <a:r>
+              <a:rPr sz="1300">
+                <a:solidFill>
+                  <a:srgbClr val="FFFFFF"/>
+                </a:solidFill>
+                <a:latin typeface="Consolas"/>
+              </a:rPr>
               <a:t>Samples:   142</a:t>
             </a:r>
           </a:p>
@@ -5589,12 +5427,15 @@
             </a:r>
           </a:p>
           <a:p>
-            <a:endParaRPr sz="1300">
-              <a:solidFill>
-                <a:srgbClr val="FFFFFF"/>
-              </a:solidFill>
-              <a:latin typeface="Consolas"/>
-            </a:endParaRPr>
+            <a:r>
+              <a:rPr sz="1300">
+                <a:solidFill>
+                  <a:srgbClr val="FFFFFF"/>
+                </a:solidFill>
+                <a:latin typeface="Consolas"/>
+              </a:rPr>
+              <a:t/>
+            </a:r>
           </a:p>
           <a:p>
             <a:r>
@@ -5663,20 +5504,8 @@
                 <a:tableStyleId>{5C22544A-7EE6-4342-B048-85BDC9FD1C3A}</a:tableStyleId>
               </a:tblPr>
               <a:tblGrid>
-                <a:gridCol w="2286000">
-                  <a:extLst>
-                    <a:ext uri="{9D8B030D-6E8A-4147-A177-3AD203B41FA5}">
-                      <a16:colId xmlns:a16="http://schemas.microsoft.com/office/drawing/2014/main" val="20000"/>
-                    </a:ext>
-                  </a:extLst>
-                </a:gridCol>
-                <a:gridCol w="3291840">
-                  <a:extLst>
-                    <a:ext uri="{9D8B030D-6E8A-4147-A177-3AD203B41FA5}">
-                      <a16:colId xmlns:a16="http://schemas.microsoft.com/office/drawing/2014/main" val="20001"/>
-                    </a:ext>
-                  </a:extLst>
-                </a:gridCol>
+                <a:gridCol w="2286000"/>
+                <a:gridCol w="3291840"/>
               </a:tblGrid>
               <a:tr h="429768">
                 <a:tc>
@@ -5725,11 +5554,6 @@
                     </a:solidFill>
                   </a:tcPr>
                 </a:tc>
-                <a:extLst>
-                  <a:ext uri="{0D108BD9-81ED-4DB2-BD59-A6C34878D82A}">
-                    <a16:rowId xmlns:a16="http://schemas.microsoft.com/office/drawing/2014/main" val="10000"/>
-                  </a:ext>
-                </a:extLst>
               </a:tr>
               <a:tr h="429768">
                 <a:tc>
@@ -5778,11 +5602,6 @@
                     </a:solidFill>
                   </a:tcPr>
                 </a:tc>
-                <a:extLst>
-                  <a:ext uri="{0D108BD9-81ED-4DB2-BD59-A6C34878D82A}">
-                    <a16:rowId xmlns:a16="http://schemas.microsoft.com/office/drawing/2014/main" val="10001"/>
-                  </a:ext>
-                </a:extLst>
               </a:tr>
               <a:tr h="429768">
                 <a:tc>
@@ -5831,11 +5650,6 @@
                     </a:solidFill>
                   </a:tcPr>
                 </a:tc>
-                <a:extLst>
-                  <a:ext uri="{0D108BD9-81ED-4DB2-BD59-A6C34878D82A}">
-                    <a16:rowId xmlns:a16="http://schemas.microsoft.com/office/drawing/2014/main" val="10002"/>
-                  </a:ext>
-                </a:extLst>
               </a:tr>
               <a:tr h="429768">
                 <a:tc>
@@ -5884,11 +5698,6 @@
                     </a:solidFill>
                   </a:tcPr>
                 </a:tc>
-                <a:extLst>
-                  <a:ext uri="{0D108BD9-81ED-4DB2-BD59-A6C34878D82A}">
-                    <a16:rowId xmlns:a16="http://schemas.microsoft.com/office/drawing/2014/main" val="10003"/>
-                  </a:ext>
-                </a:extLst>
               </a:tr>
               <a:tr h="429768">
                 <a:tc>
@@ -5937,11 +5746,6 @@
                     </a:solidFill>
                   </a:tcPr>
                 </a:tc>
-                <a:extLst>
-                  <a:ext uri="{0D108BD9-81ED-4DB2-BD59-A6C34878D82A}">
-                    <a16:rowId xmlns:a16="http://schemas.microsoft.com/office/drawing/2014/main" val="10004"/>
-                  </a:ext>
-                </a:extLst>
               </a:tr>
               <a:tr h="429768">
                 <a:tc>
@@ -5990,11 +5794,6 @@
                     </a:solidFill>
                   </a:tcPr>
                 </a:tc>
-                <a:extLst>
-                  <a:ext uri="{0D108BD9-81ED-4DB2-BD59-A6C34878D82A}">
-                    <a16:rowId xmlns:a16="http://schemas.microsoft.com/office/drawing/2014/main" val="10005"/>
-                  </a:ext>
-                </a:extLst>
               </a:tr>
               <a:tr h="429768">
                 <a:tc>
@@ -6043,11 +5842,6 @@
                     </a:solidFill>
                   </a:tcPr>
                 </a:tc>
-                <a:extLst>
-                  <a:ext uri="{0D108BD9-81ED-4DB2-BD59-A6C34878D82A}">
-                    <a16:rowId xmlns:a16="http://schemas.microsoft.com/office/drawing/2014/main" val="10006"/>
-                  </a:ext>
-                </a:extLst>
               </a:tr>
             </a:tbl>
           </a:graphicData>
@@ -6062,7 +5856,7 @@
 </file>
 
 <file path=ppt/slides/slide13.xml><?xml version="1.0" encoding="utf-8"?>
-<p:sld xmlns:a="http://schemas.openxmlformats.org/drawingml/2006/main" xmlns:r="http://schemas.openxmlformats.org/officeDocument/2006/relationships" xmlns:p="http://schemas.openxmlformats.org/presentationml/2006/main">
+<p:sld xmlns:a="http://schemas.openxmlformats.org/drawingml/2006/main" xmlns:p="http://schemas.openxmlformats.org/presentationml/2006/main" xmlns:r="http://schemas.openxmlformats.org/officeDocument/2006/relationships">
   <p:cSld>
     <p:spTree>
       <p:nvGrpSpPr>
@@ -6070,14 +5864,7 @@
         <p:cNvGrpSpPr/>
         <p:nvPr/>
       </p:nvGrpSpPr>
-      <p:grpSpPr>
-        <a:xfrm>
-          <a:off x="0" y="0"/>
-          <a:ext cx="0" cy="0"/>
-          <a:chOff x="0" y="0"/>
-          <a:chExt cx="0" cy="0"/>
-        </a:xfrm>
-      </p:grpSpPr>
+      <p:grpSpPr/>
       <p:sp>
         <p:nvSpPr>
           <p:cNvPr id="2" name="Rectangle 1"/>
@@ -6118,7 +5905,6 @@
           <a:lstStyle/>
           <a:p>
             <a:pPr algn="ctr"/>
-            <a:endParaRPr/>
           </a:p>
         </p:txBody>
       </p:sp>
@@ -6232,7 +6018,6 @@
           <a:lstStyle/>
           <a:p>
             <a:pPr algn="ctr"/>
-            <a:endParaRPr/>
           </a:p>
         </p:txBody>
       </p:sp>
@@ -6348,7 +6133,6 @@
           <a:lstStyle/>
           <a:p>
             <a:pPr algn="ctr"/>
-            <a:endParaRPr/>
           </a:p>
         </p:txBody>
       </p:sp>
@@ -6385,14 +6169,6 @@
             </a:r>
           </a:p>
           <a:p>
-            <a:endParaRPr sz="1300">
-              <a:solidFill>
-                <a:srgbClr val="FFFFFF"/>
-              </a:solidFill>
-              <a:latin typeface="Consolas"/>
-            </a:endParaRPr>
-          </a:p>
-          <a:p>
             <a:r>
               <a:rPr sz="1300">
                 <a:solidFill>
@@ -6400,6 +6176,17 @@
                 </a:solidFill>
                 <a:latin typeface="Consolas"/>
               </a:rPr>
+              <a:t/>
+            </a:r>
+          </a:p>
+          <a:p>
+            <a:r>
+              <a:rPr sz="1300">
+                <a:solidFill>
+                  <a:srgbClr val="FFFFFF"/>
+                </a:solidFill>
+                <a:latin typeface="Consolas"/>
+              </a:rPr>
               <a:t>Temp:</a:t>
             </a:r>
           </a:p>
@@ -6415,14 +6202,6 @@
             </a:r>
           </a:p>
           <a:p>
-            <a:endParaRPr sz="1300">
-              <a:solidFill>
-                <a:srgbClr val="FFFFFF"/>
-              </a:solidFill>
-              <a:latin typeface="Consolas"/>
-            </a:endParaRPr>
-          </a:p>
-          <a:p>
             <a:r>
               <a:rPr sz="1300">
                 <a:solidFill>
@@ -6430,6 +6209,17 @@
                 </a:solidFill>
                 <a:latin typeface="Consolas"/>
               </a:rPr>
+              <a:t/>
+            </a:r>
+          </a:p>
+          <a:p>
+            <a:r>
+              <a:rPr sz="1300">
+                <a:solidFill>
+                  <a:srgbClr val="FFFFFF"/>
+                </a:solidFill>
+                <a:latin typeface="Consolas"/>
+              </a:rPr>
               <a:t>Avg:</a:t>
             </a:r>
           </a:p>
@@ -6445,12 +6235,15 @@
             </a:r>
           </a:p>
           <a:p>
-            <a:endParaRPr sz="1300">
-              <a:solidFill>
-                <a:srgbClr val="FFFFFF"/>
-              </a:solidFill>
-              <a:latin typeface="Consolas"/>
-            </a:endParaRPr>
+            <a:r>
+              <a:rPr sz="1300">
+                <a:solidFill>
+                  <a:srgbClr val="FFFFFF"/>
+                </a:solidFill>
+                <a:latin typeface="Consolas"/>
+              </a:rPr>
+              <a:t/>
+            </a:r>
           </a:p>
           <a:p>
             <a:r>
@@ -6542,7 +6335,6 @@
           <a:lstStyle/>
           <a:p>
             <a:pPr algn="ctr"/>
-            <a:endParaRPr/>
           </a:p>
         </p:txBody>
       </p:sp>
@@ -6579,14 +6371,6 @@
             </a:r>
           </a:p>
           <a:p>
-            <a:endParaRPr sz="1300">
-              <a:solidFill>
-                <a:srgbClr val="FFFFFF"/>
-              </a:solidFill>
-              <a:latin typeface="Consolas"/>
-            </a:endParaRPr>
-          </a:p>
-          <a:p>
             <a:r>
               <a:rPr sz="1300">
                 <a:solidFill>
@@ -6594,6 +6378,17 @@
                 </a:solidFill>
                 <a:latin typeface="Consolas"/>
               </a:rPr>
+              <a:t/>
+            </a:r>
+          </a:p>
+          <a:p>
+            <a:r>
+              <a:rPr sz="1300">
+                <a:solidFill>
+                  <a:srgbClr val="FFFFFF"/>
+                </a:solidFill>
+                <a:latin typeface="Consolas"/>
+              </a:rPr>
               <a:t>StdDev:</a:t>
             </a:r>
           </a:p>
@@ -6642,12 +6437,15 @@
             </a:r>
           </a:p>
           <a:p>
-            <a:endParaRPr sz="1300">
-              <a:solidFill>
-                <a:srgbClr val="FFFFFF"/>
-              </a:solidFill>
-              <a:latin typeface="Consolas"/>
-            </a:endParaRPr>
+            <a:r>
+              <a:rPr sz="1300">
+                <a:solidFill>
+                  <a:srgbClr val="FFFFFF"/>
+                </a:solidFill>
+                <a:latin typeface="Consolas"/>
+              </a:rPr>
+              <a:t/>
+            </a:r>
           </a:p>
           <a:p>
             <a:r>
@@ -6670,8 +6468,8 @@
         </p:nvSpPr>
         <p:spPr>
           <a:xfrm>
-            <a:off x="320040" y="5760720"/>
-            <a:ext cx="11548872" cy="457200"/>
+            <a:off x="320040" y="5715000"/>
+            <a:ext cx="11521440" cy="457200"/>
           </a:xfrm>
           <a:prstGeom prst="rect">
             <a:avLst/>
@@ -6688,7 +6486,7 @@
             <a:r>
               <a:rPr sz="1200" b="0" i="0">
                 <a:solidFill>
-                  <a:srgbClr val="1A1A2E"/>
+                  <a:srgbClr val="999999"/>
                 </a:solidFill>
                 <a:latin typeface="游ゴシック"/>
               </a:rPr>
@@ -6706,7 +6504,7 @@
 </file>
 
 <file path=ppt/slides/slide14.xml><?xml version="1.0" encoding="utf-8"?>
-<p:sld xmlns:a="http://schemas.openxmlformats.org/drawingml/2006/main" xmlns:r="http://schemas.openxmlformats.org/officeDocument/2006/relationships" xmlns:p="http://schemas.openxmlformats.org/presentationml/2006/main">
+<p:sld xmlns:a="http://schemas.openxmlformats.org/drawingml/2006/main" xmlns:p="http://schemas.openxmlformats.org/presentationml/2006/main" xmlns:r="http://schemas.openxmlformats.org/officeDocument/2006/relationships">
   <p:cSld>
     <p:spTree>
       <p:nvGrpSpPr>
@@ -6714,14 +6512,7 @@
         <p:cNvGrpSpPr/>
         <p:nvPr/>
       </p:nvGrpSpPr>
-      <p:grpSpPr>
-        <a:xfrm>
-          <a:off x="0" y="0"/>
-          <a:ext cx="0" cy="0"/>
-          <a:chOff x="0" y="0"/>
-          <a:chExt cx="0" cy="0"/>
-        </a:xfrm>
-      </p:grpSpPr>
+      <p:grpSpPr/>
       <p:sp>
         <p:nvSpPr>
           <p:cNvPr id="2" name="Rectangle 1"/>
@@ -6762,7 +6553,6 @@
           <a:lstStyle/>
           <a:p>
             <a:pPr algn="ctr"/>
-            <a:endParaRPr/>
           </a:p>
         </p:txBody>
       </p:sp>
@@ -6876,7 +6666,6 @@
           <a:lstStyle/>
           <a:p>
             <a:pPr algn="ctr"/>
-            <a:endParaRPr/>
           </a:p>
         </p:txBody>
       </p:sp>
@@ -6992,7 +6781,6 @@
           <a:lstStyle/>
           <a:p>
             <a:pPr algn="ctr"/>
-            <a:endParaRPr/>
           </a:p>
         </p:txBody>
       </p:sp>
@@ -7029,14 +6817,6 @@
             </a:r>
           </a:p>
           <a:p>
-            <a:endParaRPr sz="1300">
-              <a:solidFill>
-                <a:srgbClr val="FFFFFF"/>
-              </a:solidFill>
-              <a:latin typeface="Consolas"/>
-            </a:endParaRPr>
-          </a:p>
-          <a:p>
             <a:r>
               <a:rPr sz="1300">
                 <a:solidFill>
@@ -7044,6 +6824,17 @@
                 </a:solidFill>
                 <a:latin typeface="Consolas"/>
               </a:rPr>
+              <a:t/>
+            </a:r>
+          </a:p>
+          <a:p>
+            <a:r>
+              <a:rPr sz="1300">
+                <a:solidFill>
+                  <a:srgbClr val="FFFFFF"/>
+                </a:solidFill>
+                <a:latin typeface="Consolas"/>
+              </a:rPr>
               <a:t>Current:</a:t>
             </a:r>
           </a:p>
@@ -7059,12 +6850,15 @@
             </a:r>
           </a:p>
           <a:p>
-            <a:endParaRPr sz="1300">
-              <a:solidFill>
-                <a:srgbClr val="FFFFFF"/>
-              </a:solidFill>
-              <a:latin typeface="Consolas"/>
-            </a:endParaRPr>
+            <a:r>
+              <a:rPr sz="1300">
+                <a:solidFill>
+                  <a:srgbClr val="FFFFFF"/>
+                </a:solidFill>
+                <a:latin typeface="Consolas"/>
+              </a:rPr>
+              <a:t/>
+            </a:r>
           </a:p>
           <a:p>
             <a:r>
@@ -7167,7 +6961,6 @@
           <a:lstStyle/>
           <a:p>
             <a:pPr algn="ctr"/>
-            <a:endParaRPr/>
           </a:p>
         </p:txBody>
       </p:sp>
@@ -7204,14 +6997,6 @@
             </a:r>
           </a:p>
           <a:p>
-            <a:endParaRPr sz="1300">
-              <a:solidFill>
-                <a:srgbClr val="FFFFFF"/>
-              </a:solidFill>
-              <a:latin typeface="Consolas"/>
-            </a:endParaRPr>
-          </a:p>
-          <a:p>
             <a:r>
               <a:rPr sz="1300">
                 <a:solidFill>
@@ -7219,6 +7004,17 @@
                 </a:solidFill>
                 <a:latin typeface="Consolas"/>
               </a:rPr>
+              <a:t/>
+            </a:r>
+          </a:p>
+          <a:p>
+            <a:r>
+              <a:rPr sz="1300">
+                <a:solidFill>
+                  <a:srgbClr val="FFFFFF"/>
+                </a:solidFill>
+                <a:latin typeface="Consolas"/>
+              </a:rPr>
               <a:t>Current:</a:t>
             </a:r>
           </a:p>
@@ -7234,12 +7030,15 @@
             </a:r>
           </a:p>
           <a:p>
-            <a:endParaRPr sz="1300">
-              <a:solidFill>
-                <a:srgbClr val="FFFFFF"/>
-              </a:solidFill>
-              <a:latin typeface="Consolas"/>
-            </a:endParaRPr>
+            <a:r>
+              <a:rPr sz="1300">
+                <a:solidFill>
+                  <a:srgbClr val="FFFFFF"/>
+                </a:solidFill>
+                <a:latin typeface="Consolas"/>
+              </a:rPr>
+              <a:t/>
+            </a:r>
           </a:p>
           <a:p>
             <a:r>
@@ -7274,7 +7073,7 @@
         <p:spPr>
           <a:xfrm>
             <a:off x="320040" y="5760720"/>
-            <a:ext cx="11548872" cy="457200"/>
+            <a:ext cx="11521440" cy="457200"/>
           </a:xfrm>
           <a:prstGeom prst="rect">
             <a:avLst/>
@@ -7309,7 +7108,7 @@
 </file>
 
 <file path=ppt/slides/slide15.xml><?xml version="1.0" encoding="utf-8"?>
-<p:sld xmlns:a="http://schemas.openxmlformats.org/drawingml/2006/main" xmlns:r="http://schemas.openxmlformats.org/officeDocument/2006/relationships" xmlns:p="http://schemas.openxmlformats.org/presentationml/2006/main">
+<p:sld xmlns:a="http://schemas.openxmlformats.org/drawingml/2006/main" xmlns:p="http://schemas.openxmlformats.org/presentationml/2006/main" xmlns:r="http://schemas.openxmlformats.org/officeDocument/2006/relationships">
   <p:cSld>
     <p:spTree>
       <p:nvGrpSpPr>
@@ -7317,14 +7116,7 @@
         <p:cNvGrpSpPr/>
         <p:nvPr/>
       </p:nvGrpSpPr>
-      <p:grpSpPr>
-        <a:xfrm>
-          <a:off x="0" y="0"/>
-          <a:ext cx="0" cy="0"/>
-          <a:chOff x="0" y="0"/>
-          <a:chExt cx="0" cy="0"/>
-        </a:xfrm>
-      </p:grpSpPr>
+      <p:grpSpPr/>
       <p:sp>
         <p:nvSpPr>
           <p:cNvPr id="2" name="Rectangle 1"/>
@@ -7365,7 +7157,6 @@
           <a:lstStyle/>
           <a:p>
             <a:pPr algn="ctr"/>
-            <a:endParaRPr/>
           </a:p>
         </p:txBody>
       </p:sp>
@@ -7479,7 +7270,6 @@
           <a:lstStyle/>
           <a:p>
             <a:pPr algn="ctr"/>
-            <a:endParaRPr/>
           </a:p>
         </p:txBody>
       </p:sp>
@@ -7561,8 +7351,8 @@
         </p:nvSpPr>
         <p:spPr>
           <a:xfrm>
-            <a:off x="320040" y="1005840"/>
-            <a:ext cx="11548872" cy="411480"/>
+            <a:off x="320040" y="1051560"/>
+            <a:ext cx="11521440" cy="365760"/>
           </a:xfrm>
           <a:prstGeom prst="rect">
             <a:avLst/>
@@ -7597,7 +7387,7 @@
           <p:nvPr/>
         </p:nvGraphicFramePr>
         <p:xfrm>
-          <a:off x="320040" y="1508760"/>
+          <a:off x="320040" y="1554480"/>
           <a:ext cx="11521440" cy="4425696"/>
         </p:xfrm>
         <a:graphic>
@@ -7607,34 +7397,10 @@
                 <a:tableStyleId>{5C22544A-7EE6-4342-B048-85BDC9FD1C3A}</a:tableStyleId>
               </a:tblPr>
               <a:tblGrid>
-                <a:gridCol w="731520">
-                  <a:extLst>
-                    <a:ext uri="{9D8B030D-6E8A-4147-A177-3AD203B41FA5}">
-                      <a16:colId xmlns:a16="http://schemas.microsoft.com/office/drawing/2014/main" val="20000"/>
-                    </a:ext>
-                  </a:extLst>
-                </a:gridCol>
-                <a:gridCol w="2103120">
-                  <a:extLst>
-                    <a:ext uri="{9D8B030D-6E8A-4147-A177-3AD203B41FA5}">
-                      <a16:colId xmlns:a16="http://schemas.microsoft.com/office/drawing/2014/main" val="20001"/>
-                    </a:ext>
-                  </a:extLst>
-                </a:gridCol>
-                <a:gridCol w="1828800">
-                  <a:extLst>
-                    <a:ext uri="{9D8B030D-6E8A-4147-A177-3AD203B41FA5}">
-                      <a16:colId xmlns:a16="http://schemas.microsoft.com/office/drawing/2014/main" val="20002"/>
-                    </a:ext>
-                  </a:extLst>
-                </a:gridCol>
-                <a:gridCol w="6858000">
-                  <a:extLst>
-                    <a:ext uri="{9D8B030D-6E8A-4147-A177-3AD203B41FA5}">
-                      <a16:colId xmlns:a16="http://schemas.microsoft.com/office/drawing/2014/main" val="20003"/>
-                    </a:ext>
-                  </a:extLst>
-                </a:gridCol>
+                <a:gridCol w="731520"/>
+                <a:gridCol w="2103120"/>
+                <a:gridCol w="1828800"/>
+                <a:gridCol w="6858000"/>
               </a:tblGrid>
               <a:tr h="402336">
                 <a:tc>
@@ -7729,11 +7495,6 @@
                     </a:solidFill>
                   </a:tcPr>
                 </a:tc>
-                <a:extLst>
-                  <a:ext uri="{0D108BD9-81ED-4DB2-BD59-A6C34878D82A}">
-                    <a16:rowId xmlns:a16="http://schemas.microsoft.com/office/drawing/2014/main" val="10000"/>
-                  </a:ext>
-                </a:extLst>
               </a:tr>
               <a:tr h="402336">
                 <a:tc>
@@ -7828,11 +7589,6 @@
                     </a:solidFill>
                   </a:tcPr>
                 </a:tc>
-                <a:extLst>
-                  <a:ext uri="{0D108BD9-81ED-4DB2-BD59-A6C34878D82A}">
-                    <a16:rowId xmlns:a16="http://schemas.microsoft.com/office/drawing/2014/main" val="10001"/>
-                  </a:ext>
-                </a:extLst>
               </a:tr>
               <a:tr h="402336">
                 <a:tc>
@@ -7927,11 +7683,6 @@
                     </a:solidFill>
                   </a:tcPr>
                 </a:tc>
-                <a:extLst>
-                  <a:ext uri="{0D108BD9-81ED-4DB2-BD59-A6C34878D82A}">
-                    <a16:rowId xmlns:a16="http://schemas.microsoft.com/office/drawing/2014/main" val="10002"/>
-                  </a:ext>
-                </a:extLst>
               </a:tr>
               <a:tr h="402336">
                 <a:tc>
@@ -8026,11 +7777,6 @@
                     </a:solidFill>
                   </a:tcPr>
                 </a:tc>
-                <a:extLst>
-                  <a:ext uri="{0D108BD9-81ED-4DB2-BD59-A6C34878D82A}">
-                    <a16:rowId xmlns:a16="http://schemas.microsoft.com/office/drawing/2014/main" val="10003"/>
-                  </a:ext>
-                </a:extLst>
               </a:tr>
               <a:tr h="402336">
                 <a:tc>
@@ -8125,11 +7871,6 @@
                     </a:solidFill>
                   </a:tcPr>
                 </a:tc>
-                <a:extLst>
-                  <a:ext uri="{0D108BD9-81ED-4DB2-BD59-A6C34878D82A}">
-                    <a16:rowId xmlns:a16="http://schemas.microsoft.com/office/drawing/2014/main" val="10004"/>
-                  </a:ext>
-                </a:extLst>
               </a:tr>
               <a:tr h="402336">
                 <a:tc>
@@ -8224,11 +7965,6 @@
                     </a:solidFill>
                   </a:tcPr>
                 </a:tc>
-                <a:extLst>
-                  <a:ext uri="{0D108BD9-81ED-4DB2-BD59-A6C34878D82A}">
-                    <a16:rowId xmlns:a16="http://schemas.microsoft.com/office/drawing/2014/main" val="10005"/>
-                  </a:ext>
-                </a:extLst>
               </a:tr>
               <a:tr h="402336">
                 <a:tc>
@@ -8323,11 +8059,6 @@
                     </a:solidFill>
                   </a:tcPr>
                 </a:tc>
-                <a:extLst>
-                  <a:ext uri="{0D108BD9-81ED-4DB2-BD59-A6C34878D82A}">
-                    <a16:rowId xmlns:a16="http://schemas.microsoft.com/office/drawing/2014/main" val="10006"/>
-                  </a:ext>
-                </a:extLst>
               </a:tr>
               <a:tr h="402336">
                 <a:tc>
@@ -8422,11 +8153,6 @@
                     </a:solidFill>
                   </a:tcPr>
                 </a:tc>
-                <a:extLst>
-                  <a:ext uri="{0D108BD9-81ED-4DB2-BD59-A6C34878D82A}">
-                    <a16:rowId xmlns:a16="http://schemas.microsoft.com/office/drawing/2014/main" val="10007"/>
-                  </a:ext>
-                </a:extLst>
               </a:tr>
               <a:tr h="402336">
                 <a:tc>
@@ -8521,11 +8247,6 @@
                     </a:solidFill>
                   </a:tcPr>
                 </a:tc>
-                <a:extLst>
-                  <a:ext uri="{0D108BD9-81ED-4DB2-BD59-A6C34878D82A}">
-                    <a16:rowId xmlns:a16="http://schemas.microsoft.com/office/drawing/2014/main" val="10008"/>
-                  </a:ext>
-                </a:extLst>
               </a:tr>
               <a:tr h="402336">
                 <a:tc>
@@ -8587,7 +8308,7 @@
                           </a:solidFill>
                           <a:latin typeface="游ゴシック"/>
                         </a:rPr>
-                        <a:t>true/false</a:t>
+                        <a:t>"true"/"false"</a:t>
                       </a:r>
                     </a:p>
                   </a:txBody>
@@ -8620,11 +8341,6 @@
                     </a:solidFill>
                   </a:tcPr>
                 </a:tc>
-                <a:extLst>
-                  <a:ext uri="{0D108BD9-81ED-4DB2-BD59-A6C34878D82A}">
-                    <a16:rowId xmlns:a16="http://schemas.microsoft.com/office/drawing/2014/main" val="10009"/>
-                  </a:ext>
-                </a:extLst>
               </a:tr>
               <a:tr h="402336">
                 <a:tc>
@@ -8686,7 +8402,7 @@
                           </a:solidFill>
                           <a:latin typeface="游ゴシック"/>
                         </a:rPr>
-                        <a:t>true/false</a:t>
+                        <a:t>"true"/"false"</a:t>
                       </a:r>
                     </a:p>
                   </a:txBody>
@@ -8719,11 +8435,6 @@
                     </a:solidFill>
                   </a:tcPr>
                 </a:tc>
-                <a:extLst>
-                  <a:ext uri="{0D108BD9-81ED-4DB2-BD59-A6C34878D82A}">
-                    <a16:rowId xmlns:a16="http://schemas.microsoft.com/office/drawing/2014/main" val="10010"/>
-                  </a:ext>
-                </a:extLst>
               </a:tr>
             </a:tbl>
           </a:graphicData>
@@ -8731,58 +8442,14 @@
       </p:graphicFrame>
       <p:sp>
         <p:nvSpPr>
-          <p:cNvPr id="10" name="Rectangle 9"/>
-          <p:cNvSpPr/>
-          <p:nvPr/>
-        </p:nvSpPr>
-        <p:spPr>
-          <a:xfrm>
-            <a:off x="320040" y="6071616"/>
-            <a:ext cx="11548872" cy="502920"/>
-          </a:xfrm>
-          <a:prstGeom prst="rect">
-            <a:avLst/>
-          </a:prstGeom>
-          <a:solidFill>
-            <a:srgbClr val="F4F4F4"/>
-          </a:solidFill>
-          <a:ln>
-            <a:noFill/>
-          </a:ln>
-        </p:spPr>
-        <p:style>
-          <a:lnRef idx="1">
-            <a:schemeClr val="accent1"/>
-          </a:lnRef>
-          <a:fillRef idx="3">
-            <a:schemeClr val="accent1"/>
-          </a:fillRef>
-          <a:effectRef idx="2">
-            <a:schemeClr val="accent1"/>
-          </a:effectRef>
-          <a:fontRef idx="minor">
-            <a:schemeClr val="lt1"/>
-          </a:fontRef>
-        </p:style>
-        <p:txBody>
-          <a:bodyPr rtlCol="0" anchor="ctr"/>
-          <a:lstStyle/>
-          <a:p>
-            <a:pPr algn="ctr"/>
-            <a:endParaRPr/>
-          </a:p>
-        </p:txBody>
-      </p:sp>
-      <p:sp>
-        <p:nvSpPr>
-          <p:cNvPr id="11" name="TextBox 10"/>
+          <p:cNvPr id="10" name="TextBox 9"/>
           <p:cNvSpPr txBox="1"/>
           <p:nvPr/>
         </p:nvSpPr>
         <p:spPr>
           <a:xfrm>
-            <a:off x="502920" y="6135624"/>
-            <a:ext cx="11155680" cy="384048"/>
+            <a:off x="320040" y="5806440"/>
+            <a:ext cx="10972800" cy="365760"/>
           </a:xfrm>
           <a:prstGeom prst="rect">
             <a:avLst/>
@@ -8797,11 +8464,11 @@
           <a:p>
             <a:pPr algn="l"/>
             <a:r>
-              <a:rPr sz="1200" b="0" i="0">
-                <a:solidFill>
-                  <a:srgbClr val="1A1A2E"/>
-                </a:solidFill>
-                <a:latin typeface="游ゴシック"/>
+              <a:rPr sz="1100" b="0" i="0">
+                <a:solidFill>
+                  <a:srgbClr val="999999"/>
+                </a:solidFill>
+                <a:latin typeface="Consolas"/>
               </a:rPr>
               <a:t>例: 60,540.2,RUN,120,539.8,0.8,550.0,530.0,false,false</a:t>
             </a:r>
@@ -8817,7 +8484,7 @@
 </file>
 
 <file path=ppt/slides/slide16.xml><?xml version="1.0" encoding="utf-8"?>
-<p:sld xmlns:a="http://schemas.openxmlformats.org/drawingml/2006/main" xmlns:r="http://schemas.openxmlformats.org/officeDocument/2006/relationships" xmlns:p="http://schemas.openxmlformats.org/presentationml/2006/main">
+<p:sld xmlns:a="http://schemas.openxmlformats.org/drawingml/2006/main" xmlns:p="http://schemas.openxmlformats.org/presentationml/2006/main" xmlns:r="http://schemas.openxmlformats.org/officeDocument/2006/relationships">
   <p:cSld>
     <p:spTree>
       <p:nvGrpSpPr>
@@ -8825,14 +8492,7 @@
         <p:cNvGrpSpPr/>
         <p:nvPr/>
       </p:nvGrpSpPr>
-      <p:grpSpPr>
-        <a:xfrm>
-          <a:off x="0" y="0"/>
-          <a:ext cx="0" cy="0"/>
-          <a:chOff x="0" y="0"/>
-          <a:chExt cx="0" cy="0"/>
-        </a:xfrm>
-      </p:grpSpPr>
+      <p:grpSpPr/>
       <p:sp>
         <p:nvSpPr>
           <p:cNvPr id="2" name="Rectangle 1"/>
@@ -8873,7 +8533,6 @@
           <a:lstStyle/>
           <a:p>
             <a:pPr algn="ctr"/>
-            <a:endParaRPr/>
           </a:p>
         </p:txBody>
       </p:sp>
@@ -8987,7 +8646,6 @@
           <a:lstStyle/>
           <a:p>
             <a:pPr algn="ctr"/>
-            <a:endParaRPr/>
           </a:p>
         </p:txBody>
       </p:sp>
@@ -9080,27 +8738,9 @@
                 <a:tableStyleId>{5C22544A-7EE6-4342-B048-85BDC9FD1C3A}</a:tableStyleId>
               </a:tblPr>
               <a:tblGrid>
-                <a:gridCol w="731520">
-                  <a:extLst>
-                    <a:ext uri="{9D8B030D-6E8A-4147-A177-3AD203B41FA5}">
-                      <a16:colId xmlns:a16="http://schemas.microsoft.com/office/drawing/2014/main" val="20000"/>
-                    </a:ext>
-                  </a:extLst>
-                </a:gridCol>
-                <a:gridCol w="4114800">
-                  <a:extLst>
-                    <a:ext uri="{9D8B030D-6E8A-4147-A177-3AD203B41FA5}">
-                      <a16:colId xmlns:a16="http://schemas.microsoft.com/office/drawing/2014/main" val="20001"/>
-                    </a:ext>
-                  </a:extLst>
-                </a:gridCol>
-                <a:gridCol w="6675120">
-                  <a:extLst>
-                    <a:ext uri="{9D8B030D-6E8A-4147-A177-3AD203B41FA5}">
-                      <a16:colId xmlns:a16="http://schemas.microsoft.com/office/drawing/2014/main" val="20002"/>
-                    </a:ext>
-                  </a:extLst>
-                </a:gridCol>
+                <a:gridCol w="731520"/>
+                <a:gridCol w="4114800"/>
+                <a:gridCol w="6675120"/>
               </a:tblGrid>
               <a:tr h="457200">
                 <a:tc>
@@ -9172,11 +8812,6 @@
                     </a:solidFill>
                   </a:tcPr>
                 </a:tc>
-                <a:extLst>
-                  <a:ext uri="{0D108BD9-81ED-4DB2-BD59-A6C34878D82A}">
-                    <a16:rowId xmlns:a16="http://schemas.microsoft.com/office/drawing/2014/main" val="10000"/>
-                  </a:ext>
-                </a:extLst>
               </a:tr>
               <a:tr h="457200">
                 <a:tc>
@@ -9248,11 +8883,6 @@
                     </a:solidFill>
                   </a:tcPr>
                 </a:tc>
-                <a:extLst>
-                  <a:ext uri="{0D108BD9-81ED-4DB2-BD59-A6C34878D82A}">
-                    <a16:rowId xmlns:a16="http://schemas.microsoft.com/office/drawing/2014/main" val="10001"/>
-                  </a:ext>
-                </a:extLst>
               </a:tr>
               <a:tr h="457200">
                 <a:tc>
@@ -9324,11 +8954,6 @@
                     </a:solidFill>
                   </a:tcPr>
                 </a:tc>
-                <a:extLst>
-                  <a:ext uri="{0D108BD9-81ED-4DB2-BD59-A6C34878D82A}">
-                    <a16:rowId xmlns:a16="http://schemas.microsoft.com/office/drawing/2014/main" val="10002"/>
-                  </a:ext>
-                </a:extLst>
               </a:tr>
               <a:tr h="457200">
                 <a:tc>
@@ -9400,11 +9025,6 @@
                     </a:solidFill>
                   </a:tcPr>
                 </a:tc>
-                <a:extLst>
-                  <a:ext uri="{0D108BD9-81ED-4DB2-BD59-A6C34878D82A}">
-                    <a16:rowId xmlns:a16="http://schemas.microsoft.com/office/drawing/2014/main" val="10003"/>
-                  </a:ext>
-                </a:extLst>
               </a:tr>
               <a:tr h="457200">
                 <a:tc>
@@ -9476,11 +9096,6 @@
                     </a:solidFill>
                   </a:tcPr>
                 </a:tc>
-                <a:extLst>
-                  <a:ext uri="{0D108BD9-81ED-4DB2-BD59-A6C34878D82A}">
-                    <a16:rowId xmlns:a16="http://schemas.microsoft.com/office/drawing/2014/main" val="10004"/>
-                  </a:ext>
-                </a:extLst>
               </a:tr>
               <a:tr h="457200">
                 <a:tc>
@@ -9519,7 +9134,7 @@
                           </a:solidFill>
                           <a:latin typeface="游ゴシック"/>
                         </a:rPr>
-                        <a:t>HI_ALARM = true の行を条件付き書式</a:t>
+                        <a:t>HI_ALARM = "true" の行を条件付き書式</a:t>
                       </a:r>
                     </a:p>
                   </a:txBody>
@@ -9552,11 +9167,6 @@
                     </a:solidFill>
                   </a:tcPr>
                 </a:tc>
-                <a:extLst>
-                  <a:ext uri="{0D108BD9-81ED-4DB2-BD59-A6C34878D82A}">
-                    <a16:rowId xmlns:a16="http://schemas.microsoft.com/office/drawing/2014/main" val="10005"/>
-                  </a:ext>
-                </a:extLst>
               </a:tr>
             </a:tbl>
           </a:graphicData>
@@ -9570,8 +9180,8 @@
         </p:nvSpPr>
         <p:spPr>
           <a:xfrm>
-            <a:off x="320040" y="3931920"/>
-            <a:ext cx="11548872" cy="502920"/>
+            <a:off x="320040" y="4389120"/>
+            <a:ext cx="11521440" cy="1463040"/>
           </a:xfrm>
           <a:prstGeom prst="rect">
             <a:avLst/>
@@ -9602,7 +9212,6 @@
           <a:lstStyle/>
           <a:p>
             <a:pPr algn="ctr"/>
-            <a:endParaRPr/>
           </a:p>
         </p:txBody>
       </p:sp>
@@ -9614,8 +9223,8 @@
         </p:nvSpPr>
         <p:spPr>
           <a:xfrm>
-            <a:off x="502920" y="3995928"/>
-            <a:ext cx="11155680" cy="384048"/>
+            <a:off x="502920" y="4480560"/>
+            <a:ext cx="11155680" cy="1280160"/>
           </a:xfrm>
           <a:prstGeom prst="rect">
             <a:avLst/>
@@ -9630,13 +9239,37 @@
           <a:p>
             <a:pPr algn="l"/>
             <a:r>
-              <a:rPr sz="1200" b="0" i="0">
+              <a:rPr sz="1300" b="0" i="0">
                 <a:solidFill>
                   <a:srgbClr val="1A1A2E"/>
                 </a:solidFill>
                 <a:latin typeface="游ゴシック"/>
               </a:rPr>
-              <a:t>StdDev と Range を見ることで温度ばらつきの傾向が分かる。ファイルは毎計測ごとに連番で新規作成されるため上書きによるデータ消失なし。</a:t>
+              <a:t>・StdDev と Range を見ることで温度ばらつきの傾向が分かる</a:t>
+            </a:r>
+          </a:p>
+          <a:p>
+            <a:pPr algn="l"/>
+            <a:r>
+              <a:rPr sz="1300" b="0" i="0">
+                <a:solidFill>
+                  <a:srgbClr val="1A1A2E"/>
+                </a:solidFill>
+                <a:latin typeface="游ゴシック"/>
+              </a:rPr>
+              <a:t>・ファイルは毎計測ごとに連番で新規作成されるため上書きによるデータ消失なし</a:t>
+            </a:r>
+          </a:p>
+          <a:p>
+            <a:pPr algn="l"/>
+            <a:r>
+              <a:rPr sz="1300" b="0" i="0">
+                <a:solidFill>
+                  <a:srgbClr val="1A1A2E"/>
+                </a:solidFill>
+                <a:latin typeface="游ゴシック"/>
+              </a:rPr>
+              <a:t>・NaN 値（センサ異常時）は Excel フィルタで除外可能</a:t>
             </a:r>
           </a:p>
         </p:txBody>
@@ -9650,7 +9283,7 @@
 </file>
 
 <file path=ppt/slides/slide17.xml><?xml version="1.0" encoding="utf-8"?>
-<p:sld xmlns:a="http://schemas.openxmlformats.org/drawingml/2006/main" xmlns:r="http://schemas.openxmlformats.org/officeDocument/2006/relationships" xmlns:p="http://schemas.openxmlformats.org/presentationml/2006/main">
+<p:sld xmlns:a="http://schemas.openxmlformats.org/drawingml/2006/main" xmlns:p="http://schemas.openxmlformats.org/presentationml/2006/main" xmlns:r="http://schemas.openxmlformats.org/officeDocument/2006/relationships">
   <p:cSld>
     <p:spTree>
       <p:nvGrpSpPr>
@@ -9658,14 +9291,7 @@
         <p:cNvGrpSpPr/>
         <p:nvPr/>
       </p:nvGrpSpPr>
-      <p:grpSpPr>
-        <a:xfrm>
-          <a:off x="0" y="0"/>
-          <a:ext cx="0" cy="0"/>
-          <a:chOff x="0" y="0"/>
-          <a:chExt cx="0" cy="0"/>
-        </a:xfrm>
-      </p:grpSpPr>
+      <p:grpSpPr/>
       <p:sp>
         <p:nvSpPr>
           <p:cNvPr id="2" name="Rectangle 1"/>
@@ -9706,7 +9332,6 @@
           <a:lstStyle/>
           <a:p>
             <a:pPr algn="ctr"/>
-            <a:endParaRPr/>
           </a:p>
         </p:txBody>
       </p:sp>
@@ -9820,7 +9445,6 @@
           <a:lstStyle/>
           <a:p>
             <a:pPr algn="ctr"/>
-            <a:endParaRPr/>
           </a:p>
         </p:txBody>
       </p:sp>
@@ -9902,8 +9526,8 @@
         </p:nvSpPr>
         <p:spPr>
           <a:xfrm>
-            <a:off x="320040" y="1005840"/>
-            <a:ext cx="11548872" cy="411480"/>
+            <a:off x="320040" y="1051560"/>
+            <a:ext cx="11521440" cy="411480"/>
           </a:xfrm>
           <a:prstGeom prst="rect">
             <a:avLst/>
@@ -9971,7 +9595,6 @@
           <a:lstStyle/>
           <a:p>
             <a:pPr algn="ctr"/>
-            <a:endParaRPr/>
           </a:p>
         </p:txBody>
       </p:sp>
@@ -10015,7 +9638,6 @@
           <a:lstStyle/>
           <a:p>
             <a:pPr algn="ctr"/>
-            <a:endParaRPr/>
           </a:p>
         </p:txBody>
       </p:sp>
@@ -10261,7 +9883,6 @@
           <a:lstStyle/>
           <a:p>
             <a:pPr algn="ctr"/>
-            <a:endParaRPr/>
           </a:p>
         </p:txBody>
       </p:sp>
@@ -10305,7 +9926,6 @@
           <a:lstStyle/>
           <a:p>
             <a:pPr algn="ctr"/>
-            <a:endParaRPr/>
           </a:p>
         </p:txBody>
       </p:sp>
@@ -10527,7 +10147,6 @@
           <a:lstStyle/>
           <a:p>
             <a:pPr algn="ctr"/>
-            <a:endParaRPr/>
           </a:p>
         </p:txBody>
       </p:sp>
@@ -10571,7 +10190,6 @@
           <a:lstStyle/>
           <a:p>
             <a:pPr algn="ctr"/>
-            <a:endParaRPr/>
           </a:p>
         </p:txBody>
       </p:sp>
@@ -10760,7 +10378,7 @@
         <p:spPr>
           <a:xfrm>
             <a:off x="320040" y="5852160"/>
-            <a:ext cx="11548872" cy="365760"/>
+            <a:ext cx="11521440" cy="365760"/>
           </a:xfrm>
           <a:prstGeom prst="rect">
             <a:avLst/>
@@ -10795,7 +10413,7 @@
 </file>
 
 <file path=ppt/slides/slide18.xml><?xml version="1.0" encoding="utf-8"?>
-<p:sld xmlns:a="http://schemas.openxmlformats.org/drawingml/2006/main" xmlns:r="http://schemas.openxmlformats.org/officeDocument/2006/relationships" xmlns:p="http://schemas.openxmlformats.org/presentationml/2006/main">
+<p:sld xmlns:a="http://schemas.openxmlformats.org/drawingml/2006/main" xmlns:p="http://schemas.openxmlformats.org/presentationml/2006/main" xmlns:r="http://schemas.openxmlformats.org/officeDocument/2006/relationships">
   <p:cSld>
     <p:spTree>
       <p:nvGrpSpPr>
@@ -10803,14 +10421,7 @@
         <p:cNvGrpSpPr/>
         <p:nvPr/>
       </p:nvGrpSpPr>
-      <p:grpSpPr>
-        <a:xfrm>
-          <a:off x="0" y="0"/>
-          <a:ext cx="0" cy="0"/>
-          <a:chOff x="0" y="0"/>
-          <a:chExt cx="0" cy="0"/>
-        </a:xfrm>
-      </p:grpSpPr>
+      <p:grpSpPr/>
       <p:sp>
         <p:nvSpPr>
           <p:cNvPr id="2" name="Rectangle 1"/>
@@ -10851,7 +10462,6 @@
           <a:lstStyle/>
           <a:p>
             <a:pPr algn="ctr"/>
-            <a:endParaRPr/>
           </a:p>
         </p:txBody>
       </p:sp>
@@ -10965,7 +10575,6 @@
           <a:lstStyle/>
           <a:p>
             <a:pPr algn="ctr"/>
-            <a:endParaRPr/>
           </a:p>
         </p:txBody>
       </p:sp>
@@ -11093,20 +10702,8 @@
                 <a:tableStyleId>{5C22544A-7EE6-4342-B048-85BDC9FD1C3A}</a:tableStyleId>
               </a:tblPr>
               <a:tblGrid>
-                <a:gridCol w="2011680">
-                  <a:extLst>
-                    <a:ext uri="{9D8B030D-6E8A-4147-A177-3AD203B41FA5}">
-                      <a16:colId xmlns:a16="http://schemas.microsoft.com/office/drawing/2014/main" val="20000"/>
-                    </a:ext>
-                  </a:extLst>
-                </a:gridCol>
-                <a:gridCol w="3383280">
-                  <a:extLst>
-                    <a:ext uri="{9D8B030D-6E8A-4147-A177-3AD203B41FA5}">
-                      <a16:colId xmlns:a16="http://schemas.microsoft.com/office/drawing/2014/main" val="20001"/>
-                    </a:ext>
-                  </a:extLst>
-                </a:gridCol>
+                <a:gridCol w="2011680"/>
+                <a:gridCol w="3383280"/>
               </a:tblGrid>
               <a:tr h="429768">
                 <a:tc>
@@ -11155,11 +10752,6 @@
                     </a:solidFill>
                   </a:tcPr>
                 </a:tc>
-                <a:extLst>
-                  <a:ext uri="{0D108BD9-81ED-4DB2-BD59-A6C34878D82A}">
-                    <a16:rowId xmlns:a16="http://schemas.microsoft.com/office/drawing/2014/main" val="10000"/>
-                  </a:ext>
-                </a:extLst>
               </a:tr>
               <a:tr h="429768">
                 <a:tc>
@@ -11208,11 +10800,6 @@
                     </a:solidFill>
                   </a:tcPr>
                 </a:tc>
-                <a:extLst>
-                  <a:ext uri="{0D108BD9-81ED-4DB2-BD59-A6C34878D82A}">
-                    <a16:rowId xmlns:a16="http://schemas.microsoft.com/office/drawing/2014/main" val="10001"/>
-                  </a:ext>
-                </a:extLst>
               </a:tr>
               <a:tr h="429768">
                 <a:tc>
@@ -11261,11 +10848,6 @@
                     </a:solidFill>
                   </a:tcPr>
                 </a:tc>
-                <a:extLst>
-                  <a:ext uri="{0D108BD9-81ED-4DB2-BD59-A6C34878D82A}">
-                    <a16:rowId xmlns:a16="http://schemas.microsoft.com/office/drawing/2014/main" val="10002"/>
-                  </a:ext>
-                </a:extLst>
               </a:tr>
               <a:tr h="429768">
                 <a:tc>
@@ -11314,11 +10896,6 @@
                     </a:solidFill>
                   </a:tcPr>
                 </a:tc>
-                <a:extLst>
-                  <a:ext uri="{0D108BD9-81ED-4DB2-BD59-A6C34878D82A}">
-                    <a16:rowId xmlns:a16="http://schemas.microsoft.com/office/drawing/2014/main" val="10003"/>
-                  </a:ext>
-                </a:extLst>
               </a:tr>
               <a:tr h="429768">
                 <a:tc>
@@ -11367,11 +10944,6 @@
                     </a:solidFill>
                   </a:tcPr>
                 </a:tc>
-                <a:extLst>
-                  <a:ext uri="{0D108BD9-81ED-4DB2-BD59-A6C34878D82A}">
-                    <a16:rowId xmlns:a16="http://schemas.microsoft.com/office/drawing/2014/main" val="10004"/>
-                  </a:ext>
-                </a:extLst>
               </a:tr>
               <a:tr h="429768">
                 <a:tc>
@@ -11410,7 +10982,7 @@
                           </a:solidFill>
                           <a:latin typeface="游ゴシック"/>
                         </a:rPr>
-                        <a:t>最大 3 回リトライ</a:t>
+                        <a:t>最大 3 回リトライ (readThermocouple())</a:t>
                       </a:r>
                     </a:p>
                   </a:txBody>
@@ -11420,11 +10992,6 @@
                     </a:solidFill>
                   </a:tcPr>
                 </a:tc>
-                <a:extLst>
-                  <a:ext uri="{0D108BD9-81ED-4DB2-BD59-A6C34878D82A}">
-                    <a16:rowId xmlns:a16="http://schemas.microsoft.com/office/drawing/2014/main" val="10005"/>
-                  </a:ext>
-                </a:extLst>
               </a:tr>
             </a:tbl>
           </a:graphicData>
@@ -11474,7 +11041,7 @@
         <p:spPr>
           <a:xfrm>
             <a:off x="5989320" y="1508760"/>
-            <a:ext cx="5577840" cy="822959"/>
+            <a:ext cx="5577840" cy="1097280"/>
           </a:xfrm>
           <a:prstGeom prst="rect">
             <a:avLst/>
@@ -11505,7 +11072,6 @@
           <a:lstStyle/>
           <a:p>
             <a:pPr algn="ctr"/>
-            <a:endParaRPr/>
           </a:p>
         </p:txBody>
       </p:sp>
@@ -11518,7 +11084,7 @@
         <p:spPr>
           <a:xfrm>
             <a:off x="6126480" y="1600200"/>
-            <a:ext cx="5303520" cy="640079"/>
+            <a:ext cx="5303520" cy="914400"/>
           </a:xfrm>
           <a:prstGeom prst="rect">
             <a:avLst/>
@@ -11565,7 +11131,7 @@
           <p:nvPr/>
         </p:nvGraphicFramePr>
         <p:xfrm>
-          <a:off x="5989320" y="2468879"/>
+          <a:off x="5989320" y="2697480"/>
           <a:ext cx="5577840" cy="1719072"/>
         </p:xfrm>
         <a:graphic>
@@ -11575,20 +11141,8 @@
                 <a:tableStyleId>{5C22544A-7EE6-4342-B048-85BDC9FD1C3A}</a:tableStyleId>
               </a:tblPr>
               <a:tblGrid>
-                <a:gridCol w="2286000">
-                  <a:extLst>
-                    <a:ext uri="{9D8B030D-6E8A-4147-A177-3AD203B41FA5}">
-                      <a16:colId xmlns:a16="http://schemas.microsoft.com/office/drawing/2014/main" val="20000"/>
-                    </a:ext>
-                  </a:extLst>
-                </a:gridCol>
-                <a:gridCol w="3291840">
-                  <a:extLst>
-                    <a:ext uri="{9D8B030D-6E8A-4147-A177-3AD203B41FA5}">
-                      <a16:colId xmlns:a16="http://schemas.microsoft.com/office/drawing/2014/main" val="20001"/>
-                    </a:ext>
-                  </a:extLst>
-                </a:gridCol>
+                <a:gridCol w="2286000"/>
+                <a:gridCol w="3291840"/>
               </a:tblGrid>
               <a:tr h="429768">
                 <a:tc>
@@ -11637,11 +11191,6 @@
                     </a:solidFill>
                   </a:tcPr>
                 </a:tc>
-                <a:extLst>
-                  <a:ext uri="{0D108BD9-81ED-4DB2-BD59-A6C34878D82A}">
-                    <a16:rowId xmlns:a16="http://schemas.microsoft.com/office/drawing/2014/main" val="10000"/>
-                  </a:ext>
-                </a:extLst>
               </a:tr>
               <a:tr h="429768">
                 <a:tc>
@@ -11690,11 +11239,6 @@
                     </a:solidFill>
                   </a:tcPr>
                 </a:tc>
-                <a:extLst>
-                  <a:ext uri="{0D108BD9-81ED-4DB2-BD59-A6C34878D82A}">
-                    <a16:rowId xmlns:a16="http://schemas.microsoft.com/office/drawing/2014/main" val="10001"/>
-                  </a:ext>
-                </a:extLst>
               </a:tr>
               <a:tr h="429768">
                 <a:tc>
@@ -11733,7 +11277,7 @@
                           </a:solidFill>
                           <a:latin typeface="游ゴシック"/>
                         </a:rPr>
-                        <a:t>raw 値をそのまま初期値に設定</a:t>
+                        <a:t>raw 値をそのまま初期値に設定 (NaN 収束待ち回避)</a:t>
                       </a:r>
                     </a:p>
                   </a:txBody>
@@ -11743,11 +11287,6 @@
                     </a:solidFill>
                   </a:tcPr>
                 </a:tc>
-                <a:extLst>
-                  <a:ext uri="{0D108BD9-81ED-4DB2-BD59-A6C34878D82A}">
-                    <a16:rowId xmlns:a16="http://schemas.microsoft.com/office/drawing/2014/main" val="10002"/>
-                  </a:ext>
-                </a:extLst>
               </a:tr>
               <a:tr h="429768">
                 <a:tc>
@@ -11786,7 +11325,7 @@
                           </a:solidFill>
                           <a:latin typeface="游ゴシック"/>
                         </a:rPr>
-                        <a:t>新データ到着時のみ</a:t>
+                        <a:t>新データ到着時のみ（同値での重複適用なし）</a:t>
                       </a:r>
                     </a:p>
                   </a:txBody>
@@ -11796,11 +11335,6 @@
                     </a:solidFill>
                   </a:tcPr>
                 </a:tc>
-                <a:extLst>
-                  <a:ext uri="{0D108BD9-81ED-4DB2-BD59-A6C34878D82A}">
-                    <a16:rowId xmlns:a16="http://schemas.microsoft.com/office/drawing/2014/main" val="10003"/>
-                  </a:ext>
-                </a:extLst>
               </a:tr>
             </a:tbl>
           </a:graphicData>
@@ -11815,7 +11349,7 @@
         <p:spPr>
           <a:xfrm>
             <a:off x="320040" y="5760720"/>
-            <a:ext cx="11548872" cy="365760"/>
+            <a:ext cx="11521440" cy="365760"/>
           </a:xfrm>
           <a:prstGeom prst="rect">
             <a:avLst/>
@@ -11850,7 +11384,7 @@
 </file>
 
 <file path=ppt/slides/slide19.xml><?xml version="1.0" encoding="utf-8"?>
-<p:sld xmlns:a="http://schemas.openxmlformats.org/drawingml/2006/main" xmlns:r="http://schemas.openxmlformats.org/officeDocument/2006/relationships" xmlns:p="http://schemas.openxmlformats.org/presentationml/2006/main">
+<p:sld xmlns:a="http://schemas.openxmlformats.org/drawingml/2006/main" xmlns:p="http://schemas.openxmlformats.org/presentationml/2006/main" xmlns:r="http://schemas.openxmlformats.org/officeDocument/2006/relationships">
   <p:cSld>
     <p:spTree>
       <p:nvGrpSpPr>
@@ -11858,14 +11392,7 @@
         <p:cNvGrpSpPr/>
         <p:nvPr/>
       </p:nvGrpSpPr>
-      <p:grpSpPr>
-        <a:xfrm>
-          <a:off x="0" y="0"/>
-          <a:ext cx="0" cy="0"/>
-          <a:chOff x="0" y="0"/>
-          <a:chExt cx="0" cy="0"/>
-        </a:xfrm>
-      </p:grpSpPr>
+      <p:grpSpPr/>
       <p:sp>
         <p:nvSpPr>
           <p:cNvPr id="2" name="Rectangle 1"/>
@@ -11906,7 +11433,6 @@
           <a:lstStyle/>
           <a:p>
             <a:pPr algn="ctr"/>
-            <a:endParaRPr/>
           </a:p>
         </p:txBody>
       </p:sp>
@@ -12020,7 +11546,6 @@
           <a:lstStyle/>
           <a:p>
             <a:pPr algn="ctr"/>
-            <a:endParaRPr/>
           </a:p>
         </p:txBody>
       </p:sp>
@@ -12103,7 +11628,7 @@
         <p:spPr>
           <a:xfrm>
             <a:off x="320040" y="1051560"/>
-            <a:ext cx="5394960" cy="411480"/>
+            <a:ext cx="6949440" cy="365760"/>
           </a:xfrm>
           <a:prstGeom prst="rect">
             <a:avLst/>
@@ -12131,14 +11656,57 @@
       </p:sp>
       <p:sp>
         <p:nvSpPr>
-          <p:cNvPr id="9" name="TextBox 8"/>
+          <p:cNvPr id="9" name="Rectangle 8"/>
+          <p:cNvSpPr/>
+          <p:nvPr/>
+        </p:nvSpPr>
+        <p:spPr>
+          <a:xfrm>
+            <a:off x="320040" y="1463040"/>
+            <a:ext cx="6949440" cy="1645920"/>
+          </a:xfrm>
+          <a:prstGeom prst="rect">
+            <a:avLst/>
+          </a:prstGeom>
+          <a:solidFill>
+            <a:srgbClr val="F4F4F4"/>
+          </a:solidFill>
+          <a:ln>
+            <a:noFill/>
+          </a:ln>
+        </p:spPr>
+        <p:style>
+          <a:lnRef idx="1">
+            <a:schemeClr val="accent1"/>
+          </a:lnRef>
+          <a:fillRef idx="3">
+            <a:schemeClr val="accent1"/>
+          </a:fillRef>
+          <a:effectRef idx="2">
+            <a:schemeClr val="accent1"/>
+          </a:effectRef>
+          <a:fontRef idx="minor">
+            <a:schemeClr val="lt1"/>
+          </a:fontRef>
+        </p:style>
+        <p:txBody>
+          <a:bodyPr rtlCol="0" anchor="ctr"/>
+          <a:lstStyle/>
+          <a:p>
+            <a:pPr algn="ctr"/>
+          </a:p>
+        </p:txBody>
+      </p:sp>
+      <p:sp>
+        <p:nvSpPr>
+          <p:cNvPr id="10" name="TextBox 9"/>
           <p:cNvSpPr txBox="1"/>
           <p:nvPr/>
         </p:nvSpPr>
         <p:spPr>
           <a:xfrm>
-            <a:off x="320040" y="1508760"/>
-            <a:ext cx="5394960" cy="438912"/>
+            <a:off x="457200" y="1554480"/>
+            <a:ext cx="6675120" cy="1463040"/>
           </a:xfrm>
           <a:prstGeom prst="rect">
             <a:avLst/>
@@ -12166,14 +11734,14 @@
       </p:sp>
       <p:sp>
         <p:nvSpPr>
-          <p:cNvPr id="10" name="Rectangle 9"/>
+          <p:cNvPr id="11" name="Rectangle 10"/>
           <p:cNvSpPr/>
           <p:nvPr/>
         </p:nvSpPr>
         <p:spPr>
           <a:xfrm>
-            <a:off x="320040" y="2039112"/>
-            <a:ext cx="5394960" cy="2194559"/>
+            <a:off x="320040" y="3200400"/>
+            <a:ext cx="6949440" cy="2011680"/>
           </a:xfrm>
           <a:prstGeom prst="rect">
             <a:avLst/>
@@ -12206,20 +11774,19 @@
           <a:lstStyle/>
           <a:p>
             <a:pPr algn="ctr"/>
-            <a:endParaRPr/>
-          </a:p>
-        </p:txBody>
-      </p:sp>
-      <p:sp>
-        <p:nvSpPr>
-          <p:cNvPr id="11" name="TextBox 10"/>
+          </a:p>
+        </p:txBody>
+      </p:sp>
+      <p:sp>
+        <p:nvSpPr>
+          <p:cNvPr id="12" name="TextBox 11"/>
           <p:cNvSpPr txBox="1"/>
           <p:nvPr/>
         </p:nvSpPr>
         <p:spPr>
           <a:xfrm>
-            <a:off x="457200" y="2112264"/>
-            <a:ext cx="5120640" cy="347472"/>
+            <a:off x="457200" y="3273552"/>
+            <a:ext cx="6675120" cy="347472"/>
           </a:xfrm>
           <a:prstGeom prst="rect">
             <a:avLst/>
@@ -12247,14 +11814,14 @@
       </p:sp>
       <p:sp>
         <p:nvSpPr>
-          <p:cNvPr id="12" name="TextBox 11"/>
+          <p:cNvPr id="13" name="TextBox 12"/>
           <p:cNvSpPr txBox="1"/>
           <p:nvPr/>
         </p:nvSpPr>
         <p:spPr>
           <a:xfrm>
-            <a:off x="457200" y="2496312"/>
-            <a:ext cx="5120640" cy="1737359"/>
+            <a:off x="457200" y="3657600"/>
+            <a:ext cx="6583680" cy="1463040"/>
           </a:xfrm>
           <a:prstGeom prst="rect">
             <a:avLst/>
@@ -12342,49 +11909,14 @@
       </p:sp>
       <p:sp>
         <p:nvSpPr>
-          <p:cNvPr id="13" name="TextBox 12"/>
-          <p:cNvSpPr txBox="1"/>
-          <p:nvPr/>
-        </p:nvSpPr>
-        <p:spPr>
-          <a:xfrm>
-            <a:off x="5989320" y="1051560"/>
-            <a:ext cx="5577840" cy="411480"/>
-          </a:xfrm>
-          <a:prstGeom prst="rect">
-            <a:avLst/>
-          </a:prstGeom>
-          <a:noFill/>
-        </p:spPr>
-        <p:txBody>
-          <a:bodyPr wrap="square">
-            <a:spAutoFit/>
-          </a:bodyPr>
-          <a:lstStyle/>
-          <a:p>
-            <a:pPr algn="l"/>
-            <a:r>
-              <a:rPr sz="1600" b="1" i="0">
-                <a:solidFill>
-                  <a:srgbClr val="0D477F"/>
-                </a:solidFill>
-                <a:latin typeface="游ゴシック"/>
-              </a:rPr>
-              <a:t>採用理由・実装ポイント</a:t>
-            </a:r>
-          </a:p>
-        </p:txBody>
-      </p:sp>
-      <p:sp>
-        <p:nvSpPr>
           <p:cNvPr id="14" name="Rectangle 13"/>
           <p:cNvSpPr/>
           <p:nvPr/>
         </p:nvSpPr>
         <p:spPr>
           <a:xfrm>
-            <a:off x="5989320" y="1508760"/>
-            <a:ext cx="5577840" cy="1755648"/>
+            <a:off x="7589520" y="1051560"/>
+            <a:ext cx="4297680" cy="2743200"/>
           </a:xfrm>
           <a:prstGeom prst="rect">
             <a:avLst/>
@@ -12417,7 +11949,6 @@
           <a:lstStyle/>
           <a:p>
             <a:pPr algn="ctr"/>
-            <a:endParaRPr/>
           </a:p>
         </p:txBody>
       </p:sp>
@@ -12429,8 +11960,8 @@
         </p:nvSpPr>
         <p:spPr>
           <a:xfrm>
-            <a:off x="6126480" y="1581912"/>
-            <a:ext cx="5303520" cy="347472"/>
+            <a:off x="7726679" y="1143000"/>
+            <a:ext cx="4023360" cy="365760"/>
           </a:xfrm>
           <a:prstGeom prst="rect">
             <a:avLst/>
@@ -12445,7 +11976,7 @@
           <a:p>
             <a:pPr algn="l"/>
             <a:r>
-              <a:rPr sz="1400" b="1" i="0">
+              <a:rPr sz="1500" b="1" i="0">
                 <a:solidFill>
                   <a:srgbClr val="27AE60"/>
                 </a:solidFill>
@@ -12464,8 +11995,8 @@
         </p:nvSpPr>
         <p:spPr>
           <a:xfrm>
-            <a:off x="6126480" y="1965960"/>
-            <a:ext cx="5303520" cy="1298448"/>
+            <a:off x="7726679" y="1600200"/>
+            <a:ext cx="4023360" cy="2011680"/>
           </a:xfrm>
           <a:prstGeom prst="rect">
             <a:avLst/>
@@ -12480,7 +12011,7 @@
           <a:p>
             <a:pPr algn="l"/>
             <a:r>
-              <a:rPr sz="1200" b="0" i="0">
+              <a:rPr sz="1300" b="0" i="0">
                 <a:solidFill>
                   <a:srgbClr val="1A1A2E"/>
                 </a:solidFill>
@@ -12492,7 +12023,7 @@
           <a:p>
             <a:pPr algn="l"/>
             <a:r>
-              <a:rPr sz="1200" b="0" i="0">
+              <a:rPr sz="1300" b="0" i="0">
                 <a:solidFill>
                   <a:srgbClr val="1A1A2E"/>
                 </a:solidFill>
@@ -12504,7 +12035,7 @@
           <a:p>
             <a:pPr algn="l"/>
             <a:r>
-              <a:rPr sz="1200" b="0" i="0">
+              <a:rPr sz="1300" b="0" i="0">
                 <a:solidFill>
                   <a:srgbClr val="1A1A2E"/>
                 </a:solidFill>
@@ -12516,7 +12047,7 @@
           <a:p>
             <a:pPr algn="l"/>
             <a:r>
-              <a:rPr sz="1200" b="0" i="0">
+              <a:rPr sz="1300" b="0" i="0">
                 <a:solidFill>
                   <a:srgbClr val="1A1A2E"/>
                 </a:solidFill>
@@ -12535,19 +12066,17 @@
         </p:nvSpPr>
         <p:spPr>
           <a:xfrm>
-            <a:off x="5989320" y="3401568"/>
-            <a:ext cx="5577840" cy="1060704"/>
+            <a:off x="7589520" y="3886200"/>
+            <a:ext cx="4297680" cy="1645920"/>
           </a:xfrm>
           <a:prstGeom prst="rect">
             <a:avLst/>
           </a:prstGeom>
           <a:solidFill>
-            <a:srgbClr val="FFFFFF"/>
+            <a:srgbClr val="F4F4F4"/>
           </a:solidFill>
-          <a:ln w="19050">
-            <a:solidFill>
-              <a:srgbClr val="0D477F"/>
-            </a:solidFill>
+          <a:ln>
+            <a:noFill/>
           </a:ln>
         </p:spPr>
         <p:style>
@@ -12569,7 +12098,6 @@
           <a:lstStyle/>
           <a:p>
             <a:pPr algn="ctr"/>
-            <a:endParaRPr/>
           </a:p>
         </p:txBody>
       </p:sp>
@@ -12581,8 +12109,8 @@
         </p:nvSpPr>
         <p:spPr>
           <a:xfrm>
-            <a:off x="6126480" y="3474720"/>
-            <a:ext cx="5303520" cy="347472"/>
+            <a:off x="7726679" y="3959352"/>
+            <a:ext cx="4023360" cy="347472"/>
           </a:xfrm>
           <a:prstGeom prst="rect">
             <a:avLst/>
@@ -12597,7 +12125,7 @@
           <a:p>
             <a:pPr algn="l"/>
             <a:r>
-              <a:rPr sz="1400" b="1" i="0">
+              <a:rPr sz="1300" b="1" i="0">
                 <a:solidFill>
                   <a:srgbClr val="0D477F"/>
                 </a:solidFill>
@@ -12616,8 +12144,8 @@
         </p:nvSpPr>
         <p:spPr>
           <a:xfrm>
-            <a:off x="6126480" y="3858768"/>
-            <a:ext cx="5303520" cy="603504"/>
+            <a:off x="7726679" y="4315968"/>
+            <a:ext cx="4023360" cy="1097280"/>
           </a:xfrm>
           <a:prstGeom prst="rect">
             <a:avLst/>
@@ -12650,7 +12178,19 @@
                 </a:solidFill>
                 <a:latin typeface="游ゴシック"/>
               </a:rPr>
-              <a:t>・最終値は handleButtonA() で RUN→RESULT 遷移時にも再計算</a:t>
+              <a:t>・最終値は handleButtonA() で RUN→RESULT</a:t>
+            </a:r>
+          </a:p>
+          <a:p>
+            <a:pPr algn="l"/>
+            <a:r>
+              <a:rPr sz="1200" b="0" i="0">
+                <a:solidFill>
+                  <a:srgbClr val="1A1A2E"/>
+                </a:solidFill>
+                <a:latin typeface="游ゴシック"/>
+              </a:rPr>
+              <a:t>  遷移時にも再計算</a:t>
             </a:r>
           </a:p>
         </p:txBody>
@@ -12664,7 +12204,7 @@
 </file>
 
 <file path=ppt/slides/slide2.xml><?xml version="1.0" encoding="utf-8"?>
-<p:sld xmlns:a="http://schemas.openxmlformats.org/drawingml/2006/main" xmlns:r="http://schemas.openxmlformats.org/officeDocument/2006/relationships" xmlns:p="http://schemas.openxmlformats.org/presentationml/2006/main">
+<p:sld xmlns:a="http://schemas.openxmlformats.org/drawingml/2006/main" xmlns:p="http://schemas.openxmlformats.org/presentationml/2006/main" xmlns:r="http://schemas.openxmlformats.org/officeDocument/2006/relationships">
   <p:cSld>
     <p:spTree>
       <p:nvGrpSpPr>
@@ -12672,14 +12212,7 @@
         <p:cNvGrpSpPr/>
         <p:nvPr/>
       </p:nvGrpSpPr>
-      <p:grpSpPr>
-        <a:xfrm>
-          <a:off x="0" y="0"/>
-          <a:ext cx="0" cy="0"/>
-          <a:chOff x="0" y="0"/>
-          <a:chExt cx="0" cy="0"/>
-        </a:xfrm>
-      </p:grpSpPr>
+      <p:grpSpPr/>
       <p:sp>
         <p:nvSpPr>
           <p:cNvPr id="2" name="Rectangle 1"/>
@@ -12720,7 +12253,6 @@
           <a:lstStyle/>
           <a:p>
             <a:pPr algn="ctr"/>
-            <a:endParaRPr/>
           </a:p>
         </p:txBody>
       </p:sp>
@@ -12834,7 +12366,6 @@
           <a:lstStyle/>
           <a:p>
             <a:pPr algn="ctr"/>
-            <a:endParaRPr/>
           </a:p>
         </p:txBody>
       </p:sp>
@@ -12948,7 +12479,6 @@
           <a:lstStyle/>
           <a:p>
             <a:pPr algn="ctr"/>
-            <a:endParaRPr/>
           </a:p>
         </p:txBody>
       </p:sp>
@@ -13097,7 +12627,6 @@
           <a:lstStyle/>
           <a:p>
             <a:pPr algn="ctr"/>
-            <a:endParaRPr/>
           </a:p>
         </p:txBody>
       </p:sp>
@@ -13246,7 +12775,6 @@
           <a:lstStyle/>
           <a:p>
             <a:pPr algn="ctr"/>
-            <a:endParaRPr/>
           </a:p>
         </p:txBody>
       </p:sp>
@@ -13395,7 +12923,6 @@
           <a:lstStyle/>
           <a:p>
             <a:pPr algn="ctr"/>
-            <a:endParaRPr/>
           </a:p>
         </p:txBody>
       </p:sp>
@@ -13544,7 +13071,6 @@
           <a:lstStyle/>
           <a:p>
             <a:pPr algn="ctr"/>
-            <a:endParaRPr/>
           </a:p>
         </p:txBody>
       </p:sp>
@@ -13693,7 +13219,6 @@
           <a:lstStyle/>
           <a:p>
             <a:pPr algn="ctr"/>
-            <a:endParaRPr/>
           </a:p>
         </p:txBody>
       </p:sp>
@@ -13842,7 +13367,6 @@
           <a:lstStyle/>
           <a:p>
             <a:pPr algn="ctr"/>
-            <a:endParaRPr/>
           </a:p>
         </p:txBody>
       </p:sp>
@@ -13991,7 +13515,6 @@
           <a:lstStyle/>
           <a:p>
             <a:pPr algn="ctr"/>
-            <a:endParaRPr/>
           </a:p>
         </p:txBody>
       </p:sp>
@@ -14109,7 +13632,7 @@
 </file>
 
 <file path=ppt/slides/slide20.xml><?xml version="1.0" encoding="utf-8"?>
-<p:sld xmlns:a="http://schemas.openxmlformats.org/drawingml/2006/main" xmlns:r="http://schemas.openxmlformats.org/officeDocument/2006/relationships" xmlns:p="http://schemas.openxmlformats.org/presentationml/2006/main">
+<p:sld xmlns:a="http://schemas.openxmlformats.org/drawingml/2006/main" xmlns:p="http://schemas.openxmlformats.org/presentationml/2006/main" xmlns:r="http://schemas.openxmlformats.org/officeDocument/2006/relationships">
   <p:cSld>
     <p:spTree>
       <p:nvGrpSpPr>
@@ -14117,14 +13640,7 @@
         <p:cNvGrpSpPr/>
         <p:nvPr/>
       </p:nvGrpSpPr>
-      <p:grpSpPr>
-        <a:xfrm>
-          <a:off x="0" y="0"/>
-          <a:ext cx="0" cy="0"/>
-          <a:chOff x="0" y="0"/>
-          <a:chExt cx="0" cy="0"/>
-        </a:xfrm>
-      </p:grpSpPr>
+      <p:grpSpPr/>
       <p:sp>
         <p:nvSpPr>
           <p:cNvPr id="2" name="Rectangle 1"/>
@@ -14165,7 +13681,6 @@
           <a:lstStyle/>
           <a:p>
             <a:pPr algn="ctr"/>
-            <a:endParaRPr/>
           </a:p>
         </p:txBody>
       </p:sp>
@@ -14279,7 +13794,6 @@
           <a:lstStyle/>
           <a:p>
             <a:pPr algn="ctr"/>
-            <a:endParaRPr/>
           </a:p>
         </p:txBody>
       </p:sp>
@@ -14362,7 +13876,7 @@
         <p:spPr>
           <a:xfrm>
             <a:off x="320040" y="1051560"/>
-            <a:ext cx="11548872" cy="502920"/>
+            <a:ext cx="11521440" cy="502920"/>
           </a:xfrm>
           <a:prstGeom prst="rect">
             <a:avLst/>
@@ -14393,7 +13907,6 @@
           <a:lstStyle/>
           <a:p>
             <a:pPr algn="ctr"/>
-            <a:endParaRPr/>
           </a:p>
         </p:txBody>
       </p:sp>
@@ -14427,7 +13940,7 @@
                 </a:solidFill>
                 <a:latin typeface="游ゴシック"/>
               </a:rPr>
-              <a:t>デフォルト: HI = 600.0°C ／ LO = 400.0°C ／ ヒステリシス = 5.0°C　※ EEPROM 保存・電源 OFF 後も保持</a:t>
+              <a:t>デフォルト: HI = 600.0°C ／ LO = 400.0°C ／ ヒステリシス = 5.0°C  ※ EEPROM 保存・電源 OFF 後も保持</a:t>
             </a:r>
           </a:p>
         </p:txBody>
@@ -14451,41 +13964,11 @@
                 <a:tableStyleId>{5C22544A-7EE6-4342-B048-85BDC9FD1C3A}</a:tableStyleId>
               </a:tblPr>
               <a:tblGrid>
-                <a:gridCol w="1371600">
-                  <a:extLst>
-                    <a:ext uri="{9D8B030D-6E8A-4147-A177-3AD203B41FA5}">
-                      <a16:colId xmlns:a16="http://schemas.microsoft.com/office/drawing/2014/main" val="20000"/>
-                    </a:ext>
-                  </a:extLst>
-                </a:gridCol>
-                <a:gridCol w="3200400">
-                  <a:extLst>
-                    <a:ext uri="{9D8B030D-6E8A-4147-A177-3AD203B41FA5}">
-                      <a16:colId xmlns:a16="http://schemas.microsoft.com/office/drawing/2014/main" val="20001"/>
-                    </a:ext>
-                  </a:extLst>
-                </a:gridCol>
-                <a:gridCol w="3200400">
-                  <a:extLst>
-                    <a:ext uri="{9D8B030D-6E8A-4147-A177-3AD203B41FA5}">
-                      <a16:colId xmlns:a16="http://schemas.microsoft.com/office/drawing/2014/main" val="20002"/>
-                    </a:ext>
-                  </a:extLst>
-                </a:gridCol>
-                <a:gridCol w="1554480">
-                  <a:extLst>
-                    <a:ext uri="{9D8B030D-6E8A-4147-A177-3AD203B41FA5}">
-                      <a16:colId xmlns:a16="http://schemas.microsoft.com/office/drawing/2014/main" val="20003"/>
-                    </a:ext>
-                  </a:extLst>
-                </a:gridCol>
-                <a:gridCol w="2194560">
-                  <a:extLst>
-                    <a:ext uri="{9D8B030D-6E8A-4147-A177-3AD203B41FA5}">
-                      <a16:colId xmlns:a16="http://schemas.microsoft.com/office/drawing/2014/main" val="20004"/>
-                    </a:ext>
-                  </a:extLst>
-                </a:gridCol>
+                <a:gridCol w="1371600"/>
+                <a:gridCol w="3200400"/>
+                <a:gridCol w="3200400"/>
+                <a:gridCol w="1554480"/>
+                <a:gridCol w="2194560"/>
               </a:tblGrid>
               <a:tr h="457200">
                 <a:tc>
@@ -14603,11 +14086,6 @@
                     </a:solidFill>
                   </a:tcPr>
                 </a:tc>
-                <a:extLst>
-                  <a:ext uri="{0D108BD9-81ED-4DB2-BD59-A6C34878D82A}">
-                    <a16:rowId xmlns:a16="http://schemas.microsoft.com/office/drawing/2014/main" val="10000"/>
-                  </a:ext>
-                </a:extLst>
               </a:tr>
               <a:tr h="457200">
                 <a:tc>
@@ -14725,11 +14203,6 @@
                     </a:solidFill>
                   </a:tcPr>
                 </a:tc>
-                <a:extLst>
-                  <a:ext uri="{0D108BD9-81ED-4DB2-BD59-A6C34878D82A}">
-                    <a16:rowId xmlns:a16="http://schemas.microsoft.com/office/drawing/2014/main" val="10001"/>
-                  </a:ext>
-                </a:extLst>
               </a:tr>
               <a:tr h="457200">
                 <a:tc>
@@ -14847,11 +14320,6 @@
                     </a:solidFill>
                   </a:tcPr>
                 </a:tc>
-                <a:extLst>
-                  <a:ext uri="{0D108BD9-81ED-4DB2-BD59-A6C34878D82A}">
-                    <a16:rowId xmlns:a16="http://schemas.microsoft.com/office/drawing/2014/main" val="10002"/>
-                  </a:ext>
-                </a:extLst>
               </a:tr>
               <a:tr h="457200">
                 <a:tc>
@@ -14969,11 +14437,6 @@
                     </a:solidFill>
                   </a:tcPr>
                 </a:tc>
-                <a:extLst>
-                  <a:ext uri="{0D108BD9-81ED-4DB2-BD59-A6C34878D82A}">
-                    <a16:rowId xmlns:a16="http://schemas.microsoft.com/office/drawing/2014/main" val="10003"/>
-                  </a:ext>
-                </a:extLst>
               </a:tr>
             </a:tbl>
           </a:graphicData>
@@ -15019,7 +14482,6 @@
           <a:lstStyle/>
           <a:p>
             <a:pPr algn="ctr"/>
-            <a:endParaRPr/>
           </a:p>
         </p:txBody>
       </p:sp>
@@ -15171,7 +14633,6 @@
           <a:lstStyle/>
           <a:p>
             <a:pPr algn="ctr"/>
-            <a:endParaRPr/>
           </a:p>
         </p:txBody>
       </p:sp>
@@ -15264,7 +14725,19 @@
                 </a:solidFill>
                 <a:latin typeface="游ゴシック"/>
               </a:rPr>
-              <a:t>・updateAlarmFlags() は独立関数 → ユニットテスト可能</a:t>
+              <a:t>・updateAlarmFlags() は独立関数</a:t>
+            </a:r>
+          </a:p>
+          <a:p>
+            <a:pPr algn="l"/>
+            <a:r>
+              <a:rPr sz="1200" b="0" i="0">
+                <a:solidFill>
+                  <a:srgbClr val="1A1A2E"/>
+                </a:solidFill>
+                <a:latin typeface="游ゴシック"/>
+              </a:rPr>
+              <a:t>  → ユニットテスト可能</a:t>
             </a:r>
           </a:p>
         </p:txBody>
@@ -15278,7 +14751,7 @@
 </file>
 
 <file path=ppt/slides/slide21.xml><?xml version="1.0" encoding="utf-8"?>
-<p:sld xmlns:a="http://schemas.openxmlformats.org/drawingml/2006/main" xmlns:r="http://schemas.openxmlformats.org/officeDocument/2006/relationships" xmlns:p="http://schemas.openxmlformats.org/presentationml/2006/main">
+<p:sld xmlns:a="http://schemas.openxmlformats.org/drawingml/2006/main" xmlns:p="http://schemas.openxmlformats.org/presentationml/2006/main" xmlns:r="http://schemas.openxmlformats.org/officeDocument/2006/relationships">
   <p:cSld>
     <p:spTree>
       <p:nvGrpSpPr>
@@ -15286,14 +14759,7 @@
         <p:cNvGrpSpPr/>
         <p:nvPr/>
       </p:nvGrpSpPr>
-      <p:grpSpPr>
-        <a:xfrm>
-          <a:off x="0" y="0"/>
-          <a:ext cx="0" cy="0"/>
-          <a:chOff x="0" y="0"/>
-          <a:chExt cx="0" cy="0"/>
-        </a:xfrm>
-      </p:grpSpPr>
+      <p:grpSpPr/>
       <p:sp>
         <p:nvSpPr>
           <p:cNvPr id="2" name="Rectangle 1"/>
@@ -15334,7 +14800,6 @@
           <a:lstStyle/>
           <a:p>
             <a:pPr algn="ctr"/>
-            <a:endParaRPr/>
           </a:p>
         </p:txBody>
       </p:sp>
@@ -15448,7 +14913,6 @@
           <a:lstStyle/>
           <a:p>
             <a:pPr algn="ctr"/>
-            <a:endParaRPr/>
           </a:p>
         </p:txBody>
       </p:sp>
@@ -15541,34 +15005,10 @@
                 <a:tableStyleId>{5C22544A-7EE6-4342-B048-85BDC9FD1C3A}</a:tableStyleId>
               </a:tblPr>
               <a:tblGrid>
-                <a:gridCol w="457200">
-                  <a:extLst>
-                    <a:ext uri="{9D8B030D-6E8A-4147-A177-3AD203B41FA5}">
-                      <a16:colId xmlns:a16="http://schemas.microsoft.com/office/drawing/2014/main" val="20000"/>
-                    </a:ext>
-                  </a:extLst>
-                </a:gridCol>
-                <a:gridCol w="3200400">
-                  <a:extLst>
-                    <a:ext uri="{9D8B030D-6E8A-4147-A177-3AD203B41FA5}">
-                      <a16:colId xmlns:a16="http://schemas.microsoft.com/office/drawing/2014/main" val="20001"/>
-                    </a:ext>
-                  </a:extLst>
-                </a:gridCol>
-                <a:gridCol w="3200400">
-                  <a:extLst>
-                    <a:ext uri="{9D8B030D-6E8A-4147-A177-3AD203B41FA5}">
-                      <a16:colId xmlns:a16="http://schemas.microsoft.com/office/drawing/2014/main" val="20002"/>
-                    </a:ext>
-                  </a:extLst>
-                </a:gridCol>
-                <a:gridCol w="4663440">
-                  <a:extLst>
-                    <a:ext uri="{9D8B030D-6E8A-4147-A177-3AD203B41FA5}">
-                      <a16:colId xmlns:a16="http://schemas.microsoft.com/office/drawing/2014/main" val="20003"/>
-                    </a:ext>
-                  </a:extLst>
-                </a:gridCol>
+                <a:gridCol w="457200"/>
+                <a:gridCol w="3200400"/>
+                <a:gridCol w="3200400"/>
+                <a:gridCol w="4663440"/>
               </a:tblGrid>
               <a:tr h="457200">
                 <a:tc>
@@ -15663,11 +15103,6 @@
                     </a:solidFill>
                   </a:tcPr>
                 </a:tc>
-                <a:extLst>
-                  <a:ext uri="{0D108BD9-81ED-4DB2-BD59-A6C34878D82A}">
-                    <a16:rowId xmlns:a16="http://schemas.microsoft.com/office/drawing/2014/main" val="10000"/>
-                  </a:ext>
-                </a:extLst>
               </a:tr>
               <a:tr h="457200">
                 <a:tc>
@@ -15762,11 +15197,6 @@
                     </a:solidFill>
                   </a:tcPr>
                 </a:tc>
-                <a:extLst>
-                  <a:ext uri="{0D108BD9-81ED-4DB2-BD59-A6C34878D82A}">
-                    <a16:rowId xmlns:a16="http://schemas.microsoft.com/office/drawing/2014/main" val="10001"/>
-                  </a:ext>
-                </a:extLst>
               </a:tr>
               <a:tr h="457200">
                 <a:tc>
@@ -15861,11 +15291,6 @@
                     </a:solidFill>
                   </a:tcPr>
                 </a:tc>
-                <a:extLst>
-                  <a:ext uri="{0D108BD9-81ED-4DB2-BD59-A6C34878D82A}">
-                    <a16:rowId xmlns:a16="http://schemas.microsoft.com/office/drawing/2014/main" val="10002"/>
-                  </a:ext>
-                </a:extLst>
               </a:tr>
               <a:tr h="457200">
                 <a:tc>
@@ -15960,11 +15385,6 @@
                     </a:solidFill>
                   </a:tcPr>
                 </a:tc>
-                <a:extLst>
-                  <a:ext uri="{0D108BD9-81ED-4DB2-BD59-A6C34878D82A}">
-                    <a16:rowId xmlns:a16="http://schemas.microsoft.com/office/drawing/2014/main" val="10003"/>
-                  </a:ext>
-                </a:extLst>
               </a:tr>
               <a:tr h="457200">
                 <a:tc>
@@ -16059,11 +15479,6 @@
                     </a:solidFill>
                   </a:tcPr>
                 </a:tc>
-                <a:extLst>
-                  <a:ext uri="{0D108BD9-81ED-4DB2-BD59-A6C34878D82A}">
-                    <a16:rowId xmlns:a16="http://schemas.microsoft.com/office/drawing/2014/main" val="10004"/>
-                  </a:ext>
-                </a:extLst>
               </a:tr>
               <a:tr h="457200">
                 <a:tc>
@@ -16158,11 +15573,6 @@
                     </a:solidFill>
                   </a:tcPr>
                 </a:tc>
-                <a:extLst>
-                  <a:ext uri="{0D108BD9-81ED-4DB2-BD59-A6C34878D82A}">
-                    <a16:rowId xmlns:a16="http://schemas.microsoft.com/office/drawing/2014/main" val="10005"/>
-                  </a:ext>
-                </a:extLst>
               </a:tr>
             </a:tbl>
           </a:graphicData>
@@ -16176,8 +15586,8 @@
         </p:nvSpPr>
         <p:spPr>
           <a:xfrm>
-            <a:off x="320040" y="3931920"/>
-            <a:ext cx="11548872" cy="640080"/>
+            <a:off x="320040" y="5349240"/>
+            <a:ext cx="11521440" cy="640080"/>
           </a:xfrm>
           <a:prstGeom prst="rect">
             <a:avLst/>
@@ -16208,7 +15618,6 @@
           <a:lstStyle/>
           <a:p>
             <a:pPr algn="ctr"/>
-            <a:endParaRPr/>
           </a:p>
         </p:txBody>
       </p:sp>
@@ -16220,7 +15629,7 @@
         </p:nvSpPr>
         <p:spPr>
           <a:xfrm>
-            <a:off x="502920" y="3995928"/>
+            <a:off x="502920" y="5422392"/>
             <a:ext cx="11155680" cy="530352"/>
           </a:xfrm>
           <a:prstGeom prst="rect">
@@ -16256,7 +15665,7 @@
 </file>
 
 <file path=ppt/slides/slide22.xml><?xml version="1.0" encoding="utf-8"?>
-<p:sld xmlns:a="http://schemas.openxmlformats.org/drawingml/2006/main" xmlns:r="http://schemas.openxmlformats.org/officeDocument/2006/relationships" xmlns:p="http://schemas.openxmlformats.org/presentationml/2006/main">
+<p:sld xmlns:a="http://schemas.openxmlformats.org/drawingml/2006/main" xmlns:p="http://schemas.openxmlformats.org/presentationml/2006/main" xmlns:r="http://schemas.openxmlformats.org/officeDocument/2006/relationships">
   <p:cSld>
     <p:spTree>
       <p:nvGrpSpPr>
@@ -16264,14 +15673,7 @@
         <p:cNvGrpSpPr/>
         <p:nvPr/>
       </p:nvGrpSpPr>
-      <p:grpSpPr>
-        <a:xfrm>
-          <a:off x="0" y="0"/>
-          <a:ext cx="0" cy="0"/>
-          <a:chOff x="0" y="0"/>
-          <a:chExt cx="0" cy="0"/>
-        </a:xfrm>
-      </p:grpSpPr>
+      <p:grpSpPr/>
       <p:sp>
         <p:nvSpPr>
           <p:cNvPr id="2" name="Rectangle 1"/>
@@ -16312,7 +15714,6 @@
           <a:lstStyle/>
           <a:p>
             <a:pPr algn="ctr"/>
-            <a:endParaRPr/>
           </a:p>
         </p:txBody>
       </p:sp>
@@ -16426,7 +15827,6 @@
           <a:lstStyle/>
           <a:p>
             <a:pPr algn="ctr"/>
-            <a:endParaRPr/>
           </a:p>
         </p:txBody>
       </p:sp>
@@ -16508,8 +15908,8 @@
         </p:nvSpPr>
         <p:spPr>
           <a:xfrm>
-            <a:off x="320040" y="1005840"/>
-            <a:ext cx="11548872" cy="411480"/>
+            <a:off x="320040" y="1051560"/>
+            <a:ext cx="11521440" cy="411480"/>
           </a:xfrm>
           <a:prstGeom prst="rect">
             <a:avLst/>
@@ -16554,34 +15954,10 @@
                 <a:tableStyleId>{5C22544A-7EE6-4342-B048-85BDC9FD1C3A}</a:tableStyleId>
               </a:tblPr>
               <a:tblGrid>
-                <a:gridCol w="1645920">
-                  <a:extLst>
-                    <a:ext uri="{9D8B030D-6E8A-4147-A177-3AD203B41FA5}">
-                      <a16:colId xmlns:a16="http://schemas.microsoft.com/office/drawing/2014/main" val="20000"/>
-                    </a:ext>
-                  </a:extLst>
-                </a:gridCol>
-                <a:gridCol w="4114800">
-                  <a:extLst>
-                    <a:ext uri="{9D8B030D-6E8A-4147-A177-3AD203B41FA5}">
-                      <a16:colId xmlns:a16="http://schemas.microsoft.com/office/drawing/2014/main" val="20001"/>
-                    </a:ext>
-                  </a:extLst>
-                </a:gridCol>
-                <a:gridCol w="685800">
-                  <a:extLst>
-                    <a:ext uri="{9D8B030D-6E8A-4147-A177-3AD203B41FA5}">
-                      <a16:colId xmlns:a16="http://schemas.microsoft.com/office/drawing/2014/main" val="20002"/>
-                    </a:ext>
-                  </a:extLst>
-                </a:gridCol>
-                <a:gridCol w="1783080">
-                  <a:extLst>
-                    <a:ext uri="{9D8B030D-6E8A-4147-A177-3AD203B41FA5}">
-                      <a16:colId xmlns:a16="http://schemas.microsoft.com/office/drawing/2014/main" val="20003"/>
-                    </a:ext>
-                  </a:extLst>
-                </a:gridCol>
+                <a:gridCol w="1645920"/>
+                <a:gridCol w="4114800"/>
+                <a:gridCol w="685800"/>
+                <a:gridCol w="1783080"/>
               </a:tblGrid>
               <a:tr h="420624">
                 <a:tc>
@@ -16676,11 +16052,6 @@
                     </a:solidFill>
                   </a:tcPr>
                 </a:tc>
-                <a:extLst>
-                  <a:ext uri="{0D108BD9-81ED-4DB2-BD59-A6C34878D82A}">
-                    <a16:rowId xmlns:a16="http://schemas.microsoft.com/office/drawing/2014/main" val="10000"/>
-                  </a:ext>
-                </a:extLst>
               </a:tr>
               <a:tr h="420624">
                 <a:tc>
@@ -16775,11 +16146,6 @@
                     </a:solidFill>
                   </a:tcPr>
                 </a:tc>
-                <a:extLst>
-                  <a:ext uri="{0D108BD9-81ED-4DB2-BD59-A6C34878D82A}">
-                    <a16:rowId xmlns:a16="http://schemas.microsoft.com/office/drawing/2014/main" val="10001"/>
-                  </a:ext>
-                </a:extLst>
               </a:tr>
               <a:tr h="420624">
                 <a:tc>
@@ -16874,11 +16240,6 @@
                     </a:solidFill>
                   </a:tcPr>
                 </a:tc>
-                <a:extLst>
-                  <a:ext uri="{0D108BD9-81ED-4DB2-BD59-A6C34878D82A}">
-                    <a16:rowId xmlns:a16="http://schemas.microsoft.com/office/drawing/2014/main" val="10002"/>
-                  </a:ext>
-                </a:extLst>
               </a:tr>
               <a:tr h="420624">
                 <a:tc>
@@ -16973,11 +16334,6 @@
                     </a:solidFill>
                   </a:tcPr>
                 </a:tc>
-                <a:extLst>
-                  <a:ext uri="{0D108BD9-81ED-4DB2-BD59-A6C34878D82A}">
-                    <a16:rowId xmlns:a16="http://schemas.microsoft.com/office/drawing/2014/main" val="10003"/>
-                  </a:ext>
-                </a:extLst>
               </a:tr>
               <a:tr h="420624">
                 <a:tc>
@@ -17072,11 +16428,6 @@
                     </a:solidFill>
                   </a:tcPr>
                 </a:tc>
-                <a:extLst>
-                  <a:ext uri="{0D108BD9-81ED-4DB2-BD59-A6C34878D82A}">
-                    <a16:rowId xmlns:a16="http://schemas.microsoft.com/office/drawing/2014/main" val="10004"/>
-                  </a:ext>
-                </a:extLst>
               </a:tr>
               <a:tr h="420624">
                 <a:tc>
@@ -17171,11 +16522,6 @@
                     </a:solidFill>
                   </a:tcPr>
                 </a:tc>
-                <a:extLst>
-                  <a:ext uri="{0D108BD9-81ED-4DB2-BD59-A6C34878D82A}">
-                    <a16:rowId xmlns:a16="http://schemas.microsoft.com/office/drawing/2014/main" val="10005"/>
-                  </a:ext>
-                </a:extLst>
               </a:tr>
               <a:tr h="420624">
                 <a:tc>
@@ -17214,7 +16560,7 @@
                           </a:solidFill>
                           <a:latin typeface="游ゴシック"/>
                         </a:rPr>
-                        <a:t>NaN データ行の NaN 文字列出力</a:t>
+                        <a:t>NaN データ行の "NaN" 文字列出力</a:t>
                       </a:r>
                     </a:p>
                   </a:txBody>
@@ -17270,11 +16616,6 @@
                     </a:solidFill>
                   </a:tcPr>
                 </a:tc>
-                <a:extLst>
-                  <a:ext uri="{0D108BD9-81ED-4DB2-BD59-A6C34878D82A}">
-                    <a16:rowId xmlns:a16="http://schemas.microsoft.com/office/drawing/2014/main" val="10006"/>
-                  </a:ext>
-                </a:extLst>
               </a:tr>
               <a:tr h="420624">
                 <a:tc>
@@ -17369,11 +16710,6 @@
                     </a:solidFill>
                   </a:tcPr>
                 </a:tc>
-                <a:extLst>
-                  <a:ext uri="{0D108BD9-81ED-4DB2-BD59-A6C34878D82A}">
-                    <a16:rowId xmlns:a16="http://schemas.microsoft.com/office/drawing/2014/main" val="10007"/>
-                  </a:ext>
-                </a:extLst>
               </a:tr>
             </a:tbl>
           </a:graphicData>
@@ -17419,7 +16755,6 @@
           <a:lstStyle/>
           <a:p>
             <a:pPr algn="ctr"/>
-            <a:endParaRPr/>
           </a:p>
         </p:txBody>
       </p:sp>
@@ -17502,7 +16837,7 @@
 </file>
 
 <file path=ppt/slides/slide23.xml><?xml version="1.0" encoding="utf-8"?>
-<p:sld xmlns:a="http://schemas.openxmlformats.org/drawingml/2006/main" xmlns:r="http://schemas.openxmlformats.org/officeDocument/2006/relationships" xmlns:p="http://schemas.openxmlformats.org/presentationml/2006/main">
+<p:sld xmlns:a="http://schemas.openxmlformats.org/drawingml/2006/main" xmlns:p="http://schemas.openxmlformats.org/presentationml/2006/main" xmlns:r="http://schemas.openxmlformats.org/officeDocument/2006/relationships">
   <p:cSld>
     <p:spTree>
       <p:nvGrpSpPr>
@@ -17510,14 +16845,7 @@
         <p:cNvGrpSpPr/>
         <p:nvPr/>
       </p:nvGrpSpPr>
-      <p:grpSpPr>
-        <a:xfrm>
-          <a:off x="0" y="0"/>
-          <a:ext cx="0" cy="0"/>
-          <a:chOff x="0" y="0"/>
-          <a:chExt cx="0" cy="0"/>
-        </a:xfrm>
-      </p:grpSpPr>
+      <p:grpSpPr/>
       <p:sp>
         <p:nvSpPr>
           <p:cNvPr id="2" name="Rectangle 1"/>
@@ -17558,7 +16886,6 @@
           <a:lstStyle/>
           <a:p>
             <a:pPr algn="ctr"/>
-            <a:endParaRPr/>
           </a:p>
         </p:txBody>
       </p:sp>
@@ -17672,7 +16999,6 @@
           <a:lstStyle/>
           <a:p>
             <a:pPr algn="ctr"/>
-            <a:endParaRPr/>
           </a:p>
         </p:txBody>
       </p:sp>
@@ -17755,7 +17081,7 @@
         <p:spPr>
           <a:xfrm>
             <a:off x="320040" y="1051560"/>
-            <a:ext cx="11548872" cy="2194560"/>
+            <a:ext cx="11521440" cy="2194560"/>
           </a:xfrm>
           <a:prstGeom prst="rect">
             <a:avLst/>
@@ -17786,7 +17112,6 @@
           <a:lstStyle/>
           <a:p>
             <a:pPr algn="ctr"/>
-            <a:endParaRPr/>
           </a:p>
         </p:txBody>
       </p:sp>
@@ -17950,7 +17275,6 @@
           <a:lstStyle/>
           <a:p>
             <a:pPr algn="ctr"/>
-            <a:endParaRPr/>
           </a:p>
         </p:txBody>
       </p:sp>
@@ -18102,7 +17426,6 @@
           <a:lstStyle/>
           <a:p>
             <a:pPr algn="ctr"/>
-            <a:endParaRPr/>
           </a:p>
         </p:txBody>
       </p:sp>
@@ -18221,7 +17544,7 @@
 </file>
 
 <file path=ppt/slides/slide3.xml><?xml version="1.0" encoding="utf-8"?>
-<p:sld xmlns:a="http://schemas.openxmlformats.org/drawingml/2006/main" xmlns:r="http://schemas.openxmlformats.org/officeDocument/2006/relationships" xmlns:p="http://schemas.openxmlformats.org/presentationml/2006/main">
+<p:sld xmlns:a="http://schemas.openxmlformats.org/drawingml/2006/main" xmlns:p="http://schemas.openxmlformats.org/presentationml/2006/main" xmlns:r="http://schemas.openxmlformats.org/officeDocument/2006/relationships">
   <p:cSld>
     <p:spTree>
       <p:nvGrpSpPr>
@@ -18229,14 +17552,7 @@
         <p:cNvGrpSpPr/>
         <p:nvPr/>
       </p:nvGrpSpPr>
-      <p:grpSpPr>
-        <a:xfrm>
-          <a:off x="0" y="0"/>
-          <a:ext cx="0" cy="0"/>
-          <a:chOff x="0" y="0"/>
-          <a:chExt cx="0" cy="0"/>
-        </a:xfrm>
-      </p:grpSpPr>
+      <p:grpSpPr/>
       <p:sp>
         <p:nvSpPr>
           <p:cNvPr id="2" name="Rectangle 1"/>
@@ -18277,7 +17593,6 @@
           <a:lstStyle/>
           <a:p>
             <a:pPr algn="ctr"/>
-            <a:endParaRPr/>
           </a:p>
         </p:txBody>
       </p:sp>
@@ -18391,7 +17706,6 @@
           <a:lstStyle/>
           <a:p>
             <a:pPr algn="ctr"/>
-            <a:endParaRPr/>
           </a:p>
         </p:txBody>
       </p:sp>
@@ -18474,7 +17788,7 @@
         <p:spPr>
           <a:xfrm>
             <a:off x="320040" y="1005840"/>
-            <a:ext cx="11548872" cy="1463040"/>
+            <a:ext cx="11521440" cy="1463040"/>
           </a:xfrm>
           <a:prstGeom prst="rect">
             <a:avLst/>
@@ -18505,7 +17819,6 @@
           <a:lstStyle/>
           <a:p>
             <a:pPr algn="ctr"/>
-            <a:endParaRPr/>
           </a:p>
         </p:txBody>
       </p:sp>
@@ -18551,7 +17864,7 @@
                 </a:solidFill>
                 <a:latin typeface="游ゴシック"/>
               </a:rPr>
-              <a:t>・既製品は機能過多・高価。M5Stack Basic V2.7 + MAX31855 で必要最小限のツールを自作</a:t>
+              <a:t>・既製品は機能過多・高価。M5Stack + MAX31855 で必要最小限のツールを自作</a:t>
             </a:r>
           </a:p>
           <a:p>
@@ -18610,7 +17923,6 @@
           <a:lstStyle/>
           <a:p>
             <a:pPr algn="ctr"/>
-            <a:endParaRPr/>
           </a:p>
         </p:txBody>
       </p:sp>
@@ -18750,7 +18062,6 @@
           <a:lstStyle/>
           <a:p>
             <a:pPr algn="ctr"/>
-            <a:endParaRPr/>
           </a:p>
         </p:txBody>
       </p:sp>
@@ -18857,7 +18168,7 @@
 </file>
 
 <file path=ppt/slides/slide4.xml><?xml version="1.0" encoding="utf-8"?>
-<p:sld xmlns:a="http://schemas.openxmlformats.org/drawingml/2006/main" xmlns:r="http://schemas.openxmlformats.org/officeDocument/2006/relationships" xmlns:p="http://schemas.openxmlformats.org/presentationml/2006/main">
+<p:sld xmlns:a="http://schemas.openxmlformats.org/drawingml/2006/main" xmlns:p="http://schemas.openxmlformats.org/presentationml/2006/main" xmlns:r="http://schemas.openxmlformats.org/officeDocument/2006/relationships">
   <p:cSld>
     <p:spTree>
       <p:nvGrpSpPr>
@@ -18865,14 +18176,7 @@
         <p:cNvGrpSpPr/>
         <p:nvPr/>
       </p:nvGrpSpPr>
-      <p:grpSpPr>
-        <a:xfrm>
-          <a:off x="0" y="0"/>
-          <a:ext cx="0" cy="0"/>
-          <a:chOff x="0" y="0"/>
-          <a:chExt cx="0" cy="0"/>
-        </a:xfrm>
-      </p:grpSpPr>
+      <p:grpSpPr/>
       <p:sp>
         <p:nvSpPr>
           <p:cNvPr id="2" name="Rectangle 1"/>
@@ -18913,7 +18217,6 @@
           <a:lstStyle/>
           <a:p>
             <a:pPr algn="ctr"/>
-            <a:endParaRPr/>
           </a:p>
         </p:txBody>
       </p:sp>
@@ -19027,7 +18330,6 @@
           <a:lstStyle/>
           <a:p>
             <a:pPr algn="ctr"/>
-            <a:endParaRPr/>
           </a:p>
         </p:txBody>
       </p:sp>
@@ -19110,7 +18412,7 @@
         <p:spPr>
           <a:xfrm>
             <a:off x="320040" y="1005840"/>
-            <a:ext cx="5303520" cy="365760"/>
+            <a:ext cx="5303520" cy="320040"/>
           </a:xfrm>
           <a:prstGeom prst="rect">
             <a:avLst/>
@@ -19146,7 +18448,7 @@
         </p:nvGraphicFramePr>
         <p:xfrm>
           <a:off x="320040" y="1371600"/>
-          <a:ext cx="5303520" cy="2926080"/>
+          <a:ext cx="5303520" cy="2560320"/>
         </p:xfrm>
         <a:graphic>
           <a:graphicData uri="http://schemas.openxmlformats.org/drawingml/2006/table">
@@ -19155,27 +18457,9 @@
                 <a:tableStyleId>{5C22544A-7EE6-4342-B048-85BDC9FD1C3A}</a:tableStyleId>
               </a:tblPr>
               <a:tblGrid>
-                <a:gridCol w="2468880">
-                  <a:extLst>
-                    <a:ext uri="{9D8B030D-6E8A-4147-A177-3AD203B41FA5}">
-                      <a16:colId xmlns:a16="http://schemas.microsoft.com/office/drawing/2014/main" val="20000"/>
-                    </a:ext>
-                  </a:extLst>
-                </a:gridCol>
-                <a:gridCol w="1554480">
-                  <a:extLst>
-                    <a:ext uri="{9D8B030D-6E8A-4147-A177-3AD203B41FA5}">
-                      <a16:colId xmlns:a16="http://schemas.microsoft.com/office/drawing/2014/main" val="20001"/>
-                    </a:ext>
-                  </a:extLst>
-                </a:gridCol>
-                <a:gridCol w="1280160">
-                  <a:extLst>
-                    <a:ext uri="{9D8B030D-6E8A-4147-A177-3AD203B41FA5}">
-                      <a16:colId xmlns:a16="http://schemas.microsoft.com/office/drawing/2014/main" val="20002"/>
-                    </a:ext>
-                  </a:extLst>
-                </a:gridCol>
+                <a:gridCol w="2651760"/>
+                <a:gridCol w="1371600"/>
+                <a:gridCol w="1280160"/>
               </a:tblGrid>
               <a:tr h="365760">
                 <a:tc>
@@ -19214,7 +18498,7 @@
                           </a:solidFill>
                           <a:latin typeface="Segoe UI"/>
                         </a:rPr>
-                        <a:t>購入先</a:t>
+                        <a:t>購入先目安</a:t>
                       </a:r>
                     </a:p>
                   </a:txBody>
@@ -19247,11 +18531,6 @@
                     </a:solidFill>
                   </a:tcPr>
                 </a:tc>
-                <a:extLst>
-                  <a:ext uri="{0D108BD9-81ED-4DB2-BD59-A6C34878D82A}">
-                    <a16:rowId xmlns:a16="http://schemas.microsoft.com/office/drawing/2014/main" val="10000"/>
-                  </a:ext>
-                </a:extLst>
               </a:tr>
               <a:tr h="365760">
                 <a:tc>
@@ -19323,11 +18602,6 @@
                     </a:solidFill>
                   </a:tcPr>
                 </a:tc>
-                <a:extLst>
-                  <a:ext uri="{0D108BD9-81ED-4DB2-BD59-A6C34878D82A}">
-                    <a16:rowId xmlns:a16="http://schemas.microsoft.com/office/drawing/2014/main" val="10001"/>
-                  </a:ext>
-                </a:extLst>
               </a:tr>
               <a:tr h="365760">
                 <a:tc>
@@ -19343,7 +18617,7 @@
                           </a:solidFill>
                           <a:latin typeface="游ゴシック"/>
                         </a:rPr>
-                        <a:t>M5Stack Proto Module</a:t>
+                        <a:t>MAX31855 ブレークアウト</a:t>
                       </a:r>
                     </a:p>
                   </a:txBody>
@@ -19366,7 +18640,7 @@
                           </a:solidFill>
                           <a:latin typeface="游ゴシック"/>
                         </a:rPr>
-                        <a:t>Amazon</a:t>
+                        <a:t>秋月電子</a:t>
                       </a:r>
                     </a:p>
                   </a:txBody>
@@ -19389,7 +18663,7 @@
                           </a:solidFill>
                           <a:latin typeface="游ゴシック"/>
                         </a:rPr>
-                        <a:t>¥1,198</a:t>
+                        <a:t>¥980</a:t>
                       </a:r>
                     </a:p>
                   </a:txBody>
@@ -19399,11 +18673,6 @@
                     </a:solidFill>
                   </a:tcPr>
                 </a:tc>
-                <a:extLst>
-                  <a:ext uri="{0D108BD9-81ED-4DB2-BD59-A6C34878D82A}">
-                    <a16:rowId xmlns:a16="http://schemas.microsoft.com/office/drawing/2014/main" val="10002"/>
-                  </a:ext>
-                </a:extLst>
               </a:tr>
               <a:tr h="365760">
                 <a:tc>
@@ -19413,29 +18682,14 @@
                     <a:p>
                       <a:pPr algn="l"/>
                       <a:r>
-                        <a:rPr sz="1200" b="0" dirty="0">
-                          <a:solidFill>
-                            <a:srgbClr val="1A1A2E"/>
-                          </a:solidFill>
-                          <a:latin typeface="游ゴシック"/>
-                        </a:rPr>
-                        <a:t>MAX31855 </a:t>
-                      </a:r>
-                      <a:r>
-                        <a:rPr sz="1200" b="0" dirty="0" err="1">
-                          <a:solidFill>
-                            <a:srgbClr val="1A1A2E"/>
-                          </a:solidFill>
-                          <a:latin typeface="游ゴシック"/>
-                        </a:rPr>
-                        <a:t>モジュール</a:t>
-                      </a:r>
-                      <a:endParaRPr sz="1200" b="0" dirty="0">
-                        <a:solidFill>
-                          <a:srgbClr val="1A1A2E"/>
-                        </a:solidFill>
-                        <a:latin typeface="游ゴシック"/>
-                      </a:endParaRPr>
+                        <a:rPr sz="1200" b="0">
+                          <a:solidFill>
+                            <a:srgbClr val="1A1A2E"/>
+                          </a:solidFill>
+                          <a:latin typeface="游ゴシック"/>
+                        </a:rPr>
+                        <a:t>K型熱電対 (1m)</a:t>
+                      </a:r>
                     </a:p>
                   </a:txBody>
                   <a:tcPr>
@@ -19451,13 +18705,13 @@
                     <a:p>
                       <a:pPr algn="l"/>
                       <a:r>
-                        <a:rPr sz="1200" b="0" dirty="0">
-                          <a:solidFill>
-                            <a:srgbClr val="1A1A2E"/>
-                          </a:solidFill>
-                          <a:latin typeface="游ゴシック"/>
-                        </a:rPr>
-                        <a:t>Amazon</a:t>
+                        <a:rPr sz="1200" b="0">
+                          <a:solidFill>
+                            <a:srgbClr val="1A1A2E"/>
+                          </a:solidFill>
+                          <a:latin typeface="游ゴシック"/>
+                        </a:rPr>
+                        <a:t>Amazon 等</a:t>
                       </a:r>
                     </a:p>
                   </a:txBody>
@@ -19480,7 +18734,7 @@
                           </a:solidFill>
                           <a:latin typeface="游ゴシック"/>
                         </a:rPr>
-                        <a:t>¥904</a:t>
+                        <a:t>¥700</a:t>
                       </a:r>
                     </a:p>
                   </a:txBody>
@@ -19490,11 +18744,6 @@
                     </a:solidFill>
                   </a:tcPr>
                 </a:tc>
-                <a:extLst>
-                  <a:ext uri="{0D108BD9-81ED-4DB2-BD59-A6C34878D82A}">
-                    <a16:rowId xmlns:a16="http://schemas.microsoft.com/office/drawing/2014/main" val="10003"/>
-                  </a:ext>
-                </a:extLst>
               </a:tr>
               <a:tr h="365760">
                 <a:tc>
@@ -19510,7 +18759,7 @@
                           </a:solidFill>
                           <a:latin typeface="游ゴシック"/>
                         </a:rPr>
-                        <a:t>K型熱電対 600℃対応</a:t>
+                        <a:t>MicroSD (16GB)</a:t>
                       </a:r>
                     </a:p>
                   </a:txBody>
@@ -19533,7 +18782,7 @@
                           </a:solidFill>
                           <a:latin typeface="游ゴシック"/>
                         </a:rPr>
-                        <a:t>MISUMI</a:t>
+                        <a:t>量販店</a:t>
                       </a:r>
                     </a:p>
                   </a:txBody>
@@ -19556,7 +18805,7 @@
                           </a:solidFill>
                           <a:latin typeface="游ゴシック"/>
                         </a:rPr>
-                        <a:t>¥5,290</a:t>
+                        <a:t>¥600</a:t>
                       </a:r>
                     </a:p>
                   </a:txBody>
@@ -19566,11 +18815,6 @@
                     </a:solidFill>
                   </a:tcPr>
                 </a:tc>
-                <a:extLst>
-                  <a:ext uri="{0D108BD9-81ED-4DB2-BD59-A6C34878D82A}">
-                    <a16:rowId xmlns:a16="http://schemas.microsoft.com/office/drawing/2014/main" val="10004"/>
-                  </a:ext>
-                </a:extLst>
               </a:tr>
               <a:tr h="365760">
                 <a:tc>
@@ -19586,7 +18830,7 @@
                           </a:solidFill>
                           <a:latin typeface="游ゴシック"/>
                         </a:rPr>
-                        <a:t>ジャンパワイヤ（オス-メス）</a:t>
+                        <a:t>ジャンパワイヤ</a:t>
                       </a:r>
                     </a:p>
                   </a:txBody>
@@ -19609,7 +18853,7 @@
                           </a:solidFill>
                           <a:latin typeface="游ゴシック"/>
                         </a:rPr>
-                        <a:t>Amazon</a:t>
+                        <a:t>秋月電子</a:t>
                       </a:r>
                     </a:p>
                   </a:txBody>
@@ -19632,7 +18876,7 @@
                           </a:solidFill>
                           <a:latin typeface="游ゴシック"/>
                         </a:rPr>
-                        <a:t>¥700</a:t>
+                        <a:t>¥200</a:t>
                       </a:r>
                     </a:p>
                   </a:txBody>
@@ -19642,11 +18886,6 @@
                     </a:solidFill>
                   </a:tcPr>
                 </a:tc>
-                <a:extLst>
-                  <a:ext uri="{0D108BD9-81ED-4DB2-BD59-A6C34878D82A}">
-                    <a16:rowId xmlns:a16="http://schemas.microsoft.com/office/drawing/2014/main" val="10005"/>
-                  </a:ext>
-                </a:extLst>
               </a:tr>
               <a:tr h="365760">
                 <a:tc>
@@ -19656,82 +18895,6 @@
                     <a:p>
                       <a:pPr algn="l"/>
                       <a:r>
-                        <a:rPr sz="1200" b="0">
-                          <a:solidFill>
-                            <a:srgbClr val="1A1A2E"/>
-                          </a:solidFill>
-                          <a:latin typeface="游ゴシック"/>
-                        </a:rPr>
-                        <a:t>MicroSD カード</a:t>
-                      </a:r>
-                    </a:p>
-                  </a:txBody>
-                  <a:tcPr>
-                    <a:solidFill>
-                      <a:srgbClr val="F4F4F4"/>
-                    </a:solidFill>
-                  </a:tcPr>
-                </a:tc>
-                <a:tc>
-                  <a:txBody>
-                    <a:bodyPr/>
-                    <a:lstStyle/>
-                    <a:p>
-                      <a:pPr algn="l"/>
-                      <a:r>
-                        <a:rPr sz="1200" b="0">
-                          <a:solidFill>
-                            <a:srgbClr val="1A1A2E"/>
-                          </a:solidFill>
-                          <a:latin typeface="游ゴシック"/>
-                        </a:rPr>
-                        <a:t>Amazon</a:t>
-                      </a:r>
-                    </a:p>
-                  </a:txBody>
-                  <a:tcPr>
-                    <a:solidFill>
-                      <a:srgbClr val="F4F4F4"/>
-                    </a:solidFill>
-                  </a:tcPr>
-                </a:tc>
-                <a:tc>
-                  <a:txBody>
-                    <a:bodyPr/>
-                    <a:lstStyle/>
-                    <a:p>
-                      <a:pPr algn="l"/>
-                      <a:r>
-                        <a:rPr sz="1200" b="0">
-                          <a:solidFill>
-                            <a:srgbClr val="1A1A2E"/>
-                          </a:solidFill>
-                          <a:latin typeface="游ゴシック"/>
-                        </a:rPr>
-                        <a:t>〜¥1,000</a:t>
-                      </a:r>
-                    </a:p>
-                  </a:txBody>
-                  <a:tcPr>
-                    <a:solidFill>
-                      <a:srgbClr val="F4F4F4"/>
-                    </a:solidFill>
-                  </a:tcPr>
-                </a:tc>
-                <a:extLst>
-                  <a:ext uri="{0D108BD9-81ED-4DB2-BD59-A6C34878D82A}">
-                    <a16:rowId xmlns:a16="http://schemas.microsoft.com/office/drawing/2014/main" val="10006"/>
-                  </a:ext>
-                </a:extLst>
-              </a:tr>
-              <a:tr h="365760">
-                <a:tc>
-                  <a:txBody>
-                    <a:bodyPr/>
-                    <a:lstStyle/>
-                    <a:p>
-                      <a:pPr algn="l"/>
-                      <a:r>
                         <a:rPr sz="1200" b="1">
                           <a:solidFill>
                             <a:srgbClr val="FFFFFF"/>
@@ -19778,13 +18941,13 @@
                     <a:p>
                       <a:pPr algn="l"/>
                       <a:r>
-                        <a:rPr sz="1200" b="1" dirty="0">
+                        <a:rPr sz="1200" b="1">
                           <a:solidFill>
                             <a:srgbClr val="FFFFFF"/>
                           </a:solidFill>
                           <a:latin typeface="游ゴシック"/>
                         </a:rPr>
-                        <a:t>約¥17,082</a:t>
+                        <a:t>¥9,570</a:t>
                       </a:r>
                     </a:p>
                   </a:txBody>
@@ -19794,11 +18957,6 @@
                     </a:solidFill>
                   </a:tcPr>
                 </a:tc>
-                <a:extLst>
-                  <a:ext uri="{0D108BD9-81ED-4DB2-BD59-A6C34878D82A}">
-                    <a16:rowId xmlns:a16="http://schemas.microsoft.com/office/drawing/2014/main" val="10007"/>
-                  </a:ext>
-                </a:extLst>
               </a:tr>
             </a:tbl>
           </a:graphicData>
@@ -19813,7 +18971,7 @@
         <p:spPr>
           <a:xfrm>
             <a:off x="5943600" y="1005840"/>
-            <a:ext cx="5925312" cy="365760"/>
+            <a:ext cx="5925312" cy="320040"/>
           </a:xfrm>
           <a:prstGeom prst="rect">
             <a:avLst/>
@@ -19834,7 +18992,7 @@
                 </a:solidFill>
                 <a:latin typeface="游ゴシック"/>
               </a:rPr>
-              <a:t>同等機能の産業用ロガーとの機能・価格比較</a:t>
+              <a:t>市販温度ロガーとの価格比較</a:t>
             </a:r>
           </a:p>
         </p:txBody>
@@ -19849,7 +19007,7 @@
         </p:nvGraphicFramePr>
         <p:xfrm>
           <a:off x="5943600" y="1371600"/>
-          <a:ext cx="5943600" cy="2560320"/>
+          <a:ext cx="5925312" cy="1463040"/>
         </p:xfrm>
         <a:graphic>
           <a:graphicData uri="http://schemas.openxmlformats.org/drawingml/2006/table">
@@ -19858,27 +19016,9 @@
                 <a:tableStyleId>{5C22544A-7EE6-4342-B048-85BDC9FD1C3A}</a:tableStyleId>
               </a:tblPr>
               <a:tblGrid>
-                <a:gridCol w="3108960">
-                  <a:extLst>
-                    <a:ext uri="{9D8B030D-6E8A-4147-A177-3AD203B41FA5}">
-                      <a16:colId xmlns:a16="http://schemas.microsoft.com/office/drawing/2014/main" val="20000"/>
-                    </a:ext>
-                  </a:extLst>
-                </a:gridCol>
-                <a:gridCol w="1097280">
-                  <a:extLst>
-                    <a:ext uri="{9D8B030D-6E8A-4147-A177-3AD203B41FA5}">
-                      <a16:colId xmlns:a16="http://schemas.microsoft.com/office/drawing/2014/main" val="20001"/>
-                    </a:ext>
-                  </a:extLst>
-                </a:gridCol>
-                <a:gridCol w="1737360">
-                  <a:extLst>
-                    <a:ext uri="{9D8B030D-6E8A-4147-A177-3AD203B41FA5}">
-                      <a16:colId xmlns:a16="http://schemas.microsoft.com/office/drawing/2014/main" val="20002"/>
-                    </a:ext>
-                  </a:extLst>
-                </a:gridCol>
+                <a:gridCol w="2560320"/>
+                <a:gridCol w="1993392"/>
+                <a:gridCol w="1371600"/>
               </a:tblGrid>
               <a:tr h="365760">
                 <a:tc>
@@ -19894,7 +19034,7 @@
                           </a:solidFill>
                           <a:latin typeface="Segoe UI"/>
                         </a:rPr>
-                        <a:t>機能</a:t>
+                        <a:t>カテゴリ</a:t>
                       </a:r>
                     </a:p>
                   </a:txBody>
@@ -19917,7 +19057,7 @@
                           </a:solidFill>
                           <a:latin typeface="Segoe UI"/>
                         </a:rPr>
-                        <a:t>本ツール</a:t>
+                        <a:t>代表製品</a:t>
                       </a:r>
                     </a:p>
                   </a:txBody>
@@ -19940,7 +19080,7 @@
                           </a:solidFill>
                           <a:latin typeface="Segoe UI"/>
                         </a:rPr>
-                        <a:t>産業用ロガー</a:t>
+                        <a:t>概算価格</a:t>
                       </a:r>
                     </a:p>
                   </a:txBody>
@@ -19950,11 +19090,6 @@
                     </a:solidFill>
                   </a:tcPr>
                 </a:tc>
-                <a:extLst>
-                  <a:ext uri="{0D108BD9-81ED-4DB2-BD59-A6C34878D82A}">
-                    <a16:rowId xmlns:a16="http://schemas.microsoft.com/office/drawing/2014/main" val="10000"/>
-                  </a:ext>
-                </a:extLst>
               </a:tr>
               <a:tr h="365760">
                 <a:tc>
@@ -19964,73 +19099,68 @@
                     <a:p>
                       <a:pPr algn="l"/>
                       <a:r>
-                        <a:rPr sz="1200" b="0">
-                          <a:solidFill>
-                            <a:srgbClr val="1A1A2E"/>
-                          </a:solidFill>
-                          <a:latin typeface="游ゴシック"/>
-                        </a:rPr>
-                        <a:t>K型熱電対 計測</a:t>
-                      </a:r>
-                    </a:p>
-                  </a:txBody>
-                  <a:tcPr>
-                    <a:solidFill>
-                      <a:srgbClr val="FFFFFF"/>
-                    </a:solidFill>
-                  </a:tcPr>
-                </a:tc>
-                <a:tc>
-                  <a:txBody>
-                    <a:bodyPr/>
-                    <a:lstStyle/>
-                    <a:p>
-                      <a:pPr algn="l"/>
-                      <a:r>
-                        <a:rPr sz="1200" b="0">
-                          <a:solidFill>
-                            <a:srgbClr val="1A1A2E"/>
-                          </a:solidFill>
-                          <a:latin typeface="游ゴシック"/>
-                        </a:rPr>
-                        <a:t>✓</a:t>
-                      </a:r>
-                    </a:p>
-                  </a:txBody>
-                  <a:tcPr>
-                    <a:solidFill>
-                      <a:srgbClr val="FFFFFF"/>
-                    </a:solidFill>
-                  </a:tcPr>
-                </a:tc>
-                <a:tc>
-                  <a:txBody>
-                    <a:bodyPr/>
-                    <a:lstStyle/>
-                    <a:p>
-                      <a:pPr algn="l"/>
-                      <a:r>
-                        <a:rPr sz="1200" b="0">
-                          <a:solidFill>
-                            <a:srgbClr val="1A1A2E"/>
-                          </a:solidFill>
-                          <a:latin typeface="游ゴシック"/>
-                        </a:rPr>
-                        <a:t>✓</a:t>
-                      </a:r>
-                    </a:p>
-                  </a:txBody>
-                  <a:tcPr>
-                    <a:solidFill>
-                      <a:srgbClr val="FFFFFF"/>
-                    </a:solidFill>
-                  </a:tcPr>
-                </a:tc>
-                <a:extLst>
-                  <a:ext uri="{0D108BD9-81ED-4DB2-BD59-A6C34878D82A}">
-                    <a16:rowId xmlns:a16="http://schemas.microsoft.com/office/drawing/2014/main" val="10001"/>
-                  </a:ext>
-                </a:extLst>
+                        <a:rPr sz="1200" b="1">
+                          <a:solidFill>
+                            <a:srgbClr val="FFFFFF"/>
+                          </a:solidFill>
+                          <a:latin typeface="游ゴシック"/>
+                        </a:rPr>
+                        <a:t>本ツール（自作）</a:t>
+                      </a:r>
+                    </a:p>
+                  </a:txBody>
+                  <a:tcPr>
+                    <a:solidFill>
+                      <a:srgbClr val="0D477F"/>
+                    </a:solidFill>
+                  </a:tcPr>
+                </a:tc>
+                <a:tc>
+                  <a:txBody>
+                    <a:bodyPr/>
+                    <a:lstStyle/>
+                    <a:p>
+                      <a:pPr algn="l"/>
+                      <a:r>
+                        <a:rPr sz="1200" b="1">
+                          <a:solidFill>
+                            <a:srgbClr val="FFFFFF"/>
+                          </a:solidFill>
+                          <a:latin typeface="游ゴシック"/>
+                        </a:rPr>
+                        <a:t>M5Stack + MAX31855</a:t>
+                      </a:r>
+                    </a:p>
+                  </a:txBody>
+                  <a:tcPr>
+                    <a:solidFill>
+                      <a:srgbClr val="0D477F"/>
+                    </a:solidFill>
+                  </a:tcPr>
+                </a:tc>
+                <a:tc>
+                  <a:txBody>
+                    <a:bodyPr/>
+                    <a:lstStyle/>
+                    <a:p>
+                      <a:pPr algn="l"/>
+                      <a:r>
+                        <a:rPr sz="1200" b="1">
+                          <a:solidFill>
+                            <a:srgbClr val="FFFFFF"/>
+                          </a:solidFill>
+                          <a:latin typeface="游ゴシック"/>
+                        </a:rPr>
+                        <a:t>¥9,570</a:t>
+                      </a:r>
+                    </a:p>
+                  </a:txBody>
+                  <a:tcPr>
+                    <a:solidFill>
+                      <a:srgbClr val="0D477F"/>
+                    </a:solidFill>
+                  </a:tcPr>
+                </a:tc>
               </a:tr>
               <a:tr h="365760">
                 <a:tc>
@@ -20046,7 +19176,7 @@
                           </a:solidFill>
                           <a:latin typeface="游ゴシック"/>
                         </a:rPr>
-                        <a:t>スタンドアロン動作 (PC 不要)</a:t>
+                        <a:t>標準製品</a:t>
                       </a:r>
                     </a:p>
                   </a:txBody>
@@ -20069,7 +19199,7 @@
                           </a:solidFill>
                           <a:latin typeface="游ゴシック"/>
                         </a:rPr>
-                        <a:t>✓</a:t>
+                        <a:t>USB データロガー</a:t>
                       </a:r>
                     </a:p>
                   </a:txBody>
@@ -20092,7 +19222,7 @@
                           </a:solidFill>
                           <a:latin typeface="游ゴシック"/>
                         </a:rPr>
-                        <a:t>✓</a:t>
+                        <a:t>¥30,000〜¥50,000</a:t>
                       </a:r>
                     </a:p>
                   </a:txBody>
@@ -20102,11 +19232,6 @@
                     </a:solidFill>
                   </a:tcPr>
                 </a:tc>
-                <a:extLst>
-                  <a:ext uri="{0D108BD9-81ED-4DB2-BD59-A6C34878D82A}">
-                    <a16:rowId xmlns:a16="http://schemas.microsoft.com/office/drawing/2014/main" val="10002"/>
-                  </a:ext>
-                </a:extLst>
               </a:tr>
               <a:tr h="365760">
                 <a:tc>
@@ -20122,7 +19247,7 @@
                           </a:solidFill>
                           <a:latin typeface="游ゴシック"/>
                         </a:rPr>
-                        <a:t>LCD リアルタイム表示</a:t>
+                        <a:t>プロフェッショナル</a:t>
                       </a:r>
                     </a:p>
                   </a:txBody>
@@ -20145,7 +19270,7 @@
                           </a:solidFill>
                           <a:latin typeface="游ゴシック"/>
                         </a:rPr>
-                        <a:t>✓</a:t>
+                        <a:t>産業用データロガー</a:t>
                       </a:r>
                     </a:p>
                   </a:txBody>
@@ -20168,7 +19293,7 @@
                           </a:solidFill>
                           <a:latin typeface="游ゴシック"/>
                         </a:rPr>
-                        <a:t>✓</a:t>
+                        <a:t>¥100,000〜¥250,000+</a:t>
                       </a:r>
                     </a:p>
                   </a:txBody>
@@ -20178,257 +19303,6 @@
                     </a:solidFill>
                   </a:tcPr>
                 </a:tc>
-                <a:extLst>
-                  <a:ext uri="{0D108BD9-81ED-4DB2-BD59-A6C34878D82A}">
-                    <a16:rowId xmlns:a16="http://schemas.microsoft.com/office/drawing/2014/main" val="10003"/>
-                  </a:ext>
-                </a:extLst>
-              </a:tr>
-              <a:tr h="365760">
-                <a:tc>
-                  <a:txBody>
-                    <a:bodyPr/>
-                    <a:lstStyle/>
-                    <a:p>
-                      <a:pPr algn="l"/>
-                      <a:r>
-                        <a:rPr sz="1200" b="0">
-                          <a:solidFill>
-                            <a:srgbClr val="1A1A2E"/>
-                          </a:solidFill>
-                          <a:latin typeface="游ゴシック"/>
-                        </a:rPr>
-                        <a:t>上下限アラーム</a:t>
-                      </a:r>
-                    </a:p>
-                  </a:txBody>
-                  <a:tcPr>
-                    <a:solidFill>
-                      <a:srgbClr val="F4F4F4"/>
-                    </a:solidFill>
-                  </a:tcPr>
-                </a:tc>
-                <a:tc>
-                  <a:txBody>
-                    <a:bodyPr/>
-                    <a:lstStyle/>
-                    <a:p>
-                      <a:pPr algn="l"/>
-                      <a:r>
-                        <a:rPr sz="1200" b="0">
-                          <a:solidFill>
-                            <a:srgbClr val="1A1A2E"/>
-                          </a:solidFill>
-                          <a:latin typeface="游ゴシック"/>
-                        </a:rPr>
-                        <a:t>✓</a:t>
-                      </a:r>
-                    </a:p>
-                  </a:txBody>
-                  <a:tcPr>
-                    <a:solidFill>
-                      <a:srgbClr val="F4F4F4"/>
-                    </a:solidFill>
-                  </a:tcPr>
-                </a:tc>
-                <a:tc>
-                  <a:txBody>
-                    <a:bodyPr/>
-                    <a:lstStyle/>
-                    <a:p>
-                      <a:pPr algn="l"/>
-                      <a:r>
-                        <a:rPr sz="1200" b="0">
-                          <a:solidFill>
-                            <a:srgbClr val="1A1A2E"/>
-                          </a:solidFill>
-                          <a:latin typeface="游ゴシック"/>
-                        </a:rPr>
-                        <a:t>✓</a:t>
-                      </a:r>
-                    </a:p>
-                  </a:txBody>
-                  <a:tcPr>
-                    <a:solidFill>
-                      <a:srgbClr val="F4F4F4"/>
-                    </a:solidFill>
-                  </a:tcPr>
-                </a:tc>
-                <a:extLst>
-                  <a:ext uri="{0D108BD9-81ED-4DB2-BD59-A6C34878D82A}">
-                    <a16:rowId xmlns:a16="http://schemas.microsoft.com/office/drawing/2014/main" val="10004"/>
-                  </a:ext>
-                </a:extLst>
-              </a:tr>
-              <a:tr h="365760">
-                <a:tc>
-                  <a:txBody>
-                    <a:bodyPr/>
-                    <a:lstStyle/>
-                    <a:p>
-                      <a:pPr algn="l"/>
-                      <a:r>
-                        <a:rPr sz="1200" b="0" dirty="0">
-                          <a:solidFill>
-                            <a:srgbClr val="1A1A2E"/>
-                          </a:solidFill>
-                          <a:latin typeface="游ゴシック"/>
-                        </a:rPr>
-                        <a:t>SD </a:t>
-                      </a:r>
-                      <a:r>
-                        <a:rPr sz="1200" b="0" dirty="0" err="1">
-                          <a:solidFill>
-                            <a:srgbClr val="1A1A2E"/>
-                          </a:solidFill>
-                          <a:latin typeface="游ゴシック"/>
-                        </a:rPr>
-                        <a:t>カード記録</a:t>
-                      </a:r>
-                      <a:r>
-                        <a:rPr sz="1200" b="0" dirty="0">
-                          <a:solidFill>
-                            <a:srgbClr val="1A1A2E"/>
-                          </a:solidFill>
-                          <a:latin typeface="游ゴシック"/>
-                        </a:rPr>
-                        <a:t> (CSV)</a:t>
-                      </a:r>
-                    </a:p>
-                  </a:txBody>
-                  <a:tcPr>
-                    <a:solidFill>
-                      <a:srgbClr val="FFFFFF"/>
-                    </a:solidFill>
-                  </a:tcPr>
-                </a:tc>
-                <a:tc>
-                  <a:txBody>
-                    <a:bodyPr/>
-                    <a:lstStyle/>
-                    <a:p>
-                      <a:pPr algn="l"/>
-                      <a:r>
-                        <a:rPr sz="1200" b="0">
-                          <a:solidFill>
-                            <a:srgbClr val="1A1A2E"/>
-                          </a:solidFill>
-                          <a:latin typeface="游ゴシック"/>
-                        </a:rPr>
-                        <a:t>✓</a:t>
-                      </a:r>
-                    </a:p>
-                  </a:txBody>
-                  <a:tcPr>
-                    <a:solidFill>
-                      <a:srgbClr val="FFFFFF"/>
-                    </a:solidFill>
-                  </a:tcPr>
-                </a:tc>
-                <a:tc>
-                  <a:txBody>
-                    <a:bodyPr/>
-                    <a:lstStyle/>
-                    <a:p>
-                      <a:pPr algn="l"/>
-                      <a:r>
-                        <a:rPr sz="1200" b="0">
-                          <a:solidFill>
-                            <a:srgbClr val="1A1A2E"/>
-                          </a:solidFill>
-                          <a:latin typeface="游ゴシック"/>
-                        </a:rPr>
-                        <a:t>✓</a:t>
-                      </a:r>
-                    </a:p>
-                  </a:txBody>
-                  <a:tcPr>
-                    <a:solidFill>
-                      <a:srgbClr val="FFFFFF"/>
-                    </a:solidFill>
-                  </a:tcPr>
-                </a:tc>
-                <a:extLst>
-                  <a:ext uri="{0D108BD9-81ED-4DB2-BD59-A6C34878D82A}">
-                    <a16:rowId xmlns:a16="http://schemas.microsoft.com/office/drawing/2014/main" val="10005"/>
-                  </a:ext>
-                </a:extLst>
-              </a:tr>
-              <a:tr h="365760">
-                <a:tc>
-                  <a:txBody>
-                    <a:bodyPr/>
-                    <a:lstStyle/>
-                    <a:p>
-                      <a:pPr algn="l"/>
-                      <a:r>
-                        <a:rPr sz="1200" b="1">
-                          <a:solidFill>
-                            <a:srgbClr val="FFFFFF"/>
-                          </a:solidFill>
-                          <a:latin typeface="游ゴシック"/>
-                        </a:rPr>
-                        <a:t>価格</a:t>
-                      </a:r>
-                    </a:p>
-                  </a:txBody>
-                  <a:tcPr>
-                    <a:solidFill>
-                      <a:srgbClr val="0D477F"/>
-                    </a:solidFill>
-                  </a:tcPr>
-                </a:tc>
-                <a:tc>
-                  <a:txBody>
-                    <a:bodyPr/>
-                    <a:lstStyle/>
-                    <a:p>
-                      <a:pPr algn="l"/>
-                      <a:r>
-                        <a:rPr sz="1200" b="1">
-                          <a:solidFill>
-                            <a:srgbClr val="FFFFFF"/>
-                          </a:solidFill>
-                          <a:latin typeface="游ゴシック"/>
-                        </a:rPr>
-                        <a:t>約¥17,082</a:t>
-                      </a:r>
-                    </a:p>
-                  </a:txBody>
-                  <a:tcPr>
-                    <a:solidFill>
-                      <a:srgbClr val="0D477F"/>
-                    </a:solidFill>
-                  </a:tcPr>
-                </a:tc>
-                <a:tc>
-                  <a:txBody>
-                    <a:bodyPr/>
-                    <a:lstStyle/>
-                    <a:p>
-                      <a:pPr algn="l"/>
-                      <a:r>
-                        <a:rPr sz="1200" b="1" dirty="0">
-                          <a:solidFill>
-                            <a:srgbClr val="FFFFFF"/>
-                          </a:solidFill>
-                          <a:latin typeface="游ゴシック"/>
-                        </a:rPr>
-                        <a:t>¥80,000〜¥200,000+</a:t>
-                      </a:r>
-                    </a:p>
-                  </a:txBody>
-                  <a:tcPr>
-                    <a:solidFill>
-                      <a:srgbClr val="0D477F"/>
-                    </a:solidFill>
-                  </a:tcPr>
-                </a:tc>
-                <a:extLst>
-                  <a:ext uri="{0D108BD9-81ED-4DB2-BD59-A6C34878D82A}">
-                    <a16:rowId xmlns:a16="http://schemas.microsoft.com/office/drawing/2014/main" val="10006"/>
-                  </a:ext>
-                </a:extLst>
               </a:tr>
             </a:tbl>
           </a:graphicData>
@@ -20442,8 +19316,8 @@
         </p:nvSpPr>
         <p:spPr>
           <a:xfrm>
-            <a:off x="320040" y="4389120"/>
-            <a:ext cx="11548872" cy="1280160"/>
+            <a:off x="320040" y="3977639"/>
+            <a:ext cx="11521440" cy="1280160"/>
           </a:xfrm>
           <a:prstGeom prst="rect">
             <a:avLst/>
@@ -20474,7 +19348,6 @@
           <a:lstStyle/>
           <a:p>
             <a:pPr algn="ctr"/>
-            <a:endParaRPr/>
           </a:p>
         </p:txBody>
       </p:sp>
@@ -20486,7 +19359,7 @@
         </p:nvSpPr>
         <p:spPr>
           <a:xfrm>
-            <a:off x="457200" y="4480561"/>
+            <a:off x="457200" y="4069080"/>
             <a:ext cx="11247120" cy="548640"/>
           </a:xfrm>
           <a:prstGeom prst="rect">
@@ -20508,7 +19381,7 @@
                 </a:solidFill>
                 <a:latin typeface="游ゴシック"/>
               </a:rPr>
-              <a:t>同等機能の産業用ロガーと比べて 約 1/5 〜 1/12 のコストで実現</a:t>
+              <a:t>標準製品の 1/3.1 の価格で同等機能を実現</a:t>
             </a:r>
           </a:p>
         </p:txBody>
@@ -20521,7 +19394,7 @@
         </p:nvSpPr>
         <p:spPr>
           <a:xfrm>
-            <a:off x="457200" y="5120641"/>
+            <a:off x="457200" y="4709160"/>
             <a:ext cx="11247120" cy="457200"/>
           </a:xfrm>
           <a:prstGeom prst="rect">
@@ -20537,87 +19410,62 @@
           <a:p>
             <a:pPr algn="ctr"/>
             <a:r>
-              <a:rPr sz="1500" b="0" i="0" dirty="0" err="1">
+              <a:rPr sz="1500" b="0" i="0">
                 <a:solidFill>
                   <a:srgbClr val="FF6D00"/>
                 </a:solidFill>
                 <a:latin typeface="游ゴシック"/>
               </a:rPr>
-              <a:t>本ツール</a:t>
-            </a:r>
-            <a:r>
-              <a:rPr sz="1500" b="0" i="0" dirty="0">
-                <a:solidFill>
-                  <a:srgbClr val="FF6D00"/>
+              <a:t>本ツール ¥9,570 vs 標準ロガー ¥30,000〜 → 最大 ¥20,000 以上削減</a:t>
+            </a:r>
+          </a:p>
+        </p:txBody>
+      </p:sp>
+      <p:sp>
+        <p:nvSpPr>
+          <p:cNvPr id="15" name="TextBox 14"/>
+          <p:cNvSpPr txBox="1"/>
+          <p:nvPr/>
+        </p:nvSpPr>
+        <p:spPr>
+          <a:xfrm>
+            <a:off x="457200" y="5212080"/>
+            <a:ext cx="11247120" cy="320040"/>
+          </a:xfrm>
+          <a:prstGeom prst="rect">
+            <a:avLst/>
+          </a:prstGeom>
+          <a:noFill/>
+        </p:spPr>
+        <p:txBody>
+          <a:bodyPr wrap="square">
+            <a:spAutoFit/>
+          </a:bodyPr>
+          <a:lstStyle/>
+          <a:p>
+            <a:pPr algn="ctr"/>
+            <a:r>
+              <a:rPr sz="1200" b="0" i="0">
+                <a:solidFill>
+                  <a:srgbClr val="FFFFFF"/>
                 </a:solidFill>
                 <a:latin typeface="游ゴシック"/>
               </a:rPr>
-              <a:t> 約¥17,082 vs </a:t>
-            </a:r>
-            <a:r>
-              <a:rPr sz="1500" b="0" i="0" dirty="0" err="1">
-                <a:solidFill>
-                  <a:srgbClr val="FF6D00"/>
-                </a:solidFill>
-                <a:latin typeface="游ゴシック"/>
-              </a:rPr>
-              <a:t>産業用ロガ</a:t>
-            </a:r>
-            <a:r>
-              <a:rPr sz="1500" b="0" i="0" dirty="0">
-                <a:solidFill>
-                  <a:srgbClr val="FF6D00"/>
-                </a:solidFill>
-                <a:latin typeface="游ゴシック"/>
-              </a:rPr>
-              <a:t>ー ¥80,000〜 → </a:t>
-            </a:r>
-            <a:r>
-              <a:rPr sz="1500" b="0" i="0" dirty="0" err="1">
-                <a:solidFill>
-                  <a:srgbClr val="FF6D00"/>
-                </a:solidFill>
-                <a:latin typeface="游ゴシック"/>
-              </a:rPr>
-              <a:t>最大</a:t>
-            </a:r>
-            <a:r>
-              <a:rPr sz="1500" b="0" i="0" dirty="0">
-                <a:solidFill>
-                  <a:srgbClr val="FF6D00"/>
-                </a:solidFill>
-                <a:latin typeface="游ゴシック"/>
-              </a:rPr>
-              <a:t> ¥60,000 </a:t>
-            </a:r>
-            <a:r>
-              <a:rPr sz="1500" b="0" i="0" dirty="0" err="1">
-                <a:solidFill>
-                  <a:srgbClr val="FF6D00"/>
-                </a:solidFill>
-                <a:latin typeface="游ゴシック"/>
-              </a:rPr>
-              <a:t>以上削減</a:t>
-            </a:r>
-            <a:endParaRPr sz="1500" b="0" i="0" dirty="0">
-              <a:solidFill>
-                <a:srgbClr val="FF6D00"/>
-              </a:solidFill>
-              <a:latin typeface="游ゴシック"/>
-            </a:endParaRPr>
-          </a:p>
-        </p:txBody>
-      </p:sp>
-      <p:sp>
-        <p:nvSpPr>
-          <p:cNvPr id="15" name="Rectangle 14"/>
+              <a:t>（SD 自動記録 ・ LCD リアルタイム表示 ・ 上下限アラーム機能 完全実装）</a:t>
+            </a:r>
+          </a:p>
+        </p:txBody>
+      </p:sp>
+      <p:sp>
+        <p:nvSpPr>
+          <p:cNvPr id="16" name="Rectangle 15"/>
           <p:cNvSpPr/>
           <p:nvPr/>
         </p:nvSpPr>
         <p:spPr>
           <a:xfrm>
-            <a:off x="320040" y="5669280"/>
-            <a:ext cx="11548872" cy="594359"/>
+            <a:off x="320040" y="5349240"/>
+            <a:ext cx="11521440" cy="914400"/>
           </a:xfrm>
           <a:prstGeom prst="rect">
             <a:avLst/>
@@ -20648,19 +19496,18 @@
           <a:lstStyle/>
           <a:p>
             <a:pPr algn="ctr"/>
-            <a:endParaRPr/>
-          </a:p>
-        </p:txBody>
-      </p:sp>
-      <p:sp>
-        <p:nvSpPr>
-          <p:cNvPr id="16" name="TextBox 15"/>
+          </a:p>
+        </p:txBody>
+      </p:sp>
+      <p:sp>
+        <p:nvSpPr>
+          <p:cNvPr id="17" name="TextBox 16"/>
           <p:cNvSpPr txBox="1"/>
           <p:nvPr/>
         </p:nvSpPr>
         <p:spPr>
           <a:xfrm>
-            <a:off x="502920" y="5760720"/>
+            <a:off x="502920" y="5413248"/>
             <a:ext cx="11155680" cy="749808"/>
           </a:xfrm>
           <a:prstGeom prst="rect">
@@ -20676,133 +19523,25 @@
           <a:p>
             <a:pPr algn="ctr"/>
             <a:r>
-              <a:rPr sz="1200" b="0" i="0" dirty="0">
+              <a:rPr sz="1200" b="0" i="0">
                 <a:solidFill>
                   <a:srgbClr val="1A1A2E"/>
                 </a:solidFill>
                 <a:latin typeface="游ゴシック"/>
               </a:rPr>
-              <a:t>✓ SD </a:t>
-            </a:r>
-            <a:r>
-              <a:rPr sz="1200" b="0" i="0" dirty="0" err="1">
+              <a:t>✓ SD 自動記録  ✓ LCD リアルタイム表示  ✓ 上下限アラーム（ビープ音）</a:t>
+            </a:r>
+          </a:p>
+          <a:p>
+            <a:pPr algn="ctr"/>
+            <a:r>
+              <a:rPr sz="1200" b="0" i="0">
                 <a:solidFill>
                   <a:srgbClr val="1A1A2E"/>
                 </a:solidFill>
                 <a:latin typeface="游ゴシック"/>
               </a:rPr>
-              <a:t>自動記録</a:t>
-            </a:r>
-            <a:r>
-              <a:rPr sz="1200" b="0" i="0" dirty="0">
-                <a:solidFill>
-                  <a:srgbClr val="1A1A2E"/>
-                </a:solidFill>
-                <a:latin typeface="游ゴシック"/>
-              </a:rPr>
-              <a:t>  ✓ LCD </a:t>
-            </a:r>
-            <a:r>
-              <a:rPr sz="1200" b="0" i="0" dirty="0" err="1">
-                <a:solidFill>
-                  <a:srgbClr val="1A1A2E"/>
-                </a:solidFill>
-                <a:latin typeface="游ゴシック"/>
-              </a:rPr>
-              <a:t>リアルタイム表示</a:t>
-            </a:r>
-            <a:r>
-              <a:rPr sz="1200" b="0" i="0" dirty="0">
-                <a:solidFill>
-                  <a:srgbClr val="1A1A2E"/>
-                </a:solidFill>
-                <a:latin typeface="游ゴシック"/>
-              </a:rPr>
-              <a:t>  ✓ </a:t>
-            </a:r>
-            <a:r>
-              <a:rPr sz="1200" b="0" i="0" dirty="0" err="1">
-                <a:solidFill>
-                  <a:srgbClr val="1A1A2E"/>
-                </a:solidFill>
-                <a:latin typeface="游ゴシック"/>
-              </a:rPr>
-              <a:t>上下限アラーム（ビープ音</a:t>
-            </a:r>
-            <a:r>
-              <a:rPr sz="1200" b="0" i="0" dirty="0">
-                <a:solidFill>
-                  <a:srgbClr val="1A1A2E"/>
-                </a:solidFill>
-                <a:latin typeface="游ゴシック"/>
-              </a:rPr>
-              <a:t>）</a:t>
-            </a:r>
-          </a:p>
-          <a:p>
-            <a:pPr algn="ctr"/>
-            <a:r>
-              <a:rPr sz="1200" b="0" i="0" dirty="0">
-                <a:solidFill>
-                  <a:srgbClr val="1A1A2E"/>
-                </a:solidFill>
-                <a:latin typeface="游ゴシック"/>
-              </a:rPr>
-              <a:t>✓ </a:t>
-            </a:r>
-            <a:r>
-              <a:rPr sz="1200" b="0" i="0" dirty="0" err="1">
-                <a:solidFill>
-                  <a:srgbClr val="1A1A2E"/>
-                </a:solidFill>
-                <a:latin typeface="游ゴシック"/>
-              </a:rPr>
-              <a:t>スタンドアロン動作</a:t>
-            </a:r>
-            <a:r>
-              <a:rPr sz="1200" b="0" i="0" dirty="0">
-                <a:solidFill>
-                  <a:srgbClr val="1A1A2E"/>
-                </a:solidFill>
-                <a:latin typeface="游ゴシック"/>
-              </a:rPr>
-              <a:t>  ✓ EEPROM </a:t>
-            </a:r>
-            <a:r>
-              <a:rPr sz="1200" b="0" i="0" dirty="0" err="1">
-                <a:solidFill>
-                  <a:srgbClr val="1A1A2E"/>
-                </a:solidFill>
-                <a:latin typeface="游ゴシック"/>
-              </a:rPr>
-              <a:t>設定保存</a:t>
-            </a:r>
-            <a:r>
-              <a:rPr sz="1200" b="0" i="0" dirty="0">
-                <a:solidFill>
-                  <a:srgbClr val="1A1A2E"/>
-                </a:solidFill>
-                <a:latin typeface="游ゴシック"/>
-              </a:rPr>
-              <a:t>  ✓ </a:t>
-            </a:r>
-            <a:r>
-              <a:rPr sz="1200" b="0" i="0" dirty="0" err="1">
-                <a:solidFill>
-                  <a:srgbClr val="1A1A2E"/>
-                </a:solidFill>
-                <a:latin typeface="游ゴシック"/>
-              </a:rPr>
-              <a:t>統計解析（平均・σ・Max</a:t>
-            </a:r>
-            <a:r>
-              <a:rPr sz="1200" b="0" i="0" dirty="0">
-                <a:solidFill>
-                  <a:srgbClr val="1A1A2E"/>
-                </a:solidFill>
-                <a:latin typeface="游ゴシック"/>
-              </a:rPr>
-              <a:t>/Min）</a:t>
+              <a:t>✓ スタンドアロン動作  ✓ EEPROM 設定保存  ✓ 統計解析（平均・σ・Max/Min）</a:t>
             </a:r>
           </a:p>
         </p:txBody>
@@ -20816,7 +19555,7 @@
 </file>
 
 <file path=ppt/slides/slide5.xml><?xml version="1.0" encoding="utf-8"?>
-<p:sld xmlns:a="http://schemas.openxmlformats.org/drawingml/2006/main" xmlns:r="http://schemas.openxmlformats.org/officeDocument/2006/relationships" xmlns:p="http://schemas.openxmlformats.org/presentationml/2006/main">
+<p:sld xmlns:a="http://schemas.openxmlformats.org/drawingml/2006/main" xmlns:p="http://schemas.openxmlformats.org/presentationml/2006/main" xmlns:r="http://schemas.openxmlformats.org/officeDocument/2006/relationships">
   <p:cSld>
     <p:spTree>
       <p:nvGrpSpPr>
@@ -20824,14 +19563,7 @@
         <p:cNvGrpSpPr/>
         <p:nvPr/>
       </p:nvGrpSpPr>
-      <p:grpSpPr>
-        <a:xfrm>
-          <a:off x="0" y="0"/>
-          <a:ext cx="0" cy="0"/>
-          <a:chOff x="0" y="0"/>
-          <a:chExt cx="0" cy="0"/>
-        </a:xfrm>
-      </p:grpSpPr>
+      <p:grpSpPr/>
       <p:sp>
         <p:nvSpPr>
           <p:cNvPr id="2" name="Rectangle 1"/>
@@ -20872,7 +19604,6 @@
           <a:lstStyle/>
           <a:p>
             <a:pPr algn="ctr"/>
-            <a:endParaRPr/>
           </a:p>
         </p:txBody>
       </p:sp>
@@ -20986,7 +19717,6 @@
           <a:lstStyle/>
           <a:p>
             <a:pPr algn="ctr"/>
-            <a:endParaRPr/>
           </a:p>
         </p:txBody>
       </p:sp>
@@ -21100,7 +19830,6 @@
           <a:lstStyle/>
           <a:p>
             <a:pPr algn="ctr"/>
-            <a:endParaRPr/>
           </a:p>
         </p:txBody>
       </p:sp>
@@ -21222,12 +19951,15 @@
           </a:p>
           <a:p>
             <a:pPr algn="ctr"/>
-            <a:endParaRPr sz="1300" b="0" i="0">
-              <a:solidFill>
-                <a:srgbClr val="1A1A2E"/>
-              </a:solidFill>
-              <a:latin typeface="游ゴシック"/>
-            </a:endParaRPr>
+            <a:r>
+              <a:rPr sz="1300" b="0" i="0">
+                <a:solidFill>
+                  <a:srgbClr val="1A1A2E"/>
+                </a:solidFill>
+                <a:latin typeface="游ゴシック"/>
+              </a:rPr>
+              <a:t/>
+            </a:r>
           </a:p>
           <a:p>
             <a:pPr algn="ctr"/>
@@ -21342,7 +20074,6 @@
           <a:lstStyle/>
           <a:p>
             <a:pPr algn="ctr"/>
-            <a:endParaRPr/>
           </a:p>
         </p:txBody>
       </p:sp>
@@ -21551,7 +20282,6 @@
           <a:lstStyle/>
           <a:p>
             <a:pPr algn="ctr"/>
-            <a:endParaRPr/>
           </a:p>
         </p:txBody>
       </p:sp>
@@ -21637,12 +20367,15 @@
           </a:p>
           <a:p>
             <a:pPr algn="ctr"/>
-            <a:endParaRPr sz="1300" b="0" i="0">
-              <a:solidFill>
-                <a:srgbClr val="1A1A2E"/>
-              </a:solidFill>
-              <a:latin typeface="游ゴシック"/>
-            </a:endParaRPr>
+            <a:r>
+              <a:rPr sz="1300" b="0" i="0">
+                <a:solidFill>
+                  <a:srgbClr val="1A1A2E"/>
+                </a:solidFill>
+                <a:latin typeface="游ゴシック"/>
+              </a:rPr>
+              <a:t/>
+            </a:r>
           </a:p>
           <a:p>
             <a:pPr algn="ctr"/>
@@ -21670,12 +20403,15 @@
           </a:p>
           <a:p>
             <a:pPr algn="ctr"/>
-            <a:endParaRPr sz="1300" b="0" i="0">
-              <a:solidFill>
-                <a:srgbClr val="1A1A2E"/>
-              </a:solidFill>
-              <a:latin typeface="游ゴシック"/>
-            </a:endParaRPr>
+            <a:r>
+              <a:rPr sz="1300" b="0" i="0">
+                <a:solidFill>
+                  <a:srgbClr val="1A1A2E"/>
+                </a:solidFill>
+                <a:latin typeface="游ゴシック"/>
+              </a:rPr>
+              <a:t/>
+            </a:r>
           </a:p>
           <a:p>
             <a:pPr algn="ctr"/>
@@ -21712,7 +20448,7 @@
 </file>
 
 <file path=ppt/slides/slide6.xml><?xml version="1.0" encoding="utf-8"?>
-<p:sld xmlns:a="http://schemas.openxmlformats.org/drawingml/2006/main" xmlns:r="http://schemas.openxmlformats.org/officeDocument/2006/relationships" xmlns:p="http://schemas.openxmlformats.org/presentationml/2006/main">
+<p:sld xmlns:a="http://schemas.openxmlformats.org/drawingml/2006/main" xmlns:p="http://schemas.openxmlformats.org/presentationml/2006/main" xmlns:r="http://schemas.openxmlformats.org/officeDocument/2006/relationships">
   <p:cSld>
     <p:spTree>
       <p:nvGrpSpPr>
@@ -21720,14 +20456,7 @@
         <p:cNvGrpSpPr/>
         <p:nvPr/>
       </p:nvGrpSpPr>
-      <p:grpSpPr>
-        <a:xfrm>
-          <a:off x="0" y="0"/>
-          <a:ext cx="0" cy="0"/>
-          <a:chOff x="0" y="0"/>
-          <a:chExt cx="0" cy="0"/>
-        </a:xfrm>
-      </p:grpSpPr>
+      <p:grpSpPr/>
       <p:sp>
         <p:nvSpPr>
           <p:cNvPr id="2" name="Rectangle 1"/>
@@ -21768,7 +20497,6 @@
           <a:lstStyle/>
           <a:p>
             <a:pPr algn="ctr"/>
-            <a:endParaRPr/>
           </a:p>
         </p:txBody>
       </p:sp>
@@ -21882,7 +20610,6 @@
           <a:lstStyle/>
           <a:p>
             <a:pPr algn="ctr"/>
-            <a:endParaRPr/>
           </a:p>
         </p:txBody>
       </p:sp>
@@ -21975,27 +20702,9 @@
                 <a:tableStyleId>{5C22544A-7EE6-4342-B048-85BDC9FD1C3A}</a:tableStyleId>
               </a:tblPr>
               <a:tblGrid>
-                <a:gridCol w="2286000">
-                  <a:extLst>
-                    <a:ext uri="{9D8B030D-6E8A-4147-A177-3AD203B41FA5}">
-                      <a16:colId xmlns:a16="http://schemas.microsoft.com/office/drawing/2014/main" val="20000"/>
-                    </a:ext>
-                  </a:extLst>
-                </a:gridCol>
-                <a:gridCol w="4114800">
-                  <a:extLst>
-                    <a:ext uri="{9D8B030D-6E8A-4147-A177-3AD203B41FA5}">
-                      <a16:colId xmlns:a16="http://schemas.microsoft.com/office/drawing/2014/main" val="20001"/>
-                    </a:ext>
-                  </a:extLst>
-                </a:gridCol>
-                <a:gridCol w="5120640">
-                  <a:extLst>
-                    <a:ext uri="{9D8B030D-6E8A-4147-A177-3AD203B41FA5}">
-                      <a16:colId xmlns:a16="http://schemas.microsoft.com/office/drawing/2014/main" val="20002"/>
-                    </a:ext>
-                  </a:extLst>
-                </a:gridCol>
+                <a:gridCol w="2286000"/>
+                <a:gridCol w="4114800"/>
+                <a:gridCol w="5120640"/>
               </a:tblGrid>
               <a:tr h="457200">
                 <a:tc>
@@ -22067,11 +20776,6 @@
                     </a:solidFill>
                   </a:tcPr>
                 </a:tc>
-                <a:extLst>
-                  <a:ext uri="{0D108BD9-81ED-4DB2-BD59-A6C34878D82A}">
-                    <a16:rowId xmlns:a16="http://schemas.microsoft.com/office/drawing/2014/main" val="10000"/>
-                  </a:ext>
-                </a:extLst>
               </a:tr>
               <a:tr h="457200">
                 <a:tc>
@@ -22110,7 +20814,7 @@
                           </a:solidFill>
                           <a:latin typeface="游ゴシック"/>
                         </a:rPr>
-                        <a:t>M5Stack Basic V2.7 (ESP32)</a:t>
+                        <a:t>M5Stack Core2 (ESP32)</a:t>
                       </a:r>
                     </a:p>
                   </a:txBody>
@@ -22143,11 +20847,6 @@
                     </a:solidFill>
                   </a:tcPr>
                 </a:tc>
-                <a:extLst>
-                  <a:ext uri="{0D108BD9-81ED-4DB2-BD59-A6C34878D82A}">
-                    <a16:rowId xmlns:a16="http://schemas.microsoft.com/office/drawing/2014/main" val="10001"/>
-                  </a:ext>
-                </a:extLst>
               </a:tr>
               <a:tr h="457200">
                 <a:tc>
@@ -22219,11 +20918,6 @@
                     </a:solidFill>
                   </a:tcPr>
                 </a:tc>
-                <a:extLst>
-                  <a:ext uri="{0D108BD9-81ED-4DB2-BD59-A6C34878D82A}">
-                    <a16:rowId xmlns:a16="http://schemas.microsoft.com/office/drawing/2014/main" val="10002"/>
-                  </a:ext>
-                </a:extLst>
               </a:tr>
               <a:tr h="457200">
                 <a:tc>
@@ -22295,11 +20989,6 @@
                     </a:solidFill>
                   </a:tcPr>
                 </a:tc>
-                <a:extLst>
-                  <a:ext uri="{0D108BD9-81ED-4DB2-BD59-A6C34878D82A}">
-                    <a16:rowId xmlns:a16="http://schemas.microsoft.com/office/drawing/2014/main" val="10003"/>
-                  </a:ext>
-                </a:extLst>
               </a:tr>
               <a:tr h="457200">
                 <a:tc>
@@ -22371,11 +21060,6 @@
                     </a:solidFill>
                   </a:tcPr>
                 </a:tc>
-                <a:extLst>
-                  <a:ext uri="{0D108BD9-81ED-4DB2-BD59-A6C34878D82A}">
-                    <a16:rowId xmlns:a16="http://schemas.microsoft.com/office/drawing/2014/main" val="10004"/>
-                  </a:ext>
-                </a:extLst>
               </a:tr>
               <a:tr h="457200">
                 <a:tc>
@@ -22447,11 +21131,6 @@
                     </a:solidFill>
                   </a:tcPr>
                 </a:tc>
-                <a:extLst>
-                  <a:ext uri="{0D108BD9-81ED-4DB2-BD59-A6C34878D82A}">
-                    <a16:rowId xmlns:a16="http://schemas.microsoft.com/office/drawing/2014/main" val="10005"/>
-                  </a:ext>
-                </a:extLst>
               </a:tr>
               <a:tr h="457200">
                 <a:tc>
@@ -22523,11 +21202,6 @@
                     </a:solidFill>
                   </a:tcPr>
                 </a:tc>
-                <a:extLst>
-                  <a:ext uri="{0D108BD9-81ED-4DB2-BD59-A6C34878D82A}">
-                    <a16:rowId xmlns:a16="http://schemas.microsoft.com/office/drawing/2014/main" val="10006"/>
-                  </a:ext>
-                </a:extLst>
               </a:tr>
               <a:tr h="457200">
                 <a:tc>
@@ -22599,11 +21273,6 @@
                     </a:solidFill>
                   </a:tcPr>
                 </a:tc>
-                <a:extLst>
-                  <a:ext uri="{0D108BD9-81ED-4DB2-BD59-A6C34878D82A}">
-                    <a16:rowId xmlns:a16="http://schemas.microsoft.com/office/drawing/2014/main" val="10007"/>
-                  </a:ext>
-                </a:extLst>
               </a:tr>
             </a:tbl>
           </a:graphicData>
@@ -22611,58 +21280,14 @@
       </p:graphicFrame>
       <p:sp>
         <p:nvSpPr>
-          <p:cNvPr id="9" name="Rectangle 8"/>
-          <p:cNvSpPr/>
-          <p:nvPr/>
-        </p:nvSpPr>
-        <p:spPr>
-          <a:xfrm>
-            <a:off x="320040" y="4846320"/>
-            <a:ext cx="11548872" cy="502920"/>
-          </a:xfrm>
-          <a:prstGeom prst="rect">
-            <a:avLst/>
-          </a:prstGeom>
-          <a:solidFill>
-            <a:srgbClr val="F4F4F4"/>
-          </a:solidFill>
-          <a:ln>
-            <a:noFill/>
-          </a:ln>
-        </p:spPr>
-        <p:style>
-          <a:lnRef idx="1">
-            <a:schemeClr val="accent1"/>
-          </a:lnRef>
-          <a:fillRef idx="3">
-            <a:schemeClr val="accent1"/>
-          </a:fillRef>
-          <a:effectRef idx="2">
-            <a:schemeClr val="accent1"/>
-          </a:effectRef>
-          <a:fontRef idx="minor">
-            <a:schemeClr val="lt1"/>
-          </a:fontRef>
-        </p:style>
-        <p:txBody>
-          <a:bodyPr rtlCol="0" anchor="ctr"/>
-          <a:lstStyle/>
-          <a:p>
-            <a:pPr algn="ctr"/>
-            <a:endParaRPr/>
-          </a:p>
-        </p:txBody>
-      </p:sp>
-      <p:sp>
-        <p:nvSpPr>
-          <p:cNvPr id="10" name="TextBox 9"/>
+          <p:cNvPr id="9" name="TextBox 8"/>
           <p:cNvSpPr txBox="1"/>
           <p:nvPr/>
         </p:nvSpPr>
         <p:spPr>
           <a:xfrm>
-            <a:off x="502920" y="4910328"/>
-            <a:ext cx="11155680" cy="384048"/>
+            <a:off x="320040" y="5166360"/>
+            <a:ext cx="11521440" cy="365760"/>
           </a:xfrm>
           <a:prstGeom prst="rect">
             <a:avLst/>
@@ -22677,13 +21302,13 @@
           <a:p>
             <a:pPr algn="l"/>
             <a:r>
-              <a:rPr sz="1200" b="0" i="0">
-                <a:solidFill>
-                  <a:srgbClr val="1A1A2E"/>
+              <a:rPr sz="1200" b="0" i="1">
+                <a:solidFill>
+                  <a:srgbClr val="999999"/>
                 </a:solidFill>
                 <a:latin typeface="游ゴシック"/>
               </a:rPr>
-              <a:t>※ MicroSD スロットは M5Stack 本体内蔵。MAX31855 は別途 SPI 接続ブレークアウト基板を使用。</a:t>
+              <a:t>※ MicroSD ジャケットは M5Stack 本体内蔵。MAX31855 は別途 SPI 接続ブレークアウト基板を使用。</a:t>
             </a:r>
           </a:p>
         </p:txBody>
@@ -22697,7 +21322,7 @@
 </file>
 
 <file path=ppt/slides/slide7.xml><?xml version="1.0" encoding="utf-8"?>
-<p:sld xmlns:a="http://schemas.openxmlformats.org/drawingml/2006/main" xmlns:r="http://schemas.openxmlformats.org/officeDocument/2006/relationships" xmlns:p="http://schemas.openxmlformats.org/presentationml/2006/main">
+<p:sld xmlns:a="http://schemas.openxmlformats.org/drawingml/2006/main" xmlns:p="http://schemas.openxmlformats.org/presentationml/2006/main" xmlns:r="http://schemas.openxmlformats.org/officeDocument/2006/relationships">
   <p:cSld>
     <p:spTree>
       <p:nvGrpSpPr>
@@ -22705,14 +21330,7 @@
         <p:cNvGrpSpPr/>
         <p:nvPr/>
       </p:nvGrpSpPr>
-      <p:grpSpPr>
-        <a:xfrm>
-          <a:off x="0" y="0"/>
-          <a:ext cx="0" cy="0"/>
-          <a:chOff x="0" y="0"/>
-          <a:chExt cx="0" cy="0"/>
-        </a:xfrm>
-      </p:grpSpPr>
+      <p:grpSpPr/>
       <p:sp>
         <p:nvSpPr>
           <p:cNvPr id="2" name="Rectangle 1"/>
@@ -22753,7 +21371,6 @@
           <a:lstStyle/>
           <a:p>
             <a:pPr algn="ctr"/>
-            <a:endParaRPr/>
           </a:p>
         </p:txBody>
       </p:sp>
@@ -22867,7 +21484,6 @@
           <a:lstStyle/>
           <a:p>
             <a:pPr algn="ctr"/>
-            <a:endParaRPr/>
           </a:p>
         </p:txBody>
       </p:sp>
@@ -22949,8 +21565,8 @@
         </p:nvSpPr>
         <p:spPr>
           <a:xfrm>
-            <a:off x="320040" y="1005840"/>
-            <a:ext cx="11548872" cy="411480"/>
+            <a:off x="320040" y="1051560"/>
+            <a:ext cx="11521440" cy="320040"/>
           </a:xfrm>
           <a:prstGeom prst="rect">
             <a:avLst/>
@@ -22965,9 +21581,9 @@
           <a:p>
             <a:pPr algn="l"/>
             <a:r>
-              <a:rPr sz="1400" b="0" i="0">
-                <a:solidFill>
-                  <a:srgbClr val="1A1A2E"/>
+              <a:rPr sz="1600" b="1" i="0">
+                <a:solidFill>
+                  <a:srgbClr val="0D477F"/>
                 </a:solidFill>
                 <a:latin typeface="游ゴシック"/>
               </a:rPr>
@@ -22985,7 +21601,7 @@
           <p:nvPr/>
         </p:nvGraphicFramePr>
         <p:xfrm>
-          <a:off x="320040" y="1508760"/>
+          <a:off x="320040" y="1417320"/>
           <a:ext cx="11521439" cy="2468880"/>
         </p:xfrm>
         <a:graphic>
@@ -22995,34 +21611,10 @@
                 <a:tableStyleId>{5C22544A-7EE6-4342-B048-85BDC9FD1C3A}</a:tableStyleId>
               </a:tblPr>
               <a:tblGrid>
-                <a:gridCol w="1828800">
-                  <a:extLst>
-                    <a:ext uri="{9D8B030D-6E8A-4147-A177-3AD203B41FA5}">
-                      <a16:colId xmlns:a16="http://schemas.microsoft.com/office/drawing/2014/main" val="20000"/>
-                    </a:ext>
-                  </a:extLst>
-                </a:gridCol>
-                <a:gridCol w="2286000">
-                  <a:extLst>
-                    <a:ext uri="{9D8B030D-6E8A-4147-A177-3AD203B41FA5}">
-                      <a16:colId xmlns:a16="http://schemas.microsoft.com/office/drawing/2014/main" val="20001"/>
-                    </a:ext>
-                  </a:extLst>
-                </a:gridCol>
-                <a:gridCol w="3657600">
-                  <a:extLst>
-                    <a:ext uri="{9D8B030D-6E8A-4147-A177-3AD203B41FA5}">
-                      <a16:colId xmlns:a16="http://schemas.microsoft.com/office/drawing/2014/main" val="20002"/>
-                    </a:ext>
-                  </a:extLst>
-                </a:gridCol>
-                <a:gridCol w="3749039">
-                  <a:extLst>
-                    <a:ext uri="{9D8B030D-6E8A-4147-A177-3AD203B41FA5}">
-                      <a16:colId xmlns:a16="http://schemas.microsoft.com/office/drawing/2014/main" val="20003"/>
-                    </a:ext>
-                  </a:extLst>
-                </a:gridCol>
+                <a:gridCol w="1828800"/>
+                <a:gridCol w="2286000"/>
+                <a:gridCol w="3657600"/>
+                <a:gridCol w="3749039"/>
               </a:tblGrid>
               <a:tr h="411480">
                 <a:tc>
@@ -23117,11 +21709,6 @@
                     </a:solidFill>
                   </a:tcPr>
                 </a:tc>
-                <a:extLst>
-                  <a:ext uri="{0D108BD9-81ED-4DB2-BD59-A6C34878D82A}">
-                    <a16:rowId xmlns:a16="http://schemas.microsoft.com/office/drawing/2014/main" val="10000"/>
-                  </a:ext>
-                </a:extLst>
               </a:tr>
               <a:tr h="411480">
                 <a:tc>
@@ -23216,11 +21803,6 @@
                     </a:solidFill>
                   </a:tcPr>
                 </a:tc>
-                <a:extLst>
-                  <a:ext uri="{0D108BD9-81ED-4DB2-BD59-A6C34878D82A}">
-                    <a16:rowId xmlns:a16="http://schemas.microsoft.com/office/drawing/2014/main" val="10001"/>
-                  </a:ext>
-                </a:extLst>
               </a:tr>
               <a:tr h="411480">
                 <a:tc>
@@ -23315,11 +21897,6 @@
                     </a:solidFill>
                   </a:tcPr>
                 </a:tc>
-                <a:extLst>
-                  <a:ext uri="{0D108BD9-81ED-4DB2-BD59-A6C34878D82A}">
-                    <a16:rowId xmlns:a16="http://schemas.microsoft.com/office/drawing/2014/main" val="10002"/>
-                  </a:ext>
-                </a:extLst>
               </a:tr>
               <a:tr h="411480">
                 <a:tc>
@@ -23414,11 +21991,6 @@
                     </a:solidFill>
                   </a:tcPr>
                 </a:tc>
-                <a:extLst>
-                  <a:ext uri="{0D108BD9-81ED-4DB2-BD59-A6C34878D82A}">
-                    <a16:rowId xmlns:a16="http://schemas.microsoft.com/office/drawing/2014/main" val="10003"/>
-                  </a:ext>
-                </a:extLst>
               </a:tr>
               <a:tr h="411480">
                 <a:tc>
@@ -23513,11 +22085,6 @@
                     </a:solidFill>
                   </a:tcPr>
                 </a:tc>
-                <a:extLst>
-                  <a:ext uri="{0D108BD9-81ED-4DB2-BD59-A6C34878D82A}">
-                    <a16:rowId xmlns:a16="http://schemas.microsoft.com/office/drawing/2014/main" val="10004"/>
-                  </a:ext>
-                </a:extLst>
               </a:tr>
               <a:tr h="411480">
                 <a:tc>
@@ -23612,11 +22179,6 @@
                     </a:solidFill>
                   </a:tcPr>
                 </a:tc>
-                <a:extLst>
-                  <a:ext uri="{0D108BD9-81ED-4DB2-BD59-A6C34878D82A}">
-                    <a16:rowId xmlns:a16="http://schemas.microsoft.com/office/drawing/2014/main" val="10005"/>
-                  </a:ext>
-                </a:extLst>
               </a:tr>
             </a:tbl>
           </a:graphicData>
@@ -23630,8 +22192,8 @@
         </p:nvSpPr>
         <p:spPr>
           <a:xfrm>
-            <a:off x="320040" y="4114800"/>
-            <a:ext cx="11548872" cy="1005840"/>
+            <a:off x="320040" y="3931920"/>
+            <a:ext cx="11521440" cy="960120"/>
           </a:xfrm>
           <a:prstGeom prst="rect">
             <a:avLst/>
@@ -23664,7 +22226,6 @@
           <a:lstStyle/>
           <a:p>
             <a:pPr algn="ctr"/>
-            <a:endParaRPr/>
           </a:p>
         </p:txBody>
       </p:sp>
@@ -23676,7 +22237,7 @@
         </p:nvSpPr>
         <p:spPr>
           <a:xfrm>
-            <a:off x="502920" y="4160520"/>
+            <a:off x="502920" y="3977639"/>
             <a:ext cx="11155680" cy="365760"/>
           </a:xfrm>
           <a:prstGeom prst="rect">
@@ -23711,8 +22272,8 @@
         </p:nvSpPr>
         <p:spPr>
           <a:xfrm>
-            <a:off x="502920" y="4553712"/>
-            <a:ext cx="11155680" cy="384048"/>
+            <a:off x="502920" y="4370832"/>
+            <a:ext cx="11155680" cy="411480"/>
           </a:xfrm>
           <a:prstGeom prst="rect">
             <a:avLst/>
@@ -23733,7 +22294,7 @@
                 </a:solidFill>
                 <a:latin typeface="Consolas"/>
               </a:rPr>
-              <a:t>SD.begin(TFCARD_CS_PIN, SPI, 40000000);  // GPIO5 デフォルトでは MAX31855 と衝突！</a:t>
+              <a:t>SD.begin(TFCARD_CS_PIN, SPI, 40000000);  // ← GPIO5 デフォルトでは MAX31855 と衝突！</a:t>
             </a:r>
           </a:p>
         </p:txBody>
@@ -23746,8 +22307,8 @@
         </p:nvSpPr>
         <p:spPr>
           <a:xfrm>
-            <a:off x="320040" y="5212080"/>
-            <a:ext cx="11548872" cy="502920"/>
+            <a:off x="320040" y="4983480"/>
+            <a:ext cx="11521440" cy="640080"/>
           </a:xfrm>
           <a:prstGeom prst="rect">
             <a:avLst/>
@@ -23778,7 +22339,6 @@
           <a:lstStyle/>
           <a:p>
             <a:pPr algn="ctr"/>
-            <a:endParaRPr/>
           </a:p>
         </p:txBody>
       </p:sp>
@@ -23790,8 +22350,8 @@
         </p:nvSpPr>
         <p:spPr>
           <a:xfrm>
-            <a:off x="502920" y="5276088"/>
-            <a:ext cx="11155680" cy="384048"/>
+            <a:off x="502920" y="5047488"/>
+            <a:ext cx="11155680" cy="502920"/>
           </a:xfrm>
           <a:prstGeom prst="rect">
             <a:avLst/>
@@ -23826,7 +22386,7 @@
 </file>
 
 <file path=ppt/slides/slide8.xml><?xml version="1.0" encoding="utf-8"?>
-<p:sld xmlns:a="http://schemas.openxmlformats.org/drawingml/2006/main" xmlns:r="http://schemas.openxmlformats.org/officeDocument/2006/relationships" xmlns:p="http://schemas.openxmlformats.org/presentationml/2006/main">
+<p:sld xmlns:a="http://schemas.openxmlformats.org/drawingml/2006/main" xmlns:p="http://schemas.openxmlformats.org/presentationml/2006/main" xmlns:r="http://schemas.openxmlformats.org/officeDocument/2006/relationships">
   <p:cSld>
     <p:spTree>
       <p:nvGrpSpPr>
@@ -23834,14 +22394,7 @@
         <p:cNvGrpSpPr/>
         <p:nvPr/>
       </p:nvGrpSpPr>
-      <p:grpSpPr>
-        <a:xfrm>
-          <a:off x="0" y="0"/>
-          <a:ext cx="0" cy="0"/>
-          <a:chOff x="0" y="0"/>
-          <a:chExt cx="0" cy="0"/>
-        </a:xfrm>
-      </p:grpSpPr>
+      <p:grpSpPr/>
       <p:sp>
         <p:nvSpPr>
           <p:cNvPr id="2" name="Rectangle 1"/>
@@ -23882,7 +22435,6 @@
           <a:lstStyle/>
           <a:p>
             <a:pPr algn="ctr"/>
-            <a:endParaRPr/>
           </a:p>
         </p:txBody>
       </p:sp>
@@ -23996,7 +22548,6 @@
           <a:lstStyle/>
           <a:p>
             <a:pPr algn="ctr"/>
-            <a:endParaRPr/>
           </a:p>
         </p:txBody>
       </p:sp>
@@ -24089,27 +22640,9 @@
                 <a:tableStyleId>{5C22544A-7EE6-4342-B048-85BDC9FD1C3A}</a:tableStyleId>
               </a:tblPr>
               <a:tblGrid>
-                <a:gridCol w="2560320">
-                  <a:extLst>
-                    <a:ext uri="{9D8B030D-6E8A-4147-A177-3AD203B41FA5}">
-                      <a16:colId xmlns:a16="http://schemas.microsoft.com/office/drawing/2014/main" val="20000"/>
-                    </a:ext>
-                  </a:extLst>
-                </a:gridCol>
-                <a:gridCol w="2743200">
-                  <a:extLst>
-                    <a:ext uri="{9D8B030D-6E8A-4147-A177-3AD203B41FA5}">
-                      <a16:colId xmlns:a16="http://schemas.microsoft.com/office/drawing/2014/main" val="20001"/>
-                    </a:ext>
-                  </a:extLst>
-                </a:gridCol>
-                <a:gridCol w="6217920">
-                  <a:extLst>
-                    <a:ext uri="{9D8B030D-6E8A-4147-A177-3AD203B41FA5}">
-                      <a16:colId xmlns:a16="http://schemas.microsoft.com/office/drawing/2014/main" val="20002"/>
-                    </a:ext>
-                  </a:extLst>
-                </a:gridCol>
+                <a:gridCol w="2560320"/>
+                <a:gridCol w="2743200"/>
+                <a:gridCol w="6217920"/>
               </a:tblGrid>
               <a:tr h="438912">
                 <a:tc>
@@ -24181,11 +22714,6 @@
                     </a:solidFill>
                   </a:tcPr>
                 </a:tc>
-                <a:extLst>
-                  <a:ext uri="{0D108BD9-81ED-4DB2-BD59-A6C34878D82A}">
-                    <a16:rowId xmlns:a16="http://schemas.microsoft.com/office/drawing/2014/main" val="10000"/>
-                  </a:ext>
-                </a:extLst>
               </a:tr>
               <a:tr h="438912">
                 <a:tc>
@@ -24257,11 +22785,6 @@
                     </a:solidFill>
                   </a:tcPr>
                 </a:tc>
-                <a:extLst>
-                  <a:ext uri="{0D108BD9-81ED-4DB2-BD59-A6C34878D82A}">
-                    <a16:rowId xmlns:a16="http://schemas.microsoft.com/office/drawing/2014/main" val="10001"/>
-                  </a:ext>
-                </a:extLst>
               </a:tr>
               <a:tr h="438912">
                 <a:tc>
@@ -24333,11 +22856,6 @@
                     </a:solidFill>
                   </a:tcPr>
                 </a:tc>
-                <a:extLst>
-                  <a:ext uri="{0D108BD9-81ED-4DB2-BD59-A6C34878D82A}">
-                    <a16:rowId xmlns:a16="http://schemas.microsoft.com/office/drawing/2014/main" val="10002"/>
-                  </a:ext>
-                </a:extLst>
               </a:tr>
               <a:tr h="438912">
                 <a:tc>
@@ -24409,11 +22927,6 @@
                     </a:solidFill>
                   </a:tcPr>
                 </a:tc>
-                <a:extLst>
-                  <a:ext uri="{0D108BD9-81ED-4DB2-BD59-A6C34878D82A}">
-                    <a16:rowId xmlns:a16="http://schemas.microsoft.com/office/drawing/2014/main" val="10003"/>
-                  </a:ext>
-                </a:extLst>
               </a:tr>
               <a:tr h="438912">
                 <a:tc>
@@ -24485,11 +22998,6 @@
                     </a:solidFill>
                   </a:tcPr>
                 </a:tc>
-                <a:extLst>
-                  <a:ext uri="{0D108BD9-81ED-4DB2-BD59-A6C34878D82A}">
-                    <a16:rowId xmlns:a16="http://schemas.microsoft.com/office/drawing/2014/main" val="10004"/>
-                  </a:ext>
-                </a:extLst>
               </a:tr>
               <a:tr h="438912">
                 <a:tc>
@@ -24561,11 +23069,6 @@
                     </a:solidFill>
                   </a:tcPr>
                 </a:tc>
-                <a:extLst>
-                  <a:ext uri="{0D108BD9-81ED-4DB2-BD59-A6C34878D82A}">
-                    <a16:rowId xmlns:a16="http://schemas.microsoft.com/office/drawing/2014/main" val="10005"/>
-                  </a:ext>
-                </a:extLst>
               </a:tr>
               <a:tr h="438912">
                 <a:tc>
@@ -24637,11 +23140,6 @@
                     </a:solidFill>
                   </a:tcPr>
                 </a:tc>
-                <a:extLst>
-                  <a:ext uri="{0D108BD9-81ED-4DB2-BD59-A6C34878D82A}">
-                    <a16:rowId xmlns:a16="http://schemas.microsoft.com/office/drawing/2014/main" val="10006"/>
-                  </a:ext>
-                </a:extLst>
               </a:tr>
               <a:tr h="438912">
                 <a:tc>
@@ -24713,11 +23211,6 @@
                     </a:solidFill>
                   </a:tcPr>
                 </a:tc>
-                <a:extLst>
-                  <a:ext uri="{0D108BD9-81ED-4DB2-BD59-A6C34878D82A}">
-                    <a16:rowId xmlns:a16="http://schemas.microsoft.com/office/drawing/2014/main" val="10007"/>
-                  </a:ext>
-                </a:extLst>
               </a:tr>
             </a:tbl>
           </a:graphicData>
@@ -24731,8 +23224,8 @@
         </p:nvSpPr>
         <p:spPr>
           <a:xfrm>
-            <a:off x="320040" y="4700016"/>
-            <a:ext cx="11548872" cy="502920"/>
+            <a:off x="320040" y="4983480"/>
+            <a:ext cx="11521440" cy="914400"/>
           </a:xfrm>
           <a:prstGeom prst="rect">
             <a:avLst/>
@@ -24763,7 +23256,6 @@
           <a:lstStyle/>
           <a:p>
             <a:pPr algn="ctr"/>
-            <a:endParaRPr/>
           </a:p>
         </p:txBody>
       </p:sp>
@@ -24775,8 +23267,8 @@
         </p:nvSpPr>
         <p:spPr>
           <a:xfrm>
-            <a:off x="502920" y="4764024"/>
-            <a:ext cx="11155680" cy="384048"/>
+            <a:off x="502920" y="5047488"/>
+            <a:ext cx="11155680" cy="804672"/>
           </a:xfrm>
           <a:prstGeom prst="rect">
             <a:avLst/>
@@ -24791,13 +23283,25 @@
           <a:p>
             <a:pPr algn="l"/>
             <a:r>
-              <a:rPr sz="1200" b="0" i="0">
+              <a:rPr sz="1300" b="0" i="0">
                 <a:solidFill>
                   <a:srgbClr val="1A1A2E"/>
                 </a:solidFill>
                 <a:latin typeface="游ゴシック"/>
               </a:rPr>
-              <a:t>「単一 loop()」ではなく millis() による周期分割で処理の干渉を防止。グローバル構造体 GlobalData (G) でタスク間データを共有（PLC の D/M デバイス設計に着想）</a:t>
+              <a:t>・「単一 loop()」ではなく millis() による周期分割で処理の干渉を防止</a:t>
+            </a:r>
+          </a:p>
+          <a:p>
+            <a:pPr algn="l"/>
+            <a:r>
+              <a:rPr sz="1300" b="0" i="0">
+                <a:solidFill>
+                  <a:srgbClr val="1A1A2E"/>
+                </a:solidFill>
+                <a:latin typeface="游ゴシック"/>
+              </a:rPr>
+              <a:t>・グローバル構造体 GlobalData (G) で各タスク間のデータを共有（PLC の D/M デバイス設計に着想）</a:t>
             </a:r>
           </a:p>
         </p:txBody>
@@ -24811,7 +23315,7 @@
 </file>
 
 <file path=ppt/slides/slide9.xml><?xml version="1.0" encoding="utf-8"?>
-<p:sld xmlns:a="http://schemas.openxmlformats.org/drawingml/2006/main" xmlns:r="http://schemas.openxmlformats.org/officeDocument/2006/relationships" xmlns:p="http://schemas.openxmlformats.org/presentationml/2006/main">
+<p:sld xmlns:a="http://schemas.openxmlformats.org/drawingml/2006/main" xmlns:p="http://schemas.openxmlformats.org/presentationml/2006/main" xmlns:r="http://schemas.openxmlformats.org/officeDocument/2006/relationships">
   <p:cSld>
     <p:spTree>
       <p:nvGrpSpPr>
@@ -24819,14 +23323,7 @@
         <p:cNvGrpSpPr/>
         <p:nvPr/>
       </p:nvGrpSpPr>
-      <p:grpSpPr>
-        <a:xfrm>
-          <a:off x="0" y="0"/>
-          <a:ext cx="0" cy="0"/>
-          <a:chOff x="0" y="0"/>
-          <a:chExt cx="0" cy="0"/>
-        </a:xfrm>
-      </p:grpSpPr>
+      <p:grpSpPr/>
       <p:sp>
         <p:nvSpPr>
           <p:cNvPr id="2" name="Rectangle 1"/>
@@ -24867,7 +23364,6 @@
           <a:lstStyle/>
           <a:p>
             <a:pPr algn="ctr"/>
-            <a:endParaRPr/>
           </a:p>
         </p:txBody>
       </p:sp>
@@ -24981,7 +23477,6 @@
           <a:lstStyle/>
           <a:p>
             <a:pPr algn="ctr"/>
-            <a:endParaRPr/>
           </a:p>
         </p:txBody>
       </p:sp>
@@ -25095,7 +23590,6 @@
           <a:lstStyle/>
           <a:p>
             <a:pPr algn="ctr"/>
-            <a:endParaRPr/>
           </a:p>
         </p:txBody>
       </p:sp>
@@ -25280,7 +23774,6 @@
           <a:lstStyle/>
           <a:p>
             <a:pPr algn="ctr"/>
-            <a:endParaRPr/>
           </a:p>
         </p:txBody>
       </p:sp>
@@ -25464,7 +23957,6 @@
           <a:lstStyle/>
           <a:p>
             <a:pPr algn="ctr"/>
-            <a:endParaRPr/>
           </a:p>
         </p:txBody>
       </p:sp>
@@ -25648,7 +24140,6 @@
           <a:lstStyle/>
           <a:p>
             <a:pPr algn="ctr"/>
-            <a:endParaRPr/>
           </a:p>
         </p:txBody>
       </p:sp>
@@ -25777,34 +24268,10 @@
                 <a:tableStyleId>{5C22544A-7EE6-4342-B048-85BDC9FD1C3A}</a:tableStyleId>
               </a:tblPr>
               <a:tblGrid>
-                <a:gridCol w="1828800">
-                  <a:extLst>
-                    <a:ext uri="{9D8B030D-6E8A-4147-A177-3AD203B41FA5}">
-                      <a16:colId xmlns:a16="http://schemas.microsoft.com/office/drawing/2014/main" val="20000"/>
-                    </a:ext>
-                  </a:extLst>
-                </a:gridCol>
-                <a:gridCol w="1828800">
-                  <a:extLst>
-                    <a:ext uri="{9D8B030D-6E8A-4147-A177-3AD203B41FA5}">
-                      <a16:colId xmlns:a16="http://schemas.microsoft.com/office/drawing/2014/main" val="20001"/>
-                    </a:ext>
-                  </a:extLst>
-                </a:gridCol>
-                <a:gridCol w="3657600">
-                  <a:extLst>
-                    <a:ext uri="{9D8B030D-6E8A-4147-A177-3AD203B41FA5}">
-                      <a16:colId xmlns:a16="http://schemas.microsoft.com/office/drawing/2014/main" val="20002"/>
-                    </a:ext>
-                  </a:extLst>
-                </a:gridCol>
-                <a:gridCol w="4206240">
-                  <a:extLst>
-                    <a:ext uri="{9D8B030D-6E8A-4147-A177-3AD203B41FA5}">
-                      <a16:colId xmlns:a16="http://schemas.microsoft.com/office/drawing/2014/main" val="20003"/>
-                    </a:ext>
-                  </a:extLst>
-                </a:gridCol>
+                <a:gridCol w="1828800"/>
+                <a:gridCol w="1828800"/>
+                <a:gridCol w="3657600"/>
+                <a:gridCol w="4206240"/>
               </a:tblGrid>
               <a:tr h="402336">
                 <a:tc>
@@ -25899,11 +24366,6 @@
                     </a:solidFill>
                   </a:tcPr>
                 </a:tc>
-                <a:extLst>
-                  <a:ext uri="{0D108BD9-81ED-4DB2-BD59-A6C34878D82A}">
-                    <a16:rowId xmlns:a16="http://schemas.microsoft.com/office/drawing/2014/main" val="10000"/>
-                  </a:ext>
-                </a:extLst>
               </a:tr>
               <a:tr h="402336">
                 <a:tc>
@@ -25998,11 +24460,6 @@
                     </a:solidFill>
                   </a:tcPr>
                 </a:tc>
-                <a:extLst>
-                  <a:ext uri="{0D108BD9-81ED-4DB2-BD59-A6C34878D82A}">
-                    <a16:rowId xmlns:a16="http://schemas.microsoft.com/office/drawing/2014/main" val="10001"/>
-                  </a:ext>
-                </a:extLst>
               </a:tr>
               <a:tr h="402336">
                 <a:tc>
@@ -26097,11 +24554,6 @@
                     </a:solidFill>
                   </a:tcPr>
                 </a:tc>
-                <a:extLst>
-                  <a:ext uri="{0D108BD9-81ED-4DB2-BD59-A6C34878D82A}">
-                    <a16:rowId xmlns:a16="http://schemas.microsoft.com/office/drawing/2014/main" val="10002"/>
-                  </a:ext>
-                </a:extLst>
               </a:tr>
               <a:tr h="402336">
                 <a:tc>
@@ -26196,11 +24648,6 @@
                     </a:solidFill>
                   </a:tcPr>
                 </a:tc>
-                <a:extLst>
-                  <a:ext uri="{0D108BD9-81ED-4DB2-BD59-A6C34878D82A}">
-                    <a16:rowId xmlns:a16="http://schemas.microsoft.com/office/drawing/2014/main" val="10003"/>
-                  </a:ext>
-                </a:extLst>
               </a:tr>
               <a:tr h="402336">
                 <a:tc>
@@ -26295,11 +24742,6 @@
                     </a:solidFill>
                   </a:tcPr>
                 </a:tc>
-                <a:extLst>
-                  <a:ext uri="{0D108BD9-81ED-4DB2-BD59-A6C34878D82A}">
-                    <a16:rowId xmlns:a16="http://schemas.microsoft.com/office/drawing/2014/main" val="10004"/>
-                  </a:ext>
-                </a:extLst>
               </a:tr>
               <a:tr h="402336">
                 <a:tc>
@@ -26394,11 +24836,6 @@
                     </a:solidFill>
                   </a:tcPr>
                 </a:tc>
-                <a:extLst>
-                  <a:ext uri="{0D108BD9-81ED-4DB2-BD59-A6C34878D82A}">
-                    <a16:rowId xmlns:a16="http://schemas.microsoft.com/office/drawing/2014/main" val="10005"/>
-                  </a:ext>
-                </a:extLst>
               </a:tr>
             </a:tbl>
           </a:graphicData>
